--- a/presentation_1.pptx
+++ b/presentation_1.pptx
@@ -6,14 +6,18 @@
     <p:sldMasterId id="2147483655" r:id="rId2"/>
   </p:sldMasterIdLst>
   <p:notesMasterIdLst>
-    <p:notesMasterId r:id="rId8"/>
+    <p:notesMasterId r:id="rId12"/>
   </p:notesMasterIdLst>
   <p:sldIdLst>
     <p:sldId id="266" r:id="rId3"/>
-    <p:sldId id="261" r:id="rId4"/>
-    <p:sldId id="262" r:id="rId5"/>
-    <p:sldId id="264" r:id="rId6"/>
-    <p:sldId id="263" r:id="rId7"/>
+    <p:sldId id="258" r:id="rId4"/>
+    <p:sldId id="269" r:id="rId5"/>
+    <p:sldId id="259" r:id="rId6"/>
+    <p:sldId id="261" r:id="rId7"/>
+    <p:sldId id="267" r:id="rId8"/>
+    <p:sldId id="262" r:id="rId9"/>
+    <p:sldId id="264" r:id="rId10"/>
+    <p:sldId id="263" r:id="rId11"/>
   </p:sldIdLst>
   <p:sldSz cx="9144000" cy="5143500" type="screen16x9"/>
   <p:notesSz cx="5143500" cy="9144000"/>
@@ -112,6 +116,9 @@
   <p:extLst>
     <p:ext uri="{EFAFB233-063F-42B5-8137-9DF3F51BA10A}">
       <p15:sldGuideLst xmlns:p15="http://schemas.microsoft.com/office/powerpoint/2012/main"/>
+    </p:ext>
+    <p:ext uri="{2D200454-40CA-4A62-9FC3-DE9A4176ACB9}">
+      <p15:notesGuideLst xmlns:p15="http://schemas.microsoft.com/office/powerpoint/2012/main"/>
     </p:ext>
   </p:extLst>
 </p:presentation>
@@ -242,6 +249,258 @@
 </p:notesMaster>
 </file>
 
+<file path=ppt/notesSlides/notesSlide1.xml><?xml version="1.0" encoding="utf-8"?>
+<p:notes xmlns:a="http://schemas.openxmlformats.org/drawingml/2006/main" xmlns:r="http://schemas.openxmlformats.org/officeDocument/2006/relationships" xmlns:p="http://schemas.openxmlformats.org/presentationml/2006/main">
+  <p:cSld>
+    <p:spTree>
+      <p:nvGrpSpPr>
+        <p:cNvPr id="1" name=""/>
+        <p:cNvGrpSpPr/>
+        <p:nvPr/>
+      </p:nvGrpSpPr>
+      <p:grpSpPr>
+        <a:xfrm>
+          <a:off x="0" y="0"/>
+          <a:ext cx="0" cy="0"/>
+          <a:chOff x="0" y="0"/>
+          <a:chExt cx="0" cy="0"/>
+        </a:xfrm>
+      </p:grpSpPr>
+      <p:sp>
+        <p:nvSpPr>
+          <p:cNvPr id="2" name="Slide Image Placeholder 1"/>
+          <p:cNvSpPr>
+            <a:spLocks noGrp="1" noRot="1" noChangeAspect="1"/>
+          </p:cNvSpPr>
+          <p:nvPr>
+            <p:ph type="sldImg"/>
+          </p:nvPr>
+        </p:nvSpPr>
+        <p:spPr/>
+      </p:sp>
+      <p:sp>
+        <p:nvSpPr>
+          <p:cNvPr id="3" name="Notes Placeholder 2"/>
+          <p:cNvSpPr>
+            <a:spLocks noGrp="1"/>
+          </p:cNvSpPr>
+          <p:nvPr>
+            <p:ph type="body" idx="1"/>
+          </p:nvPr>
+        </p:nvSpPr>
+        <p:spPr/>
+        <p:txBody>
+          <a:bodyPr/>
+          <a:lstStyle/>
+          <a:p>
+            <a:endParaRPr lang="en-US" dirty="0"/>
+          </a:p>
+        </p:txBody>
+      </p:sp>
+      <p:sp>
+        <p:nvSpPr>
+          <p:cNvPr id="4" name="Slide Number Placeholder 3"/>
+          <p:cNvSpPr>
+            <a:spLocks noGrp="1"/>
+          </p:cNvSpPr>
+          <p:nvPr>
+            <p:ph type="sldNum" sz="quarter" idx="10"/>
+          </p:nvPr>
+        </p:nvSpPr>
+        <p:spPr/>
+        <p:txBody>
+          <a:bodyPr/>
+          <a:lstStyle/>
+          <a:p>
+            <a:fld id="{F7021451-1387-4CA6-816F-3879F97B5CBC}" type="slidenum">
+              <a:rPr lang="en-US"/>
+              <a:t>2</a:t>
+            </a:fld>
+            <a:endParaRPr lang="en-US"/>
+          </a:p>
+        </p:txBody>
+      </p:sp>
+    </p:spTree>
+    <p:extLst>
+      <p:ext uri="{BB962C8B-B14F-4D97-AF65-F5344CB8AC3E}">
+        <p14:creationId xmlns:p14="http://schemas.microsoft.com/office/powerpoint/2010/main" val="1024086991"/>
+      </p:ext>
+    </p:extLst>
+  </p:cSld>
+  <p:clrMapOvr>
+    <a:masterClrMapping/>
+  </p:clrMapOvr>
+</p:notes>
+</file>
+
+<file path=ppt/notesSlides/notesSlide2.xml><?xml version="1.0" encoding="utf-8"?>
+<p:notes xmlns:a="http://schemas.openxmlformats.org/drawingml/2006/main" xmlns:r="http://schemas.openxmlformats.org/officeDocument/2006/relationships" xmlns:p="http://schemas.openxmlformats.org/presentationml/2006/main">
+  <p:cSld>
+    <p:spTree>
+      <p:nvGrpSpPr>
+        <p:cNvPr id="1" name=""/>
+        <p:cNvGrpSpPr/>
+        <p:nvPr/>
+      </p:nvGrpSpPr>
+      <p:grpSpPr>
+        <a:xfrm>
+          <a:off x="0" y="0"/>
+          <a:ext cx="0" cy="0"/>
+          <a:chOff x="0" y="0"/>
+          <a:chExt cx="0" cy="0"/>
+        </a:xfrm>
+      </p:grpSpPr>
+      <p:sp>
+        <p:nvSpPr>
+          <p:cNvPr id="2" name="Slide Image Placeholder 1"/>
+          <p:cNvSpPr>
+            <a:spLocks noGrp="1" noRot="1" noChangeAspect="1"/>
+          </p:cNvSpPr>
+          <p:nvPr>
+            <p:ph type="sldImg"/>
+          </p:nvPr>
+        </p:nvSpPr>
+        <p:spPr/>
+      </p:sp>
+      <p:sp>
+        <p:nvSpPr>
+          <p:cNvPr id="3" name="Notes Placeholder 2"/>
+          <p:cNvSpPr>
+            <a:spLocks noGrp="1"/>
+          </p:cNvSpPr>
+          <p:nvPr>
+            <p:ph type="body" idx="1"/>
+          </p:nvPr>
+        </p:nvSpPr>
+        <p:spPr/>
+        <p:txBody>
+          <a:bodyPr/>
+          <a:lstStyle/>
+          <a:p>
+            <a:endParaRPr lang="en-US" dirty="0"/>
+          </a:p>
+        </p:txBody>
+      </p:sp>
+      <p:sp>
+        <p:nvSpPr>
+          <p:cNvPr id="4" name="Slide Number Placeholder 3"/>
+          <p:cNvSpPr>
+            <a:spLocks noGrp="1"/>
+          </p:cNvSpPr>
+          <p:nvPr>
+            <p:ph type="sldNum" sz="quarter" idx="10"/>
+          </p:nvPr>
+        </p:nvSpPr>
+        <p:spPr/>
+        <p:txBody>
+          <a:bodyPr/>
+          <a:lstStyle/>
+          <a:p>
+            <a:fld id="{F7021451-1387-4CA6-816F-3879F97B5CBC}" type="slidenum">
+              <a:rPr lang="en-US"/>
+              <a:t>3</a:t>
+            </a:fld>
+            <a:endParaRPr lang="en-US"/>
+          </a:p>
+        </p:txBody>
+      </p:sp>
+    </p:spTree>
+    <p:extLst>
+      <p:ext uri="{BB962C8B-B14F-4D97-AF65-F5344CB8AC3E}">
+        <p14:creationId xmlns:p14="http://schemas.microsoft.com/office/powerpoint/2010/main" val="1024086991"/>
+      </p:ext>
+    </p:extLst>
+  </p:cSld>
+  <p:clrMapOvr>
+    <a:masterClrMapping/>
+  </p:clrMapOvr>
+</p:notes>
+</file>
+
+<file path=ppt/notesSlides/notesSlide3.xml><?xml version="1.0" encoding="utf-8"?>
+<p:notes xmlns:a="http://schemas.openxmlformats.org/drawingml/2006/main" xmlns:r="http://schemas.openxmlformats.org/officeDocument/2006/relationships" xmlns:p="http://schemas.openxmlformats.org/presentationml/2006/main">
+  <p:cSld>
+    <p:spTree>
+      <p:nvGrpSpPr>
+        <p:cNvPr id="1" name=""/>
+        <p:cNvGrpSpPr/>
+        <p:nvPr/>
+      </p:nvGrpSpPr>
+      <p:grpSpPr>
+        <a:xfrm>
+          <a:off x="0" y="0"/>
+          <a:ext cx="0" cy="0"/>
+          <a:chOff x="0" y="0"/>
+          <a:chExt cx="0" cy="0"/>
+        </a:xfrm>
+      </p:grpSpPr>
+      <p:sp>
+        <p:nvSpPr>
+          <p:cNvPr id="2" name="Slide Image Placeholder 1"/>
+          <p:cNvSpPr>
+            <a:spLocks noGrp="1" noRot="1" noChangeAspect="1"/>
+          </p:cNvSpPr>
+          <p:nvPr>
+            <p:ph type="sldImg"/>
+          </p:nvPr>
+        </p:nvSpPr>
+        <p:spPr/>
+      </p:sp>
+      <p:sp>
+        <p:nvSpPr>
+          <p:cNvPr id="3" name="Notes Placeholder 2"/>
+          <p:cNvSpPr>
+            <a:spLocks noGrp="1"/>
+          </p:cNvSpPr>
+          <p:nvPr>
+            <p:ph type="body" idx="1"/>
+          </p:nvPr>
+        </p:nvSpPr>
+        <p:spPr/>
+        <p:txBody>
+          <a:bodyPr/>
+          <a:lstStyle/>
+          <a:p>
+            <a:endParaRPr lang="en-US" dirty="0"/>
+          </a:p>
+        </p:txBody>
+      </p:sp>
+      <p:sp>
+        <p:nvSpPr>
+          <p:cNvPr id="4" name="Slide Number Placeholder 3"/>
+          <p:cNvSpPr>
+            <a:spLocks noGrp="1"/>
+          </p:cNvSpPr>
+          <p:nvPr>
+            <p:ph type="sldNum" sz="quarter" idx="10"/>
+          </p:nvPr>
+        </p:nvSpPr>
+        <p:spPr/>
+        <p:txBody>
+          <a:bodyPr/>
+          <a:lstStyle/>
+          <a:p>
+            <a:fld id="{F7021451-1387-4CA6-816F-3879F97B5CBC}" type="slidenum">
+              <a:rPr lang="en-US"/>
+              <a:t>4</a:t>
+            </a:fld>
+            <a:endParaRPr lang="en-US"/>
+          </a:p>
+        </p:txBody>
+      </p:sp>
+    </p:spTree>
+    <p:extLst>
+      <p:ext uri="{BB962C8B-B14F-4D97-AF65-F5344CB8AC3E}">
+        <p14:creationId xmlns:p14="http://schemas.microsoft.com/office/powerpoint/2010/main" val="1024086991"/>
+      </p:ext>
+    </p:extLst>
+  </p:cSld>
+  <p:clrMapOvr>
+    <a:masterClrMapping/>
+  </p:clrMapOvr>
+</p:notes>
+</file>
+
 <file path=ppt/slideLayouts/slideLayout1.xml><?xml version="1.0" encoding="utf-8"?>
 <p:sldLayout xmlns:a="http://schemas.openxmlformats.org/drawingml/2006/main" xmlns:r="http://schemas.openxmlformats.org/officeDocument/2006/relationships" xmlns:p="http://schemas.openxmlformats.org/presentationml/2006/main" preserve="1">
   <p:cSld name="Image Content">
@@ -293,17 +552,14 @@
           <a:lstStyle/>
           <a:p>
             <a:pPr algn="l"/>
-            <a:r>
-              <a:rPr lang="it-IT" sz="2600" b="1" dirty="0">
-                <a:solidFill>
-                  <a:srgbClr val="1A1A1A"/>
-                </a:solidFill>
-                <a:latin typeface="Calibri"/>
-                <a:ea typeface="Calibri"/>
-                <a:cs typeface="Calibri"/>
-              </a:rPr>
-              <a:t>Slide Title</a:t>
-            </a:r>
+            <a:endParaRPr lang="it-IT" sz="2600" b="1" dirty="0">
+              <a:solidFill>
+                <a:srgbClr val="1A1A1A"/>
+              </a:solidFill>
+              <a:latin typeface="Calibri"/>
+              <a:ea typeface="Calibri"/>
+              <a:cs typeface="Calibri"/>
+            </a:endParaRPr>
           </a:p>
         </p:txBody>
       </p:sp>
@@ -806,7 +1062,7 @@
 
 <file path=ppt/slideLayouts/slideLayout3.xml><?xml version="1.0" encoding="utf-8"?>
 <p:sldLayout xmlns:a="http://schemas.openxmlformats.org/drawingml/2006/main" xmlns:r="http://schemas.openxmlformats.org/officeDocument/2006/relationships" xmlns:p="http://schemas.openxmlformats.org/presentationml/2006/main" preserve="1" userDrawn="1">
-  <p:cSld name="Standard Content">
+  <p:cSld name="standard content slide">
     <p:spTree>
       <p:nvGrpSpPr>
         <p:cNvPr id="1" name=""/>
@@ -875,14 +1131,14 @@
       </p:cxnSp>
       <p:sp>
         <p:nvSpPr>
-          <p:cNvPr id="12" name="Footer Left"/>
+          <p:cNvPr id="13" name="Footer Right"/>
           <p:cNvSpPr txBox="1"/>
           <p:nvPr userDrawn="1"/>
         </p:nvSpPr>
         <p:spPr>
           <a:xfrm>
-            <a:off x="317500" y="4851400"/>
-            <a:ext cx="7772400" cy="203200"/>
+            <a:off x="8407400" y="4851400"/>
+            <a:ext cx="457200" cy="203200"/>
           </a:xfrm>
           <a:prstGeom prst="rect">
             <a:avLst/>
@@ -893,7 +1149,7 @@
           <a:bodyPr wrap="square" lIns="0" tIns="0" rIns="0" bIns="0" anchor="ctr"/>
           <a:lstStyle/>
           <a:p>
-            <a:pPr algn="l"/>
+            <a:pPr algn="r"/>
             <a:r>
               <a:rPr lang="en-US" sz="900" dirty="0">
                 <a:solidFill>
@@ -901,68 +1157,11 @@
                 </a:solidFill>
                 <a:latin typeface="Calibri" pitchFamily="34" charset="0"/>
               </a:rPr>
-              <a:t>Author  ·  Presentation Title</a:t>
+              <a:t># / N</a:t>
             </a:r>
           </a:p>
         </p:txBody>
       </p:sp>
-      <p:sp>
-        <p:nvSpPr>
-          <p:cNvPr id="13" name="Footer Right"/>
-          <p:cNvSpPr txBox="1"/>
-          <p:nvPr userDrawn="1"/>
-        </p:nvSpPr>
-        <p:spPr>
-          <a:xfrm>
-            <a:off x="8407400" y="4851400"/>
-            <a:ext cx="457200" cy="203200"/>
-          </a:xfrm>
-          <a:prstGeom prst="rect">
-            <a:avLst/>
-          </a:prstGeom>
-          <a:noFill/>
-        </p:spPr>
-        <p:txBody>
-          <a:bodyPr wrap="square" lIns="0" tIns="0" rIns="0" bIns="0" anchor="ctr"/>
-          <a:lstStyle/>
-          <a:p>
-            <a:pPr algn="r"/>
-            <a:r>
-              <a:rPr lang="en-US" sz="900" dirty="0">
-                <a:solidFill>
-                  <a:srgbClr val="BBBBBB"/>
-                </a:solidFill>
-                <a:latin typeface="Calibri" pitchFamily="34" charset="0"/>
-              </a:rPr>
-              <a:t># / N</a:t>
-            </a:r>
-          </a:p>
-        </p:txBody>
-      </p:sp>
-      <p:pic>
-        <p:nvPicPr>
-          <p:cNvPr id="14" name="Unimore Logo"/>
-          <p:cNvPicPr>
-            <a:picLocks noChangeAspect="1"/>
-          </p:cNvPicPr>
-          <p:nvPr userDrawn="1"/>
-        </p:nvPicPr>
-        <p:blipFill>
-          <a:blip r:embed="rId2"/>
-          <a:stretch>
-            <a:fillRect/>
-          </a:stretch>
-        </p:blipFill>
-        <p:spPr>
-          <a:xfrm>
-            <a:off x="7442200" y="4572000"/>
-            <a:ext cx="1524000" cy="548640"/>
-          </a:xfrm>
-          <a:prstGeom prst="rect">
-            <a:avLst/>
-          </a:prstGeom>
-        </p:spPr>
-      </p:pic>
       <p:sp>
         <p:nvSpPr>
           <p:cNvPr id="2" name="CasellaDiTesto 1">
@@ -992,96 +1191,9 @@
           <a:lstStyle/>
           <a:p>
             <a:pPr algn="l"/>
-            <a:r>
-              <a:rPr lang="it-IT" sz="2600" b="1" dirty="0">
-                <a:solidFill>
-                  <a:srgbClr val="1A1A1A"/>
-                </a:solidFill>
-                <a:latin typeface="Calibri"/>
-                <a:ea typeface="Calibri"/>
-                <a:cs typeface="Calibri"/>
-              </a:rPr>
-              <a:t>Slide Title</a:t>
-            </a:r>
-          </a:p>
-        </p:txBody>
-      </p:sp>
-      <p:sp>
-        <p:nvSpPr>
-          <p:cNvPr id="3" name="CasellaDiTesto 2">
-            <a:extLst>
-              <a:ext uri="{FF2B5EF4-FFF2-40B4-BE49-F238E27FC236}">
-                <a16:creationId xmlns:a16="http://schemas.microsoft.com/office/drawing/2014/main" id="{BCE73FEE-4442-63E7-F583-7C5268138838}"/>
-              </a:ext>
-            </a:extLst>
-          </p:cNvPr>
-          <p:cNvSpPr txBox="1"/>
-          <p:nvPr userDrawn="1"/>
-        </p:nvSpPr>
-        <p:spPr>
-          <a:xfrm>
-            <a:off x="368300" y="914400"/>
-            <a:ext cx="8382000" cy="3556000"/>
-          </a:xfrm>
-          <a:prstGeom prst="rect">
-            <a:avLst/>
-          </a:prstGeom>
-          <a:noFill/>
-        </p:spPr>
-        <p:txBody>
-          <a:bodyPr vertOverflow="overflow" vert="horz" wrap="square" rtlCol="0" anchor="t">
-            <a:noAutofit/>
-          </a:bodyPr>
-          <a:lstStyle/>
-          <a:p>
-            <a:pPr algn="l"/>
-            <a:r>
-              <a:rPr lang="it-IT" sz="1600" dirty="0">
-                <a:solidFill>
-                  <a:srgbClr val="333333"/>
-                </a:solidFill>
-                <a:latin typeface="Calibri"/>
-                <a:ea typeface="Calibri"/>
-                <a:cs typeface="Calibri"/>
-              </a:rPr>
-              <a:t>Content </a:t>
-            </a:r>
-            <a:r>
-              <a:rPr lang="it-IT" sz="1600" dirty="0" err="1">
-                <a:solidFill>
-                  <a:srgbClr val="333333"/>
-                </a:solidFill>
-                <a:latin typeface="Calibri"/>
-                <a:ea typeface="Calibri"/>
-                <a:cs typeface="Calibri"/>
-              </a:rPr>
-              <a:t>goes</a:t>
-            </a:r>
-            <a:r>
-              <a:rPr lang="it-IT" sz="1600" dirty="0">
-                <a:solidFill>
-                  <a:srgbClr val="333333"/>
-                </a:solidFill>
-                <a:latin typeface="Calibri"/>
-                <a:ea typeface="Calibri"/>
-                <a:cs typeface="Calibri"/>
-              </a:rPr>
-              <a:t> </a:t>
-            </a:r>
-            <a:r>
-              <a:rPr lang="it-IT" sz="1600" dirty="0" err="1">
-                <a:solidFill>
-                  <a:srgbClr val="333333"/>
-                </a:solidFill>
-                <a:latin typeface="Calibri"/>
-                <a:ea typeface="Calibri"/>
-                <a:cs typeface="Calibri"/>
-              </a:rPr>
-              <a:t>here</a:t>
-            </a:r>
-            <a:endParaRPr lang="it-IT" sz="1600" dirty="0">
+            <a:endParaRPr lang="it-IT" sz="2600" b="1" dirty="0">
               <a:solidFill>
-                <a:srgbClr val="333333"/>
+                <a:srgbClr val="1A1A1A"/>
               </a:solidFill>
               <a:latin typeface="Calibri"/>
               <a:ea typeface="Calibri"/>
@@ -1104,6 +1216,104 @@
 </file>
 
 <file path=ppt/slideLayouts/slideLayout4.xml><?xml version="1.0" encoding="utf-8"?>
+<p:sldLayout xmlns:a="http://schemas.openxmlformats.org/drawingml/2006/main" xmlns:r="http://schemas.openxmlformats.org/officeDocument/2006/relationships" xmlns:p="http://schemas.openxmlformats.org/presentationml/2006/main" preserve="1" userDrawn="1">
+  <p:cSld name="Layout personalizzato">
+    <p:spTree>
+      <p:nvGrpSpPr>
+        <p:cNvPr id="1" name=""/>
+        <p:cNvGrpSpPr/>
+        <p:nvPr/>
+      </p:nvGrpSpPr>
+      <p:grpSpPr>
+        <a:xfrm>
+          <a:off x="0" y="0"/>
+          <a:ext cx="0" cy="0"/>
+          <a:chOff x="0" y="0"/>
+          <a:chExt cx="0" cy="0"/>
+        </a:xfrm>
+      </p:grpSpPr>
+      <p:sp>
+        <p:nvSpPr>
+          <p:cNvPr id="2" name="Titolo 1">
+            <a:extLst>
+              <a:ext uri="{FF2B5EF4-FFF2-40B4-BE49-F238E27FC236}">
+                <a16:creationId xmlns:a16="http://schemas.microsoft.com/office/drawing/2014/main" id="{F4691527-7949-E352-4491-938A6C3CA634}"/>
+              </a:ext>
+            </a:extLst>
+          </p:cNvPr>
+          <p:cNvSpPr>
+            <a:spLocks noGrp="1"/>
+          </p:cNvSpPr>
+          <p:nvPr>
+            <p:ph type="title"/>
+          </p:nvPr>
+        </p:nvSpPr>
+        <p:spPr>
+          <a:xfrm>
+            <a:off x="628650" y="274638"/>
+            <a:ext cx="7886700" cy="993775"/>
+          </a:xfrm>
+          <a:prstGeom prst="rect">
+            <a:avLst/>
+          </a:prstGeom>
+        </p:spPr>
+        <p:txBody>
+          <a:bodyPr/>
+          <a:lstStyle/>
+          <a:p>
+            <a:endParaRPr lang="it-IT" dirty="0"/>
+          </a:p>
+        </p:txBody>
+      </p:sp>
+    </p:spTree>
+    <p:extLst>
+      <p:ext uri="{BB962C8B-B14F-4D97-AF65-F5344CB8AC3E}">
+        <p14:creationId xmlns:p14="http://schemas.microsoft.com/office/powerpoint/2010/main" val="1812163174"/>
+      </p:ext>
+    </p:extLst>
+  </p:cSld>
+  <p:clrMapOvr>
+    <a:masterClrMapping/>
+  </p:clrMapOvr>
+</p:sldLayout>
+</file>
+
+<file path=ppt/slideLayouts/slideLayout5.xml><?xml version="1.0" encoding="utf-8"?>
+<p:sldLayout xmlns:a="http://schemas.openxmlformats.org/drawingml/2006/main" xmlns:r="http://schemas.openxmlformats.org/officeDocument/2006/relationships" xmlns:p="http://schemas.openxmlformats.org/presentationml/2006/main">
+  <p:cSld name="DEFAULT">
+    <p:bg>
+      <p:bgRef idx="1001">
+        <a:schemeClr val="bg1"/>
+      </p:bgRef>
+    </p:bg>
+    <p:spTree>
+      <p:nvGrpSpPr>
+        <p:cNvPr id="1" name=""/>
+        <p:cNvGrpSpPr/>
+        <p:nvPr/>
+      </p:nvGrpSpPr>
+      <p:grpSpPr>
+        <a:xfrm>
+          <a:off x="0" y="0"/>
+          <a:ext cx="0" cy="0"/>
+          <a:chOff x="0" y="0"/>
+          <a:chExt cx="0" cy="0"/>
+        </a:xfrm>
+      </p:grpSpPr>
+    </p:spTree>
+    <p:extLst>
+      <p:ext uri="{BB962C8B-B14F-4D97-AF65-F5344CB8AC3E}">
+        <p14:creationId xmlns:p14="http://schemas.microsoft.com/office/powerpoint/2010/main" val="3034323842"/>
+      </p:ext>
+    </p:extLst>
+  </p:cSld>
+  <p:clrMapOvr>
+    <a:masterClrMapping/>
+  </p:clrMapOvr>
+</p:sldLayout>
+</file>
+
+<file path=ppt/slideLayouts/slideLayout6.xml><?xml version="1.0" encoding="utf-8"?>
 <p:sldLayout xmlns:a="http://schemas.openxmlformats.org/drawingml/2006/main" xmlns:r="http://schemas.openxmlformats.org/officeDocument/2006/relationships" xmlns:p="http://schemas.openxmlformats.org/presentationml/2006/main" preserve="1" userDrawn="1">
   <p:cSld name="Frontespizio">
     <p:bg>
@@ -1594,7 +1804,7 @@
 </p:sldLayout>
 </file>
 
-<file path=ppt/slideLayouts/slideLayout5.xml><?xml version="1.0" encoding="utf-8"?>
+<file path=ppt/slideLayouts/slideLayout7.xml><?xml version="1.0" encoding="utf-8"?>
 <p:sldLayout xmlns:a="http://schemas.openxmlformats.org/drawingml/2006/main" xmlns:r="http://schemas.openxmlformats.org/officeDocument/2006/relationships" xmlns:p="http://schemas.openxmlformats.org/presentationml/2006/main" preserve="1" userDrawn="1">
   <p:cSld name="Layout personalizzato">
     <p:spTree>
@@ -2088,6 +2298,41 @@
     <p:extLst>
       <p:ext uri="{BB962C8B-B14F-4D97-AF65-F5344CB8AC3E}">
         <p14:creationId xmlns:p14="http://schemas.microsoft.com/office/powerpoint/2010/main" val="832347059"/>
+      </p:ext>
+    </p:extLst>
+  </p:cSld>
+  <p:clrMapOvr>
+    <a:masterClrMapping/>
+  </p:clrMapOvr>
+</p:sldLayout>
+</file>
+
+<file path=ppt/slideLayouts/slideLayout8.xml><?xml version="1.0" encoding="utf-8"?>
+<p:sldLayout xmlns:a="http://schemas.openxmlformats.org/drawingml/2006/main" xmlns:r="http://schemas.openxmlformats.org/officeDocument/2006/relationships" xmlns:p="http://schemas.openxmlformats.org/presentationml/2006/main">
+  <p:cSld name="DEFAULT">
+    <p:bg>
+      <p:bgRef idx="1001">
+        <a:schemeClr val="bg1"/>
+      </p:bgRef>
+    </p:bg>
+    <p:spTree>
+      <p:nvGrpSpPr>
+        <p:cNvPr id="1" name=""/>
+        <p:cNvGrpSpPr/>
+        <p:nvPr/>
+      </p:nvGrpSpPr>
+      <p:grpSpPr>
+        <a:xfrm>
+          <a:off x="0" y="0"/>
+          <a:ext cx="0" cy="0"/>
+          <a:chOff x="0" y="0"/>
+          <a:chExt cx="0" cy="0"/>
+        </a:xfrm>
+      </p:grpSpPr>
+    </p:spTree>
+    <p:extLst>
+      <p:ext uri="{BB962C8B-B14F-4D97-AF65-F5344CB8AC3E}">
+        <p14:creationId xmlns:p14="http://schemas.microsoft.com/office/powerpoint/2010/main" val="3882710135"/>
       </p:ext>
     </p:extLst>
   </p:cSld>
@@ -2121,70 +2366,6 @@
       </p:grpSpPr>
       <p:sp>
         <p:nvSpPr>
-          <p:cNvPr id="2" name="Accent Bar">
-            <a:extLst>
-              <a:ext uri="{FF2B5EF4-FFF2-40B4-BE49-F238E27FC236}">
-                <a16:creationId xmlns:a16="http://schemas.microsoft.com/office/drawing/2014/main" id="{11F4AAE2-3933-200D-370A-2C7E2052F542}"/>
-              </a:ext>
-            </a:extLst>
-          </p:cNvPr>
-          <p:cNvSpPr/>
-          <p:nvPr userDrawn="1"/>
-        </p:nvSpPr>
-        <p:spPr>
-          <a:xfrm>
-            <a:off x="317500" y="241300"/>
-            <a:ext cx="63500" cy="457200"/>
-          </a:xfrm>
-          <a:prstGeom prst="rect">
-            <a:avLst/>
-          </a:prstGeom>
-          <a:solidFill>
-            <a:srgbClr val="C8472C"/>
-          </a:solidFill>
-          <a:ln w="6350">
-            <a:solidFill>
-              <a:srgbClr val="C8472C"/>
-            </a:solidFill>
-          </a:ln>
-        </p:spPr>
-        <p:txBody>
-          <a:bodyPr/>
-          <a:lstStyle/>
-          <a:p>
-            <a:endParaRPr lang="en-US" u="sng"/>
-          </a:p>
-        </p:txBody>
-      </p:sp>
-      <p:cxnSp>
-        <p:nvCxnSpPr>
-          <p:cNvPr id="3" name="Divider Line">
-            <a:extLst>
-              <a:ext uri="{FF2B5EF4-FFF2-40B4-BE49-F238E27FC236}">
-                <a16:creationId xmlns:a16="http://schemas.microsoft.com/office/drawing/2014/main" id="{224E6E87-85A6-72B6-8700-CF61C824351F}"/>
-              </a:ext>
-            </a:extLst>
-          </p:cNvPr>
-          <p:cNvCxnSpPr/>
-          <p:nvPr userDrawn="1"/>
-        </p:nvCxnSpPr>
-        <p:spPr>
-          <a:xfrm>
-            <a:off x="317500" y="774700"/>
-            <a:ext cx="8509000" cy="0"/>
-          </a:xfrm>
-          <a:prstGeom prst="line">
-            <a:avLst/>
-          </a:prstGeom>
-          <a:ln w="12700">
-            <a:solidFill>
-              <a:srgbClr val="D6E4F0"/>
-            </a:solidFill>
-          </a:ln>
-        </p:spPr>
-      </p:cxnSp>
-      <p:sp>
-        <p:nvSpPr>
           <p:cNvPr id="4" name="Footer Left">
             <a:extLst>
               <a:ext uri="{FF2B5EF4-FFF2-40B4-BE49-F238E27FC236}">
@@ -2209,16 +2390,21 @@
           <a:bodyPr wrap="square" lIns="0" tIns="0" rIns="0" bIns="0" anchor="ctr"/>
           <a:lstStyle/>
           <a:p>
-            <a:pPr algn="l"/>
-            <a:r>
-              <a:rPr lang="en-US" sz="900" u="sng" dirty="0">
+            <a:pPr marL="0" indent="0" algn="l">
+              <a:buNone/>
+            </a:pPr>
+            <a:r>
+              <a:rPr lang="en-US" sz="900" dirty="0">
                 <a:solidFill>
                   <a:srgbClr val="BBBBBB"/>
                 </a:solidFill>
                 <a:latin typeface="Calibri" pitchFamily="34" charset="0"/>
-              </a:rPr>
-              <a:t>Author  ·  Presentation Title</a:t>
-            </a:r>
+                <a:ea typeface="Calibri" pitchFamily="34" charset="-122"/>
+                <a:cs typeface="Calibri" pitchFamily="34" charset="-120"/>
+              </a:rPr>
+              <a:t>Paolo Spallanzani  ·  Deep RL in Frontier-Based Autonomous Exploration</a:t>
+            </a:r>
+            <a:endParaRPr lang="en-US" sz="900" dirty="0"/>
           </a:p>
         </p:txBody>
       </p:sp>
@@ -2276,64 +2462,21 @@
           <p:nvPr userDrawn="1"/>
         </p:nvPicPr>
         <p:blipFill>
-          <a:blip r:embed="rId5"/>
+          <a:blip r:embed="rId7"/>
           <a:stretch>
             <a:fillRect/>
           </a:stretch>
         </p:blipFill>
         <p:spPr>
           <a:xfrm>
-            <a:off x="7442200" y="4572000"/>
-            <a:ext cx="1524000" cy="548640"/>
+            <a:off x="7557246" y="4613416"/>
+            <a:ext cx="1307353" cy="470647"/>
           </a:xfrm>
           <a:prstGeom prst="rect">
             <a:avLst/>
           </a:prstGeom>
         </p:spPr>
       </p:pic>
-      <p:sp>
-        <p:nvSpPr>
-          <p:cNvPr id="10" name="CasellaDiTesto 9">
-            <a:extLst>
-              <a:ext uri="{FF2B5EF4-FFF2-40B4-BE49-F238E27FC236}">
-                <a16:creationId xmlns:a16="http://schemas.microsoft.com/office/drawing/2014/main" id="{6B349FC4-DBA0-AE5C-FDC3-9CDE9869F941}"/>
-              </a:ext>
-            </a:extLst>
-          </p:cNvPr>
-          <p:cNvSpPr txBox="1"/>
-          <p:nvPr userDrawn="1"/>
-        </p:nvSpPr>
-        <p:spPr>
-          <a:xfrm>
-            <a:off x="508000" y="254000"/>
-            <a:ext cx="8229600" cy="457200"/>
-          </a:xfrm>
-          <a:prstGeom prst="rect">
-            <a:avLst/>
-          </a:prstGeom>
-          <a:noFill/>
-        </p:spPr>
-        <p:txBody>
-          <a:bodyPr vertOverflow="overflow" vert="horz" wrap="square" rtlCol="0" anchor="ctr" anchorCtr="0">
-            <a:noAutofit/>
-          </a:bodyPr>
-          <a:lstStyle/>
-          <a:p>
-            <a:pPr algn="l"/>
-            <a:r>
-              <a:rPr lang="it-IT" sz="2600" b="1" dirty="0">
-                <a:solidFill>
-                  <a:srgbClr val="1A1A1A"/>
-                </a:solidFill>
-                <a:latin typeface="Calibri"/>
-                <a:ea typeface="Calibri"/>
-                <a:cs typeface="Calibri"/>
-              </a:rPr>
-              <a:t>Slide Title</a:t>
-            </a:r>
-          </a:p>
-        </p:txBody>
-      </p:sp>
     </p:spTree>
   </p:cSld>
   <p:clrMap bg1="lt1" tx1="dk1" bg2="lt2" tx2="dk2" accent1="accent1" accent2="accent2" accent3="accent3" accent4="accent4" accent5="accent5" accent6="accent6" hlink="hlink" folHlink="folHlink"/>
@@ -2341,6 +2484,8 @@
     <p:sldLayoutId id="2147483652" r:id="rId1"/>
     <p:sldLayoutId id="2147483650" r:id="rId2"/>
     <p:sldLayoutId id="2147483654" r:id="rId3"/>
+    <p:sldLayoutId id="2147483669" r:id="rId4"/>
+    <p:sldLayoutId id="2147483670" r:id="rId5"/>
   </p:sldLayoutIdLst>
   <p:hf sldNum="0" hdr="0" ftr="0" dt="0"/>
   <p:txStyles>
@@ -2632,6 +2777,7 @@
   <p:sldLayoutIdLst>
     <p:sldLayoutId id="2147483666" r:id="rId1"/>
     <p:sldLayoutId id="2147483667" r:id="rId2"/>
+    <p:sldLayoutId id="2147483668" r:id="rId3"/>
   </p:sldLayoutIdLst>
   <p:txStyles>
     <p:titleStyle>
@@ -2965,10 +3111,312 @@
       </p:grpSpPr>
       <p:sp>
         <p:nvSpPr>
-          <p:cNvPr id="3" name="CasellaDiTesto 2">
+          <p:cNvPr id="3" name="Text 1"/>
+          <p:cNvSpPr/>
+          <p:nvPr/>
+        </p:nvSpPr>
+        <p:spPr>
+          <a:xfrm>
+            <a:off x="8412480" y="4846320"/>
+            <a:ext cx="457200" cy="201168"/>
+          </a:xfrm>
+          <a:prstGeom prst="rect">
+            <a:avLst/>
+          </a:prstGeom>
+          <a:noFill/>
+          <a:ln/>
+        </p:spPr>
+        <p:txBody>
+          <a:bodyPr wrap="square" rtlCol="0" anchor="ctr"/>
+          <a:lstStyle/>
+          <a:p>
+            <a:pPr marL="0" indent="0" algn="r">
+              <a:buNone/>
+            </a:pPr>
+            <a:r>
+              <a:rPr lang="en-US" sz="900" dirty="0">
+                <a:solidFill>
+                  <a:srgbClr val="BBBBBB"/>
+                </a:solidFill>
+                <a:latin typeface="Calibri" pitchFamily="34" charset="0"/>
+                <a:ea typeface="Calibri" pitchFamily="34" charset="-122"/>
+                <a:cs typeface="Calibri" pitchFamily="34" charset="-120"/>
+              </a:rPr>
+              <a:t>3 / 17</a:t>
+            </a:r>
+            <a:endParaRPr lang="en-US" sz="900" dirty="0"/>
+          </a:p>
+        </p:txBody>
+      </p:sp>
+      <p:sp>
+        <p:nvSpPr>
+          <p:cNvPr id="4" name="Shape 2"/>
+          <p:cNvSpPr/>
+          <p:nvPr/>
+        </p:nvSpPr>
+        <p:spPr>
+          <a:xfrm>
+            <a:off x="320040" y="237744"/>
+            <a:ext cx="64008" cy="457200"/>
+          </a:xfrm>
+          <a:prstGeom prst="rect">
+            <a:avLst/>
+          </a:prstGeom>
+          <a:solidFill>
+            <a:srgbClr val="C8472C"/>
+          </a:solidFill>
+          <a:ln w="12700">
+            <a:solidFill>
+              <a:srgbClr val="C8472C"/>
+            </a:solidFill>
+            <a:prstDash val="solid"/>
+          </a:ln>
+        </p:spPr>
+      </p:sp>
+      <p:sp>
+        <p:nvSpPr>
+          <p:cNvPr id="5" name="Text 3"/>
+          <p:cNvSpPr/>
+          <p:nvPr/>
+        </p:nvSpPr>
+        <p:spPr>
+          <a:xfrm>
+            <a:off x="502920" y="256032"/>
+            <a:ext cx="8229600" cy="457200"/>
+          </a:xfrm>
+          <a:prstGeom prst="rect">
+            <a:avLst/>
+          </a:prstGeom>
+          <a:noFill/>
+          <a:ln/>
+        </p:spPr>
+        <p:txBody>
+          <a:bodyPr wrap="square" lIns="0" tIns="0" rIns="0" bIns="0" rtlCol="0" anchor="ctr"/>
+          <a:lstStyle/>
+          <a:p>
+            <a:pPr marL="0" indent="0" algn="l">
+              <a:buNone/>
+            </a:pPr>
+            <a:endParaRPr lang="en-US" sz="2600" dirty="0"/>
+          </a:p>
+        </p:txBody>
+      </p:sp>
+      <p:sp>
+        <p:nvSpPr>
+          <p:cNvPr id="6" name="Shape 4"/>
+          <p:cNvSpPr/>
+          <p:nvPr/>
+        </p:nvSpPr>
+        <p:spPr>
+          <a:xfrm>
+            <a:off x="320040" y="777240"/>
+            <a:ext cx="8503920" cy="0"/>
+          </a:xfrm>
+          <a:prstGeom prst="line">
+            <a:avLst/>
+          </a:prstGeom>
+          <a:noFill/>
+          <a:ln w="19050">
+            <a:solidFill>
+              <a:srgbClr val="D6E4F0"/>
+            </a:solidFill>
+            <a:prstDash val="solid"/>
+          </a:ln>
+        </p:spPr>
+      </p:sp>
+      <p:sp>
+        <p:nvSpPr>
+          <p:cNvPr id="7" name="Shape 5"/>
+          <p:cNvSpPr/>
+          <p:nvPr/>
+        </p:nvSpPr>
+        <p:spPr>
+          <a:xfrm>
+            <a:off x="365760" y="914400"/>
+            <a:ext cx="8412480" cy="960120"/>
+          </a:xfrm>
+          <a:prstGeom prst="rect">
+            <a:avLst/>
+          </a:prstGeom>
+          <a:solidFill>
+            <a:srgbClr val="1A2E4A"/>
+          </a:solidFill>
+          <a:ln w="12700">
+            <a:solidFill>
+              <a:srgbClr val="1A2E4A"/>
+            </a:solidFill>
+            <a:prstDash val="solid"/>
+          </a:ln>
+        </p:spPr>
+      </p:sp>
+      <p:sp>
+        <p:nvSpPr>
+          <p:cNvPr id="8" name="Text 6"/>
+          <p:cNvSpPr/>
+          <p:nvPr/>
+        </p:nvSpPr>
+        <p:spPr>
+          <a:xfrm>
+            <a:off x="457200" y="960120"/>
+            <a:ext cx="8229600" cy="868680"/>
+          </a:xfrm>
+          <a:prstGeom prst="rect">
+            <a:avLst/>
+          </a:prstGeom>
+          <a:noFill/>
+          <a:ln/>
+        </p:spPr>
+        <p:txBody>
+          <a:bodyPr wrap="square" rtlCol="0" anchor="ctr"/>
+          <a:lstStyle/>
+          <a:p>
+            <a:pPr marL="0" indent="0" algn="ctr">
+              <a:buNone/>
+            </a:pPr>
+            <a:r>
+              <a:rPr lang="en-US" sz="1600" b="1" i="1" dirty="0">
+                <a:solidFill>
+                  <a:srgbClr val="FFFFFF"/>
+                </a:solidFill>
+                <a:latin typeface="Calibri" pitchFamily="34" charset="0"/>
+                <a:ea typeface="Calibri" pitchFamily="34" charset="-122"/>
+                <a:cs typeface="Calibri" pitchFamily="34" charset="-120"/>
+              </a:rPr>
+              <a:t>Can Deep Reinforcement Learning replace classical heuristics</a:t>
+            </a:r>
+            <a:endParaRPr lang="en-US" sz="1600" dirty="0"/>
+          </a:p>
+          <a:p>
+            <a:pPr marL="0" indent="0" algn="ctr">
+              <a:buNone/>
+            </a:pPr>
+            <a:r>
+              <a:rPr lang="en-US" sz="1600" b="1" i="1" dirty="0">
+                <a:solidFill>
+                  <a:srgbClr val="FFFFFF"/>
+                </a:solidFill>
+                <a:latin typeface="Calibri" pitchFamily="34" charset="0"/>
+                <a:ea typeface="Calibri" pitchFamily="34" charset="-122"/>
+                <a:cs typeface="Calibri" pitchFamily="34" charset="-120"/>
+              </a:rPr>
+              <a:t>for frontier cluster selection in autonomous exploration?</a:t>
+            </a:r>
+            <a:endParaRPr lang="en-US" sz="1600" dirty="0"/>
+          </a:p>
+        </p:txBody>
+      </p:sp>
+      <p:sp>
+        <p:nvSpPr>
+          <p:cNvPr id="9" name="Text 7"/>
+          <p:cNvSpPr/>
+          <p:nvPr/>
+        </p:nvSpPr>
+        <p:spPr>
+          <a:xfrm>
+            <a:off x="457200" y="2011680"/>
+            <a:ext cx="8229600" cy="2880360"/>
+          </a:xfrm>
+          <a:prstGeom prst="rect">
+            <a:avLst/>
+          </a:prstGeom>
+          <a:noFill/>
+          <a:ln/>
+        </p:spPr>
+        <p:txBody>
+          <a:bodyPr wrap="square" rtlCol="0" anchor="t"/>
+          <a:lstStyle/>
+          <a:p>
+            <a:pPr marL="190500" indent="-190500">
+              <a:spcAft>
+                <a:spcPts val="500"/>
+              </a:spcAft>
+              <a:buSzPct val="100000"/>
+              <a:buChar char="•"/>
+            </a:pPr>
+            <a:r>
+              <a:rPr lang="en-US" sz="1400" dirty="0">
+                <a:solidFill>
+                  <a:srgbClr val="1A1A1A"/>
+                </a:solidFill>
+                <a:latin typeface="Calibri" pitchFamily="34" charset="0"/>
+                <a:ea typeface="Calibri" pitchFamily="34" charset="-122"/>
+                <a:cs typeface="Calibri" pitchFamily="34" charset="-120"/>
+              </a:rPr>
+              <a:t>Autonomous exploration = systematic coverage of an unknown environment without human input</a:t>
+            </a:r>
+            <a:endParaRPr lang="en-US" sz="1400" dirty="0"/>
+          </a:p>
+          <a:p>
+            <a:pPr marL="190500" indent="-190500">
+              <a:spcAft>
+                <a:spcPts val="500"/>
+              </a:spcAft>
+              <a:buSzPct val="100000"/>
+              <a:buChar char="•"/>
+            </a:pPr>
+            <a:r>
+              <a:rPr lang="en-US" sz="1400" dirty="0">
+                <a:solidFill>
+                  <a:srgbClr val="1A1A1A"/>
+                </a:solidFill>
+                <a:latin typeface="Calibri" pitchFamily="34" charset="0"/>
+                <a:ea typeface="Calibri" pitchFamily="34" charset="-122"/>
+                <a:cs typeface="Calibri" pitchFamily="34" charset="-120"/>
+              </a:rPr>
+              <a:t>Classical frontier methods use fixed heuristics (nearest, largest) — simple but not adaptive</a:t>
+            </a:r>
+            <a:endParaRPr lang="en-US" sz="1400" dirty="0"/>
+          </a:p>
+          <a:p>
+            <a:pPr marL="190500" indent="-190500">
+              <a:spcAft>
+                <a:spcPts val="500"/>
+              </a:spcAft>
+              <a:buSzPct val="100000"/>
+              <a:buChar char="•"/>
+            </a:pPr>
+            <a:r>
+              <a:rPr lang="en-US" sz="1400" dirty="0">
+                <a:solidFill>
+                  <a:srgbClr val="1A1A1A"/>
+                </a:solidFill>
+                <a:latin typeface="Calibri" pitchFamily="34" charset="0"/>
+                <a:ea typeface="Calibri" pitchFamily="34" charset="-122"/>
+                <a:cs typeface="Calibri" pitchFamily="34" charset="-120"/>
+              </a:rPr>
+              <a:t>DRL learns a policy from experience — potentially more flexible and environment-aware</a:t>
+            </a:r>
+            <a:endParaRPr lang="en-US" sz="1400" dirty="0"/>
+          </a:p>
+          <a:p>
+            <a:pPr marL="190500" indent="-190500">
+              <a:spcAft>
+                <a:spcPts val="500"/>
+              </a:spcAft>
+              <a:buSzPct val="100000"/>
+              <a:buChar char="•"/>
+            </a:pPr>
+            <a:r>
+              <a:rPr lang="en-US" sz="1400" dirty="0">
+                <a:solidFill>
+                  <a:srgbClr val="1A1A1A"/>
+                </a:solidFill>
+                <a:latin typeface="Calibri" pitchFamily="34" charset="0"/>
+                <a:ea typeface="Calibri" pitchFamily="34" charset="-122"/>
+                <a:cs typeface="Calibri" pitchFamily="34" charset="-120"/>
+              </a:rPr>
+              <a:t>Goal: validate DRL as a drop-in decision-maker inside a modular exploration pipeline</a:t>
+            </a:r>
+            <a:endParaRPr lang="en-US" sz="1400" dirty="0"/>
+          </a:p>
+        </p:txBody>
+      </p:sp>
+      <p:sp>
+        <p:nvSpPr>
+          <p:cNvPr id="10" name="CasellaDiTesto 9">
             <a:extLst>
               <a:ext uri="{FF2B5EF4-FFF2-40B4-BE49-F238E27FC236}">
-                <a16:creationId xmlns:a16="http://schemas.microsoft.com/office/drawing/2014/main" id="{B901EC0B-66A8-4AFA-930E-484C08D7F9A2}"/>
+                <a16:creationId xmlns:a16="http://schemas.microsoft.com/office/drawing/2014/main" id="{C5631F7D-3F07-6F28-2909-35381EFA0289}"/>
               </a:ext>
             </a:extLst>
           </p:cNvPr>
@@ -2991,7 +3439,17 @@
           </a:bodyPr>
           <a:lstStyle/>
           <a:p>
-            <a:pPr algn="l"/>
+            <a:r>
+              <a:rPr lang="en-US" sz="2600" b="1" dirty="0">
+                <a:solidFill>
+                  <a:srgbClr val="1A1A1A"/>
+                </a:solidFill>
+                <a:latin typeface="Calibri" pitchFamily="34" charset="0"/>
+                <a:ea typeface="Calibri" pitchFamily="34" charset="-122"/>
+                <a:cs typeface="Calibri" pitchFamily="34" charset="-120"/>
+              </a:rPr>
+              <a:t>Motivation </a:t>
+            </a:r>
             <a:r>
               <a:rPr lang="it-IT" sz="2600" b="1" dirty="0">
                 <a:solidFill>
@@ -3001,101 +3459,12 @@
                 <a:ea typeface="Calibri"/>
                 <a:cs typeface="Calibri"/>
               </a:rPr>
-              <a:t>Slide Title</a:t>
+              <a:t>&amp; Scope</a:t>
             </a:r>
           </a:p>
         </p:txBody>
       </p:sp>
-      <p:sp>
-        <p:nvSpPr>
-          <p:cNvPr id="5" name="CasellaDiTesto 4">
-            <a:extLst>
-              <a:ext uri="{FF2B5EF4-FFF2-40B4-BE49-F238E27FC236}">
-                <a16:creationId xmlns:a16="http://schemas.microsoft.com/office/drawing/2014/main" id="{6BD244D8-F9CB-4AF5-BAE2-F0001DF3A600}"/>
-              </a:ext>
-            </a:extLst>
-          </p:cNvPr>
-          <p:cNvSpPr txBox="1"/>
-          <p:nvPr/>
-        </p:nvSpPr>
-        <p:spPr>
-          <a:xfrm>
-            <a:off x="368300" y="914400"/>
-            <a:ext cx="8382000" cy="3556000"/>
-          </a:xfrm>
-          <a:prstGeom prst="rect">
-            <a:avLst/>
-          </a:prstGeom>
-          <a:noFill/>
-        </p:spPr>
-        <p:txBody>
-          <a:bodyPr vertOverflow="overflow" vert="horz" wrap="square" rtlCol="0" anchor="t">
-            <a:noAutofit/>
-          </a:bodyPr>
-          <a:lstStyle/>
-          <a:p>
-            <a:pPr algn="l"/>
-            <a:r>
-              <a:rPr lang="it-IT" sz="1600" dirty="0">
-                <a:solidFill>
-                  <a:srgbClr val="333333"/>
-                </a:solidFill>
-                <a:latin typeface="Calibri"/>
-                <a:ea typeface="Calibri"/>
-                <a:cs typeface="Calibri"/>
-              </a:rPr>
-              <a:t>Content </a:t>
-            </a:r>
-            <a:r>
-              <a:rPr lang="it-IT" sz="1600" dirty="0" err="1">
-                <a:solidFill>
-                  <a:srgbClr val="333333"/>
-                </a:solidFill>
-                <a:latin typeface="Calibri"/>
-                <a:ea typeface="Calibri"/>
-                <a:cs typeface="Calibri"/>
-              </a:rPr>
-              <a:t>goes</a:t>
-            </a:r>
-            <a:r>
-              <a:rPr lang="it-IT" sz="1600" dirty="0">
-                <a:solidFill>
-                  <a:srgbClr val="333333"/>
-                </a:solidFill>
-                <a:latin typeface="Calibri"/>
-                <a:ea typeface="Calibri"/>
-                <a:cs typeface="Calibri"/>
-              </a:rPr>
-              <a:t> </a:t>
-            </a:r>
-            <a:r>
-              <a:rPr lang="it-IT" sz="1600" dirty="0" err="1">
-                <a:solidFill>
-                  <a:srgbClr val="333333"/>
-                </a:solidFill>
-                <a:latin typeface="Calibri"/>
-                <a:ea typeface="Calibri"/>
-                <a:cs typeface="Calibri"/>
-              </a:rPr>
-              <a:t>here</a:t>
-            </a:r>
-            <a:endParaRPr lang="it-IT" sz="1600" dirty="0">
-              <a:solidFill>
-                <a:srgbClr val="333333"/>
-              </a:solidFill>
-              <a:latin typeface="Calibri"/>
-              <a:ea typeface="Calibri"/>
-              <a:cs typeface="Calibri"/>
-            </a:endParaRPr>
-          </a:p>
-        </p:txBody>
-      </p:sp>
     </p:spTree>
-    <p:extLst>
-      <p:ext uri="{BB962C8B-B14F-4D97-AF65-F5344CB8AC3E}">
-        <p14:creationId xmlns:p14="http://schemas.microsoft.com/office/powerpoint/2010/main" val="3678948679"/>
-      </p:ext>
-    </p:extLst>
   </p:cSld>
   <p:clrMapOvr>
     <a:masterClrMapping/>
@@ -3122,158 +3491,495 @@
       </p:grpSpPr>
       <p:sp>
         <p:nvSpPr>
-          <p:cNvPr id="3" name="CasellaDiTesto 2">
+          <p:cNvPr id="2" name="Text 0"/>
+          <p:cNvSpPr/>
+          <p:nvPr/>
+        </p:nvSpPr>
+        <p:spPr>
+          <a:xfrm>
+            <a:off x="320040" y="4846320"/>
+            <a:ext cx="7772400" cy="201168"/>
+          </a:xfrm>
+          <a:prstGeom prst="rect">
+            <a:avLst/>
+          </a:prstGeom>
+          <a:noFill/>
+          <a:ln/>
+        </p:spPr>
+        <p:txBody>
+          <a:bodyPr wrap="square" rtlCol="0" anchor="ctr"/>
+          <a:lstStyle/>
+          <a:p>
+            <a:pPr marL="0" indent="0" algn="l">
+              <a:buNone/>
+            </a:pPr>
+            <a:r>
+              <a:rPr lang="en-US" sz="900" dirty="0">
+                <a:solidFill>
+                  <a:srgbClr val="BBBBBB"/>
+                </a:solidFill>
+                <a:latin typeface="Calibri" pitchFamily="34" charset="0"/>
+                <a:ea typeface="Calibri" pitchFamily="34" charset="-122"/>
+                <a:cs typeface="Calibri" pitchFamily="34" charset="-120"/>
+              </a:rPr>
+              <a:t>Paolo Spallanzani  ·  Deep RL in Frontier-Based Autonomous Exploration</a:t>
+            </a:r>
+            <a:endParaRPr lang="en-US" sz="900" dirty="0"/>
+          </a:p>
+        </p:txBody>
+      </p:sp>
+      <p:sp>
+        <p:nvSpPr>
+          <p:cNvPr id="3" name="Text 1"/>
+          <p:cNvSpPr/>
+          <p:nvPr/>
+        </p:nvSpPr>
+        <p:spPr>
+          <a:xfrm>
+            <a:off x="8412480" y="4846320"/>
+            <a:ext cx="457200" cy="201168"/>
+          </a:xfrm>
+          <a:prstGeom prst="rect">
+            <a:avLst/>
+          </a:prstGeom>
+          <a:noFill/>
+          <a:ln/>
+        </p:spPr>
+        <p:txBody>
+          <a:bodyPr wrap="square" rtlCol="0" anchor="ctr"/>
+          <a:lstStyle/>
+          <a:p>
+            <a:pPr marL="0" indent="0" algn="r">
+              <a:buNone/>
+            </a:pPr>
+            <a:r>
+              <a:rPr lang="en-US" sz="900" dirty="0">
+                <a:solidFill>
+                  <a:srgbClr val="BBBBBB"/>
+                </a:solidFill>
+                <a:latin typeface="Calibri" pitchFamily="34" charset="0"/>
+                <a:ea typeface="Calibri" pitchFamily="34" charset="-122"/>
+                <a:cs typeface="Calibri" pitchFamily="34" charset="-120"/>
+              </a:rPr>
+              <a:t>3 / 17</a:t>
+            </a:r>
+            <a:endParaRPr lang="en-US" sz="900" dirty="0"/>
+          </a:p>
+        </p:txBody>
+      </p:sp>
+      <p:sp>
+        <p:nvSpPr>
+          <p:cNvPr id="4" name="Shape 2"/>
+          <p:cNvSpPr/>
+          <p:nvPr/>
+        </p:nvSpPr>
+        <p:spPr>
+          <a:xfrm>
+            <a:off x="320040" y="237744"/>
+            <a:ext cx="64008" cy="457200"/>
+          </a:xfrm>
+          <a:prstGeom prst="rect">
+            <a:avLst/>
+          </a:prstGeom>
+          <a:solidFill>
+            <a:srgbClr val="C8472C"/>
+          </a:solidFill>
+          <a:ln w="12700">
+            <a:solidFill>
+              <a:srgbClr val="C8472C"/>
+            </a:solidFill>
+            <a:prstDash val="solid"/>
+          </a:ln>
+        </p:spPr>
+      </p:sp>
+      <p:sp>
+        <p:nvSpPr>
+          <p:cNvPr id="5" name="Text 3"/>
+          <p:cNvSpPr/>
+          <p:nvPr/>
+        </p:nvSpPr>
+        <p:spPr>
+          <a:xfrm>
+            <a:off x="502920" y="256032"/>
+            <a:ext cx="8229600" cy="457200"/>
+          </a:xfrm>
+          <a:prstGeom prst="rect">
+            <a:avLst/>
+          </a:prstGeom>
+          <a:noFill/>
+          <a:ln/>
+        </p:spPr>
+        <p:txBody>
+          <a:bodyPr wrap="square" lIns="0" tIns="0" rIns="0" bIns="0" rtlCol="0" anchor="ctr"/>
+          <a:lstStyle/>
+          <a:p>
+            <a:pPr marL="0" indent="0" algn="l">
+              <a:buNone/>
+            </a:pPr>
+            <a:r>
+              <a:rPr lang="en-US" sz="2600" b="1" dirty="0">
+                <a:solidFill>
+                  <a:srgbClr val="1A1A1A"/>
+                </a:solidFill>
+                <a:latin typeface="Calibri" pitchFamily="34" charset="0"/>
+                <a:ea typeface="Calibri" pitchFamily="34" charset="-122"/>
+                <a:cs typeface="Calibri" pitchFamily="34" charset="-120"/>
+              </a:rPr>
+              <a:t>Motivation &amp; Scope</a:t>
+            </a:r>
+            <a:endParaRPr lang="en-US" sz="2600" dirty="0"/>
+          </a:p>
+        </p:txBody>
+      </p:sp>
+      <p:sp>
+        <p:nvSpPr>
+          <p:cNvPr id="6" name="Shape 4"/>
+          <p:cNvSpPr/>
+          <p:nvPr/>
+        </p:nvSpPr>
+        <p:spPr>
+          <a:xfrm>
+            <a:off x="320040" y="777240"/>
+            <a:ext cx="8503920" cy="0"/>
+          </a:xfrm>
+          <a:prstGeom prst="line">
+            <a:avLst/>
+          </a:prstGeom>
+          <a:noFill/>
+          <a:ln w="19050">
+            <a:solidFill>
+              <a:srgbClr val="D6E4F0"/>
+            </a:solidFill>
+            <a:prstDash val="solid"/>
+          </a:ln>
+        </p:spPr>
+      </p:sp>
+      <p:sp>
+        <p:nvSpPr>
+          <p:cNvPr id="7" name="Shape 5"/>
+          <p:cNvSpPr/>
+          <p:nvPr/>
+        </p:nvSpPr>
+        <p:spPr>
+          <a:xfrm>
+            <a:off x="365760" y="914400"/>
+            <a:ext cx="8412480" cy="960120"/>
+          </a:xfrm>
+          <a:prstGeom prst="rect">
+            <a:avLst/>
+          </a:prstGeom>
+          <a:solidFill>
+            <a:srgbClr val="D6E4F0"/>
+          </a:solidFill>
+          <a:ln w="12700">
+            <a:solidFill>
+              <a:schemeClr val="accent1">
+                <a:lumMod val="50000"/>
+              </a:schemeClr>
+            </a:solidFill>
+            <a:prstDash val="solid"/>
+          </a:ln>
+        </p:spPr>
+      </p:sp>
+      <p:sp>
+        <p:nvSpPr>
+          <p:cNvPr id="8" name="Text 6"/>
+          <p:cNvSpPr/>
+          <p:nvPr/>
+        </p:nvSpPr>
+        <p:spPr>
+          <a:xfrm>
+            <a:off x="457200" y="960120"/>
+            <a:ext cx="8229600" cy="868680"/>
+          </a:xfrm>
+          <a:prstGeom prst="rect">
+            <a:avLst/>
+          </a:prstGeom>
+          <a:noFill/>
+          <a:ln/>
+        </p:spPr>
+        <p:txBody>
+          <a:bodyPr wrap="square" rtlCol="0" anchor="ctr"/>
+          <a:lstStyle/>
+          <a:p>
+            <a:pPr marL="0" indent="0" algn="ctr">
+              <a:buNone/>
+            </a:pPr>
+            <a:r>
+              <a:rPr lang="en-US" b="1" i="1" dirty="0">
+                <a:latin typeface="Calibri" pitchFamily="34" charset="0"/>
+                <a:ea typeface="Calibri" pitchFamily="34" charset="-122"/>
+                <a:cs typeface="Calibri" pitchFamily="34" charset="-120"/>
+              </a:rPr>
+              <a:t>Can Deep Reinforcement Learning (DRL) be effectively</a:t>
+            </a:r>
+          </a:p>
+          <a:p>
+            <a:pPr marL="0" indent="0" algn="ctr">
+              <a:buNone/>
+            </a:pPr>
+            <a:r>
+              <a:rPr lang="en-US" b="1" i="1" dirty="0">
+                <a:latin typeface="Calibri" pitchFamily="34" charset="0"/>
+                <a:ea typeface="Calibri" pitchFamily="34" charset="-122"/>
+                <a:cs typeface="Calibri" pitchFamily="34" charset="-120"/>
+              </a:rPr>
+              <a:t>applied to autonomous exploration?</a:t>
+            </a:r>
+            <a:endParaRPr lang="en-US" dirty="0"/>
+          </a:p>
+        </p:txBody>
+      </p:sp>
+      <p:sp>
+        <p:nvSpPr>
+          <p:cNvPr id="9" name="Text 7"/>
+          <p:cNvSpPr/>
+          <p:nvPr/>
+        </p:nvSpPr>
+        <p:spPr>
+          <a:xfrm>
+            <a:off x="457200" y="2011680"/>
+            <a:ext cx="8229600" cy="1464491"/>
+          </a:xfrm>
+          <a:prstGeom prst="rect">
+            <a:avLst/>
+          </a:prstGeom>
+          <a:noFill/>
+          <a:ln/>
+        </p:spPr>
+        <p:txBody>
+          <a:bodyPr wrap="square" rtlCol="0" anchor="t"/>
+          <a:lstStyle/>
+          <a:p>
+            <a:pPr marL="190500" indent="-190500">
+              <a:spcAft>
+                <a:spcPts val="500"/>
+              </a:spcAft>
+              <a:buSzPct val="100000"/>
+              <a:buChar char="•"/>
+            </a:pPr>
+            <a:r>
+              <a:rPr lang="en-US" b="1" dirty="0">
+                <a:solidFill>
+                  <a:srgbClr val="1A1A1A"/>
+                </a:solidFill>
+                <a:latin typeface="Calibri" pitchFamily="34" charset="0"/>
+                <a:ea typeface="Calibri" pitchFamily="34" charset="-122"/>
+                <a:cs typeface="Calibri" pitchFamily="34" charset="-120"/>
+              </a:rPr>
+              <a:t>Autonomous exploration </a:t>
+            </a:r>
+            <a:r>
+              <a:rPr lang="en-US" dirty="0">
+                <a:solidFill>
+                  <a:srgbClr val="1A1A1A"/>
+                </a:solidFill>
+                <a:latin typeface="Calibri" pitchFamily="34" charset="0"/>
+                <a:ea typeface="Calibri" pitchFamily="34" charset="-122"/>
+                <a:cs typeface="Calibri" pitchFamily="34" charset="-120"/>
+              </a:rPr>
+              <a:t>is complex task</a:t>
+            </a:r>
+            <a:endParaRPr lang="en-US" dirty="0"/>
+          </a:p>
+          <a:p>
+            <a:pPr marL="190500" indent="-190500">
+              <a:spcAft>
+                <a:spcPts val="500"/>
+              </a:spcAft>
+              <a:buSzPct val="100000"/>
+              <a:buChar char="•"/>
+            </a:pPr>
+            <a:r>
+              <a:rPr lang="en-US" b="1" dirty="0">
+                <a:solidFill>
+                  <a:srgbClr val="1A1A1A"/>
+                </a:solidFill>
+                <a:latin typeface="Calibri" pitchFamily="34" charset="0"/>
+                <a:ea typeface="Calibri" pitchFamily="34" charset="-122"/>
+                <a:cs typeface="Calibri" pitchFamily="34" charset="-120"/>
+              </a:rPr>
+              <a:t>Classical analytical </a:t>
+            </a:r>
+            <a:r>
+              <a:rPr lang="en-US" dirty="0">
+                <a:solidFill>
+                  <a:srgbClr val="1A1A1A"/>
+                </a:solidFill>
+                <a:latin typeface="Calibri" pitchFamily="34" charset="0"/>
+                <a:ea typeface="Calibri" pitchFamily="34" charset="-122"/>
+                <a:cs typeface="Calibri" pitchFamily="34" charset="-120"/>
+              </a:rPr>
+              <a:t>methods exist but present some limitations</a:t>
+            </a:r>
+            <a:endParaRPr lang="en-US" dirty="0"/>
+          </a:p>
+          <a:p>
+            <a:pPr marL="190500" indent="-190500">
+              <a:spcAft>
+                <a:spcPts val="500"/>
+              </a:spcAft>
+              <a:buSzPct val="100000"/>
+              <a:buChar char="•"/>
+            </a:pPr>
+            <a:r>
+              <a:rPr lang="en-US" b="1" dirty="0">
+                <a:solidFill>
+                  <a:srgbClr val="1A1A1A"/>
+                </a:solidFill>
+                <a:latin typeface="Calibri" pitchFamily="34" charset="0"/>
+                <a:ea typeface="Calibri" pitchFamily="34" charset="-122"/>
+                <a:cs typeface="Calibri" pitchFamily="34" charset="-120"/>
+              </a:rPr>
+              <a:t>Learning-based</a:t>
+            </a:r>
+            <a:r>
+              <a:rPr lang="en-US" dirty="0">
+                <a:solidFill>
+                  <a:srgbClr val="1A1A1A"/>
+                </a:solidFill>
+                <a:latin typeface="Calibri" pitchFamily="34" charset="0"/>
+                <a:ea typeface="Calibri" pitchFamily="34" charset="-122"/>
+                <a:cs typeface="Calibri" pitchFamily="34" charset="-120"/>
+              </a:rPr>
+              <a:t> methods can provide more adaptive models</a:t>
+            </a:r>
+            <a:endParaRPr lang="en-US" dirty="0"/>
+          </a:p>
+          <a:p>
+            <a:pPr marL="190500" indent="-190500">
+              <a:spcAft>
+                <a:spcPts val="500"/>
+              </a:spcAft>
+              <a:buSzPct val="100000"/>
+              <a:buChar char="•"/>
+            </a:pPr>
+            <a:r>
+              <a:rPr lang="en-US" dirty="0">
+                <a:solidFill>
+                  <a:srgbClr val="1A1A1A"/>
+                </a:solidFill>
+                <a:latin typeface="Calibri" pitchFamily="34" charset="0"/>
+                <a:ea typeface="Calibri" pitchFamily="34" charset="-122"/>
+                <a:cs typeface="Calibri" pitchFamily="34" charset="-120"/>
+              </a:rPr>
+              <a:t>Can learning-based method be </a:t>
+            </a:r>
+            <a:r>
+              <a:rPr lang="en-US" b="1" dirty="0">
+                <a:solidFill>
+                  <a:srgbClr val="1A1A1A"/>
+                </a:solidFill>
+                <a:latin typeface="Calibri" pitchFamily="34" charset="0"/>
+                <a:ea typeface="Calibri" pitchFamily="34" charset="-122"/>
+                <a:cs typeface="Calibri" pitchFamily="34" charset="-120"/>
+              </a:rPr>
+              <a:t>integrated</a:t>
+            </a:r>
+            <a:r>
+              <a:rPr lang="en-US" dirty="0">
+                <a:solidFill>
+                  <a:srgbClr val="1A1A1A"/>
+                </a:solidFill>
+                <a:latin typeface="Calibri" pitchFamily="34" charset="0"/>
+                <a:ea typeface="Calibri" pitchFamily="34" charset="-122"/>
+                <a:cs typeface="Calibri" pitchFamily="34" charset="-120"/>
+              </a:rPr>
+              <a:t> in classical ones? </a:t>
+            </a:r>
+            <a:endParaRPr lang="en-US" dirty="0"/>
+          </a:p>
+        </p:txBody>
+      </p:sp>
+      <p:sp>
+        <p:nvSpPr>
+          <p:cNvPr id="11" name="Shape 5">
             <a:extLst>
               <a:ext uri="{FF2B5EF4-FFF2-40B4-BE49-F238E27FC236}">
-                <a16:creationId xmlns:a16="http://schemas.microsoft.com/office/drawing/2014/main" id="{A2573F97-AE10-444A-9306-BFF3D7DCA88C}"/>
+                <a16:creationId xmlns:a16="http://schemas.microsoft.com/office/drawing/2014/main" id="{000FCEB4-5A5B-AECB-8434-1AA1350D5054}"/>
               </a:ext>
             </a:extLst>
           </p:cNvPr>
-          <p:cNvSpPr txBox="1"/>
+          <p:cNvSpPr/>
           <p:nvPr/>
         </p:nvSpPr>
         <p:spPr>
           <a:xfrm>
-            <a:off x="508000" y="254000"/>
-            <a:ext cx="8229600" cy="457200"/>
-          </a:xfrm>
-          <a:prstGeom prst="rect">
-            <a:avLst/>
-          </a:prstGeom>
-          <a:noFill/>
-        </p:spPr>
-        <p:txBody>
-          <a:bodyPr vertOverflow="overflow" vert="horz" wrap="square" rtlCol="0" anchor="ctr" anchorCtr="0">
-            <a:noAutofit/>
-          </a:bodyPr>
-          <a:lstStyle/>
-          <a:p>
-            <a:pPr algn="l"/>
-            <a:r>
-              <a:rPr lang="it-IT" sz="2600" b="1" dirty="0">
-                <a:solidFill>
-                  <a:srgbClr val="1A1A1A"/>
-                </a:solidFill>
-                <a:latin typeface="Calibri"/>
-                <a:ea typeface="Calibri"/>
-                <a:cs typeface="Calibri"/>
-              </a:rPr>
-              <a:t>Slide Title</a:t>
-            </a:r>
-          </a:p>
-        </p:txBody>
-      </p:sp>
-      <p:sp>
-        <p:nvSpPr>
-          <p:cNvPr id="5" name="CasellaDiTesto 4">
+            <a:off x="365760" y="3565705"/>
+            <a:ext cx="8412480" cy="960120"/>
+          </a:xfrm>
+          <a:prstGeom prst="rect">
+            <a:avLst/>
+          </a:prstGeom>
+          <a:solidFill>
+            <a:srgbClr val="D6E4F0"/>
+          </a:solidFill>
+          <a:ln w="12700">
+            <a:solidFill>
+              <a:schemeClr val="accent1">
+                <a:lumMod val="50000"/>
+              </a:schemeClr>
+            </a:solidFill>
+            <a:prstDash val="solid"/>
+          </a:ln>
+        </p:spPr>
+      </p:sp>
+      <p:sp>
+        <p:nvSpPr>
+          <p:cNvPr id="12" name="Text 6">
             <a:extLst>
               <a:ext uri="{FF2B5EF4-FFF2-40B4-BE49-F238E27FC236}">
-                <a16:creationId xmlns:a16="http://schemas.microsoft.com/office/drawing/2014/main" id="{FD0ECAD6-FF98-4193-979E-566FFED4B5AD}"/>
+                <a16:creationId xmlns:a16="http://schemas.microsoft.com/office/drawing/2014/main" id="{0015EE5A-DA97-6AC7-337B-2E3B82A10631}"/>
               </a:ext>
             </a:extLst>
           </p:cNvPr>
-          <p:cNvSpPr txBox="1"/>
+          <p:cNvSpPr/>
           <p:nvPr/>
         </p:nvSpPr>
         <p:spPr>
           <a:xfrm>
-            <a:off x="368300" y="914400"/>
-            <a:ext cx="4089400" cy="3556000"/>
+            <a:off x="457200" y="3604281"/>
+            <a:ext cx="8229600" cy="868680"/>
           </a:xfrm>
           <a:prstGeom prst="rect">
             <a:avLst/>
           </a:prstGeom>
           <a:noFill/>
+          <a:ln/>
         </p:spPr>
         <p:txBody>
-          <a:bodyPr vertOverflow="overflow" vert="horz" wrap="square" rtlCol="0" anchor="t">
-            <a:noAutofit/>
-          </a:bodyPr>
+          <a:bodyPr wrap="square" rtlCol="0" anchor="ctr"/>
           <a:lstStyle/>
           <a:p>
-            <a:pPr algn="l"/>
-            <a:r>
-              <a:rPr lang="it-IT" sz="1600" dirty="0">
-                <a:solidFill>
-                  <a:srgbClr val="333333"/>
-                </a:solidFill>
-                <a:latin typeface="Calibri"/>
-                <a:ea typeface="Calibri"/>
-                <a:cs typeface="Calibri"/>
-              </a:rPr>
-              <a:t>Left </a:t>
-            </a:r>
-            <a:r>
-              <a:rPr lang="it-IT" sz="1600" dirty="0" err="1">
-                <a:solidFill>
-                  <a:srgbClr val="333333"/>
-                </a:solidFill>
-                <a:latin typeface="Calibri"/>
-                <a:ea typeface="Calibri"/>
-                <a:cs typeface="Calibri"/>
-              </a:rPr>
-              <a:t>content</a:t>
-            </a:r>
-            <a:endParaRPr lang="it-IT" sz="1600" dirty="0">
-              <a:solidFill>
-                <a:srgbClr val="333333"/>
-              </a:solidFill>
-              <a:latin typeface="Calibri"/>
-              <a:ea typeface="Calibri"/>
-              <a:cs typeface="Calibri"/>
-            </a:endParaRPr>
+            <a:pPr marL="0" indent="0" algn="ctr">
+              <a:buNone/>
+            </a:pPr>
+            <a:r>
+              <a:rPr lang="en-US" b="1" i="1" dirty="0">
+                <a:latin typeface="Calibri" pitchFamily="34" charset="0"/>
+                <a:ea typeface="Calibri" pitchFamily="34" charset="-122"/>
+                <a:cs typeface="Calibri" pitchFamily="34" charset="-120"/>
+              </a:rPr>
+              <a:t>Objective: </a:t>
+            </a:r>
+          </a:p>
+          <a:p>
+            <a:pPr marL="0" indent="0" algn="ctr">
+              <a:buNone/>
+            </a:pPr>
+            <a:r>
+              <a:rPr lang="en-US" b="1" i="1" dirty="0">
+                <a:latin typeface="Calibri" pitchFamily="34" charset="0"/>
+                <a:ea typeface="Calibri" pitchFamily="34" charset="-122"/>
+                <a:cs typeface="Calibri" pitchFamily="34" charset="-120"/>
+              </a:rPr>
+              <a:t>develop a framework for the investigation of this possibility</a:t>
+            </a:r>
+            <a:endParaRPr lang="en-US" dirty="0"/>
           </a:p>
         </p:txBody>
       </p:sp>
-      <p:sp>
-        <p:nvSpPr>
-          <p:cNvPr id="6" name="CasellaDiTesto 5">
-            <a:extLst>
-              <a:ext uri="{FF2B5EF4-FFF2-40B4-BE49-F238E27FC236}">
-                <a16:creationId xmlns:a16="http://schemas.microsoft.com/office/drawing/2014/main" id="{34CBD74A-88E8-4A7F-BF8C-396FF18C5FD4}"/>
-              </a:ext>
-            </a:extLst>
-          </p:cNvPr>
-          <p:cNvSpPr txBox="1"/>
-          <p:nvPr/>
-        </p:nvSpPr>
-        <p:spPr>
-          <a:xfrm>
-            <a:off x="4699000" y="914400"/>
-            <a:ext cx="4089400" cy="3556000"/>
-          </a:xfrm>
-          <a:prstGeom prst="rect">
-            <a:avLst/>
-          </a:prstGeom>
-          <a:noFill/>
-        </p:spPr>
-        <p:txBody>
-          <a:bodyPr vertOverflow="overflow" vert="horz" wrap="square" rtlCol="0" anchor="t">
-            <a:noAutofit/>
-          </a:bodyPr>
-          <a:lstStyle/>
-          <a:p>
-            <a:pPr algn="l"/>
-            <a:r>
-              <a:rPr lang="it-IT" sz="1600">
-                <a:solidFill>
-                  <a:srgbClr val="333333"/>
-                </a:solidFill>
-                <a:latin typeface="Calibri"/>
-                <a:ea typeface="Calibri"/>
-                <a:cs typeface="Calibri"/>
-              </a:rPr>
-              <a:t>Right content</a:t>
-            </a:r>
-          </a:p>
-        </p:txBody>
-      </p:sp>
     </p:spTree>
-    <p:extLst>
-      <p:ext uri="{BB962C8B-B14F-4D97-AF65-F5344CB8AC3E}">
-        <p14:creationId xmlns:p14="http://schemas.microsoft.com/office/powerpoint/2010/main" val="1959701455"/>
-      </p:ext>
-    </p:extLst>
   </p:cSld>
   <p:clrMapOvr>
     <a:masterClrMapping/>
@@ -3300,10 +4006,470 @@
       </p:grpSpPr>
       <p:sp>
         <p:nvSpPr>
-          <p:cNvPr id="2" name="CasellaDiTesto 1">
+          <p:cNvPr id="3" name="Text 1"/>
+          <p:cNvSpPr/>
+          <p:nvPr/>
+        </p:nvSpPr>
+        <p:spPr>
+          <a:xfrm>
+            <a:off x="8412480" y="4846320"/>
+            <a:ext cx="457200" cy="201168"/>
+          </a:xfrm>
+          <a:prstGeom prst="rect">
+            <a:avLst/>
+          </a:prstGeom>
+          <a:noFill/>
+          <a:ln/>
+        </p:spPr>
+        <p:txBody>
+          <a:bodyPr wrap="square" rtlCol="0" anchor="ctr"/>
+          <a:lstStyle/>
+          <a:p>
+            <a:pPr marL="0" indent="0" algn="r">
+              <a:buNone/>
+            </a:pPr>
+            <a:r>
+              <a:rPr lang="en-US" sz="900" dirty="0">
+                <a:solidFill>
+                  <a:srgbClr val="BBBBBB"/>
+                </a:solidFill>
+                <a:latin typeface="Calibri" pitchFamily="34" charset="0"/>
+                <a:ea typeface="Calibri" pitchFamily="34" charset="-122"/>
+                <a:cs typeface="Calibri" pitchFamily="34" charset="-120"/>
+              </a:rPr>
+              <a:t>4 / 17</a:t>
+            </a:r>
+            <a:endParaRPr lang="en-US" sz="900" dirty="0"/>
+          </a:p>
+        </p:txBody>
+      </p:sp>
+      <p:sp>
+        <p:nvSpPr>
+          <p:cNvPr id="4" name="Shape 2"/>
+          <p:cNvSpPr/>
+          <p:nvPr/>
+        </p:nvSpPr>
+        <p:spPr>
+          <a:xfrm>
+            <a:off x="320040" y="237744"/>
+            <a:ext cx="64008" cy="457200"/>
+          </a:xfrm>
+          <a:prstGeom prst="rect">
+            <a:avLst/>
+          </a:prstGeom>
+          <a:solidFill>
+            <a:srgbClr val="C8472C"/>
+          </a:solidFill>
+          <a:ln w="12700">
+            <a:solidFill>
+              <a:srgbClr val="C8472C"/>
+            </a:solidFill>
+            <a:prstDash val="solid"/>
+          </a:ln>
+        </p:spPr>
+      </p:sp>
+      <p:sp>
+        <p:nvSpPr>
+          <p:cNvPr id="5" name="Text 3"/>
+          <p:cNvSpPr/>
+          <p:nvPr/>
+        </p:nvSpPr>
+        <p:spPr>
+          <a:xfrm>
+            <a:off x="502920" y="256032"/>
+            <a:ext cx="8229600" cy="457200"/>
+          </a:xfrm>
+          <a:prstGeom prst="rect">
+            <a:avLst/>
+          </a:prstGeom>
+          <a:noFill/>
+          <a:ln/>
+        </p:spPr>
+        <p:txBody>
+          <a:bodyPr wrap="square" lIns="0" tIns="0" rIns="0" bIns="0" rtlCol="0" anchor="ctr"/>
+          <a:lstStyle/>
+          <a:p>
+            <a:pPr marL="0" indent="0" algn="l">
+              <a:buNone/>
+            </a:pPr>
+            <a:r>
+              <a:rPr lang="en-US" sz="2600" b="1" dirty="0">
+                <a:solidFill>
+                  <a:srgbClr val="1A1A1A"/>
+                </a:solidFill>
+                <a:latin typeface="Calibri" pitchFamily="34" charset="0"/>
+                <a:ea typeface="Calibri" pitchFamily="34" charset="-122"/>
+                <a:cs typeface="Calibri" pitchFamily="34" charset="-120"/>
+              </a:rPr>
+              <a:t>Context: Autonomous Exploration</a:t>
+            </a:r>
+            <a:endParaRPr lang="en-US" sz="2600" dirty="0"/>
+          </a:p>
+        </p:txBody>
+      </p:sp>
+      <p:sp>
+        <p:nvSpPr>
+          <p:cNvPr id="6" name="Shape 4"/>
+          <p:cNvSpPr/>
+          <p:nvPr/>
+        </p:nvSpPr>
+        <p:spPr>
+          <a:xfrm>
+            <a:off x="320040" y="777240"/>
+            <a:ext cx="8503920" cy="0"/>
+          </a:xfrm>
+          <a:prstGeom prst="line">
+            <a:avLst/>
+          </a:prstGeom>
+          <a:noFill/>
+          <a:ln w="19050">
+            <a:solidFill>
+              <a:srgbClr val="D6E4F0"/>
+            </a:solidFill>
+            <a:prstDash val="solid"/>
+          </a:ln>
+        </p:spPr>
+      </p:sp>
+      <p:sp>
+        <p:nvSpPr>
+          <p:cNvPr id="7" name="Text 5"/>
+          <p:cNvSpPr/>
+          <p:nvPr/>
+        </p:nvSpPr>
+        <p:spPr>
+          <a:xfrm>
+            <a:off x="365760" y="914400"/>
+            <a:ext cx="4663440" cy="3840480"/>
+          </a:xfrm>
+          <a:prstGeom prst="rect">
+            <a:avLst/>
+          </a:prstGeom>
+          <a:noFill/>
+          <a:ln/>
+        </p:spPr>
+        <p:txBody>
+          <a:bodyPr wrap="square" rtlCol="0" anchor="t"/>
+          <a:lstStyle/>
+          <a:p>
+            <a:pPr marL="190500" indent="-190500">
+              <a:spcAft>
+                <a:spcPts val="500"/>
+              </a:spcAft>
+              <a:buSzPct val="100000"/>
+              <a:buFontTx/>
+              <a:buChar char="•"/>
+            </a:pPr>
+            <a:r>
+              <a:rPr lang="en-US" dirty="0">
+                <a:solidFill>
+                  <a:srgbClr val="1A1A1A"/>
+                </a:solidFill>
+                <a:latin typeface="Calibri" pitchFamily="34" charset="0"/>
+                <a:ea typeface="Calibri" pitchFamily="34" charset="-122"/>
+                <a:cs typeface="Calibri" pitchFamily="34" charset="-120"/>
+              </a:rPr>
+              <a:t>Exploration: systematically map an unknown environment</a:t>
+            </a:r>
+          </a:p>
+          <a:p>
+            <a:pPr marL="190500" indent="-190500">
+              <a:spcAft>
+                <a:spcPts val="500"/>
+              </a:spcAft>
+              <a:buSzPct val="100000"/>
+              <a:buFontTx/>
+              <a:buChar char="•"/>
+            </a:pPr>
+            <a:r>
+              <a:rPr lang="en-US" dirty="0">
+                <a:solidFill>
+                  <a:srgbClr val="1A1A1A"/>
+                </a:solidFill>
+                <a:latin typeface="Calibri" pitchFamily="34" charset="0"/>
+                <a:ea typeface="Calibri" pitchFamily="34" charset="-122"/>
+                <a:cs typeface="Calibri" pitchFamily="34" charset="-120"/>
+              </a:rPr>
+              <a:t>Autonomous: the agent can perceive and moves without human guidance</a:t>
+            </a:r>
+          </a:p>
+          <a:p>
+            <a:pPr marL="190500" indent="-190500">
+              <a:spcAft>
+                <a:spcPts val="500"/>
+              </a:spcAft>
+              <a:buSzPct val="100000"/>
+              <a:buFontTx/>
+              <a:buChar char="•"/>
+            </a:pPr>
+            <a:r>
+              <a:rPr lang="en-US" dirty="0">
+                <a:solidFill>
+                  <a:srgbClr val="1A1A1A"/>
+                </a:solidFill>
+                <a:latin typeface="Calibri" pitchFamily="34" charset="0"/>
+                <a:ea typeface="Calibri" pitchFamily="34" charset="-122"/>
+                <a:cs typeface="Calibri" pitchFamily="34" charset="-120"/>
+              </a:rPr>
+              <a:t>Why autonomous exploration?</a:t>
+            </a:r>
+          </a:p>
+          <a:p>
+            <a:pPr marL="190500" indent="-190500">
+              <a:spcAft>
+                <a:spcPts val="500"/>
+              </a:spcAft>
+              <a:buSzPct val="100000"/>
+              <a:buFontTx/>
+              <a:buChar char="•"/>
+            </a:pPr>
+            <a:r>
+              <a:rPr lang="en-US" dirty="0">
+                <a:solidFill>
+                  <a:srgbClr val="1A1A1A"/>
+                </a:solidFill>
+                <a:latin typeface="Calibri" pitchFamily="34" charset="0"/>
+                <a:ea typeface="Calibri" pitchFamily="34" charset="-122"/>
+                <a:cs typeface="Calibri" pitchFamily="34" charset="-120"/>
+              </a:rPr>
+              <a:t>Complex task, requires:</a:t>
+            </a:r>
+          </a:p>
+          <a:p>
+            <a:pPr marL="647700" lvl="1" indent="-190500">
+              <a:spcAft>
+                <a:spcPts val="500"/>
+              </a:spcAft>
+              <a:buSzPct val="100000"/>
+              <a:buFontTx/>
+              <a:buChar char="•"/>
+            </a:pPr>
+            <a:r>
+              <a:rPr lang="en-US" sz="1400" dirty="0"/>
+              <a:t>Mapping</a:t>
+            </a:r>
+          </a:p>
+          <a:p>
+            <a:pPr marL="647700" lvl="1" indent="-190500">
+              <a:spcAft>
+                <a:spcPts val="500"/>
+              </a:spcAft>
+              <a:buSzPct val="100000"/>
+              <a:buFontTx/>
+              <a:buChar char="•"/>
+            </a:pPr>
+            <a:r>
+              <a:rPr lang="en-US" sz="1400" dirty="0"/>
+              <a:t>Localization</a:t>
+            </a:r>
+          </a:p>
+          <a:p>
+            <a:pPr marL="647700" lvl="1" indent="-190500">
+              <a:spcAft>
+                <a:spcPts val="500"/>
+              </a:spcAft>
+              <a:buSzPct val="100000"/>
+              <a:buFontTx/>
+              <a:buChar char="•"/>
+            </a:pPr>
+            <a:r>
+              <a:rPr lang="en-US" sz="1400" dirty="0"/>
+              <a:t>Navigation</a:t>
+            </a:r>
+          </a:p>
+          <a:p>
+            <a:pPr marL="647700" lvl="1" indent="-190500">
+              <a:spcAft>
+                <a:spcPts val="500"/>
+              </a:spcAft>
+              <a:buSzPct val="100000"/>
+              <a:buFontTx/>
+              <a:buChar char="•"/>
+            </a:pPr>
+            <a:r>
+              <a:rPr lang="en-US" sz="1400" dirty="0"/>
+              <a:t>Decision making</a:t>
+            </a:r>
+            <a:endParaRPr lang="en-US" dirty="0"/>
+          </a:p>
+        </p:txBody>
+      </p:sp>
+      <p:sp>
+        <p:nvSpPr>
+          <p:cNvPr id="9" name="Text 6"/>
+          <p:cNvSpPr/>
+          <p:nvPr/>
+        </p:nvSpPr>
+        <p:spPr>
+          <a:xfrm>
+            <a:off x="5218795" y="3659027"/>
+            <a:ext cx="3657600" cy="228600"/>
+          </a:xfrm>
+          <a:prstGeom prst="rect">
+            <a:avLst/>
+          </a:prstGeom>
+          <a:noFill/>
+          <a:ln/>
+        </p:spPr>
+        <p:txBody>
+          <a:bodyPr wrap="square" rtlCol="0" anchor="ctr"/>
+          <a:lstStyle/>
+          <a:p>
+            <a:pPr marL="0" indent="0" algn="ctr">
+              <a:buNone/>
+            </a:pPr>
+            <a:r>
+              <a:rPr lang="en-US" sz="900" dirty="0">
+                <a:solidFill>
+                  <a:srgbClr val="5A5A5A"/>
+                </a:solidFill>
+                <a:latin typeface="Calibri" pitchFamily="34" charset="0"/>
+                <a:ea typeface="Calibri" pitchFamily="34" charset="-122"/>
+                <a:cs typeface="Calibri" pitchFamily="34" charset="-120"/>
+              </a:rPr>
+              <a:t>Autonomous exploration application examples</a:t>
+            </a:r>
+            <a:endParaRPr lang="en-US" sz="900" dirty="0"/>
+          </a:p>
+        </p:txBody>
+      </p:sp>
+      <p:pic>
+        <p:nvPicPr>
+          <p:cNvPr id="8" name="Immagine 7">
             <a:extLst>
               <a:ext uri="{FF2B5EF4-FFF2-40B4-BE49-F238E27FC236}">
-                <a16:creationId xmlns:a16="http://schemas.microsoft.com/office/drawing/2014/main" id="{62960C30-3286-4C2A-B688-DEAE83675C09}"/>
+                <a16:creationId xmlns:a16="http://schemas.microsoft.com/office/drawing/2014/main" id="{E497BBE3-9ECA-8B02-05B1-5CA8969F9490}"/>
+              </a:ext>
+            </a:extLst>
+          </p:cNvPr>
+          <p:cNvPicPr>
+            <a:picLocks noChangeAspect="1"/>
+          </p:cNvPicPr>
+          <p:nvPr/>
+        </p:nvPicPr>
+        <p:blipFill>
+          <a:blip r:embed="rId3"/>
+          <a:srcRect l="11347" r="3033"/>
+          <a:stretch>
+            <a:fillRect/>
+          </a:stretch>
+        </p:blipFill>
+        <p:spPr>
+          <a:xfrm>
+            <a:off x="5187789" y="1277305"/>
+            <a:ext cx="1757361" cy="1077575"/>
+          </a:xfrm>
+          <a:prstGeom prst="rect">
+            <a:avLst/>
+          </a:prstGeom>
+        </p:spPr>
+      </p:pic>
+      <p:pic>
+        <p:nvPicPr>
+          <p:cNvPr id="11" name="Immagine 10">
+            <a:extLst>
+              <a:ext uri="{FF2B5EF4-FFF2-40B4-BE49-F238E27FC236}">
+                <a16:creationId xmlns:a16="http://schemas.microsoft.com/office/drawing/2014/main" id="{5D04AF77-05C1-3B51-5275-C1DCABC700B3}"/>
+              </a:ext>
+            </a:extLst>
+          </p:cNvPr>
+          <p:cNvPicPr>
+            <a:picLocks noChangeAspect="1"/>
+          </p:cNvPicPr>
+          <p:nvPr/>
+        </p:nvPicPr>
+        <p:blipFill>
+          <a:blip r:embed="rId4"/>
+          <a:srcRect t="10651" b="10263"/>
+          <a:stretch>
+            <a:fillRect/>
+          </a:stretch>
+        </p:blipFill>
+        <p:spPr>
+          <a:xfrm>
+            <a:off x="5975687" y="2421300"/>
+            <a:ext cx="2043800" cy="1077575"/>
+          </a:xfrm>
+          <a:prstGeom prst="rect">
+            <a:avLst/>
+          </a:prstGeom>
+        </p:spPr>
+      </p:pic>
+      <p:pic>
+        <p:nvPicPr>
+          <p:cNvPr id="13" name="Immagine 12">
+            <a:extLst>
+              <a:ext uri="{FF2B5EF4-FFF2-40B4-BE49-F238E27FC236}">
+                <a16:creationId xmlns:a16="http://schemas.microsoft.com/office/drawing/2014/main" id="{EE99CC8A-8B36-9C8B-61FA-7500A73EB6EB}"/>
+              </a:ext>
+            </a:extLst>
+          </p:cNvPr>
+          <p:cNvPicPr>
+            <a:picLocks noChangeAspect="1"/>
+          </p:cNvPicPr>
+          <p:nvPr/>
+        </p:nvPicPr>
+        <p:blipFill>
+          <a:blip r:embed="rId5"/>
+          <a:srcRect l="9782" r="4233"/>
+          <a:stretch>
+            <a:fillRect/>
+          </a:stretch>
+        </p:blipFill>
+        <p:spPr>
+          <a:xfrm>
+            <a:off x="7046588" y="1277305"/>
+            <a:ext cx="1757362" cy="1077575"/>
+          </a:xfrm>
+          <a:prstGeom prst="rect">
+            <a:avLst/>
+          </a:prstGeom>
+        </p:spPr>
+      </p:pic>
+      <p:cxnSp>
+        <p:nvCxnSpPr>
+          <p:cNvPr id="15" name="Connettore 2 14">
+            <a:extLst>
+              <a:ext uri="{FF2B5EF4-FFF2-40B4-BE49-F238E27FC236}">
+                <a16:creationId xmlns:a16="http://schemas.microsoft.com/office/drawing/2014/main" id="{546CEDB6-C13F-EB1B-1AC8-58CA8B3E7A63}"/>
+              </a:ext>
+            </a:extLst>
+          </p:cNvPr>
+          <p:cNvCxnSpPr/>
+          <p:nvPr/>
+        </p:nvCxnSpPr>
+        <p:spPr>
+          <a:xfrm>
+            <a:off x="2428872" y="3814765"/>
+            <a:ext cx="278606" cy="0"/>
+          </a:xfrm>
+          <a:prstGeom prst="straightConnector1">
+            <a:avLst/>
+          </a:prstGeom>
+          <a:ln w="28575">
+            <a:tailEnd type="triangle"/>
+          </a:ln>
+        </p:spPr>
+        <p:style>
+          <a:lnRef idx="1">
+            <a:schemeClr val="accent1"/>
+          </a:lnRef>
+          <a:fillRef idx="0">
+            <a:schemeClr val="accent1"/>
+          </a:fillRef>
+          <a:effectRef idx="0">
+            <a:schemeClr val="accent1"/>
+          </a:effectRef>
+          <a:fontRef idx="minor">
+            <a:schemeClr val="tx1"/>
+          </a:fontRef>
+        </p:style>
+      </p:cxnSp>
+      <p:sp>
+        <p:nvSpPr>
+          <p:cNvPr id="16" name="CasellaDiTesto 15">
+            <a:extLst>
+              <a:ext uri="{FF2B5EF4-FFF2-40B4-BE49-F238E27FC236}">
+                <a16:creationId xmlns:a16="http://schemas.microsoft.com/office/drawing/2014/main" id="{647D1818-D2C0-D195-C9F9-F000EE269B9B}"/>
               </a:ext>
             </a:extLst>
           </p:cNvPr>
@@ -3312,8 +4478,8 @@
         </p:nvSpPr>
         <p:spPr>
           <a:xfrm>
-            <a:off x="914400" y="1778000"/>
-            <a:ext cx="7315200" cy="762000"/>
+            <a:off x="2836069" y="3553716"/>
+            <a:ext cx="2382725" cy="523220"/>
           </a:xfrm>
           <a:prstGeom prst="rect">
             <a:avLst/>
@@ -3321,75 +4487,21 @@
           <a:noFill/>
         </p:spPr>
         <p:txBody>
-          <a:bodyPr vertOverflow="overflow" vert="horz" wrap="square" rtlCol="0" anchor="ctr" anchorCtr="0">
-            <a:noAutofit/>
+          <a:bodyPr wrap="square" rtlCol="0">
+            <a:spAutoFit/>
           </a:bodyPr>
           <a:lstStyle/>
           <a:p>
-            <a:pPr algn="l"/>
-            <a:r>
-              <a:rPr lang="it-IT" sz="3600" b="1">
-                <a:solidFill>
-                  <a:srgbClr val="1A1A1A"/>
-                </a:solidFill>
-                <a:latin typeface="Calibri"/>
-                <a:ea typeface="Calibri"/>
-                <a:cs typeface="Calibri"/>
-              </a:rPr>
-              <a:t>Section Title</a:t>
-            </a:r>
+            <a:pPr algn="ctr"/>
+            <a:r>
+              <a:rPr lang="en-US" sz="1400" dirty="0"/>
+              <a:t> The agent must decide where to move next </a:t>
+            </a:r>
+            <a:endParaRPr lang="it-IT" sz="1400" dirty="0"/>
           </a:p>
         </p:txBody>
       </p:sp>
-      <p:sp>
-        <p:nvSpPr>
-          <p:cNvPr id="3" name="CasellaDiTesto 2">
-            <a:extLst>
-              <a:ext uri="{FF2B5EF4-FFF2-40B4-BE49-F238E27FC236}">
-                <a16:creationId xmlns:a16="http://schemas.microsoft.com/office/drawing/2014/main" id="{0AEED710-32FB-4CE7-BC12-02102C1D2BFF}"/>
-              </a:ext>
-            </a:extLst>
-          </p:cNvPr>
-          <p:cNvSpPr txBox="1"/>
-          <p:nvPr/>
-        </p:nvSpPr>
-        <p:spPr>
-          <a:xfrm>
-            <a:off x="1524000" y="2667000"/>
-            <a:ext cx="6096000" cy="381000"/>
-          </a:xfrm>
-          <a:prstGeom prst="rect">
-            <a:avLst/>
-          </a:prstGeom>
-          <a:noFill/>
-        </p:spPr>
-        <p:txBody>
-          <a:bodyPr vertOverflow="overflow" vert="horz" wrap="square" rtlCol="0" anchor="t">
-            <a:noAutofit/>
-          </a:bodyPr>
-          <a:lstStyle/>
-          <a:p>
-            <a:pPr algn="l"/>
-            <a:r>
-              <a:rPr lang="it-IT">
-                <a:solidFill>
-                  <a:srgbClr val="666666"/>
-                </a:solidFill>
-                <a:latin typeface="Calibri"/>
-                <a:ea typeface="Calibri"/>
-                <a:cs typeface="Calibri"/>
-              </a:rPr>
-              <a:t>Section subtitle or description</a:t>
-            </a:r>
-          </a:p>
-        </p:txBody>
-      </p:sp>
     </p:spTree>
-    <p:extLst>
-      <p:ext uri="{BB962C8B-B14F-4D97-AF65-F5344CB8AC3E}">
-        <p14:creationId xmlns:p14="http://schemas.microsoft.com/office/powerpoint/2010/main" val="2358288740"/>
-      </p:ext>
-    </p:extLst>
   </p:cSld>
   <p:clrMapOvr>
     <a:masterClrMapping/>
@@ -3419,6 +4531,650 @@
           <p:cNvPr id="3" name="CasellaDiTesto 2">
             <a:extLst>
               <a:ext uri="{FF2B5EF4-FFF2-40B4-BE49-F238E27FC236}">
+                <a16:creationId xmlns:a16="http://schemas.microsoft.com/office/drawing/2014/main" id="{B901EC0B-66A8-4AFA-930E-484C08D7F9A2}"/>
+              </a:ext>
+            </a:extLst>
+          </p:cNvPr>
+          <p:cNvSpPr txBox="1"/>
+          <p:nvPr/>
+        </p:nvSpPr>
+        <p:spPr>
+          <a:xfrm>
+            <a:off x="508000" y="254000"/>
+            <a:ext cx="8229600" cy="457200"/>
+          </a:xfrm>
+          <a:prstGeom prst="rect">
+            <a:avLst/>
+          </a:prstGeom>
+          <a:noFill/>
+        </p:spPr>
+        <p:txBody>
+          <a:bodyPr vertOverflow="overflow" vert="horz" wrap="square" rtlCol="0" anchor="ctr" anchorCtr="0">
+            <a:noAutofit/>
+          </a:bodyPr>
+          <a:lstStyle/>
+          <a:p>
+            <a:pPr algn="l"/>
+            <a:r>
+              <a:rPr lang="it-IT" sz="2600" b="1" dirty="0">
+                <a:solidFill>
+                  <a:srgbClr val="1A1A1A"/>
+                </a:solidFill>
+                <a:latin typeface="Calibri"/>
+                <a:ea typeface="Calibri"/>
+                <a:cs typeface="Calibri"/>
+              </a:rPr>
+              <a:t>Slide Title</a:t>
+            </a:r>
+          </a:p>
+        </p:txBody>
+      </p:sp>
+      <p:sp>
+        <p:nvSpPr>
+          <p:cNvPr id="5" name="CasellaDiTesto 4">
+            <a:extLst>
+              <a:ext uri="{FF2B5EF4-FFF2-40B4-BE49-F238E27FC236}">
+                <a16:creationId xmlns:a16="http://schemas.microsoft.com/office/drawing/2014/main" id="{6BD244D8-F9CB-4AF5-BAE2-F0001DF3A600}"/>
+              </a:ext>
+            </a:extLst>
+          </p:cNvPr>
+          <p:cNvSpPr txBox="1"/>
+          <p:nvPr/>
+        </p:nvSpPr>
+        <p:spPr>
+          <a:xfrm>
+            <a:off x="368300" y="914400"/>
+            <a:ext cx="8382000" cy="3556000"/>
+          </a:xfrm>
+          <a:prstGeom prst="rect">
+            <a:avLst/>
+          </a:prstGeom>
+          <a:noFill/>
+        </p:spPr>
+        <p:txBody>
+          <a:bodyPr vertOverflow="overflow" vert="horz" wrap="square" rtlCol="0" anchor="t">
+            <a:noAutofit/>
+          </a:bodyPr>
+          <a:lstStyle/>
+          <a:p>
+            <a:pPr algn="l"/>
+            <a:r>
+              <a:rPr lang="it-IT" sz="1600" dirty="0">
+                <a:solidFill>
+                  <a:srgbClr val="333333"/>
+                </a:solidFill>
+                <a:latin typeface="Calibri"/>
+                <a:ea typeface="Calibri"/>
+                <a:cs typeface="Calibri"/>
+              </a:rPr>
+              <a:t>Content </a:t>
+            </a:r>
+            <a:r>
+              <a:rPr lang="it-IT" sz="1600" dirty="0" err="1">
+                <a:solidFill>
+                  <a:srgbClr val="333333"/>
+                </a:solidFill>
+                <a:latin typeface="Calibri"/>
+                <a:ea typeface="Calibri"/>
+                <a:cs typeface="Calibri"/>
+              </a:rPr>
+              <a:t>goes</a:t>
+            </a:r>
+            <a:r>
+              <a:rPr lang="it-IT" sz="1600" dirty="0">
+                <a:solidFill>
+                  <a:srgbClr val="333333"/>
+                </a:solidFill>
+                <a:latin typeface="Calibri"/>
+                <a:ea typeface="Calibri"/>
+                <a:cs typeface="Calibri"/>
+              </a:rPr>
+              <a:t> </a:t>
+            </a:r>
+            <a:r>
+              <a:rPr lang="it-IT" sz="1600" dirty="0" err="1">
+                <a:solidFill>
+                  <a:srgbClr val="333333"/>
+                </a:solidFill>
+                <a:latin typeface="Calibri"/>
+                <a:ea typeface="Calibri"/>
+                <a:cs typeface="Calibri"/>
+              </a:rPr>
+              <a:t>here</a:t>
+            </a:r>
+            <a:endParaRPr lang="it-IT" sz="1600" dirty="0">
+              <a:solidFill>
+                <a:srgbClr val="333333"/>
+              </a:solidFill>
+              <a:latin typeface="Calibri"/>
+              <a:ea typeface="Calibri"/>
+              <a:cs typeface="Calibri"/>
+            </a:endParaRPr>
+          </a:p>
+        </p:txBody>
+      </p:sp>
+    </p:spTree>
+    <p:extLst>
+      <p:ext uri="{BB962C8B-B14F-4D97-AF65-F5344CB8AC3E}">
+        <p14:creationId xmlns:p14="http://schemas.microsoft.com/office/powerpoint/2010/main" val="3678948679"/>
+      </p:ext>
+    </p:extLst>
+  </p:cSld>
+  <p:clrMapOvr>
+    <a:masterClrMapping/>
+  </p:clrMapOvr>
+</p:sld>
+</file>
+
+<file path=ppt/slides/slide6.xml><?xml version="1.0" encoding="utf-8"?>
+<p:sld xmlns:a="http://schemas.openxmlformats.org/drawingml/2006/main" xmlns:r="http://schemas.openxmlformats.org/officeDocument/2006/relationships" xmlns:p="http://schemas.openxmlformats.org/presentationml/2006/main">
+  <p:cSld>
+    <p:spTree>
+      <p:nvGrpSpPr>
+        <p:cNvPr id="1" name="">
+          <a:extLst>
+            <a:ext uri="{FF2B5EF4-FFF2-40B4-BE49-F238E27FC236}">
+              <a16:creationId xmlns:a16="http://schemas.microsoft.com/office/drawing/2014/main" id="{A16412B2-2128-3929-4281-1E0C8C4E90DB}"/>
+            </a:ext>
+          </a:extLst>
+        </p:cNvPr>
+        <p:cNvGrpSpPr/>
+        <p:nvPr/>
+      </p:nvGrpSpPr>
+      <p:grpSpPr>
+        <a:xfrm>
+          <a:off x="0" y="0"/>
+          <a:ext cx="0" cy="0"/>
+          <a:chOff x="0" y="0"/>
+          <a:chExt cx="0" cy="0"/>
+        </a:xfrm>
+      </p:grpSpPr>
+      <p:sp>
+        <p:nvSpPr>
+          <p:cNvPr id="3" name="CasellaDiTesto 2">
+            <a:extLst>
+              <a:ext uri="{FF2B5EF4-FFF2-40B4-BE49-F238E27FC236}">
+                <a16:creationId xmlns:a16="http://schemas.microsoft.com/office/drawing/2014/main" id="{0844656A-11D0-0899-E1EE-08CAD68A483B}"/>
+              </a:ext>
+            </a:extLst>
+          </p:cNvPr>
+          <p:cNvSpPr txBox="1"/>
+          <p:nvPr/>
+        </p:nvSpPr>
+        <p:spPr>
+          <a:xfrm>
+            <a:off x="508000" y="254000"/>
+            <a:ext cx="8229600" cy="457200"/>
+          </a:xfrm>
+          <a:prstGeom prst="rect">
+            <a:avLst/>
+          </a:prstGeom>
+          <a:noFill/>
+        </p:spPr>
+        <p:txBody>
+          <a:bodyPr vertOverflow="overflow" vert="horz" wrap="square" rtlCol="0" anchor="ctr" anchorCtr="0">
+            <a:noAutofit/>
+          </a:bodyPr>
+          <a:lstStyle/>
+          <a:p>
+            <a:pPr algn="l"/>
+            <a:r>
+              <a:rPr lang="it-IT" sz="2600" b="1" dirty="0">
+                <a:solidFill>
+                  <a:srgbClr val="1A1A1A"/>
+                </a:solidFill>
+                <a:latin typeface="Calibri"/>
+                <a:ea typeface="Calibri"/>
+                <a:cs typeface="Calibri"/>
+              </a:rPr>
+              <a:t>Slide Title</a:t>
+            </a:r>
+          </a:p>
+        </p:txBody>
+      </p:sp>
+      <p:sp>
+        <p:nvSpPr>
+          <p:cNvPr id="5" name="CasellaDiTesto 4">
+            <a:extLst>
+              <a:ext uri="{FF2B5EF4-FFF2-40B4-BE49-F238E27FC236}">
+                <a16:creationId xmlns:a16="http://schemas.microsoft.com/office/drawing/2014/main" id="{46C72F1A-60D1-A8D6-3402-F45F16CEE18F}"/>
+              </a:ext>
+            </a:extLst>
+          </p:cNvPr>
+          <p:cNvSpPr txBox="1"/>
+          <p:nvPr/>
+        </p:nvSpPr>
+        <p:spPr>
+          <a:xfrm>
+            <a:off x="368300" y="914400"/>
+            <a:ext cx="8382000" cy="3556000"/>
+          </a:xfrm>
+          <a:prstGeom prst="rect">
+            <a:avLst/>
+          </a:prstGeom>
+          <a:noFill/>
+        </p:spPr>
+        <p:txBody>
+          <a:bodyPr vertOverflow="overflow" vert="horz" wrap="square" rtlCol="0" anchor="t">
+            <a:noAutofit/>
+          </a:bodyPr>
+          <a:lstStyle/>
+          <a:p>
+            <a:pPr algn="l"/>
+            <a:r>
+              <a:rPr lang="it-IT" sz="1600" dirty="0">
+                <a:solidFill>
+                  <a:srgbClr val="333333"/>
+                </a:solidFill>
+                <a:latin typeface="Calibri"/>
+                <a:ea typeface="Calibri"/>
+                <a:cs typeface="Calibri"/>
+              </a:rPr>
+              <a:t>Content </a:t>
+            </a:r>
+            <a:r>
+              <a:rPr lang="it-IT" sz="1600" dirty="0" err="1">
+                <a:solidFill>
+                  <a:srgbClr val="333333"/>
+                </a:solidFill>
+                <a:latin typeface="Calibri"/>
+                <a:ea typeface="Calibri"/>
+                <a:cs typeface="Calibri"/>
+              </a:rPr>
+              <a:t>goes</a:t>
+            </a:r>
+            <a:r>
+              <a:rPr lang="it-IT" sz="1600" dirty="0">
+                <a:solidFill>
+                  <a:srgbClr val="333333"/>
+                </a:solidFill>
+                <a:latin typeface="Calibri"/>
+                <a:ea typeface="Calibri"/>
+                <a:cs typeface="Calibri"/>
+              </a:rPr>
+              <a:t> </a:t>
+            </a:r>
+            <a:r>
+              <a:rPr lang="it-IT" sz="1600" dirty="0" err="1">
+                <a:solidFill>
+                  <a:srgbClr val="333333"/>
+                </a:solidFill>
+                <a:latin typeface="Calibri"/>
+                <a:ea typeface="Calibri"/>
+                <a:cs typeface="Calibri"/>
+              </a:rPr>
+              <a:t>here</a:t>
+            </a:r>
+            <a:endParaRPr lang="it-IT" sz="1600" dirty="0">
+              <a:solidFill>
+                <a:srgbClr val="333333"/>
+              </a:solidFill>
+              <a:latin typeface="Calibri"/>
+              <a:ea typeface="Calibri"/>
+              <a:cs typeface="Calibri"/>
+            </a:endParaRPr>
+          </a:p>
+        </p:txBody>
+      </p:sp>
+    </p:spTree>
+    <p:extLst>
+      <p:ext uri="{BB962C8B-B14F-4D97-AF65-F5344CB8AC3E}">
+        <p14:creationId xmlns:p14="http://schemas.microsoft.com/office/powerpoint/2010/main" val="2759301547"/>
+      </p:ext>
+    </p:extLst>
+  </p:cSld>
+  <p:clrMapOvr>
+    <a:masterClrMapping/>
+  </p:clrMapOvr>
+</p:sld>
+</file>
+
+<file path=ppt/slides/slide7.xml><?xml version="1.0" encoding="utf-8"?>
+<p:sld xmlns:a="http://schemas.openxmlformats.org/drawingml/2006/main" xmlns:r="http://schemas.openxmlformats.org/officeDocument/2006/relationships" xmlns:p="http://schemas.openxmlformats.org/presentationml/2006/main">
+  <p:cSld>
+    <p:spTree>
+      <p:nvGrpSpPr>
+        <p:cNvPr id="1" name=""/>
+        <p:cNvGrpSpPr/>
+        <p:nvPr/>
+      </p:nvGrpSpPr>
+      <p:grpSpPr>
+        <a:xfrm>
+          <a:off x="0" y="0"/>
+          <a:ext cx="0" cy="0"/>
+          <a:chOff x="0" y="0"/>
+          <a:chExt cx="0" cy="0"/>
+        </a:xfrm>
+      </p:grpSpPr>
+      <p:sp>
+        <p:nvSpPr>
+          <p:cNvPr id="3" name="CasellaDiTesto 2">
+            <a:extLst>
+              <a:ext uri="{FF2B5EF4-FFF2-40B4-BE49-F238E27FC236}">
+                <a16:creationId xmlns:a16="http://schemas.microsoft.com/office/drawing/2014/main" id="{A2573F97-AE10-444A-9306-BFF3D7DCA88C}"/>
+              </a:ext>
+            </a:extLst>
+          </p:cNvPr>
+          <p:cNvSpPr txBox="1"/>
+          <p:nvPr/>
+        </p:nvSpPr>
+        <p:spPr>
+          <a:xfrm>
+            <a:off x="508000" y="254000"/>
+            <a:ext cx="8229600" cy="457200"/>
+          </a:xfrm>
+          <a:prstGeom prst="rect">
+            <a:avLst/>
+          </a:prstGeom>
+          <a:noFill/>
+        </p:spPr>
+        <p:txBody>
+          <a:bodyPr vertOverflow="overflow" vert="horz" wrap="square" rtlCol="0" anchor="ctr" anchorCtr="0">
+            <a:noAutofit/>
+          </a:bodyPr>
+          <a:lstStyle/>
+          <a:p>
+            <a:pPr algn="l"/>
+            <a:r>
+              <a:rPr lang="it-IT" sz="2600" b="1" dirty="0">
+                <a:solidFill>
+                  <a:srgbClr val="1A1A1A"/>
+                </a:solidFill>
+                <a:latin typeface="Calibri"/>
+                <a:ea typeface="Calibri"/>
+                <a:cs typeface="Calibri"/>
+              </a:rPr>
+              <a:t>Slide Title</a:t>
+            </a:r>
+          </a:p>
+        </p:txBody>
+      </p:sp>
+      <p:sp>
+        <p:nvSpPr>
+          <p:cNvPr id="5" name="CasellaDiTesto 4">
+            <a:extLst>
+              <a:ext uri="{FF2B5EF4-FFF2-40B4-BE49-F238E27FC236}">
+                <a16:creationId xmlns:a16="http://schemas.microsoft.com/office/drawing/2014/main" id="{FD0ECAD6-FF98-4193-979E-566FFED4B5AD}"/>
+              </a:ext>
+            </a:extLst>
+          </p:cNvPr>
+          <p:cNvSpPr txBox="1"/>
+          <p:nvPr/>
+        </p:nvSpPr>
+        <p:spPr>
+          <a:xfrm>
+            <a:off x="368300" y="914400"/>
+            <a:ext cx="4089400" cy="3556000"/>
+          </a:xfrm>
+          <a:prstGeom prst="rect">
+            <a:avLst/>
+          </a:prstGeom>
+          <a:noFill/>
+        </p:spPr>
+        <p:txBody>
+          <a:bodyPr vertOverflow="overflow" vert="horz" wrap="square" rtlCol="0" anchor="t">
+            <a:noAutofit/>
+          </a:bodyPr>
+          <a:lstStyle/>
+          <a:p>
+            <a:pPr algn="l"/>
+            <a:r>
+              <a:rPr lang="it-IT" sz="1600" dirty="0">
+                <a:solidFill>
+                  <a:srgbClr val="333333"/>
+                </a:solidFill>
+                <a:latin typeface="Calibri"/>
+                <a:ea typeface="Calibri"/>
+                <a:cs typeface="Calibri"/>
+              </a:rPr>
+              <a:t>Left </a:t>
+            </a:r>
+            <a:r>
+              <a:rPr lang="it-IT" sz="1600" dirty="0" err="1">
+                <a:solidFill>
+                  <a:srgbClr val="333333"/>
+                </a:solidFill>
+                <a:latin typeface="Calibri"/>
+                <a:ea typeface="Calibri"/>
+                <a:cs typeface="Calibri"/>
+              </a:rPr>
+              <a:t>content</a:t>
+            </a:r>
+            <a:endParaRPr lang="it-IT" sz="1600" dirty="0">
+              <a:solidFill>
+                <a:srgbClr val="333333"/>
+              </a:solidFill>
+              <a:latin typeface="Calibri"/>
+              <a:ea typeface="Calibri"/>
+              <a:cs typeface="Calibri"/>
+            </a:endParaRPr>
+          </a:p>
+        </p:txBody>
+      </p:sp>
+      <p:sp>
+        <p:nvSpPr>
+          <p:cNvPr id="6" name="CasellaDiTesto 5">
+            <a:extLst>
+              <a:ext uri="{FF2B5EF4-FFF2-40B4-BE49-F238E27FC236}">
+                <a16:creationId xmlns:a16="http://schemas.microsoft.com/office/drawing/2014/main" id="{34CBD74A-88E8-4A7F-BF8C-396FF18C5FD4}"/>
+              </a:ext>
+            </a:extLst>
+          </p:cNvPr>
+          <p:cNvSpPr txBox="1"/>
+          <p:nvPr/>
+        </p:nvSpPr>
+        <p:spPr>
+          <a:xfrm>
+            <a:off x="4699000" y="914400"/>
+            <a:ext cx="4089400" cy="3556000"/>
+          </a:xfrm>
+          <a:prstGeom prst="rect">
+            <a:avLst/>
+          </a:prstGeom>
+          <a:noFill/>
+        </p:spPr>
+        <p:txBody>
+          <a:bodyPr vertOverflow="overflow" vert="horz" wrap="square" rtlCol="0" anchor="t">
+            <a:noAutofit/>
+          </a:bodyPr>
+          <a:lstStyle/>
+          <a:p>
+            <a:pPr algn="l"/>
+            <a:r>
+              <a:rPr lang="it-IT" sz="1600" dirty="0" err="1">
+                <a:solidFill>
+                  <a:srgbClr val="333333"/>
+                </a:solidFill>
+                <a:latin typeface="Calibri"/>
+                <a:ea typeface="Calibri"/>
+                <a:cs typeface="Calibri"/>
+              </a:rPr>
+              <a:t>Right</a:t>
+            </a:r>
+            <a:r>
+              <a:rPr lang="it-IT" sz="1600" dirty="0">
+                <a:solidFill>
+                  <a:srgbClr val="333333"/>
+                </a:solidFill>
+                <a:latin typeface="Calibri"/>
+                <a:ea typeface="Calibri"/>
+                <a:cs typeface="Calibri"/>
+              </a:rPr>
+              <a:t> </a:t>
+            </a:r>
+            <a:r>
+              <a:rPr lang="it-IT" sz="1600" dirty="0" err="1">
+                <a:solidFill>
+                  <a:srgbClr val="333333"/>
+                </a:solidFill>
+                <a:latin typeface="Calibri"/>
+                <a:ea typeface="Calibri"/>
+                <a:cs typeface="Calibri"/>
+              </a:rPr>
+              <a:t>content</a:t>
+            </a:r>
+            <a:endParaRPr lang="it-IT" sz="1600" dirty="0">
+              <a:solidFill>
+                <a:srgbClr val="333333"/>
+              </a:solidFill>
+              <a:latin typeface="Calibri"/>
+              <a:ea typeface="Calibri"/>
+              <a:cs typeface="Calibri"/>
+            </a:endParaRPr>
+          </a:p>
+        </p:txBody>
+      </p:sp>
+    </p:spTree>
+    <p:extLst>
+      <p:ext uri="{BB962C8B-B14F-4D97-AF65-F5344CB8AC3E}">
+        <p14:creationId xmlns:p14="http://schemas.microsoft.com/office/powerpoint/2010/main" val="1959701455"/>
+      </p:ext>
+    </p:extLst>
+  </p:cSld>
+  <p:clrMapOvr>
+    <a:masterClrMapping/>
+  </p:clrMapOvr>
+</p:sld>
+</file>
+
+<file path=ppt/slides/slide8.xml><?xml version="1.0" encoding="utf-8"?>
+<p:sld xmlns:a="http://schemas.openxmlformats.org/drawingml/2006/main" xmlns:r="http://schemas.openxmlformats.org/officeDocument/2006/relationships" xmlns:p="http://schemas.openxmlformats.org/presentationml/2006/main">
+  <p:cSld>
+    <p:spTree>
+      <p:nvGrpSpPr>
+        <p:cNvPr id="1" name=""/>
+        <p:cNvGrpSpPr/>
+        <p:nvPr/>
+      </p:nvGrpSpPr>
+      <p:grpSpPr>
+        <a:xfrm>
+          <a:off x="0" y="0"/>
+          <a:ext cx="0" cy="0"/>
+          <a:chOff x="0" y="0"/>
+          <a:chExt cx="0" cy="0"/>
+        </a:xfrm>
+      </p:grpSpPr>
+      <p:sp>
+        <p:nvSpPr>
+          <p:cNvPr id="2" name="CasellaDiTesto 1">
+            <a:extLst>
+              <a:ext uri="{FF2B5EF4-FFF2-40B4-BE49-F238E27FC236}">
+                <a16:creationId xmlns:a16="http://schemas.microsoft.com/office/drawing/2014/main" id="{62960C30-3286-4C2A-B688-DEAE83675C09}"/>
+              </a:ext>
+            </a:extLst>
+          </p:cNvPr>
+          <p:cNvSpPr txBox="1"/>
+          <p:nvPr/>
+        </p:nvSpPr>
+        <p:spPr>
+          <a:xfrm>
+            <a:off x="914400" y="1778000"/>
+            <a:ext cx="7315200" cy="762000"/>
+          </a:xfrm>
+          <a:prstGeom prst="rect">
+            <a:avLst/>
+          </a:prstGeom>
+          <a:noFill/>
+        </p:spPr>
+        <p:txBody>
+          <a:bodyPr vertOverflow="overflow" vert="horz" wrap="square" rtlCol="0" anchor="ctr" anchorCtr="0">
+            <a:noAutofit/>
+          </a:bodyPr>
+          <a:lstStyle/>
+          <a:p>
+            <a:pPr algn="l"/>
+            <a:r>
+              <a:rPr lang="it-IT" sz="3600" b="1">
+                <a:solidFill>
+                  <a:srgbClr val="1A1A1A"/>
+                </a:solidFill>
+                <a:latin typeface="Calibri"/>
+                <a:ea typeface="Calibri"/>
+                <a:cs typeface="Calibri"/>
+              </a:rPr>
+              <a:t>Section Title</a:t>
+            </a:r>
+          </a:p>
+        </p:txBody>
+      </p:sp>
+      <p:sp>
+        <p:nvSpPr>
+          <p:cNvPr id="3" name="CasellaDiTesto 2">
+            <a:extLst>
+              <a:ext uri="{FF2B5EF4-FFF2-40B4-BE49-F238E27FC236}">
+                <a16:creationId xmlns:a16="http://schemas.microsoft.com/office/drawing/2014/main" id="{0AEED710-32FB-4CE7-BC12-02102C1D2BFF}"/>
+              </a:ext>
+            </a:extLst>
+          </p:cNvPr>
+          <p:cNvSpPr txBox="1"/>
+          <p:nvPr/>
+        </p:nvSpPr>
+        <p:spPr>
+          <a:xfrm>
+            <a:off x="1524000" y="2667000"/>
+            <a:ext cx="6096000" cy="381000"/>
+          </a:xfrm>
+          <a:prstGeom prst="rect">
+            <a:avLst/>
+          </a:prstGeom>
+          <a:noFill/>
+        </p:spPr>
+        <p:txBody>
+          <a:bodyPr vertOverflow="overflow" vert="horz" wrap="square" rtlCol="0" anchor="t">
+            <a:noAutofit/>
+          </a:bodyPr>
+          <a:lstStyle/>
+          <a:p>
+            <a:pPr algn="l"/>
+            <a:r>
+              <a:rPr lang="it-IT">
+                <a:solidFill>
+                  <a:srgbClr val="666666"/>
+                </a:solidFill>
+                <a:latin typeface="Calibri"/>
+                <a:ea typeface="Calibri"/>
+                <a:cs typeface="Calibri"/>
+              </a:rPr>
+              <a:t>Section subtitle or description</a:t>
+            </a:r>
+          </a:p>
+        </p:txBody>
+      </p:sp>
+    </p:spTree>
+    <p:extLst>
+      <p:ext uri="{BB962C8B-B14F-4D97-AF65-F5344CB8AC3E}">
+        <p14:creationId xmlns:p14="http://schemas.microsoft.com/office/powerpoint/2010/main" val="2358288740"/>
+      </p:ext>
+    </p:extLst>
+  </p:cSld>
+  <p:clrMapOvr>
+    <a:masterClrMapping/>
+  </p:clrMapOvr>
+</p:sld>
+</file>
+
+<file path=ppt/slides/slide9.xml><?xml version="1.0" encoding="utf-8"?>
+<p:sld xmlns:a="http://schemas.openxmlformats.org/drawingml/2006/main" xmlns:r="http://schemas.openxmlformats.org/officeDocument/2006/relationships" xmlns:p="http://schemas.openxmlformats.org/presentationml/2006/main">
+  <p:cSld>
+    <p:spTree>
+      <p:nvGrpSpPr>
+        <p:cNvPr id="1" name=""/>
+        <p:cNvGrpSpPr/>
+        <p:nvPr/>
+      </p:nvGrpSpPr>
+      <p:grpSpPr>
+        <a:xfrm>
+          <a:off x="0" y="0"/>
+          <a:ext cx="0" cy="0"/>
+          <a:chOff x="0" y="0"/>
+          <a:chExt cx="0" cy="0"/>
+        </a:xfrm>
+      </p:grpSpPr>
+      <p:sp>
+        <p:nvSpPr>
+          <p:cNvPr id="3" name="CasellaDiTesto 2">
+            <a:extLst>
+              <a:ext uri="{FF2B5EF4-FFF2-40B4-BE49-F238E27FC236}">
                 <a16:creationId xmlns:a16="http://schemas.microsoft.com/office/drawing/2014/main" id="{D71D1CBA-50C0-4D94-BDFD-CE3626AAB801}"/>
               </a:ext>
             </a:extLst>
@@ -3645,7 +5401,7 @@
 </file>
 
 <file path=ppt/theme/theme1.xml><?xml version="1.0" encoding="utf-8"?>
-<a:theme xmlns:a="http://schemas.openxmlformats.org/drawingml/2006/main" name="Content Slide">
+<a:theme xmlns:a="http://schemas.openxmlformats.org/drawingml/2006/main" name="standard slide">
   <a:themeElements>
     <a:clrScheme name="Office">
       <a:dk1>

--- a/presentation_1.pptx
+++ b/presentation_1.pptx
@@ -6,18 +6,19 @@
     <p:sldMasterId id="2147483655" r:id="rId2"/>
   </p:sldMasterIdLst>
   <p:notesMasterIdLst>
-    <p:notesMasterId r:id="rId12"/>
+    <p:notesMasterId r:id="rId13"/>
   </p:notesMasterIdLst>
   <p:sldIdLst>
     <p:sldId id="266" r:id="rId3"/>
     <p:sldId id="258" r:id="rId4"/>
     <p:sldId id="269" r:id="rId5"/>
     <p:sldId id="259" r:id="rId6"/>
-    <p:sldId id="261" r:id="rId7"/>
-    <p:sldId id="267" r:id="rId8"/>
-    <p:sldId id="262" r:id="rId9"/>
-    <p:sldId id="264" r:id="rId10"/>
-    <p:sldId id="263" r:id="rId11"/>
+    <p:sldId id="271" r:id="rId7"/>
+    <p:sldId id="261" r:id="rId8"/>
+    <p:sldId id="267" r:id="rId9"/>
+    <p:sldId id="262" r:id="rId10"/>
+    <p:sldId id="264" r:id="rId11"/>
+    <p:sldId id="263" r:id="rId12"/>
   </p:sldIdLst>
   <p:sldSz cx="9144000" cy="5143500" type="screen16x9"/>
   <p:notesSz cx="5143500" cy="9144000"/>
@@ -483,6 +484,90 @@
             <a:fld id="{F7021451-1387-4CA6-816F-3879F97B5CBC}" type="slidenum">
               <a:rPr lang="en-US"/>
               <a:t>4</a:t>
+            </a:fld>
+            <a:endParaRPr lang="en-US"/>
+          </a:p>
+        </p:txBody>
+      </p:sp>
+    </p:spTree>
+    <p:extLst>
+      <p:ext uri="{BB962C8B-B14F-4D97-AF65-F5344CB8AC3E}">
+        <p14:creationId xmlns:p14="http://schemas.microsoft.com/office/powerpoint/2010/main" val="1024086991"/>
+      </p:ext>
+    </p:extLst>
+  </p:cSld>
+  <p:clrMapOvr>
+    <a:masterClrMapping/>
+  </p:clrMapOvr>
+</p:notes>
+</file>
+
+<file path=ppt/notesSlides/notesSlide4.xml><?xml version="1.0" encoding="utf-8"?>
+<p:notes xmlns:a="http://schemas.openxmlformats.org/drawingml/2006/main" xmlns:r="http://schemas.openxmlformats.org/officeDocument/2006/relationships" xmlns:p="http://schemas.openxmlformats.org/presentationml/2006/main">
+  <p:cSld>
+    <p:spTree>
+      <p:nvGrpSpPr>
+        <p:cNvPr id="1" name=""/>
+        <p:cNvGrpSpPr/>
+        <p:nvPr/>
+      </p:nvGrpSpPr>
+      <p:grpSpPr>
+        <a:xfrm>
+          <a:off x="0" y="0"/>
+          <a:ext cx="0" cy="0"/>
+          <a:chOff x="0" y="0"/>
+          <a:chExt cx="0" cy="0"/>
+        </a:xfrm>
+      </p:grpSpPr>
+      <p:sp>
+        <p:nvSpPr>
+          <p:cNvPr id="2" name="Slide Image Placeholder 1"/>
+          <p:cNvSpPr>
+            <a:spLocks noGrp="1" noRot="1" noChangeAspect="1"/>
+          </p:cNvSpPr>
+          <p:nvPr>
+            <p:ph type="sldImg"/>
+          </p:nvPr>
+        </p:nvSpPr>
+        <p:spPr/>
+      </p:sp>
+      <p:sp>
+        <p:nvSpPr>
+          <p:cNvPr id="3" name="Notes Placeholder 2"/>
+          <p:cNvSpPr>
+            <a:spLocks noGrp="1"/>
+          </p:cNvSpPr>
+          <p:nvPr>
+            <p:ph type="body" idx="1"/>
+          </p:nvPr>
+        </p:nvSpPr>
+        <p:spPr/>
+        <p:txBody>
+          <a:bodyPr/>
+          <a:lstStyle/>
+          <a:p>
+            <a:endParaRPr lang="en-US" dirty="0"/>
+          </a:p>
+        </p:txBody>
+      </p:sp>
+      <p:sp>
+        <p:nvSpPr>
+          <p:cNvPr id="4" name="Slide Number Placeholder 3"/>
+          <p:cNvSpPr>
+            <a:spLocks noGrp="1"/>
+          </p:cNvSpPr>
+          <p:nvPr>
+            <p:ph type="sldNum" sz="quarter" idx="10"/>
+          </p:nvPr>
+        </p:nvSpPr>
+        <p:spPr/>
+        <p:txBody>
+          <a:bodyPr/>
+          <a:lstStyle/>
+          <a:p>
+            <a:fld id="{F7021451-1387-4CA6-816F-3879F97B5CBC}" type="slidenum">
+              <a:rPr lang="en-US"/>
+              <a:t>5</a:t>
             </a:fld>
             <a:endParaRPr lang="en-US"/>
           </a:p>
@@ -3092,6 +3177,253 @@
 </p:sld>
 </file>
 
+<file path=ppt/slides/slide10.xml><?xml version="1.0" encoding="utf-8"?>
+<p:sld xmlns:a="http://schemas.openxmlformats.org/drawingml/2006/main" xmlns:r="http://schemas.openxmlformats.org/officeDocument/2006/relationships" xmlns:p="http://schemas.openxmlformats.org/presentationml/2006/main">
+  <p:cSld>
+    <p:spTree>
+      <p:nvGrpSpPr>
+        <p:cNvPr id="1" name=""/>
+        <p:cNvGrpSpPr/>
+        <p:nvPr/>
+      </p:nvGrpSpPr>
+      <p:grpSpPr>
+        <a:xfrm>
+          <a:off x="0" y="0"/>
+          <a:ext cx="0" cy="0"/>
+          <a:chOff x="0" y="0"/>
+          <a:chExt cx="0" cy="0"/>
+        </a:xfrm>
+      </p:grpSpPr>
+      <p:sp>
+        <p:nvSpPr>
+          <p:cNvPr id="3" name="CasellaDiTesto 2">
+            <a:extLst>
+              <a:ext uri="{FF2B5EF4-FFF2-40B4-BE49-F238E27FC236}">
+                <a16:creationId xmlns:a16="http://schemas.microsoft.com/office/drawing/2014/main" id="{D71D1CBA-50C0-4D94-BDFD-CE3626AAB801}"/>
+              </a:ext>
+            </a:extLst>
+          </p:cNvPr>
+          <p:cNvSpPr txBox="1"/>
+          <p:nvPr/>
+        </p:nvSpPr>
+        <p:spPr>
+          <a:xfrm>
+            <a:off x="508000" y="254000"/>
+            <a:ext cx="8229600" cy="457200"/>
+          </a:xfrm>
+          <a:prstGeom prst="rect">
+            <a:avLst/>
+          </a:prstGeom>
+          <a:noFill/>
+        </p:spPr>
+        <p:txBody>
+          <a:bodyPr vertOverflow="overflow" vert="horz" wrap="square" rtlCol="0" anchor="ctr" anchorCtr="0">
+            <a:noAutofit/>
+          </a:bodyPr>
+          <a:lstStyle/>
+          <a:p>
+            <a:pPr algn="l"/>
+            <a:r>
+              <a:rPr lang="it-IT" sz="2600" b="1" dirty="0">
+                <a:solidFill>
+                  <a:srgbClr val="1A1A1A"/>
+                </a:solidFill>
+                <a:latin typeface="Calibri"/>
+                <a:ea typeface="Calibri"/>
+                <a:cs typeface="Calibri"/>
+              </a:rPr>
+              <a:t>Slide Title</a:t>
+            </a:r>
+          </a:p>
+        </p:txBody>
+      </p:sp>
+      <p:sp>
+        <p:nvSpPr>
+          <p:cNvPr id="5" name="CasellaDiTesto 4">
+            <a:extLst>
+              <a:ext uri="{FF2B5EF4-FFF2-40B4-BE49-F238E27FC236}">
+                <a16:creationId xmlns:a16="http://schemas.microsoft.com/office/drawing/2014/main" id="{D22DD014-55CD-4034-B01B-03DB851B6C4D}"/>
+              </a:ext>
+            </a:extLst>
+          </p:cNvPr>
+          <p:cNvSpPr txBox="1"/>
+          <p:nvPr/>
+        </p:nvSpPr>
+        <p:spPr>
+          <a:xfrm>
+            <a:off x="368300" y="914400"/>
+            <a:ext cx="4318000" cy="3492500"/>
+          </a:xfrm>
+          <a:prstGeom prst="rect">
+            <a:avLst/>
+          </a:prstGeom>
+          <a:noFill/>
+        </p:spPr>
+        <p:txBody>
+          <a:bodyPr vertOverflow="overflow" vert="horz" wrap="square" rtlCol="0" anchor="t">
+            <a:noAutofit/>
+          </a:bodyPr>
+          <a:lstStyle/>
+          <a:p>
+            <a:pPr algn="l"/>
+            <a:r>
+              <a:rPr lang="it-IT" sz="1600" dirty="0">
+                <a:solidFill>
+                  <a:srgbClr val="333333"/>
+                </a:solidFill>
+                <a:latin typeface="Calibri"/>
+                <a:ea typeface="Calibri"/>
+                <a:cs typeface="Calibri"/>
+              </a:rPr>
+              <a:t>Text </a:t>
+            </a:r>
+            <a:r>
+              <a:rPr lang="it-IT" sz="1600" dirty="0" err="1">
+                <a:solidFill>
+                  <a:srgbClr val="333333"/>
+                </a:solidFill>
+                <a:latin typeface="Calibri"/>
+                <a:ea typeface="Calibri"/>
+                <a:cs typeface="Calibri"/>
+              </a:rPr>
+              <a:t>content</a:t>
+            </a:r>
+            <a:r>
+              <a:rPr lang="it-IT" sz="1600" dirty="0">
+                <a:solidFill>
+                  <a:srgbClr val="333333"/>
+                </a:solidFill>
+                <a:latin typeface="Calibri"/>
+                <a:ea typeface="Calibri"/>
+                <a:cs typeface="Calibri"/>
+              </a:rPr>
+              <a:t> </a:t>
+            </a:r>
+            <a:r>
+              <a:rPr lang="it-IT" sz="1600" dirty="0" err="1">
+                <a:solidFill>
+                  <a:srgbClr val="333333"/>
+                </a:solidFill>
+                <a:latin typeface="Calibri"/>
+                <a:ea typeface="Calibri"/>
+                <a:cs typeface="Calibri"/>
+              </a:rPr>
+              <a:t>goes</a:t>
+            </a:r>
+            <a:r>
+              <a:rPr lang="it-IT" sz="1600" dirty="0">
+                <a:solidFill>
+                  <a:srgbClr val="333333"/>
+                </a:solidFill>
+                <a:latin typeface="Calibri"/>
+                <a:ea typeface="Calibri"/>
+                <a:cs typeface="Calibri"/>
+              </a:rPr>
+              <a:t> </a:t>
+            </a:r>
+            <a:r>
+              <a:rPr lang="it-IT" sz="1600" dirty="0" err="1">
+                <a:solidFill>
+                  <a:srgbClr val="333333"/>
+                </a:solidFill>
+                <a:latin typeface="Calibri"/>
+                <a:ea typeface="Calibri"/>
+                <a:cs typeface="Calibri"/>
+              </a:rPr>
+              <a:t>here</a:t>
+            </a:r>
+            <a:endParaRPr lang="it-IT" sz="1600" dirty="0">
+              <a:solidFill>
+                <a:srgbClr val="333333"/>
+              </a:solidFill>
+              <a:latin typeface="Calibri"/>
+              <a:ea typeface="Calibri"/>
+              <a:cs typeface="Calibri"/>
+            </a:endParaRPr>
+          </a:p>
+        </p:txBody>
+      </p:sp>
+      <p:sp>
+        <p:nvSpPr>
+          <p:cNvPr id="6" name="Rettangolo con angoli arrotondati 5">
+            <a:extLst>
+              <a:ext uri="{FF2B5EF4-FFF2-40B4-BE49-F238E27FC236}">
+                <a16:creationId xmlns:a16="http://schemas.microsoft.com/office/drawing/2014/main" id="{17C1C3B0-E67F-4D08-89AC-6A936CD5AAC7}"/>
+              </a:ext>
+            </a:extLst>
+          </p:cNvPr>
+          <p:cNvSpPr/>
+          <p:nvPr/>
+        </p:nvSpPr>
+        <p:spPr>
+          <a:xfrm>
+            <a:off x="4889500" y="914400"/>
+            <a:ext cx="3937000" cy="3492500"/>
+          </a:xfrm>
+          <a:prstGeom prst="roundRect">
+            <a:avLst/>
+          </a:prstGeom>
+          <a:solidFill>
+            <a:srgbClr val="F0F0F0"/>
+          </a:solidFill>
+          <a:ln w="12700" cap="flat" cmpd="sng" algn="ctr">
+            <a:solidFill>
+              <a:srgbClr val="D6E4F0"/>
+            </a:solidFill>
+            <a:prstDash val="solid"/>
+            <a:miter lim="800000"/>
+          </a:ln>
+        </p:spPr>
+        <p:style>
+          <a:lnRef idx="2">
+            <a:schemeClr val="accent1">
+              <a:shade val="15000"/>
+            </a:schemeClr>
+          </a:lnRef>
+          <a:fillRef idx="1">
+            <a:schemeClr val="accent1"/>
+          </a:fillRef>
+          <a:effectRef idx="0">
+            <a:schemeClr val="accent1"/>
+          </a:effectRef>
+          <a:fontRef idx="minor">
+            <a:schemeClr val="lt1"/>
+          </a:fontRef>
+        </p:style>
+        <p:txBody>
+          <a:bodyPr vertOverflow="clip" horzOverflow="clip" rtlCol="0" anchor="ctr" anchorCtr="0">
+            <a:noAutofit/>
+          </a:bodyPr>
+          <a:lstStyle/>
+          <a:p>
+            <a:pPr algn="l"/>
+            <a:r>
+              <a:rPr lang="it-IT" sz="1600">
+                <a:solidFill>
+                  <a:srgbClr val="AAAAAA"/>
+                </a:solidFill>
+                <a:latin typeface="Calibri"/>
+                <a:ea typeface="Calibri"/>
+                <a:cs typeface="Calibri"/>
+              </a:rPr>
+              <a:t>Image / Chart</a:t>
+            </a:r>
+          </a:p>
+        </p:txBody>
+      </p:sp>
+    </p:spTree>
+    <p:extLst>
+      <p:ext uri="{BB962C8B-B14F-4D97-AF65-F5344CB8AC3E}">
+        <p14:creationId xmlns:p14="http://schemas.microsoft.com/office/powerpoint/2010/main" val="3990665965"/>
+      </p:ext>
+    </p:extLst>
+  </p:cSld>
+  <p:clrMapOvr>
+    <a:masterClrMapping/>
+  </p:clrMapOvr>
+</p:sld>
+</file>
+
 <file path=ppt/slides/slide2.xml><?xml version="1.0" encoding="utf-8"?>
 <p:sld xmlns:a="http://schemas.openxmlformats.org/drawingml/2006/main" xmlns:r="http://schemas.openxmlformats.org/officeDocument/2006/relationships" xmlns:p="http://schemas.openxmlformats.org/presentationml/2006/main">
   <p:cSld>
@@ -4301,8 +4633,8 @@
         </p:nvSpPr>
         <p:spPr>
           <a:xfrm>
-            <a:off x="5218795" y="3659027"/>
-            <a:ext cx="3657600" cy="228600"/>
+            <a:off x="5419961" y="3687886"/>
+            <a:ext cx="3136106" cy="228598"/>
           </a:xfrm>
           <a:prstGeom prst="rect">
             <a:avLst/>
@@ -4528,6 +4860,492 @@
       </p:grpSpPr>
       <p:sp>
         <p:nvSpPr>
+          <p:cNvPr id="2" name="Text 0"/>
+          <p:cNvSpPr/>
+          <p:nvPr/>
+        </p:nvSpPr>
+        <p:spPr>
+          <a:xfrm>
+            <a:off x="320040" y="4846320"/>
+            <a:ext cx="7772400" cy="201168"/>
+          </a:xfrm>
+          <a:prstGeom prst="rect">
+            <a:avLst/>
+          </a:prstGeom>
+          <a:noFill/>
+          <a:ln/>
+        </p:spPr>
+        <p:txBody>
+          <a:bodyPr wrap="square" rtlCol="0" anchor="ctr"/>
+          <a:lstStyle/>
+          <a:p>
+            <a:pPr marL="0" indent="0" algn="l">
+              <a:buNone/>
+            </a:pPr>
+            <a:r>
+              <a:rPr lang="en-US" sz="900" u="sng" dirty="0">
+                <a:solidFill>
+                  <a:srgbClr val="BBBBBB"/>
+                </a:solidFill>
+                <a:latin typeface="Calibri" pitchFamily="34" charset="0"/>
+                <a:ea typeface="Calibri" pitchFamily="34" charset="-122"/>
+                <a:cs typeface="Calibri" pitchFamily="34" charset="-120"/>
+              </a:rPr>
+              <a:t>Paolo Spallanzani  ·  Deep RL in Frontier-Based Autonomous Exploration</a:t>
+            </a:r>
+            <a:endParaRPr lang="en-US" sz="900" u="sng" dirty="0"/>
+          </a:p>
+        </p:txBody>
+      </p:sp>
+      <p:sp>
+        <p:nvSpPr>
+          <p:cNvPr id="3" name="Text 1"/>
+          <p:cNvSpPr/>
+          <p:nvPr/>
+        </p:nvSpPr>
+        <p:spPr>
+          <a:xfrm>
+            <a:off x="8412480" y="4846320"/>
+            <a:ext cx="457200" cy="201168"/>
+          </a:xfrm>
+          <a:prstGeom prst="rect">
+            <a:avLst/>
+          </a:prstGeom>
+          <a:noFill/>
+          <a:ln/>
+        </p:spPr>
+        <p:txBody>
+          <a:bodyPr wrap="square" rtlCol="0" anchor="ctr"/>
+          <a:lstStyle/>
+          <a:p>
+            <a:pPr marL="0" indent="0" algn="r">
+              <a:buNone/>
+            </a:pPr>
+            <a:r>
+              <a:rPr lang="en-US" sz="900" dirty="0">
+                <a:solidFill>
+                  <a:srgbClr val="BBBBBB"/>
+                </a:solidFill>
+                <a:latin typeface="Calibri" pitchFamily="34" charset="0"/>
+                <a:ea typeface="Calibri" pitchFamily="34" charset="-122"/>
+                <a:cs typeface="Calibri" pitchFamily="34" charset="-120"/>
+              </a:rPr>
+              <a:t>4 / 17</a:t>
+            </a:r>
+            <a:endParaRPr lang="en-US" sz="900" dirty="0"/>
+          </a:p>
+        </p:txBody>
+      </p:sp>
+      <p:sp>
+        <p:nvSpPr>
+          <p:cNvPr id="4" name="Shape 2"/>
+          <p:cNvSpPr/>
+          <p:nvPr/>
+        </p:nvSpPr>
+        <p:spPr>
+          <a:xfrm>
+            <a:off x="320040" y="237744"/>
+            <a:ext cx="64008" cy="457200"/>
+          </a:xfrm>
+          <a:prstGeom prst="rect">
+            <a:avLst/>
+          </a:prstGeom>
+          <a:solidFill>
+            <a:srgbClr val="C8472C"/>
+          </a:solidFill>
+          <a:ln w="12700">
+            <a:solidFill>
+              <a:srgbClr val="C8472C"/>
+            </a:solidFill>
+            <a:prstDash val="solid"/>
+          </a:ln>
+        </p:spPr>
+      </p:sp>
+      <p:sp>
+        <p:nvSpPr>
+          <p:cNvPr id="5" name="Text 3"/>
+          <p:cNvSpPr/>
+          <p:nvPr/>
+        </p:nvSpPr>
+        <p:spPr>
+          <a:xfrm>
+            <a:off x="502920" y="256032"/>
+            <a:ext cx="8229600" cy="457200"/>
+          </a:xfrm>
+          <a:prstGeom prst="rect">
+            <a:avLst/>
+          </a:prstGeom>
+          <a:noFill/>
+          <a:ln/>
+        </p:spPr>
+        <p:txBody>
+          <a:bodyPr wrap="square" lIns="0" tIns="0" rIns="0" bIns="0" rtlCol="0" anchor="ctr"/>
+          <a:lstStyle/>
+          <a:p>
+            <a:pPr marL="0" indent="0" algn="l">
+              <a:buNone/>
+            </a:pPr>
+            <a:r>
+              <a:rPr lang="en-US" sz="2600" b="1" dirty="0">
+                <a:solidFill>
+                  <a:srgbClr val="1A1A1A"/>
+                </a:solidFill>
+                <a:latin typeface="Calibri" pitchFamily="34" charset="0"/>
+                <a:ea typeface="Calibri" pitchFamily="34" charset="-122"/>
+                <a:cs typeface="Calibri" pitchFamily="34" charset="-120"/>
+              </a:rPr>
+              <a:t>Classical Approaches</a:t>
+            </a:r>
+            <a:endParaRPr lang="en-US" sz="2600" dirty="0"/>
+          </a:p>
+        </p:txBody>
+      </p:sp>
+      <p:sp>
+        <p:nvSpPr>
+          <p:cNvPr id="6" name="Shape 4"/>
+          <p:cNvSpPr/>
+          <p:nvPr/>
+        </p:nvSpPr>
+        <p:spPr>
+          <a:xfrm>
+            <a:off x="320040" y="777240"/>
+            <a:ext cx="8503920" cy="0"/>
+          </a:xfrm>
+          <a:prstGeom prst="line">
+            <a:avLst/>
+          </a:prstGeom>
+          <a:noFill/>
+          <a:ln w="19050">
+            <a:solidFill>
+              <a:srgbClr val="D6E4F0"/>
+            </a:solidFill>
+            <a:prstDash val="solid"/>
+          </a:ln>
+        </p:spPr>
+      </p:sp>
+      <p:sp>
+        <p:nvSpPr>
+          <p:cNvPr id="7" name="Text 5"/>
+          <p:cNvSpPr/>
+          <p:nvPr/>
+        </p:nvSpPr>
+        <p:spPr>
+          <a:xfrm>
+            <a:off x="365760" y="914400"/>
+            <a:ext cx="4663440" cy="3840480"/>
+          </a:xfrm>
+          <a:prstGeom prst="rect">
+            <a:avLst/>
+          </a:prstGeom>
+          <a:noFill/>
+          <a:ln/>
+        </p:spPr>
+        <p:txBody>
+          <a:bodyPr wrap="square" rtlCol="0" anchor="t"/>
+          <a:lstStyle/>
+          <a:p>
+            <a:pPr marL="190500" indent="-190500">
+              <a:spcAft>
+                <a:spcPts val="500"/>
+              </a:spcAft>
+              <a:buSzPct val="100000"/>
+              <a:buFontTx/>
+              <a:buChar char="•"/>
+            </a:pPr>
+            <a:r>
+              <a:rPr lang="en-US" dirty="0">
+                <a:solidFill>
+                  <a:srgbClr val="1A1A1A"/>
+                </a:solidFill>
+                <a:latin typeface="Calibri" pitchFamily="34" charset="0"/>
+                <a:ea typeface="Calibri" pitchFamily="34" charset="-122"/>
+                <a:cs typeface="Calibri" pitchFamily="34" charset="-120"/>
+              </a:rPr>
+              <a:t>Next Best View approach</a:t>
+            </a:r>
+            <a:br>
+              <a:rPr lang="en-US" dirty="0">
+                <a:solidFill>
+                  <a:srgbClr val="1A1A1A"/>
+                </a:solidFill>
+                <a:latin typeface="Calibri" pitchFamily="34" charset="0"/>
+                <a:ea typeface="Calibri" pitchFamily="34" charset="-122"/>
+                <a:cs typeface="Calibri" pitchFamily="34" charset="-120"/>
+              </a:rPr>
+            </a:br>
+            <a:r>
+              <a:rPr lang="it-IT" sz="1600" dirty="0" err="1">
+                <a:solidFill>
+                  <a:srgbClr val="1A1A1A"/>
+                </a:solidFill>
+                <a:latin typeface="Calibri" pitchFamily="34" charset="0"/>
+                <a:ea typeface="Calibri" pitchFamily="34" charset="-122"/>
+                <a:cs typeface="Calibri" pitchFamily="34" charset="-120"/>
+              </a:rPr>
+              <a:t>O</a:t>
+            </a:r>
+            <a:r>
+              <a:rPr lang="it-IT" sz="1600" dirty="0" err="1"/>
+              <a:t>ptimization</a:t>
+            </a:r>
+            <a:r>
+              <a:rPr lang="it-IT" sz="1600" dirty="0"/>
+              <a:t> </a:t>
+            </a:r>
+            <a:r>
+              <a:rPr lang="it-IT" sz="1600" dirty="0" err="1"/>
+              <a:t>problem</a:t>
+            </a:r>
+            <a:r>
+              <a:rPr lang="it-IT" sz="1600" dirty="0"/>
+              <a:t>, </a:t>
+            </a:r>
+            <a:r>
+              <a:rPr lang="it-IT" sz="1600" dirty="0" err="1"/>
+              <a:t>finding</a:t>
+            </a:r>
+            <a:r>
+              <a:rPr lang="it-IT" sz="1600" dirty="0"/>
+              <a:t> the </a:t>
+            </a:r>
+            <a:r>
+              <a:rPr lang="it-IT" sz="1600" dirty="0" err="1"/>
+              <a:t>next</a:t>
+            </a:r>
+            <a:r>
+              <a:rPr lang="it-IT" sz="1600" dirty="0"/>
+              <a:t> best position for the sensing </a:t>
+            </a:r>
+            <a:r>
+              <a:rPr lang="it-IT" sz="1600" dirty="0" err="1"/>
+              <a:t>apparatous</a:t>
+            </a:r>
+            <a:endParaRPr lang="it-IT" sz="1600" dirty="0"/>
+          </a:p>
+          <a:p>
+            <a:pPr>
+              <a:spcAft>
+                <a:spcPts val="500"/>
+              </a:spcAft>
+              <a:buSzPct val="100000"/>
+            </a:pPr>
+            <a:endParaRPr lang="en-US" dirty="0"/>
+          </a:p>
+          <a:p>
+            <a:pPr marL="190500" indent="-190500">
+              <a:spcAft>
+                <a:spcPts val="500"/>
+              </a:spcAft>
+              <a:buSzPct val="100000"/>
+              <a:buChar char="•"/>
+            </a:pPr>
+            <a:r>
+              <a:rPr lang="en-US" dirty="0">
+                <a:solidFill>
+                  <a:srgbClr val="1A1A1A"/>
+                </a:solidFill>
+                <a:latin typeface="Calibri" pitchFamily="34" charset="0"/>
+                <a:ea typeface="Calibri" pitchFamily="34" charset="-122"/>
+                <a:cs typeface="Calibri" pitchFamily="34" charset="-120"/>
+              </a:rPr>
+              <a:t>Frontier-Based Exploration (</a:t>
+            </a:r>
+            <a:r>
+              <a:rPr lang="en-US">
+                <a:solidFill>
+                  <a:srgbClr val="1A1A1A"/>
+                </a:solidFill>
+                <a:latin typeface="Calibri" pitchFamily="34" charset="0"/>
+                <a:ea typeface="Calibri" pitchFamily="34" charset="-122"/>
+                <a:cs typeface="Calibri" pitchFamily="34" charset="-120"/>
+              </a:rPr>
+              <a:t>Yamahu)</a:t>
+            </a:r>
+            <a:endParaRPr lang="en-US" dirty="0">
+              <a:solidFill>
+                <a:srgbClr val="1A1A1A"/>
+              </a:solidFill>
+              <a:latin typeface="Calibri" pitchFamily="34" charset="0"/>
+              <a:ea typeface="Calibri" pitchFamily="34" charset="-122"/>
+              <a:cs typeface="Calibri" pitchFamily="34" charset="-120"/>
+            </a:endParaRPr>
+          </a:p>
+          <a:p>
+            <a:pPr marL="647700" lvl="1" indent="-190500">
+              <a:spcAft>
+                <a:spcPts val="500"/>
+              </a:spcAft>
+              <a:buSzPct val="100000"/>
+              <a:buChar char="•"/>
+            </a:pPr>
+            <a:r>
+              <a:rPr lang="en-US" sz="1600" dirty="0"/>
+              <a:t>Frontiers: </a:t>
+            </a:r>
+            <a:r>
+              <a:rPr lang="en-US" sz="1600" dirty="0">
+                <a:solidFill>
+                  <a:srgbClr val="1A1A1A"/>
+                </a:solidFill>
+                <a:latin typeface="Calibri" pitchFamily="34" charset="0"/>
+                <a:ea typeface="Calibri" pitchFamily="34" charset="-122"/>
+                <a:cs typeface="Calibri" pitchFamily="34" charset="-120"/>
+              </a:rPr>
+              <a:t>boundary between explored (free) and unknown cells</a:t>
+            </a:r>
+          </a:p>
+          <a:p>
+            <a:pPr marL="647700" lvl="1" indent="-190500">
+              <a:spcAft>
+                <a:spcPts val="500"/>
+              </a:spcAft>
+              <a:buSzPct val="100000"/>
+              <a:buChar char="•"/>
+            </a:pPr>
+            <a:r>
+              <a:rPr lang="en-US" sz="1600" dirty="0">
+                <a:solidFill>
+                  <a:srgbClr val="1A1A1A"/>
+                </a:solidFill>
+                <a:latin typeface="Calibri" pitchFamily="34" charset="0"/>
+                <a:ea typeface="Calibri" pitchFamily="34" charset="-122"/>
+                <a:cs typeface="Calibri" pitchFamily="34" charset="-120"/>
+              </a:rPr>
+              <a:t>Often grouped into cluster</a:t>
+            </a:r>
+          </a:p>
+          <a:p>
+            <a:pPr marL="647700" lvl="1" indent="-190500">
+              <a:spcAft>
+                <a:spcPts val="500"/>
+              </a:spcAft>
+              <a:buSzPct val="100000"/>
+              <a:buChar char="•"/>
+            </a:pPr>
+            <a:r>
+              <a:rPr lang="en-US" sz="1600" dirty="0">
+                <a:solidFill>
+                  <a:srgbClr val="1A1A1A"/>
+                </a:solidFill>
+                <a:latin typeface="Calibri" pitchFamily="34" charset="0"/>
+                <a:ea typeface="Calibri" pitchFamily="34" charset="-122"/>
+                <a:cs typeface="Calibri" pitchFamily="34" charset="-120"/>
+              </a:rPr>
+              <a:t>The agent moves toward frontier clusters</a:t>
+            </a:r>
+          </a:p>
+          <a:p>
+            <a:pPr marL="647700" lvl="1" indent="-190500">
+              <a:spcAft>
+                <a:spcPts val="500"/>
+              </a:spcAft>
+              <a:buSzPct val="100000"/>
+              <a:buChar char="•"/>
+            </a:pPr>
+            <a:r>
+              <a:rPr lang="en-US" sz="1600" dirty="0">
+                <a:solidFill>
+                  <a:srgbClr val="1A1A1A"/>
+                </a:solidFill>
+                <a:latin typeface="Calibri" pitchFamily="34" charset="0"/>
+                <a:ea typeface="Calibri" pitchFamily="34" charset="-122"/>
+                <a:cs typeface="Calibri" pitchFamily="34" charset="-120"/>
+              </a:rPr>
+              <a:t>Fixed heuristics policies to decide which frontier region</a:t>
+            </a:r>
+            <a:endParaRPr lang="en-US" sz="1600" dirty="0"/>
+          </a:p>
+        </p:txBody>
+      </p:sp>
+      <p:pic>
+        <p:nvPicPr>
+          <p:cNvPr id="8" name="Image 0" descr="/home/claude/assets/frontiers_picture.jpg"/>
+          <p:cNvPicPr>
+            <a:picLocks noChangeAspect="1"/>
+          </p:cNvPicPr>
+          <p:nvPr/>
+        </p:nvPicPr>
+        <p:blipFill>
+          <a:blip r:embed="rId3"/>
+          <a:srcRect/>
+          <a:stretch/>
+        </p:blipFill>
+        <p:spPr>
+          <a:xfrm>
+            <a:off x="5257800" y="914400"/>
+            <a:ext cx="3657600" cy="3246120"/>
+          </a:xfrm>
+          <a:prstGeom prst="rect">
+            <a:avLst/>
+          </a:prstGeom>
+        </p:spPr>
+      </p:pic>
+      <p:sp>
+        <p:nvSpPr>
+          <p:cNvPr id="9" name="Text 6"/>
+          <p:cNvSpPr/>
+          <p:nvPr/>
+        </p:nvSpPr>
+        <p:spPr>
+          <a:xfrm>
+            <a:off x="5257800" y="4160520"/>
+            <a:ext cx="3657600" cy="228600"/>
+          </a:xfrm>
+          <a:prstGeom prst="rect">
+            <a:avLst/>
+          </a:prstGeom>
+          <a:noFill/>
+          <a:ln/>
+        </p:spPr>
+        <p:txBody>
+          <a:bodyPr wrap="square" rtlCol="0" anchor="ctr"/>
+          <a:lstStyle/>
+          <a:p>
+            <a:pPr marL="0" indent="0" algn="ctr">
+              <a:buNone/>
+            </a:pPr>
+            <a:r>
+              <a:rPr lang="en-US" sz="900" dirty="0">
+                <a:solidFill>
+                  <a:srgbClr val="5A5A5A"/>
+                </a:solidFill>
+                <a:latin typeface="Calibri" pitchFamily="34" charset="0"/>
+                <a:ea typeface="Calibri" pitchFamily="34" charset="-122"/>
+                <a:cs typeface="Calibri" pitchFamily="34" charset="-120"/>
+              </a:rPr>
+              <a:t>Frontier-based exploration illustration</a:t>
+            </a:r>
+            <a:endParaRPr lang="en-US" sz="900" dirty="0"/>
+          </a:p>
+        </p:txBody>
+      </p:sp>
+    </p:spTree>
+  </p:cSld>
+  <p:clrMapOvr>
+    <a:masterClrMapping/>
+  </p:clrMapOvr>
+</p:sld>
+</file>
+
+<file path=ppt/slides/slide6.xml><?xml version="1.0" encoding="utf-8"?>
+<p:sld xmlns:a="http://schemas.openxmlformats.org/drawingml/2006/main" xmlns:r="http://schemas.openxmlformats.org/officeDocument/2006/relationships" xmlns:p="http://schemas.openxmlformats.org/presentationml/2006/main">
+  <p:cSld>
+    <p:spTree>
+      <p:nvGrpSpPr>
+        <p:cNvPr id="1" name=""/>
+        <p:cNvGrpSpPr/>
+        <p:nvPr/>
+      </p:nvGrpSpPr>
+      <p:grpSpPr>
+        <a:xfrm>
+          <a:off x="0" y="0"/>
+          <a:ext cx="0" cy="0"/>
+          <a:chOff x="0" y="0"/>
+          <a:chExt cx="0" cy="0"/>
+        </a:xfrm>
+      </p:grpSpPr>
+      <p:sp>
+        <p:nvSpPr>
           <p:cNvPr id="3" name="CasellaDiTesto 2">
             <a:extLst>
               <a:ext uri="{FF2B5EF4-FFF2-40B4-BE49-F238E27FC236}">
@@ -4666,7 +5484,7 @@
 </p:sld>
 </file>
 
-<file path=ppt/slides/slide6.xml><?xml version="1.0" encoding="utf-8"?>
+<file path=ppt/slides/slide7.xml><?xml version="1.0" encoding="utf-8"?>
 <p:sld xmlns:a="http://schemas.openxmlformats.org/drawingml/2006/main" xmlns:r="http://schemas.openxmlformats.org/officeDocument/2006/relationships" xmlns:p="http://schemas.openxmlformats.org/presentationml/2006/main">
   <p:cSld>
     <p:spTree>
@@ -4820,214 +5638,6 @@
     <p:extLst>
       <p:ext uri="{BB962C8B-B14F-4D97-AF65-F5344CB8AC3E}">
         <p14:creationId xmlns:p14="http://schemas.microsoft.com/office/powerpoint/2010/main" val="2759301547"/>
-      </p:ext>
-    </p:extLst>
-  </p:cSld>
-  <p:clrMapOvr>
-    <a:masterClrMapping/>
-  </p:clrMapOvr>
-</p:sld>
-</file>
-
-<file path=ppt/slides/slide7.xml><?xml version="1.0" encoding="utf-8"?>
-<p:sld xmlns:a="http://schemas.openxmlformats.org/drawingml/2006/main" xmlns:r="http://schemas.openxmlformats.org/officeDocument/2006/relationships" xmlns:p="http://schemas.openxmlformats.org/presentationml/2006/main">
-  <p:cSld>
-    <p:spTree>
-      <p:nvGrpSpPr>
-        <p:cNvPr id="1" name=""/>
-        <p:cNvGrpSpPr/>
-        <p:nvPr/>
-      </p:nvGrpSpPr>
-      <p:grpSpPr>
-        <a:xfrm>
-          <a:off x="0" y="0"/>
-          <a:ext cx="0" cy="0"/>
-          <a:chOff x="0" y="0"/>
-          <a:chExt cx="0" cy="0"/>
-        </a:xfrm>
-      </p:grpSpPr>
-      <p:sp>
-        <p:nvSpPr>
-          <p:cNvPr id="3" name="CasellaDiTesto 2">
-            <a:extLst>
-              <a:ext uri="{FF2B5EF4-FFF2-40B4-BE49-F238E27FC236}">
-                <a16:creationId xmlns:a16="http://schemas.microsoft.com/office/drawing/2014/main" id="{A2573F97-AE10-444A-9306-BFF3D7DCA88C}"/>
-              </a:ext>
-            </a:extLst>
-          </p:cNvPr>
-          <p:cNvSpPr txBox="1"/>
-          <p:nvPr/>
-        </p:nvSpPr>
-        <p:spPr>
-          <a:xfrm>
-            <a:off x="508000" y="254000"/>
-            <a:ext cx="8229600" cy="457200"/>
-          </a:xfrm>
-          <a:prstGeom prst="rect">
-            <a:avLst/>
-          </a:prstGeom>
-          <a:noFill/>
-        </p:spPr>
-        <p:txBody>
-          <a:bodyPr vertOverflow="overflow" vert="horz" wrap="square" rtlCol="0" anchor="ctr" anchorCtr="0">
-            <a:noAutofit/>
-          </a:bodyPr>
-          <a:lstStyle/>
-          <a:p>
-            <a:pPr algn="l"/>
-            <a:r>
-              <a:rPr lang="it-IT" sz="2600" b="1" dirty="0">
-                <a:solidFill>
-                  <a:srgbClr val="1A1A1A"/>
-                </a:solidFill>
-                <a:latin typeface="Calibri"/>
-                <a:ea typeface="Calibri"/>
-                <a:cs typeface="Calibri"/>
-              </a:rPr>
-              <a:t>Slide Title</a:t>
-            </a:r>
-          </a:p>
-        </p:txBody>
-      </p:sp>
-      <p:sp>
-        <p:nvSpPr>
-          <p:cNvPr id="5" name="CasellaDiTesto 4">
-            <a:extLst>
-              <a:ext uri="{FF2B5EF4-FFF2-40B4-BE49-F238E27FC236}">
-                <a16:creationId xmlns:a16="http://schemas.microsoft.com/office/drawing/2014/main" id="{FD0ECAD6-FF98-4193-979E-566FFED4B5AD}"/>
-              </a:ext>
-            </a:extLst>
-          </p:cNvPr>
-          <p:cNvSpPr txBox="1"/>
-          <p:nvPr/>
-        </p:nvSpPr>
-        <p:spPr>
-          <a:xfrm>
-            <a:off x="368300" y="914400"/>
-            <a:ext cx="4089400" cy="3556000"/>
-          </a:xfrm>
-          <a:prstGeom prst="rect">
-            <a:avLst/>
-          </a:prstGeom>
-          <a:noFill/>
-        </p:spPr>
-        <p:txBody>
-          <a:bodyPr vertOverflow="overflow" vert="horz" wrap="square" rtlCol="0" anchor="t">
-            <a:noAutofit/>
-          </a:bodyPr>
-          <a:lstStyle/>
-          <a:p>
-            <a:pPr algn="l"/>
-            <a:r>
-              <a:rPr lang="it-IT" sz="1600" dirty="0">
-                <a:solidFill>
-                  <a:srgbClr val="333333"/>
-                </a:solidFill>
-                <a:latin typeface="Calibri"/>
-                <a:ea typeface="Calibri"/>
-                <a:cs typeface="Calibri"/>
-              </a:rPr>
-              <a:t>Left </a:t>
-            </a:r>
-            <a:r>
-              <a:rPr lang="it-IT" sz="1600" dirty="0" err="1">
-                <a:solidFill>
-                  <a:srgbClr val="333333"/>
-                </a:solidFill>
-                <a:latin typeface="Calibri"/>
-                <a:ea typeface="Calibri"/>
-                <a:cs typeface="Calibri"/>
-              </a:rPr>
-              <a:t>content</a:t>
-            </a:r>
-            <a:endParaRPr lang="it-IT" sz="1600" dirty="0">
-              <a:solidFill>
-                <a:srgbClr val="333333"/>
-              </a:solidFill>
-              <a:latin typeface="Calibri"/>
-              <a:ea typeface="Calibri"/>
-              <a:cs typeface="Calibri"/>
-            </a:endParaRPr>
-          </a:p>
-        </p:txBody>
-      </p:sp>
-      <p:sp>
-        <p:nvSpPr>
-          <p:cNvPr id="6" name="CasellaDiTesto 5">
-            <a:extLst>
-              <a:ext uri="{FF2B5EF4-FFF2-40B4-BE49-F238E27FC236}">
-                <a16:creationId xmlns:a16="http://schemas.microsoft.com/office/drawing/2014/main" id="{34CBD74A-88E8-4A7F-BF8C-396FF18C5FD4}"/>
-              </a:ext>
-            </a:extLst>
-          </p:cNvPr>
-          <p:cNvSpPr txBox="1"/>
-          <p:nvPr/>
-        </p:nvSpPr>
-        <p:spPr>
-          <a:xfrm>
-            <a:off x="4699000" y="914400"/>
-            <a:ext cx="4089400" cy="3556000"/>
-          </a:xfrm>
-          <a:prstGeom prst="rect">
-            <a:avLst/>
-          </a:prstGeom>
-          <a:noFill/>
-        </p:spPr>
-        <p:txBody>
-          <a:bodyPr vertOverflow="overflow" vert="horz" wrap="square" rtlCol="0" anchor="t">
-            <a:noAutofit/>
-          </a:bodyPr>
-          <a:lstStyle/>
-          <a:p>
-            <a:pPr algn="l"/>
-            <a:r>
-              <a:rPr lang="it-IT" sz="1600" dirty="0" err="1">
-                <a:solidFill>
-                  <a:srgbClr val="333333"/>
-                </a:solidFill>
-                <a:latin typeface="Calibri"/>
-                <a:ea typeface="Calibri"/>
-                <a:cs typeface="Calibri"/>
-              </a:rPr>
-              <a:t>Right</a:t>
-            </a:r>
-            <a:r>
-              <a:rPr lang="it-IT" sz="1600" dirty="0">
-                <a:solidFill>
-                  <a:srgbClr val="333333"/>
-                </a:solidFill>
-                <a:latin typeface="Calibri"/>
-                <a:ea typeface="Calibri"/>
-                <a:cs typeface="Calibri"/>
-              </a:rPr>
-              <a:t> </a:t>
-            </a:r>
-            <a:r>
-              <a:rPr lang="it-IT" sz="1600" dirty="0" err="1">
-                <a:solidFill>
-                  <a:srgbClr val="333333"/>
-                </a:solidFill>
-                <a:latin typeface="Calibri"/>
-                <a:ea typeface="Calibri"/>
-                <a:cs typeface="Calibri"/>
-              </a:rPr>
-              <a:t>content</a:t>
-            </a:r>
-            <a:endParaRPr lang="it-IT" sz="1600" dirty="0">
-              <a:solidFill>
-                <a:srgbClr val="333333"/>
-              </a:solidFill>
-              <a:latin typeface="Calibri"/>
-              <a:ea typeface="Calibri"/>
-              <a:cs typeface="Calibri"/>
-            </a:endParaRPr>
-          </a:p>
-        </p:txBody>
-      </p:sp>
-    </p:spTree>
-    <p:extLst>
-      <p:ext uri="{BB962C8B-B14F-4D97-AF65-F5344CB8AC3E}">
-        <p14:creationId xmlns:p14="http://schemas.microsoft.com/office/powerpoint/2010/main" val="1959701455"/>
       </p:ext>
     </p:extLst>
   </p:cSld>
@@ -5056,10 +5666,10 @@
       </p:grpSpPr>
       <p:sp>
         <p:nvSpPr>
-          <p:cNvPr id="2" name="CasellaDiTesto 1">
+          <p:cNvPr id="3" name="CasellaDiTesto 2">
             <a:extLst>
               <a:ext uri="{FF2B5EF4-FFF2-40B4-BE49-F238E27FC236}">
-                <a16:creationId xmlns:a16="http://schemas.microsoft.com/office/drawing/2014/main" id="{62960C30-3286-4C2A-B688-DEAE83675C09}"/>
+                <a16:creationId xmlns:a16="http://schemas.microsoft.com/office/drawing/2014/main" id="{A2573F97-AE10-444A-9306-BFF3D7DCA88C}"/>
               </a:ext>
             </a:extLst>
           </p:cNvPr>
@@ -5068,8 +5678,8 @@
         </p:nvSpPr>
         <p:spPr>
           <a:xfrm>
-            <a:off x="914400" y="1778000"/>
-            <a:ext cx="7315200" cy="762000"/>
+            <a:off x="508000" y="254000"/>
+            <a:ext cx="8229600" cy="457200"/>
           </a:xfrm>
           <a:prstGeom prst="rect">
             <a:avLst/>
@@ -5084,7 +5694,7 @@
           <a:p>
             <a:pPr algn="l"/>
             <a:r>
-              <a:rPr lang="it-IT" sz="3600" b="1">
+              <a:rPr lang="it-IT" sz="2600" b="1" dirty="0">
                 <a:solidFill>
                   <a:srgbClr val="1A1A1A"/>
                 </a:solidFill>
@@ -5092,17 +5702,17 @@
                 <a:ea typeface="Calibri"/>
                 <a:cs typeface="Calibri"/>
               </a:rPr>
-              <a:t>Section Title</a:t>
-            </a:r>
-          </a:p>
-        </p:txBody>
-      </p:sp>
-      <p:sp>
-        <p:nvSpPr>
-          <p:cNvPr id="3" name="CasellaDiTesto 2">
+              <a:t>Slide Title</a:t>
+            </a:r>
+          </a:p>
+        </p:txBody>
+      </p:sp>
+      <p:sp>
+        <p:nvSpPr>
+          <p:cNvPr id="5" name="CasellaDiTesto 4">
             <a:extLst>
               <a:ext uri="{FF2B5EF4-FFF2-40B4-BE49-F238E27FC236}">
-                <a16:creationId xmlns:a16="http://schemas.microsoft.com/office/drawing/2014/main" id="{0AEED710-32FB-4CE7-BC12-02102C1D2BFF}"/>
+                <a16:creationId xmlns:a16="http://schemas.microsoft.com/office/drawing/2014/main" id="{FD0ECAD6-FF98-4193-979E-566FFED4B5AD}"/>
               </a:ext>
             </a:extLst>
           </p:cNvPr>
@@ -5111,8 +5721,8 @@
         </p:nvSpPr>
         <p:spPr>
           <a:xfrm>
-            <a:off x="1524000" y="2667000"/>
-            <a:ext cx="6096000" cy="381000"/>
+            <a:off x="368300" y="914400"/>
+            <a:ext cx="4089400" cy="3556000"/>
           </a:xfrm>
           <a:prstGeom prst="rect">
             <a:avLst/>
@@ -5127,23 +5737,115 @@
           <a:p>
             <a:pPr algn="l"/>
             <a:r>
-              <a:rPr lang="it-IT">
-                <a:solidFill>
-                  <a:srgbClr val="666666"/>
+              <a:rPr lang="it-IT" sz="1600" dirty="0">
+                <a:solidFill>
+                  <a:srgbClr val="333333"/>
                 </a:solidFill>
                 <a:latin typeface="Calibri"/>
                 <a:ea typeface="Calibri"/>
                 <a:cs typeface="Calibri"/>
               </a:rPr>
-              <a:t>Section subtitle or description</a:t>
-            </a:r>
+              <a:t>Left </a:t>
+            </a:r>
+            <a:r>
+              <a:rPr lang="it-IT" sz="1600" dirty="0" err="1">
+                <a:solidFill>
+                  <a:srgbClr val="333333"/>
+                </a:solidFill>
+                <a:latin typeface="Calibri"/>
+                <a:ea typeface="Calibri"/>
+                <a:cs typeface="Calibri"/>
+              </a:rPr>
+              <a:t>content</a:t>
+            </a:r>
+            <a:endParaRPr lang="it-IT" sz="1600" dirty="0">
+              <a:solidFill>
+                <a:srgbClr val="333333"/>
+              </a:solidFill>
+              <a:latin typeface="Calibri"/>
+              <a:ea typeface="Calibri"/>
+              <a:cs typeface="Calibri"/>
+            </a:endParaRPr>
+          </a:p>
+        </p:txBody>
+      </p:sp>
+      <p:sp>
+        <p:nvSpPr>
+          <p:cNvPr id="6" name="CasellaDiTesto 5">
+            <a:extLst>
+              <a:ext uri="{FF2B5EF4-FFF2-40B4-BE49-F238E27FC236}">
+                <a16:creationId xmlns:a16="http://schemas.microsoft.com/office/drawing/2014/main" id="{34CBD74A-88E8-4A7F-BF8C-396FF18C5FD4}"/>
+              </a:ext>
+            </a:extLst>
+          </p:cNvPr>
+          <p:cNvSpPr txBox="1"/>
+          <p:nvPr/>
+        </p:nvSpPr>
+        <p:spPr>
+          <a:xfrm>
+            <a:off x="4699000" y="914400"/>
+            <a:ext cx="4089400" cy="3556000"/>
+          </a:xfrm>
+          <a:prstGeom prst="rect">
+            <a:avLst/>
+          </a:prstGeom>
+          <a:noFill/>
+        </p:spPr>
+        <p:txBody>
+          <a:bodyPr vertOverflow="overflow" vert="horz" wrap="square" rtlCol="0" anchor="t">
+            <a:noAutofit/>
+          </a:bodyPr>
+          <a:lstStyle/>
+          <a:p>
+            <a:pPr algn="l"/>
+            <a:r>
+              <a:rPr lang="it-IT" sz="1600" dirty="0" err="1">
+                <a:solidFill>
+                  <a:srgbClr val="333333"/>
+                </a:solidFill>
+                <a:latin typeface="Calibri"/>
+                <a:ea typeface="Calibri"/>
+                <a:cs typeface="Calibri"/>
+              </a:rPr>
+              <a:t>Right</a:t>
+            </a:r>
+            <a:r>
+              <a:rPr lang="it-IT" sz="1600" dirty="0">
+                <a:solidFill>
+                  <a:srgbClr val="333333"/>
+                </a:solidFill>
+                <a:latin typeface="Calibri"/>
+                <a:ea typeface="Calibri"/>
+                <a:cs typeface="Calibri"/>
+              </a:rPr>
+              <a:t> </a:t>
+            </a:r>
+            <a:r>
+              <a:rPr lang="it-IT" sz="1600" dirty="0" err="1">
+                <a:solidFill>
+                  <a:srgbClr val="333333"/>
+                </a:solidFill>
+                <a:latin typeface="Calibri"/>
+                <a:ea typeface="Calibri"/>
+                <a:cs typeface="Calibri"/>
+              </a:rPr>
+              <a:t>content</a:t>
+            </a:r>
+            <a:endParaRPr lang="it-IT" sz="1600" dirty="0">
+              <a:solidFill>
+                <a:srgbClr val="333333"/>
+              </a:solidFill>
+              <a:latin typeface="Calibri"/>
+              <a:ea typeface="Calibri"/>
+              <a:cs typeface="Calibri"/>
+            </a:endParaRPr>
           </a:p>
         </p:txBody>
       </p:sp>
     </p:spTree>
     <p:extLst>
       <p:ext uri="{BB962C8B-B14F-4D97-AF65-F5344CB8AC3E}">
-        <p14:creationId xmlns:p14="http://schemas.microsoft.com/office/powerpoint/2010/main" val="2358288740"/>
+        <p14:creationId xmlns:p14="http://schemas.microsoft.com/office/powerpoint/2010/main" val="1959701455"/>
       </p:ext>
     </p:extLst>
   </p:cSld>
@@ -5172,10 +5874,10 @@
       </p:grpSpPr>
       <p:sp>
         <p:nvSpPr>
-          <p:cNvPr id="3" name="CasellaDiTesto 2">
+          <p:cNvPr id="2" name="CasellaDiTesto 1">
             <a:extLst>
               <a:ext uri="{FF2B5EF4-FFF2-40B4-BE49-F238E27FC236}">
-                <a16:creationId xmlns:a16="http://schemas.microsoft.com/office/drawing/2014/main" id="{D71D1CBA-50C0-4D94-BDFD-CE3626AAB801}"/>
+                <a16:creationId xmlns:a16="http://schemas.microsoft.com/office/drawing/2014/main" id="{62960C30-3286-4C2A-B688-DEAE83675C09}"/>
               </a:ext>
             </a:extLst>
           </p:cNvPr>
@@ -5184,8 +5886,8 @@
         </p:nvSpPr>
         <p:spPr>
           <a:xfrm>
-            <a:off x="508000" y="254000"/>
-            <a:ext cx="8229600" cy="457200"/>
+            <a:off x="914400" y="1778000"/>
+            <a:ext cx="7315200" cy="762000"/>
           </a:xfrm>
           <a:prstGeom prst="rect">
             <a:avLst/>
@@ -5200,7 +5902,7 @@
           <a:p>
             <a:pPr algn="l"/>
             <a:r>
-              <a:rPr lang="it-IT" sz="2600" b="1" dirty="0">
+              <a:rPr lang="it-IT" sz="3600" b="1">
                 <a:solidFill>
                   <a:srgbClr val="1A1A1A"/>
                 </a:solidFill>
@@ -5208,17 +5910,17 @@
                 <a:ea typeface="Calibri"/>
                 <a:cs typeface="Calibri"/>
               </a:rPr>
-              <a:t>Slide Title</a:t>
-            </a:r>
-          </a:p>
-        </p:txBody>
-      </p:sp>
-      <p:sp>
-        <p:nvSpPr>
-          <p:cNvPr id="5" name="CasellaDiTesto 4">
+              <a:t>Section Title</a:t>
+            </a:r>
+          </a:p>
+        </p:txBody>
+      </p:sp>
+      <p:sp>
+        <p:nvSpPr>
+          <p:cNvPr id="3" name="CasellaDiTesto 2">
             <a:extLst>
               <a:ext uri="{FF2B5EF4-FFF2-40B4-BE49-F238E27FC236}">
-                <a16:creationId xmlns:a16="http://schemas.microsoft.com/office/drawing/2014/main" id="{D22DD014-55CD-4034-B01B-03DB851B6C4D}"/>
+                <a16:creationId xmlns:a16="http://schemas.microsoft.com/office/drawing/2014/main" id="{0AEED710-32FB-4CE7-BC12-02102C1D2BFF}"/>
               </a:ext>
             </a:extLst>
           </p:cNvPr>
@@ -5227,8 +5929,8 @@
         </p:nvSpPr>
         <p:spPr>
           <a:xfrm>
-            <a:off x="368300" y="914400"/>
-            <a:ext cx="4318000" cy="3492500"/>
+            <a:off x="1524000" y="2667000"/>
+            <a:ext cx="6096000" cy="381000"/>
           </a:xfrm>
           <a:prstGeom prst="rect">
             <a:avLst/>
@@ -5243,146 +5945,15 @@
           <a:p>
             <a:pPr algn="l"/>
             <a:r>
-              <a:rPr lang="it-IT" sz="1600" dirty="0">
-                <a:solidFill>
-                  <a:srgbClr val="333333"/>
+              <a:rPr lang="it-IT">
+                <a:solidFill>
+                  <a:srgbClr val="666666"/>
                 </a:solidFill>
                 <a:latin typeface="Calibri"/>
                 <a:ea typeface="Calibri"/>
                 <a:cs typeface="Calibri"/>
               </a:rPr>
-              <a:t>Text </a:t>
-            </a:r>
-            <a:r>
-              <a:rPr lang="it-IT" sz="1600" dirty="0" err="1">
-                <a:solidFill>
-                  <a:srgbClr val="333333"/>
-                </a:solidFill>
-                <a:latin typeface="Calibri"/>
-                <a:ea typeface="Calibri"/>
-                <a:cs typeface="Calibri"/>
-              </a:rPr>
-              <a:t>content</a:t>
-            </a:r>
-            <a:r>
-              <a:rPr lang="it-IT" sz="1600" dirty="0">
-                <a:solidFill>
-                  <a:srgbClr val="333333"/>
-                </a:solidFill>
-                <a:latin typeface="Calibri"/>
-                <a:ea typeface="Calibri"/>
-                <a:cs typeface="Calibri"/>
-              </a:rPr>
-              <a:t> </a:t>
-            </a:r>
-            <a:r>
-              <a:rPr lang="it-IT" sz="1600" dirty="0" err="1">
-                <a:solidFill>
-                  <a:srgbClr val="333333"/>
-                </a:solidFill>
-                <a:latin typeface="Calibri"/>
-                <a:ea typeface="Calibri"/>
-                <a:cs typeface="Calibri"/>
-              </a:rPr>
-              <a:t>goes</a:t>
-            </a:r>
-            <a:r>
-              <a:rPr lang="it-IT" sz="1600" dirty="0">
-                <a:solidFill>
-                  <a:srgbClr val="333333"/>
-                </a:solidFill>
-                <a:latin typeface="Calibri"/>
-                <a:ea typeface="Calibri"/>
-                <a:cs typeface="Calibri"/>
-              </a:rPr>
-              <a:t> </a:t>
-            </a:r>
-            <a:r>
-              <a:rPr lang="it-IT" sz="1600" dirty="0" err="1">
-                <a:solidFill>
-                  <a:srgbClr val="333333"/>
-                </a:solidFill>
-                <a:latin typeface="Calibri"/>
-                <a:ea typeface="Calibri"/>
-                <a:cs typeface="Calibri"/>
-              </a:rPr>
-              <a:t>here</a:t>
-            </a:r>
-            <a:endParaRPr lang="it-IT" sz="1600" dirty="0">
-              <a:solidFill>
-                <a:srgbClr val="333333"/>
-              </a:solidFill>
-              <a:latin typeface="Calibri"/>
-              <a:ea typeface="Calibri"/>
-              <a:cs typeface="Calibri"/>
-            </a:endParaRPr>
-          </a:p>
-        </p:txBody>
-      </p:sp>
-      <p:sp>
-        <p:nvSpPr>
-          <p:cNvPr id="6" name="Rettangolo con angoli arrotondati 5">
-            <a:extLst>
-              <a:ext uri="{FF2B5EF4-FFF2-40B4-BE49-F238E27FC236}">
-                <a16:creationId xmlns:a16="http://schemas.microsoft.com/office/drawing/2014/main" id="{17C1C3B0-E67F-4D08-89AC-6A936CD5AAC7}"/>
-              </a:ext>
-            </a:extLst>
-          </p:cNvPr>
-          <p:cNvSpPr/>
-          <p:nvPr/>
-        </p:nvSpPr>
-        <p:spPr>
-          <a:xfrm>
-            <a:off x="4889500" y="914400"/>
-            <a:ext cx="3937000" cy="3492500"/>
-          </a:xfrm>
-          <a:prstGeom prst="roundRect">
-            <a:avLst/>
-          </a:prstGeom>
-          <a:solidFill>
-            <a:srgbClr val="F0F0F0"/>
-          </a:solidFill>
-          <a:ln w="12700" cap="flat" cmpd="sng" algn="ctr">
-            <a:solidFill>
-              <a:srgbClr val="D6E4F0"/>
-            </a:solidFill>
-            <a:prstDash val="solid"/>
-            <a:miter lim="800000"/>
-          </a:ln>
-        </p:spPr>
-        <p:style>
-          <a:lnRef idx="2">
-            <a:schemeClr val="accent1">
-              <a:shade val="15000"/>
-            </a:schemeClr>
-          </a:lnRef>
-          <a:fillRef idx="1">
-            <a:schemeClr val="accent1"/>
-          </a:fillRef>
-          <a:effectRef idx="0">
-            <a:schemeClr val="accent1"/>
-          </a:effectRef>
-          <a:fontRef idx="minor">
-            <a:schemeClr val="lt1"/>
-          </a:fontRef>
-        </p:style>
-        <p:txBody>
-          <a:bodyPr vertOverflow="clip" horzOverflow="clip" rtlCol="0" anchor="ctr" anchorCtr="0">
-            <a:noAutofit/>
-          </a:bodyPr>
-          <a:lstStyle/>
-          <a:p>
-            <a:pPr algn="l"/>
-            <a:r>
-              <a:rPr lang="it-IT" sz="1600">
-                <a:solidFill>
-                  <a:srgbClr val="AAAAAA"/>
-                </a:solidFill>
-                <a:latin typeface="Calibri"/>
-                <a:ea typeface="Calibri"/>
-                <a:cs typeface="Calibri"/>
-              </a:rPr>
-              <a:t>Image / Chart</a:t>
+              <a:t>Section subtitle or description</a:t>
             </a:r>
           </a:p>
         </p:txBody>
@@ -5390,7 +5961,7 @@
     </p:spTree>
     <p:extLst>
       <p:ext uri="{BB962C8B-B14F-4D97-AF65-F5344CB8AC3E}">
-        <p14:creationId xmlns:p14="http://schemas.microsoft.com/office/powerpoint/2010/main" val="3990665965"/>
+        <p14:creationId xmlns:p14="http://schemas.microsoft.com/office/powerpoint/2010/main" val="2358288740"/>
       </p:ext>
     </p:extLst>
   </p:cSld>

--- a/presentation_1.pptx
+++ b/presentation_1.pptx
@@ -6,19 +6,18 @@
     <p:sldMasterId id="2147483655" r:id="rId2"/>
   </p:sldMasterIdLst>
   <p:notesMasterIdLst>
-    <p:notesMasterId r:id="rId13"/>
+    <p:notesMasterId r:id="rId12"/>
   </p:notesMasterIdLst>
   <p:sldIdLst>
     <p:sldId id="266" r:id="rId3"/>
-    <p:sldId id="258" r:id="rId4"/>
-    <p:sldId id="269" r:id="rId5"/>
-    <p:sldId id="259" r:id="rId6"/>
-    <p:sldId id="271" r:id="rId7"/>
-    <p:sldId id="261" r:id="rId8"/>
-    <p:sldId id="267" r:id="rId9"/>
-    <p:sldId id="262" r:id="rId10"/>
-    <p:sldId id="264" r:id="rId11"/>
-    <p:sldId id="263" r:id="rId12"/>
+    <p:sldId id="269" r:id="rId4"/>
+    <p:sldId id="259" r:id="rId5"/>
+    <p:sldId id="271" r:id="rId6"/>
+    <p:sldId id="261" r:id="rId7"/>
+    <p:sldId id="267" r:id="rId8"/>
+    <p:sldId id="262" r:id="rId9"/>
+    <p:sldId id="264" r:id="rId10"/>
+    <p:sldId id="263" r:id="rId11"/>
   </p:sldIdLst>
   <p:sldSz cx="9144000" cy="5143500" type="screen16x9"/>
   <p:notesSz cx="5143500" cy="9144000"/>
@@ -484,90 +483,6 @@
             <a:fld id="{F7021451-1387-4CA6-816F-3879F97B5CBC}" type="slidenum">
               <a:rPr lang="en-US"/>
               <a:t>4</a:t>
-            </a:fld>
-            <a:endParaRPr lang="en-US"/>
-          </a:p>
-        </p:txBody>
-      </p:sp>
-    </p:spTree>
-    <p:extLst>
-      <p:ext uri="{BB962C8B-B14F-4D97-AF65-F5344CB8AC3E}">
-        <p14:creationId xmlns:p14="http://schemas.microsoft.com/office/powerpoint/2010/main" val="1024086991"/>
-      </p:ext>
-    </p:extLst>
-  </p:cSld>
-  <p:clrMapOvr>
-    <a:masterClrMapping/>
-  </p:clrMapOvr>
-</p:notes>
-</file>
-
-<file path=ppt/notesSlides/notesSlide4.xml><?xml version="1.0" encoding="utf-8"?>
-<p:notes xmlns:a="http://schemas.openxmlformats.org/drawingml/2006/main" xmlns:r="http://schemas.openxmlformats.org/officeDocument/2006/relationships" xmlns:p="http://schemas.openxmlformats.org/presentationml/2006/main">
-  <p:cSld>
-    <p:spTree>
-      <p:nvGrpSpPr>
-        <p:cNvPr id="1" name=""/>
-        <p:cNvGrpSpPr/>
-        <p:nvPr/>
-      </p:nvGrpSpPr>
-      <p:grpSpPr>
-        <a:xfrm>
-          <a:off x="0" y="0"/>
-          <a:ext cx="0" cy="0"/>
-          <a:chOff x="0" y="0"/>
-          <a:chExt cx="0" cy="0"/>
-        </a:xfrm>
-      </p:grpSpPr>
-      <p:sp>
-        <p:nvSpPr>
-          <p:cNvPr id="2" name="Slide Image Placeholder 1"/>
-          <p:cNvSpPr>
-            <a:spLocks noGrp="1" noRot="1" noChangeAspect="1"/>
-          </p:cNvSpPr>
-          <p:nvPr>
-            <p:ph type="sldImg"/>
-          </p:nvPr>
-        </p:nvSpPr>
-        <p:spPr/>
-      </p:sp>
-      <p:sp>
-        <p:nvSpPr>
-          <p:cNvPr id="3" name="Notes Placeholder 2"/>
-          <p:cNvSpPr>
-            <a:spLocks noGrp="1"/>
-          </p:cNvSpPr>
-          <p:nvPr>
-            <p:ph type="body" idx="1"/>
-          </p:nvPr>
-        </p:nvSpPr>
-        <p:spPr/>
-        <p:txBody>
-          <a:bodyPr/>
-          <a:lstStyle/>
-          <a:p>
-            <a:endParaRPr lang="en-US" dirty="0"/>
-          </a:p>
-        </p:txBody>
-      </p:sp>
-      <p:sp>
-        <p:nvSpPr>
-          <p:cNvPr id="4" name="Slide Number Placeholder 3"/>
-          <p:cNvSpPr>
-            <a:spLocks noGrp="1"/>
-          </p:cNvSpPr>
-          <p:nvPr>
-            <p:ph type="sldNum" sz="quarter" idx="10"/>
-          </p:nvPr>
-        </p:nvSpPr>
-        <p:spPr/>
-        <p:txBody>
-          <a:bodyPr/>
-          <a:lstStyle/>
-          <a:p>
-            <a:fld id="{F7021451-1387-4CA6-816F-3879F97B5CBC}" type="slidenum">
-              <a:rPr lang="en-US"/>
-              <a:t>5</a:t>
             </a:fld>
             <a:endParaRPr lang="en-US"/>
           </a:p>
@@ -3177,253 +3092,6 @@
 </p:sld>
 </file>
 
-<file path=ppt/slides/slide10.xml><?xml version="1.0" encoding="utf-8"?>
-<p:sld xmlns:a="http://schemas.openxmlformats.org/drawingml/2006/main" xmlns:r="http://schemas.openxmlformats.org/officeDocument/2006/relationships" xmlns:p="http://schemas.openxmlformats.org/presentationml/2006/main">
-  <p:cSld>
-    <p:spTree>
-      <p:nvGrpSpPr>
-        <p:cNvPr id="1" name=""/>
-        <p:cNvGrpSpPr/>
-        <p:nvPr/>
-      </p:nvGrpSpPr>
-      <p:grpSpPr>
-        <a:xfrm>
-          <a:off x="0" y="0"/>
-          <a:ext cx="0" cy="0"/>
-          <a:chOff x="0" y="0"/>
-          <a:chExt cx="0" cy="0"/>
-        </a:xfrm>
-      </p:grpSpPr>
-      <p:sp>
-        <p:nvSpPr>
-          <p:cNvPr id="3" name="CasellaDiTesto 2">
-            <a:extLst>
-              <a:ext uri="{FF2B5EF4-FFF2-40B4-BE49-F238E27FC236}">
-                <a16:creationId xmlns:a16="http://schemas.microsoft.com/office/drawing/2014/main" id="{D71D1CBA-50C0-4D94-BDFD-CE3626AAB801}"/>
-              </a:ext>
-            </a:extLst>
-          </p:cNvPr>
-          <p:cNvSpPr txBox="1"/>
-          <p:nvPr/>
-        </p:nvSpPr>
-        <p:spPr>
-          <a:xfrm>
-            <a:off x="508000" y="254000"/>
-            <a:ext cx="8229600" cy="457200"/>
-          </a:xfrm>
-          <a:prstGeom prst="rect">
-            <a:avLst/>
-          </a:prstGeom>
-          <a:noFill/>
-        </p:spPr>
-        <p:txBody>
-          <a:bodyPr vertOverflow="overflow" vert="horz" wrap="square" rtlCol="0" anchor="ctr" anchorCtr="0">
-            <a:noAutofit/>
-          </a:bodyPr>
-          <a:lstStyle/>
-          <a:p>
-            <a:pPr algn="l"/>
-            <a:r>
-              <a:rPr lang="it-IT" sz="2600" b="1" dirty="0">
-                <a:solidFill>
-                  <a:srgbClr val="1A1A1A"/>
-                </a:solidFill>
-                <a:latin typeface="Calibri"/>
-                <a:ea typeface="Calibri"/>
-                <a:cs typeface="Calibri"/>
-              </a:rPr>
-              <a:t>Slide Title</a:t>
-            </a:r>
-          </a:p>
-        </p:txBody>
-      </p:sp>
-      <p:sp>
-        <p:nvSpPr>
-          <p:cNvPr id="5" name="CasellaDiTesto 4">
-            <a:extLst>
-              <a:ext uri="{FF2B5EF4-FFF2-40B4-BE49-F238E27FC236}">
-                <a16:creationId xmlns:a16="http://schemas.microsoft.com/office/drawing/2014/main" id="{D22DD014-55CD-4034-B01B-03DB851B6C4D}"/>
-              </a:ext>
-            </a:extLst>
-          </p:cNvPr>
-          <p:cNvSpPr txBox="1"/>
-          <p:nvPr/>
-        </p:nvSpPr>
-        <p:spPr>
-          <a:xfrm>
-            <a:off x="368300" y="914400"/>
-            <a:ext cx="4318000" cy="3492500"/>
-          </a:xfrm>
-          <a:prstGeom prst="rect">
-            <a:avLst/>
-          </a:prstGeom>
-          <a:noFill/>
-        </p:spPr>
-        <p:txBody>
-          <a:bodyPr vertOverflow="overflow" vert="horz" wrap="square" rtlCol="0" anchor="t">
-            <a:noAutofit/>
-          </a:bodyPr>
-          <a:lstStyle/>
-          <a:p>
-            <a:pPr algn="l"/>
-            <a:r>
-              <a:rPr lang="it-IT" sz="1600" dirty="0">
-                <a:solidFill>
-                  <a:srgbClr val="333333"/>
-                </a:solidFill>
-                <a:latin typeface="Calibri"/>
-                <a:ea typeface="Calibri"/>
-                <a:cs typeface="Calibri"/>
-              </a:rPr>
-              <a:t>Text </a:t>
-            </a:r>
-            <a:r>
-              <a:rPr lang="it-IT" sz="1600" dirty="0" err="1">
-                <a:solidFill>
-                  <a:srgbClr val="333333"/>
-                </a:solidFill>
-                <a:latin typeface="Calibri"/>
-                <a:ea typeface="Calibri"/>
-                <a:cs typeface="Calibri"/>
-              </a:rPr>
-              <a:t>content</a:t>
-            </a:r>
-            <a:r>
-              <a:rPr lang="it-IT" sz="1600" dirty="0">
-                <a:solidFill>
-                  <a:srgbClr val="333333"/>
-                </a:solidFill>
-                <a:latin typeface="Calibri"/>
-                <a:ea typeface="Calibri"/>
-                <a:cs typeface="Calibri"/>
-              </a:rPr>
-              <a:t> </a:t>
-            </a:r>
-            <a:r>
-              <a:rPr lang="it-IT" sz="1600" dirty="0" err="1">
-                <a:solidFill>
-                  <a:srgbClr val="333333"/>
-                </a:solidFill>
-                <a:latin typeface="Calibri"/>
-                <a:ea typeface="Calibri"/>
-                <a:cs typeface="Calibri"/>
-              </a:rPr>
-              <a:t>goes</a:t>
-            </a:r>
-            <a:r>
-              <a:rPr lang="it-IT" sz="1600" dirty="0">
-                <a:solidFill>
-                  <a:srgbClr val="333333"/>
-                </a:solidFill>
-                <a:latin typeface="Calibri"/>
-                <a:ea typeface="Calibri"/>
-                <a:cs typeface="Calibri"/>
-              </a:rPr>
-              <a:t> </a:t>
-            </a:r>
-            <a:r>
-              <a:rPr lang="it-IT" sz="1600" dirty="0" err="1">
-                <a:solidFill>
-                  <a:srgbClr val="333333"/>
-                </a:solidFill>
-                <a:latin typeface="Calibri"/>
-                <a:ea typeface="Calibri"/>
-                <a:cs typeface="Calibri"/>
-              </a:rPr>
-              <a:t>here</a:t>
-            </a:r>
-            <a:endParaRPr lang="it-IT" sz="1600" dirty="0">
-              <a:solidFill>
-                <a:srgbClr val="333333"/>
-              </a:solidFill>
-              <a:latin typeface="Calibri"/>
-              <a:ea typeface="Calibri"/>
-              <a:cs typeface="Calibri"/>
-            </a:endParaRPr>
-          </a:p>
-        </p:txBody>
-      </p:sp>
-      <p:sp>
-        <p:nvSpPr>
-          <p:cNvPr id="6" name="Rettangolo con angoli arrotondati 5">
-            <a:extLst>
-              <a:ext uri="{FF2B5EF4-FFF2-40B4-BE49-F238E27FC236}">
-                <a16:creationId xmlns:a16="http://schemas.microsoft.com/office/drawing/2014/main" id="{17C1C3B0-E67F-4D08-89AC-6A936CD5AAC7}"/>
-              </a:ext>
-            </a:extLst>
-          </p:cNvPr>
-          <p:cNvSpPr/>
-          <p:nvPr/>
-        </p:nvSpPr>
-        <p:spPr>
-          <a:xfrm>
-            <a:off x="4889500" y="914400"/>
-            <a:ext cx="3937000" cy="3492500"/>
-          </a:xfrm>
-          <a:prstGeom prst="roundRect">
-            <a:avLst/>
-          </a:prstGeom>
-          <a:solidFill>
-            <a:srgbClr val="F0F0F0"/>
-          </a:solidFill>
-          <a:ln w="12700" cap="flat" cmpd="sng" algn="ctr">
-            <a:solidFill>
-              <a:srgbClr val="D6E4F0"/>
-            </a:solidFill>
-            <a:prstDash val="solid"/>
-            <a:miter lim="800000"/>
-          </a:ln>
-        </p:spPr>
-        <p:style>
-          <a:lnRef idx="2">
-            <a:schemeClr val="accent1">
-              <a:shade val="15000"/>
-            </a:schemeClr>
-          </a:lnRef>
-          <a:fillRef idx="1">
-            <a:schemeClr val="accent1"/>
-          </a:fillRef>
-          <a:effectRef idx="0">
-            <a:schemeClr val="accent1"/>
-          </a:effectRef>
-          <a:fontRef idx="minor">
-            <a:schemeClr val="lt1"/>
-          </a:fontRef>
-        </p:style>
-        <p:txBody>
-          <a:bodyPr vertOverflow="clip" horzOverflow="clip" rtlCol="0" anchor="ctr" anchorCtr="0">
-            <a:noAutofit/>
-          </a:bodyPr>
-          <a:lstStyle/>
-          <a:p>
-            <a:pPr algn="l"/>
-            <a:r>
-              <a:rPr lang="it-IT" sz="1600">
-                <a:solidFill>
-                  <a:srgbClr val="AAAAAA"/>
-                </a:solidFill>
-                <a:latin typeface="Calibri"/>
-                <a:ea typeface="Calibri"/>
-                <a:cs typeface="Calibri"/>
-              </a:rPr>
-              <a:t>Image / Chart</a:t>
-            </a:r>
-          </a:p>
-        </p:txBody>
-      </p:sp>
-    </p:spTree>
-    <p:extLst>
-      <p:ext uri="{BB962C8B-B14F-4D97-AF65-F5344CB8AC3E}">
-        <p14:creationId xmlns:p14="http://schemas.microsoft.com/office/powerpoint/2010/main" val="3990665965"/>
-      </p:ext>
-    </p:extLst>
-  </p:cSld>
-  <p:clrMapOvr>
-    <a:masterClrMapping/>
-  </p:clrMapOvr>
-</p:sld>
-</file>
-
 <file path=ppt/slides/slide2.xml><?xml version="1.0" encoding="utf-8"?>
 <p:sld xmlns:a="http://schemas.openxmlformats.org/drawingml/2006/main" xmlns:r="http://schemas.openxmlformats.org/officeDocument/2006/relationships" xmlns:p="http://schemas.openxmlformats.org/presentationml/2006/main">
   <p:cSld>
@@ -3443,6 +3111,45 @@
       </p:grpSpPr>
       <p:sp>
         <p:nvSpPr>
+          <p:cNvPr id="2" name="Text 0"/>
+          <p:cNvSpPr/>
+          <p:nvPr/>
+        </p:nvSpPr>
+        <p:spPr>
+          <a:xfrm>
+            <a:off x="320040" y="4846320"/>
+            <a:ext cx="7772400" cy="201168"/>
+          </a:xfrm>
+          <a:prstGeom prst="rect">
+            <a:avLst/>
+          </a:prstGeom>
+          <a:noFill/>
+          <a:ln/>
+        </p:spPr>
+        <p:txBody>
+          <a:bodyPr wrap="square" rtlCol="0" anchor="ctr"/>
+          <a:lstStyle/>
+          <a:p>
+            <a:pPr marL="0" indent="0" algn="l">
+              <a:buNone/>
+            </a:pPr>
+            <a:r>
+              <a:rPr lang="en-US" sz="900" dirty="0">
+                <a:solidFill>
+                  <a:srgbClr val="BBBBBB"/>
+                </a:solidFill>
+                <a:latin typeface="Calibri" pitchFamily="34" charset="0"/>
+                <a:ea typeface="Calibri" pitchFamily="34" charset="-122"/>
+                <a:cs typeface="Calibri" pitchFamily="34" charset="-120"/>
+              </a:rPr>
+              <a:t>Paolo Spallanzani  ·  Deep RL in Frontier-Based Autonomous Exploration</a:t>
+            </a:r>
+            <a:endParaRPr lang="en-US" sz="900" dirty="0"/>
+          </a:p>
+        </p:txBody>
+      </p:sp>
+      <p:sp>
+        <p:nvSpPr>
           <p:cNvPr id="3" name="Text 1"/>
           <p:cNvSpPr/>
           <p:nvPr/>
@@ -3529,6 +3236,17 @@
             <a:pPr marL="0" indent="0" algn="l">
               <a:buNone/>
             </a:pPr>
+            <a:r>
+              <a:rPr lang="en-US" sz="2600" b="1" dirty="0">
+                <a:solidFill>
+                  <a:srgbClr val="1A1A1A"/>
+                </a:solidFill>
+                <a:latin typeface="Calibri" pitchFamily="34" charset="0"/>
+                <a:ea typeface="Calibri" pitchFamily="34" charset="-122"/>
+                <a:cs typeface="Calibri" pitchFamily="34" charset="-120"/>
+              </a:rPr>
+              <a:t>Motivation &amp; Scope</a:t>
+            </a:r>
             <a:endParaRPr lang="en-US" sz="2600" dirty="0"/>
           </a:p>
         </p:txBody>
@@ -3571,11 +3289,13 @@
             <a:avLst/>
           </a:prstGeom>
           <a:solidFill>
-            <a:srgbClr val="1A2E4A"/>
+            <a:srgbClr val="D6E4F0"/>
           </a:solidFill>
           <a:ln w="12700">
             <a:solidFill>
-              <a:srgbClr val="1A2E4A"/>
+              <a:schemeClr val="accent1">
+                <a:lumMod val="50000"/>
+              </a:schemeClr>
             </a:solidFill>
             <a:prstDash val="solid"/>
           </a:ln>
@@ -3606,34 +3326,27 @@
               <a:buNone/>
             </a:pPr>
             <a:r>
-              <a:rPr lang="en-US" sz="1600" b="1" i="1" dirty="0">
-                <a:solidFill>
-                  <a:srgbClr val="FFFFFF"/>
-                </a:solidFill>
+              <a:rPr lang="en-US" b="1" i="1" dirty="0">
                 <a:latin typeface="Calibri" pitchFamily="34" charset="0"/>
                 <a:ea typeface="Calibri" pitchFamily="34" charset="-122"/>
                 <a:cs typeface="Calibri" pitchFamily="34" charset="-120"/>
               </a:rPr>
-              <a:t>Can Deep Reinforcement Learning replace classical heuristics</a:t>
-            </a:r>
-            <a:endParaRPr lang="en-US" sz="1600" dirty="0"/>
+              <a:t>Can Deep Reinforcement Learning (DRL) be effectively</a:t>
+            </a:r>
           </a:p>
           <a:p>
             <a:pPr marL="0" indent="0" algn="ctr">
               <a:buNone/>
             </a:pPr>
             <a:r>
-              <a:rPr lang="en-US" sz="1600" b="1" i="1" dirty="0">
-                <a:solidFill>
-                  <a:srgbClr val="FFFFFF"/>
-                </a:solidFill>
+              <a:rPr lang="en-US" b="1" i="1" dirty="0">
                 <a:latin typeface="Calibri" pitchFamily="34" charset="0"/>
                 <a:ea typeface="Calibri" pitchFamily="34" charset="-122"/>
                 <a:cs typeface="Calibri" pitchFamily="34" charset="-120"/>
               </a:rPr>
-              <a:t>for frontier cluster selection in autonomous exploration?</a:t>
-            </a:r>
-            <a:endParaRPr lang="en-US" sz="1600" dirty="0"/>
+              <a:t>applied to autonomous exploration?</a:t>
+            </a:r>
+            <a:endParaRPr lang="en-US" dirty="0"/>
           </a:p>
         </p:txBody>
       </p:sp>
@@ -3646,7 +3359,7 @@
         <p:spPr>
           <a:xfrm>
             <a:off x="457200" y="2011680"/>
-            <a:ext cx="8229600" cy="2880360"/>
+            <a:ext cx="8229600" cy="1464491"/>
           </a:xfrm>
           <a:prstGeom prst="rect">
             <a:avLst/>
@@ -3666,7 +3379,7 @@
               <a:buChar char="•"/>
             </a:pPr>
             <a:r>
-              <a:rPr lang="en-US" sz="1400" dirty="0">
+              <a:rPr lang="en-US" b="1" dirty="0">
                 <a:solidFill>
                   <a:srgbClr val="1A1A1A"/>
                 </a:solidFill>
@@ -3674,9 +3387,20 @@
                 <a:ea typeface="Calibri" pitchFamily="34" charset="-122"/>
                 <a:cs typeface="Calibri" pitchFamily="34" charset="-120"/>
               </a:rPr>
-              <a:t>Autonomous exploration = systematic coverage of an unknown environment without human input</a:t>
-            </a:r>
-            <a:endParaRPr lang="en-US" sz="1400" dirty="0"/>
+              <a:t>Autonomous exploration </a:t>
+            </a:r>
+            <a:r>
+              <a:rPr lang="en-US" dirty="0">
+                <a:solidFill>
+                  <a:srgbClr val="1A1A1A"/>
+                </a:solidFill>
+                <a:latin typeface="Calibri" pitchFamily="34" charset="0"/>
+                <a:ea typeface="Calibri" pitchFamily="34" charset="-122"/>
+                <a:cs typeface="Calibri" pitchFamily="34" charset="-120"/>
+              </a:rPr>
+              <a:t>is complex task</a:t>
+            </a:r>
+            <a:endParaRPr lang="en-US" dirty="0"/>
           </a:p>
           <a:p>
             <a:pPr marL="190500" indent="-190500">
@@ -3687,7 +3411,7 @@
               <a:buChar char="•"/>
             </a:pPr>
             <a:r>
-              <a:rPr lang="en-US" sz="1400" dirty="0">
+              <a:rPr lang="en-US" b="1" dirty="0">
                 <a:solidFill>
                   <a:srgbClr val="1A1A1A"/>
                 </a:solidFill>
@@ -3695,9 +3419,20 @@
                 <a:ea typeface="Calibri" pitchFamily="34" charset="-122"/>
                 <a:cs typeface="Calibri" pitchFamily="34" charset="-120"/>
               </a:rPr>
-              <a:t>Classical frontier methods use fixed heuristics (nearest, largest) — simple but not adaptive</a:t>
-            </a:r>
-            <a:endParaRPr lang="en-US" sz="1400" dirty="0"/>
+              <a:t>Classical analytical </a:t>
+            </a:r>
+            <a:r>
+              <a:rPr lang="en-US" dirty="0">
+                <a:solidFill>
+                  <a:srgbClr val="1A1A1A"/>
+                </a:solidFill>
+                <a:latin typeface="Calibri" pitchFamily="34" charset="0"/>
+                <a:ea typeface="Calibri" pitchFamily="34" charset="-122"/>
+                <a:cs typeface="Calibri" pitchFamily="34" charset="-120"/>
+              </a:rPr>
+              <a:t>methods exist but present some limitations</a:t>
+            </a:r>
+            <a:endParaRPr lang="en-US" dirty="0"/>
           </a:p>
           <a:p>
             <a:pPr marL="190500" indent="-190500">
@@ -3708,7 +3443,7 @@
               <a:buChar char="•"/>
             </a:pPr>
             <a:r>
-              <a:rPr lang="en-US" sz="1400" dirty="0">
+              <a:rPr lang="en-US" b="1" dirty="0">
                 <a:solidFill>
                   <a:srgbClr val="1A1A1A"/>
                 </a:solidFill>
@@ -3716,9 +3451,20 @@
                 <a:ea typeface="Calibri" pitchFamily="34" charset="-122"/>
                 <a:cs typeface="Calibri" pitchFamily="34" charset="-120"/>
               </a:rPr>
-              <a:t>DRL learns a policy from experience — potentially more flexible and environment-aware</a:t>
-            </a:r>
-            <a:endParaRPr lang="en-US" sz="1400" dirty="0"/>
+              <a:t>Learning-based</a:t>
+            </a:r>
+            <a:r>
+              <a:rPr lang="en-US" dirty="0">
+                <a:solidFill>
+                  <a:srgbClr val="1A1A1A"/>
+                </a:solidFill>
+                <a:latin typeface="Calibri" pitchFamily="34" charset="0"/>
+                <a:ea typeface="Calibri" pitchFamily="34" charset="-122"/>
+                <a:cs typeface="Calibri" pitchFamily="34" charset="-120"/>
+              </a:rPr>
+              <a:t> methods can provide more adaptive models</a:t>
+            </a:r>
+            <a:endParaRPr lang="en-US" dirty="0"/>
           </a:p>
           <a:p>
             <a:pPr marL="190500" indent="-190500">
@@ -3729,7 +3475,7 @@
               <a:buChar char="•"/>
             </a:pPr>
             <a:r>
-              <a:rPr lang="en-US" sz="1400" dirty="0">
+              <a:rPr lang="en-US" dirty="0">
                 <a:solidFill>
                   <a:srgbClr val="1A1A1A"/>
                 </a:solidFill>
@@ -3737,62 +3483,119 @@
                 <a:ea typeface="Calibri" pitchFamily="34" charset="-122"/>
                 <a:cs typeface="Calibri" pitchFamily="34" charset="-120"/>
               </a:rPr>
-              <a:t>Goal: validate DRL as a drop-in decision-maker inside a modular exploration pipeline</a:t>
-            </a:r>
-            <a:endParaRPr lang="en-US" sz="1400" dirty="0"/>
+              <a:t>Can learning-based method be </a:t>
+            </a:r>
+            <a:r>
+              <a:rPr lang="en-US" b="1" dirty="0">
+                <a:solidFill>
+                  <a:srgbClr val="1A1A1A"/>
+                </a:solidFill>
+                <a:latin typeface="Calibri" pitchFamily="34" charset="0"/>
+                <a:ea typeface="Calibri" pitchFamily="34" charset="-122"/>
+                <a:cs typeface="Calibri" pitchFamily="34" charset="-120"/>
+              </a:rPr>
+              <a:t>integrated</a:t>
+            </a:r>
+            <a:r>
+              <a:rPr lang="en-US" dirty="0">
+                <a:solidFill>
+                  <a:srgbClr val="1A1A1A"/>
+                </a:solidFill>
+                <a:latin typeface="Calibri" pitchFamily="34" charset="0"/>
+                <a:ea typeface="Calibri" pitchFamily="34" charset="-122"/>
+                <a:cs typeface="Calibri" pitchFamily="34" charset="-120"/>
+              </a:rPr>
+              <a:t> in classical ones? </a:t>
+            </a:r>
+            <a:endParaRPr lang="en-US" dirty="0"/>
           </a:p>
         </p:txBody>
       </p:sp>
       <p:sp>
         <p:nvSpPr>
-          <p:cNvPr id="10" name="CasellaDiTesto 9">
+          <p:cNvPr id="11" name="Shape 5">
             <a:extLst>
               <a:ext uri="{FF2B5EF4-FFF2-40B4-BE49-F238E27FC236}">
-                <a16:creationId xmlns:a16="http://schemas.microsoft.com/office/drawing/2014/main" id="{C5631F7D-3F07-6F28-2909-35381EFA0289}"/>
+                <a16:creationId xmlns:a16="http://schemas.microsoft.com/office/drawing/2014/main" id="{000FCEB4-5A5B-AECB-8434-1AA1350D5054}"/>
               </a:ext>
             </a:extLst>
           </p:cNvPr>
-          <p:cNvSpPr txBox="1"/>
+          <p:cNvSpPr/>
           <p:nvPr/>
         </p:nvSpPr>
         <p:spPr>
           <a:xfrm>
-            <a:off x="508000" y="254000"/>
-            <a:ext cx="8229600" cy="457200"/>
+            <a:off x="365760" y="3565705"/>
+            <a:ext cx="8412480" cy="960120"/>
+          </a:xfrm>
+          <a:prstGeom prst="rect">
+            <a:avLst/>
+          </a:prstGeom>
+          <a:solidFill>
+            <a:srgbClr val="D6E4F0"/>
+          </a:solidFill>
+          <a:ln w="12700">
+            <a:solidFill>
+              <a:schemeClr val="accent1">
+                <a:lumMod val="50000"/>
+              </a:schemeClr>
+            </a:solidFill>
+            <a:prstDash val="solid"/>
+          </a:ln>
+        </p:spPr>
+      </p:sp>
+      <p:sp>
+        <p:nvSpPr>
+          <p:cNvPr id="12" name="Text 6">
+            <a:extLst>
+              <a:ext uri="{FF2B5EF4-FFF2-40B4-BE49-F238E27FC236}">
+                <a16:creationId xmlns:a16="http://schemas.microsoft.com/office/drawing/2014/main" id="{0015EE5A-DA97-6AC7-337B-2E3B82A10631}"/>
+              </a:ext>
+            </a:extLst>
+          </p:cNvPr>
+          <p:cNvSpPr/>
+          <p:nvPr/>
+        </p:nvSpPr>
+        <p:spPr>
+          <a:xfrm>
+            <a:off x="457200" y="3604281"/>
+            <a:ext cx="8229600" cy="868680"/>
           </a:xfrm>
           <a:prstGeom prst="rect">
             <a:avLst/>
           </a:prstGeom>
           <a:noFill/>
+          <a:ln/>
         </p:spPr>
         <p:txBody>
-          <a:bodyPr vertOverflow="overflow" vert="horz" wrap="square" rtlCol="0" anchor="ctr" anchorCtr="0">
-            <a:noAutofit/>
-          </a:bodyPr>
+          <a:bodyPr wrap="square" rtlCol="0" anchor="ctr"/>
           <a:lstStyle/>
           <a:p>
-            <a:r>
-              <a:rPr lang="en-US" sz="2600" b="1" dirty="0">
-                <a:solidFill>
-                  <a:srgbClr val="1A1A1A"/>
-                </a:solidFill>
+            <a:pPr marL="0" indent="0" algn="ctr">
+              <a:buNone/>
+            </a:pPr>
+            <a:r>
+              <a:rPr lang="en-US" b="1" i="1" dirty="0">
                 <a:latin typeface="Calibri" pitchFamily="34" charset="0"/>
                 <a:ea typeface="Calibri" pitchFamily="34" charset="-122"/>
                 <a:cs typeface="Calibri" pitchFamily="34" charset="-120"/>
               </a:rPr>
-              <a:t>Motivation </a:t>
-            </a:r>
-            <a:r>
-              <a:rPr lang="it-IT" sz="2600" b="1" dirty="0">
-                <a:solidFill>
-                  <a:srgbClr val="1A1A1A"/>
-                </a:solidFill>
-                <a:latin typeface="Calibri"/>
-                <a:ea typeface="Calibri"/>
-                <a:cs typeface="Calibri"/>
-              </a:rPr>
-              <a:t>&amp; Scope</a:t>
-            </a:r>
+              <a:t>Objective: </a:t>
+            </a:r>
+          </a:p>
+          <a:p>
+            <a:pPr marL="0" indent="0" algn="ctr">
+              <a:buNone/>
+            </a:pPr>
+            <a:r>
+              <a:rPr lang="en-US" b="1" i="1" dirty="0">
+                <a:latin typeface="Calibri" pitchFamily="34" charset="0"/>
+                <a:ea typeface="Calibri" pitchFamily="34" charset="-122"/>
+                <a:cs typeface="Calibri" pitchFamily="34" charset="-120"/>
+              </a:rPr>
+              <a:t>develop a framework for the investigation of this possibility</a:t>
+            </a:r>
+            <a:endParaRPr lang="en-US" dirty="0"/>
           </a:p>
         </p:txBody>
       </p:sp>
@@ -3823,14 +3626,14 @@
       </p:grpSpPr>
       <p:sp>
         <p:nvSpPr>
-          <p:cNvPr id="2" name="Text 0"/>
+          <p:cNvPr id="3" name="Text 1"/>
           <p:cNvSpPr/>
           <p:nvPr/>
         </p:nvSpPr>
         <p:spPr>
           <a:xfrm>
-            <a:off x="320040" y="4846320"/>
-            <a:ext cx="7772400" cy="201168"/>
+            <a:off x="8412480" y="4846320"/>
+            <a:ext cx="457200" cy="201168"/>
           </a:xfrm>
           <a:prstGeom prst="rect">
             <a:avLst/>
@@ -3842,7 +3645,7 @@
           <a:bodyPr wrap="square" rtlCol="0" anchor="ctr"/>
           <a:lstStyle/>
           <a:p>
-            <a:pPr marL="0" indent="0" algn="l">
+            <a:pPr marL="0" indent="0" algn="r">
               <a:buNone/>
             </a:pPr>
             <a:r>
@@ -3854,46 +3657,7 @@
                 <a:ea typeface="Calibri" pitchFamily="34" charset="-122"/>
                 <a:cs typeface="Calibri" pitchFamily="34" charset="-120"/>
               </a:rPr>
-              <a:t>Paolo Spallanzani  ·  Deep RL in Frontier-Based Autonomous Exploration</a:t>
-            </a:r>
-            <a:endParaRPr lang="en-US" sz="900" dirty="0"/>
-          </a:p>
-        </p:txBody>
-      </p:sp>
-      <p:sp>
-        <p:nvSpPr>
-          <p:cNvPr id="3" name="Text 1"/>
-          <p:cNvSpPr/>
-          <p:nvPr/>
-        </p:nvSpPr>
-        <p:spPr>
-          <a:xfrm>
-            <a:off x="8412480" y="4846320"/>
-            <a:ext cx="457200" cy="201168"/>
-          </a:xfrm>
-          <a:prstGeom prst="rect">
-            <a:avLst/>
-          </a:prstGeom>
-          <a:noFill/>
-          <a:ln/>
-        </p:spPr>
-        <p:txBody>
-          <a:bodyPr wrap="square" rtlCol="0" anchor="ctr"/>
-          <a:lstStyle/>
-          <a:p>
-            <a:pPr marL="0" indent="0" algn="r">
-              <a:buNone/>
-            </a:pPr>
-            <a:r>
-              <a:rPr lang="en-US" sz="900" dirty="0">
-                <a:solidFill>
-                  <a:srgbClr val="BBBBBB"/>
-                </a:solidFill>
-                <a:latin typeface="Calibri" pitchFamily="34" charset="0"/>
-                <a:ea typeface="Calibri" pitchFamily="34" charset="-122"/>
-                <a:cs typeface="Calibri" pitchFamily="34" charset="-120"/>
-              </a:rPr>
-              <a:t>3 / 17</a:t>
+              <a:t>4 / 17</a:t>
             </a:r>
             <a:endParaRPr lang="en-US" sz="900" dirty="0"/>
           </a:p>
@@ -3957,7 +3721,7 @@
                 <a:ea typeface="Calibri" pitchFamily="34" charset="-122"/>
                 <a:cs typeface="Calibri" pitchFamily="34" charset="-120"/>
               </a:rPr>
-              <a:t>Motivation &amp; Scope</a:t>
+              <a:t>Context: Autonomous Exploration</a:t>
             </a:r>
             <a:endParaRPr lang="en-US" sz="2600" dirty="0"/>
           </a:p>
@@ -3988,90 +3752,14 @@
       </p:sp>
       <p:sp>
         <p:nvSpPr>
-          <p:cNvPr id="7" name="Shape 5"/>
+          <p:cNvPr id="7" name="Text 5"/>
           <p:cNvSpPr/>
           <p:nvPr/>
         </p:nvSpPr>
         <p:spPr>
           <a:xfrm>
             <a:off x="365760" y="914400"/>
-            <a:ext cx="8412480" cy="960120"/>
-          </a:xfrm>
-          <a:prstGeom prst="rect">
-            <a:avLst/>
-          </a:prstGeom>
-          <a:solidFill>
-            <a:srgbClr val="D6E4F0"/>
-          </a:solidFill>
-          <a:ln w="12700">
-            <a:solidFill>
-              <a:schemeClr val="accent1">
-                <a:lumMod val="50000"/>
-              </a:schemeClr>
-            </a:solidFill>
-            <a:prstDash val="solid"/>
-          </a:ln>
-        </p:spPr>
-      </p:sp>
-      <p:sp>
-        <p:nvSpPr>
-          <p:cNvPr id="8" name="Text 6"/>
-          <p:cNvSpPr/>
-          <p:nvPr/>
-        </p:nvSpPr>
-        <p:spPr>
-          <a:xfrm>
-            <a:off x="457200" y="960120"/>
-            <a:ext cx="8229600" cy="868680"/>
-          </a:xfrm>
-          <a:prstGeom prst="rect">
-            <a:avLst/>
-          </a:prstGeom>
-          <a:noFill/>
-          <a:ln/>
-        </p:spPr>
-        <p:txBody>
-          <a:bodyPr wrap="square" rtlCol="0" anchor="ctr"/>
-          <a:lstStyle/>
-          <a:p>
-            <a:pPr marL="0" indent="0" algn="ctr">
-              <a:buNone/>
-            </a:pPr>
-            <a:r>
-              <a:rPr lang="en-US" b="1" i="1" dirty="0">
-                <a:latin typeface="Calibri" pitchFamily="34" charset="0"/>
-                <a:ea typeface="Calibri" pitchFamily="34" charset="-122"/>
-                <a:cs typeface="Calibri" pitchFamily="34" charset="-120"/>
-              </a:rPr>
-              <a:t>Can Deep Reinforcement Learning (DRL) be effectively</a:t>
-            </a:r>
-          </a:p>
-          <a:p>
-            <a:pPr marL="0" indent="0" algn="ctr">
-              <a:buNone/>
-            </a:pPr>
-            <a:r>
-              <a:rPr lang="en-US" b="1" i="1" dirty="0">
-                <a:latin typeface="Calibri" pitchFamily="34" charset="0"/>
-                <a:ea typeface="Calibri" pitchFamily="34" charset="-122"/>
-                <a:cs typeface="Calibri" pitchFamily="34" charset="-120"/>
-              </a:rPr>
-              <a:t>applied to autonomous exploration?</a:t>
-            </a:r>
-            <a:endParaRPr lang="en-US" dirty="0"/>
-          </a:p>
-        </p:txBody>
-      </p:sp>
-      <p:sp>
-        <p:nvSpPr>
-          <p:cNvPr id="9" name="Text 7"/>
-          <p:cNvSpPr/>
-          <p:nvPr/>
-        </p:nvSpPr>
-        <p:spPr>
-          <a:xfrm>
-            <a:off x="457200" y="2011680"/>
-            <a:ext cx="8229600" cy="1464491"/>
+            <a:ext cx="4663440" cy="3840480"/>
           </a:xfrm>
           <a:prstGeom prst="rect">
             <a:avLst/>
@@ -4088,10 +3776,11 @@
                 <a:spcPts val="500"/>
               </a:spcAft>
               <a:buSzPct val="100000"/>
+              <a:buFontTx/>
               <a:buChar char="•"/>
             </a:pPr>
             <a:r>
-              <a:rPr lang="en-US" b="1" dirty="0">
+              <a:rPr lang="en-US" dirty="0">
                 <a:solidFill>
                   <a:srgbClr val="1A1A1A"/>
                 </a:solidFill>
@@ -4099,20 +3788,8 @@
                 <a:ea typeface="Calibri" pitchFamily="34" charset="-122"/>
                 <a:cs typeface="Calibri" pitchFamily="34" charset="-120"/>
               </a:rPr>
-              <a:t>Autonomous exploration </a:t>
-            </a:r>
-            <a:r>
-              <a:rPr lang="en-US" dirty="0">
-                <a:solidFill>
-                  <a:srgbClr val="1A1A1A"/>
-                </a:solidFill>
-                <a:latin typeface="Calibri" pitchFamily="34" charset="0"/>
-                <a:ea typeface="Calibri" pitchFamily="34" charset="-122"/>
-                <a:cs typeface="Calibri" pitchFamily="34" charset="-120"/>
-              </a:rPr>
-              <a:t>is complex task</a:t>
-            </a:r>
-            <a:endParaRPr lang="en-US" dirty="0"/>
+              <a:t>Exploration: systematically map an unknown environment</a:t>
+            </a:r>
           </a:p>
           <a:p>
             <a:pPr marL="190500" indent="-190500">
@@ -4120,10 +3797,11 @@
                 <a:spcPts val="500"/>
               </a:spcAft>
               <a:buSzPct val="100000"/>
+              <a:buFontTx/>
               <a:buChar char="•"/>
             </a:pPr>
             <a:r>
-              <a:rPr lang="en-US" b="1" dirty="0">
+              <a:rPr lang="en-US" dirty="0">
                 <a:solidFill>
                   <a:srgbClr val="1A1A1A"/>
                 </a:solidFill>
@@ -4131,20 +3809,8 @@
                 <a:ea typeface="Calibri" pitchFamily="34" charset="-122"/>
                 <a:cs typeface="Calibri" pitchFamily="34" charset="-120"/>
               </a:rPr>
-              <a:t>Classical analytical </a:t>
-            </a:r>
-            <a:r>
-              <a:rPr lang="en-US" dirty="0">
-                <a:solidFill>
-                  <a:srgbClr val="1A1A1A"/>
-                </a:solidFill>
-                <a:latin typeface="Calibri" pitchFamily="34" charset="0"/>
-                <a:ea typeface="Calibri" pitchFamily="34" charset="-122"/>
-                <a:cs typeface="Calibri" pitchFamily="34" charset="-120"/>
-              </a:rPr>
-              <a:t>methods exist but present some limitations</a:t>
-            </a:r>
-            <a:endParaRPr lang="en-US" dirty="0"/>
+              <a:t>Autonomous: the agent can perceive and moves without human guidance</a:t>
+            </a:r>
           </a:p>
           <a:p>
             <a:pPr marL="190500" indent="-190500">
@@ -4152,10 +3818,11 @@
                 <a:spcPts val="500"/>
               </a:spcAft>
               <a:buSzPct val="100000"/>
+              <a:buFontTx/>
               <a:buChar char="•"/>
             </a:pPr>
             <a:r>
-              <a:rPr lang="en-US" b="1" dirty="0">
+              <a:rPr lang="en-US" dirty="0">
                 <a:solidFill>
                   <a:srgbClr val="1A1A1A"/>
                 </a:solidFill>
@@ -4163,20 +3830,8 @@
                 <a:ea typeface="Calibri" pitchFamily="34" charset="-122"/>
                 <a:cs typeface="Calibri" pitchFamily="34" charset="-120"/>
               </a:rPr>
-              <a:t>Learning-based</a:t>
-            </a:r>
-            <a:r>
-              <a:rPr lang="en-US" dirty="0">
-                <a:solidFill>
-                  <a:srgbClr val="1A1A1A"/>
-                </a:solidFill>
-                <a:latin typeface="Calibri" pitchFamily="34" charset="0"/>
-                <a:ea typeface="Calibri" pitchFamily="34" charset="-122"/>
-                <a:cs typeface="Calibri" pitchFamily="34" charset="-120"/>
-              </a:rPr>
-              <a:t> methods can provide more adaptive models</a:t>
-            </a:r>
-            <a:endParaRPr lang="en-US" dirty="0"/>
+              <a:t>Why autonomous exploration?</a:t>
+            </a:r>
           </a:p>
           <a:p>
             <a:pPr marL="190500" indent="-190500">
@@ -4184,6 +3839,7 @@
                 <a:spcPts val="500"/>
               </a:spcAft>
               <a:buSzPct val="100000"/>
+              <a:buFontTx/>
               <a:buChar char="•"/>
             </a:pPr>
             <a:r>
@@ -4195,119 +3851,273 @@
                 <a:ea typeface="Calibri" pitchFamily="34" charset="-122"/>
                 <a:cs typeface="Calibri" pitchFamily="34" charset="-120"/>
               </a:rPr>
-              <a:t>Can learning-based method be </a:t>
-            </a:r>
-            <a:r>
-              <a:rPr lang="en-US" b="1" dirty="0">
-                <a:solidFill>
-                  <a:srgbClr val="1A1A1A"/>
+              <a:t>Complex task, requires:</a:t>
+            </a:r>
+          </a:p>
+          <a:p>
+            <a:pPr marL="647700" lvl="1" indent="-190500">
+              <a:spcAft>
+                <a:spcPts val="500"/>
+              </a:spcAft>
+              <a:buSzPct val="100000"/>
+              <a:buFontTx/>
+              <a:buChar char="•"/>
+            </a:pPr>
+            <a:r>
+              <a:rPr lang="en-US" sz="1400" dirty="0"/>
+              <a:t>Mapping</a:t>
+            </a:r>
+          </a:p>
+          <a:p>
+            <a:pPr marL="647700" lvl="1" indent="-190500">
+              <a:spcAft>
+                <a:spcPts val="500"/>
+              </a:spcAft>
+              <a:buSzPct val="100000"/>
+              <a:buFontTx/>
+              <a:buChar char="•"/>
+            </a:pPr>
+            <a:r>
+              <a:rPr lang="en-US" sz="1400" dirty="0"/>
+              <a:t>Localization</a:t>
+            </a:r>
+          </a:p>
+          <a:p>
+            <a:pPr marL="647700" lvl="1" indent="-190500">
+              <a:spcAft>
+                <a:spcPts val="500"/>
+              </a:spcAft>
+              <a:buSzPct val="100000"/>
+              <a:buFontTx/>
+              <a:buChar char="•"/>
+            </a:pPr>
+            <a:r>
+              <a:rPr lang="en-US" sz="1400" dirty="0"/>
+              <a:t>Navigation</a:t>
+            </a:r>
+          </a:p>
+          <a:p>
+            <a:pPr marL="647700" lvl="1" indent="-190500">
+              <a:spcAft>
+                <a:spcPts val="500"/>
+              </a:spcAft>
+              <a:buSzPct val="100000"/>
+              <a:buFontTx/>
+              <a:buChar char="•"/>
+            </a:pPr>
+            <a:r>
+              <a:rPr lang="en-US" sz="1400" dirty="0"/>
+              <a:t>Decision making</a:t>
+            </a:r>
+            <a:endParaRPr lang="en-US" dirty="0"/>
+          </a:p>
+        </p:txBody>
+      </p:sp>
+      <p:sp>
+        <p:nvSpPr>
+          <p:cNvPr id="9" name="Text 6"/>
+          <p:cNvSpPr/>
+          <p:nvPr/>
+        </p:nvSpPr>
+        <p:spPr>
+          <a:xfrm>
+            <a:off x="5419961" y="3687886"/>
+            <a:ext cx="3136106" cy="228598"/>
+          </a:xfrm>
+          <a:prstGeom prst="rect">
+            <a:avLst/>
+          </a:prstGeom>
+          <a:noFill/>
+          <a:ln/>
+        </p:spPr>
+        <p:txBody>
+          <a:bodyPr wrap="square" rtlCol="0" anchor="ctr"/>
+          <a:lstStyle/>
+          <a:p>
+            <a:pPr marL="0" indent="0" algn="ctr">
+              <a:buNone/>
+            </a:pPr>
+            <a:r>
+              <a:rPr lang="en-US" sz="900" dirty="0">
+                <a:solidFill>
+                  <a:srgbClr val="5A5A5A"/>
                 </a:solidFill>
                 <a:latin typeface="Calibri" pitchFamily="34" charset="0"/>
                 <a:ea typeface="Calibri" pitchFamily="34" charset="-122"/>
                 <a:cs typeface="Calibri" pitchFamily="34" charset="-120"/>
               </a:rPr>
-              <a:t>integrated</a:t>
-            </a:r>
-            <a:r>
-              <a:rPr lang="en-US" dirty="0">
-                <a:solidFill>
-                  <a:srgbClr val="1A1A1A"/>
-                </a:solidFill>
-                <a:latin typeface="Calibri" pitchFamily="34" charset="0"/>
-                <a:ea typeface="Calibri" pitchFamily="34" charset="-122"/>
-                <a:cs typeface="Calibri" pitchFamily="34" charset="-120"/>
-              </a:rPr>
-              <a:t> in classical ones? </a:t>
-            </a:r>
-            <a:endParaRPr lang="en-US" dirty="0"/>
+              <a:t>Autonomous exploration application examples</a:t>
+            </a:r>
+            <a:endParaRPr lang="en-US" sz="900" dirty="0"/>
           </a:p>
         </p:txBody>
       </p:sp>
-      <p:sp>
-        <p:nvSpPr>
-          <p:cNvPr id="11" name="Shape 5">
+      <p:pic>
+        <p:nvPicPr>
+          <p:cNvPr id="8" name="Immagine 7">
             <a:extLst>
               <a:ext uri="{FF2B5EF4-FFF2-40B4-BE49-F238E27FC236}">
-                <a16:creationId xmlns:a16="http://schemas.microsoft.com/office/drawing/2014/main" id="{000FCEB4-5A5B-AECB-8434-1AA1350D5054}"/>
+                <a16:creationId xmlns:a16="http://schemas.microsoft.com/office/drawing/2014/main" id="{E497BBE3-9ECA-8B02-05B1-5CA8969F9490}"/>
               </a:ext>
             </a:extLst>
           </p:cNvPr>
-          <p:cNvSpPr/>
+          <p:cNvPicPr>
+            <a:picLocks noChangeAspect="1"/>
+          </p:cNvPicPr>
           <p:nvPr/>
-        </p:nvSpPr>
-        <p:spPr>
-          <a:xfrm>
-            <a:off x="365760" y="3565705"/>
-            <a:ext cx="8412480" cy="960120"/>
-          </a:xfrm>
-          <a:prstGeom prst="rect">
-            <a:avLst/>
-          </a:prstGeom>
-          <a:solidFill>
-            <a:srgbClr val="D6E4F0"/>
-          </a:solidFill>
-          <a:ln w="12700">
-            <a:solidFill>
-              <a:schemeClr val="accent1">
-                <a:lumMod val="50000"/>
-              </a:schemeClr>
-            </a:solidFill>
-            <a:prstDash val="solid"/>
-          </a:ln>
-        </p:spPr>
-      </p:sp>
-      <p:sp>
-        <p:nvSpPr>
-          <p:cNvPr id="12" name="Text 6">
+        </p:nvPicPr>
+        <p:blipFill>
+          <a:blip r:embed="rId3"/>
+          <a:srcRect l="11347" r="3033"/>
+          <a:stretch>
+            <a:fillRect/>
+          </a:stretch>
+        </p:blipFill>
+        <p:spPr>
+          <a:xfrm>
+            <a:off x="5187789" y="1277305"/>
+            <a:ext cx="1757361" cy="1077575"/>
+          </a:xfrm>
+          <a:prstGeom prst="rect">
+            <a:avLst/>
+          </a:prstGeom>
+        </p:spPr>
+      </p:pic>
+      <p:pic>
+        <p:nvPicPr>
+          <p:cNvPr id="11" name="Immagine 10">
             <a:extLst>
               <a:ext uri="{FF2B5EF4-FFF2-40B4-BE49-F238E27FC236}">
-                <a16:creationId xmlns:a16="http://schemas.microsoft.com/office/drawing/2014/main" id="{0015EE5A-DA97-6AC7-337B-2E3B82A10631}"/>
+                <a16:creationId xmlns:a16="http://schemas.microsoft.com/office/drawing/2014/main" id="{5D04AF77-05C1-3B51-5275-C1DCABC700B3}"/>
               </a:ext>
             </a:extLst>
           </p:cNvPr>
-          <p:cNvSpPr/>
+          <p:cNvPicPr>
+            <a:picLocks noChangeAspect="1"/>
+          </p:cNvPicPr>
           <p:nvPr/>
-        </p:nvSpPr>
-        <p:spPr>
-          <a:xfrm>
-            <a:off x="457200" y="3604281"/>
-            <a:ext cx="8229600" cy="868680"/>
+        </p:nvPicPr>
+        <p:blipFill>
+          <a:blip r:embed="rId4"/>
+          <a:srcRect t="10651" b="10263"/>
+          <a:stretch>
+            <a:fillRect/>
+          </a:stretch>
+        </p:blipFill>
+        <p:spPr>
+          <a:xfrm>
+            <a:off x="5975687" y="2421300"/>
+            <a:ext cx="2043800" cy="1077575"/>
+          </a:xfrm>
+          <a:prstGeom prst="rect">
+            <a:avLst/>
+          </a:prstGeom>
+        </p:spPr>
+      </p:pic>
+      <p:pic>
+        <p:nvPicPr>
+          <p:cNvPr id="13" name="Immagine 12">
+            <a:extLst>
+              <a:ext uri="{FF2B5EF4-FFF2-40B4-BE49-F238E27FC236}">
+                <a16:creationId xmlns:a16="http://schemas.microsoft.com/office/drawing/2014/main" id="{EE99CC8A-8B36-9C8B-61FA-7500A73EB6EB}"/>
+              </a:ext>
+            </a:extLst>
+          </p:cNvPr>
+          <p:cNvPicPr>
+            <a:picLocks noChangeAspect="1"/>
+          </p:cNvPicPr>
+          <p:nvPr/>
+        </p:nvPicPr>
+        <p:blipFill>
+          <a:blip r:embed="rId5"/>
+          <a:srcRect l="9782" r="4233"/>
+          <a:stretch>
+            <a:fillRect/>
+          </a:stretch>
+        </p:blipFill>
+        <p:spPr>
+          <a:xfrm>
+            <a:off x="7046588" y="1277305"/>
+            <a:ext cx="1757362" cy="1077575"/>
+          </a:xfrm>
+          <a:prstGeom prst="rect">
+            <a:avLst/>
+          </a:prstGeom>
+        </p:spPr>
+      </p:pic>
+      <p:cxnSp>
+        <p:nvCxnSpPr>
+          <p:cNvPr id="15" name="Connettore 2 14">
+            <a:extLst>
+              <a:ext uri="{FF2B5EF4-FFF2-40B4-BE49-F238E27FC236}">
+                <a16:creationId xmlns:a16="http://schemas.microsoft.com/office/drawing/2014/main" id="{546CEDB6-C13F-EB1B-1AC8-58CA8B3E7A63}"/>
+              </a:ext>
+            </a:extLst>
+          </p:cNvPr>
+          <p:cNvCxnSpPr/>
+          <p:nvPr/>
+        </p:nvCxnSpPr>
+        <p:spPr>
+          <a:xfrm>
+            <a:off x="2428872" y="3814765"/>
+            <a:ext cx="278606" cy="0"/>
+          </a:xfrm>
+          <a:prstGeom prst="straightConnector1">
+            <a:avLst/>
+          </a:prstGeom>
+          <a:ln w="28575">
+            <a:tailEnd type="triangle"/>
+          </a:ln>
+        </p:spPr>
+        <p:style>
+          <a:lnRef idx="1">
+            <a:schemeClr val="accent1"/>
+          </a:lnRef>
+          <a:fillRef idx="0">
+            <a:schemeClr val="accent1"/>
+          </a:fillRef>
+          <a:effectRef idx="0">
+            <a:schemeClr val="accent1"/>
+          </a:effectRef>
+          <a:fontRef idx="minor">
+            <a:schemeClr val="tx1"/>
+          </a:fontRef>
+        </p:style>
+      </p:cxnSp>
+      <p:sp>
+        <p:nvSpPr>
+          <p:cNvPr id="16" name="CasellaDiTesto 15">
+            <a:extLst>
+              <a:ext uri="{FF2B5EF4-FFF2-40B4-BE49-F238E27FC236}">
+                <a16:creationId xmlns:a16="http://schemas.microsoft.com/office/drawing/2014/main" id="{647D1818-D2C0-D195-C9F9-F000EE269B9B}"/>
+              </a:ext>
+            </a:extLst>
+          </p:cNvPr>
+          <p:cNvSpPr txBox="1"/>
+          <p:nvPr/>
+        </p:nvSpPr>
+        <p:spPr>
+          <a:xfrm>
+            <a:off x="2836069" y="3553716"/>
+            <a:ext cx="2382725" cy="523220"/>
           </a:xfrm>
           <a:prstGeom prst="rect">
             <a:avLst/>
           </a:prstGeom>
           <a:noFill/>
-          <a:ln/>
         </p:spPr>
         <p:txBody>
-          <a:bodyPr wrap="square" rtlCol="0" anchor="ctr"/>
+          <a:bodyPr wrap="square" rtlCol="0">
+            <a:spAutoFit/>
+          </a:bodyPr>
           <a:lstStyle/>
           <a:p>
-            <a:pPr marL="0" indent="0" algn="ctr">
-              <a:buNone/>
-            </a:pPr>
-            <a:r>
-              <a:rPr lang="en-US" b="1" i="1" dirty="0">
-                <a:latin typeface="Calibri" pitchFamily="34" charset="0"/>
-                <a:ea typeface="Calibri" pitchFamily="34" charset="-122"/>
-                <a:cs typeface="Calibri" pitchFamily="34" charset="-120"/>
-              </a:rPr>
-              <a:t>Objective: </a:t>
-            </a:r>
-          </a:p>
-          <a:p>
-            <a:pPr marL="0" indent="0" algn="ctr">
-              <a:buNone/>
-            </a:pPr>
-            <a:r>
-              <a:rPr lang="en-US" b="1" i="1" dirty="0">
-                <a:latin typeface="Calibri" pitchFamily="34" charset="0"/>
-                <a:ea typeface="Calibri" pitchFamily="34" charset="-122"/>
-                <a:cs typeface="Calibri" pitchFamily="34" charset="-120"/>
-              </a:rPr>
-              <a:t>develop a framework for the investigation of this possibility</a:t>
-            </a:r>
-            <a:endParaRPr lang="en-US" dirty="0"/>
+            <a:pPr algn="ctr"/>
+            <a:r>
+              <a:rPr lang="en-US" sz="1400" dirty="0"/>
+              <a:t> The agent must decide where to move next </a:t>
+            </a:r>
+            <a:endParaRPr lang="it-IT" sz="1400" dirty="0"/>
           </a:p>
         </p:txBody>
       </p:sp>
@@ -4433,7 +4243,7 @@
                 <a:ea typeface="Calibri" pitchFamily="34" charset="-122"/>
                 <a:cs typeface="Calibri" pitchFamily="34" charset="-120"/>
               </a:rPr>
-              <a:t>Context: Autonomous Exploration</a:t>
+              <a:t>Classical Approaches</a:t>
             </a:r>
             <a:endParaRPr lang="en-US" sz="2600" dirty="0"/>
           </a:p>
@@ -4500,8 +4310,75 @@
                 <a:ea typeface="Calibri" pitchFamily="34" charset="-122"/>
                 <a:cs typeface="Calibri" pitchFamily="34" charset="-120"/>
               </a:rPr>
-              <a:t>Exploration: systematically map an unknown environment</a:t>
-            </a:r>
+              <a:t>Next Best View approach</a:t>
+            </a:r>
+            <a:br>
+              <a:rPr lang="en-US" dirty="0">
+                <a:solidFill>
+                  <a:srgbClr val="1A1A1A"/>
+                </a:solidFill>
+                <a:latin typeface="Calibri" pitchFamily="34" charset="0"/>
+                <a:ea typeface="Calibri" pitchFamily="34" charset="-122"/>
+                <a:cs typeface="Calibri" pitchFamily="34" charset="-120"/>
+              </a:rPr>
+            </a:br>
+            <a:r>
+              <a:rPr lang="it-IT" sz="1600" dirty="0" err="1">
+                <a:solidFill>
+                  <a:srgbClr val="1A1A1A"/>
+                </a:solidFill>
+                <a:latin typeface="Calibri" pitchFamily="34" charset="0"/>
+                <a:ea typeface="Calibri" pitchFamily="34" charset="-122"/>
+                <a:cs typeface="Calibri" pitchFamily="34" charset="-120"/>
+              </a:rPr>
+              <a:t>O</a:t>
+            </a:r>
+            <a:r>
+              <a:rPr lang="it-IT" sz="1600" dirty="0" err="1"/>
+              <a:t>ptimization</a:t>
+            </a:r>
+            <a:r>
+              <a:rPr lang="it-IT" sz="1600" dirty="0"/>
+              <a:t> </a:t>
+            </a:r>
+            <a:r>
+              <a:rPr lang="it-IT" sz="1600" dirty="0" err="1"/>
+              <a:t>problem</a:t>
+            </a:r>
+            <a:r>
+              <a:rPr lang="it-IT" sz="1600" dirty="0"/>
+              <a:t>, </a:t>
+            </a:r>
+            <a:r>
+              <a:rPr lang="it-IT" sz="1600" dirty="0" err="1"/>
+              <a:t>finding</a:t>
+            </a:r>
+            <a:r>
+              <a:rPr lang="it-IT" sz="1600" dirty="0"/>
+              <a:t> the </a:t>
+            </a:r>
+            <a:r>
+              <a:rPr lang="it-IT" sz="1600" dirty="0" err="1"/>
+              <a:t>next</a:t>
+            </a:r>
+            <a:r>
+              <a:rPr lang="it-IT" sz="1600" dirty="0"/>
+              <a:t> best position for the sensing </a:t>
+            </a:r>
+            <a:r>
+              <a:rPr lang="it-IT" sz="1600" dirty="0" err="1"/>
+              <a:t>apparatous</a:t>
+            </a:r>
+            <a:endParaRPr lang="it-IT" sz="1600" dirty="0"/>
+          </a:p>
+          <a:p>
+            <a:pPr>
+              <a:spcAft>
+                <a:spcPts val="500"/>
+              </a:spcAft>
+              <a:buSzPct val="100000"/>
+            </a:pPr>
+            <a:endParaRPr lang="en-US" dirty="0"/>
           </a:p>
           <a:p>
             <a:pPr marL="190500" indent="-190500">
@@ -4509,7 +4386,6 @@
                 <a:spcPts val="500"/>
               </a:spcAft>
               <a:buSzPct val="100000"/>
-              <a:buFontTx/>
               <a:buChar char="•"/>
             </a:pPr>
             <a:r>
@@ -4521,20 +4397,43 @@
                 <a:ea typeface="Calibri" pitchFamily="34" charset="-122"/>
                 <a:cs typeface="Calibri" pitchFamily="34" charset="-120"/>
               </a:rPr>
-              <a:t>Autonomous: the agent can perceive and moves without human guidance</a:t>
-            </a:r>
-          </a:p>
-          <a:p>
-            <a:pPr marL="190500" indent="-190500">
+              <a:t>Frontier-Based Exploration (</a:t>
+            </a:r>
+            <a:r>
+              <a:rPr lang="it-IT" dirty="0" err="1"/>
+              <a:t>Yamauchi</a:t>
+            </a:r>
+            <a:r>
+              <a:rPr lang="it-IT" dirty="0"/>
+              <a:t> 1997</a:t>
+            </a:r>
+            <a:r>
+              <a:rPr lang="en-US" dirty="0">
+                <a:solidFill>
+                  <a:srgbClr val="1A1A1A"/>
+                </a:solidFill>
+                <a:latin typeface="Calibri" pitchFamily="34" charset="0"/>
+                <a:ea typeface="Calibri" pitchFamily="34" charset="-122"/>
+                <a:cs typeface="Calibri" pitchFamily="34" charset="-120"/>
+              </a:rPr>
+              <a:t>)</a:t>
+            </a:r>
+          </a:p>
+          <a:p>
+            <a:pPr marL="742950" lvl="1" indent="-285750">
               <a:spcAft>
                 <a:spcPts val="500"/>
               </a:spcAft>
-              <a:buSzPct val="100000"/>
-              <a:buFontTx/>
-              <a:buChar char="•"/>
+              <a:buSzPct val="70000"/>
+              <a:buFont typeface="Courier New" panose="02070309020205020404" pitchFamily="49" charset="0"/>
+              <a:buChar char="o"/>
             </a:pPr>
             <a:r>
-              <a:rPr lang="en-US" dirty="0">
+              <a:rPr lang="en-US" sz="1600" dirty="0"/>
+              <a:t>Frontiers: </a:t>
+            </a:r>
+            <a:r>
+              <a:rPr lang="en-US" sz="1600" dirty="0">
                 <a:solidFill>
                   <a:srgbClr val="1A1A1A"/>
                 </a:solidFill>
@@ -4542,20 +4441,20 @@
                 <a:ea typeface="Calibri" pitchFamily="34" charset="-122"/>
                 <a:cs typeface="Calibri" pitchFamily="34" charset="-120"/>
               </a:rPr>
-              <a:t>Why autonomous exploration?</a:t>
-            </a:r>
-          </a:p>
-          <a:p>
-            <a:pPr marL="190500" indent="-190500">
+              <a:t>boundary between explored (free) and unknown cells</a:t>
+            </a:r>
+          </a:p>
+          <a:p>
+            <a:pPr marL="742950" lvl="1" indent="-285750">
               <a:spcAft>
                 <a:spcPts val="500"/>
               </a:spcAft>
-              <a:buSzPct val="100000"/>
-              <a:buFontTx/>
-              <a:buChar char="•"/>
+              <a:buSzPct val="70000"/>
+              <a:buFont typeface="Courier New" panose="02070309020205020404" pitchFamily="49" charset="0"/>
+              <a:buChar char="o"/>
             </a:pPr>
             <a:r>
-              <a:rPr lang="en-US" dirty="0">
+              <a:rPr lang="en-US" sz="1600" dirty="0">
                 <a:solidFill>
                   <a:srgbClr val="1A1A1A"/>
                 </a:solidFill>
@@ -4563,116 +4462,57 @@
                 <a:ea typeface="Calibri" pitchFamily="34" charset="-122"/>
                 <a:cs typeface="Calibri" pitchFamily="34" charset="-120"/>
               </a:rPr>
-              <a:t>Complex task, requires:</a:t>
-            </a:r>
-          </a:p>
-          <a:p>
-            <a:pPr marL="647700" lvl="1" indent="-190500">
+              <a:t>Often grouped into cluster</a:t>
+            </a:r>
+          </a:p>
+          <a:p>
+            <a:pPr marL="742950" lvl="1" indent="-285750">
               <a:spcAft>
                 <a:spcPts val="500"/>
               </a:spcAft>
-              <a:buSzPct val="100000"/>
-              <a:buFontTx/>
-              <a:buChar char="•"/>
+              <a:buSzPct val="70000"/>
+              <a:buFont typeface="Courier New" panose="02070309020205020404" pitchFamily="49" charset="0"/>
+              <a:buChar char="o"/>
             </a:pPr>
             <a:r>
-              <a:rPr lang="en-US" sz="1400" dirty="0"/>
-              <a:t>Mapping</a:t>
-            </a:r>
-          </a:p>
-          <a:p>
-            <a:pPr marL="647700" lvl="1" indent="-190500">
+              <a:rPr lang="en-US" sz="1600" dirty="0">
+                <a:solidFill>
+                  <a:srgbClr val="1A1A1A"/>
+                </a:solidFill>
+                <a:latin typeface="Calibri" pitchFamily="34" charset="0"/>
+                <a:ea typeface="Calibri" pitchFamily="34" charset="-122"/>
+                <a:cs typeface="Calibri" pitchFamily="34" charset="-120"/>
+              </a:rPr>
+              <a:t>The agent moves toward frontier clusters</a:t>
+            </a:r>
+          </a:p>
+          <a:p>
+            <a:pPr marL="742950" lvl="1" indent="-285750">
               <a:spcAft>
                 <a:spcPts val="500"/>
               </a:spcAft>
-              <a:buSzPct val="100000"/>
-              <a:buFontTx/>
-              <a:buChar char="•"/>
+              <a:buSzPct val="70000"/>
+              <a:buFont typeface="Courier New" panose="02070309020205020404" pitchFamily="49" charset="0"/>
+              <a:buChar char="o"/>
             </a:pPr>
             <a:r>
-              <a:rPr lang="en-US" sz="1400" dirty="0"/>
-              <a:t>Localization</a:t>
-            </a:r>
-          </a:p>
-          <a:p>
-            <a:pPr marL="647700" lvl="1" indent="-190500">
-              <a:spcAft>
-                <a:spcPts val="500"/>
-              </a:spcAft>
-              <a:buSzPct val="100000"/>
-              <a:buFontTx/>
-              <a:buChar char="•"/>
-            </a:pPr>
-            <a:r>
-              <a:rPr lang="en-US" sz="1400" dirty="0"/>
-              <a:t>Navigation</a:t>
-            </a:r>
-          </a:p>
-          <a:p>
-            <a:pPr marL="647700" lvl="1" indent="-190500">
-              <a:spcAft>
-                <a:spcPts val="500"/>
-              </a:spcAft>
-              <a:buSzPct val="100000"/>
-              <a:buFontTx/>
-              <a:buChar char="•"/>
-            </a:pPr>
-            <a:r>
-              <a:rPr lang="en-US" sz="1400" dirty="0"/>
-              <a:t>Decision making</a:t>
-            </a:r>
-            <a:endParaRPr lang="en-US" dirty="0"/>
-          </a:p>
-        </p:txBody>
-      </p:sp>
-      <p:sp>
-        <p:nvSpPr>
-          <p:cNvPr id="9" name="Text 6"/>
-          <p:cNvSpPr/>
-          <p:nvPr/>
-        </p:nvSpPr>
-        <p:spPr>
-          <a:xfrm>
-            <a:off x="5419961" y="3687886"/>
-            <a:ext cx="3136106" cy="228598"/>
-          </a:xfrm>
-          <a:prstGeom prst="rect">
-            <a:avLst/>
-          </a:prstGeom>
-          <a:noFill/>
-          <a:ln/>
-        </p:spPr>
-        <p:txBody>
-          <a:bodyPr wrap="square" rtlCol="0" anchor="ctr"/>
-          <a:lstStyle/>
-          <a:p>
-            <a:pPr marL="0" indent="0" algn="ctr">
-              <a:buNone/>
-            </a:pPr>
-            <a:r>
-              <a:rPr lang="en-US" sz="900" dirty="0">
-                <a:solidFill>
-                  <a:srgbClr val="5A5A5A"/>
+              <a:rPr lang="en-US" sz="1600" dirty="0">
+                <a:solidFill>
+                  <a:srgbClr val="1A1A1A"/>
                 </a:solidFill>
                 <a:latin typeface="Calibri" pitchFamily="34" charset="0"/>
                 <a:ea typeface="Calibri" pitchFamily="34" charset="-122"/>
                 <a:cs typeface="Calibri" pitchFamily="34" charset="-120"/>
               </a:rPr>
-              <a:t>Autonomous exploration application examples</a:t>
-            </a:r>
-            <a:endParaRPr lang="en-US" sz="900" dirty="0"/>
+              <a:t>Fixed heuristics policies to decide which frontier region</a:t>
+            </a:r>
+            <a:endParaRPr lang="en-US" sz="1600" dirty="0"/>
           </a:p>
         </p:txBody>
       </p:sp>
       <p:pic>
         <p:nvPicPr>
-          <p:cNvPr id="8" name="Immagine 7">
-            <a:extLst>
-              <a:ext uri="{FF2B5EF4-FFF2-40B4-BE49-F238E27FC236}">
-                <a16:creationId xmlns:a16="http://schemas.microsoft.com/office/drawing/2014/main" id="{E497BBE3-9ECA-8B02-05B1-5CA8969F9490}"/>
-              </a:ext>
-            </a:extLst>
-          </p:cNvPr>
+          <p:cNvPr id="8" name="Image 0" descr="/home/claude/assets/frontiers_picture.jpg"/>
           <p:cNvPicPr>
             <a:picLocks noChangeAspect="1"/>
           </p:cNvPicPr>
@@ -4680,156 +4520,55 @@
         </p:nvPicPr>
         <p:blipFill>
           <a:blip r:embed="rId3"/>
-          <a:srcRect l="11347" r="3033"/>
-          <a:stretch>
-            <a:fillRect/>
-          </a:stretch>
+          <a:srcRect/>
+          <a:stretch/>
         </p:blipFill>
         <p:spPr>
           <a:xfrm>
-            <a:off x="5187789" y="1277305"/>
-            <a:ext cx="1757361" cy="1077575"/>
+            <a:off x="5257800" y="914400"/>
+            <a:ext cx="3657600" cy="3246120"/>
           </a:xfrm>
           <a:prstGeom prst="rect">
             <a:avLst/>
           </a:prstGeom>
         </p:spPr>
       </p:pic>
-      <p:pic>
-        <p:nvPicPr>
-          <p:cNvPr id="11" name="Immagine 10">
-            <a:extLst>
-              <a:ext uri="{FF2B5EF4-FFF2-40B4-BE49-F238E27FC236}">
-                <a16:creationId xmlns:a16="http://schemas.microsoft.com/office/drawing/2014/main" id="{5D04AF77-05C1-3B51-5275-C1DCABC700B3}"/>
-              </a:ext>
-            </a:extLst>
-          </p:cNvPr>
-          <p:cNvPicPr>
-            <a:picLocks noChangeAspect="1"/>
-          </p:cNvPicPr>
+      <p:sp>
+        <p:nvSpPr>
+          <p:cNvPr id="9" name="Text 6"/>
+          <p:cNvSpPr/>
           <p:nvPr/>
-        </p:nvPicPr>
-        <p:blipFill>
-          <a:blip r:embed="rId4"/>
-          <a:srcRect t="10651" b="10263"/>
-          <a:stretch>
-            <a:fillRect/>
-          </a:stretch>
-        </p:blipFill>
-        <p:spPr>
-          <a:xfrm>
-            <a:off x="5975687" y="2421300"/>
-            <a:ext cx="2043800" cy="1077575"/>
-          </a:xfrm>
-          <a:prstGeom prst="rect">
-            <a:avLst/>
-          </a:prstGeom>
-        </p:spPr>
-      </p:pic>
-      <p:pic>
-        <p:nvPicPr>
-          <p:cNvPr id="13" name="Immagine 12">
-            <a:extLst>
-              <a:ext uri="{FF2B5EF4-FFF2-40B4-BE49-F238E27FC236}">
-                <a16:creationId xmlns:a16="http://schemas.microsoft.com/office/drawing/2014/main" id="{EE99CC8A-8B36-9C8B-61FA-7500A73EB6EB}"/>
-              </a:ext>
-            </a:extLst>
-          </p:cNvPr>
-          <p:cNvPicPr>
-            <a:picLocks noChangeAspect="1"/>
-          </p:cNvPicPr>
-          <p:nvPr/>
-        </p:nvPicPr>
-        <p:blipFill>
-          <a:blip r:embed="rId5"/>
-          <a:srcRect l="9782" r="4233"/>
-          <a:stretch>
-            <a:fillRect/>
-          </a:stretch>
-        </p:blipFill>
-        <p:spPr>
-          <a:xfrm>
-            <a:off x="7046588" y="1277305"/>
-            <a:ext cx="1757362" cy="1077575"/>
-          </a:xfrm>
-          <a:prstGeom prst="rect">
-            <a:avLst/>
-          </a:prstGeom>
-        </p:spPr>
-      </p:pic>
-      <p:cxnSp>
-        <p:nvCxnSpPr>
-          <p:cNvPr id="15" name="Connettore 2 14">
-            <a:extLst>
-              <a:ext uri="{FF2B5EF4-FFF2-40B4-BE49-F238E27FC236}">
-                <a16:creationId xmlns:a16="http://schemas.microsoft.com/office/drawing/2014/main" id="{546CEDB6-C13F-EB1B-1AC8-58CA8B3E7A63}"/>
-              </a:ext>
-            </a:extLst>
-          </p:cNvPr>
-          <p:cNvCxnSpPr/>
-          <p:nvPr/>
-        </p:nvCxnSpPr>
-        <p:spPr>
-          <a:xfrm>
-            <a:off x="2428872" y="3814765"/>
-            <a:ext cx="278606" cy="0"/>
-          </a:xfrm>
-          <a:prstGeom prst="straightConnector1">
-            <a:avLst/>
-          </a:prstGeom>
-          <a:ln w="28575">
-            <a:tailEnd type="triangle"/>
-          </a:ln>
-        </p:spPr>
-        <p:style>
-          <a:lnRef idx="1">
-            <a:schemeClr val="accent1"/>
-          </a:lnRef>
-          <a:fillRef idx="0">
-            <a:schemeClr val="accent1"/>
-          </a:fillRef>
-          <a:effectRef idx="0">
-            <a:schemeClr val="accent1"/>
-          </a:effectRef>
-          <a:fontRef idx="minor">
-            <a:schemeClr val="tx1"/>
-          </a:fontRef>
-        </p:style>
-      </p:cxnSp>
-      <p:sp>
-        <p:nvSpPr>
-          <p:cNvPr id="16" name="CasellaDiTesto 15">
-            <a:extLst>
-              <a:ext uri="{FF2B5EF4-FFF2-40B4-BE49-F238E27FC236}">
-                <a16:creationId xmlns:a16="http://schemas.microsoft.com/office/drawing/2014/main" id="{647D1818-D2C0-D195-C9F9-F000EE269B9B}"/>
-              </a:ext>
-            </a:extLst>
-          </p:cNvPr>
-          <p:cNvSpPr txBox="1"/>
-          <p:nvPr/>
-        </p:nvSpPr>
-        <p:spPr>
-          <a:xfrm>
-            <a:off x="2836069" y="3553716"/>
-            <a:ext cx="2382725" cy="523220"/>
+        </p:nvSpPr>
+        <p:spPr>
+          <a:xfrm>
+            <a:off x="5257800" y="4160520"/>
+            <a:ext cx="3657600" cy="228600"/>
           </a:xfrm>
           <a:prstGeom prst="rect">
             <a:avLst/>
           </a:prstGeom>
           <a:noFill/>
+          <a:ln/>
         </p:spPr>
         <p:txBody>
-          <a:bodyPr wrap="square" rtlCol="0">
-            <a:spAutoFit/>
-          </a:bodyPr>
+          <a:bodyPr wrap="square" rtlCol="0" anchor="ctr"/>
           <a:lstStyle/>
           <a:p>
-            <a:pPr algn="ctr"/>
-            <a:r>
-              <a:rPr lang="en-US" sz="1400" dirty="0"/>
-              <a:t> The agent must decide where to move next </a:t>
-            </a:r>
-            <a:endParaRPr lang="it-IT" sz="1400" dirty="0"/>
+            <a:pPr marL="0" indent="0" algn="ctr">
+              <a:buNone/>
+            </a:pPr>
+            <a:r>
+              <a:rPr lang="en-US" sz="900" dirty="0">
+                <a:solidFill>
+                  <a:srgbClr val="5A5A5A"/>
+                </a:solidFill>
+                <a:latin typeface="Calibri" pitchFamily="34" charset="0"/>
+                <a:ea typeface="Calibri" pitchFamily="34" charset="-122"/>
+                <a:cs typeface="Calibri" pitchFamily="34" charset="-120"/>
+              </a:rPr>
+              <a:t>Frontier-based exploration illustration</a:t>
+            </a:r>
+            <a:endParaRPr lang="en-US" sz="900" dirty="0"/>
           </a:p>
         </p:txBody>
       </p:sp>
@@ -4860,492 +4599,6 @@
       </p:grpSpPr>
       <p:sp>
         <p:nvSpPr>
-          <p:cNvPr id="2" name="Text 0"/>
-          <p:cNvSpPr/>
-          <p:nvPr/>
-        </p:nvSpPr>
-        <p:spPr>
-          <a:xfrm>
-            <a:off x="320040" y="4846320"/>
-            <a:ext cx="7772400" cy="201168"/>
-          </a:xfrm>
-          <a:prstGeom prst="rect">
-            <a:avLst/>
-          </a:prstGeom>
-          <a:noFill/>
-          <a:ln/>
-        </p:spPr>
-        <p:txBody>
-          <a:bodyPr wrap="square" rtlCol="0" anchor="ctr"/>
-          <a:lstStyle/>
-          <a:p>
-            <a:pPr marL="0" indent="0" algn="l">
-              <a:buNone/>
-            </a:pPr>
-            <a:r>
-              <a:rPr lang="en-US" sz="900" u="sng" dirty="0">
-                <a:solidFill>
-                  <a:srgbClr val="BBBBBB"/>
-                </a:solidFill>
-                <a:latin typeface="Calibri" pitchFamily="34" charset="0"/>
-                <a:ea typeface="Calibri" pitchFamily="34" charset="-122"/>
-                <a:cs typeface="Calibri" pitchFamily="34" charset="-120"/>
-              </a:rPr>
-              <a:t>Paolo Spallanzani  ·  Deep RL in Frontier-Based Autonomous Exploration</a:t>
-            </a:r>
-            <a:endParaRPr lang="en-US" sz="900" u="sng" dirty="0"/>
-          </a:p>
-        </p:txBody>
-      </p:sp>
-      <p:sp>
-        <p:nvSpPr>
-          <p:cNvPr id="3" name="Text 1"/>
-          <p:cNvSpPr/>
-          <p:nvPr/>
-        </p:nvSpPr>
-        <p:spPr>
-          <a:xfrm>
-            <a:off x="8412480" y="4846320"/>
-            <a:ext cx="457200" cy="201168"/>
-          </a:xfrm>
-          <a:prstGeom prst="rect">
-            <a:avLst/>
-          </a:prstGeom>
-          <a:noFill/>
-          <a:ln/>
-        </p:spPr>
-        <p:txBody>
-          <a:bodyPr wrap="square" rtlCol="0" anchor="ctr"/>
-          <a:lstStyle/>
-          <a:p>
-            <a:pPr marL="0" indent="0" algn="r">
-              <a:buNone/>
-            </a:pPr>
-            <a:r>
-              <a:rPr lang="en-US" sz="900" dirty="0">
-                <a:solidFill>
-                  <a:srgbClr val="BBBBBB"/>
-                </a:solidFill>
-                <a:latin typeface="Calibri" pitchFamily="34" charset="0"/>
-                <a:ea typeface="Calibri" pitchFamily="34" charset="-122"/>
-                <a:cs typeface="Calibri" pitchFamily="34" charset="-120"/>
-              </a:rPr>
-              <a:t>4 / 17</a:t>
-            </a:r>
-            <a:endParaRPr lang="en-US" sz="900" dirty="0"/>
-          </a:p>
-        </p:txBody>
-      </p:sp>
-      <p:sp>
-        <p:nvSpPr>
-          <p:cNvPr id="4" name="Shape 2"/>
-          <p:cNvSpPr/>
-          <p:nvPr/>
-        </p:nvSpPr>
-        <p:spPr>
-          <a:xfrm>
-            <a:off x="320040" y="237744"/>
-            <a:ext cx="64008" cy="457200"/>
-          </a:xfrm>
-          <a:prstGeom prst="rect">
-            <a:avLst/>
-          </a:prstGeom>
-          <a:solidFill>
-            <a:srgbClr val="C8472C"/>
-          </a:solidFill>
-          <a:ln w="12700">
-            <a:solidFill>
-              <a:srgbClr val="C8472C"/>
-            </a:solidFill>
-            <a:prstDash val="solid"/>
-          </a:ln>
-        </p:spPr>
-      </p:sp>
-      <p:sp>
-        <p:nvSpPr>
-          <p:cNvPr id="5" name="Text 3"/>
-          <p:cNvSpPr/>
-          <p:nvPr/>
-        </p:nvSpPr>
-        <p:spPr>
-          <a:xfrm>
-            <a:off x="502920" y="256032"/>
-            <a:ext cx="8229600" cy="457200"/>
-          </a:xfrm>
-          <a:prstGeom prst="rect">
-            <a:avLst/>
-          </a:prstGeom>
-          <a:noFill/>
-          <a:ln/>
-        </p:spPr>
-        <p:txBody>
-          <a:bodyPr wrap="square" lIns="0" tIns="0" rIns="0" bIns="0" rtlCol="0" anchor="ctr"/>
-          <a:lstStyle/>
-          <a:p>
-            <a:pPr marL="0" indent="0" algn="l">
-              <a:buNone/>
-            </a:pPr>
-            <a:r>
-              <a:rPr lang="en-US" sz="2600" b="1" dirty="0">
-                <a:solidFill>
-                  <a:srgbClr val="1A1A1A"/>
-                </a:solidFill>
-                <a:latin typeface="Calibri" pitchFamily="34" charset="0"/>
-                <a:ea typeface="Calibri" pitchFamily="34" charset="-122"/>
-                <a:cs typeface="Calibri" pitchFamily="34" charset="-120"/>
-              </a:rPr>
-              <a:t>Classical Approaches</a:t>
-            </a:r>
-            <a:endParaRPr lang="en-US" sz="2600" dirty="0"/>
-          </a:p>
-        </p:txBody>
-      </p:sp>
-      <p:sp>
-        <p:nvSpPr>
-          <p:cNvPr id="6" name="Shape 4"/>
-          <p:cNvSpPr/>
-          <p:nvPr/>
-        </p:nvSpPr>
-        <p:spPr>
-          <a:xfrm>
-            <a:off x="320040" y="777240"/>
-            <a:ext cx="8503920" cy="0"/>
-          </a:xfrm>
-          <a:prstGeom prst="line">
-            <a:avLst/>
-          </a:prstGeom>
-          <a:noFill/>
-          <a:ln w="19050">
-            <a:solidFill>
-              <a:srgbClr val="D6E4F0"/>
-            </a:solidFill>
-            <a:prstDash val="solid"/>
-          </a:ln>
-        </p:spPr>
-      </p:sp>
-      <p:sp>
-        <p:nvSpPr>
-          <p:cNvPr id="7" name="Text 5"/>
-          <p:cNvSpPr/>
-          <p:nvPr/>
-        </p:nvSpPr>
-        <p:spPr>
-          <a:xfrm>
-            <a:off x="365760" y="914400"/>
-            <a:ext cx="4663440" cy="3840480"/>
-          </a:xfrm>
-          <a:prstGeom prst="rect">
-            <a:avLst/>
-          </a:prstGeom>
-          <a:noFill/>
-          <a:ln/>
-        </p:spPr>
-        <p:txBody>
-          <a:bodyPr wrap="square" rtlCol="0" anchor="t"/>
-          <a:lstStyle/>
-          <a:p>
-            <a:pPr marL="190500" indent="-190500">
-              <a:spcAft>
-                <a:spcPts val="500"/>
-              </a:spcAft>
-              <a:buSzPct val="100000"/>
-              <a:buFontTx/>
-              <a:buChar char="•"/>
-            </a:pPr>
-            <a:r>
-              <a:rPr lang="en-US" dirty="0">
-                <a:solidFill>
-                  <a:srgbClr val="1A1A1A"/>
-                </a:solidFill>
-                <a:latin typeface="Calibri" pitchFamily="34" charset="0"/>
-                <a:ea typeface="Calibri" pitchFamily="34" charset="-122"/>
-                <a:cs typeface="Calibri" pitchFamily="34" charset="-120"/>
-              </a:rPr>
-              <a:t>Next Best View approach</a:t>
-            </a:r>
-            <a:br>
-              <a:rPr lang="en-US" dirty="0">
-                <a:solidFill>
-                  <a:srgbClr val="1A1A1A"/>
-                </a:solidFill>
-                <a:latin typeface="Calibri" pitchFamily="34" charset="0"/>
-                <a:ea typeface="Calibri" pitchFamily="34" charset="-122"/>
-                <a:cs typeface="Calibri" pitchFamily="34" charset="-120"/>
-              </a:rPr>
-            </a:br>
-            <a:r>
-              <a:rPr lang="it-IT" sz="1600" dirty="0" err="1">
-                <a:solidFill>
-                  <a:srgbClr val="1A1A1A"/>
-                </a:solidFill>
-                <a:latin typeface="Calibri" pitchFamily="34" charset="0"/>
-                <a:ea typeface="Calibri" pitchFamily="34" charset="-122"/>
-                <a:cs typeface="Calibri" pitchFamily="34" charset="-120"/>
-              </a:rPr>
-              <a:t>O</a:t>
-            </a:r>
-            <a:r>
-              <a:rPr lang="it-IT" sz="1600" dirty="0" err="1"/>
-              <a:t>ptimization</a:t>
-            </a:r>
-            <a:r>
-              <a:rPr lang="it-IT" sz="1600" dirty="0"/>
-              <a:t> </a:t>
-            </a:r>
-            <a:r>
-              <a:rPr lang="it-IT" sz="1600" dirty="0" err="1"/>
-              <a:t>problem</a:t>
-            </a:r>
-            <a:r>
-              <a:rPr lang="it-IT" sz="1600" dirty="0"/>
-              <a:t>, </a:t>
-            </a:r>
-            <a:r>
-              <a:rPr lang="it-IT" sz="1600" dirty="0" err="1"/>
-              <a:t>finding</a:t>
-            </a:r>
-            <a:r>
-              <a:rPr lang="it-IT" sz="1600" dirty="0"/>
-              <a:t> the </a:t>
-            </a:r>
-            <a:r>
-              <a:rPr lang="it-IT" sz="1600" dirty="0" err="1"/>
-              <a:t>next</a:t>
-            </a:r>
-            <a:r>
-              <a:rPr lang="it-IT" sz="1600" dirty="0"/>
-              <a:t> best position for the sensing </a:t>
-            </a:r>
-            <a:r>
-              <a:rPr lang="it-IT" sz="1600" dirty="0" err="1"/>
-              <a:t>apparatous</a:t>
-            </a:r>
-            <a:endParaRPr lang="it-IT" sz="1600" dirty="0"/>
-          </a:p>
-          <a:p>
-            <a:pPr>
-              <a:spcAft>
-                <a:spcPts val="500"/>
-              </a:spcAft>
-              <a:buSzPct val="100000"/>
-            </a:pPr>
-            <a:endParaRPr lang="en-US" dirty="0"/>
-          </a:p>
-          <a:p>
-            <a:pPr marL="190500" indent="-190500">
-              <a:spcAft>
-                <a:spcPts val="500"/>
-              </a:spcAft>
-              <a:buSzPct val="100000"/>
-              <a:buChar char="•"/>
-            </a:pPr>
-            <a:r>
-              <a:rPr lang="en-US" dirty="0">
-                <a:solidFill>
-                  <a:srgbClr val="1A1A1A"/>
-                </a:solidFill>
-                <a:latin typeface="Calibri" pitchFamily="34" charset="0"/>
-                <a:ea typeface="Calibri" pitchFamily="34" charset="-122"/>
-                <a:cs typeface="Calibri" pitchFamily="34" charset="-120"/>
-              </a:rPr>
-              <a:t>Frontier-Based Exploration (</a:t>
-            </a:r>
-            <a:r>
-              <a:rPr lang="en-US">
-                <a:solidFill>
-                  <a:srgbClr val="1A1A1A"/>
-                </a:solidFill>
-                <a:latin typeface="Calibri" pitchFamily="34" charset="0"/>
-                <a:ea typeface="Calibri" pitchFamily="34" charset="-122"/>
-                <a:cs typeface="Calibri" pitchFamily="34" charset="-120"/>
-              </a:rPr>
-              <a:t>Yamahu)</a:t>
-            </a:r>
-            <a:endParaRPr lang="en-US" dirty="0">
-              <a:solidFill>
-                <a:srgbClr val="1A1A1A"/>
-              </a:solidFill>
-              <a:latin typeface="Calibri" pitchFamily="34" charset="0"/>
-              <a:ea typeface="Calibri" pitchFamily="34" charset="-122"/>
-              <a:cs typeface="Calibri" pitchFamily="34" charset="-120"/>
-            </a:endParaRPr>
-          </a:p>
-          <a:p>
-            <a:pPr marL="647700" lvl="1" indent="-190500">
-              <a:spcAft>
-                <a:spcPts val="500"/>
-              </a:spcAft>
-              <a:buSzPct val="100000"/>
-              <a:buChar char="•"/>
-            </a:pPr>
-            <a:r>
-              <a:rPr lang="en-US" sz="1600" dirty="0"/>
-              <a:t>Frontiers: </a:t>
-            </a:r>
-            <a:r>
-              <a:rPr lang="en-US" sz="1600" dirty="0">
-                <a:solidFill>
-                  <a:srgbClr val="1A1A1A"/>
-                </a:solidFill>
-                <a:latin typeface="Calibri" pitchFamily="34" charset="0"/>
-                <a:ea typeface="Calibri" pitchFamily="34" charset="-122"/>
-                <a:cs typeface="Calibri" pitchFamily="34" charset="-120"/>
-              </a:rPr>
-              <a:t>boundary between explored (free) and unknown cells</a:t>
-            </a:r>
-          </a:p>
-          <a:p>
-            <a:pPr marL="647700" lvl="1" indent="-190500">
-              <a:spcAft>
-                <a:spcPts val="500"/>
-              </a:spcAft>
-              <a:buSzPct val="100000"/>
-              <a:buChar char="•"/>
-            </a:pPr>
-            <a:r>
-              <a:rPr lang="en-US" sz="1600" dirty="0">
-                <a:solidFill>
-                  <a:srgbClr val="1A1A1A"/>
-                </a:solidFill>
-                <a:latin typeface="Calibri" pitchFamily="34" charset="0"/>
-                <a:ea typeface="Calibri" pitchFamily="34" charset="-122"/>
-                <a:cs typeface="Calibri" pitchFamily="34" charset="-120"/>
-              </a:rPr>
-              <a:t>Often grouped into cluster</a:t>
-            </a:r>
-          </a:p>
-          <a:p>
-            <a:pPr marL="647700" lvl="1" indent="-190500">
-              <a:spcAft>
-                <a:spcPts val="500"/>
-              </a:spcAft>
-              <a:buSzPct val="100000"/>
-              <a:buChar char="•"/>
-            </a:pPr>
-            <a:r>
-              <a:rPr lang="en-US" sz="1600" dirty="0">
-                <a:solidFill>
-                  <a:srgbClr val="1A1A1A"/>
-                </a:solidFill>
-                <a:latin typeface="Calibri" pitchFamily="34" charset="0"/>
-                <a:ea typeface="Calibri" pitchFamily="34" charset="-122"/>
-                <a:cs typeface="Calibri" pitchFamily="34" charset="-120"/>
-              </a:rPr>
-              <a:t>The agent moves toward frontier clusters</a:t>
-            </a:r>
-          </a:p>
-          <a:p>
-            <a:pPr marL="647700" lvl="1" indent="-190500">
-              <a:spcAft>
-                <a:spcPts val="500"/>
-              </a:spcAft>
-              <a:buSzPct val="100000"/>
-              <a:buChar char="•"/>
-            </a:pPr>
-            <a:r>
-              <a:rPr lang="en-US" sz="1600" dirty="0">
-                <a:solidFill>
-                  <a:srgbClr val="1A1A1A"/>
-                </a:solidFill>
-                <a:latin typeface="Calibri" pitchFamily="34" charset="0"/>
-                <a:ea typeface="Calibri" pitchFamily="34" charset="-122"/>
-                <a:cs typeface="Calibri" pitchFamily="34" charset="-120"/>
-              </a:rPr>
-              <a:t>Fixed heuristics policies to decide which frontier region</a:t>
-            </a:r>
-            <a:endParaRPr lang="en-US" sz="1600" dirty="0"/>
-          </a:p>
-        </p:txBody>
-      </p:sp>
-      <p:pic>
-        <p:nvPicPr>
-          <p:cNvPr id="8" name="Image 0" descr="/home/claude/assets/frontiers_picture.jpg"/>
-          <p:cNvPicPr>
-            <a:picLocks noChangeAspect="1"/>
-          </p:cNvPicPr>
-          <p:nvPr/>
-        </p:nvPicPr>
-        <p:blipFill>
-          <a:blip r:embed="rId3"/>
-          <a:srcRect/>
-          <a:stretch/>
-        </p:blipFill>
-        <p:spPr>
-          <a:xfrm>
-            <a:off x="5257800" y="914400"/>
-            <a:ext cx="3657600" cy="3246120"/>
-          </a:xfrm>
-          <a:prstGeom prst="rect">
-            <a:avLst/>
-          </a:prstGeom>
-        </p:spPr>
-      </p:pic>
-      <p:sp>
-        <p:nvSpPr>
-          <p:cNvPr id="9" name="Text 6"/>
-          <p:cNvSpPr/>
-          <p:nvPr/>
-        </p:nvSpPr>
-        <p:spPr>
-          <a:xfrm>
-            <a:off x="5257800" y="4160520"/>
-            <a:ext cx="3657600" cy="228600"/>
-          </a:xfrm>
-          <a:prstGeom prst="rect">
-            <a:avLst/>
-          </a:prstGeom>
-          <a:noFill/>
-          <a:ln/>
-        </p:spPr>
-        <p:txBody>
-          <a:bodyPr wrap="square" rtlCol="0" anchor="ctr"/>
-          <a:lstStyle/>
-          <a:p>
-            <a:pPr marL="0" indent="0" algn="ctr">
-              <a:buNone/>
-            </a:pPr>
-            <a:r>
-              <a:rPr lang="en-US" sz="900" dirty="0">
-                <a:solidFill>
-                  <a:srgbClr val="5A5A5A"/>
-                </a:solidFill>
-                <a:latin typeface="Calibri" pitchFamily="34" charset="0"/>
-                <a:ea typeface="Calibri" pitchFamily="34" charset="-122"/>
-                <a:cs typeface="Calibri" pitchFamily="34" charset="-120"/>
-              </a:rPr>
-              <a:t>Frontier-based exploration illustration</a:t>
-            </a:r>
-            <a:endParaRPr lang="en-US" sz="900" dirty="0"/>
-          </a:p>
-        </p:txBody>
-      </p:sp>
-    </p:spTree>
-  </p:cSld>
-  <p:clrMapOvr>
-    <a:masterClrMapping/>
-  </p:clrMapOvr>
-</p:sld>
-</file>
-
-<file path=ppt/slides/slide6.xml><?xml version="1.0" encoding="utf-8"?>
-<p:sld xmlns:a="http://schemas.openxmlformats.org/drawingml/2006/main" xmlns:r="http://schemas.openxmlformats.org/officeDocument/2006/relationships" xmlns:p="http://schemas.openxmlformats.org/presentationml/2006/main">
-  <p:cSld>
-    <p:spTree>
-      <p:nvGrpSpPr>
-        <p:cNvPr id="1" name=""/>
-        <p:cNvGrpSpPr/>
-        <p:nvPr/>
-      </p:nvGrpSpPr>
-      <p:grpSpPr>
-        <a:xfrm>
-          <a:off x="0" y="0"/>
-          <a:ext cx="0" cy="0"/>
-          <a:chOff x="0" y="0"/>
-          <a:chExt cx="0" cy="0"/>
-        </a:xfrm>
-      </p:grpSpPr>
-      <p:sp>
-        <p:nvSpPr>
           <p:cNvPr id="3" name="CasellaDiTesto 2">
             <a:extLst>
               <a:ext uri="{FF2B5EF4-FFF2-40B4-BE49-F238E27FC236}">
@@ -5372,27 +4625,58 @@
           </a:bodyPr>
           <a:lstStyle/>
           <a:p>
-            <a:pPr algn="l"/>
-            <a:r>
-              <a:rPr lang="it-IT" sz="2600" b="1" dirty="0">
+            <a:r>
+              <a:rPr lang="en-US" sz="2600" b="1" dirty="0">
                 <a:solidFill>
                   <a:srgbClr val="1A1A1A"/>
                 </a:solidFill>
-                <a:latin typeface="Calibri"/>
-                <a:ea typeface="Calibri"/>
-                <a:cs typeface="Calibri"/>
-              </a:rPr>
-              <a:t>Slide Title</a:t>
-            </a:r>
+                <a:latin typeface="Calibri" pitchFamily="34" charset="0"/>
+                <a:ea typeface="Calibri" pitchFamily="34" charset="-122"/>
+                <a:cs typeface="Calibri" pitchFamily="34" charset="-120"/>
+              </a:rPr>
+              <a:t>Deep Reinforcement Learning</a:t>
+            </a:r>
+            <a:endParaRPr lang="en-US" sz="2600" dirty="0"/>
           </a:p>
         </p:txBody>
       </p:sp>
-      <p:sp>
-        <p:nvSpPr>
-          <p:cNvPr id="5" name="CasellaDiTesto 4">
+      <p:pic>
+        <p:nvPicPr>
+          <p:cNvPr id="4" name="Immagine 3">
             <a:extLst>
               <a:ext uri="{FF2B5EF4-FFF2-40B4-BE49-F238E27FC236}">
-                <a16:creationId xmlns:a16="http://schemas.microsoft.com/office/drawing/2014/main" id="{6BD244D8-F9CB-4AF5-BAE2-F0001DF3A600}"/>
+                <a16:creationId xmlns:a16="http://schemas.microsoft.com/office/drawing/2014/main" id="{F0653542-D9B1-9A2A-6984-1A0D33716FDE}"/>
+              </a:ext>
+            </a:extLst>
+          </p:cNvPr>
+          <p:cNvPicPr>
+            <a:picLocks noChangeAspect="1"/>
+          </p:cNvPicPr>
+          <p:nvPr/>
+        </p:nvPicPr>
+        <p:blipFill>
+          <a:blip r:embed="rId2"/>
+          <a:srcRect l="13126" t="22622" r="12733" b="21093"/>
+          <a:stretch>
+            <a:fillRect/>
+          </a:stretch>
+        </p:blipFill>
+        <p:spPr>
+          <a:xfrm>
+            <a:off x="4747137" y="785808"/>
+            <a:ext cx="3833300" cy="1635919"/>
+          </a:xfrm>
+          <a:prstGeom prst="rect">
+            <a:avLst/>
+          </a:prstGeom>
+        </p:spPr>
+      </p:pic>
+      <p:sp>
+        <p:nvSpPr>
+          <p:cNvPr id="6" name="CasellaDiTesto 5">
+            <a:extLst>
+              <a:ext uri="{FF2B5EF4-FFF2-40B4-BE49-F238E27FC236}">
+                <a16:creationId xmlns:a16="http://schemas.microsoft.com/office/drawing/2014/main" id="{7DB5838F-3F80-CDC3-ECA0-7532233B7FE2}"/>
               </a:ext>
             </a:extLst>
           </p:cNvPr>
@@ -5402,7 +4686,7 @@
         <p:spPr>
           <a:xfrm>
             <a:off x="368300" y="914400"/>
-            <a:ext cx="8382000" cy="3556000"/>
+            <a:ext cx="4089400" cy="3556000"/>
           </a:xfrm>
           <a:prstGeom prst="rect">
             <a:avLst/>
@@ -5425,7 +4709,7 @@
                 <a:ea typeface="Calibri"/>
                 <a:cs typeface="Calibri"/>
               </a:rPr>
-              <a:t>Content </a:t>
+              <a:t>Left </a:t>
             </a:r>
             <a:r>
               <a:rPr lang="it-IT" sz="1600" dirty="0" err="1">
@@ -5436,29 +4720,7 @@
                 <a:ea typeface="Calibri"/>
                 <a:cs typeface="Calibri"/>
               </a:rPr>
-              <a:t>goes</a:t>
-            </a:r>
-            <a:r>
-              <a:rPr lang="it-IT" sz="1600" dirty="0">
-                <a:solidFill>
-                  <a:srgbClr val="333333"/>
-                </a:solidFill>
-                <a:latin typeface="Calibri"/>
-                <a:ea typeface="Calibri"/>
-                <a:cs typeface="Calibri"/>
-              </a:rPr>
-              <a:t> </a:t>
-            </a:r>
-            <a:r>
-              <a:rPr lang="it-IT" sz="1600" dirty="0" err="1">
-                <a:solidFill>
-                  <a:srgbClr val="333333"/>
-                </a:solidFill>
-                <a:latin typeface="Calibri"/>
-                <a:ea typeface="Calibri"/>
-                <a:cs typeface="Calibri"/>
-              </a:rPr>
-              <a:t>here</a:t>
+              <a:t>content</a:t>
             </a:r>
             <a:endParaRPr lang="it-IT" sz="1600" dirty="0">
               <a:solidFill>
@@ -5484,7 +4746,7 @@
 </p:sld>
 </file>
 
-<file path=ppt/slides/slide7.xml><?xml version="1.0" encoding="utf-8"?>
+<file path=ppt/slides/slide6.xml><?xml version="1.0" encoding="utf-8"?>
 <p:sld xmlns:a="http://schemas.openxmlformats.org/drawingml/2006/main" xmlns:r="http://schemas.openxmlformats.org/officeDocument/2006/relationships" xmlns:p="http://schemas.openxmlformats.org/presentationml/2006/main">
   <p:cSld>
     <p:spTree>
@@ -5638,6 +4900,214 @@
     <p:extLst>
       <p:ext uri="{BB962C8B-B14F-4D97-AF65-F5344CB8AC3E}">
         <p14:creationId xmlns:p14="http://schemas.microsoft.com/office/powerpoint/2010/main" val="2759301547"/>
+      </p:ext>
+    </p:extLst>
+  </p:cSld>
+  <p:clrMapOvr>
+    <a:masterClrMapping/>
+  </p:clrMapOvr>
+</p:sld>
+</file>
+
+<file path=ppt/slides/slide7.xml><?xml version="1.0" encoding="utf-8"?>
+<p:sld xmlns:a="http://schemas.openxmlformats.org/drawingml/2006/main" xmlns:r="http://schemas.openxmlformats.org/officeDocument/2006/relationships" xmlns:p="http://schemas.openxmlformats.org/presentationml/2006/main">
+  <p:cSld>
+    <p:spTree>
+      <p:nvGrpSpPr>
+        <p:cNvPr id="1" name=""/>
+        <p:cNvGrpSpPr/>
+        <p:nvPr/>
+      </p:nvGrpSpPr>
+      <p:grpSpPr>
+        <a:xfrm>
+          <a:off x="0" y="0"/>
+          <a:ext cx="0" cy="0"/>
+          <a:chOff x="0" y="0"/>
+          <a:chExt cx="0" cy="0"/>
+        </a:xfrm>
+      </p:grpSpPr>
+      <p:sp>
+        <p:nvSpPr>
+          <p:cNvPr id="3" name="CasellaDiTesto 2">
+            <a:extLst>
+              <a:ext uri="{FF2B5EF4-FFF2-40B4-BE49-F238E27FC236}">
+                <a16:creationId xmlns:a16="http://schemas.microsoft.com/office/drawing/2014/main" id="{A2573F97-AE10-444A-9306-BFF3D7DCA88C}"/>
+              </a:ext>
+            </a:extLst>
+          </p:cNvPr>
+          <p:cNvSpPr txBox="1"/>
+          <p:nvPr/>
+        </p:nvSpPr>
+        <p:spPr>
+          <a:xfrm>
+            <a:off x="508000" y="254000"/>
+            <a:ext cx="8229600" cy="457200"/>
+          </a:xfrm>
+          <a:prstGeom prst="rect">
+            <a:avLst/>
+          </a:prstGeom>
+          <a:noFill/>
+        </p:spPr>
+        <p:txBody>
+          <a:bodyPr vertOverflow="overflow" vert="horz" wrap="square" rtlCol="0" anchor="ctr" anchorCtr="0">
+            <a:noAutofit/>
+          </a:bodyPr>
+          <a:lstStyle/>
+          <a:p>
+            <a:pPr algn="l"/>
+            <a:r>
+              <a:rPr lang="it-IT" sz="2600" b="1" dirty="0">
+                <a:solidFill>
+                  <a:srgbClr val="1A1A1A"/>
+                </a:solidFill>
+                <a:latin typeface="Calibri"/>
+                <a:ea typeface="Calibri"/>
+                <a:cs typeface="Calibri"/>
+              </a:rPr>
+              <a:t>Slide Title</a:t>
+            </a:r>
+          </a:p>
+        </p:txBody>
+      </p:sp>
+      <p:sp>
+        <p:nvSpPr>
+          <p:cNvPr id="5" name="CasellaDiTesto 4">
+            <a:extLst>
+              <a:ext uri="{FF2B5EF4-FFF2-40B4-BE49-F238E27FC236}">
+                <a16:creationId xmlns:a16="http://schemas.microsoft.com/office/drawing/2014/main" id="{FD0ECAD6-FF98-4193-979E-566FFED4B5AD}"/>
+              </a:ext>
+            </a:extLst>
+          </p:cNvPr>
+          <p:cNvSpPr txBox="1"/>
+          <p:nvPr/>
+        </p:nvSpPr>
+        <p:spPr>
+          <a:xfrm>
+            <a:off x="368300" y="914400"/>
+            <a:ext cx="4089400" cy="3556000"/>
+          </a:xfrm>
+          <a:prstGeom prst="rect">
+            <a:avLst/>
+          </a:prstGeom>
+          <a:noFill/>
+        </p:spPr>
+        <p:txBody>
+          <a:bodyPr vertOverflow="overflow" vert="horz" wrap="square" rtlCol="0" anchor="t">
+            <a:noAutofit/>
+          </a:bodyPr>
+          <a:lstStyle/>
+          <a:p>
+            <a:pPr algn="l"/>
+            <a:r>
+              <a:rPr lang="it-IT" sz="1600" dirty="0">
+                <a:solidFill>
+                  <a:srgbClr val="333333"/>
+                </a:solidFill>
+                <a:latin typeface="Calibri"/>
+                <a:ea typeface="Calibri"/>
+                <a:cs typeface="Calibri"/>
+              </a:rPr>
+              <a:t>Left </a:t>
+            </a:r>
+            <a:r>
+              <a:rPr lang="it-IT" sz="1600" dirty="0" err="1">
+                <a:solidFill>
+                  <a:srgbClr val="333333"/>
+                </a:solidFill>
+                <a:latin typeface="Calibri"/>
+                <a:ea typeface="Calibri"/>
+                <a:cs typeface="Calibri"/>
+              </a:rPr>
+              <a:t>content</a:t>
+            </a:r>
+            <a:endParaRPr lang="it-IT" sz="1600" dirty="0">
+              <a:solidFill>
+                <a:srgbClr val="333333"/>
+              </a:solidFill>
+              <a:latin typeface="Calibri"/>
+              <a:ea typeface="Calibri"/>
+              <a:cs typeface="Calibri"/>
+            </a:endParaRPr>
+          </a:p>
+        </p:txBody>
+      </p:sp>
+      <p:sp>
+        <p:nvSpPr>
+          <p:cNvPr id="6" name="CasellaDiTesto 5">
+            <a:extLst>
+              <a:ext uri="{FF2B5EF4-FFF2-40B4-BE49-F238E27FC236}">
+                <a16:creationId xmlns:a16="http://schemas.microsoft.com/office/drawing/2014/main" id="{34CBD74A-88E8-4A7F-BF8C-396FF18C5FD4}"/>
+              </a:ext>
+            </a:extLst>
+          </p:cNvPr>
+          <p:cNvSpPr txBox="1"/>
+          <p:nvPr/>
+        </p:nvSpPr>
+        <p:spPr>
+          <a:xfrm>
+            <a:off x="4699000" y="914400"/>
+            <a:ext cx="4089400" cy="3556000"/>
+          </a:xfrm>
+          <a:prstGeom prst="rect">
+            <a:avLst/>
+          </a:prstGeom>
+          <a:noFill/>
+        </p:spPr>
+        <p:txBody>
+          <a:bodyPr vertOverflow="overflow" vert="horz" wrap="square" rtlCol="0" anchor="t">
+            <a:noAutofit/>
+          </a:bodyPr>
+          <a:lstStyle/>
+          <a:p>
+            <a:pPr algn="l"/>
+            <a:r>
+              <a:rPr lang="it-IT" sz="1600" dirty="0" err="1">
+                <a:solidFill>
+                  <a:srgbClr val="333333"/>
+                </a:solidFill>
+                <a:latin typeface="Calibri"/>
+                <a:ea typeface="Calibri"/>
+                <a:cs typeface="Calibri"/>
+              </a:rPr>
+              <a:t>Right</a:t>
+            </a:r>
+            <a:r>
+              <a:rPr lang="it-IT" sz="1600" dirty="0">
+                <a:solidFill>
+                  <a:srgbClr val="333333"/>
+                </a:solidFill>
+                <a:latin typeface="Calibri"/>
+                <a:ea typeface="Calibri"/>
+                <a:cs typeface="Calibri"/>
+              </a:rPr>
+              <a:t> </a:t>
+            </a:r>
+            <a:r>
+              <a:rPr lang="it-IT" sz="1600" dirty="0" err="1">
+                <a:solidFill>
+                  <a:srgbClr val="333333"/>
+                </a:solidFill>
+                <a:latin typeface="Calibri"/>
+                <a:ea typeface="Calibri"/>
+                <a:cs typeface="Calibri"/>
+              </a:rPr>
+              <a:t>content</a:t>
+            </a:r>
+            <a:endParaRPr lang="it-IT" sz="1600" dirty="0">
+              <a:solidFill>
+                <a:srgbClr val="333333"/>
+              </a:solidFill>
+              <a:latin typeface="Calibri"/>
+              <a:ea typeface="Calibri"/>
+              <a:cs typeface="Calibri"/>
+            </a:endParaRPr>
+          </a:p>
+        </p:txBody>
+      </p:sp>
+    </p:spTree>
+    <p:extLst>
+      <p:ext uri="{BB962C8B-B14F-4D97-AF65-F5344CB8AC3E}">
+        <p14:creationId xmlns:p14="http://schemas.microsoft.com/office/powerpoint/2010/main" val="1959701455"/>
       </p:ext>
     </p:extLst>
   </p:cSld>
@@ -5666,10 +5136,10 @@
       </p:grpSpPr>
       <p:sp>
         <p:nvSpPr>
-          <p:cNvPr id="3" name="CasellaDiTesto 2">
+          <p:cNvPr id="2" name="CasellaDiTesto 1">
             <a:extLst>
               <a:ext uri="{FF2B5EF4-FFF2-40B4-BE49-F238E27FC236}">
-                <a16:creationId xmlns:a16="http://schemas.microsoft.com/office/drawing/2014/main" id="{A2573F97-AE10-444A-9306-BFF3D7DCA88C}"/>
+                <a16:creationId xmlns:a16="http://schemas.microsoft.com/office/drawing/2014/main" id="{62960C30-3286-4C2A-B688-DEAE83675C09}"/>
               </a:ext>
             </a:extLst>
           </p:cNvPr>
@@ -5678,8 +5148,8 @@
         </p:nvSpPr>
         <p:spPr>
           <a:xfrm>
-            <a:off x="508000" y="254000"/>
-            <a:ext cx="8229600" cy="457200"/>
+            <a:off x="914400" y="1778000"/>
+            <a:ext cx="7315200" cy="762000"/>
           </a:xfrm>
           <a:prstGeom prst="rect">
             <a:avLst/>
@@ -5694,7 +5164,7 @@
           <a:p>
             <a:pPr algn="l"/>
             <a:r>
-              <a:rPr lang="it-IT" sz="2600" b="1" dirty="0">
+              <a:rPr lang="it-IT" sz="3600" b="1">
                 <a:solidFill>
                   <a:srgbClr val="1A1A1A"/>
                 </a:solidFill>
@@ -5702,17 +5172,17 @@
                 <a:ea typeface="Calibri"/>
                 <a:cs typeface="Calibri"/>
               </a:rPr>
-              <a:t>Slide Title</a:t>
+              <a:t>Section Title</a:t>
             </a:r>
           </a:p>
         </p:txBody>
       </p:sp>
       <p:sp>
         <p:nvSpPr>
-          <p:cNvPr id="5" name="CasellaDiTesto 4">
+          <p:cNvPr id="3" name="CasellaDiTesto 2">
             <a:extLst>
               <a:ext uri="{FF2B5EF4-FFF2-40B4-BE49-F238E27FC236}">
-                <a16:creationId xmlns:a16="http://schemas.microsoft.com/office/drawing/2014/main" id="{FD0ECAD6-FF98-4193-979E-566FFED4B5AD}"/>
+                <a16:creationId xmlns:a16="http://schemas.microsoft.com/office/drawing/2014/main" id="{0AEED710-32FB-4CE7-BC12-02102C1D2BFF}"/>
               </a:ext>
             </a:extLst>
           </p:cNvPr>
@@ -5721,8 +5191,8 @@
         </p:nvSpPr>
         <p:spPr>
           <a:xfrm>
-            <a:off x="368300" y="914400"/>
-            <a:ext cx="4089400" cy="3556000"/>
+            <a:off x="1524000" y="2667000"/>
+            <a:ext cx="6096000" cy="381000"/>
           </a:xfrm>
           <a:prstGeom prst="rect">
             <a:avLst/>
@@ -5737,115 +5207,23 @@
           <a:p>
             <a:pPr algn="l"/>
             <a:r>
-              <a:rPr lang="it-IT" sz="1600" dirty="0">
-                <a:solidFill>
-                  <a:srgbClr val="333333"/>
+              <a:rPr lang="it-IT">
+                <a:solidFill>
+                  <a:srgbClr val="666666"/>
                 </a:solidFill>
                 <a:latin typeface="Calibri"/>
                 <a:ea typeface="Calibri"/>
                 <a:cs typeface="Calibri"/>
               </a:rPr>
-              <a:t>Left </a:t>
-            </a:r>
-            <a:r>
-              <a:rPr lang="it-IT" sz="1600" dirty="0" err="1">
-                <a:solidFill>
-                  <a:srgbClr val="333333"/>
-                </a:solidFill>
-                <a:latin typeface="Calibri"/>
-                <a:ea typeface="Calibri"/>
-                <a:cs typeface="Calibri"/>
-              </a:rPr>
-              <a:t>content</a:t>
-            </a:r>
-            <a:endParaRPr lang="it-IT" sz="1600" dirty="0">
-              <a:solidFill>
-                <a:srgbClr val="333333"/>
-              </a:solidFill>
-              <a:latin typeface="Calibri"/>
-              <a:ea typeface="Calibri"/>
-              <a:cs typeface="Calibri"/>
-            </a:endParaRPr>
-          </a:p>
-        </p:txBody>
-      </p:sp>
-      <p:sp>
-        <p:nvSpPr>
-          <p:cNvPr id="6" name="CasellaDiTesto 5">
-            <a:extLst>
-              <a:ext uri="{FF2B5EF4-FFF2-40B4-BE49-F238E27FC236}">
-                <a16:creationId xmlns:a16="http://schemas.microsoft.com/office/drawing/2014/main" id="{34CBD74A-88E8-4A7F-BF8C-396FF18C5FD4}"/>
-              </a:ext>
-            </a:extLst>
-          </p:cNvPr>
-          <p:cNvSpPr txBox="1"/>
-          <p:nvPr/>
-        </p:nvSpPr>
-        <p:spPr>
-          <a:xfrm>
-            <a:off x="4699000" y="914400"/>
-            <a:ext cx="4089400" cy="3556000"/>
-          </a:xfrm>
-          <a:prstGeom prst="rect">
-            <a:avLst/>
-          </a:prstGeom>
-          <a:noFill/>
-        </p:spPr>
-        <p:txBody>
-          <a:bodyPr vertOverflow="overflow" vert="horz" wrap="square" rtlCol="0" anchor="t">
-            <a:noAutofit/>
-          </a:bodyPr>
-          <a:lstStyle/>
-          <a:p>
-            <a:pPr algn="l"/>
-            <a:r>
-              <a:rPr lang="it-IT" sz="1600" dirty="0" err="1">
-                <a:solidFill>
-                  <a:srgbClr val="333333"/>
-                </a:solidFill>
-                <a:latin typeface="Calibri"/>
-                <a:ea typeface="Calibri"/>
-                <a:cs typeface="Calibri"/>
-              </a:rPr>
-              <a:t>Right</a:t>
-            </a:r>
-            <a:r>
-              <a:rPr lang="it-IT" sz="1600" dirty="0">
-                <a:solidFill>
-                  <a:srgbClr val="333333"/>
-                </a:solidFill>
-                <a:latin typeface="Calibri"/>
-                <a:ea typeface="Calibri"/>
-                <a:cs typeface="Calibri"/>
-              </a:rPr>
-              <a:t> </a:t>
-            </a:r>
-            <a:r>
-              <a:rPr lang="it-IT" sz="1600" dirty="0" err="1">
-                <a:solidFill>
-                  <a:srgbClr val="333333"/>
-                </a:solidFill>
-                <a:latin typeface="Calibri"/>
-                <a:ea typeface="Calibri"/>
-                <a:cs typeface="Calibri"/>
-              </a:rPr>
-              <a:t>content</a:t>
-            </a:r>
-            <a:endParaRPr lang="it-IT" sz="1600" dirty="0">
-              <a:solidFill>
-                <a:srgbClr val="333333"/>
-              </a:solidFill>
-              <a:latin typeface="Calibri"/>
-              <a:ea typeface="Calibri"/>
-              <a:cs typeface="Calibri"/>
-            </a:endParaRPr>
+              <a:t>Section subtitle or description</a:t>
+            </a:r>
           </a:p>
         </p:txBody>
       </p:sp>
     </p:spTree>
     <p:extLst>
       <p:ext uri="{BB962C8B-B14F-4D97-AF65-F5344CB8AC3E}">
-        <p14:creationId xmlns:p14="http://schemas.microsoft.com/office/powerpoint/2010/main" val="1959701455"/>
+        <p14:creationId xmlns:p14="http://schemas.microsoft.com/office/powerpoint/2010/main" val="2358288740"/>
       </p:ext>
     </p:extLst>
   </p:cSld>
@@ -5874,10 +5252,10 @@
       </p:grpSpPr>
       <p:sp>
         <p:nvSpPr>
-          <p:cNvPr id="2" name="CasellaDiTesto 1">
+          <p:cNvPr id="3" name="CasellaDiTesto 2">
             <a:extLst>
               <a:ext uri="{FF2B5EF4-FFF2-40B4-BE49-F238E27FC236}">
-                <a16:creationId xmlns:a16="http://schemas.microsoft.com/office/drawing/2014/main" id="{62960C30-3286-4C2A-B688-DEAE83675C09}"/>
+                <a16:creationId xmlns:a16="http://schemas.microsoft.com/office/drawing/2014/main" id="{D71D1CBA-50C0-4D94-BDFD-CE3626AAB801}"/>
               </a:ext>
             </a:extLst>
           </p:cNvPr>
@@ -5886,8 +5264,8 @@
         </p:nvSpPr>
         <p:spPr>
           <a:xfrm>
-            <a:off x="914400" y="1778000"/>
-            <a:ext cx="7315200" cy="762000"/>
+            <a:off x="508000" y="254000"/>
+            <a:ext cx="8229600" cy="457200"/>
           </a:xfrm>
           <a:prstGeom prst="rect">
             <a:avLst/>
@@ -5902,7 +5280,7 @@
           <a:p>
             <a:pPr algn="l"/>
             <a:r>
-              <a:rPr lang="it-IT" sz="3600" b="1">
+              <a:rPr lang="it-IT" sz="2600" b="1" dirty="0">
                 <a:solidFill>
                   <a:srgbClr val="1A1A1A"/>
                 </a:solidFill>
@@ -5910,17 +5288,17 @@
                 <a:ea typeface="Calibri"/>
                 <a:cs typeface="Calibri"/>
               </a:rPr>
-              <a:t>Section Title</a:t>
+              <a:t>Slide Title</a:t>
             </a:r>
           </a:p>
         </p:txBody>
       </p:sp>
       <p:sp>
         <p:nvSpPr>
-          <p:cNvPr id="3" name="CasellaDiTesto 2">
+          <p:cNvPr id="5" name="CasellaDiTesto 4">
             <a:extLst>
               <a:ext uri="{FF2B5EF4-FFF2-40B4-BE49-F238E27FC236}">
-                <a16:creationId xmlns:a16="http://schemas.microsoft.com/office/drawing/2014/main" id="{0AEED710-32FB-4CE7-BC12-02102C1D2BFF}"/>
+                <a16:creationId xmlns:a16="http://schemas.microsoft.com/office/drawing/2014/main" id="{D22DD014-55CD-4034-B01B-03DB851B6C4D}"/>
               </a:ext>
             </a:extLst>
           </p:cNvPr>
@@ -5929,8 +5307,8 @@
         </p:nvSpPr>
         <p:spPr>
           <a:xfrm>
-            <a:off x="1524000" y="2667000"/>
-            <a:ext cx="6096000" cy="381000"/>
+            <a:off x="368300" y="914400"/>
+            <a:ext cx="4318000" cy="3492500"/>
           </a:xfrm>
           <a:prstGeom prst="rect">
             <a:avLst/>
@@ -5945,15 +5323,146 @@
           <a:p>
             <a:pPr algn="l"/>
             <a:r>
-              <a:rPr lang="it-IT">
-                <a:solidFill>
-                  <a:srgbClr val="666666"/>
+              <a:rPr lang="it-IT" sz="1600" dirty="0">
+                <a:solidFill>
+                  <a:srgbClr val="333333"/>
                 </a:solidFill>
                 <a:latin typeface="Calibri"/>
                 <a:ea typeface="Calibri"/>
                 <a:cs typeface="Calibri"/>
               </a:rPr>
-              <a:t>Section subtitle or description</a:t>
+              <a:t>Text </a:t>
+            </a:r>
+            <a:r>
+              <a:rPr lang="it-IT" sz="1600" dirty="0" err="1">
+                <a:solidFill>
+                  <a:srgbClr val="333333"/>
+                </a:solidFill>
+                <a:latin typeface="Calibri"/>
+                <a:ea typeface="Calibri"/>
+                <a:cs typeface="Calibri"/>
+              </a:rPr>
+              <a:t>content</a:t>
+            </a:r>
+            <a:r>
+              <a:rPr lang="it-IT" sz="1600" dirty="0">
+                <a:solidFill>
+                  <a:srgbClr val="333333"/>
+                </a:solidFill>
+                <a:latin typeface="Calibri"/>
+                <a:ea typeface="Calibri"/>
+                <a:cs typeface="Calibri"/>
+              </a:rPr>
+              <a:t> </a:t>
+            </a:r>
+            <a:r>
+              <a:rPr lang="it-IT" sz="1600" dirty="0" err="1">
+                <a:solidFill>
+                  <a:srgbClr val="333333"/>
+                </a:solidFill>
+                <a:latin typeface="Calibri"/>
+                <a:ea typeface="Calibri"/>
+                <a:cs typeface="Calibri"/>
+              </a:rPr>
+              <a:t>goes</a:t>
+            </a:r>
+            <a:r>
+              <a:rPr lang="it-IT" sz="1600" dirty="0">
+                <a:solidFill>
+                  <a:srgbClr val="333333"/>
+                </a:solidFill>
+                <a:latin typeface="Calibri"/>
+                <a:ea typeface="Calibri"/>
+                <a:cs typeface="Calibri"/>
+              </a:rPr>
+              <a:t> </a:t>
+            </a:r>
+            <a:r>
+              <a:rPr lang="it-IT" sz="1600" dirty="0" err="1">
+                <a:solidFill>
+                  <a:srgbClr val="333333"/>
+                </a:solidFill>
+                <a:latin typeface="Calibri"/>
+                <a:ea typeface="Calibri"/>
+                <a:cs typeface="Calibri"/>
+              </a:rPr>
+              <a:t>here</a:t>
+            </a:r>
+            <a:endParaRPr lang="it-IT" sz="1600" dirty="0">
+              <a:solidFill>
+                <a:srgbClr val="333333"/>
+              </a:solidFill>
+              <a:latin typeface="Calibri"/>
+              <a:ea typeface="Calibri"/>
+              <a:cs typeface="Calibri"/>
+            </a:endParaRPr>
+          </a:p>
+        </p:txBody>
+      </p:sp>
+      <p:sp>
+        <p:nvSpPr>
+          <p:cNvPr id="6" name="Rettangolo con angoli arrotondati 5">
+            <a:extLst>
+              <a:ext uri="{FF2B5EF4-FFF2-40B4-BE49-F238E27FC236}">
+                <a16:creationId xmlns:a16="http://schemas.microsoft.com/office/drawing/2014/main" id="{17C1C3B0-E67F-4D08-89AC-6A936CD5AAC7}"/>
+              </a:ext>
+            </a:extLst>
+          </p:cNvPr>
+          <p:cNvSpPr/>
+          <p:nvPr/>
+        </p:nvSpPr>
+        <p:spPr>
+          <a:xfrm>
+            <a:off x="4889500" y="914400"/>
+            <a:ext cx="3937000" cy="3492500"/>
+          </a:xfrm>
+          <a:prstGeom prst="roundRect">
+            <a:avLst/>
+          </a:prstGeom>
+          <a:solidFill>
+            <a:srgbClr val="F0F0F0"/>
+          </a:solidFill>
+          <a:ln w="12700" cap="flat" cmpd="sng" algn="ctr">
+            <a:solidFill>
+              <a:srgbClr val="D6E4F0"/>
+            </a:solidFill>
+            <a:prstDash val="solid"/>
+            <a:miter lim="800000"/>
+          </a:ln>
+        </p:spPr>
+        <p:style>
+          <a:lnRef idx="2">
+            <a:schemeClr val="accent1">
+              <a:shade val="15000"/>
+            </a:schemeClr>
+          </a:lnRef>
+          <a:fillRef idx="1">
+            <a:schemeClr val="accent1"/>
+          </a:fillRef>
+          <a:effectRef idx="0">
+            <a:schemeClr val="accent1"/>
+          </a:effectRef>
+          <a:fontRef idx="minor">
+            <a:schemeClr val="lt1"/>
+          </a:fontRef>
+        </p:style>
+        <p:txBody>
+          <a:bodyPr vertOverflow="clip" horzOverflow="clip" rtlCol="0" anchor="ctr" anchorCtr="0">
+            <a:noAutofit/>
+          </a:bodyPr>
+          <a:lstStyle/>
+          <a:p>
+            <a:pPr algn="l"/>
+            <a:r>
+              <a:rPr lang="it-IT" sz="1600">
+                <a:solidFill>
+                  <a:srgbClr val="AAAAAA"/>
+                </a:solidFill>
+                <a:latin typeface="Calibri"/>
+                <a:ea typeface="Calibri"/>
+                <a:cs typeface="Calibri"/>
+              </a:rPr>
+              <a:t>Image / Chart</a:t>
             </a:r>
           </a:p>
         </p:txBody>
@@ -5961,7 +5470,7 @@
     </p:spTree>
     <p:extLst>
       <p:ext uri="{BB962C8B-B14F-4D97-AF65-F5344CB8AC3E}">
-        <p14:creationId xmlns:p14="http://schemas.microsoft.com/office/powerpoint/2010/main" val="2358288740"/>
+        <p14:creationId xmlns:p14="http://schemas.microsoft.com/office/powerpoint/2010/main" val="3990665965"/>
       </p:ext>
     </p:extLst>
   </p:cSld>

--- a/presentation_1.pptx
+++ b/presentation_1.pptx
@@ -6,18 +6,21 @@
     <p:sldMasterId id="2147483655" r:id="rId2"/>
   </p:sldMasterIdLst>
   <p:notesMasterIdLst>
-    <p:notesMasterId r:id="rId12"/>
+    <p:notesMasterId r:id="rId15"/>
   </p:notesMasterIdLst>
   <p:sldIdLst>
     <p:sldId id="266" r:id="rId3"/>
     <p:sldId id="269" r:id="rId4"/>
-    <p:sldId id="259" r:id="rId5"/>
-    <p:sldId id="271" r:id="rId6"/>
-    <p:sldId id="261" r:id="rId7"/>
-    <p:sldId id="267" r:id="rId8"/>
-    <p:sldId id="262" r:id="rId9"/>
-    <p:sldId id="264" r:id="rId10"/>
-    <p:sldId id="263" r:id="rId11"/>
+    <p:sldId id="273" r:id="rId5"/>
+    <p:sldId id="259" r:id="rId6"/>
+    <p:sldId id="271" r:id="rId7"/>
+    <p:sldId id="261" r:id="rId8"/>
+    <p:sldId id="267" r:id="rId9"/>
+    <p:sldId id="272" r:id="rId10"/>
+    <p:sldId id="262" r:id="rId11"/>
+    <p:sldId id="274" r:id="rId12"/>
+    <p:sldId id="264" r:id="rId13"/>
+    <p:sldId id="263" r:id="rId14"/>
   </p:sldIdLst>
   <p:sldSz cx="9144000" cy="5143500" type="screen16x9"/>
   <p:notesSz cx="5143500" cy="9144000"/>
@@ -338,7 +341,13 @@
   <p:cSld>
     <p:spTree>
       <p:nvGrpSpPr>
-        <p:cNvPr id="1" name=""/>
+        <p:cNvPr id="1" name="">
+          <a:extLst>
+            <a:ext uri="{FF2B5EF4-FFF2-40B4-BE49-F238E27FC236}">
+              <a16:creationId xmlns:a16="http://schemas.microsoft.com/office/drawing/2014/main" id="{1EEF9F5B-54CF-BE03-B793-6DE0FF6630D0}"/>
+            </a:ext>
+          </a:extLst>
+        </p:cNvPr>
         <p:cNvGrpSpPr/>
         <p:nvPr/>
       </p:nvGrpSpPr>
@@ -352,7 +361,13 @@
       </p:grpSpPr>
       <p:sp>
         <p:nvSpPr>
-          <p:cNvPr id="2" name="Slide Image Placeholder 1"/>
+          <p:cNvPr id="2" name="Slide Image Placeholder 1">
+            <a:extLst>
+              <a:ext uri="{FF2B5EF4-FFF2-40B4-BE49-F238E27FC236}">
+                <a16:creationId xmlns:a16="http://schemas.microsoft.com/office/drawing/2014/main" id="{A0C7B444-F33D-49A3-C84E-E4FD51274079}"/>
+              </a:ext>
+            </a:extLst>
+          </p:cNvPr>
           <p:cNvSpPr>
             <a:spLocks noGrp="1" noRot="1" noChangeAspect="1"/>
           </p:cNvSpPr>
@@ -364,7 +379,13 @@
       </p:sp>
       <p:sp>
         <p:nvSpPr>
-          <p:cNvPr id="3" name="Notes Placeholder 2"/>
+          <p:cNvPr id="3" name="Notes Placeholder 2">
+            <a:extLst>
+              <a:ext uri="{FF2B5EF4-FFF2-40B4-BE49-F238E27FC236}">
+                <a16:creationId xmlns:a16="http://schemas.microsoft.com/office/drawing/2014/main" id="{A36FA38E-751A-625F-9153-EA8CDCCD544B}"/>
+              </a:ext>
+            </a:extLst>
+          </p:cNvPr>
           <p:cNvSpPr>
             <a:spLocks noGrp="1"/>
           </p:cNvSpPr>
@@ -383,7 +404,13 @@
       </p:sp>
       <p:sp>
         <p:nvSpPr>
-          <p:cNvPr id="4" name="Slide Number Placeholder 3"/>
+          <p:cNvPr id="4" name="Slide Number Placeholder 3">
+            <a:extLst>
+              <a:ext uri="{FF2B5EF4-FFF2-40B4-BE49-F238E27FC236}">
+                <a16:creationId xmlns:a16="http://schemas.microsoft.com/office/drawing/2014/main" id="{3591571A-96E9-530E-5617-D017077E9B4A}"/>
+              </a:ext>
+            </a:extLst>
+          </p:cNvPr>
           <p:cNvSpPr>
             <a:spLocks noGrp="1"/>
           </p:cNvSpPr>
@@ -407,7 +434,7 @@
     </p:spTree>
     <p:extLst>
       <p:ext uri="{BB962C8B-B14F-4D97-AF65-F5344CB8AC3E}">
-        <p14:creationId xmlns:p14="http://schemas.microsoft.com/office/powerpoint/2010/main" val="1024086991"/>
+        <p14:creationId xmlns:p14="http://schemas.microsoft.com/office/powerpoint/2010/main" val="784785365"/>
       </p:ext>
     </p:extLst>
   </p:cSld>
@@ -483,6 +510,174 @@
             <a:fld id="{F7021451-1387-4CA6-816F-3879F97B5CBC}" type="slidenum">
               <a:rPr lang="en-US"/>
               <a:t>4</a:t>
+            </a:fld>
+            <a:endParaRPr lang="en-US"/>
+          </a:p>
+        </p:txBody>
+      </p:sp>
+    </p:spTree>
+    <p:extLst>
+      <p:ext uri="{BB962C8B-B14F-4D97-AF65-F5344CB8AC3E}">
+        <p14:creationId xmlns:p14="http://schemas.microsoft.com/office/powerpoint/2010/main" val="1024086991"/>
+      </p:ext>
+    </p:extLst>
+  </p:cSld>
+  <p:clrMapOvr>
+    <a:masterClrMapping/>
+  </p:clrMapOvr>
+</p:notes>
+</file>
+
+<file path=ppt/notesSlides/notesSlide4.xml><?xml version="1.0" encoding="utf-8"?>
+<p:notes xmlns:a="http://schemas.openxmlformats.org/drawingml/2006/main" xmlns:r="http://schemas.openxmlformats.org/officeDocument/2006/relationships" xmlns:p="http://schemas.openxmlformats.org/presentationml/2006/main">
+  <p:cSld>
+    <p:spTree>
+      <p:nvGrpSpPr>
+        <p:cNvPr id="1" name=""/>
+        <p:cNvGrpSpPr/>
+        <p:nvPr/>
+      </p:nvGrpSpPr>
+      <p:grpSpPr>
+        <a:xfrm>
+          <a:off x="0" y="0"/>
+          <a:ext cx="0" cy="0"/>
+          <a:chOff x="0" y="0"/>
+          <a:chExt cx="0" cy="0"/>
+        </a:xfrm>
+      </p:grpSpPr>
+      <p:sp>
+        <p:nvSpPr>
+          <p:cNvPr id="2" name="Slide Image Placeholder 1"/>
+          <p:cNvSpPr>
+            <a:spLocks noGrp="1" noRot="1" noChangeAspect="1"/>
+          </p:cNvSpPr>
+          <p:nvPr>
+            <p:ph type="sldImg"/>
+          </p:nvPr>
+        </p:nvSpPr>
+        <p:spPr/>
+      </p:sp>
+      <p:sp>
+        <p:nvSpPr>
+          <p:cNvPr id="3" name="Notes Placeholder 2"/>
+          <p:cNvSpPr>
+            <a:spLocks noGrp="1"/>
+          </p:cNvSpPr>
+          <p:nvPr>
+            <p:ph type="body" idx="1"/>
+          </p:nvPr>
+        </p:nvSpPr>
+        <p:spPr/>
+        <p:txBody>
+          <a:bodyPr/>
+          <a:lstStyle/>
+          <a:p>
+            <a:endParaRPr lang="en-US" dirty="0"/>
+          </a:p>
+        </p:txBody>
+      </p:sp>
+      <p:sp>
+        <p:nvSpPr>
+          <p:cNvPr id="4" name="Slide Number Placeholder 3"/>
+          <p:cNvSpPr>
+            <a:spLocks noGrp="1"/>
+          </p:cNvSpPr>
+          <p:nvPr>
+            <p:ph type="sldNum" sz="quarter" idx="10"/>
+          </p:nvPr>
+        </p:nvSpPr>
+        <p:spPr/>
+        <p:txBody>
+          <a:bodyPr/>
+          <a:lstStyle/>
+          <a:p>
+            <a:fld id="{F7021451-1387-4CA6-816F-3879F97B5CBC}" type="slidenum">
+              <a:rPr lang="en-US"/>
+              <a:t>5</a:t>
+            </a:fld>
+            <a:endParaRPr lang="en-US"/>
+          </a:p>
+        </p:txBody>
+      </p:sp>
+    </p:spTree>
+    <p:extLst>
+      <p:ext uri="{BB962C8B-B14F-4D97-AF65-F5344CB8AC3E}">
+        <p14:creationId xmlns:p14="http://schemas.microsoft.com/office/powerpoint/2010/main" val="1024086991"/>
+      </p:ext>
+    </p:extLst>
+  </p:cSld>
+  <p:clrMapOvr>
+    <a:masterClrMapping/>
+  </p:clrMapOvr>
+</p:notes>
+</file>
+
+<file path=ppt/notesSlides/notesSlide5.xml><?xml version="1.0" encoding="utf-8"?>
+<p:notes xmlns:a="http://schemas.openxmlformats.org/drawingml/2006/main" xmlns:r="http://schemas.openxmlformats.org/officeDocument/2006/relationships" xmlns:p="http://schemas.openxmlformats.org/presentationml/2006/main">
+  <p:cSld>
+    <p:spTree>
+      <p:nvGrpSpPr>
+        <p:cNvPr id="1" name=""/>
+        <p:cNvGrpSpPr/>
+        <p:nvPr/>
+      </p:nvGrpSpPr>
+      <p:grpSpPr>
+        <a:xfrm>
+          <a:off x="0" y="0"/>
+          <a:ext cx="0" cy="0"/>
+          <a:chOff x="0" y="0"/>
+          <a:chExt cx="0" cy="0"/>
+        </a:xfrm>
+      </p:grpSpPr>
+      <p:sp>
+        <p:nvSpPr>
+          <p:cNvPr id="2" name="Slide Image Placeholder 1"/>
+          <p:cNvSpPr>
+            <a:spLocks noGrp="1" noRot="1" noChangeAspect="1"/>
+          </p:cNvSpPr>
+          <p:nvPr>
+            <p:ph type="sldImg"/>
+          </p:nvPr>
+        </p:nvSpPr>
+        <p:spPr/>
+      </p:sp>
+      <p:sp>
+        <p:nvSpPr>
+          <p:cNvPr id="3" name="Notes Placeholder 2"/>
+          <p:cNvSpPr>
+            <a:spLocks noGrp="1"/>
+          </p:cNvSpPr>
+          <p:nvPr>
+            <p:ph type="body" idx="1"/>
+          </p:nvPr>
+        </p:nvSpPr>
+        <p:spPr/>
+        <p:txBody>
+          <a:bodyPr/>
+          <a:lstStyle/>
+          <a:p>
+            <a:endParaRPr lang="en-US" dirty="0"/>
+          </a:p>
+        </p:txBody>
+      </p:sp>
+      <p:sp>
+        <p:nvSpPr>
+          <p:cNvPr id="4" name="Slide Number Placeholder 3"/>
+          <p:cNvSpPr>
+            <a:spLocks noGrp="1"/>
+          </p:cNvSpPr>
+          <p:nvPr>
+            <p:ph type="sldNum" sz="quarter" idx="10"/>
+          </p:nvPr>
+        </p:nvSpPr>
+        <p:spPr/>
+        <p:txBody>
+          <a:bodyPr/>
+          <a:lstStyle/>
+          <a:p>
+            <a:fld id="{F7021451-1387-4CA6-816F-3879F97B5CBC}" type="slidenum">
+              <a:rPr lang="en-US"/>
+              <a:t>8</a:t>
             </a:fld>
             <a:endParaRPr lang="en-US"/>
           </a:p>
@@ -3092,6 +3287,706 @@
 </p:sld>
 </file>
 
+<file path=ppt/slides/slide10.xml><?xml version="1.0" encoding="utf-8"?>
+<p:sld xmlns:a="http://schemas.openxmlformats.org/drawingml/2006/main" xmlns:r="http://schemas.openxmlformats.org/officeDocument/2006/relationships" xmlns:p="http://schemas.openxmlformats.org/presentationml/2006/main">
+  <p:cSld>
+    <p:spTree>
+      <p:nvGrpSpPr>
+        <p:cNvPr id="1" name="">
+          <a:extLst>
+            <a:ext uri="{FF2B5EF4-FFF2-40B4-BE49-F238E27FC236}">
+              <a16:creationId xmlns:a16="http://schemas.microsoft.com/office/drawing/2014/main" id="{4843B7A4-5D27-70B1-0A98-ED2995FE2AA3}"/>
+            </a:ext>
+          </a:extLst>
+        </p:cNvPr>
+        <p:cNvGrpSpPr/>
+        <p:nvPr/>
+      </p:nvGrpSpPr>
+      <p:grpSpPr>
+        <a:xfrm>
+          <a:off x="0" y="0"/>
+          <a:ext cx="0" cy="0"/>
+          <a:chOff x="0" y="0"/>
+          <a:chExt cx="0" cy="0"/>
+        </a:xfrm>
+      </p:grpSpPr>
+      <p:sp>
+        <p:nvSpPr>
+          <p:cNvPr id="9" name="Shape 22">
+            <a:extLst>
+              <a:ext uri="{FF2B5EF4-FFF2-40B4-BE49-F238E27FC236}">
+                <a16:creationId xmlns:a16="http://schemas.microsoft.com/office/drawing/2014/main" id="{D4EE8D53-8338-A278-7AC1-88A20B87F4E9}"/>
+              </a:ext>
+            </a:extLst>
+          </p:cNvPr>
+          <p:cNvSpPr/>
+          <p:nvPr/>
+        </p:nvSpPr>
+        <p:spPr>
+          <a:xfrm>
+            <a:off x="278674" y="890647"/>
+            <a:ext cx="4409440" cy="1453410"/>
+          </a:xfrm>
+          <a:prstGeom prst="rect">
+            <a:avLst/>
+          </a:prstGeom>
+          <a:solidFill>
+            <a:srgbClr val="F5F7FA"/>
+          </a:solidFill>
+          <a:ln w="12700">
+            <a:solidFill>
+              <a:srgbClr val="D6E4F0"/>
+            </a:solidFill>
+            <a:prstDash val="solid"/>
+          </a:ln>
+        </p:spPr>
+      </p:sp>
+      <p:sp>
+        <p:nvSpPr>
+          <p:cNvPr id="3" name="CasellaDiTesto 2">
+            <a:extLst>
+              <a:ext uri="{FF2B5EF4-FFF2-40B4-BE49-F238E27FC236}">
+                <a16:creationId xmlns:a16="http://schemas.microsoft.com/office/drawing/2014/main" id="{FD32A6E3-1067-D149-8143-6698F5640355}"/>
+              </a:ext>
+            </a:extLst>
+          </p:cNvPr>
+          <p:cNvSpPr txBox="1"/>
+          <p:nvPr/>
+        </p:nvSpPr>
+        <p:spPr>
+          <a:xfrm>
+            <a:off x="508000" y="254000"/>
+            <a:ext cx="8229600" cy="457200"/>
+          </a:xfrm>
+          <a:prstGeom prst="rect">
+            <a:avLst/>
+          </a:prstGeom>
+          <a:noFill/>
+        </p:spPr>
+        <p:txBody>
+          <a:bodyPr vertOverflow="overflow" vert="horz" wrap="square" rtlCol="0" anchor="ctr" anchorCtr="0">
+            <a:noAutofit/>
+          </a:bodyPr>
+          <a:lstStyle/>
+          <a:p>
+            <a:pPr algn="l"/>
+            <a:r>
+              <a:rPr lang="it-IT" sz="2600" b="1" dirty="0">
+                <a:solidFill>
+                  <a:srgbClr val="1A1A1A"/>
+                </a:solidFill>
+                <a:latin typeface="Calibri"/>
+                <a:ea typeface="Calibri"/>
+                <a:cs typeface="Calibri"/>
+              </a:rPr>
+              <a:t>The Simulator</a:t>
+            </a:r>
+          </a:p>
+        </p:txBody>
+      </p:sp>
+      <p:sp>
+        <p:nvSpPr>
+          <p:cNvPr id="4" name="Text 5">
+            <a:extLst>
+              <a:ext uri="{FF2B5EF4-FFF2-40B4-BE49-F238E27FC236}">
+                <a16:creationId xmlns:a16="http://schemas.microsoft.com/office/drawing/2014/main" id="{73027F75-A051-76BC-591E-600C8A5CC59B}"/>
+              </a:ext>
+            </a:extLst>
+          </p:cNvPr>
+          <p:cNvSpPr/>
+          <p:nvPr/>
+        </p:nvSpPr>
+        <p:spPr>
+          <a:xfrm>
+            <a:off x="349069" y="1393369"/>
+            <a:ext cx="4251960" cy="645888"/>
+          </a:xfrm>
+          <a:prstGeom prst="rect">
+            <a:avLst/>
+          </a:prstGeom>
+          <a:noFill/>
+          <a:ln/>
+        </p:spPr>
+        <p:txBody>
+          <a:bodyPr wrap="square" rtlCol="0" anchor="t"/>
+          <a:lstStyle/>
+          <a:p>
+            <a:pPr marL="190500" indent="-190500">
+              <a:spcAft>
+                <a:spcPts val="500"/>
+              </a:spcAft>
+              <a:buSzPct val="100000"/>
+              <a:buChar char="•"/>
+            </a:pPr>
+            <a:r>
+              <a:rPr lang="en-US" sz="1400" dirty="0">
+                <a:solidFill>
+                  <a:srgbClr val="1A1A1A"/>
+                </a:solidFill>
+                <a:latin typeface="Calibri" pitchFamily="34" charset="0"/>
+                <a:ea typeface="Calibri" pitchFamily="34" charset="-122"/>
+                <a:cs typeface="Calibri" pitchFamily="34" charset="-120"/>
+              </a:rPr>
+              <a:t>Partially observable discrete map</a:t>
+            </a:r>
+            <a:endParaRPr lang="en-US" sz="1400" dirty="0"/>
+          </a:p>
+        </p:txBody>
+      </p:sp>
+      <p:sp>
+        <p:nvSpPr>
+          <p:cNvPr id="11" name="Text 5">
+            <a:extLst>
+              <a:ext uri="{FF2B5EF4-FFF2-40B4-BE49-F238E27FC236}">
+                <a16:creationId xmlns:a16="http://schemas.microsoft.com/office/drawing/2014/main" id="{CAC0CC9D-40D3-4901-4004-A8502D9116E2}"/>
+              </a:ext>
+            </a:extLst>
+          </p:cNvPr>
+          <p:cNvSpPr/>
+          <p:nvPr/>
+        </p:nvSpPr>
+        <p:spPr>
+          <a:xfrm>
+            <a:off x="349069" y="944285"/>
+            <a:ext cx="4251960" cy="457200"/>
+          </a:xfrm>
+          <a:prstGeom prst="rect">
+            <a:avLst/>
+          </a:prstGeom>
+          <a:noFill/>
+          <a:ln/>
+        </p:spPr>
+        <p:txBody>
+          <a:bodyPr wrap="square" rtlCol="0" anchor="t"/>
+          <a:lstStyle/>
+          <a:p>
+            <a:pPr marL="285750" indent="-285750">
+              <a:spcAft>
+                <a:spcPts val="500"/>
+              </a:spcAft>
+              <a:buSzPct val="100000"/>
+              <a:buFont typeface="Arial" panose="020B0604020202020204" pitchFamily="34" charset="0"/>
+              <a:buChar char="•"/>
+            </a:pPr>
+            <a:r>
+              <a:rPr lang="en-US" dirty="0">
+                <a:solidFill>
+                  <a:srgbClr val="1A1A1A"/>
+                </a:solidFill>
+                <a:latin typeface="Calibri" pitchFamily="34" charset="0"/>
+                <a:ea typeface="Calibri" pitchFamily="34" charset="-122"/>
+                <a:cs typeface="Calibri" pitchFamily="34" charset="-120"/>
+              </a:rPr>
+              <a:t>The environment – 2D occupancy grid</a:t>
+            </a:r>
+          </a:p>
+        </p:txBody>
+      </p:sp>
+      <p:sp>
+        <p:nvSpPr>
+          <p:cNvPr id="12" name="Shape 22">
+            <a:extLst>
+              <a:ext uri="{FF2B5EF4-FFF2-40B4-BE49-F238E27FC236}">
+                <a16:creationId xmlns:a16="http://schemas.microsoft.com/office/drawing/2014/main" id="{32DCC85E-21BD-A456-C7F1-E4AE1506FBB9}"/>
+              </a:ext>
+            </a:extLst>
+          </p:cNvPr>
+          <p:cNvSpPr/>
+          <p:nvPr/>
+        </p:nvSpPr>
+        <p:spPr>
+          <a:xfrm>
+            <a:off x="278674" y="2806700"/>
+            <a:ext cx="4409440" cy="1453410"/>
+          </a:xfrm>
+          <a:prstGeom prst="rect">
+            <a:avLst/>
+          </a:prstGeom>
+          <a:solidFill>
+            <a:srgbClr val="F5F7FA"/>
+          </a:solidFill>
+          <a:ln w="12700">
+            <a:solidFill>
+              <a:srgbClr val="D6E4F0"/>
+            </a:solidFill>
+            <a:prstDash val="solid"/>
+          </a:ln>
+        </p:spPr>
+      </p:sp>
+      <p:sp>
+        <p:nvSpPr>
+          <p:cNvPr id="13" name="Text 5">
+            <a:extLst>
+              <a:ext uri="{FF2B5EF4-FFF2-40B4-BE49-F238E27FC236}">
+                <a16:creationId xmlns:a16="http://schemas.microsoft.com/office/drawing/2014/main" id="{B119D0DF-27F6-E8DC-8DAA-B098EEEE2BCC}"/>
+              </a:ext>
+            </a:extLst>
+          </p:cNvPr>
+          <p:cNvSpPr/>
+          <p:nvPr/>
+        </p:nvSpPr>
+        <p:spPr>
+          <a:xfrm>
+            <a:off x="349069" y="3309422"/>
+            <a:ext cx="4251960" cy="645888"/>
+          </a:xfrm>
+          <a:prstGeom prst="rect">
+            <a:avLst/>
+          </a:prstGeom>
+          <a:noFill/>
+          <a:ln/>
+        </p:spPr>
+        <p:txBody>
+          <a:bodyPr wrap="square" rtlCol="0" anchor="t"/>
+          <a:lstStyle/>
+          <a:p>
+            <a:pPr marL="190500" indent="-190500">
+              <a:spcAft>
+                <a:spcPts val="500"/>
+              </a:spcAft>
+              <a:buSzPct val="100000"/>
+              <a:buChar char="•"/>
+            </a:pPr>
+            <a:r>
+              <a:rPr lang="en-US" sz="1400" dirty="0">
+                <a:solidFill>
+                  <a:srgbClr val="1A1A1A"/>
+                </a:solidFill>
+                <a:latin typeface="Calibri" pitchFamily="34" charset="0"/>
+                <a:ea typeface="Calibri" pitchFamily="34" charset="-122"/>
+                <a:cs typeface="Calibri" pitchFamily="34" charset="-120"/>
+              </a:rPr>
+              <a:t>Partially observable discrete map</a:t>
+            </a:r>
+            <a:endParaRPr lang="en-US" sz="1400" dirty="0"/>
+          </a:p>
+        </p:txBody>
+      </p:sp>
+      <p:sp>
+        <p:nvSpPr>
+          <p:cNvPr id="14" name="Text 5">
+            <a:extLst>
+              <a:ext uri="{FF2B5EF4-FFF2-40B4-BE49-F238E27FC236}">
+                <a16:creationId xmlns:a16="http://schemas.microsoft.com/office/drawing/2014/main" id="{1B94AC84-FA26-EB5F-63FB-A8BD8B41C148}"/>
+              </a:ext>
+            </a:extLst>
+          </p:cNvPr>
+          <p:cNvSpPr/>
+          <p:nvPr/>
+        </p:nvSpPr>
+        <p:spPr>
+          <a:xfrm>
+            <a:off x="349069" y="2860338"/>
+            <a:ext cx="4251960" cy="457200"/>
+          </a:xfrm>
+          <a:prstGeom prst="rect">
+            <a:avLst/>
+          </a:prstGeom>
+          <a:noFill/>
+          <a:ln/>
+        </p:spPr>
+        <p:txBody>
+          <a:bodyPr wrap="square" rtlCol="0" anchor="t"/>
+          <a:lstStyle/>
+          <a:p>
+            <a:pPr marL="285750" indent="-285750">
+              <a:spcAft>
+                <a:spcPts val="500"/>
+              </a:spcAft>
+              <a:buSzPct val="100000"/>
+              <a:buFont typeface="Arial" panose="020B0604020202020204" pitchFamily="34" charset="0"/>
+              <a:buChar char="•"/>
+            </a:pPr>
+            <a:r>
+              <a:rPr lang="en-US" dirty="0">
+                <a:solidFill>
+                  <a:srgbClr val="1A1A1A"/>
+                </a:solidFill>
+                <a:latin typeface="Calibri" pitchFamily="34" charset="0"/>
+                <a:ea typeface="Calibri" pitchFamily="34" charset="-122"/>
+                <a:cs typeface="Calibri" pitchFamily="34" charset="-120"/>
+              </a:rPr>
+              <a:t>The environment – 2D occupancy grid</a:t>
+            </a:r>
+          </a:p>
+        </p:txBody>
+      </p:sp>
+    </p:spTree>
+    <p:extLst>
+      <p:ext uri="{BB962C8B-B14F-4D97-AF65-F5344CB8AC3E}">
+        <p14:creationId xmlns:p14="http://schemas.microsoft.com/office/powerpoint/2010/main" val="3138509511"/>
+      </p:ext>
+    </p:extLst>
+  </p:cSld>
+  <p:clrMapOvr>
+    <a:masterClrMapping/>
+  </p:clrMapOvr>
+</p:sld>
+</file>
+
+<file path=ppt/slides/slide11.xml><?xml version="1.0" encoding="utf-8"?>
+<p:sld xmlns:a="http://schemas.openxmlformats.org/drawingml/2006/main" xmlns:r="http://schemas.openxmlformats.org/officeDocument/2006/relationships" xmlns:p="http://schemas.openxmlformats.org/presentationml/2006/main">
+  <p:cSld>
+    <p:spTree>
+      <p:nvGrpSpPr>
+        <p:cNvPr id="1" name=""/>
+        <p:cNvGrpSpPr/>
+        <p:nvPr/>
+      </p:nvGrpSpPr>
+      <p:grpSpPr>
+        <a:xfrm>
+          <a:off x="0" y="0"/>
+          <a:ext cx="0" cy="0"/>
+          <a:chOff x="0" y="0"/>
+          <a:chExt cx="0" cy="0"/>
+        </a:xfrm>
+      </p:grpSpPr>
+      <p:sp>
+        <p:nvSpPr>
+          <p:cNvPr id="2" name="CasellaDiTesto 1">
+            <a:extLst>
+              <a:ext uri="{FF2B5EF4-FFF2-40B4-BE49-F238E27FC236}">
+                <a16:creationId xmlns:a16="http://schemas.microsoft.com/office/drawing/2014/main" id="{62960C30-3286-4C2A-B688-DEAE83675C09}"/>
+              </a:ext>
+            </a:extLst>
+          </p:cNvPr>
+          <p:cNvSpPr txBox="1"/>
+          <p:nvPr/>
+        </p:nvSpPr>
+        <p:spPr>
+          <a:xfrm>
+            <a:off x="914400" y="1778000"/>
+            <a:ext cx="7315200" cy="762000"/>
+          </a:xfrm>
+          <a:prstGeom prst="rect">
+            <a:avLst/>
+          </a:prstGeom>
+          <a:noFill/>
+        </p:spPr>
+        <p:txBody>
+          <a:bodyPr vertOverflow="overflow" vert="horz" wrap="square" rtlCol="0" anchor="ctr" anchorCtr="0">
+            <a:noAutofit/>
+          </a:bodyPr>
+          <a:lstStyle/>
+          <a:p>
+            <a:pPr algn="l"/>
+            <a:r>
+              <a:rPr lang="it-IT" sz="3600" b="1">
+                <a:solidFill>
+                  <a:srgbClr val="1A1A1A"/>
+                </a:solidFill>
+                <a:latin typeface="Calibri"/>
+                <a:ea typeface="Calibri"/>
+                <a:cs typeface="Calibri"/>
+              </a:rPr>
+              <a:t>Section Title</a:t>
+            </a:r>
+          </a:p>
+        </p:txBody>
+      </p:sp>
+      <p:sp>
+        <p:nvSpPr>
+          <p:cNvPr id="3" name="CasellaDiTesto 2">
+            <a:extLst>
+              <a:ext uri="{FF2B5EF4-FFF2-40B4-BE49-F238E27FC236}">
+                <a16:creationId xmlns:a16="http://schemas.microsoft.com/office/drawing/2014/main" id="{0AEED710-32FB-4CE7-BC12-02102C1D2BFF}"/>
+              </a:ext>
+            </a:extLst>
+          </p:cNvPr>
+          <p:cNvSpPr txBox="1"/>
+          <p:nvPr/>
+        </p:nvSpPr>
+        <p:spPr>
+          <a:xfrm>
+            <a:off x="1524000" y="2667000"/>
+            <a:ext cx="6096000" cy="381000"/>
+          </a:xfrm>
+          <a:prstGeom prst="rect">
+            <a:avLst/>
+          </a:prstGeom>
+          <a:noFill/>
+        </p:spPr>
+        <p:txBody>
+          <a:bodyPr vertOverflow="overflow" vert="horz" wrap="square" rtlCol="0" anchor="t">
+            <a:noAutofit/>
+          </a:bodyPr>
+          <a:lstStyle/>
+          <a:p>
+            <a:pPr algn="l"/>
+            <a:r>
+              <a:rPr lang="it-IT">
+                <a:solidFill>
+                  <a:srgbClr val="666666"/>
+                </a:solidFill>
+                <a:latin typeface="Calibri"/>
+                <a:ea typeface="Calibri"/>
+                <a:cs typeface="Calibri"/>
+              </a:rPr>
+              <a:t>Section subtitle or description</a:t>
+            </a:r>
+          </a:p>
+        </p:txBody>
+      </p:sp>
+    </p:spTree>
+    <p:extLst>
+      <p:ext uri="{BB962C8B-B14F-4D97-AF65-F5344CB8AC3E}">
+        <p14:creationId xmlns:p14="http://schemas.microsoft.com/office/powerpoint/2010/main" val="2358288740"/>
+      </p:ext>
+    </p:extLst>
+  </p:cSld>
+  <p:clrMapOvr>
+    <a:masterClrMapping/>
+  </p:clrMapOvr>
+</p:sld>
+</file>
+
+<file path=ppt/slides/slide12.xml><?xml version="1.0" encoding="utf-8"?>
+<p:sld xmlns:a="http://schemas.openxmlformats.org/drawingml/2006/main" xmlns:r="http://schemas.openxmlformats.org/officeDocument/2006/relationships" xmlns:p="http://schemas.openxmlformats.org/presentationml/2006/main">
+  <p:cSld>
+    <p:spTree>
+      <p:nvGrpSpPr>
+        <p:cNvPr id="1" name=""/>
+        <p:cNvGrpSpPr/>
+        <p:nvPr/>
+      </p:nvGrpSpPr>
+      <p:grpSpPr>
+        <a:xfrm>
+          <a:off x="0" y="0"/>
+          <a:ext cx="0" cy="0"/>
+          <a:chOff x="0" y="0"/>
+          <a:chExt cx="0" cy="0"/>
+        </a:xfrm>
+      </p:grpSpPr>
+      <p:sp>
+        <p:nvSpPr>
+          <p:cNvPr id="3" name="CasellaDiTesto 2">
+            <a:extLst>
+              <a:ext uri="{FF2B5EF4-FFF2-40B4-BE49-F238E27FC236}">
+                <a16:creationId xmlns:a16="http://schemas.microsoft.com/office/drawing/2014/main" id="{D71D1CBA-50C0-4D94-BDFD-CE3626AAB801}"/>
+              </a:ext>
+            </a:extLst>
+          </p:cNvPr>
+          <p:cNvSpPr txBox="1"/>
+          <p:nvPr/>
+        </p:nvSpPr>
+        <p:spPr>
+          <a:xfrm>
+            <a:off x="508000" y="254000"/>
+            <a:ext cx="8229600" cy="457200"/>
+          </a:xfrm>
+          <a:prstGeom prst="rect">
+            <a:avLst/>
+          </a:prstGeom>
+          <a:noFill/>
+        </p:spPr>
+        <p:txBody>
+          <a:bodyPr vertOverflow="overflow" vert="horz" wrap="square" rtlCol="0" anchor="ctr" anchorCtr="0">
+            <a:noAutofit/>
+          </a:bodyPr>
+          <a:lstStyle/>
+          <a:p>
+            <a:pPr algn="l"/>
+            <a:r>
+              <a:rPr lang="it-IT" sz="2600" b="1" dirty="0">
+                <a:solidFill>
+                  <a:srgbClr val="1A1A1A"/>
+                </a:solidFill>
+                <a:latin typeface="Calibri"/>
+                <a:ea typeface="Calibri"/>
+                <a:cs typeface="Calibri"/>
+              </a:rPr>
+              <a:t>Slide Title</a:t>
+            </a:r>
+          </a:p>
+        </p:txBody>
+      </p:sp>
+      <p:sp>
+        <p:nvSpPr>
+          <p:cNvPr id="5" name="CasellaDiTesto 4">
+            <a:extLst>
+              <a:ext uri="{FF2B5EF4-FFF2-40B4-BE49-F238E27FC236}">
+                <a16:creationId xmlns:a16="http://schemas.microsoft.com/office/drawing/2014/main" id="{D22DD014-55CD-4034-B01B-03DB851B6C4D}"/>
+              </a:ext>
+            </a:extLst>
+          </p:cNvPr>
+          <p:cNvSpPr txBox="1"/>
+          <p:nvPr/>
+        </p:nvSpPr>
+        <p:spPr>
+          <a:xfrm>
+            <a:off x="368300" y="914400"/>
+            <a:ext cx="4318000" cy="3492500"/>
+          </a:xfrm>
+          <a:prstGeom prst="rect">
+            <a:avLst/>
+          </a:prstGeom>
+          <a:noFill/>
+        </p:spPr>
+        <p:txBody>
+          <a:bodyPr vertOverflow="overflow" vert="horz" wrap="square" rtlCol="0" anchor="t">
+            <a:noAutofit/>
+          </a:bodyPr>
+          <a:lstStyle/>
+          <a:p>
+            <a:pPr algn="l"/>
+            <a:r>
+              <a:rPr lang="it-IT" sz="1600" dirty="0">
+                <a:solidFill>
+                  <a:srgbClr val="333333"/>
+                </a:solidFill>
+                <a:latin typeface="Calibri"/>
+                <a:ea typeface="Calibri"/>
+                <a:cs typeface="Calibri"/>
+              </a:rPr>
+              <a:t>Text </a:t>
+            </a:r>
+            <a:r>
+              <a:rPr lang="it-IT" sz="1600" dirty="0" err="1">
+                <a:solidFill>
+                  <a:srgbClr val="333333"/>
+                </a:solidFill>
+                <a:latin typeface="Calibri"/>
+                <a:ea typeface="Calibri"/>
+                <a:cs typeface="Calibri"/>
+              </a:rPr>
+              <a:t>content</a:t>
+            </a:r>
+            <a:r>
+              <a:rPr lang="it-IT" sz="1600" dirty="0">
+                <a:solidFill>
+                  <a:srgbClr val="333333"/>
+                </a:solidFill>
+                <a:latin typeface="Calibri"/>
+                <a:ea typeface="Calibri"/>
+                <a:cs typeface="Calibri"/>
+              </a:rPr>
+              <a:t> </a:t>
+            </a:r>
+            <a:r>
+              <a:rPr lang="it-IT" sz="1600" dirty="0" err="1">
+                <a:solidFill>
+                  <a:srgbClr val="333333"/>
+                </a:solidFill>
+                <a:latin typeface="Calibri"/>
+                <a:ea typeface="Calibri"/>
+                <a:cs typeface="Calibri"/>
+              </a:rPr>
+              <a:t>goes</a:t>
+            </a:r>
+            <a:r>
+              <a:rPr lang="it-IT" sz="1600" dirty="0">
+                <a:solidFill>
+                  <a:srgbClr val="333333"/>
+                </a:solidFill>
+                <a:latin typeface="Calibri"/>
+                <a:ea typeface="Calibri"/>
+                <a:cs typeface="Calibri"/>
+              </a:rPr>
+              <a:t> </a:t>
+            </a:r>
+            <a:r>
+              <a:rPr lang="it-IT" sz="1600" dirty="0" err="1">
+                <a:solidFill>
+                  <a:srgbClr val="333333"/>
+                </a:solidFill>
+                <a:latin typeface="Calibri"/>
+                <a:ea typeface="Calibri"/>
+                <a:cs typeface="Calibri"/>
+              </a:rPr>
+              <a:t>here</a:t>
+            </a:r>
+            <a:endParaRPr lang="it-IT" sz="1600" dirty="0">
+              <a:solidFill>
+                <a:srgbClr val="333333"/>
+              </a:solidFill>
+              <a:latin typeface="Calibri"/>
+              <a:ea typeface="Calibri"/>
+              <a:cs typeface="Calibri"/>
+            </a:endParaRPr>
+          </a:p>
+        </p:txBody>
+      </p:sp>
+      <p:sp>
+        <p:nvSpPr>
+          <p:cNvPr id="6" name="Rettangolo con angoli arrotondati 5">
+            <a:extLst>
+              <a:ext uri="{FF2B5EF4-FFF2-40B4-BE49-F238E27FC236}">
+                <a16:creationId xmlns:a16="http://schemas.microsoft.com/office/drawing/2014/main" id="{17C1C3B0-E67F-4D08-89AC-6A936CD5AAC7}"/>
+              </a:ext>
+            </a:extLst>
+          </p:cNvPr>
+          <p:cNvSpPr/>
+          <p:nvPr/>
+        </p:nvSpPr>
+        <p:spPr>
+          <a:xfrm>
+            <a:off x="4889500" y="914400"/>
+            <a:ext cx="3937000" cy="3492500"/>
+          </a:xfrm>
+          <a:prstGeom prst="roundRect">
+            <a:avLst/>
+          </a:prstGeom>
+          <a:solidFill>
+            <a:srgbClr val="F0F0F0"/>
+          </a:solidFill>
+          <a:ln w="12700" cap="flat" cmpd="sng" algn="ctr">
+            <a:solidFill>
+              <a:srgbClr val="D6E4F0"/>
+            </a:solidFill>
+            <a:prstDash val="solid"/>
+            <a:miter lim="800000"/>
+          </a:ln>
+        </p:spPr>
+        <p:style>
+          <a:lnRef idx="2">
+            <a:schemeClr val="accent1">
+              <a:shade val="15000"/>
+            </a:schemeClr>
+          </a:lnRef>
+          <a:fillRef idx="1">
+            <a:schemeClr val="accent1"/>
+          </a:fillRef>
+          <a:effectRef idx="0">
+            <a:schemeClr val="accent1"/>
+          </a:effectRef>
+          <a:fontRef idx="minor">
+            <a:schemeClr val="lt1"/>
+          </a:fontRef>
+        </p:style>
+        <p:txBody>
+          <a:bodyPr vertOverflow="clip" horzOverflow="clip" rtlCol="0" anchor="ctr" anchorCtr="0">
+            <a:noAutofit/>
+          </a:bodyPr>
+          <a:lstStyle/>
+          <a:p>
+            <a:pPr algn="l"/>
+            <a:r>
+              <a:rPr lang="it-IT" sz="1600">
+                <a:solidFill>
+                  <a:srgbClr val="AAAAAA"/>
+                </a:solidFill>
+                <a:latin typeface="Calibri"/>
+                <a:ea typeface="Calibri"/>
+                <a:cs typeface="Calibri"/>
+              </a:rPr>
+              <a:t>Image / Chart</a:t>
+            </a:r>
+          </a:p>
+        </p:txBody>
+      </p:sp>
+    </p:spTree>
+    <p:extLst>
+      <p:ext uri="{BB962C8B-B14F-4D97-AF65-F5344CB8AC3E}">
+        <p14:creationId xmlns:p14="http://schemas.microsoft.com/office/powerpoint/2010/main" val="3990665965"/>
+      </p:ext>
+    </p:extLst>
+  </p:cSld>
+  <p:clrMapOvr>
+    <a:masterClrMapping/>
+  </p:clrMapOvr>
+</p:sld>
+</file>
+
 <file path=ppt/slides/slide2.xml><?xml version="1.0" encoding="utf-8"?>
 <p:sld xmlns:a="http://schemas.openxmlformats.org/drawingml/2006/main" xmlns:r="http://schemas.openxmlformats.org/officeDocument/2006/relationships" xmlns:p="http://schemas.openxmlformats.org/presentationml/2006/main">
   <p:cSld>
@@ -3282,20 +4177,18 @@
         </p:nvSpPr>
         <p:spPr>
           <a:xfrm>
-            <a:off x="365760" y="914400"/>
+            <a:off x="365760" y="942976"/>
             <a:ext cx="8412480" cy="960120"/>
           </a:xfrm>
           <a:prstGeom prst="rect">
             <a:avLst/>
           </a:prstGeom>
           <a:solidFill>
-            <a:srgbClr val="D6E4F0"/>
+            <a:srgbClr val="F5F7FA"/>
           </a:solidFill>
           <a:ln w="12700">
             <a:solidFill>
-              <a:schemeClr val="accent1">
-                <a:lumMod val="50000"/>
-              </a:schemeClr>
+              <a:srgbClr val="D6E4F0"/>
             </a:solidFill>
             <a:prstDash val="solid"/>
           </a:ln>
@@ -3309,7 +4202,7 @@
         </p:nvSpPr>
         <p:spPr>
           <a:xfrm>
-            <a:off x="457200" y="960120"/>
+            <a:off x="457200" y="988696"/>
             <a:ext cx="8229600" cy="868680"/>
           </a:xfrm>
           <a:prstGeom prst="rect">
@@ -3344,7 +4237,7 @@
                 <a:ea typeface="Calibri" pitchFamily="34" charset="-122"/>
                 <a:cs typeface="Calibri" pitchFamily="34" charset="-120"/>
               </a:rPr>
-              <a:t>applied to autonomous exploration?</a:t>
+              <a:t>leveraged into autonomous exploration?</a:t>
             </a:r>
             <a:endParaRPr lang="en-US" dirty="0"/>
           </a:p>
@@ -3358,8 +4251,8 @@
         </p:nvSpPr>
         <p:spPr>
           <a:xfrm>
-            <a:off x="457200" y="2011680"/>
-            <a:ext cx="8229600" cy="1464491"/>
+            <a:off x="457200" y="2140273"/>
+            <a:ext cx="8229600" cy="1078041"/>
           </a:xfrm>
           <a:prstGeom prst="rect">
             <a:avLst/>
@@ -3466,49 +4359,6 @@
             </a:r>
             <a:endParaRPr lang="en-US" dirty="0"/>
           </a:p>
-          <a:p>
-            <a:pPr marL="190500" indent="-190500">
-              <a:spcAft>
-                <a:spcPts val="500"/>
-              </a:spcAft>
-              <a:buSzPct val="100000"/>
-              <a:buChar char="•"/>
-            </a:pPr>
-            <a:r>
-              <a:rPr lang="en-US" dirty="0">
-                <a:solidFill>
-                  <a:srgbClr val="1A1A1A"/>
-                </a:solidFill>
-                <a:latin typeface="Calibri" pitchFamily="34" charset="0"/>
-                <a:ea typeface="Calibri" pitchFamily="34" charset="-122"/>
-                <a:cs typeface="Calibri" pitchFamily="34" charset="-120"/>
-              </a:rPr>
-              <a:t>Can learning-based method be </a:t>
-            </a:r>
-            <a:r>
-              <a:rPr lang="en-US" b="1" dirty="0">
-                <a:solidFill>
-                  <a:srgbClr val="1A1A1A"/>
-                </a:solidFill>
-                <a:latin typeface="Calibri" pitchFamily="34" charset="0"/>
-                <a:ea typeface="Calibri" pitchFamily="34" charset="-122"/>
-                <a:cs typeface="Calibri" pitchFamily="34" charset="-120"/>
-              </a:rPr>
-              <a:t>integrated</a:t>
-            </a:r>
-            <a:r>
-              <a:rPr lang="en-US" dirty="0">
-                <a:solidFill>
-                  <a:srgbClr val="1A1A1A"/>
-                </a:solidFill>
-                <a:latin typeface="Calibri" pitchFamily="34" charset="0"/>
-                <a:ea typeface="Calibri" pitchFamily="34" charset="-122"/>
-                <a:cs typeface="Calibri" pitchFamily="34" charset="-120"/>
-              </a:rPr>
-              <a:t> in classical ones? </a:t>
-            </a:r>
-            <a:endParaRPr lang="en-US" dirty="0"/>
-          </a:p>
         </p:txBody>
       </p:sp>
       <p:sp>
@@ -3525,20 +4375,18 @@
         </p:nvSpPr>
         <p:spPr>
           <a:xfrm>
-            <a:off x="365760" y="3565705"/>
-            <a:ext cx="8412480" cy="960120"/>
+            <a:off x="365760" y="3367363"/>
+            <a:ext cx="8458200" cy="1140342"/>
           </a:xfrm>
           <a:prstGeom prst="rect">
             <a:avLst/>
           </a:prstGeom>
           <a:solidFill>
-            <a:srgbClr val="D6E4F0"/>
+            <a:srgbClr val="F5F7FA"/>
           </a:solidFill>
           <a:ln w="12700">
             <a:solidFill>
-              <a:schemeClr val="accent1">
-                <a:lumMod val="50000"/>
-              </a:schemeClr>
+              <a:srgbClr val="D6E4F0"/>
             </a:solidFill>
             <a:prstDash val="solid"/>
           </a:ln>
@@ -3558,8 +4406,74 @@
         </p:nvSpPr>
         <p:spPr>
           <a:xfrm>
-            <a:off x="457200" y="3604281"/>
-            <a:ext cx="8229600" cy="868680"/>
+            <a:off x="756525" y="3879832"/>
+            <a:ext cx="7722390" cy="472461"/>
+          </a:xfrm>
+          <a:prstGeom prst="rect">
+            <a:avLst/>
+          </a:prstGeom>
+          <a:noFill/>
+          <a:ln/>
+        </p:spPr>
+        <p:txBody>
+          <a:bodyPr wrap="square" rtlCol="0" anchor="ctr"/>
+          <a:lstStyle/>
+          <a:p>
+            <a:pPr marL="0" indent="0">
+              <a:buNone/>
+            </a:pPr>
+            <a:r>
+              <a:rPr lang="en-US" dirty="0">
+                <a:latin typeface="Calibri" pitchFamily="34" charset="0"/>
+                <a:ea typeface="Calibri" pitchFamily="34" charset="-122"/>
+                <a:cs typeface="Calibri" pitchFamily="34" charset="-120"/>
+              </a:rPr>
+              <a:t>Develop a framework to </a:t>
+            </a:r>
+            <a:r>
+              <a:rPr lang="en-US" b="1" dirty="0">
+                <a:latin typeface="Calibri" pitchFamily="34" charset="0"/>
+                <a:ea typeface="Calibri" pitchFamily="34" charset="-122"/>
+                <a:cs typeface="Calibri" pitchFamily="34" charset="-120"/>
+              </a:rPr>
+              <a:t>investigate</a:t>
+            </a:r>
+            <a:r>
+              <a:rPr lang="en-US" dirty="0">
+                <a:latin typeface="Calibri" pitchFamily="34" charset="0"/>
+                <a:ea typeface="Calibri" pitchFamily="34" charset="-122"/>
+                <a:cs typeface="Calibri" pitchFamily="34" charset="-120"/>
+              </a:rPr>
+              <a:t> the possibility of</a:t>
+            </a:r>
+            <a:r>
+              <a:rPr lang="en-US" b="1" dirty="0">
+                <a:latin typeface="Calibri" pitchFamily="34" charset="0"/>
+                <a:ea typeface="Calibri" pitchFamily="34" charset="-122"/>
+                <a:cs typeface="Calibri" pitchFamily="34" charset="-120"/>
+              </a:rPr>
+              <a:t> integrating learning-based methods with classical ones</a:t>
+            </a:r>
+            <a:endParaRPr lang="en-US" b="1" dirty="0"/>
+          </a:p>
+        </p:txBody>
+      </p:sp>
+      <p:sp>
+        <p:nvSpPr>
+          <p:cNvPr id="14" name="Text 6">
+            <a:extLst>
+              <a:ext uri="{FF2B5EF4-FFF2-40B4-BE49-F238E27FC236}">
+                <a16:creationId xmlns:a16="http://schemas.microsoft.com/office/drawing/2014/main" id="{9E002ABA-51D8-44C0-5622-613A998D91FA}"/>
+              </a:ext>
+            </a:extLst>
+          </p:cNvPr>
+          <p:cNvSpPr/>
+          <p:nvPr/>
+        </p:nvSpPr>
+        <p:spPr>
+          <a:xfrm>
+            <a:off x="686512" y="3371651"/>
+            <a:ext cx="1324451" cy="472461"/>
           </a:xfrm>
           <a:prstGeom prst="rect">
             <a:avLst/>
@@ -3575,27 +4489,14 @@
               <a:buNone/>
             </a:pPr>
             <a:r>
-              <a:rPr lang="en-US" b="1" i="1" dirty="0">
-                <a:latin typeface="Calibri" pitchFamily="34" charset="0"/>
-                <a:ea typeface="Calibri" pitchFamily="34" charset="-122"/>
-                <a:cs typeface="Calibri" pitchFamily="34" charset="-120"/>
-              </a:rPr>
-              <a:t>Objective: </a:t>
-            </a:r>
-          </a:p>
-          <a:p>
-            <a:pPr marL="0" indent="0" algn="ctr">
-              <a:buNone/>
-            </a:pPr>
-            <a:r>
-              <a:rPr lang="en-US" b="1" i="1" dirty="0">
-                <a:latin typeface="Calibri" pitchFamily="34" charset="0"/>
-                <a:ea typeface="Calibri" pitchFamily="34" charset="-122"/>
-                <a:cs typeface="Calibri" pitchFamily="34" charset="-120"/>
-              </a:rPr>
-              <a:t>develop a framework for the investigation of this possibility</a:t>
-            </a:r>
-            <a:endParaRPr lang="en-US" dirty="0"/>
+              <a:rPr lang="en-US" sz="2000" b="1" dirty="0">
+                <a:latin typeface="Calibri" pitchFamily="34" charset="0"/>
+                <a:ea typeface="Calibri" pitchFamily="34" charset="-122"/>
+                <a:cs typeface="Calibri" pitchFamily="34" charset="-120"/>
+              </a:rPr>
+              <a:t>Objective:</a:t>
+            </a:r>
+            <a:endParaRPr lang="en-US" sz="2000" dirty="0"/>
           </a:p>
         </p:txBody>
       </p:sp>
@@ -3612,7 +4513,13 @@
   <p:cSld>
     <p:spTree>
       <p:nvGrpSpPr>
-        <p:cNvPr id="1" name=""/>
+        <p:cNvPr id="1" name="">
+          <a:extLst>
+            <a:ext uri="{FF2B5EF4-FFF2-40B4-BE49-F238E27FC236}">
+              <a16:creationId xmlns:a16="http://schemas.microsoft.com/office/drawing/2014/main" id="{292B5734-CF37-87E8-1710-B49D7F31AD39}"/>
+            </a:ext>
+          </a:extLst>
+        </p:cNvPr>
         <p:cNvGrpSpPr/>
         <p:nvPr/>
       </p:nvGrpSpPr>
@@ -3626,7 +4533,58 @@
       </p:grpSpPr>
       <p:sp>
         <p:nvSpPr>
-          <p:cNvPr id="3" name="Text 1"/>
+          <p:cNvPr id="2" name="Text 0">
+            <a:extLst>
+              <a:ext uri="{FF2B5EF4-FFF2-40B4-BE49-F238E27FC236}">
+                <a16:creationId xmlns:a16="http://schemas.microsoft.com/office/drawing/2014/main" id="{64FE2BD3-6355-FDF3-4A6B-486DA5131EFB}"/>
+              </a:ext>
+            </a:extLst>
+          </p:cNvPr>
+          <p:cNvSpPr/>
+          <p:nvPr/>
+        </p:nvSpPr>
+        <p:spPr>
+          <a:xfrm>
+            <a:off x="320040" y="4846320"/>
+            <a:ext cx="7772400" cy="201168"/>
+          </a:xfrm>
+          <a:prstGeom prst="rect">
+            <a:avLst/>
+          </a:prstGeom>
+          <a:noFill/>
+          <a:ln/>
+        </p:spPr>
+        <p:txBody>
+          <a:bodyPr wrap="square" rtlCol="0" anchor="ctr"/>
+          <a:lstStyle/>
+          <a:p>
+            <a:pPr marL="0" indent="0" algn="l">
+              <a:buNone/>
+            </a:pPr>
+            <a:r>
+              <a:rPr lang="en-US" sz="900" dirty="0">
+                <a:solidFill>
+                  <a:srgbClr val="BBBBBB"/>
+                </a:solidFill>
+                <a:latin typeface="Calibri" pitchFamily="34" charset="0"/>
+                <a:ea typeface="Calibri" pitchFamily="34" charset="-122"/>
+                <a:cs typeface="Calibri" pitchFamily="34" charset="-120"/>
+              </a:rPr>
+              <a:t>Paolo Spallanzani  ·  Deep RL in Frontier-Based Autonomous Exploration</a:t>
+            </a:r>
+            <a:endParaRPr lang="en-US" sz="900" dirty="0"/>
+          </a:p>
+        </p:txBody>
+      </p:sp>
+      <p:sp>
+        <p:nvSpPr>
+          <p:cNvPr id="3" name="Text 1">
+            <a:extLst>
+              <a:ext uri="{FF2B5EF4-FFF2-40B4-BE49-F238E27FC236}">
+                <a16:creationId xmlns:a16="http://schemas.microsoft.com/office/drawing/2014/main" id="{1088FCE5-8752-2BE9-019C-D83E290F36B2}"/>
+              </a:ext>
+            </a:extLst>
+          </p:cNvPr>
           <p:cNvSpPr/>
           <p:nvPr/>
         </p:nvSpPr>
@@ -3657,7 +4615,7 @@
                 <a:ea typeface="Calibri" pitchFamily="34" charset="-122"/>
                 <a:cs typeface="Calibri" pitchFamily="34" charset="-120"/>
               </a:rPr>
-              <a:t>4 / 17</a:t>
+              <a:t>3 / 17</a:t>
             </a:r>
             <a:endParaRPr lang="en-US" sz="900" dirty="0"/>
           </a:p>
@@ -3665,7 +4623,13 @@
       </p:sp>
       <p:sp>
         <p:nvSpPr>
-          <p:cNvPr id="4" name="Shape 2"/>
+          <p:cNvPr id="4" name="Shape 2">
+            <a:extLst>
+              <a:ext uri="{FF2B5EF4-FFF2-40B4-BE49-F238E27FC236}">
+                <a16:creationId xmlns:a16="http://schemas.microsoft.com/office/drawing/2014/main" id="{A3834930-9CDC-649F-A5D9-6BFF89C9FD3F}"/>
+              </a:ext>
+            </a:extLst>
+          </p:cNvPr>
           <p:cNvSpPr/>
           <p:nvPr/>
         </p:nvSpPr>
@@ -3690,7 +4654,13 @@
       </p:sp>
       <p:sp>
         <p:nvSpPr>
-          <p:cNvPr id="5" name="Text 3"/>
+          <p:cNvPr id="5" name="Text 3">
+            <a:extLst>
+              <a:ext uri="{FF2B5EF4-FFF2-40B4-BE49-F238E27FC236}">
+                <a16:creationId xmlns:a16="http://schemas.microsoft.com/office/drawing/2014/main" id="{1D594123-9EB4-0214-1146-B0034A104D25}"/>
+              </a:ext>
+            </a:extLst>
+          </p:cNvPr>
           <p:cNvSpPr/>
           <p:nvPr/>
         </p:nvSpPr>
@@ -3721,7 +4691,7 @@
                 <a:ea typeface="Calibri" pitchFamily="34" charset="-122"/>
                 <a:cs typeface="Calibri" pitchFamily="34" charset="-120"/>
               </a:rPr>
-              <a:t>Context: Autonomous Exploration</a:t>
+              <a:t>Motivation &amp; Scope</a:t>
             </a:r>
             <a:endParaRPr lang="en-US" sz="2600" dirty="0"/>
           </a:p>
@@ -3729,7 +4699,13 @@
       </p:sp>
       <p:sp>
         <p:nvSpPr>
-          <p:cNvPr id="6" name="Shape 4"/>
+          <p:cNvPr id="6" name="Shape 4">
+            <a:extLst>
+              <a:ext uri="{FF2B5EF4-FFF2-40B4-BE49-F238E27FC236}">
+                <a16:creationId xmlns:a16="http://schemas.microsoft.com/office/drawing/2014/main" id="{6B3CE1F0-3C1B-BB0F-D636-C66DC2195FE1}"/>
+              </a:ext>
+            </a:extLst>
+          </p:cNvPr>
           <p:cNvSpPr/>
           <p:nvPr/>
         </p:nvSpPr>
@@ -3752,14 +4728,106 @@
       </p:sp>
       <p:sp>
         <p:nvSpPr>
-          <p:cNvPr id="7" name="Text 5"/>
+          <p:cNvPr id="7" name="Shape 5">
+            <a:extLst>
+              <a:ext uri="{FF2B5EF4-FFF2-40B4-BE49-F238E27FC236}">
+                <a16:creationId xmlns:a16="http://schemas.microsoft.com/office/drawing/2014/main" id="{CEEECED5-C202-9C0F-88A5-C92E3606F903}"/>
+              </a:ext>
+            </a:extLst>
+          </p:cNvPr>
           <p:cNvSpPr/>
           <p:nvPr/>
         </p:nvSpPr>
         <p:spPr>
           <a:xfrm>
             <a:off x="365760" y="914400"/>
-            <a:ext cx="4663440" cy="3840480"/>
+            <a:ext cx="8412480" cy="960120"/>
+          </a:xfrm>
+          <a:prstGeom prst="rect">
+            <a:avLst/>
+          </a:prstGeom>
+          <a:solidFill>
+            <a:srgbClr val="F5F7FA"/>
+          </a:solidFill>
+          <a:ln w="12700">
+            <a:solidFill>
+              <a:srgbClr val="D6E4F0"/>
+            </a:solidFill>
+            <a:prstDash val="solid"/>
+          </a:ln>
+        </p:spPr>
+      </p:sp>
+      <p:sp>
+        <p:nvSpPr>
+          <p:cNvPr id="8" name="Text 6">
+            <a:extLst>
+              <a:ext uri="{FF2B5EF4-FFF2-40B4-BE49-F238E27FC236}">
+                <a16:creationId xmlns:a16="http://schemas.microsoft.com/office/drawing/2014/main" id="{89242DBA-A9A1-DF3B-26A2-DACFDF1392A9}"/>
+              </a:ext>
+            </a:extLst>
+          </p:cNvPr>
+          <p:cNvSpPr/>
+          <p:nvPr/>
+        </p:nvSpPr>
+        <p:spPr>
+          <a:xfrm>
+            <a:off x="457200" y="960120"/>
+            <a:ext cx="8229600" cy="868680"/>
+          </a:xfrm>
+          <a:prstGeom prst="rect">
+            <a:avLst/>
+          </a:prstGeom>
+          <a:noFill/>
+          <a:ln/>
+        </p:spPr>
+        <p:txBody>
+          <a:bodyPr wrap="square" rtlCol="0" anchor="ctr"/>
+          <a:lstStyle/>
+          <a:p>
+            <a:pPr marL="0" indent="0" algn="ctr">
+              <a:buNone/>
+            </a:pPr>
+            <a:r>
+              <a:rPr lang="en-US" b="1" i="1" dirty="0">
+                <a:latin typeface="Calibri" pitchFamily="34" charset="0"/>
+                <a:ea typeface="Calibri" pitchFamily="34" charset="-122"/>
+                <a:cs typeface="Calibri" pitchFamily="34" charset="-120"/>
+              </a:rPr>
+              <a:t>Can Deep Reinforcement Learning (DRL) be effectively</a:t>
+            </a:r>
+          </a:p>
+          <a:p>
+            <a:pPr marL="0" indent="0" algn="ctr">
+              <a:buNone/>
+            </a:pPr>
+            <a:r>
+              <a:rPr lang="en-US" b="1" i="1" dirty="0">
+                <a:latin typeface="Calibri" pitchFamily="34" charset="0"/>
+                <a:ea typeface="Calibri" pitchFamily="34" charset="-122"/>
+                <a:cs typeface="Calibri" pitchFamily="34" charset="-120"/>
+              </a:rPr>
+              <a:t>applied to autonomous exploration?</a:t>
+            </a:r>
+            <a:endParaRPr lang="en-US" dirty="0"/>
+          </a:p>
+        </p:txBody>
+      </p:sp>
+      <p:sp>
+        <p:nvSpPr>
+          <p:cNvPr id="9" name="Text 7">
+            <a:extLst>
+              <a:ext uri="{FF2B5EF4-FFF2-40B4-BE49-F238E27FC236}">
+                <a16:creationId xmlns:a16="http://schemas.microsoft.com/office/drawing/2014/main" id="{7B0FB926-2341-946C-D166-ACBA004280B9}"/>
+              </a:ext>
+            </a:extLst>
+          </p:cNvPr>
+          <p:cNvSpPr/>
+          <p:nvPr/>
+        </p:nvSpPr>
+        <p:spPr>
+          <a:xfrm>
+            <a:off x="457200" y="2011680"/>
+            <a:ext cx="8229600" cy="1464491"/>
           </a:xfrm>
           <a:prstGeom prst="rect">
             <a:avLst/>
@@ -3776,10 +4844,20 @@
                 <a:spcPts val="500"/>
               </a:spcAft>
               <a:buSzPct val="100000"/>
-              <a:buFontTx/>
               <a:buChar char="•"/>
             </a:pPr>
             <a:r>
+              <a:rPr lang="en-US" b="1" dirty="0">
+                <a:solidFill>
+                  <a:srgbClr val="1A1A1A"/>
+                </a:solidFill>
+                <a:latin typeface="Calibri" pitchFamily="34" charset="0"/>
+                <a:ea typeface="Calibri" pitchFamily="34" charset="-122"/>
+                <a:cs typeface="Calibri" pitchFamily="34" charset="-120"/>
+              </a:rPr>
+              <a:t>Autonomous exploration </a:t>
+            </a:r>
+            <a:r>
               <a:rPr lang="en-US" dirty="0">
                 <a:solidFill>
                   <a:srgbClr val="1A1A1A"/>
@@ -3788,8 +4866,9 @@
                 <a:ea typeface="Calibri" pitchFamily="34" charset="-122"/>
                 <a:cs typeface="Calibri" pitchFamily="34" charset="-120"/>
               </a:rPr>
-              <a:t>Exploration: systematically map an unknown environment</a:t>
-            </a:r>
+              <a:t>is complex task</a:t>
+            </a:r>
+            <a:endParaRPr lang="en-US" dirty="0"/>
           </a:p>
           <a:p>
             <a:pPr marL="190500" indent="-190500">
@@ -3797,10 +4876,20 @@
                 <a:spcPts val="500"/>
               </a:spcAft>
               <a:buSzPct val="100000"/>
-              <a:buFontTx/>
               <a:buChar char="•"/>
             </a:pPr>
             <a:r>
+              <a:rPr lang="en-US" b="1" dirty="0">
+                <a:solidFill>
+                  <a:srgbClr val="1A1A1A"/>
+                </a:solidFill>
+                <a:latin typeface="Calibri" pitchFamily="34" charset="0"/>
+                <a:ea typeface="Calibri" pitchFamily="34" charset="-122"/>
+                <a:cs typeface="Calibri" pitchFamily="34" charset="-120"/>
+              </a:rPr>
+              <a:t>Classical analytical </a:t>
+            </a:r>
+            <a:r>
               <a:rPr lang="en-US" dirty="0">
                 <a:solidFill>
                   <a:srgbClr val="1A1A1A"/>
@@ -3809,8 +4898,9 @@
                 <a:ea typeface="Calibri" pitchFamily="34" charset="-122"/>
                 <a:cs typeface="Calibri" pitchFamily="34" charset="-120"/>
               </a:rPr>
-              <a:t>Autonomous: the agent can perceive and moves without human guidance</a:t>
-            </a:r>
+              <a:t>methods exist but present some limitations</a:t>
+            </a:r>
+            <a:endParaRPr lang="en-US" dirty="0"/>
           </a:p>
           <a:p>
             <a:pPr marL="190500" indent="-190500">
@@ -3818,10 +4908,20 @@
                 <a:spcPts val="500"/>
               </a:spcAft>
               <a:buSzPct val="100000"/>
-              <a:buFontTx/>
               <a:buChar char="•"/>
             </a:pPr>
             <a:r>
+              <a:rPr lang="en-US" b="1" dirty="0">
+                <a:solidFill>
+                  <a:srgbClr val="1A1A1A"/>
+                </a:solidFill>
+                <a:latin typeface="Calibri" pitchFamily="34" charset="0"/>
+                <a:ea typeface="Calibri" pitchFamily="34" charset="-122"/>
+                <a:cs typeface="Calibri" pitchFamily="34" charset="-120"/>
+              </a:rPr>
+              <a:t>Learning-based</a:t>
+            </a:r>
+            <a:r>
               <a:rPr lang="en-US" dirty="0">
                 <a:solidFill>
                   <a:srgbClr val="1A1A1A"/>
@@ -3830,8 +4930,9 @@
                 <a:ea typeface="Calibri" pitchFamily="34" charset="-122"/>
                 <a:cs typeface="Calibri" pitchFamily="34" charset="-120"/>
               </a:rPr>
-              <a:t>Why autonomous exploration?</a:t>
-            </a:r>
+              <a:t> methods can provide more adaptive models</a:t>
+            </a:r>
+            <a:endParaRPr lang="en-US" dirty="0"/>
           </a:p>
           <a:p>
             <a:pPr marL="190500" indent="-190500">
@@ -3839,7 +4940,6 @@
                 <a:spcPts val="500"/>
               </a:spcAft>
               <a:buSzPct val="100000"/>
-              <a:buFontTx/>
               <a:buChar char="•"/>
             </a:pPr>
             <a:r>
@@ -3851,63 +4951,29 @@
                 <a:ea typeface="Calibri" pitchFamily="34" charset="-122"/>
                 <a:cs typeface="Calibri" pitchFamily="34" charset="-120"/>
               </a:rPr>
-              <a:t>Complex task, requires:</a:t>
-            </a:r>
-          </a:p>
-          <a:p>
-            <a:pPr marL="647700" lvl="1" indent="-190500">
-              <a:spcAft>
-                <a:spcPts val="500"/>
-              </a:spcAft>
-              <a:buSzPct val="100000"/>
-              <a:buFontTx/>
-              <a:buChar char="•"/>
-            </a:pPr>
-            <a:r>
-              <a:rPr lang="en-US" sz="1400" dirty="0"/>
-              <a:t>Mapping</a:t>
-            </a:r>
-          </a:p>
-          <a:p>
-            <a:pPr marL="647700" lvl="1" indent="-190500">
-              <a:spcAft>
-                <a:spcPts val="500"/>
-              </a:spcAft>
-              <a:buSzPct val="100000"/>
-              <a:buFontTx/>
-              <a:buChar char="•"/>
-            </a:pPr>
-            <a:r>
-              <a:rPr lang="en-US" sz="1400" dirty="0"/>
-              <a:t>Localization</a:t>
-            </a:r>
-          </a:p>
-          <a:p>
-            <a:pPr marL="647700" lvl="1" indent="-190500">
-              <a:spcAft>
-                <a:spcPts val="500"/>
-              </a:spcAft>
-              <a:buSzPct val="100000"/>
-              <a:buFontTx/>
-              <a:buChar char="•"/>
-            </a:pPr>
-            <a:r>
-              <a:rPr lang="en-US" sz="1400" dirty="0"/>
-              <a:t>Navigation</a:t>
-            </a:r>
-          </a:p>
-          <a:p>
-            <a:pPr marL="647700" lvl="1" indent="-190500">
-              <a:spcAft>
-                <a:spcPts val="500"/>
-              </a:spcAft>
-              <a:buSzPct val="100000"/>
-              <a:buFontTx/>
-              <a:buChar char="•"/>
-            </a:pPr>
-            <a:r>
-              <a:rPr lang="en-US" sz="1400" dirty="0"/>
-              <a:t>Decision making</a:t>
+              <a:t>Can learning-based method be </a:t>
+            </a:r>
+            <a:r>
+              <a:rPr lang="en-US" b="1" dirty="0">
+                <a:solidFill>
+                  <a:srgbClr val="1A1A1A"/>
+                </a:solidFill>
+                <a:latin typeface="Calibri" pitchFamily="34" charset="0"/>
+                <a:ea typeface="Calibri" pitchFamily="34" charset="-122"/>
+                <a:cs typeface="Calibri" pitchFamily="34" charset="-120"/>
+              </a:rPr>
+              <a:t>integrated</a:t>
+            </a:r>
+            <a:r>
+              <a:rPr lang="en-US" dirty="0">
+                <a:solidFill>
+                  <a:srgbClr val="1A1A1A"/>
+                </a:solidFill>
+                <a:latin typeface="Calibri" pitchFamily="34" charset="0"/>
+                <a:ea typeface="Calibri" pitchFamily="34" charset="-122"/>
+                <a:cs typeface="Calibri" pitchFamily="34" charset="-120"/>
+              </a:rPr>
+              <a:t> in classical ones? </a:t>
             </a:r>
             <a:endParaRPr lang="en-US" dirty="0"/>
           </a:p>
@@ -3915,14 +4981,51 @@
       </p:sp>
       <p:sp>
         <p:nvSpPr>
-          <p:cNvPr id="9" name="Text 6"/>
+          <p:cNvPr id="11" name="Shape 5">
+            <a:extLst>
+              <a:ext uri="{FF2B5EF4-FFF2-40B4-BE49-F238E27FC236}">
+                <a16:creationId xmlns:a16="http://schemas.microsoft.com/office/drawing/2014/main" id="{8F639CD3-34C8-D5DC-F5C8-88F37F8FBCD9}"/>
+              </a:ext>
+            </a:extLst>
+          </p:cNvPr>
           <p:cNvSpPr/>
           <p:nvPr/>
         </p:nvSpPr>
         <p:spPr>
           <a:xfrm>
-            <a:off x="5419961" y="3687886"/>
-            <a:ext cx="3136106" cy="228598"/>
+            <a:off x="365760" y="3565705"/>
+            <a:ext cx="8412480" cy="960120"/>
+          </a:xfrm>
+          <a:prstGeom prst="rect">
+            <a:avLst/>
+          </a:prstGeom>
+          <a:solidFill>
+            <a:srgbClr val="F5F7FA"/>
+          </a:solidFill>
+          <a:ln w="12700">
+            <a:solidFill>
+              <a:srgbClr val="D6E4F0"/>
+            </a:solidFill>
+            <a:prstDash val="solid"/>
+          </a:ln>
+        </p:spPr>
+      </p:sp>
+      <p:sp>
+        <p:nvSpPr>
+          <p:cNvPr id="12" name="Text 6">
+            <a:extLst>
+              <a:ext uri="{FF2B5EF4-FFF2-40B4-BE49-F238E27FC236}">
+                <a16:creationId xmlns:a16="http://schemas.microsoft.com/office/drawing/2014/main" id="{A7CCC860-9210-70E3-C27A-87D315605618}"/>
+              </a:ext>
+            </a:extLst>
+          </p:cNvPr>
+          <p:cNvSpPr/>
+          <p:nvPr/>
+        </p:nvSpPr>
+        <p:spPr>
+          <a:xfrm>
+            <a:off x="457200" y="3604281"/>
+            <a:ext cx="8229600" cy="868680"/>
           </a:xfrm>
           <a:prstGeom prst="rect">
             <a:avLst/>
@@ -3938,190 +5041,36 @@
               <a:buNone/>
             </a:pPr>
             <a:r>
-              <a:rPr lang="en-US" sz="900" dirty="0">
-                <a:solidFill>
-                  <a:srgbClr val="5A5A5A"/>
-                </a:solidFill>
-                <a:latin typeface="Calibri" pitchFamily="34" charset="0"/>
-                <a:ea typeface="Calibri" pitchFamily="34" charset="-122"/>
-                <a:cs typeface="Calibri" pitchFamily="34" charset="-120"/>
-              </a:rPr>
-              <a:t>Autonomous exploration application examples</a:t>
-            </a:r>
-            <a:endParaRPr lang="en-US" sz="900" dirty="0"/>
-          </a:p>
-        </p:txBody>
-      </p:sp>
-      <p:pic>
-        <p:nvPicPr>
-          <p:cNvPr id="8" name="Immagine 7">
-            <a:extLst>
-              <a:ext uri="{FF2B5EF4-FFF2-40B4-BE49-F238E27FC236}">
-                <a16:creationId xmlns:a16="http://schemas.microsoft.com/office/drawing/2014/main" id="{E497BBE3-9ECA-8B02-05B1-5CA8969F9490}"/>
-              </a:ext>
-            </a:extLst>
-          </p:cNvPr>
-          <p:cNvPicPr>
-            <a:picLocks noChangeAspect="1"/>
-          </p:cNvPicPr>
-          <p:nvPr/>
-        </p:nvPicPr>
-        <p:blipFill>
-          <a:blip r:embed="rId3"/>
-          <a:srcRect l="11347" r="3033"/>
-          <a:stretch>
-            <a:fillRect/>
-          </a:stretch>
-        </p:blipFill>
-        <p:spPr>
-          <a:xfrm>
-            <a:off x="5187789" y="1277305"/>
-            <a:ext cx="1757361" cy="1077575"/>
-          </a:xfrm>
-          <a:prstGeom prst="rect">
-            <a:avLst/>
-          </a:prstGeom>
-        </p:spPr>
-      </p:pic>
-      <p:pic>
-        <p:nvPicPr>
-          <p:cNvPr id="11" name="Immagine 10">
-            <a:extLst>
-              <a:ext uri="{FF2B5EF4-FFF2-40B4-BE49-F238E27FC236}">
-                <a16:creationId xmlns:a16="http://schemas.microsoft.com/office/drawing/2014/main" id="{5D04AF77-05C1-3B51-5275-C1DCABC700B3}"/>
-              </a:ext>
-            </a:extLst>
-          </p:cNvPr>
-          <p:cNvPicPr>
-            <a:picLocks noChangeAspect="1"/>
-          </p:cNvPicPr>
-          <p:nvPr/>
-        </p:nvPicPr>
-        <p:blipFill>
-          <a:blip r:embed="rId4"/>
-          <a:srcRect t="10651" b="10263"/>
-          <a:stretch>
-            <a:fillRect/>
-          </a:stretch>
-        </p:blipFill>
-        <p:spPr>
-          <a:xfrm>
-            <a:off x="5975687" y="2421300"/>
-            <a:ext cx="2043800" cy="1077575"/>
-          </a:xfrm>
-          <a:prstGeom prst="rect">
-            <a:avLst/>
-          </a:prstGeom>
-        </p:spPr>
-      </p:pic>
-      <p:pic>
-        <p:nvPicPr>
-          <p:cNvPr id="13" name="Immagine 12">
-            <a:extLst>
-              <a:ext uri="{FF2B5EF4-FFF2-40B4-BE49-F238E27FC236}">
-                <a16:creationId xmlns:a16="http://schemas.microsoft.com/office/drawing/2014/main" id="{EE99CC8A-8B36-9C8B-61FA-7500A73EB6EB}"/>
-              </a:ext>
-            </a:extLst>
-          </p:cNvPr>
-          <p:cNvPicPr>
-            <a:picLocks noChangeAspect="1"/>
-          </p:cNvPicPr>
-          <p:nvPr/>
-        </p:nvPicPr>
-        <p:blipFill>
-          <a:blip r:embed="rId5"/>
-          <a:srcRect l="9782" r="4233"/>
-          <a:stretch>
-            <a:fillRect/>
-          </a:stretch>
-        </p:blipFill>
-        <p:spPr>
-          <a:xfrm>
-            <a:off x="7046588" y="1277305"/>
-            <a:ext cx="1757362" cy="1077575"/>
-          </a:xfrm>
-          <a:prstGeom prst="rect">
-            <a:avLst/>
-          </a:prstGeom>
-        </p:spPr>
-      </p:pic>
-      <p:cxnSp>
-        <p:nvCxnSpPr>
-          <p:cNvPr id="15" name="Connettore 2 14">
-            <a:extLst>
-              <a:ext uri="{FF2B5EF4-FFF2-40B4-BE49-F238E27FC236}">
-                <a16:creationId xmlns:a16="http://schemas.microsoft.com/office/drawing/2014/main" id="{546CEDB6-C13F-EB1B-1AC8-58CA8B3E7A63}"/>
-              </a:ext>
-            </a:extLst>
-          </p:cNvPr>
-          <p:cNvCxnSpPr/>
-          <p:nvPr/>
-        </p:nvCxnSpPr>
-        <p:spPr>
-          <a:xfrm>
-            <a:off x="2428872" y="3814765"/>
-            <a:ext cx="278606" cy="0"/>
-          </a:xfrm>
-          <a:prstGeom prst="straightConnector1">
-            <a:avLst/>
-          </a:prstGeom>
-          <a:ln w="28575">
-            <a:tailEnd type="triangle"/>
-          </a:ln>
-        </p:spPr>
-        <p:style>
-          <a:lnRef idx="1">
-            <a:schemeClr val="accent1"/>
-          </a:lnRef>
-          <a:fillRef idx="0">
-            <a:schemeClr val="accent1"/>
-          </a:fillRef>
-          <a:effectRef idx="0">
-            <a:schemeClr val="accent1"/>
-          </a:effectRef>
-          <a:fontRef idx="minor">
-            <a:schemeClr val="tx1"/>
-          </a:fontRef>
-        </p:style>
-      </p:cxnSp>
-      <p:sp>
-        <p:nvSpPr>
-          <p:cNvPr id="16" name="CasellaDiTesto 15">
-            <a:extLst>
-              <a:ext uri="{FF2B5EF4-FFF2-40B4-BE49-F238E27FC236}">
-                <a16:creationId xmlns:a16="http://schemas.microsoft.com/office/drawing/2014/main" id="{647D1818-D2C0-D195-C9F9-F000EE269B9B}"/>
-              </a:ext>
-            </a:extLst>
-          </p:cNvPr>
-          <p:cNvSpPr txBox="1"/>
-          <p:nvPr/>
-        </p:nvSpPr>
-        <p:spPr>
-          <a:xfrm>
-            <a:off x="2836069" y="3553716"/>
-            <a:ext cx="2382725" cy="523220"/>
-          </a:xfrm>
-          <a:prstGeom prst="rect">
-            <a:avLst/>
-          </a:prstGeom>
-          <a:noFill/>
-        </p:spPr>
-        <p:txBody>
-          <a:bodyPr wrap="square" rtlCol="0">
-            <a:spAutoFit/>
-          </a:bodyPr>
-          <a:lstStyle/>
-          <a:p>
-            <a:pPr algn="ctr"/>
-            <a:r>
-              <a:rPr lang="en-US" sz="1400" dirty="0"/>
-              <a:t> The agent must decide where to move next </a:t>
-            </a:r>
-            <a:endParaRPr lang="it-IT" sz="1400" dirty="0"/>
+              <a:rPr lang="en-US" b="1" i="1" dirty="0">
+                <a:latin typeface="Calibri" pitchFamily="34" charset="0"/>
+                <a:ea typeface="Calibri" pitchFamily="34" charset="-122"/>
+                <a:cs typeface="Calibri" pitchFamily="34" charset="-120"/>
+              </a:rPr>
+              <a:t>Objective: </a:t>
+            </a:r>
+          </a:p>
+          <a:p>
+            <a:pPr marL="0" indent="0" algn="ctr">
+              <a:buNone/>
+            </a:pPr>
+            <a:r>
+              <a:rPr lang="en-US" b="1" i="1" dirty="0">
+                <a:latin typeface="Calibri" pitchFamily="34" charset="0"/>
+                <a:ea typeface="Calibri" pitchFamily="34" charset="-122"/>
+                <a:cs typeface="Calibri" pitchFamily="34" charset="-120"/>
+              </a:rPr>
+              <a:t>develop a framework for the investigation of this possibility</a:t>
+            </a:r>
+            <a:endParaRPr lang="en-US" dirty="0"/>
           </a:p>
         </p:txBody>
       </p:sp>
     </p:spTree>
+    <p:extLst>
+      <p:ext uri="{BB962C8B-B14F-4D97-AF65-F5344CB8AC3E}">
+        <p14:creationId xmlns:p14="http://schemas.microsoft.com/office/powerpoint/2010/main" val="2998500986"/>
+      </p:ext>
+    </p:extLst>
   </p:cSld>
   <p:clrMapOvr>
     <a:masterClrMapping/>
@@ -4243,7 +5192,7 @@
                 <a:ea typeface="Calibri" pitchFamily="34" charset="-122"/>
                 <a:cs typeface="Calibri" pitchFamily="34" charset="-120"/>
               </a:rPr>
-              <a:t>Classical Approaches</a:t>
+              <a:t>Context: Autonomous Exploration</a:t>
             </a:r>
             <a:endParaRPr lang="en-US" sz="2600" dirty="0"/>
           </a:p>
@@ -4310,75 +5259,8 @@
                 <a:ea typeface="Calibri" pitchFamily="34" charset="-122"/>
                 <a:cs typeface="Calibri" pitchFamily="34" charset="-120"/>
               </a:rPr>
-              <a:t>Next Best View approach</a:t>
-            </a:r>
-            <a:br>
-              <a:rPr lang="en-US" dirty="0">
-                <a:solidFill>
-                  <a:srgbClr val="1A1A1A"/>
-                </a:solidFill>
-                <a:latin typeface="Calibri" pitchFamily="34" charset="0"/>
-                <a:ea typeface="Calibri" pitchFamily="34" charset="-122"/>
-                <a:cs typeface="Calibri" pitchFamily="34" charset="-120"/>
-              </a:rPr>
-            </a:br>
-            <a:r>
-              <a:rPr lang="it-IT" sz="1600" dirty="0" err="1">
-                <a:solidFill>
-                  <a:srgbClr val="1A1A1A"/>
-                </a:solidFill>
-                <a:latin typeface="Calibri" pitchFamily="34" charset="0"/>
-                <a:ea typeface="Calibri" pitchFamily="34" charset="-122"/>
-                <a:cs typeface="Calibri" pitchFamily="34" charset="-120"/>
-              </a:rPr>
-              <a:t>O</a:t>
-            </a:r>
-            <a:r>
-              <a:rPr lang="it-IT" sz="1600" dirty="0" err="1"/>
-              <a:t>ptimization</a:t>
-            </a:r>
-            <a:r>
-              <a:rPr lang="it-IT" sz="1600" dirty="0"/>
-              <a:t> </a:t>
-            </a:r>
-            <a:r>
-              <a:rPr lang="it-IT" sz="1600" dirty="0" err="1"/>
-              <a:t>problem</a:t>
-            </a:r>
-            <a:r>
-              <a:rPr lang="it-IT" sz="1600" dirty="0"/>
-              <a:t>, </a:t>
-            </a:r>
-            <a:r>
-              <a:rPr lang="it-IT" sz="1600" dirty="0" err="1"/>
-              <a:t>finding</a:t>
-            </a:r>
-            <a:r>
-              <a:rPr lang="it-IT" sz="1600" dirty="0"/>
-              <a:t> the </a:t>
-            </a:r>
-            <a:r>
-              <a:rPr lang="it-IT" sz="1600" dirty="0" err="1"/>
-              <a:t>next</a:t>
-            </a:r>
-            <a:r>
-              <a:rPr lang="it-IT" sz="1600" dirty="0"/>
-              <a:t> best position for the sensing </a:t>
-            </a:r>
-            <a:r>
-              <a:rPr lang="it-IT" sz="1600" dirty="0" err="1"/>
-              <a:t>apparatous</a:t>
-            </a:r>
-            <a:endParaRPr lang="it-IT" sz="1600" dirty="0"/>
-          </a:p>
-          <a:p>
-            <a:pPr>
-              <a:spcAft>
-                <a:spcPts val="500"/>
-              </a:spcAft>
-              <a:buSzPct val="100000"/>
-            </a:pPr>
-            <a:endParaRPr lang="en-US" dirty="0"/>
+              <a:t>Exploration: systematically map an unknown environment</a:t>
+            </a:r>
           </a:p>
           <a:p>
             <a:pPr marL="190500" indent="-190500">
@@ -4386,6 +5268,7 @@
                 <a:spcPts val="500"/>
               </a:spcAft>
               <a:buSzPct val="100000"/>
+              <a:buFontTx/>
               <a:buChar char="•"/>
             </a:pPr>
             <a:r>
@@ -4397,43 +5280,20 @@
                 <a:ea typeface="Calibri" pitchFamily="34" charset="-122"/>
                 <a:cs typeface="Calibri" pitchFamily="34" charset="-120"/>
               </a:rPr>
-              <a:t>Frontier-Based Exploration (</a:t>
-            </a:r>
-            <a:r>
-              <a:rPr lang="it-IT" dirty="0" err="1"/>
-              <a:t>Yamauchi</a:t>
-            </a:r>
-            <a:r>
-              <a:rPr lang="it-IT" dirty="0"/>
-              <a:t> 1997</a:t>
-            </a:r>
-            <a:r>
-              <a:rPr lang="en-US" dirty="0">
-                <a:solidFill>
-                  <a:srgbClr val="1A1A1A"/>
-                </a:solidFill>
-                <a:latin typeface="Calibri" pitchFamily="34" charset="0"/>
-                <a:ea typeface="Calibri" pitchFamily="34" charset="-122"/>
-                <a:cs typeface="Calibri" pitchFamily="34" charset="-120"/>
-              </a:rPr>
-              <a:t>)</a:t>
-            </a:r>
-          </a:p>
-          <a:p>
-            <a:pPr marL="742950" lvl="1" indent="-285750">
+              <a:t>Autonomous: the agent can perceive and moves without human guidance</a:t>
+            </a:r>
+          </a:p>
+          <a:p>
+            <a:pPr marL="190500" indent="-190500">
               <a:spcAft>
                 <a:spcPts val="500"/>
               </a:spcAft>
-              <a:buSzPct val="70000"/>
-              <a:buFont typeface="Courier New" panose="02070309020205020404" pitchFamily="49" charset="0"/>
-              <a:buChar char="o"/>
+              <a:buSzPct val="100000"/>
+              <a:buFontTx/>
+              <a:buChar char="•"/>
             </a:pPr>
             <a:r>
-              <a:rPr lang="en-US" sz="1600" dirty="0"/>
-              <a:t>Frontiers: </a:t>
-            </a:r>
-            <a:r>
-              <a:rPr lang="en-US" sz="1600" dirty="0">
+              <a:rPr lang="en-US" dirty="0">
                 <a:solidFill>
                   <a:srgbClr val="1A1A1A"/>
                 </a:solidFill>
@@ -4441,20 +5301,20 @@
                 <a:ea typeface="Calibri" pitchFamily="34" charset="-122"/>
                 <a:cs typeface="Calibri" pitchFamily="34" charset="-120"/>
               </a:rPr>
-              <a:t>boundary between explored (free) and unknown cells</a:t>
-            </a:r>
-          </a:p>
-          <a:p>
-            <a:pPr marL="742950" lvl="1" indent="-285750">
+              <a:t>Why autonomous exploration?</a:t>
+            </a:r>
+          </a:p>
+          <a:p>
+            <a:pPr marL="190500" indent="-190500">
               <a:spcAft>
                 <a:spcPts val="500"/>
               </a:spcAft>
-              <a:buSzPct val="70000"/>
-              <a:buFont typeface="Courier New" panose="02070309020205020404" pitchFamily="49" charset="0"/>
-              <a:buChar char="o"/>
+              <a:buSzPct val="100000"/>
+              <a:buFontTx/>
+              <a:buChar char="•"/>
             </a:pPr>
             <a:r>
-              <a:rPr lang="en-US" sz="1600" dirty="0">
+              <a:rPr lang="en-US" dirty="0">
                 <a:solidFill>
                   <a:srgbClr val="1A1A1A"/>
                 </a:solidFill>
@@ -4462,57 +5322,116 @@
                 <a:ea typeface="Calibri" pitchFamily="34" charset="-122"/>
                 <a:cs typeface="Calibri" pitchFamily="34" charset="-120"/>
               </a:rPr>
-              <a:t>Often grouped into cluster</a:t>
-            </a:r>
-          </a:p>
-          <a:p>
-            <a:pPr marL="742950" lvl="1" indent="-285750">
+              <a:t>Complex task, requires:</a:t>
+            </a:r>
+          </a:p>
+          <a:p>
+            <a:pPr marL="647700" lvl="1" indent="-190500">
               <a:spcAft>
                 <a:spcPts val="500"/>
               </a:spcAft>
-              <a:buSzPct val="70000"/>
-              <a:buFont typeface="Courier New" panose="02070309020205020404" pitchFamily="49" charset="0"/>
-              <a:buChar char="o"/>
+              <a:buSzPct val="100000"/>
+              <a:buFontTx/>
+              <a:buChar char="•"/>
             </a:pPr>
             <a:r>
-              <a:rPr lang="en-US" sz="1600" dirty="0">
-                <a:solidFill>
-                  <a:srgbClr val="1A1A1A"/>
-                </a:solidFill>
-                <a:latin typeface="Calibri" pitchFamily="34" charset="0"/>
-                <a:ea typeface="Calibri" pitchFamily="34" charset="-122"/>
-                <a:cs typeface="Calibri" pitchFamily="34" charset="-120"/>
-              </a:rPr>
-              <a:t>The agent moves toward frontier clusters</a:t>
-            </a:r>
-          </a:p>
-          <a:p>
-            <a:pPr marL="742950" lvl="1" indent="-285750">
+              <a:rPr lang="en-US" sz="1400" dirty="0"/>
+              <a:t>Mapping</a:t>
+            </a:r>
+          </a:p>
+          <a:p>
+            <a:pPr marL="647700" lvl="1" indent="-190500">
               <a:spcAft>
                 <a:spcPts val="500"/>
               </a:spcAft>
-              <a:buSzPct val="70000"/>
-              <a:buFont typeface="Courier New" panose="02070309020205020404" pitchFamily="49" charset="0"/>
-              <a:buChar char="o"/>
+              <a:buSzPct val="100000"/>
+              <a:buFontTx/>
+              <a:buChar char="•"/>
             </a:pPr>
             <a:r>
-              <a:rPr lang="en-US" sz="1600" dirty="0">
-                <a:solidFill>
-                  <a:srgbClr val="1A1A1A"/>
-                </a:solidFill>
-                <a:latin typeface="Calibri" pitchFamily="34" charset="0"/>
-                <a:ea typeface="Calibri" pitchFamily="34" charset="-122"/>
-                <a:cs typeface="Calibri" pitchFamily="34" charset="-120"/>
-              </a:rPr>
-              <a:t>Fixed heuristics policies to decide which frontier region</a:t>
-            </a:r>
-            <a:endParaRPr lang="en-US" sz="1600" dirty="0"/>
+              <a:rPr lang="en-US" sz="1400" dirty="0"/>
+              <a:t>Localization</a:t>
+            </a:r>
+          </a:p>
+          <a:p>
+            <a:pPr marL="647700" lvl="1" indent="-190500">
+              <a:spcAft>
+                <a:spcPts val="500"/>
+              </a:spcAft>
+              <a:buSzPct val="100000"/>
+              <a:buFontTx/>
+              <a:buChar char="•"/>
+            </a:pPr>
+            <a:r>
+              <a:rPr lang="en-US" sz="1400" dirty="0"/>
+              <a:t>Navigation</a:t>
+            </a:r>
+          </a:p>
+          <a:p>
+            <a:pPr marL="647700" lvl="1" indent="-190500">
+              <a:spcAft>
+                <a:spcPts val="500"/>
+              </a:spcAft>
+              <a:buSzPct val="100000"/>
+              <a:buFontTx/>
+              <a:buChar char="•"/>
+            </a:pPr>
+            <a:r>
+              <a:rPr lang="en-US" sz="1400" dirty="0"/>
+              <a:t>Decision making</a:t>
+            </a:r>
+            <a:endParaRPr lang="en-US" dirty="0"/>
+          </a:p>
+        </p:txBody>
+      </p:sp>
+      <p:sp>
+        <p:nvSpPr>
+          <p:cNvPr id="9" name="Text 6"/>
+          <p:cNvSpPr/>
+          <p:nvPr/>
+        </p:nvSpPr>
+        <p:spPr>
+          <a:xfrm>
+            <a:off x="5419961" y="3687886"/>
+            <a:ext cx="3136106" cy="228598"/>
+          </a:xfrm>
+          <a:prstGeom prst="rect">
+            <a:avLst/>
+          </a:prstGeom>
+          <a:noFill/>
+          <a:ln/>
+        </p:spPr>
+        <p:txBody>
+          <a:bodyPr wrap="square" rtlCol="0" anchor="ctr"/>
+          <a:lstStyle/>
+          <a:p>
+            <a:pPr marL="0" indent="0" algn="ctr">
+              <a:buNone/>
+            </a:pPr>
+            <a:r>
+              <a:rPr lang="en-US" sz="900" dirty="0">
+                <a:solidFill>
+                  <a:srgbClr val="5A5A5A"/>
+                </a:solidFill>
+                <a:latin typeface="Calibri" pitchFamily="34" charset="0"/>
+                <a:ea typeface="Calibri" pitchFamily="34" charset="-122"/>
+                <a:cs typeface="Calibri" pitchFamily="34" charset="-120"/>
+              </a:rPr>
+              <a:t>Autonomous exploration application examples</a:t>
+            </a:r>
+            <a:endParaRPr lang="en-US" sz="900" dirty="0"/>
           </a:p>
         </p:txBody>
       </p:sp>
       <p:pic>
         <p:nvPicPr>
-          <p:cNvPr id="8" name="Image 0" descr="/home/claude/assets/frontiers_picture.jpg"/>
+          <p:cNvPr id="8" name="Immagine 7">
+            <a:extLst>
+              <a:ext uri="{FF2B5EF4-FFF2-40B4-BE49-F238E27FC236}">
+                <a16:creationId xmlns:a16="http://schemas.microsoft.com/office/drawing/2014/main" id="{E497BBE3-9ECA-8B02-05B1-5CA8969F9490}"/>
+              </a:ext>
+            </a:extLst>
+          </p:cNvPr>
           <p:cNvPicPr>
             <a:picLocks noChangeAspect="1"/>
           </p:cNvPicPr>
@@ -4520,55 +5439,156 @@
         </p:nvPicPr>
         <p:blipFill>
           <a:blip r:embed="rId3"/>
-          <a:srcRect/>
-          <a:stretch/>
+          <a:srcRect l="11347" r="3033"/>
+          <a:stretch>
+            <a:fillRect/>
+          </a:stretch>
         </p:blipFill>
         <p:spPr>
           <a:xfrm>
-            <a:off x="5257800" y="914400"/>
-            <a:ext cx="3657600" cy="3246120"/>
+            <a:off x="5187789" y="1277305"/>
+            <a:ext cx="1757361" cy="1077575"/>
           </a:xfrm>
           <a:prstGeom prst="rect">
             <a:avLst/>
           </a:prstGeom>
         </p:spPr>
       </p:pic>
-      <p:sp>
-        <p:nvSpPr>
-          <p:cNvPr id="9" name="Text 6"/>
-          <p:cNvSpPr/>
+      <p:pic>
+        <p:nvPicPr>
+          <p:cNvPr id="11" name="Immagine 10">
+            <a:extLst>
+              <a:ext uri="{FF2B5EF4-FFF2-40B4-BE49-F238E27FC236}">
+                <a16:creationId xmlns:a16="http://schemas.microsoft.com/office/drawing/2014/main" id="{5D04AF77-05C1-3B51-5275-C1DCABC700B3}"/>
+              </a:ext>
+            </a:extLst>
+          </p:cNvPr>
+          <p:cNvPicPr>
+            <a:picLocks noChangeAspect="1"/>
+          </p:cNvPicPr>
           <p:nvPr/>
-        </p:nvSpPr>
-        <p:spPr>
-          <a:xfrm>
-            <a:off x="5257800" y="4160520"/>
-            <a:ext cx="3657600" cy="228600"/>
+        </p:nvPicPr>
+        <p:blipFill>
+          <a:blip r:embed="rId4"/>
+          <a:srcRect t="10651" b="10263"/>
+          <a:stretch>
+            <a:fillRect/>
+          </a:stretch>
+        </p:blipFill>
+        <p:spPr>
+          <a:xfrm>
+            <a:off x="5975687" y="2421300"/>
+            <a:ext cx="2043800" cy="1077575"/>
+          </a:xfrm>
+          <a:prstGeom prst="rect">
+            <a:avLst/>
+          </a:prstGeom>
+        </p:spPr>
+      </p:pic>
+      <p:pic>
+        <p:nvPicPr>
+          <p:cNvPr id="13" name="Immagine 12">
+            <a:extLst>
+              <a:ext uri="{FF2B5EF4-FFF2-40B4-BE49-F238E27FC236}">
+                <a16:creationId xmlns:a16="http://schemas.microsoft.com/office/drawing/2014/main" id="{EE99CC8A-8B36-9C8B-61FA-7500A73EB6EB}"/>
+              </a:ext>
+            </a:extLst>
+          </p:cNvPr>
+          <p:cNvPicPr>
+            <a:picLocks noChangeAspect="1"/>
+          </p:cNvPicPr>
+          <p:nvPr/>
+        </p:nvPicPr>
+        <p:blipFill>
+          <a:blip r:embed="rId5"/>
+          <a:srcRect l="9782" r="4233"/>
+          <a:stretch>
+            <a:fillRect/>
+          </a:stretch>
+        </p:blipFill>
+        <p:spPr>
+          <a:xfrm>
+            <a:off x="7046588" y="1277305"/>
+            <a:ext cx="1757362" cy="1077575"/>
+          </a:xfrm>
+          <a:prstGeom prst="rect">
+            <a:avLst/>
+          </a:prstGeom>
+        </p:spPr>
+      </p:pic>
+      <p:cxnSp>
+        <p:nvCxnSpPr>
+          <p:cNvPr id="15" name="Connettore 2 14">
+            <a:extLst>
+              <a:ext uri="{FF2B5EF4-FFF2-40B4-BE49-F238E27FC236}">
+                <a16:creationId xmlns:a16="http://schemas.microsoft.com/office/drawing/2014/main" id="{546CEDB6-C13F-EB1B-1AC8-58CA8B3E7A63}"/>
+              </a:ext>
+            </a:extLst>
+          </p:cNvPr>
+          <p:cNvCxnSpPr/>
+          <p:nvPr/>
+        </p:nvCxnSpPr>
+        <p:spPr>
+          <a:xfrm>
+            <a:off x="2428872" y="3814765"/>
+            <a:ext cx="278606" cy="0"/>
+          </a:xfrm>
+          <a:prstGeom prst="straightConnector1">
+            <a:avLst/>
+          </a:prstGeom>
+          <a:ln w="28575">
+            <a:tailEnd type="triangle"/>
+          </a:ln>
+        </p:spPr>
+        <p:style>
+          <a:lnRef idx="1">
+            <a:schemeClr val="accent1"/>
+          </a:lnRef>
+          <a:fillRef idx="0">
+            <a:schemeClr val="accent1"/>
+          </a:fillRef>
+          <a:effectRef idx="0">
+            <a:schemeClr val="accent1"/>
+          </a:effectRef>
+          <a:fontRef idx="minor">
+            <a:schemeClr val="tx1"/>
+          </a:fontRef>
+        </p:style>
+      </p:cxnSp>
+      <p:sp>
+        <p:nvSpPr>
+          <p:cNvPr id="16" name="CasellaDiTesto 15">
+            <a:extLst>
+              <a:ext uri="{FF2B5EF4-FFF2-40B4-BE49-F238E27FC236}">
+                <a16:creationId xmlns:a16="http://schemas.microsoft.com/office/drawing/2014/main" id="{647D1818-D2C0-D195-C9F9-F000EE269B9B}"/>
+              </a:ext>
+            </a:extLst>
+          </p:cNvPr>
+          <p:cNvSpPr txBox="1"/>
+          <p:nvPr/>
+        </p:nvSpPr>
+        <p:spPr>
+          <a:xfrm>
+            <a:off x="2771773" y="3660872"/>
+            <a:ext cx="2382725" cy="523220"/>
           </a:xfrm>
           <a:prstGeom prst="rect">
             <a:avLst/>
           </a:prstGeom>
           <a:noFill/>
-          <a:ln/>
-        </p:spPr>
-        <p:txBody>
-          <a:bodyPr wrap="square" rtlCol="0" anchor="ctr"/>
-          <a:lstStyle/>
-          <a:p>
-            <a:pPr marL="0" indent="0" algn="ctr">
-              <a:buNone/>
-            </a:pPr>
-            <a:r>
-              <a:rPr lang="en-US" sz="900" dirty="0">
-                <a:solidFill>
-                  <a:srgbClr val="5A5A5A"/>
-                </a:solidFill>
-                <a:latin typeface="Calibri" pitchFamily="34" charset="0"/>
-                <a:ea typeface="Calibri" pitchFamily="34" charset="-122"/>
-                <a:cs typeface="Calibri" pitchFamily="34" charset="-120"/>
-              </a:rPr>
-              <a:t>Frontier-based exploration illustration</a:t>
-            </a:r>
-            <a:endParaRPr lang="en-US" sz="900" dirty="0"/>
+        </p:spPr>
+        <p:txBody>
+          <a:bodyPr wrap="square" rtlCol="0">
+            <a:spAutoFit/>
+          </a:bodyPr>
+          <a:lstStyle/>
+          <a:p>
+            <a:pPr algn="ctr"/>
+            <a:r>
+              <a:rPr lang="en-US" sz="1400" dirty="0"/>
+              <a:t> The agent must decide where to move next </a:t>
+            </a:r>
+            <a:endParaRPr lang="it-IT" sz="1400" dirty="0"/>
           </a:p>
         </p:txBody>
       </p:sp>
@@ -4599,6 +5619,457 @@
       </p:grpSpPr>
       <p:sp>
         <p:nvSpPr>
+          <p:cNvPr id="3" name="Text 1"/>
+          <p:cNvSpPr/>
+          <p:nvPr/>
+        </p:nvSpPr>
+        <p:spPr>
+          <a:xfrm>
+            <a:off x="8412480" y="4846320"/>
+            <a:ext cx="457200" cy="201168"/>
+          </a:xfrm>
+          <a:prstGeom prst="rect">
+            <a:avLst/>
+          </a:prstGeom>
+          <a:noFill/>
+          <a:ln/>
+        </p:spPr>
+        <p:txBody>
+          <a:bodyPr wrap="square" rtlCol="0" anchor="ctr"/>
+          <a:lstStyle/>
+          <a:p>
+            <a:pPr marL="0" indent="0" algn="r">
+              <a:buNone/>
+            </a:pPr>
+            <a:r>
+              <a:rPr lang="en-US" sz="900" dirty="0">
+                <a:solidFill>
+                  <a:srgbClr val="BBBBBB"/>
+                </a:solidFill>
+                <a:latin typeface="Calibri" pitchFamily="34" charset="0"/>
+                <a:ea typeface="Calibri" pitchFamily="34" charset="-122"/>
+                <a:cs typeface="Calibri" pitchFamily="34" charset="-120"/>
+              </a:rPr>
+              <a:t>4 / 17</a:t>
+            </a:r>
+            <a:endParaRPr lang="en-US" sz="900" dirty="0"/>
+          </a:p>
+        </p:txBody>
+      </p:sp>
+      <p:sp>
+        <p:nvSpPr>
+          <p:cNvPr id="4" name="Shape 2"/>
+          <p:cNvSpPr/>
+          <p:nvPr/>
+        </p:nvSpPr>
+        <p:spPr>
+          <a:xfrm>
+            <a:off x="320040" y="237744"/>
+            <a:ext cx="64008" cy="457200"/>
+          </a:xfrm>
+          <a:prstGeom prst="rect">
+            <a:avLst/>
+          </a:prstGeom>
+          <a:solidFill>
+            <a:srgbClr val="C8472C"/>
+          </a:solidFill>
+          <a:ln w="12700">
+            <a:solidFill>
+              <a:srgbClr val="C8472C"/>
+            </a:solidFill>
+            <a:prstDash val="solid"/>
+          </a:ln>
+        </p:spPr>
+      </p:sp>
+      <p:sp>
+        <p:nvSpPr>
+          <p:cNvPr id="5" name="Text 3"/>
+          <p:cNvSpPr/>
+          <p:nvPr/>
+        </p:nvSpPr>
+        <p:spPr>
+          <a:xfrm>
+            <a:off x="502920" y="256032"/>
+            <a:ext cx="8229600" cy="457200"/>
+          </a:xfrm>
+          <a:prstGeom prst="rect">
+            <a:avLst/>
+          </a:prstGeom>
+          <a:noFill/>
+          <a:ln/>
+        </p:spPr>
+        <p:txBody>
+          <a:bodyPr wrap="square" lIns="0" tIns="0" rIns="0" bIns="0" rtlCol="0" anchor="ctr"/>
+          <a:lstStyle/>
+          <a:p>
+            <a:pPr marL="0" indent="0" algn="l">
+              <a:buNone/>
+            </a:pPr>
+            <a:r>
+              <a:rPr lang="en-US" sz="2600" b="1" dirty="0">
+                <a:solidFill>
+                  <a:srgbClr val="1A1A1A"/>
+                </a:solidFill>
+                <a:latin typeface="Calibri" pitchFamily="34" charset="0"/>
+                <a:ea typeface="Calibri" pitchFamily="34" charset="-122"/>
+                <a:cs typeface="Calibri" pitchFamily="34" charset="-120"/>
+              </a:rPr>
+              <a:t>Classical Approaches</a:t>
+            </a:r>
+            <a:endParaRPr lang="en-US" sz="2600" dirty="0"/>
+          </a:p>
+        </p:txBody>
+      </p:sp>
+      <p:sp>
+        <p:nvSpPr>
+          <p:cNvPr id="6" name="Shape 4"/>
+          <p:cNvSpPr/>
+          <p:nvPr/>
+        </p:nvSpPr>
+        <p:spPr>
+          <a:xfrm>
+            <a:off x="320040" y="777240"/>
+            <a:ext cx="8503920" cy="0"/>
+          </a:xfrm>
+          <a:prstGeom prst="line">
+            <a:avLst/>
+          </a:prstGeom>
+          <a:noFill/>
+          <a:ln w="19050">
+            <a:solidFill>
+              <a:srgbClr val="D6E4F0"/>
+            </a:solidFill>
+            <a:prstDash val="solid"/>
+          </a:ln>
+        </p:spPr>
+      </p:sp>
+      <p:sp>
+        <p:nvSpPr>
+          <p:cNvPr id="7" name="Text 5"/>
+          <p:cNvSpPr/>
+          <p:nvPr/>
+        </p:nvSpPr>
+        <p:spPr>
+          <a:xfrm>
+            <a:off x="365760" y="914400"/>
+            <a:ext cx="4663440" cy="3840480"/>
+          </a:xfrm>
+          <a:prstGeom prst="rect">
+            <a:avLst/>
+          </a:prstGeom>
+          <a:noFill/>
+          <a:ln/>
+        </p:spPr>
+        <p:txBody>
+          <a:bodyPr wrap="square" rtlCol="0" anchor="t"/>
+          <a:lstStyle/>
+          <a:p>
+            <a:pPr marL="190500" indent="-190500">
+              <a:spcAft>
+                <a:spcPts val="500"/>
+              </a:spcAft>
+              <a:buSzPct val="100000"/>
+              <a:buFontTx/>
+              <a:buChar char="•"/>
+            </a:pPr>
+            <a:r>
+              <a:rPr lang="en-US" dirty="0">
+                <a:solidFill>
+                  <a:srgbClr val="1A1A1A"/>
+                </a:solidFill>
+                <a:latin typeface="Calibri" pitchFamily="34" charset="0"/>
+                <a:ea typeface="Calibri" pitchFamily="34" charset="-122"/>
+                <a:cs typeface="Calibri" pitchFamily="34" charset="-120"/>
+              </a:rPr>
+              <a:t>Next Best View approach</a:t>
+            </a:r>
+            <a:br>
+              <a:rPr lang="en-US" dirty="0">
+                <a:solidFill>
+                  <a:srgbClr val="1A1A1A"/>
+                </a:solidFill>
+                <a:latin typeface="Calibri" pitchFamily="34" charset="0"/>
+                <a:ea typeface="Calibri" pitchFamily="34" charset="-122"/>
+                <a:cs typeface="Calibri" pitchFamily="34" charset="-120"/>
+              </a:rPr>
+            </a:br>
+            <a:r>
+              <a:rPr lang="it-IT" sz="1600" dirty="0" err="1">
+                <a:solidFill>
+                  <a:srgbClr val="1A1A1A"/>
+                </a:solidFill>
+                <a:latin typeface="Calibri" pitchFamily="34" charset="0"/>
+                <a:ea typeface="Calibri" pitchFamily="34" charset="-122"/>
+                <a:cs typeface="Calibri" pitchFamily="34" charset="-120"/>
+              </a:rPr>
+              <a:t>O</a:t>
+            </a:r>
+            <a:r>
+              <a:rPr lang="it-IT" sz="1600" dirty="0" err="1"/>
+              <a:t>ptimization</a:t>
+            </a:r>
+            <a:r>
+              <a:rPr lang="it-IT" sz="1600" dirty="0"/>
+              <a:t> </a:t>
+            </a:r>
+            <a:r>
+              <a:rPr lang="it-IT" sz="1600" dirty="0" err="1"/>
+              <a:t>problem</a:t>
+            </a:r>
+            <a:r>
+              <a:rPr lang="it-IT" sz="1600" dirty="0"/>
+              <a:t>, </a:t>
+            </a:r>
+            <a:r>
+              <a:rPr lang="it-IT" sz="1600" dirty="0" err="1"/>
+              <a:t>finding</a:t>
+            </a:r>
+            <a:r>
+              <a:rPr lang="it-IT" sz="1600" dirty="0"/>
+              <a:t> the </a:t>
+            </a:r>
+            <a:r>
+              <a:rPr lang="it-IT" sz="1600" dirty="0" err="1"/>
+              <a:t>next</a:t>
+            </a:r>
+            <a:r>
+              <a:rPr lang="it-IT" sz="1600" dirty="0"/>
+              <a:t> best position for the sensing </a:t>
+            </a:r>
+            <a:r>
+              <a:rPr lang="it-IT" sz="1600" dirty="0" err="1"/>
+              <a:t>apparatous</a:t>
+            </a:r>
+            <a:endParaRPr lang="it-IT" sz="1600" dirty="0"/>
+          </a:p>
+          <a:p>
+            <a:pPr>
+              <a:spcAft>
+                <a:spcPts val="500"/>
+              </a:spcAft>
+              <a:buSzPct val="100000"/>
+            </a:pPr>
+            <a:endParaRPr lang="en-US" dirty="0"/>
+          </a:p>
+          <a:p>
+            <a:pPr marL="190500" indent="-190500">
+              <a:spcAft>
+                <a:spcPts val="500"/>
+              </a:spcAft>
+              <a:buSzPct val="100000"/>
+              <a:buChar char="•"/>
+            </a:pPr>
+            <a:r>
+              <a:rPr lang="en-US" dirty="0">
+                <a:solidFill>
+                  <a:srgbClr val="1A1A1A"/>
+                </a:solidFill>
+                <a:latin typeface="Calibri" pitchFamily="34" charset="0"/>
+                <a:ea typeface="Calibri" pitchFamily="34" charset="-122"/>
+                <a:cs typeface="Calibri" pitchFamily="34" charset="-120"/>
+              </a:rPr>
+              <a:t>Frontier-Based Exploration (</a:t>
+            </a:r>
+            <a:r>
+              <a:rPr lang="it-IT" dirty="0" err="1"/>
+              <a:t>Yamauchi</a:t>
+            </a:r>
+            <a:r>
+              <a:rPr lang="it-IT" dirty="0"/>
+              <a:t> 1997</a:t>
+            </a:r>
+            <a:r>
+              <a:rPr lang="en-US" dirty="0">
+                <a:solidFill>
+                  <a:srgbClr val="1A1A1A"/>
+                </a:solidFill>
+                <a:latin typeface="Calibri" pitchFamily="34" charset="0"/>
+                <a:ea typeface="Calibri" pitchFamily="34" charset="-122"/>
+                <a:cs typeface="Calibri" pitchFamily="34" charset="-120"/>
+              </a:rPr>
+              <a:t>)</a:t>
+            </a:r>
+          </a:p>
+          <a:p>
+            <a:pPr marL="742950" lvl="1" indent="-285750">
+              <a:spcAft>
+                <a:spcPts val="500"/>
+              </a:spcAft>
+              <a:buSzPct val="70000"/>
+              <a:buFont typeface="Courier New" panose="02070309020205020404" pitchFamily="49" charset="0"/>
+              <a:buChar char="o"/>
+            </a:pPr>
+            <a:r>
+              <a:rPr lang="en-US" sz="1600" dirty="0"/>
+              <a:t>Frontiers: </a:t>
+            </a:r>
+            <a:r>
+              <a:rPr lang="en-US" sz="1600" dirty="0">
+                <a:solidFill>
+                  <a:srgbClr val="1A1A1A"/>
+                </a:solidFill>
+                <a:latin typeface="Calibri" pitchFamily="34" charset="0"/>
+                <a:ea typeface="Calibri" pitchFamily="34" charset="-122"/>
+                <a:cs typeface="Calibri" pitchFamily="34" charset="-120"/>
+              </a:rPr>
+              <a:t>boundary between explored (free) and unknown cells</a:t>
+            </a:r>
+          </a:p>
+          <a:p>
+            <a:pPr marL="742950" lvl="1" indent="-285750">
+              <a:spcAft>
+                <a:spcPts val="500"/>
+              </a:spcAft>
+              <a:buSzPct val="70000"/>
+              <a:buFont typeface="Courier New" panose="02070309020205020404" pitchFamily="49" charset="0"/>
+              <a:buChar char="o"/>
+            </a:pPr>
+            <a:r>
+              <a:rPr lang="en-US" sz="1600" dirty="0">
+                <a:solidFill>
+                  <a:srgbClr val="1A1A1A"/>
+                </a:solidFill>
+                <a:latin typeface="Calibri" pitchFamily="34" charset="0"/>
+                <a:ea typeface="Calibri" pitchFamily="34" charset="-122"/>
+                <a:cs typeface="Calibri" pitchFamily="34" charset="-120"/>
+              </a:rPr>
+              <a:t>Often grouped into cluster</a:t>
+            </a:r>
+          </a:p>
+          <a:p>
+            <a:pPr marL="742950" lvl="1" indent="-285750">
+              <a:spcAft>
+                <a:spcPts val="500"/>
+              </a:spcAft>
+              <a:buSzPct val="70000"/>
+              <a:buFont typeface="Courier New" panose="02070309020205020404" pitchFamily="49" charset="0"/>
+              <a:buChar char="o"/>
+            </a:pPr>
+            <a:r>
+              <a:rPr lang="en-US" sz="1600" dirty="0">
+                <a:solidFill>
+                  <a:srgbClr val="1A1A1A"/>
+                </a:solidFill>
+                <a:latin typeface="Calibri" pitchFamily="34" charset="0"/>
+                <a:ea typeface="Calibri" pitchFamily="34" charset="-122"/>
+                <a:cs typeface="Calibri" pitchFamily="34" charset="-120"/>
+              </a:rPr>
+              <a:t>The agent moves toward frontier clusters</a:t>
+            </a:r>
+          </a:p>
+          <a:p>
+            <a:pPr marL="742950" lvl="1" indent="-285750">
+              <a:spcAft>
+                <a:spcPts val="500"/>
+              </a:spcAft>
+              <a:buSzPct val="70000"/>
+              <a:buFont typeface="Courier New" panose="02070309020205020404" pitchFamily="49" charset="0"/>
+              <a:buChar char="o"/>
+            </a:pPr>
+            <a:r>
+              <a:rPr lang="en-US" sz="1600" dirty="0">
+                <a:solidFill>
+                  <a:srgbClr val="1A1A1A"/>
+                </a:solidFill>
+                <a:latin typeface="Calibri" pitchFamily="34" charset="0"/>
+                <a:ea typeface="Calibri" pitchFamily="34" charset="-122"/>
+                <a:cs typeface="Calibri" pitchFamily="34" charset="-120"/>
+              </a:rPr>
+              <a:t>Fixed heuristics policies to decide which frontier region</a:t>
+            </a:r>
+            <a:endParaRPr lang="en-US" sz="1600" dirty="0"/>
+          </a:p>
+        </p:txBody>
+      </p:sp>
+      <p:pic>
+        <p:nvPicPr>
+          <p:cNvPr id="8" name="Image 0" descr="/home/claude/assets/frontiers_picture.jpg"/>
+          <p:cNvPicPr>
+            <a:picLocks noChangeAspect="1"/>
+          </p:cNvPicPr>
+          <p:nvPr/>
+        </p:nvPicPr>
+        <p:blipFill>
+          <a:blip r:embed="rId3"/>
+          <a:srcRect/>
+          <a:stretch/>
+        </p:blipFill>
+        <p:spPr>
+          <a:xfrm>
+            <a:off x="5257800" y="914400"/>
+            <a:ext cx="3657600" cy="3246120"/>
+          </a:xfrm>
+          <a:prstGeom prst="rect">
+            <a:avLst/>
+          </a:prstGeom>
+        </p:spPr>
+      </p:pic>
+      <p:sp>
+        <p:nvSpPr>
+          <p:cNvPr id="9" name="Text 6"/>
+          <p:cNvSpPr/>
+          <p:nvPr/>
+        </p:nvSpPr>
+        <p:spPr>
+          <a:xfrm>
+            <a:off x="5257800" y="4160520"/>
+            <a:ext cx="3657600" cy="228600"/>
+          </a:xfrm>
+          <a:prstGeom prst="rect">
+            <a:avLst/>
+          </a:prstGeom>
+          <a:noFill/>
+          <a:ln/>
+        </p:spPr>
+        <p:txBody>
+          <a:bodyPr wrap="square" rtlCol="0" anchor="ctr"/>
+          <a:lstStyle/>
+          <a:p>
+            <a:pPr marL="0" indent="0" algn="ctr">
+              <a:buNone/>
+            </a:pPr>
+            <a:r>
+              <a:rPr lang="en-US" sz="900" dirty="0">
+                <a:solidFill>
+                  <a:srgbClr val="5A5A5A"/>
+                </a:solidFill>
+                <a:latin typeface="Calibri" pitchFamily="34" charset="0"/>
+                <a:ea typeface="Calibri" pitchFamily="34" charset="-122"/>
+                <a:cs typeface="Calibri" pitchFamily="34" charset="-120"/>
+              </a:rPr>
+              <a:t>Frontier-based exploration illustration</a:t>
+            </a:r>
+            <a:endParaRPr lang="en-US" sz="900" dirty="0"/>
+          </a:p>
+        </p:txBody>
+      </p:sp>
+    </p:spTree>
+  </p:cSld>
+  <p:clrMapOvr>
+    <a:masterClrMapping/>
+  </p:clrMapOvr>
+</p:sld>
+</file>
+
+<file path=ppt/slides/slide6.xml><?xml version="1.0" encoding="utf-8"?>
+<p:sld xmlns:a="http://schemas.openxmlformats.org/drawingml/2006/main" xmlns:r="http://schemas.openxmlformats.org/officeDocument/2006/relationships" xmlns:p="http://schemas.openxmlformats.org/presentationml/2006/main">
+  <p:cSld>
+    <p:spTree>
+      <p:nvGrpSpPr>
+        <p:cNvPr id="1" name=""/>
+        <p:cNvGrpSpPr/>
+        <p:nvPr/>
+      </p:nvGrpSpPr>
+      <p:grpSpPr>
+        <a:xfrm>
+          <a:off x="0" y="0"/>
+          <a:ext cx="0" cy="0"/>
+          <a:chOff x="0" y="0"/>
+          <a:chExt cx="0" cy="0"/>
+        </a:xfrm>
+      </p:grpSpPr>
+      <p:sp>
+        <p:nvSpPr>
           <p:cNvPr id="3" name="CasellaDiTesto 2">
             <a:extLst>
               <a:ext uri="{FF2B5EF4-FFF2-40B4-BE49-F238E27FC236}">
@@ -4746,7 +6217,7 @@
 </p:sld>
 </file>
 
-<file path=ppt/slides/slide6.xml><?xml version="1.0" encoding="utf-8"?>
+<file path=ppt/slides/slide7.xml><?xml version="1.0" encoding="utf-8"?>
 <p:sld xmlns:a="http://schemas.openxmlformats.org/drawingml/2006/main" xmlns:r="http://schemas.openxmlformats.org/officeDocument/2006/relationships" xmlns:p="http://schemas.openxmlformats.org/presentationml/2006/main">
   <p:cSld>
     <p:spTree>
@@ -4896,218 +6367,46 @@
           </a:p>
         </p:txBody>
       </p:sp>
+      <p:pic>
+        <p:nvPicPr>
+          <p:cNvPr id="4" name="Elemento grafico 3">
+            <a:extLst>
+              <a:ext uri="{FF2B5EF4-FFF2-40B4-BE49-F238E27FC236}">
+                <a16:creationId xmlns:a16="http://schemas.microsoft.com/office/drawing/2014/main" id="{3E816355-8EC3-9299-675D-00F44FE509CD}"/>
+              </a:ext>
+            </a:extLst>
+          </p:cNvPr>
+          <p:cNvPicPr>
+            <a:picLocks noChangeAspect="1"/>
+          </p:cNvPicPr>
+          <p:nvPr/>
+        </p:nvPicPr>
+        <p:blipFill>
+          <a:blip r:embed="rId2">
+            <a:extLst>
+              <a:ext uri="{96DAC541-7B7A-43D3-8B79-37D633B846F1}">
+                <asvg:svgBlip xmlns:asvg="http://schemas.microsoft.com/office/drawing/2016/SVG/main" r:embed="rId3"/>
+              </a:ext>
+            </a:extLst>
+          </a:blip>
+          <a:stretch>
+            <a:fillRect/>
+          </a:stretch>
+        </p:blipFill>
+        <p:spPr>
+          <a:xfrm>
+            <a:off x="1333500" y="1428750"/>
+            <a:ext cx="6477000" cy="2286000"/>
+          </a:xfrm>
+          <a:prstGeom prst="rect">
+            <a:avLst/>
+          </a:prstGeom>
+        </p:spPr>
+      </p:pic>
     </p:spTree>
     <p:extLst>
       <p:ext uri="{BB962C8B-B14F-4D97-AF65-F5344CB8AC3E}">
         <p14:creationId xmlns:p14="http://schemas.microsoft.com/office/powerpoint/2010/main" val="2759301547"/>
-      </p:ext>
-    </p:extLst>
-  </p:cSld>
-  <p:clrMapOvr>
-    <a:masterClrMapping/>
-  </p:clrMapOvr>
-</p:sld>
-</file>
-
-<file path=ppt/slides/slide7.xml><?xml version="1.0" encoding="utf-8"?>
-<p:sld xmlns:a="http://schemas.openxmlformats.org/drawingml/2006/main" xmlns:r="http://schemas.openxmlformats.org/officeDocument/2006/relationships" xmlns:p="http://schemas.openxmlformats.org/presentationml/2006/main">
-  <p:cSld>
-    <p:spTree>
-      <p:nvGrpSpPr>
-        <p:cNvPr id="1" name=""/>
-        <p:cNvGrpSpPr/>
-        <p:nvPr/>
-      </p:nvGrpSpPr>
-      <p:grpSpPr>
-        <a:xfrm>
-          <a:off x="0" y="0"/>
-          <a:ext cx="0" cy="0"/>
-          <a:chOff x="0" y="0"/>
-          <a:chExt cx="0" cy="0"/>
-        </a:xfrm>
-      </p:grpSpPr>
-      <p:sp>
-        <p:nvSpPr>
-          <p:cNvPr id="3" name="CasellaDiTesto 2">
-            <a:extLst>
-              <a:ext uri="{FF2B5EF4-FFF2-40B4-BE49-F238E27FC236}">
-                <a16:creationId xmlns:a16="http://schemas.microsoft.com/office/drawing/2014/main" id="{A2573F97-AE10-444A-9306-BFF3D7DCA88C}"/>
-              </a:ext>
-            </a:extLst>
-          </p:cNvPr>
-          <p:cNvSpPr txBox="1"/>
-          <p:nvPr/>
-        </p:nvSpPr>
-        <p:spPr>
-          <a:xfrm>
-            <a:off x="508000" y="254000"/>
-            <a:ext cx="8229600" cy="457200"/>
-          </a:xfrm>
-          <a:prstGeom prst="rect">
-            <a:avLst/>
-          </a:prstGeom>
-          <a:noFill/>
-        </p:spPr>
-        <p:txBody>
-          <a:bodyPr vertOverflow="overflow" vert="horz" wrap="square" rtlCol="0" anchor="ctr" anchorCtr="0">
-            <a:noAutofit/>
-          </a:bodyPr>
-          <a:lstStyle/>
-          <a:p>
-            <a:pPr algn="l"/>
-            <a:r>
-              <a:rPr lang="it-IT" sz="2600" b="1" dirty="0">
-                <a:solidFill>
-                  <a:srgbClr val="1A1A1A"/>
-                </a:solidFill>
-                <a:latin typeface="Calibri"/>
-                <a:ea typeface="Calibri"/>
-                <a:cs typeface="Calibri"/>
-              </a:rPr>
-              <a:t>Slide Title</a:t>
-            </a:r>
-          </a:p>
-        </p:txBody>
-      </p:sp>
-      <p:sp>
-        <p:nvSpPr>
-          <p:cNvPr id="5" name="CasellaDiTesto 4">
-            <a:extLst>
-              <a:ext uri="{FF2B5EF4-FFF2-40B4-BE49-F238E27FC236}">
-                <a16:creationId xmlns:a16="http://schemas.microsoft.com/office/drawing/2014/main" id="{FD0ECAD6-FF98-4193-979E-566FFED4B5AD}"/>
-              </a:ext>
-            </a:extLst>
-          </p:cNvPr>
-          <p:cNvSpPr txBox="1"/>
-          <p:nvPr/>
-        </p:nvSpPr>
-        <p:spPr>
-          <a:xfrm>
-            <a:off x="368300" y="914400"/>
-            <a:ext cx="4089400" cy="3556000"/>
-          </a:xfrm>
-          <a:prstGeom prst="rect">
-            <a:avLst/>
-          </a:prstGeom>
-          <a:noFill/>
-        </p:spPr>
-        <p:txBody>
-          <a:bodyPr vertOverflow="overflow" vert="horz" wrap="square" rtlCol="0" anchor="t">
-            <a:noAutofit/>
-          </a:bodyPr>
-          <a:lstStyle/>
-          <a:p>
-            <a:pPr algn="l"/>
-            <a:r>
-              <a:rPr lang="it-IT" sz="1600" dirty="0">
-                <a:solidFill>
-                  <a:srgbClr val="333333"/>
-                </a:solidFill>
-                <a:latin typeface="Calibri"/>
-                <a:ea typeface="Calibri"/>
-                <a:cs typeface="Calibri"/>
-              </a:rPr>
-              <a:t>Left </a:t>
-            </a:r>
-            <a:r>
-              <a:rPr lang="it-IT" sz="1600" dirty="0" err="1">
-                <a:solidFill>
-                  <a:srgbClr val="333333"/>
-                </a:solidFill>
-                <a:latin typeface="Calibri"/>
-                <a:ea typeface="Calibri"/>
-                <a:cs typeface="Calibri"/>
-              </a:rPr>
-              <a:t>content</a:t>
-            </a:r>
-            <a:endParaRPr lang="it-IT" sz="1600" dirty="0">
-              <a:solidFill>
-                <a:srgbClr val="333333"/>
-              </a:solidFill>
-              <a:latin typeface="Calibri"/>
-              <a:ea typeface="Calibri"/>
-              <a:cs typeface="Calibri"/>
-            </a:endParaRPr>
-          </a:p>
-        </p:txBody>
-      </p:sp>
-      <p:sp>
-        <p:nvSpPr>
-          <p:cNvPr id="6" name="CasellaDiTesto 5">
-            <a:extLst>
-              <a:ext uri="{FF2B5EF4-FFF2-40B4-BE49-F238E27FC236}">
-                <a16:creationId xmlns:a16="http://schemas.microsoft.com/office/drawing/2014/main" id="{34CBD74A-88E8-4A7F-BF8C-396FF18C5FD4}"/>
-              </a:ext>
-            </a:extLst>
-          </p:cNvPr>
-          <p:cNvSpPr txBox="1"/>
-          <p:nvPr/>
-        </p:nvSpPr>
-        <p:spPr>
-          <a:xfrm>
-            <a:off x="4699000" y="914400"/>
-            <a:ext cx="4089400" cy="3556000"/>
-          </a:xfrm>
-          <a:prstGeom prst="rect">
-            <a:avLst/>
-          </a:prstGeom>
-          <a:noFill/>
-        </p:spPr>
-        <p:txBody>
-          <a:bodyPr vertOverflow="overflow" vert="horz" wrap="square" rtlCol="0" anchor="t">
-            <a:noAutofit/>
-          </a:bodyPr>
-          <a:lstStyle/>
-          <a:p>
-            <a:pPr algn="l"/>
-            <a:r>
-              <a:rPr lang="it-IT" sz="1600" dirty="0" err="1">
-                <a:solidFill>
-                  <a:srgbClr val="333333"/>
-                </a:solidFill>
-                <a:latin typeface="Calibri"/>
-                <a:ea typeface="Calibri"/>
-                <a:cs typeface="Calibri"/>
-              </a:rPr>
-              <a:t>Right</a:t>
-            </a:r>
-            <a:r>
-              <a:rPr lang="it-IT" sz="1600" dirty="0">
-                <a:solidFill>
-                  <a:srgbClr val="333333"/>
-                </a:solidFill>
-                <a:latin typeface="Calibri"/>
-                <a:ea typeface="Calibri"/>
-                <a:cs typeface="Calibri"/>
-              </a:rPr>
-              <a:t> </a:t>
-            </a:r>
-            <a:r>
-              <a:rPr lang="it-IT" sz="1600" dirty="0" err="1">
-                <a:solidFill>
-                  <a:srgbClr val="333333"/>
-                </a:solidFill>
-                <a:latin typeface="Calibri"/>
-                <a:ea typeface="Calibri"/>
-                <a:cs typeface="Calibri"/>
-              </a:rPr>
-              <a:t>content</a:t>
-            </a:r>
-            <a:endParaRPr lang="it-IT" sz="1600" dirty="0">
-              <a:solidFill>
-                <a:srgbClr val="333333"/>
-              </a:solidFill>
-              <a:latin typeface="Calibri"/>
-              <a:ea typeface="Calibri"/>
-              <a:cs typeface="Calibri"/>
-            </a:endParaRPr>
-          </a:p>
-        </p:txBody>
-      </p:sp>
-    </p:spTree>
-    <p:extLst>
-      <p:ext uri="{BB962C8B-B14F-4D97-AF65-F5344CB8AC3E}">
-        <p14:creationId xmlns:p14="http://schemas.microsoft.com/office/powerpoint/2010/main" val="1959701455"/>
       </p:ext>
     </p:extLst>
   </p:cSld>
@@ -5136,96 +6435,546 @@
       </p:grpSpPr>
       <p:sp>
         <p:nvSpPr>
-          <p:cNvPr id="2" name="CasellaDiTesto 1">
+          <p:cNvPr id="3" name="Text 1"/>
+          <p:cNvSpPr/>
+          <p:nvPr/>
+        </p:nvSpPr>
+        <p:spPr>
+          <a:xfrm>
+            <a:off x="8412480" y="4846320"/>
+            <a:ext cx="457200" cy="201168"/>
+          </a:xfrm>
+          <a:prstGeom prst="rect">
+            <a:avLst/>
+          </a:prstGeom>
+          <a:noFill/>
+          <a:ln/>
+        </p:spPr>
+        <p:txBody>
+          <a:bodyPr wrap="square" rtlCol="0" anchor="ctr"/>
+          <a:lstStyle/>
+          <a:p>
+            <a:pPr marL="0" indent="0" algn="r">
+              <a:buNone/>
+            </a:pPr>
+            <a:r>
+              <a:rPr lang="en-US" sz="900" dirty="0">
+                <a:solidFill>
+                  <a:srgbClr val="BBBBBB"/>
+                </a:solidFill>
+                <a:latin typeface="Calibri" pitchFamily="34" charset="0"/>
+                <a:ea typeface="Calibri" pitchFamily="34" charset="-122"/>
+                <a:cs typeface="Calibri" pitchFamily="34" charset="-120"/>
+              </a:rPr>
+              <a:t>7 / 17</a:t>
+            </a:r>
+            <a:endParaRPr lang="en-US" sz="900" dirty="0"/>
+          </a:p>
+        </p:txBody>
+      </p:sp>
+      <p:sp>
+        <p:nvSpPr>
+          <p:cNvPr id="4" name="Shape 2"/>
+          <p:cNvSpPr/>
+          <p:nvPr/>
+        </p:nvSpPr>
+        <p:spPr>
+          <a:xfrm>
+            <a:off x="320040" y="237744"/>
+            <a:ext cx="64008" cy="457200"/>
+          </a:xfrm>
+          <a:prstGeom prst="rect">
+            <a:avLst/>
+          </a:prstGeom>
+          <a:solidFill>
+            <a:srgbClr val="C8472C"/>
+          </a:solidFill>
+          <a:ln w="12700">
+            <a:solidFill>
+              <a:srgbClr val="C8472C"/>
+            </a:solidFill>
+            <a:prstDash val="solid"/>
+          </a:ln>
+        </p:spPr>
+      </p:sp>
+      <p:sp>
+        <p:nvSpPr>
+          <p:cNvPr id="5" name="Text 3"/>
+          <p:cNvSpPr/>
+          <p:nvPr/>
+        </p:nvSpPr>
+        <p:spPr>
+          <a:xfrm>
+            <a:off x="502920" y="256032"/>
+            <a:ext cx="8229600" cy="457200"/>
+          </a:xfrm>
+          <a:prstGeom prst="rect">
+            <a:avLst/>
+          </a:prstGeom>
+          <a:noFill/>
+          <a:ln/>
+        </p:spPr>
+        <p:txBody>
+          <a:bodyPr wrap="square" lIns="0" tIns="0" rIns="0" bIns="0" rtlCol="0" anchor="ctr"/>
+          <a:lstStyle/>
+          <a:p>
+            <a:pPr marL="0" indent="0" algn="l">
+              <a:buNone/>
+            </a:pPr>
+            <a:r>
+              <a:rPr lang="en-US" sz="2600" b="1" dirty="0">
+                <a:solidFill>
+                  <a:srgbClr val="1A1A1A"/>
+                </a:solidFill>
+                <a:latin typeface="Calibri" pitchFamily="34" charset="0"/>
+                <a:ea typeface="Calibri" pitchFamily="34" charset="-122"/>
+                <a:cs typeface="Calibri" pitchFamily="34" charset="-120"/>
+              </a:rPr>
+              <a:t>System Architecture</a:t>
+            </a:r>
+            <a:endParaRPr lang="en-US" sz="2600" dirty="0"/>
+          </a:p>
+        </p:txBody>
+      </p:sp>
+      <p:sp>
+        <p:nvSpPr>
+          <p:cNvPr id="6" name="Shape 4"/>
+          <p:cNvSpPr/>
+          <p:nvPr/>
+        </p:nvSpPr>
+        <p:spPr>
+          <a:xfrm>
+            <a:off x="320040" y="777240"/>
+            <a:ext cx="8503920" cy="0"/>
+          </a:xfrm>
+          <a:prstGeom prst="line">
+            <a:avLst/>
+          </a:prstGeom>
+          <a:noFill/>
+          <a:ln w="19050">
+            <a:solidFill>
+              <a:srgbClr val="D6E4F0"/>
+            </a:solidFill>
+            <a:prstDash val="solid"/>
+          </a:ln>
+        </p:spPr>
+      </p:sp>
+      <p:sp>
+        <p:nvSpPr>
+          <p:cNvPr id="7" name="Text 5"/>
+          <p:cNvSpPr/>
+          <p:nvPr/>
+        </p:nvSpPr>
+        <p:spPr>
+          <a:xfrm>
+            <a:off x="457200" y="868680"/>
+            <a:ext cx="8229600" cy="320040"/>
+          </a:xfrm>
+          <a:prstGeom prst="rect">
+            <a:avLst/>
+          </a:prstGeom>
+          <a:noFill/>
+          <a:ln/>
+        </p:spPr>
+        <p:txBody>
+          <a:bodyPr wrap="square" rtlCol="0" anchor="ctr"/>
+          <a:lstStyle/>
+          <a:p>
+            <a:pPr marL="0" indent="0">
+              <a:buNone/>
+            </a:pPr>
+            <a:r>
+              <a:rPr lang="en-US" i="1" dirty="0"/>
+              <a:t>Hybrid modular architecture</a:t>
+            </a:r>
+          </a:p>
+        </p:txBody>
+      </p:sp>
+      <p:sp>
+        <p:nvSpPr>
+          <p:cNvPr id="24" name="Shape 22"/>
+          <p:cNvSpPr/>
+          <p:nvPr/>
+        </p:nvSpPr>
+        <p:spPr>
+          <a:xfrm>
+            <a:off x="365760" y="3200408"/>
+            <a:ext cx="3977640" cy="1303020"/>
+          </a:xfrm>
+          <a:prstGeom prst="rect">
+            <a:avLst/>
+          </a:prstGeom>
+          <a:solidFill>
+            <a:srgbClr val="F5F7FA"/>
+          </a:solidFill>
+          <a:ln w="12700">
+            <a:solidFill>
+              <a:srgbClr val="D6E4F0"/>
+            </a:solidFill>
+            <a:prstDash val="solid"/>
+          </a:ln>
+        </p:spPr>
+      </p:sp>
+      <p:sp>
+        <p:nvSpPr>
+          <p:cNvPr id="25" name="Text 23"/>
+          <p:cNvSpPr/>
+          <p:nvPr/>
+        </p:nvSpPr>
+        <p:spPr>
+          <a:xfrm>
+            <a:off x="502920" y="3273560"/>
+            <a:ext cx="3749040" cy="274320"/>
+          </a:xfrm>
+          <a:prstGeom prst="rect">
+            <a:avLst/>
+          </a:prstGeom>
+          <a:noFill/>
+          <a:ln/>
+        </p:spPr>
+        <p:txBody>
+          <a:bodyPr wrap="square" rtlCol="0" anchor="ctr"/>
+          <a:lstStyle/>
+          <a:p>
+            <a:pPr marL="0" indent="0">
+              <a:buNone/>
+            </a:pPr>
+            <a:r>
+              <a:rPr lang="en-US" sz="1300" b="1" dirty="0">
+                <a:solidFill>
+                  <a:srgbClr val="1A2E4A"/>
+                </a:solidFill>
+                <a:latin typeface="Calibri" pitchFamily="34" charset="0"/>
+                <a:ea typeface="Calibri" pitchFamily="34" charset="-122"/>
+                <a:cs typeface="Calibri" pitchFamily="34" charset="-120"/>
+              </a:rPr>
+              <a:t>Classic analytical components</a:t>
+            </a:r>
+            <a:endParaRPr lang="en-US" sz="1300" dirty="0"/>
+          </a:p>
+        </p:txBody>
+      </p:sp>
+      <p:sp>
+        <p:nvSpPr>
+          <p:cNvPr id="26" name="Text 24"/>
+          <p:cNvSpPr/>
+          <p:nvPr/>
+        </p:nvSpPr>
+        <p:spPr>
+          <a:xfrm>
+            <a:off x="502920" y="3566168"/>
+            <a:ext cx="3749040" cy="1280160"/>
+          </a:xfrm>
+          <a:prstGeom prst="rect">
+            <a:avLst/>
+          </a:prstGeom>
+          <a:noFill/>
+          <a:ln/>
+        </p:spPr>
+        <p:txBody>
+          <a:bodyPr wrap="square" rtlCol="0" anchor="t"/>
+          <a:lstStyle/>
+          <a:p>
+            <a:pPr marL="190500" indent="-190500">
+              <a:spcAft>
+                <a:spcPts val="500"/>
+              </a:spcAft>
+              <a:buSzPct val="100000"/>
+              <a:buChar char="•"/>
+            </a:pPr>
+            <a:r>
+              <a:rPr lang="en-US" sz="1300" dirty="0">
+                <a:solidFill>
+                  <a:srgbClr val="1A1A1A"/>
+                </a:solidFill>
+                <a:latin typeface="Calibri" pitchFamily="34" charset="0"/>
+                <a:ea typeface="Calibri" pitchFamily="34" charset="-122"/>
+                <a:cs typeface="Calibri" pitchFamily="34" charset="-120"/>
+              </a:rPr>
+              <a:t>Mapping</a:t>
+            </a:r>
+            <a:endParaRPr lang="en-US" sz="1300" dirty="0"/>
+          </a:p>
+          <a:p>
+            <a:pPr marL="190500" indent="-190500">
+              <a:spcAft>
+                <a:spcPts val="500"/>
+              </a:spcAft>
+              <a:buSzPct val="100000"/>
+              <a:buChar char="•"/>
+            </a:pPr>
+            <a:r>
+              <a:rPr lang="en-US" sz="1300" dirty="0"/>
+              <a:t>Frontier detection</a:t>
+            </a:r>
+          </a:p>
+          <a:p>
+            <a:pPr marL="190500" indent="-190500">
+              <a:spcAft>
+                <a:spcPts val="500"/>
+              </a:spcAft>
+              <a:buSzPct val="100000"/>
+              <a:buChar char="•"/>
+            </a:pPr>
+            <a:r>
+              <a:rPr lang="en-US" sz="1300" dirty="0"/>
+              <a:t>Low level navigation</a:t>
+            </a:r>
+          </a:p>
+        </p:txBody>
+      </p:sp>
+      <p:sp>
+        <p:nvSpPr>
+          <p:cNvPr id="27" name="Shape 25"/>
+          <p:cNvSpPr/>
+          <p:nvPr/>
+        </p:nvSpPr>
+        <p:spPr>
+          <a:xfrm>
+            <a:off x="4800600" y="3200408"/>
+            <a:ext cx="3977640" cy="1303020"/>
+          </a:xfrm>
+          <a:prstGeom prst="rect">
+            <a:avLst/>
+          </a:prstGeom>
+          <a:solidFill>
+            <a:srgbClr val="F5F7FA"/>
+          </a:solidFill>
+          <a:ln w="12700">
+            <a:solidFill>
+              <a:srgbClr val="D6E4F0"/>
+            </a:solidFill>
+            <a:prstDash val="solid"/>
+          </a:ln>
+        </p:spPr>
+      </p:sp>
+      <p:sp>
+        <p:nvSpPr>
+          <p:cNvPr id="28" name="Text 26"/>
+          <p:cNvSpPr/>
+          <p:nvPr/>
+        </p:nvSpPr>
+        <p:spPr>
+          <a:xfrm>
+            <a:off x="4937760" y="3273560"/>
+            <a:ext cx="3749040" cy="274320"/>
+          </a:xfrm>
+          <a:prstGeom prst="rect">
+            <a:avLst/>
+          </a:prstGeom>
+          <a:noFill/>
+          <a:ln/>
+        </p:spPr>
+        <p:txBody>
+          <a:bodyPr wrap="square" rtlCol="0" anchor="ctr"/>
+          <a:lstStyle/>
+          <a:p>
+            <a:pPr marL="0" indent="0">
+              <a:buNone/>
+            </a:pPr>
+            <a:r>
+              <a:rPr lang="en-US" sz="1300" b="1" dirty="0">
+                <a:solidFill>
+                  <a:srgbClr val="C8472C"/>
+                </a:solidFill>
+                <a:latin typeface="Calibri" pitchFamily="34" charset="0"/>
+                <a:ea typeface="Calibri" pitchFamily="34" charset="-122"/>
+                <a:cs typeface="Calibri" pitchFamily="34" charset="-120"/>
+              </a:rPr>
+              <a:t>DRL component</a:t>
+            </a:r>
+            <a:endParaRPr lang="en-US" sz="1300" dirty="0"/>
+          </a:p>
+        </p:txBody>
+      </p:sp>
+      <p:sp>
+        <p:nvSpPr>
+          <p:cNvPr id="29" name="Text 27"/>
+          <p:cNvSpPr/>
+          <p:nvPr/>
+        </p:nvSpPr>
+        <p:spPr>
+          <a:xfrm>
+            <a:off x="4937760" y="3566168"/>
+            <a:ext cx="3749040" cy="324604"/>
+          </a:xfrm>
+          <a:prstGeom prst="rect">
+            <a:avLst/>
+          </a:prstGeom>
+          <a:noFill/>
+          <a:ln/>
+        </p:spPr>
+        <p:txBody>
+          <a:bodyPr wrap="square" rtlCol="0" anchor="t"/>
+          <a:lstStyle/>
+          <a:p>
+            <a:pPr marL="190500" indent="-190500">
+              <a:spcAft>
+                <a:spcPts val="500"/>
+              </a:spcAft>
+              <a:buSzPct val="100000"/>
+              <a:buFontTx/>
+              <a:buChar char="•"/>
+            </a:pPr>
+            <a:r>
+              <a:rPr lang="en-US" sz="1300" dirty="0">
+                <a:solidFill>
+                  <a:srgbClr val="1A1A1A"/>
+                </a:solidFill>
+                <a:latin typeface="Calibri" pitchFamily="34" charset="0"/>
+                <a:ea typeface="Calibri" pitchFamily="34" charset="-122"/>
+                <a:cs typeface="Calibri" pitchFamily="34" charset="-120"/>
+              </a:rPr>
+              <a:t>Decision making module</a:t>
+            </a:r>
+            <a:endParaRPr lang="en-US" sz="1300" dirty="0"/>
+          </a:p>
+          <a:p>
+            <a:pPr>
+              <a:spcAft>
+                <a:spcPts val="500"/>
+              </a:spcAft>
+              <a:buSzPct val="100000"/>
+            </a:pPr>
+            <a:endParaRPr lang="en-US" sz="1300" dirty="0"/>
+          </a:p>
+        </p:txBody>
+      </p:sp>
+      <p:pic>
+        <p:nvPicPr>
+          <p:cNvPr id="30" name="Elemento grafico 29">
             <a:extLst>
               <a:ext uri="{FF2B5EF4-FFF2-40B4-BE49-F238E27FC236}">
-                <a16:creationId xmlns:a16="http://schemas.microsoft.com/office/drawing/2014/main" id="{62960C30-3286-4C2A-B688-DEAE83675C09}"/>
+                <a16:creationId xmlns:a16="http://schemas.microsoft.com/office/drawing/2014/main" id="{62CBA648-A5C8-375B-CC90-4A922032D47D}"/>
               </a:ext>
             </a:extLst>
           </p:cNvPr>
-          <p:cNvSpPr txBox="1"/>
+          <p:cNvPicPr>
+            <a:picLocks noChangeAspect="1"/>
+          </p:cNvPicPr>
           <p:nvPr/>
-        </p:nvSpPr>
-        <p:spPr>
-          <a:xfrm>
-            <a:off x="914400" y="1778000"/>
-            <a:ext cx="7315200" cy="762000"/>
+        </p:nvPicPr>
+        <p:blipFill>
+          <a:blip r:embed="rId3">
+            <a:extLst>
+              <a:ext uri="{96DAC541-7B7A-43D3-8B79-37D633B846F1}">
+                <asvg:svgBlip xmlns:asvg="http://schemas.microsoft.com/office/drawing/2016/SVG/main" r:embed="rId4"/>
+              </a:ext>
+            </a:extLst>
+          </a:blip>
+          <a:stretch>
+            <a:fillRect/>
+          </a:stretch>
+        </p:blipFill>
+        <p:spPr>
+          <a:xfrm>
+            <a:off x="1333500" y="1164436"/>
+            <a:ext cx="6477000" cy="2286000"/>
+          </a:xfrm>
+          <a:prstGeom prst="rect">
+            <a:avLst/>
+          </a:prstGeom>
+        </p:spPr>
+      </p:pic>
+      <p:sp>
+        <p:nvSpPr>
+          <p:cNvPr id="31" name="Text 27">
+            <a:extLst>
+              <a:ext uri="{FF2B5EF4-FFF2-40B4-BE49-F238E27FC236}">
+                <a16:creationId xmlns:a16="http://schemas.microsoft.com/office/drawing/2014/main" id="{B0EE0268-342E-3264-CDCE-7421F2A88300}"/>
+              </a:ext>
+            </a:extLst>
+          </p:cNvPr>
+          <p:cNvSpPr/>
+          <p:nvPr/>
+        </p:nvSpPr>
+        <p:spPr>
+          <a:xfrm>
+            <a:off x="5125536" y="4025666"/>
+            <a:ext cx="2415540" cy="324604"/>
           </a:xfrm>
           <a:prstGeom prst="rect">
             <a:avLst/>
           </a:prstGeom>
           <a:noFill/>
-        </p:spPr>
-        <p:txBody>
-          <a:bodyPr vertOverflow="overflow" vert="horz" wrap="square" rtlCol="0" anchor="ctr" anchorCtr="0">
-            <a:noAutofit/>
-          </a:bodyPr>
-          <a:lstStyle/>
-          <a:p>
-            <a:pPr algn="l"/>
-            <a:r>
-              <a:rPr lang="it-IT" sz="3600" b="1">
+          <a:ln/>
+        </p:spPr>
+        <p:txBody>
+          <a:bodyPr wrap="square" rtlCol="0" anchor="t"/>
+          <a:lstStyle/>
+          <a:p>
+            <a:pPr>
+              <a:spcAft>
+                <a:spcPts val="500"/>
+              </a:spcAft>
+              <a:buSzPct val="100000"/>
+            </a:pPr>
+            <a:r>
+              <a:rPr lang="en-US" sz="1300" dirty="0">
                 <a:solidFill>
                   <a:srgbClr val="1A1A1A"/>
                 </a:solidFill>
-                <a:latin typeface="Calibri"/>
-                <a:ea typeface="Calibri"/>
-                <a:cs typeface="Calibri"/>
-              </a:rPr>
-              <a:t>Section Title</a:t>
-            </a:r>
-          </a:p>
-        </p:txBody>
-      </p:sp>
-      <p:sp>
-        <p:nvSpPr>
-          <p:cNvPr id="3" name="CasellaDiTesto 2">
+                <a:latin typeface="Calibri" pitchFamily="34" charset="0"/>
+                <a:ea typeface="Calibri" pitchFamily="34" charset="-122"/>
+                <a:cs typeface="Calibri" pitchFamily="34" charset="-120"/>
+              </a:rPr>
+              <a:t>Selection of the target position</a:t>
+            </a:r>
+            <a:endParaRPr lang="en-US" sz="1300" dirty="0"/>
+          </a:p>
+          <a:p>
+            <a:pPr>
+              <a:spcAft>
+                <a:spcPts val="500"/>
+              </a:spcAft>
+              <a:buSzPct val="100000"/>
+            </a:pPr>
+            <a:endParaRPr lang="en-US" sz="1300" dirty="0"/>
+          </a:p>
+        </p:txBody>
+      </p:sp>
+      <p:cxnSp>
+        <p:nvCxnSpPr>
+          <p:cNvPr id="32" name="Connettore 2 31">
             <a:extLst>
               <a:ext uri="{FF2B5EF4-FFF2-40B4-BE49-F238E27FC236}">
-                <a16:creationId xmlns:a16="http://schemas.microsoft.com/office/drawing/2014/main" id="{0AEED710-32FB-4CE7-BC12-02102C1D2BFF}"/>
+                <a16:creationId xmlns:a16="http://schemas.microsoft.com/office/drawing/2014/main" id="{C6BF7B3B-C3AE-5F9F-9C63-3B09C46A5C8A}"/>
               </a:ext>
             </a:extLst>
           </p:cNvPr>
-          <p:cNvSpPr txBox="1"/>
+          <p:cNvCxnSpPr>
+            <a:cxnSpLocks/>
+          </p:cNvCxnSpPr>
           <p:nvPr/>
-        </p:nvSpPr>
-        <p:spPr>
-          <a:xfrm>
-            <a:off x="1524000" y="2667000"/>
-            <a:ext cx="6096000" cy="381000"/>
-          </a:xfrm>
-          <a:prstGeom prst="rect">
-            <a:avLst/>
-          </a:prstGeom>
-          <a:noFill/>
-        </p:spPr>
-        <p:txBody>
-          <a:bodyPr vertOverflow="overflow" vert="horz" wrap="square" rtlCol="0" anchor="t">
-            <a:noAutofit/>
-          </a:bodyPr>
-          <a:lstStyle/>
-          <a:p>
-            <a:pPr algn="l"/>
-            <a:r>
-              <a:rPr lang="it-IT">
-                <a:solidFill>
-                  <a:srgbClr val="666666"/>
-                </a:solidFill>
-                <a:latin typeface="Calibri"/>
-                <a:ea typeface="Calibri"/>
-                <a:cs typeface="Calibri"/>
-              </a:rPr>
-              <a:t>Section subtitle or description</a:t>
-            </a:r>
-          </a:p>
-        </p:txBody>
-      </p:sp>
+        </p:nvCxnSpPr>
+        <p:spPr>
+          <a:xfrm>
+            <a:off x="6204288" y="3872063"/>
+            <a:ext cx="0" cy="188420"/>
+          </a:xfrm>
+          <a:prstGeom prst="straightConnector1">
+            <a:avLst/>
+          </a:prstGeom>
+          <a:ln w="28575" cap="flat">
+            <a:tailEnd type="triangle"/>
+          </a:ln>
+        </p:spPr>
+        <p:style>
+          <a:lnRef idx="1">
+            <a:schemeClr val="accent1"/>
+          </a:lnRef>
+          <a:fillRef idx="0">
+            <a:schemeClr val="accent1"/>
+          </a:fillRef>
+          <a:effectRef idx="0">
+            <a:schemeClr val="accent1"/>
+          </a:effectRef>
+          <a:fontRef idx="minor">
+            <a:schemeClr val="tx1"/>
+          </a:fontRef>
+        </p:style>
+      </p:cxnSp>
     </p:spTree>
-    <p:extLst>
-      <p:ext uri="{BB962C8B-B14F-4D97-AF65-F5344CB8AC3E}">
-        <p14:creationId xmlns:p14="http://schemas.microsoft.com/office/powerpoint/2010/main" val="2358288740"/>
-      </p:ext>
-    </p:extLst>
   </p:cSld>
   <p:clrMapOvr>
     <a:masterClrMapping/>
@@ -5255,7 +7004,7 @@
           <p:cNvPr id="3" name="CasellaDiTesto 2">
             <a:extLst>
               <a:ext uri="{FF2B5EF4-FFF2-40B4-BE49-F238E27FC236}">
-                <a16:creationId xmlns:a16="http://schemas.microsoft.com/office/drawing/2014/main" id="{D71D1CBA-50C0-4D94-BDFD-CE3626AAB801}"/>
+                <a16:creationId xmlns:a16="http://schemas.microsoft.com/office/drawing/2014/main" id="{A2573F97-AE10-444A-9306-BFF3D7DCA88C}"/>
               </a:ext>
             </a:extLst>
           </p:cNvPr>
@@ -5288,123 +7037,17 @@
                 <a:ea typeface="Calibri"/>
                 <a:cs typeface="Calibri"/>
               </a:rPr>
-              <a:t>Slide Title</a:t>
-            </a:r>
-          </a:p>
-        </p:txBody>
-      </p:sp>
-      <p:sp>
-        <p:nvSpPr>
-          <p:cNvPr id="5" name="CasellaDiTesto 4">
+              <a:t>The Simulator</a:t>
+            </a:r>
+          </a:p>
+        </p:txBody>
+      </p:sp>
+      <p:sp>
+        <p:nvSpPr>
+          <p:cNvPr id="4" name="Text 5">
             <a:extLst>
               <a:ext uri="{FF2B5EF4-FFF2-40B4-BE49-F238E27FC236}">
-                <a16:creationId xmlns:a16="http://schemas.microsoft.com/office/drawing/2014/main" id="{D22DD014-55CD-4034-B01B-03DB851B6C4D}"/>
-              </a:ext>
-            </a:extLst>
-          </p:cNvPr>
-          <p:cNvSpPr txBox="1"/>
-          <p:nvPr/>
-        </p:nvSpPr>
-        <p:spPr>
-          <a:xfrm>
-            <a:off x="368300" y="914400"/>
-            <a:ext cx="4318000" cy="3492500"/>
-          </a:xfrm>
-          <a:prstGeom prst="rect">
-            <a:avLst/>
-          </a:prstGeom>
-          <a:noFill/>
-        </p:spPr>
-        <p:txBody>
-          <a:bodyPr vertOverflow="overflow" vert="horz" wrap="square" rtlCol="0" anchor="t">
-            <a:noAutofit/>
-          </a:bodyPr>
-          <a:lstStyle/>
-          <a:p>
-            <a:pPr algn="l"/>
-            <a:r>
-              <a:rPr lang="it-IT" sz="1600" dirty="0">
-                <a:solidFill>
-                  <a:srgbClr val="333333"/>
-                </a:solidFill>
-                <a:latin typeface="Calibri"/>
-                <a:ea typeface="Calibri"/>
-                <a:cs typeface="Calibri"/>
-              </a:rPr>
-              <a:t>Text </a:t>
-            </a:r>
-            <a:r>
-              <a:rPr lang="it-IT" sz="1600" dirty="0" err="1">
-                <a:solidFill>
-                  <a:srgbClr val="333333"/>
-                </a:solidFill>
-                <a:latin typeface="Calibri"/>
-                <a:ea typeface="Calibri"/>
-                <a:cs typeface="Calibri"/>
-              </a:rPr>
-              <a:t>content</a:t>
-            </a:r>
-            <a:r>
-              <a:rPr lang="it-IT" sz="1600" dirty="0">
-                <a:solidFill>
-                  <a:srgbClr val="333333"/>
-                </a:solidFill>
-                <a:latin typeface="Calibri"/>
-                <a:ea typeface="Calibri"/>
-                <a:cs typeface="Calibri"/>
-              </a:rPr>
-              <a:t> </a:t>
-            </a:r>
-            <a:r>
-              <a:rPr lang="it-IT" sz="1600" dirty="0" err="1">
-                <a:solidFill>
-                  <a:srgbClr val="333333"/>
-                </a:solidFill>
-                <a:latin typeface="Calibri"/>
-                <a:ea typeface="Calibri"/>
-                <a:cs typeface="Calibri"/>
-              </a:rPr>
-              <a:t>goes</a:t>
-            </a:r>
-            <a:r>
-              <a:rPr lang="it-IT" sz="1600" dirty="0">
-                <a:solidFill>
-                  <a:srgbClr val="333333"/>
-                </a:solidFill>
-                <a:latin typeface="Calibri"/>
-                <a:ea typeface="Calibri"/>
-                <a:cs typeface="Calibri"/>
-              </a:rPr>
-              <a:t> </a:t>
-            </a:r>
-            <a:r>
-              <a:rPr lang="it-IT" sz="1600" dirty="0" err="1">
-                <a:solidFill>
-                  <a:srgbClr val="333333"/>
-                </a:solidFill>
-                <a:latin typeface="Calibri"/>
-                <a:ea typeface="Calibri"/>
-                <a:cs typeface="Calibri"/>
-              </a:rPr>
-              <a:t>here</a:t>
-            </a:r>
-            <a:endParaRPr lang="it-IT" sz="1600" dirty="0">
-              <a:solidFill>
-                <a:srgbClr val="333333"/>
-              </a:solidFill>
-              <a:latin typeface="Calibri"/>
-              <a:ea typeface="Calibri"/>
-              <a:cs typeface="Calibri"/>
-            </a:endParaRPr>
-          </a:p>
-        </p:txBody>
-      </p:sp>
-      <p:sp>
-        <p:nvSpPr>
-          <p:cNvPr id="6" name="Rettangolo con angoli arrotondati 5">
-            <a:extLst>
-              <a:ext uri="{FF2B5EF4-FFF2-40B4-BE49-F238E27FC236}">
-                <a16:creationId xmlns:a16="http://schemas.microsoft.com/office/drawing/2014/main" id="{17C1C3B0-E67F-4D08-89AC-6A936CD5AAC7}"/>
+                <a16:creationId xmlns:a16="http://schemas.microsoft.com/office/drawing/2014/main" id="{091A1769-B9E0-690D-90A7-0369076A82EE}"/>
               </a:ext>
             </a:extLst>
           </p:cNvPr>
@@ -5413,56 +7056,251 @@
         </p:nvSpPr>
         <p:spPr>
           <a:xfrm>
-            <a:off x="4889500" y="914400"/>
-            <a:ext cx="3937000" cy="3492500"/>
-          </a:xfrm>
-          <a:prstGeom prst="roundRect">
-            <a:avLst/>
-          </a:prstGeom>
-          <a:solidFill>
-            <a:srgbClr val="F0F0F0"/>
-          </a:solidFill>
-          <a:ln w="12700" cap="flat" cmpd="sng" algn="ctr">
-            <a:solidFill>
-              <a:srgbClr val="D6E4F0"/>
-            </a:solidFill>
-            <a:prstDash val="solid"/>
-            <a:miter lim="800000"/>
-          </a:ln>
-        </p:spPr>
-        <p:style>
-          <a:lnRef idx="2">
-            <a:schemeClr val="accent1">
-              <a:shade val="15000"/>
-            </a:schemeClr>
-          </a:lnRef>
-          <a:fillRef idx="1">
-            <a:schemeClr val="accent1"/>
-          </a:fillRef>
-          <a:effectRef idx="0">
-            <a:schemeClr val="accent1"/>
-          </a:effectRef>
-          <a:fontRef idx="minor">
-            <a:schemeClr val="lt1"/>
-          </a:fontRef>
-        </p:style>
-        <p:txBody>
-          <a:bodyPr vertOverflow="clip" horzOverflow="clip" rtlCol="0" anchor="ctr" anchorCtr="0">
-            <a:noAutofit/>
-          </a:bodyPr>
-          <a:lstStyle/>
-          <a:p>
-            <a:pPr algn="l"/>
-            <a:r>
-              <a:rPr lang="it-IT" sz="1600">
-                <a:solidFill>
-                  <a:srgbClr val="AAAAAA"/>
-                </a:solidFill>
-                <a:latin typeface="Calibri"/>
-                <a:ea typeface="Calibri"/>
-                <a:cs typeface="Calibri"/>
-              </a:rPr>
-              <a:t>Image / Chart</a:t>
+            <a:off x="370840" y="1364341"/>
+            <a:ext cx="4251960" cy="3474720"/>
+          </a:xfrm>
+          <a:prstGeom prst="rect">
+            <a:avLst/>
+          </a:prstGeom>
+          <a:noFill/>
+          <a:ln/>
+        </p:spPr>
+        <p:txBody>
+          <a:bodyPr wrap="square" rtlCol="0" anchor="t"/>
+          <a:lstStyle/>
+          <a:p>
+            <a:pPr marL="190500" indent="-190500">
+              <a:spcAft>
+                <a:spcPts val="500"/>
+              </a:spcAft>
+              <a:buSzPct val="100000"/>
+              <a:buChar char="•"/>
+            </a:pPr>
+            <a:r>
+              <a:rPr lang="en-US" sz="1400" dirty="0">
+                <a:solidFill>
+                  <a:srgbClr val="1A1A1A"/>
+                </a:solidFill>
+                <a:latin typeface="Calibri" pitchFamily="34" charset="0"/>
+                <a:ea typeface="Calibri" pitchFamily="34" charset="-122"/>
+                <a:cs typeface="Calibri" pitchFamily="34" charset="-120"/>
+              </a:rPr>
+              <a:t>Partially observable discrete map</a:t>
+            </a:r>
+            <a:endParaRPr lang="en-US" sz="1400" dirty="0"/>
+          </a:p>
+          <a:p>
+            <a:pPr marL="190500" indent="-190500">
+              <a:spcAft>
+                <a:spcPts val="500"/>
+              </a:spcAft>
+              <a:buSzPct val="100000"/>
+              <a:buChar char="•"/>
+            </a:pPr>
+            <a:r>
+              <a:rPr lang="en-US" sz="1400" dirty="0">
+                <a:solidFill>
+                  <a:srgbClr val="1A1A1A"/>
+                </a:solidFill>
+                <a:latin typeface="Calibri" pitchFamily="34" charset="0"/>
+                <a:ea typeface="Calibri" pitchFamily="34" charset="-122"/>
+                <a:cs typeface="Calibri" pitchFamily="34" charset="-120"/>
+              </a:rPr>
+              <a:t>Static maps with </a:t>
+            </a:r>
+            <a:r>
+              <a:rPr lang="en-US" sz="1400" b="1" dirty="0">
+                <a:solidFill>
+                  <a:srgbClr val="1A1A1A"/>
+                </a:solidFill>
+                <a:latin typeface="Calibri" pitchFamily="34" charset="0"/>
+                <a:ea typeface="Calibri" pitchFamily="34" charset="-122"/>
+                <a:cs typeface="Calibri" pitchFamily="34" charset="-120"/>
+              </a:rPr>
+              <a:t>random obstacle </a:t>
+            </a:r>
+            <a:r>
+              <a:rPr lang="en-US" sz="1400" dirty="0">
+                <a:solidFill>
+                  <a:srgbClr val="1A1A1A"/>
+                </a:solidFill>
+                <a:latin typeface="Calibri" pitchFamily="34" charset="0"/>
+                <a:ea typeface="Calibri" pitchFamily="34" charset="-122"/>
+                <a:cs typeface="Calibri" pitchFamily="34" charset="-120"/>
+              </a:rPr>
+              <a:t>placement</a:t>
+            </a:r>
+            <a:endParaRPr lang="en-US" sz="1400" dirty="0"/>
+          </a:p>
+          <a:p>
+            <a:pPr marL="190500" indent="-190500">
+              <a:spcAft>
+                <a:spcPts val="500"/>
+              </a:spcAft>
+              <a:buSzPct val="100000"/>
+              <a:buChar char="•"/>
+            </a:pPr>
+            <a:r>
+              <a:rPr lang="en-US" sz="1400" dirty="0">
+                <a:solidFill>
+                  <a:srgbClr val="1A1A1A"/>
+                </a:solidFill>
+                <a:latin typeface="Calibri" pitchFamily="34" charset="0"/>
+                <a:ea typeface="Calibri" pitchFamily="34" charset="-122"/>
+                <a:cs typeface="Calibri" pitchFamily="34" charset="-120"/>
+              </a:rPr>
+              <a:t>Agent observes a local window within his </a:t>
+            </a:r>
+            <a:r>
+              <a:rPr lang="en-US" sz="1400" b="1" dirty="0">
+                <a:solidFill>
+                  <a:srgbClr val="1A1A1A"/>
+                </a:solidFill>
+                <a:latin typeface="Calibri" pitchFamily="34" charset="0"/>
+                <a:ea typeface="Calibri" pitchFamily="34" charset="-122"/>
+                <a:cs typeface="Calibri" pitchFamily="34" charset="-120"/>
+              </a:rPr>
+              <a:t>perception range</a:t>
+            </a:r>
+            <a:endParaRPr lang="en-US" sz="1400" b="1" dirty="0"/>
+          </a:p>
+          <a:p>
+            <a:pPr marL="190500" indent="-190500">
+              <a:spcAft>
+                <a:spcPts val="500"/>
+              </a:spcAft>
+              <a:buSzPct val="100000"/>
+              <a:buChar char="•"/>
+            </a:pPr>
+            <a:r>
+              <a:rPr lang="en-US" sz="1400" dirty="0">
+                <a:solidFill>
+                  <a:srgbClr val="1A1A1A"/>
+                </a:solidFill>
+                <a:latin typeface="Calibri" pitchFamily="34" charset="0"/>
+                <a:ea typeface="Calibri" pitchFamily="34" charset="-122"/>
+                <a:cs typeface="Calibri" pitchFamily="34" charset="-120"/>
+              </a:rPr>
+              <a:t>Sequential observations are used to build its </a:t>
+            </a:r>
+            <a:r>
+              <a:rPr lang="en-US" sz="1400" b="1" dirty="0">
+                <a:solidFill>
+                  <a:srgbClr val="1A1A1A"/>
+                </a:solidFill>
+                <a:latin typeface="Calibri" pitchFamily="34" charset="0"/>
+                <a:ea typeface="Calibri" pitchFamily="34" charset="-122"/>
+                <a:cs typeface="Calibri" pitchFamily="34" charset="-120"/>
+              </a:rPr>
+              <a:t>believes map</a:t>
+            </a:r>
+            <a:endParaRPr lang="en-US" sz="1400" b="1" dirty="0"/>
+          </a:p>
+        </p:txBody>
+      </p:sp>
+      <p:pic>
+        <p:nvPicPr>
+          <p:cNvPr id="8" name="Immagine 7">
+            <a:extLst>
+              <a:ext uri="{FF2B5EF4-FFF2-40B4-BE49-F238E27FC236}">
+                <a16:creationId xmlns:a16="http://schemas.microsoft.com/office/drawing/2014/main" id="{340497A2-ABCE-D9C0-95B2-62483D5DA1FB}"/>
+              </a:ext>
+            </a:extLst>
+          </p:cNvPr>
+          <p:cNvPicPr>
+            <a:picLocks noChangeAspect="1"/>
+          </p:cNvPicPr>
+          <p:nvPr/>
+        </p:nvPicPr>
+        <p:blipFill>
+          <a:blip r:embed="rId2"/>
+          <a:stretch>
+            <a:fillRect/>
+          </a:stretch>
+        </p:blipFill>
+        <p:spPr>
+          <a:xfrm>
+            <a:off x="5285092" y="1085967"/>
+            <a:ext cx="3278333" cy="1565794"/>
+          </a:xfrm>
+          <a:prstGeom prst="rect">
+            <a:avLst/>
+          </a:prstGeom>
+        </p:spPr>
+      </p:pic>
+      <p:pic>
+        <p:nvPicPr>
+          <p:cNvPr id="10" name="Immagine 9">
+            <a:extLst>
+              <a:ext uri="{FF2B5EF4-FFF2-40B4-BE49-F238E27FC236}">
+                <a16:creationId xmlns:a16="http://schemas.microsoft.com/office/drawing/2014/main" id="{8F715845-B525-3552-E815-E5F6C2D4DCB8}"/>
+              </a:ext>
+            </a:extLst>
+          </p:cNvPr>
+          <p:cNvPicPr>
+            <a:picLocks noChangeAspect="1"/>
+          </p:cNvPicPr>
+          <p:nvPr/>
+        </p:nvPicPr>
+        <p:blipFill>
+          <a:blip r:embed="rId3"/>
+          <a:stretch>
+            <a:fillRect/>
+          </a:stretch>
+        </p:blipFill>
+        <p:spPr>
+          <a:xfrm>
+            <a:off x="3149600" y="2975986"/>
+            <a:ext cx="5465652" cy="1595007"/>
+          </a:xfrm>
+          <a:prstGeom prst="rect">
+            <a:avLst/>
+          </a:prstGeom>
+        </p:spPr>
+      </p:pic>
+      <p:sp>
+        <p:nvSpPr>
+          <p:cNvPr id="11" name="Text 5">
+            <a:extLst>
+              <a:ext uri="{FF2B5EF4-FFF2-40B4-BE49-F238E27FC236}">
+                <a16:creationId xmlns:a16="http://schemas.microsoft.com/office/drawing/2014/main" id="{5A32195A-73EF-D939-B137-3D52DB558EEB}"/>
+              </a:ext>
+            </a:extLst>
+          </p:cNvPr>
+          <p:cNvSpPr/>
+          <p:nvPr/>
+        </p:nvSpPr>
+        <p:spPr>
+          <a:xfrm>
+            <a:off x="370840" y="915257"/>
+            <a:ext cx="4251960" cy="457200"/>
+          </a:xfrm>
+          <a:prstGeom prst="rect">
+            <a:avLst/>
+          </a:prstGeom>
+          <a:noFill/>
+          <a:ln/>
+        </p:spPr>
+        <p:txBody>
+          <a:bodyPr wrap="square" rtlCol="0" anchor="t"/>
+          <a:lstStyle/>
+          <a:p>
+            <a:pPr>
+              <a:spcAft>
+                <a:spcPts val="500"/>
+              </a:spcAft>
+              <a:buSzPct val="100000"/>
+            </a:pPr>
+            <a:r>
+              <a:rPr lang="en-US" dirty="0">
+                <a:solidFill>
+                  <a:srgbClr val="1A1A1A"/>
+                </a:solidFill>
+                <a:latin typeface="Calibri" pitchFamily="34" charset="0"/>
+                <a:ea typeface="Calibri" pitchFamily="34" charset="-122"/>
+                <a:cs typeface="Calibri" pitchFamily="34" charset="-120"/>
+              </a:rPr>
+              <a:t>The environment – 2D occupancy grid</a:t>
             </a:r>
           </a:p>
         </p:txBody>
@@ -5470,7 +7308,7 @@
     </p:spTree>
     <p:extLst>
       <p:ext uri="{BB962C8B-B14F-4D97-AF65-F5344CB8AC3E}">
-        <p14:creationId xmlns:p14="http://schemas.microsoft.com/office/powerpoint/2010/main" val="3990665965"/>
+        <p14:creationId xmlns:p14="http://schemas.microsoft.com/office/powerpoint/2010/main" val="1959701455"/>
       </p:ext>
     </p:extLst>
   </p:cSld>

--- a/presentation_1.pptx
+++ b/presentation_1.pptx
@@ -3324,8 +3324,8 @@
         </p:nvSpPr>
         <p:spPr>
           <a:xfrm>
-            <a:off x="278674" y="890647"/>
-            <a:ext cx="4409440" cy="1453410"/>
+            <a:off x="349068" y="890647"/>
+            <a:ext cx="4166031" cy="1002447"/>
           </a:xfrm>
           <a:prstGeom prst="rect">
             <a:avLst/>
@@ -3496,8 +3496,8 @@
         </p:nvSpPr>
         <p:spPr>
           <a:xfrm>
-            <a:off x="278674" y="2806700"/>
-            <a:ext cx="4409440" cy="1453410"/>
+            <a:off x="4628902" y="890647"/>
+            <a:ext cx="4166030" cy="1002447"/>
           </a:xfrm>
           <a:prstGeom prst="rect">
             <a:avLst/>
@@ -3527,7 +3527,7 @@
         </p:nvSpPr>
         <p:spPr>
           <a:xfrm>
-            <a:off x="349069" y="3309422"/>
+            <a:off x="4699296" y="1393369"/>
             <a:ext cx="4251960" cy="645888"/>
           </a:xfrm>
           <a:prstGeom prst="rect">
@@ -3576,7 +3576,7 @@
         </p:nvSpPr>
         <p:spPr>
           <a:xfrm>
-            <a:off x="349069" y="2860338"/>
+            <a:off x="4699296" y="944285"/>
             <a:ext cx="4251960" cy="457200"/>
           </a:xfrm>
           <a:prstGeom prst="rect">
@@ -3611,6 +3611,36 @@
           </a:p>
         </p:txBody>
       </p:sp>
+      <p:pic>
+        <p:nvPicPr>
+          <p:cNvPr id="5" name="Immagine 4">
+            <a:extLst>
+              <a:ext uri="{FF2B5EF4-FFF2-40B4-BE49-F238E27FC236}">
+                <a16:creationId xmlns:a16="http://schemas.microsoft.com/office/drawing/2014/main" id="{50650657-3A5E-C657-AF7E-7008E89CA93A}"/>
+              </a:ext>
+            </a:extLst>
+          </p:cNvPr>
+          <p:cNvPicPr>
+            <a:picLocks noChangeAspect="1"/>
+          </p:cNvPicPr>
+          <p:nvPr/>
+        </p:nvPicPr>
+        <p:blipFill>
+          <a:blip r:embed="rId2"/>
+          <a:stretch>
+            <a:fillRect/>
+          </a:stretch>
+        </p:blipFill>
+        <p:spPr>
+          <a:xfrm>
+            <a:off x="1192999" y="2016721"/>
+            <a:ext cx="2478168" cy="2467371"/>
+          </a:xfrm>
+          <a:prstGeom prst="rect">
+            <a:avLst/>
+          </a:prstGeom>
+        </p:spPr>
+      </p:pic>
     </p:spTree>
     <p:extLst>
       <p:ext uri="{BB962C8B-B14F-4D97-AF65-F5344CB8AC3E}">

--- a/presentation_1.pptx
+++ b/presentation_1.pptx
@@ -3324,8 +3324,8 @@
         </p:nvSpPr>
         <p:spPr>
           <a:xfrm>
-            <a:off x="349068" y="890647"/>
-            <a:ext cx="4166031" cy="1002447"/>
+            <a:off x="349068" y="890646"/>
+            <a:ext cx="4095636" cy="1309899"/>
           </a:xfrm>
           <a:prstGeom prst="rect">
             <a:avLst/>
@@ -3398,7 +3398,7 @@
         </p:nvSpPr>
         <p:spPr>
           <a:xfrm>
-            <a:off x="349069" y="1393369"/>
+            <a:off x="533266" y="1257987"/>
             <a:ext cx="4251960" cy="645888"/>
           </a:xfrm>
           <a:prstGeom prst="rect">
@@ -3427,49 +3427,19 @@
                 <a:ea typeface="Calibri" pitchFamily="34" charset="-122"/>
                 <a:cs typeface="Calibri" pitchFamily="34" charset="-120"/>
               </a:rPr>
-              <a:t>Partially observable discrete map</a:t>
-            </a:r>
-            <a:endParaRPr lang="en-US" sz="1400" dirty="0"/>
-          </a:p>
-        </p:txBody>
-      </p:sp>
-      <p:sp>
-        <p:nvSpPr>
-          <p:cNvPr id="11" name="Text 5">
-            <a:extLst>
-              <a:ext uri="{FF2B5EF4-FFF2-40B4-BE49-F238E27FC236}">
-                <a16:creationId xmlns:a16="http://schemas.microsoft.com/office/drawing/2014/main" id="{CAC0CC9D-40D3-4901-4004-A8502D9116E2}"/>
-              </a:ext>
-            </a:extLst>
-          </p:cNvPr>
-          <p:cNvSpPr/>
-          <p:nvPr/>
-        </p:nvSpPr>
-        <p:spPr>
-          <a:xfrm>
-            <a:off x="349069" y="944285"/>
-            <a:ext cx="4251960" cy="457200"/>
-          </a:xfrm>
-          <a:prstGeom prst="rect">
-            <a:avLst/>
-          </a:prstGeom>
-          <a:noFill/>
-          <a:ln/>
-        </p:spPr>
-        <p:txBody>
-          <a:bodyPr wrap="square" rtlCol="0" anchor="t"/>
-          <a:lstStyle/>
-          <a:p>
-            <a:pPr marL="285750" indent="-285750">
+              <a:t>Discriminate frontier cells</a:t>
+            </a:r>
+          </a:p>
+          <a:p>
+            <a:pPr marL="190500" indent="-190500">
               <a:spcAft>
                 <a:spcPts val="500"/>
               </a:spcAft>
               <a:buSzPct val="100000"/>
-              <a:buFont typeface="Arial" panose="020B0604020202020204" pitchFamily="34" charset="0"/>
               <a:buChar char="•"/>
             </a:pPr>
             <a:r>
-              <a:rPr lang="en-US" dirty="0">
+              <a:rPr lang="en-US" sz="1400" dirty="0">
                 <a:solidFill>
                   <a:srgbClr val="1A1A1A"/>
                 </a:solidFill>
@@ -3477,17 +3447,38 @@
                 <a:ea typeface="Calibri" pitchFamily="34" charset="-122"/>
                 <a:cs typeface="Calibri" pitchFamily="34" charset="-120"/>
               </a:rPr>
-              <a:t>The environment – 2D occupancy grid</a:t>
-            </a:r>
-          </a:p>
-        </p:txBody>
-      </p:sp>
-      <p:sp>
-        <p:nvSpPr>
-          <p:cNvPr id="12" name="Shape 22">
+              <a:t>Group theme into cluster</a:t>
+            </a:r>
+          </a:p>
+          <a:p>
+            <a:pPr marL="190500" indent="-190500">
+              <a:spcAft>
+                <a:spcPts val="500"/>
+              </a:spcAft>
+              <a:buSzPct val="100000"/>
+              <a:buChar char="•"/>
+            </a:pPr>
+            <a:r>
+              <a:rPr lang="en-US" sz="1400" dirty="0">
+                <a:solidFill>
+                  <a:srgbClr val="1A1A1A"/>
+                </a:solidFill>
+                <a:latin typeface="Calibri" pitchFamily="34" charset="0"/>
+                <a:ea typeface="Calibri" pitchFamily="34" charset="-122"/>
+                <a:cs typeface="Calibri" pitchFamily="34" charset="-120"/>
+              </a:rPr>
+              <a:t>Compute cluster’s centroids </a:t>
+            </a:r>
+            <a:endParaRPr lang="en-US" sz="1400" dirty="0"/>
+          </a:p>
+        </p:txBody>
+      </p:sp>
+      <p:sp>
+        <p:nvSpPr>
+          <p:cNvPr id="11" name="Text 5">
             <a:extLst>
               <a:ext uri="{FF2B5EF4-FFF2-40B4-BE49-F238E27FC236}">
-                <a16:creationId xmlns:a16="http://schemas.microsoft.com/office/drawing/2014/main" id="{32DCC85E-21BD-A456-C7F1-E4AE1506FBB9}"/>
+                <a16:creationId xmlns:a16="http://schemas.microsoft.com/office/drawing/2014/main" id="{CAC0CC9D-40D3-4901-4004-A8502D9116E2}"/>
               </a:ext>
             </a:extLst>
           </p:cNvPr>
@@ -3496,8 +3487,55 @@
         </p:nvSpPr>
         <p:spPr>
           <a:xfrm>
-            <a:off x="4628902" y="890647"/>
-            <a:ext cx="4166030" cy="1002447"/>
+            <a:off x="533266" y="901421"/>
+            <a:ext cx="4251960" cy="457200"/>
+          </a:xfrm>
+          <a:prstGeom prst="rect">
+            <a:avLst/>
+          </a:prstGeom>
+          <a:noFill/>
+          <a:ln/>
+        </p:spPr>
+        <p:txBody>
+          <a:bodyPr wrap="square" rtlCol="0" anchor="t"/>
+          <a:lstStyle/>
+          <a:p>
+            <a:pPr>
+              <a:spcAft>
+                <a:spcPts val="500"/>
+              </a:spcAft>
+              <a:buSzPct val="100000"/>
+            </a:pPr>
+            <a:r>
+              <a:rPr lang="en-US" dirty="0">
+                <a:solidFill>
+                  <a:srgbClr val="1A1A1A"/>
+                </a:solidFill>
+                <a:latin typeface="Calibri" pitchFamily="34" charset="0"/>
+                <a:ea typeface="Calibri" pitchFamily="34" charset="-122"/>
+                <a:cs typeface="Calibri" pitchFamily="34" charset="-120"/>
+              </a:rPr>
+              <a:t>Frontier detection system</a:t>
+            </a:r>
+          </a:p>
+        </p:txBody>
+      </p:sp>
+      <p:sp>
+        <p:nvSpPr>
+          <p:cNvPr id="12" name="Shape 22">
+            <a:extLst>
+              <a:ext uri="{FF2B5EF4-FFF2-40B4-BE49-F238E27FC236}">
+                <a16:creationId xmlns:a16="http://schemas.microsoft.com/office/drawing/2014/main" id="{32DCC85E-21BD-A456-C7F1-E4AE1506FBB9}"/>
+              </a:ext>
+            </a:extLst>
+          </p:cNvPr>
+          <p:cNvSpPr/>
+          <p:nvPr/>
+        </p:nvSpPr>
+        <p:spPr>
+          <a:xfrm>
+            <a:off x="4699296" y="890647"/>
+            <a:ext cx="4095636" cy="1309899"/>
           </a:xfrm>
           <a:prstGeom prst="rect">
             <a:avLst/>
@@ -3527,8 +3565,8 @@
         </p:nvSpPr>
         <p:spPr>
           <a:xfrm>
-            <a:off x="4699296" y="1393369"/>
-            <a:ext cx="4251960" cy="645888"/>
+            <a:off x="4842557" y="1257987"/>
+            <a:ext cx="3768177" cy="645888"/>
           </a:xfrm>
           <a:prstGeom prst="rect">
             <a:avLst/>
@@ -3556,9 +3594,8 @@
                 <a:ea typeface="Calibri" pitchFamily="34" charset="-122"/>
                 <a:cs typeface="Calibri" pitchFamily="34" charset="-120"/>
               </a:rPr>
-              <a:t>Partially observable discrete map</a:t>
-            </a:r>
-            <a:endParaRPr lang="en-US" sz="1400" dirty="0"/>
+              <a:t>Compute an obstacle free path to the target position (A* algorithm)</a:t>
+            </a:r>
           </a:p>
         </p:txBody>
       </p:sp>
@@ -3576,7 +3613,7 @@
         </p:nvSpPr>
         <p:spPr>
           <a:xfrm>
-            <a:off x="4699296" y="944285"/>
+            <a:off x="4756198" y="888443"/>
             <a:ext cx="4251960" cy="457200"/>
           </a:xfrm>
           <a:prstGeom prst="rect">
@@ -3589,13 +3626,11 @@
           <a:bodyPr wrap="square" rtlCol="0" anchor="t"/>
           <a:lstStyle/>
           <a:p>
-            <a:pPr marL="285750" indent="-285750">
+            <a:pPr>
               <a:spcAft>
                 <a:spcPts val="500"/>
               </a:spcAft>
               <a:buSzPct val="100000"/>
-              <a:buFont typeface="Arial" panose="020B0604020202020204" pitchFamily="34" charset="0"/>
-              <a:buChar char="•"/>
             </a:pPr>
             <a:r>
               <a:rPr lang="en-US" dirty="0">
@@ -3606,7 +3641,7 @@
                 <a:ea typeface="Calibri" pitchFamily="34" charset="-122"/>
                 <a:cs typeface="Calibri" pitchFamily="34" charset="-120"/>
               </a:rPr>
-              <a:t>The environment – 2D occupancy grid</a:t>
+              <a:t>Obstacle avoidance path planner</a:t>
             </a:r>
           </a:p>
         </p:txBody>
@@ -3633,8 +3668,38 @@
         </p:blipFill>
         <p:spPr>
           <a:xfrm>
-            <a:off x="1192999" y="2016721"/>
-            <a:ext cx="2478168" cy="2467371"/>
+            <a:off x="1414464" y="2445206"/>
+            <a:ext cx="2091528" cy="2082415"/>
+          </a:xfrm>
+          <a:prstGeom prst="rect">
+            <a:avLst/>
+          </a:prstGeom>
+        </p:spPr>
+      </p:pic>
+      <p:pic>
+        <p:nvPicPr>
+          <p:cNvPr id="7" name="Immagine 6">
+            <a:extLst>
+              <a:ext uri="{FF2B5EF4-FFF2-40B4-BE49-F238E27FC236}">
+                <a16:creationId xmlns:a16="http://schemas.microsoft.com/office/drawing/2014/main" id="{215788E4-AC38-615A-0D66-D901C167CCD1}"/>
+              </a:ext>
+            </a:extLst>
+          </p:cNvPr>
+          <p:cNvPicPr>
+            <a:picLocks noChangeAspect="1"/>
+          </p:cNvPicPr>
+          <p:nvPr/>
+        </p:nvPicPr>
+        <p:blipFill>
+          <a:blip r:embed="rId3"/>
+          <a:stretch>
+            <a:fillRect/>
+          </a:stretch>
+        </p:blipFill>
+        <p:spPr>
+          <a:xfrm>
+            <a:off x="5677572" y="2340366"/>
+            <a:ext cx="2098145" cy="2187255"/>
           </a:xfrm>
           <a:prstGeom prst="rect">
             <a:avLst/>

--- a/presentation_1.pptx
+++ b/presentation_1.pptx
@@ -26,7 +26,7 @@
     <p:sldId id="292" r:id="rId17"/>
     <p:sldId id="279" r:id="rId18"/>
     <p:sldId id="293" r:id="rId19"/>
-    <p:sldId id="294" r:id="rId20"/>
+    <p:sldId id="297" r:id="rId20"/>
     <p:sldId id="268" r:id="rId21"/>
     <p:sldId id="295" r:id="rId22"/>
     <p:sldId id="296" r:id="rId23"/>
@@ -13223,8 +13223,8 @@
         </p:nvSpPr>
         <p:spPr>
           <a:xfrm>
-            <a:off x="320041" y="914400"/>
-            <a:ext cx="4346786" cy="2377440"/>
+            <a:off x="243840" y="975360"/>
+            <a:ext cx="4527031" cy="3131820"/>
           </a:xfrm>
           <a:prstGeom prst="rect">
             <a:avLst/>
@@ -13244,7 +13244,7 @@
               <a:buChar char="•"/>
             </a:pPr>
             <a:r>
-              <a:rPr lang="en-US" sz="1400" dirty="0">
+              <a:rPr lang="en-US" sz="1600" dirty="0">
                 <a:solidFill>
                   <a:srgbClr val="1A1A1A"/>
                 </a:solidFill>
@@ -13265,7 +13265,7 @@
               </a:rPr>
             </a:br>
             <a:r>
-              <a:rPr lang="en-US" sz="1300" dirty="0">
+              <a:rPr lang="en-US" sz="1400" dirty="0">
                 <a:solidFill>
                   <a:srgbClr val="1A1A1A"/>
                 </a:solidFill>
@@ -13276,7 +13276,7 @@
               <a:t>reward × observation set </a:t>
             </a:r>
             <a:r>
-              <a:rPr lang="en-US" sz="1300" b="1" dirty="0">
+              <a:rPr lang="en-US" sz="1400" b="1" dirty="0">
                 <a:solidFill>
                   <a:srgbClr val="C00000"/>
                 </a:solidFill>
@@ -13287,7 +13287,7 @@
               <a:t>→</a:t>
             </a:r>
             <a:r>
-              <a:rPr lang="en-US" sz="1300" dirty="0">
+              <a:rPr lang="en-US" sz="1400" dirty="0">
                 <a:solidFill>
                   <a:srgbClr val="1A1A1A"/>
                 </a:solidFill>
@@ -13297,6 +13297,15 @@
               </a:rPr>
               <a:t> best configuration per reward</a:t>
             </a:r>
+          </a:p>
+          <a:p>
+            <a:pPr>
+              <a:spcAft>
+                <a:spcPts val="500"/>
+              </a:spcAft>
+              <a:buSzPct val="100000"/>
+            </a:pPr>
+            <a:endParaRPr lang="en-US" sz="1400" dirty="0"/>
           </a:p>
           <a:p>
             <a:pPr>
@@ -13316,7 +13325,7 @@
               <a:buChar char="•"/>
             </a:pPr>
             <a:r>
-              <a:rPr lang="en-US" sz="1400" dirty="0">
+              <a:rPr lang="en-US" sz="1600" dirty="0">
                 <a:solidFill>
                   <a:srgbClr val="1A1A1A"/>
                 </a:solidFill>
@@ -13337,7 +13346,7 @@
               </a:rPr>
             </a:br>
             <a:r>
-              <a:rPr lang="en-US" sz="1300" b="1" dirty="0">
+              <a:rPr lang="en-US" sz="1400" b="1" dirty="0">
                 <a:solidFill>
                   <a:srgbClr val="C00000"/>
                 </a:solidFill>
@@ -13348,7 +13357,7 @@
               <a:t>→</a:t>
             </a:r>
             <a:r>
-              <a:rPr lang="en-US" sz="1300" dirty="0">
+              <a:rPr lang="en-US" sz="1400" dirty="0">
                 <a:solidFill>
                   <a:srgbClr val="1A1A1A"/>
                 </a:solidFill>
@@ -13366,7 +13375,16 @@
               </a:spcAft>
               <a:buSzPct val="100000"/>
             </a:pPr>
-            <a:endParaRPr lang="en-US" sz="1300" dirty="0"/>
+            <a:endParaRPr lang="en-US" sz="1400" dirty="0"/>
+          </a:p>
+          <a:p>
+            <a:pPr>
+              <a:spcAft>
+                <a:spcPts val="500"/>
+              </a:spcAft>
+              <a:buSzPct val="100000"/>
+            </a:pPr>
+            <a:endParaRPr lang="en-US" sz="1400" dirty="0"/>
           </a:p>
           <a:p>
             <a:pPr marL="190500" indent="-190500">
@@ -13377,7 +13395,7 @@
               <a:buChar char="•"/>
             </a:pPr>
             <a:r>
-              <a:rPr lang="en-US" sz="1400" dirty="0">
+              <a:rPr lang="en-US" sz="1600" dirty="0">
                 <a:solidFill>
                   <a:srgbClr val="1A1A1A"/>
                 </a:solidFill>
@@ -13398,7 +13416,7 @@
               </a:rPr>
             </a:br>
             <a:r>
-              <a:rPr lang="en-US" sz="1300" dirty="0">
+              <a:rPr lang="en-US" sz="1400" dirty="0">
                 <a:solidFill>
                   <a:srgbClr val="1A1A1A"/>
                 </a:solidFill>
@@ -13409,7 +13427,7 @@
               <a:t>500k / 750k / 1M time steps </a:t>
             </a:r>
             <a:r>
-              <a:rPr lang="en-US" sz="1300" b="1" dirty="0">
+              <a:rPr lang="en-US" sz="1400" b="1" dirty="0">
                 <a:solidFill>
                   <a:srgbClr val="C00000"/>
                 </a:solidFill>
@@ -13420,7 +13438,7 @@
               <a:t>→</a:t>
             </a:r>
             <a:r>
-              <a:rPr lang="en-US" sz="1300" dirty="0">
+              <a:rPr lang="en-US" sz="1400" dirty="0">
                 <a:solidFill>
                   <a:srgbClr val="1A1A1A"/>
                 </a:solidFill>
@@ -13430,7 +13448,7 @@
               </a:rPr>
               <a:t> 2 best models selected</a:t>
             </a:r>
-            <a:endParaRPr lang="en-US" sz="1300" dirty="0"/>
+            <a:endParaRPr lang="en-US" sz="1400" dirty="0"/>
           </a:p>
         </p:txBody>
       </p:sp>
@@ -13452,77 +13470,13 @@
         <p:spPr>
           <a:xfrm>
             <a:off x="4537813" y="833629"/>
-            <a:ext cx="4450830" cy="3982212"/>
+            <a:ext cx="4450830" cy="3921251"/>
           </a:xfrm>
           <a:prstGeom prst="rect">
             <a:avLst/>
           </a:prstGeom>
         </p:spPr>
       </p:pic>
-      <p:sp>
-        <p:nvSpPr>
-          <p:cNvPr id="9" name="Shape 6"/>
-          <p:cNvSpPr/>
-          <p:nvPr/>
-        </p:nvSpPr>
-        <p:spPr>
-          <a:xfrm>
-            <a:off x="365760" y="3364992"/>
-            <a:ext cx="4206240" cy="1062228"/>
-          </a:xfrm>
-          <a:prstGeom prst="rect">
-            <a:avLst/>
-          </a:prstGeom>
-          <a:solidFill>
-            <a:srgbClr val="F5F7FA"/>
-          </a:solidFill>
-          <a:ln w="12700">
-            <a:solidFill>
-              <a:srgbClr val="D6E4F0"/>
-            </a:solidFill>
-            <a:prstDash val="solid"/>
-          </a:ln>
-        </p:spPr>
-      </p:sp>
-      <p:sp>
-        <p:nvSpPr>
-          <p:cNvPr id="10" name="Text 7"/>
-          <p:cNvSpPr/>
-          <p:nvPr/>
-        </p:nvSpPr>
-        <p:spPr>
-          <a:xfrm>
-            <a:off x="502920" y="3337560"/>
-            <a:ext cx="3977640" cy="1028700"/>
-          </a:xfrm>
-          <a:prstGeom prst="rect">
-            <a:avLst/>
-          </a:prstGeom>
-          <a:noFill/>
-          <a:ln/>
-        </p:spPr>
-        <p:txBody>
-          <a:bodyPr wrap="square" rtlCol="0" anchor="ctr"/>
-          <a:lstStyle/>
-          <a:p>
-            <a:pPr marL="0" indent="0">
-              <a:buNone/>
-            </a:pPr>
-            <a:r>
-              <a:rPr lang="en-US" sz="1200" i="1" dirty="0">
-                <a:solidFill>
-                  <a:srgbClr val="5A5A5A"/>
-                </a:solidFill>
-                <a:latin typeface="Calibri" pitchFamily="34" charset="0"/>
-                <a:ea typeface="Calibri" pitchFamily="34" charset="-122"/>
-                <a:cs typeface="Calibri" pitchFamily="34" charset="-120"/>
-              </a:rPr>
-              <a:t>Baseline: greedy distance policy (always selects the nearest frontier centroid). Evaluation over 100 independent test episodes per map size.</a:t>
-            </a:r>
-            <a:endParaRPr lang="en-US" sz="1200" dirty="0"/>
-          </a:p>
-        </p:txBody>
-      </p:sp>
     </p:spTree>
   </p:cSld>
   <p:clrMapOvr>
@@ -13721,7 +13675,7 @@
         </p:nvSpPr>
         <p:spPr>
           <a:xfrm>
-            <a:off x="320040" y="896112"/>
+            <a:off x="320040" y="827532"/>
             <a:ext cx="8503920" cy="475488"/>
           </a:xfrm>
           <a:prstGeom prst="rect">
@@ -13746,7 +13700,7 @@
         </p:nvSpPr>
         <p:spPr>
           <a:xfrm>
-            <a:off x="457200" y="914400"/>
+            <a:off x="457200" y="845820"/>
             <a:ext cx="8229600" cy="411480"/>
           </a:xfrm>
           <a:prstGeom prst="rect">
@@ -13768,7 +13722,7 @@
                 <a:ea typeface="Calibri" pitchFamily="34" charset="-122"/>
                 <a:cs typeface="Calibri" pitchFamily="34" charset="-120"/>
               </a:rPr>
-              <a:t>Config: </a:t>
+              <a:t>Configuration:    </a:t>
             </a:r>
             <a:r>
               <a:rPr lang="en-US" sz="1200" dirty="0">
@@ -13779,18 +13733,18 @@
                 <a:ea typeface="Calibri" pitchFamily="34" charset="-122"/>
                 <a:cs typeface="Calibri" pitchFamily="34" charset="-120"/>
               </a:rPr>
-              <a:t>Reward 1  ·  </a:t>
-            </a:r>
-            <a:r>
-              <a:rPr lang="en-US" sz="1200" dirty="0" err="1">
+              <a:t>Centroids relative positions   ·   Sorted by distance    ·   </a:t>
+            </a:r>
+            <a:r>
+              <a:rPr lang="en-US" sz="1200" b="1" dirty="0">
                 <a:solidFill>
-                  <a:srgbClr val="1A1A1A"/>
+                  <a:srgbClr val="1A2E4A"/>
                 </a:solidFill>
                 <a:latin typeface="Calibri" pitchFamily="34" charset="0"/>
                 <a:ea typeface="Calibri" pitchFamily="34" charset="-122"/>
                 <a:cs typeface="Calibri" pitchFamily="34" charset="-120"/>
               </a:rPr>
-              <a:t>Obs</a:t>
+              <a:t> </a:t>
             </a:r>
             <a:r>
               <a:rPr lang="en-US" sz="1200" dirty="0">
@@ -13801,7 +13755,7 @@
                 <a:ea typeface="Calibri" pitchFamily="34" charset="-122"/>
                 <a:cs typeface="Calibri" pitchFamily="34" charset="-120"/>
               </a:rPr>
-              <a:t>: relative cent. position – sorted by distance   ·  1M steps</a:t>
+              <a:t>Reward 1   ·   1M steps</a:t>
             </a:r>
             <a:endParaRPr lang="en-US" sz="1200" dirty="0"/>
           </a:p>
@@ -13817,15 +13771,13 @@
         </p:nvPicPr>
         <p:blipFill>
           <a:blip r:embed="rId3"/>
-          <a:srcRect b="2756"/>
-          <a:stretch>
-            <a:fillRect/>
-          </a:stretch>
+          <a:srcRect/>
+          <a:stretch/>
         </p:blipFill>
         <p:spPr>
           <a:xfrm>
-            <a:off x="320040" y="1463040"/>
-            <a:ext cx="5212080" cy="2258568"/>
+            <a:off x="320040" y="1325880"/>
+            <a:ext cx="5212080" cy="2259928"/>
           </a:xfrm>
           <a:prstGeom prst="rect">
             <a:avLst/>
@@ -13840,7 +13792,7 @@
         </p:nvSpPr>
         <p:spPr>
           <a:xfrm>
-            <a:off x="320040" y="3721608"/>
+            <a:off x="320040" y="3479128"/>
             <a:ext cx="5212080" cy="228600"/>
           </a:xfrm>
           <a:prstGeom prst="rect">
@@ -13881,15 +13833,13 @@
         </p:nvPicPr>
         <p:blipFill>
           <a:blip r:embed="rId4"/>
-          <a:srcRect b="2756"/>
-          <a:stretch>
-            <a:fillRect/>
-          </a:stretch>
+          <a:srcRect/>
+          <a:stretch/>
         </p:blipFill>
         <p:spPr>
           <a:xfrm>
-            <a:off x="5623560" y="1463040"/>
-            <a:ext cx="3200400" cy="2258568"/>
+            <a:off x="5623560" y="1325880"/>
+            <a:ext cx="3200400" cy="2259928"/>
           </a:xfrm>
           <a:prstGeom prst="rect">
             <a:avLst/>
@@ -13904,7 +13854,7 @@
         </p:nvSpPr>
         <p:spPr>
           <a:xfrm>
-            <a:off x="5623560" y="3671316"/>
+            <a:off x="5623560" y="3474310"/>
             <a:ext cx="3200400" cy="228600"/>
           </a:xfrm>
           <a:prstGeom prst="rect">
@@ -13929,76 +13879,1435 @@
                 <a:ea typeface="Calibri" pitchFamily="34" charset="-122"/>
                 <a:cs typeface="Calibri" pitchFamily="34" charset="-120"/>
               </a:rPr>
-              <a:t>Training loss</a:t>
+              <a:t>TD loss</a:t>
             </a:r>
             <a:endParaRPr lang="en-US" sz="1200" dirty="0"/>
           </a:p>
         </p:txBody>
       </p:sp>
-      <p:sp>
-        <p:nvSpPr>
-          <p:cNvPr id="13" name="Shape 9"/>
-          <p:cNvSpPr/>
-          <p:nvPr/>
-        </p:nvSpPr>
-        <p:spPr>
-          <a:xfrm>
-            <a:off x="320040" y="4037076"/>
-            <a:ext cx="8503920" cy="713232"/>
-          </a:xfrm>
-          <a:prstGeom prst="rect">
-            <a:avLst/>
-          </a:prstGeom>
-          <a:solidFill>
-            <a:srgbClr val="FFF3F3"/>
-          </a:solidFill>
-          <a:ln w="12700">
-            <a:solidFill>
-              <a:srgbClr val="C8472C"/>
-            </a:solidFill>
-            <a:prstDash val="solid"/>
-          </a:ln>
-        </p:spPr>
-      </p:sp>
-      <p:sp>
-        <p:nvSpPr>
-          <p:cNvPr id="14" name="Text 10"/>
-          <p:cNvSpPr/>
-          <p:nvPr/>
-        </p:nvSpPr>
-        <p:spPr>
-          <a:xfrm>
-            <a:off x="502920" y="4114800"/>
-            <a:ext cx="8229600" cy="621792"/>
-          </a:xfrm>
-          <a:prstGeom prst="rect">
-            <a:avLst/>
-          </a:prstGeom>
-          <a:noFill/>
-          <a:ln/>
-        </p:spPr>
-        <p:txBody>
-          <a:bodyPr wrap="square" rtlCol="0" anchor="ctr"/>
-          <a:lstStyle/>
-          <a:p>
-            <a:pPr marL="0" indent="0">
-              <a:buNone/>
-            </a:pPr>
-            <a:r>
-              <a:rPr lang="en-US" sz="1200" b="1" dirty="0">
-                <a:solidFill>
-                  <a:srgbClr val="C8472C"/>
-                </a:solidFill>
-                <a:latin typeface="Calibri" pitchFamily="34" charset="0"/>
-                <a:ea typeface="Calibri" pitchFamily="34" charset="-122"/>
-                <a:cs typeface="Calibri" pitchFamily="34" charset="-120"/>
-              </a:rPr>
-              <a:t>⚠  Reward hacking: agent always selects action 0. Root cause — sorted observations make the padding penalty trivially exploitable.</a:t>
-            </a:r>
-            <a:endParaRPr lang="en-US" sz="1200" dirty="0"/>
-          </a:p>
-        </p:txBody>
-      </p:sp>
+      <p:graphicFrame>
+        <p:nvGraphicFramePr>
+          <p:cNvPr id="15" name="Tabella 14">
+            <a:extLst>
+              <a:ext uri="{FF2B5EF4-FFF2-40B4-BE49-F238E27FC236}">
+                <a16:creationId xmlns:a16="http://schemas.microsoft.com/office/drawing/2014/main" id="{945D122D-FE56-F66D-9E60-75297FD91088}"/>
+              </a:ext>
+            </a:extLst>
+          </p:cNvPr>
+          <p:cNvGraphicFramePr>
+            <a:graphicFrameLocks noGrp="1"/>
+          </p:cNvGraphicFramePr>
+          <p:nvPr>
+            <p:extLst>
+              <p:ext uri="{D42A27DB-BD31-4B8C-83A1-F6EECF244321}">
+                <p14:modId xmlns:p14="http://schemas.microsoft.com/office/powerpoint/2010/main" val="3616849344"/>
+              </p:ext>
+            </p:extLst>
+          </p:nvPr>
+        </p:nvGraphicFramePr>
+        <p:xfrm>
+          <a:off x="1548384" y="3741010"/>
+          <a:ext cx="2955036" cy="822960"/>
+        </p:xfrm>
+        <a:graphic>
+          <a:graphicData uri="http://schemas.openxmlformats.org/drawingml/2006/table">
+            <a:tbl>
+              <a:tblPr firstRow="1" bandRow="1">
+                <a:tableStyleId>{5C22544A-7EE6-4342-B048-85BDC9FD1C3A}</a:tableStyleId>
+              </a:tblPr>
+              <a:tblGrid>
+                <a:gridCol w="1477518">
+                  <a:extLst>
+                    <a:ext uri="{9D8B030D-6E8A-4147-A177-3AD203B41FA5}">
+                      <a16:colId xmlns:a16="http://schemas.microsoft.com/office/drawing/2014/main" val="2914056647"/>
+                    </a:ext>
+                  </a:extLst>
+                </a:gridCol>
+                <a:gridCol w="1477518">
+                  <a:extLst>
+                    <a:ext uri="{9D8B030D-6E8A-4147-A177-3AD203B41FA5}">
+                      <a16:colId xmlns:a16="http://schemas.microsoft.com/office/drawing/2014/main" val="2011988342"/>
+                    </a:ext>
+                  </a:extLst>
+                </a:gridCol>
+              </a:tblGrid>
+              <a:tr h="264555">
+                <a:tc>
+                  <a:txBody>
+                    <a:bodyPr/>
+                    <a:lstStyle/>
+                    <a:p>
+                      <a:pPr marL="0" marR="0" lvl="0" indent="0" algn="l" defTabSz="914400" rtl="0" eaLnBrk="1" fontAlgn="auto" latinLnBrk="0" hangingPunct="1">
+                        <a:lnSpc>
+                          <a:spcPct val="100000"/>
+                        </a:lnSpc>
+                        <a:spcBef>
+                          <a:spcPts val="0"/>
+                        </a:spcBef>
+                        <a:spcAft>
+                          <a:spcPts val="0"/>
+                        </a:spcAft>
+                        <a:buClrTx/>
+                        <a:buSzTx/>
+                        <a:buFontTx/>
+                        <a:buNone/>
+                        <a:tabLst/>
+                        <a:defRPr/>
+                      </a:pPr>
+                      <a:r>
+                        <a:rPr lang="it-IT" sz="1200" dirty="0">
+                          <a:solidFill>
+                            <a:schemeClr val="tx1"/>
+                          </a:solidFill>
+                        </a:rPr>
+                        <a:t>Evaluation </a:t>
+                      </a:r>
+                      <a:r>
+                        <a:rPr lang="it-IT" sz="1200" dirty="0" err="1">
+                          <a:solidFill>
+                            <a:schemeClr val="tx1"/>
+                          </a:solidFill>
+                        </a:rPr>
+                        <a:t>reward</a:t>
+                      </a:r>
+                      <a:endParaRPr lang="it-IT" sz="1200" dirty="0">
+                        <a:solidFill>
+                          <a:schemeClr val="tx1"/>
+                        </a:solidFill>
+                      </a:endParaRPr>
+                    </a:p>
+                  </a:txBody>
+                  <a:tcPr>
+                    <a:lnL w="12700" cap="flat" cmpd="sng" algn="ctr">
+                      <a:noFill/>
+                      <a:prstDash val="solid"/>
+                      <a:round/>
+                      <a:headEnd type="none" w="med" len="med"/>
+                      <a:tailEnd type="none" w="med" len="med"/>
+                    </a:lnL>
+                    <a:lnR w="12700" cap="flat" cmpd="sng" algn="ctr">
+                      <a:noFill/>
+                      <a:prstDash val="solid"/>
+                      <a:round/>
+                      <a:headEnd type="none" w="med" len="med"/>
+                      <a:tailEnd type="none" w="med" len="med"/>
+                    </a:lnR>
+                    <a:lnT w="12700" cap="flat" cmpd="sng" algn="ctr">
+                      <a:noFill/>
+                      <a:prstDash val="solid"/>
+                      <a:round/>
+                      <a:headEnd type="none" w="med" len="med"/>
+                      <a:tailEnd type="none" w="med" len="med"/>
+                    </a:lnT>
+                    <a:lnB w="12700" cap="flat" cmpd="sng" algn="ctr">
+                      <a:solidFill>
+                        <a:schemeClr val="tx1"/>
+                      </a:solidFill>
+                      <a:prstDash val="solid"/>
+                      <a:round/>
+                      <a:headEnd type="none" w="med" len="med"/>
+                      <a:tailEnd type="none" w="med" len="med"/>
+                    </a:lnB>
+                    <a:lnTlToBr w="12700" cmpd="sng">
+                      <a:noFill/>
+                      <a:prstDash val="solid"/>
+                    </a:lnTlToBr>
+                    <a:lnBlToTr w="12700" cmpd="sng">
+                      <a:noFill/>
+                      <a:prstDash val="solid"/>
+                    </a:lnBlToTr>
+                    <a:noFill/>
+                  </a:tcPr>
+                </a:tc>
+                <a:tc>
+                  <a:txBody>
+                    <a:bodyPr/>
+                    <a:lstStyle/>
+                    <a:p>
+                      <a:endParaRPr lang="it-IT" sz="1200" dirty="0">
+                        <a:solidFill>
+                          <a:schemeClr val="tx1"/>
+                        </a:solidFill>
+                      </a:endParaRPr>
+                    </a:p>
+                  </a:txBody>
+                  <a:tcPr>
+                    <a:lnL w="12700" cap="flat" cmpd="sng" algn="ctr">
+                      <a:noFill/>
+                      <a:prstDash val="solid"/>
+                      <a:round/>
+                      <a:headEnd type="none" w="med" len="med"/>
+                      <a:tailEnd type="none" w="med" len="med"/>
+                    </a:lnL>
+                    <a:lnR w="12700" cap="flat" cmpd="sng" algn="ctr">
+                      <a:noFill/>
+                      <a:prstDash val="solid"/>
+                      <a:round/>
+                      <a:headEnd type="none" w="med" len="med"/>
+                      <a:tailEnd type="none" w="med" len="med"/>
+                    </a:lnR>
+                    <a:lnT w="12700" cap="flat" cmpd="sng" algn="ctr">
+                      <a:noFill/>
+                      <a:prstDash val="solid"/>
+                      <a:round/>
+                      <a:headEnd type="none" w="med" len="med"/>
+                      <a:tailEnd type="none" w="med" len="med"/>
+                    </a:lnT>
+                    <a:lnB w="12700" cap="flat" cmpd="sng" algn="ctr">
+                      <a:solidFill>
+                        <a:schemeClr val="tx1"/>
+                      </a:solidFill>
+                      <a:prstDash val="solid"/>
+                      <a:round/>
+                      <a:headEnd type="none" w="med" len="med"/>
+                      <a:tailEnd type="none" w="med" len="med"/>
+                    </a:lnB>
+                    <a:lnTlToBr w="12700" cmpd="sng">
+                      <a:noFill/>
+                      <a:prstDash val="solid"/>
+                    </a:lnTlToBr>
+                    <a:lnBlToTr w="12700" cmpd="sng">
+                      <a:noFill/>
+                      <a:prstDash val="solid"/>
+                    </a:lnBlToTr>
+                    <a:noFill/>
+                  </a:tcPr>
+                </a:tc>
+                <a:extLst>
+                  <a:ext uri="{0D108BD9-81ED-4DB2-BD59-A6C34878D82A}">
+                    <a16:rowId xmlns:a16="http://schemas.microsoft.com/office/drawing/2014/main" val="859600443"/>
+                  </a:ext>
+                </a:extLst>
+              </a:tr>
+              <a:tr h="194448">
+                <a:tc>
+                  <a:txBody>
+                    <a:bodyPr/>
+                    <a:lstStyle/>
+                    <a:p>
+                      <a:r>
+                        <a:rPr lang="it-IT" sz="1200" b="1" dirty="0">
+                          <a:solidFill>
+                            <a:schemeClr val="tx1"/>
+                          </a:solidFill>
+                        </a:rPr>
+                        <a:t>Mean</a:t>
+                      </a:r>
+                    </a:p>
+                  </a:txBody>
+                  <a:tcPr>
+                    <a:lnL w="12700" cap="flat" cmpd="sng" algn="ctr">
+                      <a:solidFill>
+                        <a:schemeClr val="tx1"/>
+                      </a:solidFill>
+                      <a:prstDash val="solid"/>
+                      <a:round/>
+                      <a:headEnd type="none" w="med" len="med"/>
+                      <a:tailEnd type="none" w="med" len="med"/>
+                    </a:lnL>
+                    <a:lnR w="12700" cap="flat" cmpd="sng" algn="ctr">
+                      <a:solidFill>
+                        <a:schemeClr val="tx1"/>
+                      </a:solidFill>
+                      <a:prstDash val="solid"/>
+                      <a:round/>
+                      <a:headEnd type="none" w="med" len="med"/>
+                      <a:tailEnd type="none" w="med" len="med"/>
+                    </a:lnR>
+                    <a:lnT w="12700" cap="flat" cmpd="sng" algn="ctr">
+                      <a:solidFill>
+                        <a:schemeClr val="tx1"/>
+                      </a:solidFill>
+                      <a:prstDash val="solid"/>
+                      <a:round/>
+                      <a:headEnd type="none" w="med" len="med"/>
+                      <a:tailEnd type="none" w="med" len="med"/>
+                    </a:lnT>
+                    <a:lnB w="12700" cap="flat" cmpd="sng" algn="ctr">
+                      <a:solidFill>
+                        <a:schemeClr val="tx1"/>
+                      </a:solidFill>
+                      <a:prstDash val="solid"/>
+                      <a:round/>
+                      <a:headEnd type="none" w="med" len="med"/>
+                      <a:tailEnd type="none" w="med" len="med"/>
+                    </a:lnB>
+                    <a:solidFill>
+                      <a:srgbClr val="D6E4F0"/>
+                    </a:solidFill>
+                  </a:tcPr>
+                </a:tc>
+                <a:tc>
+                  <a:txBody>
+                    <a:bodyPr/>
+                    <a:lstStyle/>
+                    <a:p>
+                      <a:r>
+                        <a:rPr lang="it-IT" sz="1200" b="1" dirty="0" err="1">
+                          <a:solidFill>
+                            <a:schemeClr val="tx1"/>
+                          </a:solidFill>
+                        </a:rPr>
+                        <a:t>Std</a:t>
+                      </a:r>
+                      <a:r>
+                        <a:rPr lang="it-IT" sz="1200" b="1" dirty="0">
+                          <a:solidFill>
+                            <a:schemeClr val="tx1"/>
+                          </a:solidFill>
+                        </a:rPr>
+                        <a:t>. Dev.</a:t>
+                      </a:r>
+                    </a:p>
+                  </a:txBody>
+                  <a:tcPr>
+                    <a:lnL w="12700" cap="flat" cmpd="sng" algn="ctr">
+                      <a:solidFill>
+                        <a:schemeClr val="tx1"/>
+                      </a:solidFill>
+                      <a:prstDash val="solid"/>
+                      <a:round/>
+                      <a:headEnd type="none" w="med" len="med"/>
+                      <a:tailEnd type="none" w="med" len="med"/>
+                    </a:lnL>
+                    <a:lnR w="12700" cap="flat" cmpd="sng" algn="ctr">
+                      <a:solidFill>
+                        <a:schemeClr val="tx1"/>
+                      </a:solidFill>
+                      <a:prstDash val="solid"/>
+                      <a:round/>
+                      <a:headEnd type="none" w="med" len="med"/>
+                      <a:tailEnd type="none" w="med" len="med"/>
+                    </a:lnR>
+                    <a:lnT w="12700" cap="flat" cmpd="sng" algn="ctr">
+                      <a:solidFill>
+                        <a:schemeClr val="tx1"/>
+                      </a:solidFill>
+                      <a:prstDash val="solid"/>
+                      <a:round/>
+                      <a:headEnd type="none" w="med" len="med"/>
+                      <a:tailEnd type="none" w="med" len="med"/>
+                    </a:lnT>
+                    <a:lnB w="12700" cap="flat" cmpd="sng" algn="ctr">
+                      <a:solidFill>
+                        <a:schemeClr val="tx1"/>
+                      </a:solidFill>
+                      <a:prstDash val="solid"/>
+                      <a:round/>
+                      <a:headEnd type="none" w="med" len="med"/>
+                      <a:tailEnd type="none" w="med" len="med"/>
+                    </a:lnB>
+                    <a:solidFill>
+                      <a:srgbClr val="D6E4F0"/>
+                    </a:solidFill>
+                  </a:tcPr>
+                </a:tc>
+                <a:extLst>
+                  <a:ext uri="{0D108BD9-81ED-4DB2-BD59-A6C34878D82A}">
+                    <a16:rowId xmlns:a16="http://schemas.microsoft.com/office/drawing/2014/main" val="4258591342"/>
+                  </a:ext>
+                </a:extLst>
+              </a:tr>
+              <a:tr h="194448">
+                <a:tc>
+                  <a:txBody>
+                    <a:bodyPr/>
+                    <a:lstStyle/>
+                    <a:p>
+                      <a:r>
+                        <a:rPr lang="it-IT" sz="1200" dirty="0"/>
+                        <a:t>16.91</a:t>
+                      </a:r>
+                    </a:p>
+                  </a:txBody>
+                  <a:tcPr>
+                    <a:lnL w="12700" cap="flat" cmpd="sng" algn="ctr">
+                      <a:solidFill>
+                        <a:schemeClr val="tx1"/>
+                      </a:solidFill>
+                      <a:prstDash val="solid"/>
+                      <a:round/>
+                      <a:headEnd type="none" w="med" len="med"/>
+                      <a:tailEnd type="none" w="med" len="med"/>
+                    </a:lnL>
+                    <a:lnR w="12700" cap="flat" cmpd="sng" algn="ctr">
+                      <a:solidFill>
+                        <a:schemeClr val="tx1"/>
+                      </a:solidFill>
+                      <a:prstDash val="solid"/>
+                      <a:round/>
+                      <a:headEnd type="none" w="med" len="med"/>
+                      <a:tailEnd type="none" w="med" len="med"/>
+                    </a:lnR>
+                    <a:lnT w="12700" cap="flat" cmpd="sng" algn="ctr">
+                      <a:solidFill>
+                        <a:schemeClr val="tx1"/>
+                      </a:solidFill>
+                      <a:prstDash val="solid"/>
+                      <a:round/>
+                      <a:headEnd type="none" w="med" len="med"/>
+                      <a:tailEnd type="none" w="med" len="med"/>
+                    </a:lnT>
+                    <a:lnB w="12700" cap="flat" cmpd="sng" algn="ctr">
+                      <a:solidFill>
+                        <a:schemeClr val="tx1"/>
+                      </a:solidFill>
+                      <a:prstDash val="solid"/>
+                      <a:round/>
+                      <a:headEnd type="none" w="med" len="med"/>
+                      <a:tailEnd type="none" w="med" len="med"/>
+                    </a:lnB>
+                    <a:noFill/>
+                  </a:tcPr>
+                </a:tc>
+                <a:tc>
+                  <a:txBody>
+                    <a:bodyPr/>
+                    <a:lstStyle/>
+                    <a:p>
+                      <a:r>
+                        <a:rPr lang="it-IT" sz="1200" dirty="0"/>
+                        <a:t>0.57</a:t>
+                      </a:r>
+                    </a:p>
+                  </a:txBody>
+                  <a:tcPr>
+                    <a:lnL w="12700" cap="flat" cmpd="sng" algn="ctr">
+                      <a:solidFill>
+                        <a:schemeClr val="tx1"/>
+                      </a:solidFill>
+                      <a:prstDash val="solid"/>
+                      <a:round/>
+                      <a:headEnd type="none" w="med" len="med"/>
+                      <a:tailEnd type="none" w="med" len="med"/>
+                    </a:lnL>
+                    <a:lnR w="12700" cap="flat" cmpd="sng" algn="ctr">
+                      <a:solidFill>
+                        <a:schemeClr val="tx1"/>
+                      </a:solidFill>
+                      <a:prstDash val="solid"/>
+                      <a:round/>
+                      <a:headEnd type="none" w="med" len="med"/>
+                      <a:tailEnd type="none" w="med" len="med"/>
+                    </a:lnR>
+                    <a:lnT w="12700" cap="flat" cmpd="sng" algn="ctr">
+                      <a:solidFill>
+                        <a:schemeClr val="tx1"/>
+                      </a:solidFill>
+                      <a:prstDash val="solid"/>
+                      <a:round/>
+                      <a:headEnd type="none" w="med" len="med"/>
+                      <a:tailEnd type="none" w="med" len="med"/>
+                    </a:lnT>
+                    <a:lnB w="12700" cap="flat" cmpd="sng" algn="ctr">
+                      <a:solidFill>
+                        <a:schemeClr val="tx1"/>
+                      </a:solidFill>
+                      <a:prstDash val="solid"/>
+                      <a:round/>
+                      <a:headEnd type="none" w="med" len="med"/>
+                      <a:tailEnd type="none" w="med" len="med"/>
+                    </a:lnB>
+                    <a:noFill/>
+                  </a:tcPr>
+                </a:tc>
+                <a:extLst>
+                  <a:ext uri="{0D108BD9-81ED-4DB2-BD59-A6C34878D82A}">
+                    <a16:rowId xmlns:a16="http://schemas.microsoft.com/office/drawing/2014/main" val="599868980"/>
+                  </a:ext>
+                </a:extLst>
+              </a:tr>
+            </a:tbl>
+          </a:graphicData>
+        </a:graphic>
+      </p:graphicFrame>
+      <p:graphicFrame>
+        <p:nvGraphicFramePr>
+          <p:cNvPr id="14" name="Tabella 13">
+            <a:extLst>
+              <a:ext uri="{FF2B5EF4-FFF2-40B4-BE49-F238E27FC236}">
+                <a16:creationId xmlns:a16="http://schemas.microsoft.com/office/drawing/2014/main" id="{50146383-70B6-2311-65E8-CEB8607C3734}"/>
+              </a:ext>
+            </a:extLst>
+          </p:cNvPr>
+          <p:cNvGraphicFramePr>
+            <a:graphicFrameLocks noGrp="1"/>
+          </p:cNvGraphicFramePr>
+          <p:nvPr>
+            <p:extLst>
+              <p:ext uri="{D42A27DB-BD31-4B8C-83A1-F6EECF244321}">
+                <p14:modId xmlns:p14="http://schemas.microsoft.com/office/powerpoint/2010/main" val="2431981833"/>
+              </p:ext>
+            </p:extLst>
+          </p:nvPr>
+        </p:nvGraphicFramePr>
+        <p:xfrm>
+          <a:off x="4802123" y="3741010"/>
+          <a:ext cx="2955037" cy="822960"/>
+        </p:xfrm>
+        <a:graphic>
+          <a:graphicData uri="http://schemas.openxmlformats.org/drawingml/2006/table">
+            <a:tbl>
+              <a:tblPr firstRow="1" bandRow="1">
+                <a:tableStyleId>{5C22544A-7EE6-4342-B048-85BDC9FD1C3A}</a:tableStyleId>
+              </a:tblPr>
+              <a:tblGrid>
+                <a:gridCol w="895777">
+                  <a:extLst>
+                    <a:ext uri="{9D8B030D-6E8A-4147-A177-3AD203B41FA5}">
+                      <a16:colId xmlns:a16="http://schemas.microsoft.com/office/drawing/2014/main" val="125969615"/>
+                    </a:ext>
+                  </a:extLst>
+                </a:gridCol>
+                <a:gridCol w="514815">
+                  <a:extLst>
+                    <a:ext uri="{9D8B030D-6E8A-4147-A177-3AD203B41FA5}">
+                      <a16:colId xmlns:a16="http://schemas.microsoft.com/office/drawing/2014/main" val="2018588786"/>
+                    </a:ext>
+                  </a:extLst>
+                </a:gridCol>
+                <a:gridCol w="514815">
+                  <a:extLst>
+                    <a:ext uri="{9D8B030D-6E8A-4147-A177-3AD203B41FA5}">
+                      <a16:colId xmlns:a16="http://schemas.microsoft.com/office/drawing/2014/main" val="1209705665"/>
+                    </a:ext>
+                  </a:extLst>
+                </a:gridCol>
+                <a:gridCol w="514815">
+                  <a:extLst>
+                    <a:ext uri="{9D8B030D-6E8A-4147-A177-3AD203B41FA5}">
+                      <a16:colId xmlns:a16="http://schemas.microsoft.com/office/drawing/2014/main" val="4073463488"/>
+                    </a:ext>
+                  </a:extLst>
+                </a:gridCol>
+                <a:gridCol w="514815">
+                  <a:extLst>
+                    <a:ext uri="{9D8B030D-6E8A-4147-A177-3AD203B41FA5}">
+                      <a16:colId xmlns:a16="http://schemas.microsoft.com/office/drawing/2014/main" val="782007197"/>
+                    </a:ext>
+                  </a:extLst>
+                </a:gridCol>
+              </a:tblGrid>
+              <a:tr h="264555">
+                <a:tc gridSpan="5">
+                  <a:txBody>
+                    <a:bodyPr/>
+                    <a:lstStyle/>
+                    <a:p>
+                      <a:pPr marL="0" marR="0" lvl="0" indent="0" algn="l" defTabSz="914400" rtl="0" eaLnBrk="1" fontAlgn="auto" latinLnBrk="0" hangingPunct="1">
+                        <a:lnSpc>
+                          <a:spcPct val="100000"/>
+                        </a:lnSpc>
+                        <a:spcBef>
+                          <a:spcPts val="0"/>
+                        </a:spcBef>
+                        <a:spcAft>
+                          <a:spcPts val="0"/>
+                        </a:spcAft>
+                        <a:buClrTx/>
+                        <a:buSzTx/>
+                        <a:buFontTx/>
+                        <a:buNone/>
+                        <a:tabLst/>
+                        <a:defRPr/>
+                      </a:pPr>
+                      <a:r>
+                        <a:rPr lang="it-IT" sz="1200" dirty="0">
+                          <a:solidFill>
+                            <a:schemeClr val="tx1"/>
+                          </a:solidFill>
+                        </a:rPr>
+                        <a:t>Action </a:t>
+                      </a:r>
+                      <a:r>
+                        <a:rPr lang="it-IT" sz="1200" dirty="0" err="1">
+                          <a:solidFill>
+                            <a:schemeClr val="tx1"/>
+                          </a:solidFill>
+                        </a:rPr>
+                        <a:t>distributions</a:t>
+                      </a:r>
+                      <a:endParaRPr lang="it-IT" sz="1200" dirty="0">
+                        <a:solidFill>
+                          <a:schemeClr val="tx1"/>
+                        </a:solidFill>
+                      </a:endParaRPr>
+                    </a:p>
+                  </a:txBody>
+                  <a:tcPr>
+                    <a:lnL w="12700" cap="flat" cmpd="sng" algn="ctr">
+                      <a:noFill/>
+                      <a:prstDash val="solid"/>
+                      <a:round/>
+                      <a:headEnd type="none" w="med" len="med"/>
+                      <a:tailEnd type="none" w="med" len="med"/>
+                    </a:lnL>
+                    <a:lnR w="12700" cap="flat" cmpd="sng" algn="ctr">
+                      <a:noFill/>
+                      <a:prstDash val="solid"/>
+                      <a:round/>
+                      <a:headEnd type="none" w="med" len="med"/>
+                      <a:tailEnd type="none" w="med" len="med"/>
+                    </a:lnR>
+                    <a:lnT w="12700" cap="flat" cmpd="sng" algn="ctr">
+                      <a:noFill/>
+                      <a:prstDash val="solid"/>
+                      <a:round/>
+                      <a:headEnd type="none" w="med" len="med"/>
+                      <a:tailEnd type="none" w="med" len="med"/>
+                    </a:lnT>
+                    <a:lnB w="12700" cap="flat" cmpd="sng" algn="ctr">
+                      <a:solidFill>
+                        <a:schemeClr val="tx1"/>
+                      </a:solidFill>
+                      <a:prstDash val="solid"/>
+                      <a:round/>
+                      <a:headEnd type="none" w="med" len="med"/>
+                      <a:tailEnd type="none" w="med" len="med"/>
+                    </a:lnB>
+                    <a:lnTlToBr w="12700" cmpd="sng">
+                      <a:noFill/>
+                      <a:prstDash val="solid"/>
+                    </a:lnTlToBr>
+                    <a:lnBlToTr w="12700" cmpd="sng">
+                      <a:noFill/>
+                      <a:prstDash val="solid"/>
+                    </a:lnBlToTr>
+                    <a:noFill/>
+                  </a:tcPr>
+                </a:tc>
+                <a:tc hMerge="1">
+                  <a:txBody>
+                    <a:bodyPr/>
+                    <a:lstStyle/>
+                    <a:p>
+                      <a:endParaRPr lang="it-IT" sz="1200" dirty="0">
+                        <a:solidFill>
+                          <a:schemeClr val="tx1"/>
+                        </a:solidFill>
+                      </a:endParaRPr>
+                    </a:p>
+                  </a:txBody>
+                  <a:tcPr>
+                    <a:lnL w="12700" cap="flat" cmpd="sng" algn="ctr">
+                      <a:noFill/>
+                      <a:prstDash val="solid"/>
+                      <a:round/>
+                      <a:headEnd type="none" w="med" len="med"/>
+                      <a:tailEnd type="none" w="med" len="med"/>
+                    </a:lnL>
+                    <a:lnR w="12700" cap="flat" cmpd="sng" algn="ctr">
+                      <a:noFill/>
+                      <a:prstDash val="solid"/>
+                      <a:round/>
+                      <a:headEnd type="none" w="med" len="med"/>
+                      <a:tailEnd type="none" w="med" len="med"/>
+                    </a:lnR>
+                    <a:lnT w="12700" cap="flat" cmpd="sng" algn="ctr">
+                      <a:noFill/>
+                      <a:prstDash val="solid"/>
+                      <a:round/>
+                      <a:headEnd type="none" w="med" len="med"/>
+                      <a:tailEnd type="none" w="med" len="med"/>
+                    </a:lnT>
+                    <a:lnB w="12700" cap="flat" cmpd="sng" algn="ctr">
+                      <a:solidFill>
+                        <a:schemeClr val="tx1"/>
+                      </a:solidFill>
+                      <a:prstDash val="solid"/>
+                      <a:round/>
+                      <a:headEnd type="none" w="med" len="med"/>
+                      <a:tailEnd type="none" w="med" len="med"/>
+                    </a:lnB>
+                    <a:lnTlToBr w="12700" cmpd="sng">
+                      <a:noFill/>
+                      <a:prstDash val="solid"/>
+                    </a:lnTlToBr>
+                    <a:lnBlToTr w="12700" cmpd="sng">
+                      <a:noFill/>
+                      <a:prstDash val="solid"/>
+                    </a:lnBlToTr>
+                    <a:noFill/>
+                  </a:tcPr>
+                </a:tc>
+                <a:tc hMerge="1">
+                  <a:txBody>
+                    <a:bodyPr/>
+                    <a:lstStyle/>
+                    <a:p>
+                      <a:pPr marL="0" marR="0" lvl="0" indent="0" algn="l" defTabSz="914400" rtl="0" eaLnBrk="1" fontAlgn="auto" latinLnBrk="0" hangingPunct="1">
+                        <a:lnSpc>
+                          <a:spcPct val="100000"/>
+                        </a:lnSpc>
+                        <a:spcBef>
+                          <a:spcPts val="0"/>
+                        </a:spcBef>
+                        <a:spcAft>
+                          <a:spcPts val="0"/>
+                        </a:spcAft>
+                        <a:buClrTx/>
+                        <a:buSzTx/>
+                        <a:buFontTx/>
+                        <a:buNone/>
+                        <a:tabLst/>
+                        <a:defRPr/>
+                      </a:pPr>
+                      <a:endParaRPr lang="it-IT" sz="1200" dirty="0">
+                        <a:solidFill>
+                          <a:schemeClr val="tx1"/>
+                        </a:solidFill>
+                      </a:endParaRPr>
+                    </a:p>
+                  </a:txBody>
+                  <a:tcPr>
+                    <a:lnL w="12700" cap="flat" cmpd="sng" algn="ctr">
+                      <a:noFill/>
+                      <a:prstDash val="solid"/>
+                      <a:round/>
+                      <a:headEnd type="none" w="med" len="med"/>
+                      <a:tailEnd type="none" w="med" len="med"/>
+                    </a:lnL>
+                    <a:lnR w="12700" cap="flat" cmpd="sng" algn="ctr">
+                      <a:noFill/>
+                      <a:prstDash val="solid"/>
+                      <a:round/>
+                      <a:headEnd type="none" w="med" len="med"/>
+                      <a:tailEnd type="none" w="med" len="med"/>
+                    </a:lnR>
+                    <a:lnT w="12700" cap="flat" cmpd="sng" algn="ctr">
+                      <a:noFill/>
+                      <a:prstDash val="solid"/>
+                      <a:round/>
+                      <a:headEnd type="none" w="med" len="med"/>
+                      <a:tailEnd type="none" w="med" len="med"/>
+                    </a:lnT>
+                    <a:lnB w="12700" cap="flat" cmpd="sng" algn="ctr">
+                      <a:solidFill>
+                        <a:schemeClr val="tx1"/>
+                      </a:solidFill>
+                      <a:prstDash val="solid"/>
+                      <a:round/>
+                      <a:headEnd type="none" w="med" len="med"/>
+                      <a:tailEnd type="none" w="med" len="med"/>
+                    </a:lnB>
+                    <a:lnTlToBr w="12700" cmpd="sng">
+                      <a:noFill/>
+                      <a:prstDash val="solid"/>
+                    </a:lnTlToBr>
+                    <a:lnBlToTr w="12700" cmpd="sng">
+                      <a:noFill/>
+                      <a:prstDash val="solid"/>
+                    </a:lnBlToTr>
+                    <a:noFill/>
+                  </a:tcPr>
+                </a:tc>
+                <a:tc hMerge="1">
+                  <a:txBody>
+                    <a:bodyPr/>
+                    <a:lstStyle/>
+                    <a:p>
+                      <a:pPr marL="0" marR="0" lvl="0" indent="0" algn="l" defTabSz="914400" rtl="0" eaLnBrk="1" fontAlgn="auto" latinLnBrk="0" hangingPunct="1">
+                        <a:lnSpc>
+                          <a:spcPct val="100000"/>
+                        </a:lnSpc>
+                        <a:spcBef>
+                          <a:spcPts val="0"/>
+                        </a:spcBef>
+                        <a:spcAft>
+                          <a:spcPts val="0"/>
+                        </a:spcAft>
+                        <a:buClrTx/>
+                        <a:buSzTx/>
+                        <a:buFontTx/>
+                        <a:buNone/>
+                        <a:tabLst/>
+                        <a:defRPr/>
+                      </a:pPr>
+                      <a:endParaRPr lang="it-IT" sz="1200" dirty="0">
+                        <a:solidFill>
+                          <a:schemeClr val="tx1"/>
+                        </a:solidFill>
+                      </a:endParaRPr>
+                    </a:p>
+                  </a:txBody>
+                  <a:tcPr>
+                    <a:lnL w="12700" cap="flat" cmpd="sng" algn="ctr">
+                      <a:noFill/>
+                      <a:prstDash val="solid"/>
+                      <a:round/>
+                      <a:headEnd type="none" w="med" len="med"/>
+                      <a:tailEnd type="none" w="med" len="med"/>
+                    </a:lnL>
+                    <a:lnR w="12700" cap="flat" cmpd="sng" algn="ctr">
+                      <a:noFill/>
+                      <a:prstDash val="solid"/>
+                      <a:round/>
+                      <a:headEnd type="none" w="med" len="med"/>
+                      <a:tailEnd type="none" w="med" len="med"/>
+                    </a:lnR>
+                    <a:lnT w="12700" cap="flat" cmpd="sng" algn="ctr">
+                      <a:noFill/>
+                      <a:prstDash val="solid"/>
+                      <a:round/>
+                      <a:headEnd type="none" w="med" len="med"/>
+                      <a:tailEnd type="none" w="med" len="med"/>
+                    </a:lnT>
+                    <a:lnB w="12700" cap="flat" cmpd="sng" algn="ctr">
+                      <a:solidFill>
+                        <a:schemeClr val="tx1"/>
+                      </a:solidFill>
+                      <a:prstDash val="solid"/>
+                      <a:round/>
+                      <a:headEnd type="none" w="med" len="med"/>
+                      <a:tailEnd type="none" w="med" len="med"/>
+                    </a:lnB>
+                    <a:lnTlToBr w="12700" cmpd="sng">
+                      <a:noFill/>
+                      <a:prstDash val="solid"/>
+                    </a:lnTlToBr>
+                    <a:lnBlToTr w="12700" cmpd="sng">
+                      <a:noFill/>
+                      <a:prstDash val="solid"/>
+                    </a:lnBlToTr>
+                    <a:noFill/>
+                  </a:tcPr>
+                </a:tc>
+                <a:tc hMerge="1">
+                  <a:txBody>
+                    <a:bodyPr/>
+                    <a:lstStyle/>
+                    <a:p>
+                      <a:pPr marL="0" marR="0" lvl="0" indent="0" algn="l" defTabSz="914400" rtl="0" eaLnBrk="1" fontAlgn="auto" latinLnBrk="0" hangingPunct="1">
+                        <a:lnSpc>
+                          <a:spcPct val="100000"/>
+                        </a:lnSpc>
+                        <a:spcBef>
+                          <a:spcPts val="0"/>
+                        </a:spcBef>
+                        <a:spcAft>
+                          <a:spcPts val="0"/>
+                        </a:spcAft>
+                        <a:buClrTx/>
+                        <a:buSzTx/>
+                        <a:buFontTx/>
+                        <a:buNone/>
+                        <a:tabLst/>
+                        <a:defRPr/>
+                      </a:pPr>
+                      <a:endParaRPr lang="it-IT" sz="1200" dirty="0">
+                        <a:solidFill>
+                          <a:schemeClr val="tx1"/>
+                        </a:solidFill>
+                      </a:endParaRPr>
+                    </a:p>
+                  </a:txBody>
+                  <a:tcPr>
+                    <a:lnL w="12700" cap="flat" cmpd="sng" algn="ctr">
+                      <a:noFill/>
+                      <a:prstDash val="solid"/>
+                      <a:round/>
+                      <a:headEnd type="none" w="med" len="med"/>
+                      <a:tailEnd type="none" w="med" len="med"/>
+                    </a:lnL>
+                    <a:lnR w="12700" cap="flat" cmpd="sng" algn="ctr">
+                      <a:noFill/>
+                      <a:prstDash val="solid"/>
+                      <a:round/>
+                      <a:headEnd type="none" w="med" len="med"/>
+                      <a:tailEnd type="none" w="med" len="med"/>
+                    </a:lnR>
+                    <a:lnT w="12700" cap="flat" cmpd="sng" algn="ctr">
+                      <a:noFill/>
+                      <a:prstDash val="solid"/>
+                      <a:round/>
+                      <a:headEnd type="none" w="med" len="med"/>
+                      <a:tailEnd type="none" w="med" len="med"/>
+                    </a:lnT>
+                    <a:lnB w="12700" cap="flat" cmpd="sng" algn="ctr">
+                      <a:solidFill>
+                        <a:schemeClr val="tx1"/>
+                      </a:solidFill>
+                      <a:prstDash val="solid"/>
+                      <a:round/>
+                      <a:headEnd type="none" w="med" len="med"/>
+                      <a:tailEnd type="none" w="med" len="med"/>
+                    </a:lnB>
+                    <a:lnTlToBr w="12700" cmpd="sng">
+                      <a:noFill/>
+                      <a:prstDash val="solid"/>
+                    </a:lnTlToBr>
+                    <a:lnBlToTr w="12700" cmpd="sng">
+                      <a:noFill/>
+                      <a:prstDash val="solid"/>
+                    </a:lnBlToTr>
+                    <a:noFill/>
+                  </a:tcPr>
+                </a:tc>
+                <a:extLst>
+                  <a:ext uri="{0D108BD9-81ED-4DB2-BD59-A6C34878D82A}">
+                    <a16:rowId xmlns:a16="http://schemas.microsoft.com/office/drawing/2014/main" val="4174898734"/>
+                  </a:ext>
+                </a:extLst>
+              </a:tr>
+              <a:tr h="194448">
+                <a:tc>
+                  <a:txBody>
+                    <a:bodyPr/>
+                    <a:lstStyle/>
+                    <a:p>
+                      <a:r>
+                        <a:rPr lang="it-IT" sz="1200" b="1" dirty="0">
+                          <a:solidFill>
+                            <a:schemeClr val="tx1"/>
+                          </a:solidFill>
+                        </a:rPr>
+                        <a:t>Action</a:t>
+                      </a:r>
+                    </a:p>
+                  </a:txBody>
+                  <a:tcPr>
+                    <a:lnL w="12700" cap="flat" cmpd="sng" algn="ctr">
+                      <a:solidFill>
+                        <a:schemeClr val="tx1"/>
+                      </a:solidFill>
+                      <a:prstDash val="solid"/>
+                      <a:round/>
+                      <a:headEnd type="none" w="med" len="med"/>
+                      <a:tailEnd type="none" w="med" len="med"/>
+                    </a:lnL>
+                    <a:lnR w="12700" cap="flat" cmpd="sng" algn="ctr">
+                      <a:solidFill>
+                        <a:schemeClr val="tx1"/>
+                      </a:solidFill>
+                      <a:prstDash val="solid"/>
+                      <a:round/>
+                      <a:headEnd type="none" w="med" len="med"/>
+                      <a:tailEnd type="none" w="med" len="med"/>
+                    </a:lnR>
+                    <a:lnT w="12700" cap="flat" cmpd="sng" algn="ctr">
+                      <a:solidFill>
+                        <a:schemeClr val="tx1"/>
+                      </a:solidFill>
+                      <a:prstDash val="solid"/>
+                      <a:round/>
+                      <a:headEnd type="none" w="med" len="med"/>
+                      <a:tailEnd type="none" w="med" len="med"/>
+                    </a:lnT>
+                    <a:lnB w="12700" cap="flat" cmpd="sng" algn="ctr">
+                      <a:solidFill>
+                        <a:schemeClr val="tx1"/>
+                      </a:solidFill>
+                      <a:prstDash val="solid"/>
+                      <a:round/>
+                      <a:headEnd type="none" w="med" len="med"/>
+                      <a:tailEnd type="none" w="med" len="med"/>
+                    </a:lnB>
+                    <a:solidFill>
+                      <a:srgbClr val="D6E4F0"/>
+                    </a:solidFill>
+                  </a:tcPr>
+                </a:tc>
+                <a:tc>
+                  <a:txBody>
+                    <a:bodyPr/>
+                    <a:lstStyle/>
+                    <a:p>
+                      <a:r>
+                        <a:rPr lang="it-IT" sz="1200" b="1" dirty="0">
+                          <a:solidFill>
+                            <a:schemeClr val="tx1"/>
+                          </a:solidFill>
+                        </a:rPr>
+                        <a:t>1</a:t>
+                      </a:r>
+                    </a:p>
+                  </a:txBody>
+                  <a:tcPr>
+                    <a:lnL w="12700" cap="flat" cmpd="sng" algn="ctr">
+                      <a:solidFill>
+                        <a:schemeClr val="tx1"/>
+                      </a:solidFill>
+                      <a:prstDash val="solid"/>
+                      <a:round/>
+                      <a:headEnd type="none" w="med" len="med"/>
+                      <a:tailEnd type="none" w="med" len="med"/>
+                    </a:lnL>
+                    <a:lnR w="12700" cap="flat" cmpd="sng" algn="ctr">
+                      <a:solidFill>
+                        <a:schemeClr val="tx1"/>
+                      </a:solidFill>
+                      <a:prstDash val="solid"/>
+                      <a:round/>
+                      <a:headEnd type="none" w="med" len="med"/>
+                      <a:tailEnd type="none" w="med" len="med"/>
+                    </a:lnR>
+                    <a:lnT w="12700" cap="flat" cmpd="sng" algn="ctr">
+                      <a:solidFill>
+                        <a:schemeClr val="tx1"/>
+                      </a:solidFill>
+                      <a:prstDash val="solid"/>
+                      <a:round/>
+                      <a:headEnd type="none" w="med" len="med"/>
+                      <a:tailEnd type="none" w="med" len="med"/>
+                    </a:lnT>
+                    <a:lnB w="12700" cap="flat" cmpd="sng" algn="ctr">
+                      <a:solidFill>
+                        <a:schemeClr val="tx1"/>
+                      </a:solidFill>
+                      <a:prstDash val="solid"/>
+                      <a:round/>
+                      <a:headEnd type="none" w="med" len="med"/>
+                      <a:tailEnd type="none" w="med" len="med"/>
+                    </a:lnB>
+                    <a:solidFill>
+                      <a:srgbClr val="D6E4F0"/>
+                    </a:solidFill>
+                  </a:tcPr>
+                </a:tc>
+                <a:tc>
+                  <a:txBody>
+                    <a:bodyPr/>
+                    <a:lstStyle/>
+                    <a:p>
+                      <a:r>
+                        <a:rPr lang="it-IT" sz="1200" b="1" dirty="0">
+                          <a:solidFill>
+                            <a:schemeClr val="tx1"/>
+                          </a:solidFill>
+                        </a:rPr>
+                        <a:t>2</a:t>
+                      </a:r>
+                    </a:p>
+                  </a:txBody>
+                  <a:tcPr>
+                    <a:lnL w="12700" cap="flat" cmpd="sng" algn="ctr">
+                      <a:solidFill>
+                        <a:schemeClr val="tx1"/>
+                      </a:solidFill>
+                      <a:prstDash val="solid"/>
+                      <a:round/>
+                      <a:headEnd type="none" w="med" len="med"/>
+                      <a:tailEnd type="none" w="med" len="med"/>
+                    </a:lnL>
+                    <a:lnR w="12700" cap="flat" cmpd="sng" algn="ctr">
+                      <a:solidFill>
+                        <a:schemeClr val="tx1"/>
+                      </a:solidFill>
+                      <a:prstDash val="solid"/>
+                      <a:round/>
+                      <a:headEnd type="none" w="med" len="med"/>
+                      <a:tailEnd type="none" w="med" len="med"/>
+                    </a:lnR>
+                    <a:lnT w="12700" cap="flat" cmpd="sng" algn="ctr">
+                      <a:solidFill>
+                        <a:schemeClr val="tx1"/>
+                      </a:solidFill>
+                      <a:prstDash val="solid"/>
+                      <a:round/>
+                      <a:headEnd type="none" w="med" len="med"/>
+                      <a:tailEnd type="none" w="med" len="med"/>
+                    </a:lnT>
+                    <a:lnB w="12700" cap="flat" cmpd="sng" algn="ctr">
+                      <a:solidFill>
+                        <a:schemeClr val="tx1"/>
+                      </a:solidFill>
+                      <a:prstDash val="solid"/>
+                      <a:round/>
+                      <a:headEnd type="none" w="med" len="med"/>
+                      <a:tailEnd type="none" w="med" len="med"/>
+                    </a:lnB>
+                    <a:solidFill>
+                      <a:srgbClr val="D6E4F0"/>
+                    </a:solidFill>
+                  </a:tcPr>
+                </a:tc>
+                <a:tc>
+                  <a:txBody>
+                    <a:bodyPr/>
+                    <a:lstStyle/>
+                    <a:p>
+                      <a:r>
+                        <a:rPr lang="it-IT" sz="1200" b="1" dirty="0">
+                          <a:solidFill>
+                            <a:schemeClr val="tx1"/>
+                          </a:solidFill>
+                        </a:rPr>
+                        <a:t>3</a:t>
+                      </a:r>
+                    </a:p>
+                  </a:txBody>
+                  <a:tcPr>
+                    <a:lnL w="12700" cap="flat" cmpd="sng" algn="ctr">
+                      <a:solidFill>
+                        <a:schemeClr val="tx1"/>
+                      </a:solidFill>
+                      <a:prstDash val="solid"/>
+                      <a:round/>
+                      <a:headEnd type="none" w="med" len="med"/>
+                      <a:tailEnd type="none" w="med" len="med"/>
+                    </a:lnL>
+                    <a:lnR w="12700" cap="flat" cmpd="sng" algn="ctr">
+                      <a:solidFill>
+                        <a:schemeClr val="tx1"/>
+                      </a:solidFill>
+                      <a:prstDash val="solid"/>
+                      <a:round/>
+                      <a:headEnd type="none" w="med" len="med"/>
+                      <a:tailEnd type="none" w="med" len="med"/>
+                    </a:lnR>
+                    <a:lnT w="12700" cap="flat" cmpd="sng" algn="ctr">
+                      <a:solidFill>
+                        <a:schemeClr val="tx1"/>
+                      </a:solidFill>
+                      <a:prstDash val="solid"/>
+                      <a:round/>
+                      <a:headEnd type="none" w="med" len="med"/>
+                      <a:tailEnd type="none" w="med" len="med"/>
+                    </a:lnT>
+                    <a:lnB w="12700" cap="flat" cmpd="sng" algn="ctr">
+                      <a:solidFill>
+                        <a:schemeClr val="tx1"/>
+                      </a:solidFill>
+                      <a:prstDash val="solid"/>
+                      <a:round/>
+                      <a:headEnd type="none" w="med" len="med"/>
+                      <a:tailEnd type="none" w="med" len="med"/>
+                    </a:lnB>
+                    <a:solidFill>
+                      <a:srgbClr val="D6E4F0"/>
+                    </a:solidFill>
+                  </a:tcPr>
+                </a:tc>
+                <a:tc>
+                  <a:txBody>
+                    <a:bodyPr/>
+                    <a:lstStyle/>
+                    <a:p>
+                      <a:r>
+                        <a:rPr lang="it-IT" sz="1200" b="1" dirty="0">
+                          <a:solidFill>
+                            <a:schemeClr val="tx1"/>
+                          </a:solidFill>
+                        </a:rPr>
+                        <a:t>…</a:t>
+                      </a:r>
+                    </a:p>
+                  </a:txBody>
+                  <a:tcPr>
+                    <a:lnL w="12700" cap="flat" cmpd="sng" algn="ctr">
+                      <a:solidFill>
+                        <a:schemeClr val="tx1"/>
+                      </a:solidFill>
+                      <a:prstDash val="solid"/>
+                      <a:round/>
+                      <a:headEnd type="none" w="med" len="med"/>
+                      <a:tailEnd type="none" w="med" len="med"/>
+                    </a:lnL>
+                    <a:lnR w="12700" cap="flat" cmpd="sng" algn="ctr">
+                      <a:solidFill>
+                        <a:schemeClr val="tx1"/>
+                      </a:solidFill>
+                      <a:prstDash val="solid"/>
+                      <a:round/>
+                      <a:headEnd type="none" w="med" len="med"/>
+                      <a:tailEnd type="none" w="med" len="med"/>
+                    </a:lnR>
+                    <a:lnT w="12700" cap="flat" cmpd="sng" algn="ctr">
+                      <a:solidFill>
+                        <a:schemeClr val="tx1"/>
+                      </a:solidFill>
+                      <a:prstDash val="solid"/>
+                      <a:round/>
+                      <a:headEnd type="none" w="med" len="med"/>
+                      <a:tailEnd type="none" w="med" len="med"/>
+                    </a:lnT>
+                    <a:lnB w="12700" cap="flat" cmpd="sng" algn="ctr">
+                      <a:solidFill>
+                        <a:schemeClr val="tx1"/>
+                      </a:solidFill>
+                      <a:prstDash val="solid"/>
+                      <a:round/>
+                      <a:headEnd type="none" w="med" len="med"/>
+                      <a:tailEnd type="none" w="med" len="med"/>
+                    </a:lnB>
+                    <a:solidFill>
+                      <a:srgbClr val="D6E4F0"/>
+                    </a:solidFill>
+                  </a:tcPr>
+                </a:tc>
+                <a:extLst>
+                  <a:ext uri="{0D108BD9-81ED-4DB2-BD59-A6C34878D82A}">
+                    <a16:rowId xmlns:a16="http://schemas.microsoft.com/office/drawing/2014/main" val="2641656554"/>
+                  </a:ext>
+                </a:extLst>
+              </a:tr>
+              <a:tr h="194448">
+                <a:tc>
+                  <a:txBody>
+                    <a:bodyPr/>
+                    <a:lstStyle/>
+                    <a:p>
+                      <a:r>
+                        <a:rPr lang="it-IT" sz="1200" dirty="0" err="1"/>
+                        <a:t>Probability</a:t>
+                      </a:r>
+                      <a:endParaRPr lang="it-IT" sz="1200" dirty="0"/>
+                    </a:p>
+                  </a:txBody>
+                  <a:tcPr>
+                    <a:lnL w="12700" cap="flat" cmpd="sng" algn="ctr">
+                      <a:solidFill>
+                        <a:schemeClr val="tx1"/>
+                      </a:solidFill>
+                      <a:prstDash val="solid"/>
+                      <a:round/>
+                      <a:headEnd type="none" w="med" len="med"/>
+                      <a:tailEnd type="none" w="med" len="med"/>
+                    </a:lnL>
+                    <a:lnR w="12700" cap="flat" cmpd="sng" algn="ctr">
+                      <a:solidFill>
+                        <a:schemeClr val="tx1"/>
+                      </a:solidFill>
+                      <a:prstDash val="solid"/>
+                      <a:round/>
+                      <a:headEnd type="none" w="med" len="med"/>
+                      <a:tailEnd type="none" w="med" len="med"/>
+                    </a:lnR>
+                    <a:lnT w="12700" cap="flat" cmpd="sng" algn="ctr">
+                      <a:solidFill>
+                        <a:schemeClr val="tx1"/>
+                      </a:solidFill>
+                      <a:prstDash val="solid"/>
+                      <a:round/>
+                      <a:headEnd type="none" w="med" len="med"/>
+                      <a:tailEnd type="none" w="med" len="med"/>
+                    </a:lnT>
+                    <a:lnB w="12700" cap="flat" cmpd="sng" algn="ctr">
+                      <a:solidFill>
+                        <a:schemeClr val="tx1"/>
+                      </a:solidFill>
+                      <a:prstDash val="solid"/>
+                      <a:round/>
+                      <a:headEnd type="none" w="med" len="med"/>
+                      <a:tailEnd type="none" w="med" len="med"/>
+                    </a:lnB>
+                    <a:noFill/>
+                  </a:tcPr>
+                </a:tc>
+                <a:tc>
+                  <a:txBody>
+                    <a:bodyPr/>
+                    <a:lstStyle/>
+                    <a:p>
+                      <a:r>
+                        <a:rPr lang="it-IT" sz="1200" dirty="0"/>
+                        <a:t>1.0</a:t>
+                      </a:r>
+                    </a:p>
+                  </a:txBody>
+                  <a:tcPr>
+                    <a:lnL w="12700" cap="flat" cmpd="sng" algn="ctr">
+                      <a:solidFill>
+                        <a:schemeClr val="tx1"/>
+                      </a:solidFill>
+                      <a:prstDash val="solid"/>
+                      <a:round/>
+                      <a:headEnd type="none" w="med" len="med"/>
+                      <a:tailEnd type="none" w="med" len="med"/>
+                    </a:lnL>
+                    <a:lnR w="12700" cap="flat" cmpd="sng" algn="ctr">
+                      <a:solidFill>
+                        <a:schemeClr val="tx1"/>
+                      </a:solidFill>
+                      <a:prstDash val="solid"/>
+                      <a:round/>
+                      <a:headEnd type="none" w="med" len="med"/>
+                      <a:tailEnd type="none" w="med" len="med"/>
+                    </a:lnR>
+                    <a:lnT w="12700" cap="flat" cmpd="sng" algn="ctr">
+                      <a:solidFill>
+                        <a:schemeClr val="tx1"/>
+                      </a:solidFill>
+                      <a:prstDash val="solid"/>
+                      <a:round/>
+                      <a:headEnd type="none" w="med" len="med"/>
+                      <a:tailEnd type="none" w="med" len="med"/>
+                    </a:lnT>
+                    <a:lnB w="12700" cap="flat" cmpd="sng" algn="ctr">
+                      <a:solidFill>
+                        <a:schemeClr val="tx1"/>
+                      </a:solidFill>
+                      <a:prstDash val="solid"/>
+                      <a:round/>
+                      <a:headEnd type="none" w="med" len="med"/>
+                      <a:tailEnd type="none" w="med" len="med"/>
+                    </a:lnB>
+                    <a:noFill/>
+                  </a:tcPr>
+                </a:tc>
+                <a:tc>
+                  <a:txBody>
+                    <a:bodyPr/>
+                    <a:lstStyle/>
+                    <a:p>
+                      <a:r>
+                        <a:rPr lang="it-IT" sz="1200" dirty="0"/>
+                        <a:t>0.0</a:t>
+                      </a:r>
+                    </a:p>
+                  </a:txBody>
+                  <a:tcPr>
+                    <a:lnL w="12700" cap="flat" cmpd="sng" algn="ctr">
+                      <a:solidFill>
+                        <a:schemeClr val="tx1"/>
+                      </a:solidFill>
+                      <a:prstDash val="solid"/>
+                      <a:round/>
+                      <a:headEnd type="none" w="med" len="med"/>
+                      <a:tailEnd type="none" w="med" len="med"/>
+                    </a:lnL>
+                    <a:lnR w="12700" cap="flat" cmpd="sng" algn="ctr">
+                      <a:solidFill>
+                        <a:schemeClr val="tx1"/>
+                      </a:solidFill>
+                      <a:prstDash val="solid"/>
+                      <a:round/>
+                      <a:headEnd type="none" w="med" len="med"/>
+                      <a:tailEnd type="none" w="med" len="med"/>
+                    </a:lnR>
+                    <a:lnT w="12700" cap="flat" cmpd="sng" algn="ctr">
+                      <a:solidFill>
+                        <a:schemeClr val="tx1"/>
+                      </a:solidFill>
+                      <a:prstDash val="solid"/>
+                      <a:round/>
+                      <a:headEnd type="none" w="med" len="med"/>
+                      <a:tailEnd type="none" w="med" len="med"/>
+                    </a:lnT>
+                    <a:lnB w="12700" cap="flat" cmpd="sng" algn="ctr">
+                      <a:solidFill>
+                        <a:schemeClr val="tx1"/>
+                      </a:solidFill>
+                      <a:prstDash val="solid"/>
+                      <a:round/>
+                      <a:headEnd type="none" w="med" len="med"/>
+                      <a:tailEnd type="none" w="med" len="med"/>
+                    </a:lnB>
+                    <a:noFill/>
+                  </a:tcPr>
+                </a:tc>
+                <a:tc>
+                  <a:txBody>
+                    <a:bodyPr/>
+                    <a:lstStyle/>
+                    <a:p>
+                      <a:r>
+                        <a:rPr lang="it-IT" sz="1200" dirty="0"/>
+                        <a:t>0.0</a:t>
+                      </a:r>
+                    </a:p>
+                  </a:txBody>
+                  <a:tcPr>
+                    <a:lnL w="12700" cap="flat" cmpd="sng" algn="ctr">
+                      <a:solidFill>
+                        <a:schemeClr val="tx1"/>
+                      </a:solidFill>
+                      <a:prstDash val="solid"/>
+                      <a:round/>
+                      <a:headEnd type="none" w="med" len="med"/>
+                      <a:tailEnd type="none" w="med" len="med"/>
+                    </a:lnL>
+                    <a:lnR w="12700" cap="flat" cmpd="sng" algn="ctr">
+                      <a:solidFill>
+                        <a:schemeClr val="tx1"/>
+                      </a:solidFill>
+                      <a:prstDash val="solid"/>
+                      <a:round/>
+                      <a:headEnd type="none" w="med" len="med"/>
+                      <a:tailEnd type="none" w="med" len="med"/>
+                    </a:lnR>
+                    <a:lnT w="12700" cap="flat" cmpd="sng" algn="ctr">
+                      <a:solidFill>
+                        <a:schemeClr val="tx1"/>
+                      </a:solidFill>
+                      <a:prstDash val="solid"/>
+                      <a:round/>
+                      <a:headEnd type="none" w="med" len="med"/>
+                      <a:tailEnd type="none" w="med" len="med"/>
+                    </a:lnT>
+                    <a:lnB w="12700" cap="flat" cmpd="sng" algn="ctr">
+                      <a:solidFill>
+                        <a:schemeClr val="tx1"/>
+                      </a:solidFill>
+                      <a:prstDash val="solid"/>
+                      <a:round/>
+                      <a:headEnd type="none" w="med" len="med"/>
+                      <a:tailEnd type="none" w="med" len="med"/>
+                    </a:lnB>
+                    <a:noFill/>
+                  </a:tcPr>
+                </a:tc>
+                <a:tc>
+                  <a:txBody>
+                    <a:bodyPr/>
+                    <a:lstStyle/>
+                    <a:p>
+                      <a:r>
+                        <a:rPr lang="it-IT" sz="1200" dirty="0"/>
+                        <a:t>0.0</a:t>
+                      </a:r>
+                    </a:p>
+                  </a:txBody>
+                  <a:tcPr>
+                    <a:lnL w="12700" cap="flat" cmpd="sng" algn="ctr">
+                      <a:solidFill>
+                        <a:schemeClr val="tx1"/>
+                      </a:solidFill>
+                      <a:prstDash val="solid"/>
+                      <a:round/>
+                      <a:headEnd type="none" w="med" len="med"/>
+                      <a:tailEnd type="none" w="med" len="med"/>
+                    </a:lnL>
+                    <a:lnR w="12700" cap="flat" cmpd="sng" algn="ctr">
+                      <a:solidFill>
+                        <a:schemeClr val="tx1"/>
+                      </a:solidFill>
+                      <a:prstDash val="solid"/>
+                      <a:round/>
+                      <a:headEnd type="none" w="med" len="med"/>
+                      <a:tailEnd type="none" w="med" len="med"/>
+                    </a:lnR>
+                    <a:lnT w="12700" cap="flat" cmpd="sng" algn="ctr">
+                      <a:solidFill>
+                        <a:schemeClr val="tx1"/>
+                      </a:solidFill>
+                      <a:prstDash val="solid"/>
+                      <a:round/>
+                      <a:headEnd type="none" w="med" len="med"/>
+                      <a:tailEnd type="none" w="med" len="med"/>
+                    </a:lnT>
+                    <a:lnB w="12700" cap="flat" cmpd="sng" algn="ctr">
+                      <a:solidFill>
+                        <a:schemeClr val="tx1"/>
+                      </a:solidFill>
+                      <a:prstDash val="solid"/>
+                      <a:round/>
+                      <a:headEnd type="none" w="med" len="med"/>
+                      <a:tailEnd type="none" w="med" len="med"/>
+                    </a:lnB>
+                    <a:noFill/>
+                  </a:tcPr>
+                </a:tc>
+                <a:extLst>
+                  <a:ext uri="{0D108BD9-81ED-4DB2-BD59-A6C34878D82A}">
+                    <a16:rowId xmlns:a16="http://schemas.microsoft.com/office/drawing/2014/main" val="638192910"/>
+                  </a:ext>
+                </a:extLst>
+              </a:tr>
+            </a:tbl>
+          </a:graphicData>
+        </a:graphic>
+      </p:graphicFrame>
     </p:spTree>
   </p:cSld>
   <p:clrMapOvr>
@@ -14024,6 +15333,37 @@
           <a:chExt cx="0" cy="0"/>
         </a:xfrm>
       </p:grpSpPr>
+      <p:sp>
+        <p:nvSpPr>
+          <p:cNvPr id="18" name="Shape 6">
+            <a:extLst>
+              <a:ext uri="{FF2B5EF4-FFF2-40B4-BE49-F238E27FC236}">
+                <a16:creationId xmlns:a16="http://schemas.microsoft.com/office/drawing/2014/main" id="{D8EFB94C-0DE9-BCBB-8B88-78A5834E0A55}"/>
+              </a:ext>
+            </a:extLst>
+          </p:cNvPr>
+          <p:cNvSpPr/>
+          <p:nvPr/>
+        </p:nvSpPr>
+        <p:spPr>
+          <a:xfrm>
+            <a:off x="320040" y="1178432"/>
+            <a:ext cx="8503920" cy="1444752"/>
+          </a:xfrm>
+          <a:prstGeom prst="rect">
+            <a:avLst/>
+          </a:prstGeom>
+          <a:solidFill>
+            <a:srgbClr val="FFF3F3"/>
+          </a:solidFill>
+          <a:ln w="12700">
+            <a:solidFill>
+              <a:srgbClr val="C8472C"/>
+            </a:solidFill>
+            <a:prstDash val="solid"/>
+          </a:ln>
+        </p:spPr>
+      </p:sp>
       <p:sp>
         <p:nvSpPr>
           <p:cNvPr id="2" name="Text 0"/>
@@ -14191,70 +15531,6 @@
       </p:sp>
       <p:sp>
         <p:nvSpPr>
-          <p:cNvPr id="7" name="Text 5"/>
-          <p:cNvSpPr/>
-          <p:nvPr/>
-        </p:nvSpPr>
-        <p:spPr>
-          <a:xfrm>
-            <a:off x="457200" y="896112"/>
-            <a:ext cx="8229600" cy="320040"/>
-          </a:xfrm>
-          <a:prstGeom prst="rect">
-            <a:avLst/>
-          </a:prstGeom>
-          <a:noFill/>
-          <a:ln/>
-        </p:spPr>
-        <p:txBody>
-          <a:bodyPr wrap="square" rtlCol="0" anchor="ctr"/>
-          <a:lstStyle/>
-          <a:p>
-            <a:pPr marL="0" indent="0">
-              <a:buNone/>
-            </a:pPr>
-            <a:r>
-              <a:rPr lang="en-US" sz="1300" dirty="0">
-                <a:solidFill>
-                  <a:srgbClr val="5A5A5A"/>
-                </a:solidFill>
-                <a:latin typeface="Calibri" pitchFamily="34" charset="0"/>
-                <a:ea typeface="Calibri" pitchFamily="34" charset="-122"/>
-                <a:cs typeface="Calibri" pitchFamily="34" charset="-120"/>
-              </a:rPr>
-              <a:t>Two targeted modifications resolved the degenerate behavior:</a:t>
-            </a:r>
-            <a:endParaRPr lang="en-US" sz="1300" dirty="0"/>
-          </a:p>
-        </p:txBody>
-      </p:sp>
-      <p:sp>
-        <p:nvSpPr>
-          <p:cNvPr id="8" name="Shape 6"/>
-          <p:cNvSpPr/>
-          <p:nvPr/>
-        </p:nvSpPr>
-        <p:spPr>
-          <a:xfrm>
-            <a:off x="320040" y="1298448"/>
-            <a:ext cx="8503920" cy="1444752"/>
-          </a:xfrm>
-          <a:prstGeom prst="rect">
-            <a:avLst/>
-          </a:prstGeom>
-          <a:solidFill>
-            <a:srgbClr val="FFF3F3"/>
-          </a:solidFill>
-          <a:ln w="12700">
-            <a:solidFill>
-              <a:srgbClr val="C8472C"/>
-            </a:solidFill>
-            <a:prstDash val="solid"/>
-          </a:ln>
-        </p:spPr>
-      </p:sp>
-      <p:sp>
-        <p:nvSpPr>
           <p:cNvPr id="9" name="Text 7"/>
           <p:cNvSpPr/>
           <p:nvPr/>
@@ -14278,7 +15554,7 @@
               <a:buNone/>
             </a:pPr>
             <a:r>
-              <a:rPr lang="en-US" sz="1300" b="1" dirty="0">
+              <a:rPr lang="en-US" b="1" dirty="0">
                 <a:solidFill>
                   <a:srgbClr val="C8472C"/>
                 </a:solidFill>
@@ -14286,9 +15562,9 @@
                 <a:ea typeface="Calibri" pitchFamily="34" charset="-122"/>
                 <a:cs typeface="Calibri" pitchFamily="34" charset="-120"/>
               </a:rPr>
-              <a:t>Root Cause</a:t>
-            </a:r>
-            <a:endParaRPr lang="en-US" sz="1300" dirty="0"/>
+              <a:t>Interpretation</a:t>
+            </a:r>
+            <a:endParaRPr lang="en-US" dirty="0"/>
           </a:p>
         </p:txBody>
       </p:sp>
@@ -14300,8 +15576,8 @@
         </p:nvSpPr>
         <p:spPr>
           <a:xfrm>
-            <a:off x="502920" y="1664208"/>
-            <a:ext cx="8138160" cy="1005840"/>
+            <a:off x="502919" y="1664208"/>
+            <a:ext cx="4000501" cy="665227"/>
           </a:xfrm>
           <a:prstGeom prst="rect">
             <a:avLst/>
@@ -14318,10 +15594,11 @@
                 <a:spcPts val="500"/>
               </a:spcAft>
               <a:buSzPct val="100000"/>
+              <a:buFontTx/>
               <a:buChar char="•"/>
             </a:pPr>
             <a:r>
-              <a:rPr lang="en-US" sz="1300" dirty="0">
+              <a:rPr lang="en-US" sz="1600" dirty="0">
                 <a:solidFill>
                   <a:srgbClr val="1A1A1A"/>
                 </a:solidFill>
@@ -14329,9 +15606,8 @@
                 <a:ea typeface="Calibri" pitchFamily="34" charset="-122"/>
                 <a:cs typeface="Calibri" pitchFamily="34" charset="-120"/>
               </a:rPr>
-              <a:t>Sorted observations → padding always at end → action 0 always maps to the nearest cluster</a:t>
-            </a:r>
-            <a:endParaRPr lang="en-US" sz="1300" dirty="0"/>
+              <a:t>Only policy learned always chose action = 0</a:t>
+            </a:r>
           </a:p>
           <a:p>
             <a:pPr marL="190500" indent="-190500">
@@ -14339,10 +15615,11 @@
                 <a:spcPts val="500"/>
               </a:spcAft>
               <a:buSzPct val="100000"/>
+              <a:buFontTx/>
               <a:buChar char="•"/>
             </a:pPr>
             <a:r>
-              <a:rPr lang="en-US" sz="1300" dirty="0">
+              <a:rPr lang="en-US" sz="1600" dirty="0">
                 <a:solidFill>
                   <a:srgbClr val="1A1A1A"/>
                 </a:solidFill>
@@ -14350,46 +15627,153 @@
                 <a:ea typeface="Calibri" pitchFamily="34" charset="-122"/>
                 <a:cs typeface="Calibri" pitchFamily="34" charset="-120"/>
               </a:rPr>
-              <a:t>Large truncation penalty → always-picking-action-0 is the locally optimal (degenerate) strategy</a:t>
-            </a:r>
-            <a:endParaRPr lang="en-US" sz="1300" dirty="0"/>
+              <a:t>Diverging huge TD loss</a:t>
+            </a:r>
           </a:p>
         </p:txBody>
       </p:sp>
       <p:sp>
         <p:nvSpPr>
-          <p:cNvPr id="11" name="Shape 9"/>
+          <p:cNvPr id="15" name="Text 8">
+            <a:extLst>
+              <a:ext uri="{FF2B5EF4-FFF2-40B4-BE49-F238E27FC236}">
+                <a16:creationId xmlns:a16="http://schemas.microsoft.com/office/drawing/2014/main" id="{DBC1CF05-FB80-5024-B303-168429DC47FC}"/>
+              </a:ext>
+            </a:extLst>
+          </p:cNvPr>
           <p:cNvSpPr/>
           <p:nvPr/>
         </p:nvSpPr>
         <p:spPr>
           <a:xfrm>
-            <a:off x="320040" y="2834640"/>
-            <a:ext cx="8503920" cy="1920240"/>
+            <a:off x="5676900" y="1772032"/>
+            <a:ext cx="2857500" cy="341376"/>
+          </a:xfrm>
+          <a:prstGeom prst="rect">
+            <a:avLst/>
+          </a:prstGeom>
+          <a:noFill/>
+          <a:ln/>
+        </p:spPr>
+        <p:txBody>
+          <a:bodyPr wrap="square" rtlCol="0" anchor="t"/>
+          <a:lstStyle/>
+          <a:p>
+            <a:pPr>
+              <a:spcAft>
+                <a:spcPts val="500"/>
+              </a:spcAft>
+              <a:buSzPct val="100000"/>
+            </a:pPr>
+            <a:r>
+              <a:rPr lang="en-US" sz="1600" dirty="0">
+                <a:solidFill>
+                  <a:srgbClr val="1A1A1A"/>
+                </a:solidFill>
+                <a:latin typeface="Calibri" pitchFamily="34" charset="0"/>
+                <a:ea typeface="Calibri" pitchFamily="34" charset="-122"/>
+                <a:cs typeface="Calibri" pitchFamily="34" charset="-120"/>
+              </a:rPr>
+              <a:t>Degenerated Policy</a:t>
+            </a:r>
+          </a:p>
+        </p:txBody>
+      </p:sp>
+      <p:cxnSp>
+        <p:nvCxnSpPr>
+          <p:cNvPr id="17" name="Connettore 2 16">
+            <a:extLst>
+              <a:ext uri="{FF2B5EF4-FFF2-40B4-BE49-F238E27FC236}">
+                <a16:creationId xmlns:a16="http://schemas.microsoft.com/office/drawing/2014/main" id="{272714BA-2147-04E3-170B-53D1AD2B69E9}"/>
+              </a:ext>
+            </a:extLst>
+          </p:cNvPr>
+          <p:cNvCxnSpPr/>
+          <p:nvPr/>
+        </p:nvCxnSpPr>
+        <p:spPr>
+          <a:xfrm>
+            <a:off x="4739640" y="1958340"/>
+            <a:ext cx="533400" cy="0"/>
+          </a:xfrm>
+          <a:prstGeom prst="straightConnector1">
+            <a:avLst/>
+          </a:prstGeom>
+          <a:ln w="28575">
+            <a:solidFill>
+              <a:srgbClr val="C00000"/>
+            </a:solidFill>
+            <a:tailEnd type="triangle"/>
+          </a:ln>
+        </p:spPr>
+        <p:style>
+          <a:lnRef idx="1">
+            <a:schemeClr val="accent1"/>
+          </a:lnRef>
+          <a:fillRef idx="0">
+            <a:schemeClr val="accent1"/>
+          </a:fillRef>
+          <a:effectRef idx="0">
+            <a:schemeClr val="accent1"/>
+          </a:effectRef>
+          <a:fontRef idx="minor">
+            <a:schemeClr val="tx1"/>
+          </a:fontRef>
+        </p:style>
+      </p:cxnSp>
+      <p:sp>
+        <p:nvSpPr>
+          <p:cNvPr id="19" name="Shape 6">
+            <a:extLst>
+              <a:ext uri="{FF2B5EF4-FFF2-40B4-BE49-F238E27FC236}">
+                <a16:creationId xmlns:a16="http://schemas.microsoft.com/office/drawing/2014/main" id="{B0F76DF1-2FC5-B064-121C-7293DA1C33E3}"/>
+              </a:ext>
+            </a:extLst>
+          </p:cNvPr>
+          <p:cNvSpPr/>
+          <p:nvPr/>
+        </p:nvSpPr>
+        <p:spPr>
+          <a:xfrm>
+            <a:off x="320040" y="2844164"/>
+            <a:ext cx="8503920" cy="1444752"/>
           </a:xfrm>
           <a:prstGeom prst="rect">
             <a:avLst/>
           </a:prstGeom>
           <a:solidFill>
-            <a:srgbClr val="F0F8F0"/>
+            <a:srgbClr val="FFF3F3"/>
           </a:solidFill>
           <a:ln w="12700">
             <a:solidFill>
-              <a:srgbClr val="4CAF50"/>
+              <a:srgbClr val="C8472C"/>
             </a:solidFill>
             <a:prstDash val="solid"/>
           </a:ln>
         </p:spPr>
+        <p:txBody>
+          <a:bodyPr/>
+          <a:lstStyle/>
+          <a:p>
+            <a:endParaRPr lang="it-IT" dirty="0"/>
+          </a:p>
+        </p:txBody>
       </p:sp>
       <p:sp>
         <p:nvSpPr>
-          <p:cNvPr id="12" name="Text 10"/>
+          <p:cNvPr id="20" name="Text 7">
+            <a:extLst>
+              <a:ext uri="{FF2B5EF4-FFF2-40B4-BE49-F238E27FC236}">
+                <a16:creationId xmlns:a16="http://schemas.microsoft.com/office/drawing/2014/main" id="{00369533-4D61-B342-5649-10CAF7CF861D}"/>
+              </a:ext>
+            </a:extLst>
+          </p:cNvPr>
           <p:cNvSpPr/>
           <p:nvPr/>
         </p:nvSpPr>
         <p:spPr>
           <a:xfrm>
-            <a:off x="502920" y="2907792"/>
+            <a:off x="502920" y="3037332"/>
             <a:ext cx="8229600" cy="274320"/>
           </a:xfrm>
           <a:prstGeom prst="rect">
@@ -14406,30 +15790,36 @@
               <a:buNone/>
             </a:pPr>
             <a:r>
-              <a:rPr lang="en-US" sz="1300" b="1" dirty="0">
+              <a:rPr lang="en-US" b="1" dirty="0">
                 <a:solidFill>
-                  <a:srgbClr val="2E7D32"/>
+                  <a:srgbClr val="C8472C"/>
                 </a:solidFill>
                 <a:latin typeface="Calibri" pitchFamily="34" charset="0"/>
                 <a:ea typeface="Calibri" pitchFamily="34" charset="-122"/>
                 <a:cs typeface="Calibri" pitchFamily="34" charset="-120"/>
               </a:rPr>
-              <a:t>Fix Applied → Model 2</a:t>
-            </a:r>
-            <a:endParaRPr lang="en-US" sz="1300" dirty="0"/>
+              <a:t>Root cause</a:t>
+            </a:r>
+            <a:endParaRPr lang="en-US" dirty="0"/>
           </a:p>
         </p:txBody>
       </p:sp>
       <p:sp>
         <p:nvSpPr>
-          <p:cNvPr id="13" name="Text 11"/>
+          <p:cNvPr id="21" name="Text 8">
+            <a:extLst>
+              <a:ext uri="{FF2B5EF4-FFF2-40B4-BE49-F238E27FC236}">
+                <a16:creationId xmlns:a16="http://schemas.microsoft.com/office/drawing/2014/main" id="{3C82A692-61BA-906F-351E-A5B833B2A71F}"/>
+              </a:ext>
+            </a:extLst>
+          </p:cNvPr>
           <p:cNvSpPr/>
           <p:nvPr/>
         </p:nvSpPr>
         <p:spPr>
           <a:xfrm>
-            <a:off x="502920" y="3218688"/>
-            <a:ext cx="8138160" cy="1463040"/>
+            <a:off x="502920" y="3329940"/>
+            <a:ext cx="7536180" cy="665227"/>
           </a:xfrm>
           <a:prstGeom prst="rect">
             <a:avLst/>
@@ -14446,10 +15836,11 @@
                 <a:spcPts val="500"/>
               </a:spcAft>
               <a:buSzPct val="100000"/>
+              <a:buFontTx/>
               <a:buChar char="•"/>
             </a:pPr>
             <a:r>
-              <a:rPr lang="en-US" sz="1300" dirty="0">
+              <a:rPr lang="en-US" sz="1600" dirty="0">
                 <a:solidFill>
                   <a:srgbClr val="1A1A1A"/>
                 </a:solidFill>
@@ -14457,9 +15848,52 @@
                 <a:ea typeface="Calibri" pitchFamily="34" charset="-122"/>
                 <a:cs typeface="Calibri" pitchFamily="34" charset="-120"/>
               </a:rPr>
-              <a:t>Remove distance sorting → all actions equally accessible at each step</a:t>
-            </a:r>
-            <a:endParaRPr lang="en-US" sz="1300" dirty="0"/>
+              <a:t>Padding always at end + Large penalty    </a:t>
+            </a:r>
+            <a:r>
+              <a:rPr lang="en-US" sz="1600" b="1" dirty="0">
+                <a:solidFill>
+                  <a:srgbClr val="C00000"/>
+                </a:solidFill>
+                <a:latin typeface="Calibri" pitchFamily="34" charset="0"/>
+                <a:ea typeface="Calibri" pitchFamily="34" charset="-122"/>
+                <a:cs typeface="Calibri" pitchFamily="34" charset="-120"/>
+              </a:rPr>
+              <a:t>→</a:t>
+            </a:r>
+            <a:r>
+              <a:rPr lang="en-US" sz="1600" dirty="0">
+                <a:solidFill>
+                  <a:srgbClr val="1A1A1A"/>
+                </a:solidFill>
+                <a:latin typeface="Calibri" pitchFamily="34" charset="0"/>
+                <a:ea typeface="Calibri" pitchFamily="34" charset="-122"/>
+                <a:cs typeface="Calibri" pitchFamily="34" charset="-120"/>
+              </a:rPr>
+              <a:t>    Strong </a:t>
+            </a:r>
+            <a:r>
+              <a:rPr lang="en-US" sz="1600" dirty="0" err="1">
+                <a:solidFill>
+                  <a:srgbClr val="1A1A1A"/>
+                </a:solidFill>
+                <a:latin typeface="Calibri" pitchFamily="34" charset="0"/>
+                <a:ea typeface="Calibri" pitchFamily="34" charset="-122"/>
+                <a:cs typeface="Calibri" pitchFamily="34" charset="-120"/>
+              </a:rPr>
+              <a:t>ncentive</a:t>
+            </a:r>
+            <a:r>
+              <a:rPr lang="en-US" sz="1600" dirty="0">
+                <a:solidFill>
+                  <a:srgbClr val="1A1A1A"/>
+                </a:solidFill>
+                <a:latin typeface="Calibri" pitchFamily="34" charset="0"/>
+                <a:ea typeface="Calibri" pitchFamily="34" charset="-122"/>
+                <a:cs typeface="Calibri" pitchFamily="34" charset="-120"/>
+              </a:rPr>
+              <a:t> to chose action = 0</a:t>
+            </a:r>
           </a:p>
           <a:p>
             <a:pPr marL="190500" indent="-190500">
@@ -14470,7 +15904,7 @@
               <a:buChar char="•"/>
             </a:pPr>
             <a:r>
-              <a:rPr lang="en-US" sz="1300" dirty="0">
+              <a:rPr lang="en-US" sz="1600" dirty="0">
                 <a:solidFill>
                   <a:srgbClr val="1A1A1A"/>
                 </a:solidFill>
@@ -14478,20 +15912,21 @@
                 <a:ea typeface="Calibri" pitchFamily="34" charset="-122"/>
                 <a:cs typeface="Calibri" pitchFamily="34" charset="-120"/>
               </a:rPr>
-              <a:t>Soften padding penalty → agent no longer exploits padding as a reward shortcut</a:t>
-            </a:r>
-            <a:endParaRPr lang="en-US" sz="1300" dirty="0"/>
-          </a:p>
-          <a:p>
-            <a:pPr marL="190500" indent="-190500">
-              <a:spcAft>
-                <a:spcPts val="500"/>
-              </a:spcAft>
-              <a:buSzPct val="100000"/>
-              <a:buChar char="•"/>
-            </a:pPr>
-            <a:r>
-              <a:rPr lang="en-US" sz="1300" dirty="0">
+              <a:t>Sorted Centroids    </a:t>
+            </a:r>
+            <a:r>
+              <a:rPr lang="en-US" sz="1600" b="1" dirty="0">
+                <a:solidFill>
+                  <a:srgbClr val="C00000"/>
+                </a:solidFill>
+                <a:latin typeface="Calibri" pitchFamily="34" charset="0"/>
+                <a:ea typeface="Calibri" pitchFamily="34" charset="-122"/>
+                <a:cs typeface="Calibri" pitchFamily="34" charset="-120"/>
+              </a:rPr>
+              <a:t>→  </a:t>
+            </a:r>
+            <a:r>
+              <a:rPr lang="en-US" sz="1600" dirty="0">
                 <a:solidFill>
                   <a:srgbClr val="1A1A1A"/>
                 </a:solidFill>
@@ -14499,9 +15934,30 @@
                 <a:ea typeface="Calibri" pitchFamily="34" charset="-122"/>
                 <a:cs typeface="Calibri" pitchFamily="34" charset="-120"/>
               </a:rPr>
-              <a:t>Switch to absolute reward → clearer and more stable exploration signal</a:t>
-            </a:r>
-            <a:endParaRPr lang="en-US" sz="1300" dirty="0"/>
+              <a:t>  </a:t>
+            </a:r>
+            <a:r>
+              <a:rPr lang="en-US" sz="1600" dirty="0" err="1">
+                <a:solidFill>
+                  <a:srgbClr val="1A1A1A"/>
+                </a:solidFill>
+                <a:latin typeface="Calibri" pitchFamily="34" charset="0"/>
+                <a:ea typeface="Calibri" pitchFamily="34" charset="-122"/>
+                <a:cs typeface="Calibri" pitchFamily="34" charset="-120"/>
+              </a:rPr>
+              <a:t>Chosing</a:t>
+            </a:r>
+            <a:r>
+              <a:rPr lang="en-US" sz="1600" dirty="0">
+                <a:solidFill>
+                  <a:srgbClr val="1A1A1A"/>
+                </a:solidFill>
+                <a:latin typeface="Calibri" pitchFamily="34" charset="0"/>
+                <a:ea typeface="Calibri" pitchFamily="34" charset="-122"/>
+                <a:cs typeface="Calibri" pitchFamily="34" charset="-120"/>
+              </a:rPr>
+              <a:t> action = 0 correspond to greedy heuristic</a:t>
+            </a:r>
           </a:p>
         </p:txBody>
       </p:sp>
@@ -15014,84 +16470,6 @@
       </p:grpSpPr>
       <p:sp>
         <p:nvSpPr>
-          <p:cNvPr id="2" name="Text 0"/>
-          <p:cNvSpPr/>
-          <p:nvPr/>
-        </p:nvSpPr>
-        <p:spPr>
-          <a:xfrm>
-            <a:off x="320040" y="4846320"/>
-            <a:ext cx="7772400" cy="201168"/>
-          </a:xfrm>
-          <a:prstGeom prst="rect">
-            <a:avLst/>
-          </a:prstGeom>
-          <a:noFill/>
-          <a:ln/>
-        </p:spPr>
-        <p:txBody>
-          <a:bodyPr wrap="square" rtlCol="0" anchor="ctr"/>
-          <a:lstStyle/>
-          <a:p>
-            <a:pPr marL="0" indent="0" algn="l">
-              <a:buNone/>
-            </a:pPr>
-            <a:r>
-              <a:rPr lang="en-US" sz="900" dirty="0">
-                <a:solidFill>
-                  <a:srgbClr val="BBBBBB"/>
-                </a:solidFill>
-                <a:latin typeface="Calibri" pitchFamily="34" charset="0"/>
-                <a:ea typeface="Calibri" pitchFamily="34" charset="-122"/>
-                <a:cs typeface="Calibri" pitchFamily="34" charset="-120"/>
-              </a:rPr>
-              <a:t>Paolo Spallanzani  ·  Deep RL in Frontier-Based Autonomous Exploration</a:t>
-            </a:r>
-            <a:endParaRPr lang="en-US" sz="900" dirty="0"/>
-          </a:p>
-        </p:txBody>
-      </p:sp>
-      <p:sp>
-        <p:nvSpPr>
-          <p:cNvPr id="3" name="Text 1"/>
-          <p:cNvSpPr/>
-          <p:nvPr/>
-        </p:nvSpPr>
-        <p:spPr>
-          <a:xfrm>
-            <a:off x="8412480" y="4846320"/>
-            <a:ext cx="457200" cy="201168"/>
-          </a:xfrm>
-          <a:prstGeom prst="rect">
-            <a:avLst/>
-          </a:prstGeom>
-          <a:noFill/>
-          <a:ln/>
-        </p:spPr>
-        <p:txBody>
-          <a:bodyPr wrap="square" rtlCol="0" anchor="ctr"/>
-          <a:lstStyle/>
-          <a:p>
-            <a:pPr marL="0" indent="0" algn="r">
-              <a:buNone/>
-            </a:pPr>
-            <a:r>
-              <a:rPr lang="en-US" sz="900" dirty="0">
-                <a:solidFill>
-                  <a:srgbClr val="BBBBBB"/>
-                </a:solidFill>
-                <a:latin typeface="Calibri" pitchFamily="34" charset="0"/>
-                <a:ea typeface="Calibri" pitchFamily="34" charset="-122"/>
-                <a:cs typeface="Calibri" pitchFamily="34" charset="-120"/>
-              </a:rPr>
-              <a:t>14 / 17</a:t>
-            </a:r>
-            <a:endParaRPr lang="en-US" sz="900" dirty="0"/>
-          </a:p>
-        </p:txBody>
-      </p:sp>
-      <p:sp>
-        <p:nvSpPr>
           <p:cNvPr id="4" name="Shape 2"/>
           <p:cNvSpPr/>
           <p:nvPr/>
@@ -15185,7 +16563,7 @@
         </p:nvSpPr>
         <p:spPr>
           <a:xfrm>
-            <a:off x="320040" y="896112"/>
+            <a:off x="320040" y="835152"/>
             <a:ext cx="8503920" cy="475488"/>
           </a:xfrm>
           <a:prstGeom prst="rect">
@@ -15210,7 +16588,7 @@
         </p:nvSpPr>
         <p:spPr>
           <a:xfrm>
-            <a:off x="457200" y="914400"/>
+            <a:off x="457200" y="853440"/>
             <a:ext cx="8229600" cy="411480"/>
           </a:xfrm>
           <a:prstGeom prst="rect">
@@ -15223,9 +16601,6 @@
           <a:bodyPr wrap="square" rtlCol="0" anchor="ctr"/>
           <a:lstStyle/>
           <a:p>
-            <a:pPr marL="0" indent="0">
-              <a:buNone/>
-            </a:pPr>
             <a:r>
               <a:rPr lang="en-US" sz="1200" b="1" dirty="0">
                 <a:solidFill>
@@ -15235,7 +16610,7 @@
                 <a:ea typeface="Calibri" pitchFamily="34" charset="-122"/>
                 <a:cs typeface="Calibri" pitchFamily="34" charset="-120"/>
               </a:rPr>
-              <a:t>Config: </a:t>
+              <a:t>Configuration:    </a:t>
             </a:r>
             <a:r>
               <a:rPr lang="en-US" sz="1200" dirty="0">
@@ -15246,7 +16621,7 @@
                 <a:ea typeface="Calibri" pitchFamily="34" charset="-122"/>
                 <a:cs typeface="Calibri" pitchFamily="34" charset="-120"/>
               </a:rPr>
-              <a:t>Reward 2 (absolute)  ·  Unsorted observations  ·  Soft padding penalty  ·  1M steps</a:t>
+              <a:t>Absolute centroids positions   ·   Not-sorted    ·    Agent position    ·   Reward 2   ·   1M steps</a:t>
             </a:r>
             <a:endParaRPr lang="en-US" sz="1200" dirty="0"/>
           </a:p>
@@ -15267,23 +16642,1661 @@
         </p:blipFill>
         <p:spPr>
           <a:xfrm>
-            <a:off x="320040" y="1463040"/>
-            <a:ext cx="5212080" cy="2322576"/>
+            <a:off x="320040" y="1368550"/>
+            <a:ext cx="5212080" cy="2279905"/>
           </a:xfrm>
           <a:prstGeom prst="rect">
             <a:avLst/>
           </a:prstGeom>
         </p:spPr>
       </p:pic>
+      <p:pic>
+        <p:nvPicPr>
+          <p:cNvPr id="11" name="Image 1" descr="/home/claude/assets/absolute_ag_notsorted_1e6_loss.png"/>
+          <p:cNvPicPr>
+            <a:picLocks noChangeAspect="1"/>
+          </p:cNvPicPr>
+          <p:nvPr/>
+        </p:nvPicPr>
+        <p:blipFill>
+          <a:blip r:embed="rId4"/>
+          <a:srcRect/>
+          <a:stretch/>
+        </p:blipFill>
+        <p:spPr>
+          <a:xfrm>
+            <a:off x="5623560" y="1368550"/>
+            <a:ext cx="3200400" cy="2279906"/>
+          </a:xfrm>
+          <a:prstGeom prst="rect">
+            <a:avLst/>
+          </a:prstGeom>
+        </p:spPr>
+      </p:pic>
+      <p:graphicFrame>
+        <p:nvGraphicFramePr>
+          <p:cNvPr id="15" name="Tabella 14">
+            <a:extLst>
+              <a:ext uri="{FF2B5EF4-FFF2-40B4-BE49-F238E27FC236}">
+                <a16:creationId xmlns:a16="http://schemas.microsoft.com/office/drawing/2014/main" id="{1B53B08E-3213-8AE6-722D-90F5AC50D217}"/>
+              </a:ext>
+            </a:extLst>
+          </p:cNvPr>
+          <p:cNvGraphicFramePr>
+            <a:graphicFrameLocks noGrp="1"/>
+          </p:cNvGraphicFramePr>
+          <p:nvPr>
+            <p:extLst>
+              <p:ext uri="{D42A27DB-BD31-4B8C-83A1-F6EECF244321}">
+                <p14:modId xmlns:p14="http://schemas.microsoft.com/office/powerpoint/2010/main" val="492908223"/>
+              </p:ext>
+            </p:extLst>
+          </p:nvPr>
+        </p:nvGraphicFramePr>
+        <p:xfrm>
+          <a:off x="1190244" y="3801970"/>
+          <a:ext cx="2955036" cy="822960"/>
+        </p:xfrm>
+        <a:graphic>
+          <a:graphicData uri="http://schemas.openxmlformats.org/drawingml/2006/table">
+            <a:tbl>
+              <a:tblPr firstRow="1" bandRow="1">
+                <a:tableStyleId>{5C22544A-7EE6-4342-B048-85BDC9FD1C3A}</a:tableStyleId>
+              </a:tblPr>
+              <a:tblGrid>
+                <a:gridCol w="1477518">
+                  <a:extLst>
+                    <a:ext uri="{9D8B030D-6E8A-4147-A177-3AD203B41FA5}">
+                      <a16:colId xmlns:a16="http://schemas.microsoft.com/office/drawing/2014/main" val="2914056647"/>
+                    </a:ext>
+                  </a:extLst>
+                </a:gridCol>
+                <a:gridCol w="1477518">
+                  <a:extLst>
+                    <a:ext uri="{9D8B030D-6E8A-4147-A177-3AD203B41FA5}">
+                      <a16:colId xmlns:a16="http://schemas.microsoft.com/office/drawing/2014/main" val="2011988342"/>
+                    </a:ext>
+                  </a:extLst>
+                </a:gridCol>
+              </a:tblGrid>
+              <a:tr h="264555">
+                <a:tc>
+                  <a:txBody>
+                    <a:bodyPr/>
+                    <a:lstStyle/>
+                    <a:p>
+                      <a:pPr marL="0" marR="0" lvl="0" indent="0" algn="l" defTabSz="914400" rtl="0" eaLnBrk="1" fontAlgn="auto" latinLnBrk="0" hangingPunct="1">
+                        <a:lnSpc>
+                          <a:spcPct val="100000"/>
+                        </a:lnSpc>
+                        <a:spcBef>
+                          <a:spcPts val="0"/>
+                        </a:spcBef>
+                        <a:spcAft>
+                          <a:spcPts val="0"/>
+                        </a:spcAft>
+                        <a:buClrTx/>
+                        <a:buSzTx/>
+                        <a:buFontTx/>
+                        <a:buNone/>
+                        <a:tabLst/>
+                        <a:defRPr/>
+                      </a:pPr>
+                      <a:r>
+                        <a:rPr lang="it-IT" sz="1200" dirty="0">
+                          <a:solidFill>
+                            <a:schemeClr val="tx1"/>
+                          </a:solidFill>
+                        </a:rPr>
+                        <a:t>Evaluation </a:t>
+                      </a:r>
+                      <a:r>
+                        <a:rPr lang="it-IT" sz="1200" dirty="0" err="1">
+                          <a:solidFill>
+                            <a:schemeClr val="tx1"/>
+                          </a:solidFill>
+                        </a:rPr>
+                        <a:t>reward</a:t>
+                      </a:r>
+                      <a:endParaRPr lang="it-IT" sz="1200" dirty="0">
+                        <a:solidFill>
+                          <a:schemeClr val="tx1"/>
+                        </a:solidFill>
+                      </a:endParaRPr>
+                    </a:p>
+                  </a:txBody>
+                  <a:tcPr>
+                    <a:lnL w="12700" cap="flat" cmpd="sng" algn="ctr">
+                      <a:noFill/>
+                      <a:prstDash val="solid"/>
+                      <a:round/>
+                      <a:headEnd type="none" w="med" len="med"/>
+                      <a:tailEnd type="none" w="med" len="med"/>
+                    </a:lnL>
+                    <a:lnR w="12700" cap="flat" cmpd="sng" algn="ctr">
+                      <a:noFill/>
+                      <a:prstDash val="solid"/>
+                      <a:round/>
+                      <a:headEnd type="none" w="med" len="med"/>
+                      <a:tailEnd type="none" w="med" len="med"/>
+                    </a:lnR>
+                    <a:lnT w="12700" cap="flat" cmpd="sng" algn="ctr">
+                      <a:noFill/>
+                      <a:prstDash val="solid"/>
+                      <a:round/>
+                      <a:headEnd type="none" w="med" len="med"/>
+                      <a:tailEnd type="none" w="med" len="med"/>
+                    </a:lnT>
+                    <a:lnB w="12700" cap="flat" cmpd="sng" algn="ctr">
+                      <a:solidFill>
+                        <a:schemeClr val="tx1"/>
+                      </a:solidFill>
+                      <a:prstDash val="solid"/>
+                      <a:round/>
+                      <a:headEnd type="none" w="med" len="med"/>
+                      <a:tailEnd type="none" w="med" len="med"/>
+                    </a:lnB>
+                    <a:lnTlToBr w="12700" cmpd="sng">
+                      <a:noFill/>
+                      <a:prstDash val="solid"/>
+                    </a:lnTlToBr>
+                    <a:lnBlToTr w="12700" cmpd="sng">
+                      <a:noFill/>
+                      <a:prstDash val="solid"/>
+                    </a:lnBlToTr>
+                    <a:noFill/>
+                  </a:tcPr>
+                </a:tc>
+                <a:tc>
+                  <a:txBody>
+                    <a:bodyPr/>
+                    <a:lstStyle/>
+                    <a:p>
+                      <a:endParaRPr lang="it-IT" sz="1200" dirty="0">
+                        <a:solidFill>
+                          <a:schemeClr val="tx1"/>
+                        </a:solidFill>
+                      </a:endParaRPr>
+                    </a:p>
+                  </a:txBody>
+                  <a:tcPr>
+                    <a:lnL w="12700" cap="flat" cmpd="sng" algn="ctr">
+                      <a:noFill/>
+                      <a:prstDash val="solid"/>
+                      <a:round/>
+                      <a:headEnd type="none" w="med" len="med"/>
+                      <a:tailEnd type="none" w="med" len="med"/>
+                    </a:lnL>
+                    <a:lnR w="12700" cap="flat" cmpd="sng" algn="ctr">
+                      <a:noFill/>
+                      <a:prstDash val="solid"/>
+                      <a:round/>
+                      <a:headEnd type="none" w="med" len="med"/>
+                      <a:tailEnd type="none" w="med" len="med"/>
+                    </a:lnR>
+                    <a:lnT w="12700" cap="flat" cmpd="sng" algn="ctr">
+                      <a:noFill/>
+                      <a:prstDash val="solid"/>
+                      <a:round/>
+                      <a:headEnd type="none" w="med" len="med"/>
+                      <a:tailEnd type="none" w="med" len="med"/>
+                    </a:lnT>
+                    <a:lnB w="12700" cap="flat" cmpd="sng" algn="ctr">
+                      <a:solidFill>
+                        <a:schemeClr val="tx1"/>
+                      </a:solidFill>
+                      <a:prstDash val="solid"/>
+                      <a:round/>
+                      <a:headEnd type="none" w="med" len="med"/>
+                      <a:tailEnd type="none" w="med" len="med"/>
+                    </a:lnB>
+                    <a:lnTlToBr w="12700" cmpd="sng">
+                      <a:noFill/>
+                      <a:prstDash val="solid"/>
+                    </a:lnTlToBr>
+                    <a:lnBlToTr w="12700" cmpd="sng">
+                      <a:noFill/>
+                      <a:prstDash val="solid"/>
+                    </a:lnBlToTr>
+                    <a:noFill/>
+                  </a:tcPr>
+                </a:tc>
+                <a:extLst>
+                  <a:ext uri="{0D108BD9-81ED-4DB2-BD59-A6C34878D82A}">
+                    <a16:rowId xmlns:a16="http://schemas.microsoft.com/office/drawing/2014/main" val="859600443"/>
+                  </a:ext>
+                </a:extLst>
+              </a:tr>
+              <a:tr h="194448">
+                <a:tc>
+                  <a:txBody>
+                    <a:bodyPr/>
+                    <a:lstStyle/>
+                    <a:p>
+                      <a:r>
+                        <a:rPr lang="it-IT" sz="1200" b="1" dirty="0">
+                          <a:solidFill>
+                            <a:schemeClr val="tx1"/>
+                          </a:solidFill>
+                        </a:rPr>
+                        <a:t>Mean</a:t>
+                      </a:r>
+                    </a:p>
+                  </a:txBody>
+                  <a:tcPr>
+                    <a:lnL w="12700" cap="flat" cmpd="sng" algn="ctr">
+                      <a:solidFill>
+                        <a:schemeClr val="tx1"/>
+                      </a:solidFill>
+                      <a:prstDash val="solid"/>
+                      <a:round/>
+                      <a:headEnd type="none" w="med" len="med"/>
+                      <a:tailEnd type="none" w="med" len="med"/>
+                    </a:lnL>
+                    <a:lnR w="12700" cap="flat" cmpd="sng" algn="ctr">
+                      <a:solidFill>
+                        <a:schemeClr val="tx1"/>
+                      </a:solidFill>
+                      <a:prstDash val="solid"/>
+                      <a:round/>
+                      <a:headEnd type="none" w="med" len="med"/>
+                      <a:tailEnd type="none" w="med" len="med"/>
+                    </a:lnR>
+                    <a:lnT w="12700" cap="flat" cmpd="sng" algn="ctr">
+                      <a:solidFill>
+                        <a:schemeClr val="tx1"/>
+                      </a:solidFill>
+                      <a:prstDash val="solid"/>
+                      <a:round/>
+                      <a:headEnd type="none" w="med" len="med"/>
+                      <a:tailEnd type="none" w="med" len="med"/>
+                    </a:lnT>
+                    <a:lnB w="12700" cap="flat" cmpd="sng" algn="ctr">
+                      <a:solidFill>
+                        <a:schemeClr val="tx1"/>
+                      </a:solidFill>
+                      <a:prstDash val="solid"/>
+                      <a:round/>
+                      <a:headEnd type="none" w="med" len="med"/>
+                      <a:tailEnd type="none" w="med" len="med"/>
+                    </a:lnB>
+                    <a:solidFill>
+                      <a:srgbClr val="D6E4F0"/>
+                    </a:solidFill>
+                  </a:tcPr>
+                </a:tc>
+                <a:tc>
+                  <a:txBody>
+                    <a:bodyPr/>
+                    <a:lstStyle/>
+                    <a:p>
+                      <a:r>
+                        <a:rPr lang="it-IT" sz="1200" b="1" dirty="0" err="1">
+                          <a:solidFill>
+                            <a:schemeClr val="tx1"/>
+                          </a:solidFill>
+                        </a:rPr>
+                        <a:t>Std</a:t>
+                      </a:r>
+                      <a:r>
+                        <a:rPr lang="it-IT" sz="1200" b="1" dirty="0">
+                          <a:solidFill>
+                            <a:schemeClr val="tx1"/>
+                          </a:solidFill>
+                        </a:rPr>
+                        <a:t>. Dev.</a:t>
+                      </a:r>
+                    </a:p>
+                  </a:txBody>
+                  <a:tcPr>
+                    <a:lnL w="12700" cap="flat" cmpd="sng" algn="ctr">
+                      <a:solidFill>
+                        <a:schemeClr val="tx1"/>
+                      </a:solidFill>
+                      <a:prstDash val="solid"/>
+                      <a:round/>
+                      <a:headEnd type="none" w="med" len="med"/>
+                      <a:tailEnd type="none" w="med" len="med"/>
+                    </a:lnL>
+                    <a:lnR w="12700" cap="flat" cmpd="sng" algn="ctr">
+                      <a:solidFill>
+                        <a:schemeClr val="tx1"/>
+                      </a:solidFill>
+                      <a:prstDash val="solid"/>
+                      <a:round/>
+                      <a:headEnd type="none" w="med" len="med"/>
+                      <a:tailEnd type="none" w="med" len="med"/>
+                    </a:lnR>
+                    <a:lnT w="12700" cap="flat" cmpd="sng" algn="ctr">
+                      <a:solidFill>
+                        <a:schemeClr val="tx1"/>
+                      </a:solidFill>
+                      <a:prstDash val="solid"/>
+                      <a:round/>
+                      <a:headEnd type="none" w="med" len="med"/>
+                      <a:tailEnd type="none" w="med" len="med"/>
+                    </a:lnT>
+                    <a:lnB w="12700" cap="flat" cmpd="sng" algn="ctr">
+                      <a:solidFill>
+                        <a:schemeClr val="tx1"/>
+                      </a:solidFill>
+                      <a:prstDash val="solid"/>
+                      <a:round/>
+                      <a:headEnd type="none" w="med" len="med"/>
+                      <a:tailEnd type="none" w="med" len="med"/>
+                    </a:lnB>
+                    <a:solidFill>
+                      <a:srgbClr val="D6E4F0"/>
+                    </a:solidFill>
+                  </a:tcPr>
+                </a:tc>
+                <a:extLst>
+                  <a:ext uri="{0D108BD9-81ED-4DB2-BD59-A6C34878D82A}">
+                    <a16:rowId xmlns:a16="http://schemas.microsoft.com/office/drawing/2014/main" val="4258591342"/>
+                  </a:ext>
+                </a:extLst>
+              </a:tr>
+              <a:tr h="194448">
+                <a:tc>
+                  <a:txBody>
+                    <a:bodyPr/>
+                    <a:lstStyle/>
+                    <a:p>
+                      <a:r>
+                        <a:rPr lang="it-IT" sz="1200" dirty="0"/>
+                        <a:t>15.55</a:t>
+                      </a:r>
+                    </a:p>
+                  </a:txBody>
+                  <a:tcPr>
+                    <a:lnL w="12700" cap="flat" cmpd="sng" algn="ctr">
+                      <a:solidFill>
+                        <a:schemeClr val="tx1"/>
+                      </a:solidFill>
+                      <a:prstDash val="solid"/>
+                      <a:round/>
+                      <a:headEnd type="none" w="med" len="med"/>
+                      <a:tailEnd type="none" w="med" len="med"/>
+                    </a:lnL>
+                    <a:lnR w="12700" cap="flat" cmpd="sng" algn="ctr">
+                      <a:solidFill>
+                        <a:schemeClr val="tx1"/>
+                      </a:solidFill>
+                      <a:prstDash val="solid"/>
+                      <a:round/>
+                      <a:headEnd type="none" w="med" len="med"/>
+                      <a:tailEnd type="none" w="med" len="med"/>
+                    </a:lnR>
+                    <a:lnT w="12700" cap="flat" cmpd="sng" algn="ctr">
+                      <a:solidFill>
+                        <a:schemeClr val="tx1"/>
+                      </a:solidFill>
+                      <a:prstDash val="solid"/>
+                      <a:round/>
+                      <a:headEnd type="none" w="med" len="med"/>
+                      <a:tailEnd type="none" w="med" len="med"/>
+                    </a:lnT>
+                    <a:lnB w="12700" cap="flat" cmpd="sng" algn="ctr">
+                      <a:solidFill>
+                        <a:schemeClr val="tx1"/>
+                      </a:solidFill>
+                      <a:prstDash val="solid"/>
+                      <a:round/>
+                      <a:headEnd type="none" w="med" len="med"/>
+                      <a:tailEnd type="none" w="med" len="med"/>
+                    </a:lnB>
+                    <a:noFill/>
+                  </a:tcPr>
+                </a:tc>
+                <a:tc>
+                  <a:txBody>
+                    <a:bodyPr/>
+                    <a:lstStyle/>
+                    <a:p>
+                      <a:r>
+                        <a:rPr lang="it-IT" sz="1200" dirty="0"/>
+                        <a:t>2.45</a:t>
+                      </a:r>
+                    </a:p>
+                  </a:txBody>
+                  <a:tcPr>
+                    <a:lnL w="12700" cap="flat" cmpd="sng" algn="ctr">
+                      <a:solidFill>
+                        <a:schemeClr val="tx1"/>
+                      </a:solidFill>
+                      <a:prstDash val="solid"/>
+                      <a:round/>
+                      <a:headEnd type="none" w="med" len="med"/>
+                      <a:tailEnd type="none" w="med" len="med"/>
+                    </a:lnL>
+                    <a:lnR w="12700" cap="flat" cmpd="sng" algn="ctr">
+                      <a:solidFill>
+                        <a:schemeClr val="tx1"/>
+                      </a:solidFill>
+                      <a:prstDash val="solid"/>
+                      <a:round/>
+                      <a:headEnd type="none" w="med" len="med"/>
+                      <a:tailEnd type="none" w="med" len="med"/>
+                    </a:lnR>
+                    <a:lnT w="12700" cap="flat" cmpd="sng" algn="ctr">
+                      <a:solidFill>
+                        <a:schemeClr val="tx1"/>
+                      </a:solidFill>
+                      <a:prstDash val="solid"/>
+                      <a:round/>
+                      <a:headEnd type="none" w="med" len="med"/>
+                      <a:tailEnd type="none" w="med" len="med"/>
+                    </a:lnT>
+                    <a:lnB w="12700" cap="flat" cmpd="sng" algn="ctr">
+                      <a:solidFill>
+                        <a:schemeClr val="tx1"/>
+                      </a:solidFill>
+                      <a:prstDash val="solid"/>
+                      <a:round/>
+                      <a:headEnd type="none" w="med" len="med"/>
+                      <a:tailEnd type="none" w="med" len="med"/>
+                    </a:lnB>
+                    <a:noFill/>
+                  </a:tcPr>
+                </a:tc>
+                <a:extLst>
+                  <a:ext uri="{0D108BD9-81ED-4DB2-BD59-A6C34878D82A}">
+                    <a16:rowId xmlns:a16="http://schemas.microsoft.com/office/drawing/2014/main" val="599868980"/>
+                  </a:ext>
+                </a:extLst>
+              </a:tr>
+            </a:tbl>
+          </a:graphicData>
+        </a:graphic>
+      </p:graphicFrame>
+      <p:graphicFrame>
+        <p:nvGraphicFramePr>
+          <p:cNvPr id="16" name="Tabella 15">
+            <a:extLst>
+              <a:ext uri="{FF2B5EF4-FFF2-40B4-BE49-F238E27FC236}">
+                <a16:creationId xmlns:a16="http://schemas.microsoft.com/office/drawing/2014/main" id="{FB42DADA-AB9B-1D95-3072-5F611B9B5A71}"/>
+              </a:ext>
+            </a:extLst>
+          </p:cNvPr>
+          <p:cNvGraphicFramePr>
+            <a:graphicFrameLocks noGrp="1"/>
+          </p:cNvGraphicFramePr>
+          <p:nvPr>
+            <p:extLst>
+              <p:ext uri="{D42A27DB-BD31-4B8C-83A1-F6EECF244321}">
+                <p14:modId xmlns:p14="http://schemas.microsoft.com/office/powerpoint/2010/main" val="1630087378"/>
+              </p:ext>
+            </p:extLst>
+          </p:nvPr>
+        </p:nvGraphicFramePr>
+        <p:xfrm>
+          <a:off x="4504942" y="3796495"/>
+          <a:ext cx="4044697" cy="822960"/>
+        </p:xfrm>
+        <a:graphic>
+          <a:graphicData uri="http://schemas.openxmlformats.org/drawingml/2006/table">
+            <a:tbl>
+              <a:tblPr firstRow="1" bandRow="1">
+                <a:tableStyleId>{5C22544A-7EE6-4342-B048-85BDC9FD1C3A}</a:tableStyleId>
+              </a:tblPr>
+              <a:tblGrid>
+                <a:gridCol w="1072440">
+                  <a:extLst>
+                    <a:ext uri="{9D8B030D-6E8A-4147-A177-3AD203B41FA5}">
+                      <a16:colId xmlns:a16="http://schemas.microsoft.com/office/drawing/2014/main" val="125969615"/>
+                    </a:ext>
+                  </a:extLst>
+                </a:gridCol>
+                <a:gridCol w="616345">
+                  <a:extLst>
+                    <a:ext uri="{9D8B030D-6E8A-4147-A177-3AD203B41FA5}">
+                      <a16:colId xmlns:a16="http://schemas.microsoft.com/office/drawing/2014/main" val="2018588786"/>
+                    </a:ext>
+                  </a:extLst>
+                </a:gridCol>
+                <a:gridCol w="616345">
+                  <a:extLst>
+                    <a:ext uri="{9D8B030D-6E8A-4147-A177-3AD203B41FA5}">
+                      <a16:colId xmlns:a16="http://schemas.microsoft.com/office/drawing/2014/main" val="1209705665"/>
+                    </a:ext>
+                  </a:extLst>
+                </a:gridCol>
+                <a:gridCol w="616345">
+                  <a:extLst>
+                    <a:ext uri="{9D8B030D-6E8A-4147-A177-3AD203B41FA5}">
+                      <a16:colId xmlns:a16="http://schemas.microsoft.com/office/drawing/2014/main" val="4073463488"/>
+                    </a:ext>
+                  </a:extLst>
+                </a:gridCol>
+                <a:gridCol w="561611">
+                  <a:extLst>
+                    <a:ext uri="{9D8B030D-6E8A-4147-A177-3AD203B41FA5}">
+                      <a16:colId xmlns:a16="http://schemas.microsoft.com/office/drawing/2014/main" val="782007197"/>
+                    </a:ext>
+                  </a:extLst>
+                </a:gridCol>
+                <a:gridCol w="561611">
+                  <a:extLst>
+                    <a:ext uri="{9D8B030D-6E8A-4147-A177-3AD203B41FA5}">
+                      <a16:colId xmlns:a16="http://schemas.microsoft.com/office/drawing/2014/main" val="1105224779"/>
+                    </a:ext>
+                  </a:extLst>
+                </a:gridCol>
+              </a:tblGrid>
+              <a:tr h="264555">
+                <a:tc gridSpan="5">
+                  <a:txBody>
+                    <a:bodyPr/>
+                    <a:lstStyle/>
+                    <a:p>
+                      <a:pPr marL="0" marR="0" lvl="0" indent="0" algn="l" defTabSz="914400" rtl="0" eaLnBrk="1" fontAlgn="auto" latinLnBrk="0" hangingPunct="1">
+                        <a:lnSpc>
+                          <a:spcPct val="100000"/>
+                        </a:lnSpc>
+                        <a:spcBef>
+                          <a:spcPts val="0"/>
+                        </a:spcBef>
+                        <a:spcAft>
+                          <a:spcPts val="0"/>
+                        </a:spcAft>
+                        <a:buClrTx/>
+                        <a:buSzTx/>
+                        <a:buFontTx/>
+                        <a:buNone/>
+                        <a:tabLst/>
+                        <a:defRPr/>
+                      </a:pPr>
+                      <a:r>
+                        <a:rPr lang="it-IT" sz="1200" dirty="0">
+                          <a:solidFill>
+                            <a:schemeClr val="tx1"/>
+                          </a:solidFill>
+                        </a:rPr>
+                        <a:t>Action </a:t>
+                      </a:r>
+                      <a:r>
+                        <a:rPr lang="it-IT" sz="1200" dirty="0" err="1">
+                          <a:solidFill>
+                            <a:schemeClr val="tx1"/>
+                          </a:solidFill>
+                        </a:rPr>
+                        <a:t>distributions</a:t>
+                      </a:r>
+                      <a:endParaRPr lang="it-IT" sz="1200" dirty="0">
+                        <a:solidFill>
+                          <a:schemeClr val="tx1"/>
+                        </a:solidFill>
+                      </a:endParaRPr>
+                    </a:p>
+                  </a:txBody>
+                  <a:tcPr>
+                    <a:lnL w="12700" cap="flat" cmpd="sng" algn="ctr">
+                      <a:noFill/>
+                      <a:prstDash val="solid"/>
+                      <a:round/>
+                      <a:headEnd type="none" w="med" len="med"/>
+                      <a:tailEnd type="none" w="med" len="med"/>
+                    </a:lnL>
+                    <a:lnR w="12700" cap="flat" cmpd="sng" algn="ctr">
+                      <a:noFill/>
+                      <a:prstDash val="solid"/>
+                      <a:round/>
+                      <a:headEnd type="none" w="med" len="med"/>
+                      <a:tailEnd type="none" w="med" len="med"/>
+                    </a:lnR>
+                    <a:lnT w="12700" cap="flat" cmpd="sng" algn="ctr">
+                      <a:noFill/>
+                      <a:prstDash val="solid"/>
+                      <a:round/>
+                      <a:headEnd type="none" w="med" len="med"/>
+                      <a:tailEnd type="none" w="med" len="med"/>
+                    </a:lnT>
+                    <a:lnB w="12700" cap="flat" cmpd="sng" algn="ctr">
+                      <a:solidFill>
+                        <a:schemeClr val="tx1"/>
+                      </a:solidFill>
+                      <a:prstDash val="solid"/>
+                      <a:round/>
+                      <a:headEnd type="none" w="med" len="med"/>
+                      <a:tailEnd type="none" w="med" len="med"/>
+                    </a:lnB>
+                    <a:lnTlToBr w="12700" cmpd="sng">
+                      <a:noFill/>
+                      <a:prstDash val="solid"/>
+                    </a:lnTlToBr>
+                    <a:lnBlToTr w="12700" cmpd="sng">
+                      <a:noFill/>
+                      <a:prstDash val="solid"/>
+                    </a:lnBlToTr>
+                    <a:noFill/>
+                  </a:tcPr>
+                </a:tc>
+                <a:tc hMerge="1">
+                  <a:txBody>
+                    <a:bodyPr/>
+                    <a:lstStyle/>
+                    <a:p>
+                      <a:endParaRPr lang="it-IT" sz="1200" dirty="0">
+                        <a:solidFill>
+                          <a:schemeClr val="tx1"/>
+                        </a:solidFill>
+                      </a:endParaRPr>
+                    </a:p>
+                  </a:txBody>
+                  <a:tcPr>
+                    <a:lnL w="12700" cap="flat" cmpd="sng" algn="ctr">
+                      <a:noFill/>
+                      <a:prstDash val="solid"/>
+                      <a:round/>
+                      <a:headEnd type="none" w="med" len="med"/>
+                      <a:tailEnd type="none" w="med" len="med"/>
+                    </a:lnL>
+                    <a:lnR w="12700" cap="flat" cmpd="sng" algn="ctr">
+                      <a:noFill/>
+                      <a:prstDash val="solid"/>
+                      <a:round/>
+                      <a:headEnd type="none" w="med" len="med"/>
+                      <a:tailEnd type="none" w="med" len="med"/>
+                    </a:lnR>
+                    <a:lnT w="12700" cap="flat" cmpd="sng" algn="ctr">
+                      <a:noFill/>
+                      <a:prstDash val="solid"/>
+                      <a:round/>
+                      <a:headEnd type="none" w="med" len="med"/>
+                      <a:tailEnd type="none" w="med" len="med"/>
+                    </a:lnT>
+                    <a:lnB w="12700" cap="flat" cmpd="sng" algn="ctr">
+                      <a:solidFill>
+                        <a:schemeClr val="tx1"/>
+                      </a:solidFill>
+                      <a:prstDash val="solid"/>
+                      <a:round/>
+                      <a:headEnd type="none" w="med" len="med"/>
+                      <a:tailEnd type="none" w="med" len="med"/>
+                    </a:lnB>
+                    <a:lnTlToBr w="12700" cmpd="sng">
+                      <a:noFill/>
+                      <a:prstDash val="solid"/>
+                    </a:lnTlToBr>
+                    <a:lnBlToTr w="12700" cmpd="sng">
+                      <a:noFill/>
+                      <a:prstDash val="solid"/>
+                    </a:lnBlToTr>
+                    <a:noFill/>
+                  </a:tcPr>
+                </a:tc>
+                <a:tc hMerge="1">
+                  <a:txBody>
+                    <a:bodyPr/>
+                    <a:lstStyle/>
+                    <a:p>
+                      <a:pPr marL="0" marR="0" lvl="0" indent="0" algn="l" defTabSz="914400" rtl="0" eaLnBrk="1" fontAlgn="auto" latinLnBrk="0" hangingPunct="1">
+                        <a:lnSpc>
+                          <a:spcPct val="100000"/>
+                        </a:lnSpc>
+                        <a:spcBef>
+                          <a:spcPts val="0"/>
+                        </a:spcBef>
+                        <a:spcAft>
+                          <a:spcPts val="0"/>
+                        </a:spcAft>
+                        <a:buClrTx/>
+                        <a:buSzTx/>
+                        <a:buFontTx/>
+                        <a:buNone/>
+                        <a:tabLst/>
+                        <a:defRPr/>
+                      </a:pPr>
+                      <a:endParaRPr lang="it-IT" sz="1200" dirty="0">
+                        <a:solidFill>
+                          <a:schemeClr val="tx1"/>
+                        </a:solidFill>
+                      </a:endParaRPr>
+                    </a:p>
+                  </a:txBody>
+                  <a:tcPr>
+                    <a:lnL w="12700" cap="flat" cmpd="sng" algn="ctr">
+                      <a:noFill/>
+                      <a:prstDash val="solid"/>
+                      <a:round/>
+                      <a:headEnd type="none" w="med" len="med"/>
+                      <a:tailEnd type="none" w="med" len="med"/>
+                    </a:lnL>
+                    <a:lnR w="12700" cap="flat" cmpd="sng" algn="ctr">
+                      <a:noFill/>
+                      <a:prstDash val="solid"/>
+                      <a:round/>
+                      <a:headEnd type="none" w="med" len="med"/>
+                      <a:tailEnd type="none" w="med" len="med"/>
+                    </a:lnR>
+                    <a:lnT w="12700" cap="flat" cmpd="sng" algn="ctr">
+                      <a:noFill/>
+                      <a:prstDash val="solid"/>
+                      <a:round/>
+                      <a:headEnd type="none" w="med" len="med"/>
+                      <a:tailEnd type="none" w="med" len="med"/>
+                    </a:lnT>
+                    <a:lnB w="12700" cap="flat" cmpd="sng" algn="ctr">
+                      <a:solidFill>
+                        <a:schemeClr val="tx1"/>
+                      </a:solidFill>
+                      <a:prstDash val="solid"/>
+                      <a:round/>
+                      <a:headEnd type="none" w="med" len="med"/>
+                      <a:tailEnd type="none" w="med" len="med"/>
+                    </a:lnB>
+                    <a:lnTlToBr w="12700" cmpd="sng">
+                      <a:noFill/>
+                      <a:prstDash val="solid"/>
+                    </a:lnTlToBr>
+                    <a:lnBlToTr w="12700" cmpd="sng">
+                      <a:noFill/>
+                      <a:prstDash val="solid"/>
+                    </a:lnBlToTr>
+                    <a:noFill/>
+                  </a:tcPr>
+                </a:tc>
+                <a:tc hMerge="1">
+                  <a:txBody>
+                    <a:bodyPr/>
+                    <a:lstStyle/>
+                    <a:p>
+                      <a:pPr marL="0" marR="0" lvl="0" indent="0" algn="l" defTabSz="914400" rtl="0" eaLnBrk="1" fontAlgn="auto" latinLnBrk="0" hangingPunct="1">
+                        <a:lnSpc>
+                          <a:spcPct val="100000"/>
+                        </a:lnSpc>
+                        <a:spcBef>
+                          <a:spcPts val="0"/>
+                        </a:spcBef>
+                        <a:spcAft>
+                          <a:spcPts val="0"/>
+                        </a:spcAft>
+                        <a:buClrTx/>
+                        <a:buSzTx/>
+                        <a:buFontTx/>
+                        <a:buNone/>
+                        <a:tabLst/>
+                        <a:defRPr/>
+                      </a:pPr>
+                      <a:endParaRPr lang="it-IT" sz="1200" dirty="0">
+                        <a:solidFill>
+                          <a:schemeClr val="tx1"/>
+                        </a:solidFill>
+                      </a:endParaRPr>
+                    </a:p>
+                  </a:txBody>
+                  <a:tcPr>
+                    <a:lnL w="12700" cap="flat" cmpd="sng" algn="ctr">
+                      <a:noFill/>
+                      <a:prstDash val="solid"/>
+                      <a:round/>
+                      <a:headEnd type="none" w="med" len="med"/>
+                      <a:tailEnd type="none" w="med" len="med"/>
+                    </a:lnL>
+                    <a:lnR w="12700" cap="flat" cmpd="sng" algn="ctr">
+                      <a:noFill/>
+                      <a:prstDash val="solid"/>
+                      <a:round/>
+                      <a:headEnd type="none" w="med" len="med"/>
+                      <a:tailEnd type="none" w="med" len="med"/>
+                    </a:lnR>
+                    <a:lnT w="12700" cap="flat" cmpd="sng" algn="ctr">
+                      <a:noFill/>
+                      <a:prstDash val="solid"/>
+                      <a:round/>
+                      <a:headEnd type="none" w="med" len="med"/>
+                      <a:tailEnd type="none" w="med" len="med"/>
+                    </a:lnT>
+                    <a:lnB w="12700" cap="flat" cmpd="sng" algn="ctr">
+                      <a:solidFill>
+                        <a:schemeClr val="tx1"/>
+                      </a:solidFill>
+                      <a:prstDash val="solid"/>
+                      <a:round/>
+                      <a:headEnd type="none" w="med" len="med"/>
+                      <a:tailEnd type="none" w="med" len="med"/>
+                    </a:lnB>
+                    <a:lnTlToBr w="12700" cmpd="sng">
+                      <a:noFill/>
+                      <a:prstDash val="solid"/>
+                    </a:lnTlToBr>
+                    <a:lnBlToTr w="12700" cmpd="sng">
+                      <a:noFill/>
+                      <a:prstDash val="solid"/>
+                    </a:lnBlToTr>
+                    <a:noFill/>
+                  </a:tcPr>
+                </a:tc>
+                <a:tc hMerge="1">
+                  <a:txBody>
+                    <a:bodyPr/>
+                    <a:lstStyle/>
+                    <a:p>
+                      <a:pPr marL="0" marR="0" lvl="0" indent="0" algn="l" defTabSz="914400" rtl="0" eaLnBrk="1" fontAlgn="auto" latinLnBrk="0" hangingPunct="1">
+                        <a:lnSpc>
+                          <a:spcPct val="100000"/>
+                        </a:lnSpc>
+                        <a:spcBef>
+                          <a:spcPts val="0"/>
+                        </a:spcBef>
+                        <a:spcAft>
+                          <a:spcPts val="0"/>
+                        </a:spcAft>
+                        <a:buClrTx/>
+                        <a:buSzTx/>
+                        <a:buFontTx/>
+                        <a:buNone/>
+                        <a:tabLst/>
+                        <a:defRPr/>
+                      </a:pPr>
+                      <a:endParaRPr lang="it-IT" sz="1200" dirty="0">
+                        <a:solidFill>
+                          <a:schemeClr val="tx1"/>
+                        </a:solidFill>
+                      </a:endParaRPr>
+                    </a:p>
+                  </a:txBody>
+                  <a:tcPr>
+                    <a:lnL w="12700" cap="flat" cmpd="sng" algn="ctr">
+                      <a:noFill/>
+                      <a:prstDash val="solid"/>
+                      <a:round/>
+                      <a:headEnd type="none" w="med" len="med"/>
+                      <a:tailEnd type="none" w="med" len="med"/>
+                    </a:lnL>
+                    <a:lnR w="12700" cap="flat" cmpd="sng" algn="ctr">
+                      <a:noFill/>
+                      <a:prstDash val="solid"/>
+                      <a:round/>
+                      <a:headEnd type="none" w="med" len="med"/>
+                      <a:tailEnd type="none" w="med" len="med"/>
+                    </a:lnR>
+                    <a:lnT w="12700" cap="flat" cmpd="sng" algn="ctr">
+                      <a:noFill/>
+                      <a:prstDash val="solid"/>
+                      <a:round/>
+                      <a:headEnd type="none" w="med" len="med"/>
+                      <a:tailEnd type="none" w="med" len="med"/>
+                    </a:lnT>
+                    <a:lnB w="12700" cap="flat" cmpd="sng" algn="ctr">
+                      <a:solidFill>
+                        <a:schemeClr val="tx1"/>
+                      </a:solidFill>
+                      <a:prstDash val="solid"/>
+                      <a:round/>
+                      <a:headEnd type="none" w="med" len="med"/>
+                      <a:tailEnd type="none" w="med" len="med"/>
+                    </a:lnB>
+                    <a:lnTlToBr w="12700" cmpd="sng">
+                      <a:noFill/>
+                      <a:prstDash val="solid"/>
+                    </a:lnTlToBr>
+                    <a:lnBlToTr w="12700" cmpd="sng">
+                      <a:noFill/>
+                      <a:prstDash val="solid"/>
+                    </a:lnBlToTr>
+                    <a:noFill/>
+                  </a:tcPr>
+                </a:tc>
+                <a:tc>
+                  <a:txBody>
+                    <a:bodyPr/>
+                    <a:lstStyle/>
+                    <a:p>
+                      <a:pPr marL="0" marR="0" lvl="0" indent="0" algn="l" defTabSz="914400" rtl="0" eaLnBrk="1" fontAlgn="auto" latinLnBrk="0" hangingPunct="1">
+                        <a:lnSpc>
+                          <a:spcPct val="100000"/>
+                        </a:lnSpc>
+                        <a:spcBef>
+                          <a:spcPts val="0"/>
+                        </a:spcBef>
+                        <a:spcAft>
+                          <a:spcPts val="0"/>
+                        </a:spcAft>
+                        <a:buClrTx/>
+                        <a:buSzTx/>
+                        <a:buFontTx/>
+                        <a:buNone/>
+                        <a:tabLst/>
+                        <a:defRPr/>
+                      </a:pPr>
+                      <a:endParaRPr lang="it-IT" sz="1200" dirty="0">
+                        <a:solidFill>
+                          <a:schemeClr val="tx1"/>
+                        </a:solidFill>
+                      </a:endParaRPr>
+                    </a:p>
+                  </a:txBody>
+                  <a:tcPr>
+                    <a:lnL w="12700" cap="flat" cmpd="sng" algn="ctr">
+                      <a:noFill/>
+                      <a:prstDash val="solid"/>
+                      <a:round/>
+                      <a:headEnd type="none" w="med" len="med"/>
+                      <a:tailEnd type="none" w="med" len="med"/>
+                    </a:lnL>
+                    <a:lnR w="12700" cap="flat" cmpd="sng" algn="ctr">
+                      <a:noFill/>
+                      <a:prstDash val="solid"/>
+                      <a:round/>
+                      <a:headEnd type="none" w="med" len="med"/>
+                      <a:tailEnd type="none" w="med" len="med"/>
+                    </a:lnR>
+                    <a:lnT w="12700" cap="flat" cmpd="sng" algn="ctr">
+                      <a:noFill/>
+                      <a:prstDash val="solid"/>
+                      <a:round/>
+                      <a:headEnd type="none" w="med" len="med"/>
+                      <a:tailEnd type="none" w="med" len="med"/>
+                    </a:lnT>
+                    <a:lnB w="12700" cap="flat" cmpd="sng" algn="ctr">
+                      <a:solidFill>
+                        <a:schemeClr val="tx1"/>
+                      </a:solidFill>
+                      <a:prstDash val="solid"/>
+                      <a:round/>
+                      <a:headEnd type="none" w="med" len="med"/>
+                      <a:tailEnd type="none" w="med" len="med"/>
+                    </a:lnB>
+                    <a:lnTlToBr w="12700" cmpd="sng">
+                      <a:noFill/>
+                      <a:prstDash val="solid"/>
+                    </a:lnTlToBr>
+                    <a:lnBlToTr w="12700" cmpd="sng">
+                      <a:noFill/>
+                      <a:prstDash val="solid"/>
+                    </a:lnBlToTr>
+                    <a:noFill/>
+                  </a:tcPr>
+                </a:tc>
+                <a:extLst>
+                  <a:ext uri="{0D108BD9-81ED-4DB2-BD59-A6C34878D82A}">
+                    <a16:rowId xmlns:a16="http://schemas.microsoft.com/office/drawing/2014/main" val="4174898734"/>
+                  </a:ext>
+                </a:extLst>
+              </a:tr>
+              <a:tr h="194448">
+                <a:tc>
+                  <a:txBody>
+                    <a:bodyPr/>
+                    <a:lstStyle/>
+                    <a:p>
+                      <a:r>
+                        <a:rPr lang="it-IT" sz="1200" b="1" dirty="0">
+                          <a:solidFill>
+                            <a:schemeClr val="tx1"/>
+                          </a:solidFill>
+                        </a:rPr>
+                        <a:t>Action</a:t>
+                      </a:r>
+                    </a:p>
+                  </a:txBody>
+                  <a:tcPr>
+                    <a:lnL w="12700" cap="flat" cmpd="sng" algn="ctr">
+                      <a:solidFill>
+                        <a:schemeClr val="tx1"/>
+                      </a:solidFill>
+                      <a:prstDash val="solid"/>
+                      <a:round/>
+                      <a:headEnd type="none" w="med" len="med"/>
+                      <a:tailEnd type="none" w="med" len="med"/>
+                    </a:lnL>
+                    <a:lnR w="12700" cap="flat" cmpd="sng" algn="ctr">
+                      <a:solidFill>
+                        <a:schemeClr val="tx1"/>
+                      </a:solidFill>
+                      <a:prstDash val="solid"/>
+                      <a:round/>
+                      <a:headEnd type="none" w="med" len="med"/>
+                      <a:tailEnd type="none" w="med" len="med"/>
+                    </a:lnR>
+                    <a:lnT w="12700" cap="flat" cmpd="sng" algn="ctr">
+                      <a:solidFill>
+                        <a:schemeClr val="tx1"/>
+                      </a:solidFill>
+                      <a:prstDash val="solid"/>
+                      <a:round/>
+                      <a:headEnd type="none" w="med" len="med"/>
+                      <a:tailEnd type="none" w="med" len="med"/>
+                    </a:lnT>
+                    <a:lnB w="12700" cap="flat" cmpd="sng" algn="ctr">
+                      <a:solidFill>
+                        <a:schemeClr val="tx1"/>
+                      </a:solidFill>
+                      <a:prstDash val="solid"/>
+                      <a:round/>
+                      <a:headEnd type="none" w="med" len="med"/>
+                      <a:tailEnd type="none" w="med" len="med"/>
+                    </a:lnB>
+                    <a:solidFill>
+                      <a:srgbClr val="D6E4F0"/>
+                    </a:solidFill>
+                  </a:tcPr>
+                </a:tc>
+                <a:tc>
+                  <a:txBody>
+                    <a:bodyPr/>
+                    <a:lstStyle/>
+                    <a:p>
+                      <a:r>
+                        <a:rPr lang="it-IT" sz="1200" b="1" dirty="0">
+                          <a:solidFill>
+                            <a:schemeClr val="tx1"/>
+                          </a:solidFill>
+                        </a:rPr>
+                        <a:t>1</a:t>
+                      </a:r>
+                    </a:p>
+                  </a:txBody>
+                  <a:tcPr>
+                    <a:lnL w="12700" cap="flat" cmpd="sng" algn="ctr">
+                      <a:solidFill>
+                        <a:schemeClr val="tx1"/>
+                      </a:solidFill>
+                      <a:prstDash val="solid"/>
+                      <a:round/>
+                      <a:headEnd type="none" w="med" len="med"/>
+                      <a:tailEnd type="none" w="med" len="med"/>
+                    </a:lnL>
+                    <a:lnR w="12700" cap="flat" cmpd="sng" algn="ctr">
+                      <a:solidFill>
+                        <a:schemeClr val="tx1"/>
+                      </a:solidFill>
+                      <a:prstDash val="solid"/>
+                      <a:round/>
+                      <a:headEnd type="none" w="med" len="med"/>
+                      <a:tailEnd type="none" w="med" len="med"/>
+                    </a:lnR>
+                    <a:lnT w="12700" cap="flat" cmpd="sng" algn="ctr">
+                      <a:solidFill>
+                        <a:schemeClr val="tx1"/>
+                      </a:solidFill>
+                      <a:prstDash val="solid"/>
+                      <a:round/>
+                      <a:headEnd type="none" w="med" len="med"/>
+                      <a:tailEnd type="none" w="med" len="med"/>
+                    </a:lnT>
+                    <a:lnB w="12700" cap="flat" cmpd="sng" algn="ctr">
+                      <a:solidFill>
+                        <a:schemeClr val="tx1"/>
+                      </a:solidFill>
+                      <a:prstDash val="solid"/>
+                      <a:round/>
+                      <a:headEnd type="none" w="med" len="med"/>
+                      <a:tailEnd type="none" w="med" len="med"/>
+                    </a:lnB>
+                    <a:solidFill>
+                      <a:srgbClr val="D6E4F0"/>
+                    </a:solidFill>
+                  </a:tcPr>
+                </a:tc>
+                <a:tc>
+                  <a:txBody>
+                    <a:bodyPr/>
+                    <a:lstStyle/>
+                    <a:p>
+                      <a:r>
+                        <a:rPr lang="it-IT" sz="1200" b="1" dirty="0">
+                          <a:solidFill>
+                            <a:schemeClr val="tx1"/>
+                          </a:solidFill>
+                        </a:rPr>
+                        <a:t>2</a:t>
+                      </a:r>
+                    </a:p>
+                  </a:txBody>
+                  <a:tcPr>
+                    <a:lnL w="12700" cap="flat" cmpd="sng" algn="ctr">
+                      <a:solidFill>
+                        <a:schemeClr val="tx1"/>
+                      </a:solidFill>
+                      <a:prstDash val="solid"/>
+                      <a:round/>
+                      <a:headEnd type="none" w="med" len="med"/>
+                      <a:tailEnd type="none" w="med" len="med"/>
+                    </a:lnL>
+                    <a:lnR w="12700" cap="flat" cmpd="sng" algn="ctr">
+                      <a:solidFill>
+                        <a:schemeClr val="tx1"/>
+                      </a:solidFill>
+                      <a:prstDash val="solid"/>
+                      <a:round/>
+                      <a:headEnd type="none" w="med" len="med"/>
+                      <a:tailEnd type="none" w="med" len="med"/>
+                    </a:lnR>
+                    <a:lnT w="12700" cap="flat" cmpd="sng" algn="ctr">
+                      <a:solidFill>
+                        <a:schemeClr val="tx1"/>
+                      </a:solidFill>
+                      <a:prstDash val="solid"/>
+                      <a:round/>
+                      <a:headEnd type="none" w="med" len="med"/>
+                      <a:tailEnd type="none" w="med" len="med"/>
+                    </a:lnT>
+                    <a:lnB w="12700" cap="flat" cmpd="sng" algn="ctr">
+                      <a:solidFill>
+                        <a:schemeClr val="tx1"/>
+                      </a:solidFill>
+                      <a:prstDash val="solid"/>
+                      <a:round/>
+                      <a:headEnd type="none" w="med" len="med"/>
+                      <a:tailEnd type="none" w="med" len="med"/>
+                    </a:lnB>
+                    <a:solidFill>
+                      <a:srgbClr val="D6E4F0"/>
+                    </a:solidFill>
+                  </a:tcPr>
+                </a:tc>
+                <a:tc>
+                  <a:txBody>
+                    <a:bodyPr/>
+                    <a:lstStyle/>
+                    <a:p>
+                      <a:r>
+                        <a:rPr lang="it-IT" sz="1200" b="1" dirty="0">
+                          <a:solidFill>
+                            <a:schemeClr val="tx1"/>
+                          </a:solidFill>
+                        </a:rPr>
+                        <a:t>3</a:t>
+                      </a:r>
+                    </a:p>
+                  </a:txBody>
+                  <a:tcPr>
+                    <a:lnL w="12700" cap="flat" cmpd="sng" algn="ctr">
+                      <a:solidFill>
+                        <a:schemeClr val="tx1"/>
+                      </a:solidFill>
+                      <a:prstDash val="solid"/>
+                      <a:round/>
+                      <a:headEnd type="none" w="med" len="med"/>
+                      <a:tailEnd type="none" w="med" len="med"/>
+                    </a:lnL>
+                    <a:lnR w="12700" cap="flat" cmpd="sng" algn="ctr">
+                      <a:solidFill>
+                        <a:schemeClr val="tx1"/>
+                      </a:solidFill>
+                      <a:prstDash val="solid"/>
+                      <a:round/>
+                      <a:headEnd type="none" w="med" len="med"/>
+                      <a:tailEnd type="none" w="med" len="med"/>
+                    </a:lnR>
+                    <a:lnT w="12700" cap="flat" cmpd="sng" algn="ctr">
+                      <a:solidFill>
+                        <a:schemeClr val="tx1"/>
+                      </a:solidFill>
+                      <a:prstDash val="solid"/>
+                      <a:round/>
+                      <a:headEnd type="none" w="med" len="med"/>
+                      <a:tailEnd type="none" w="med" len="med"/>
+                    </a:lnT>
+                    <a:lnB w="12700" cap="flat" cmpd="sng" algn="ctr">
+                      <a:solidFill>
+                        <a:schemeClr val="tx1"/>
+                      </a:solidFill>
+                      <a:prstDash val="solid"/>
+                      <a:round/>
+                      <a:headEnd type="none" w="med" len="med"/>
+                      <a:tailEnd type="none" w="med" len="med"/>
+                    </a:lnB>
+                    <a:solidFill>
+                      <a:srgbClr val="D6E4F0"/>
+                    </a:solidFill>
+                  </a:tcPr>
+                </a:tc>
+                <a:tc>
+                  <a:txBody>
+                    <a:bodyPr/>
+                    <a:lstStyle/>
+                    <a:p>
+                      <a:r>
+                        <a:rPr lang="it-IT" sz="1200" b="1" dirty="0">
+                          <a:solidFill>
+                            <a:schemeClr val="tx1"/>
+                          </a:solidFill>
+                        </a:rPr>
+                        <a:t>4</a:t>
+                      </a:r>
+                    </a:p>
+                  </a:txBody>
+                  <a:tcPr>
+                    <a:lnL w="12700" cap="flat" cmpd="sng" algn="ctr">
+                      <a:solidFill>
+                        <a:schemeClr val="tx1"/>
+                      </a:solidFill>
+                      <a:prstDash val="solid"/>
+                      <a:round/>
+                      <a:headEnd type="none" w="med" len="med"/>
+                      <a:tailEnd type="none" w="med" len="med"/>
+                    </a:lnL>
+                    <a:lnR w="12700" cap="flat" cmpd="sng" algn="ctr">
+                      <a:solidFill>
+                        <a:schemeClr val="tx1"/>
+                      </a:solidFill>
+                      <a:prstDash val="solid"/>
+                      <a:round/>
+                      <a:headEnd type="none" w="med" len="med"/>
+                      <a:tailEnd type="none" w="med" len="med"/>
+                    </a:lnR>
+                    <a:lnT w="12700" cap="flat" cmpd="sng" algn="ctr">
+                      <a:solidFill>
+                        <a:schemeClr val="tx1"/>
+                      </a:solidFill>
+                      <a:prstDash val="solid"/>
+                      <a:round/>
+                      <a:headEnd type="none" w="med" len="med"/>
+                      <a:tailEnd type="none" w="med" len="med"/>
+                    </a:lnT>
+                    <a:lnB w="12700" cap="flat" cmpd="sng" algn="ctr">
+                      <a:solidFill>
+                        <a:schemeClr val="tx1"/>
+                      </a:solidFill>
+                      <a:prstDash val="solid"/>
+                      <a:round/>
+                      <a:headEnd type="none" w="med" len="med"/>
+                      <a:tailEnd type="none" w="med" len="med"/>
+                    </a:lnB>
+                    <a:solidFill>
+                      <a:srgbClr val="D6E4F0"/>
+                    </a:solidFill>
+                  </a:tcPr>
+                </a:tc>
+                <a:tc>
+                  <a:txBody>
+                    <a:bodyPr/>
+                    <a:lstStyle/>
+                    <a:p>
+                      <a:r>
+                        <a:rPr lang="it-IT" sz="1200" b="1" dirty="0">
+                          <a:solidFill>
+                            <a:schemeClr val="tx1"/>
+                          </a:solidFill>
+                        </a:rPr>
+                        <a:t>…</a:t>
+                      </a:r>
+                    </a:p>
+                  </a:txBody>
+                  <a:tcPr>
+                    <a:lnL w="12700" cap="flat" cmpd="sng" algn="ctr">
+                      <a:solidFill>
+                        <a:schemeClr val="tx1"/>
+                      </a:solidFill>
+                      <a:prstDash val="solid"/>
+                      <a:round/>
+                      <a:headEnd type="none" w="med" len="med"/>
+                      <a:tailEnd type="none" w="med" len="med"/>
+                    </a:lnL>
+                    <a:lnR w="12700" cap="flat" cmpd="sng" algn="ctr">
+                      <a:solidFill>
+                        <a:schemeClr val="tx1"/>
+                      </a:solidFill>
+                      <a:prstDash val="solid"/>
+                      <a:round/>
+                      <a:headEnd type="none" w="med" len="med"/>
+                      <a:tailEnd type="none" w="med" len="med"/>
+                    </a:lnR>
+                    <a:lnT w="12700" cap="flat" cmpd="sng" algn="ctr">
+                      <a:solidFill>
+                        <a:schemeClr val="tx1"/>
+                      </a:solidFill>
+                      <a:prstDash val="solid"/>
+                      <a:round/>
+                      <a:headEnd type="none" w="med" len="med"/>
+                      <a:tailEnd type="none" w="med" len="med"/>
+                    </a:lnT>
+                    <a:lnB w="12700" cap="flat" cmpd="sng" algn="ctr">
+                      <a:solidFill>
+                        <a:schemeClr val="tx1"/>
+                      </a:solidFill>
+                      <a:prstDash val="solid"/>
+                      <a:round/>
+                      <a:headEnd type="none" w="med" len="med"/>
+                      <a:tailEnd type="none" w="med" len="med"/>
+                    </a:lnB>
+                    <a:solidFill>
+                      <a:srgbClr val="D6E4F0"/>
+                    </a:solidFill>
+                  </a:tcPr>
+                </a:tc>
+                <a:extLst>
+                  <a:ext uri="{0D108BD9-81ED-4DB2-BD59-A6C34878D82A}">
+                    <a16:rowId xmlns:a16="http://schemas.microsoft.com/office/drawing/2014/main" val="2641656554"/>
+                  </a:ext>
+                </a:extLst>
+              </a:tr>
+              <a:tr h="194448">
+                <a:tc>
+                  <a:txBody>
+                    <a:bodyPr/>
+                    <a:lstStyle/>
+                    <a:p>
+                      <a:r>
+                        <a:rPr lang="it-IT" sz="1200" dirty="0" err="1"/>
+                        <a:t>Probability</a:t>
+                      </a:r>
+                      <a:endParaRPr lang="it-IT" sz="1200" dirty="0"/>
+                    </a:p>
+                  </a:txBody>
+                  <a:tcPr>
+                    <a:lnL w="12700" cap="flat" cmpd="sng" algn="ctr">
+                      <a:solidFill>
+                        <a:schemeClr val="tx1"/>
+                      </a:solidFill>
+                      <a:prstDash val="solid"/>
+                      <a:round/>
+                      <a:headEnd type="none" w="med" len="med"/>
+                      <a:tailEnd type="none" w="med" len="med"/>
+                    </a:lnL>
+                    <a:lnR w="12700" cap="flat" cmpd="sng" algn="ctr">
+                      <a:solidFill>
+                        <a:schemeClr val="tx1"/>
+                      </a:solidFill>
+                      <a:prstDash val="solid"/>
+                      <a:round/>
+                      <a:headEnd type="none" w="med" len="med"/>
+                      <a:tailEnd type="none" w="med" len="med"/>
+                    </a:lnR>
+                    <a:lnT w="12700" cap="flat" cmpd="sng" algn="ctr">
+                      <a:solidFill>
+                        <a:schemeClr val="tx1"/>
+                      </a:solidFill>
+                      <a:prstDash val="solid"/>
+                      <a:round/>
+                      <a:headEnd type="none" w="med" len="med"/>
+                      <a:tailEnd type="none" w="med" len="med"/>
+                    </a:lnT>
+                    <a:lnB w="12700" cap="flat" cmpd="sng" algn="ctr">
+                      <a:solidFill>
+                        <a:schemeClr val="tx1"/>
+                      </a:solidFill>
+                      <a:prstDash val="solid"/>
+                      <a:round/>
+                      <a:headEnd type="none" w="med" len="med"/>
+                      <a:tailEnd type="none" w="med" len="med"/>
+                    </a:lnB>
+                    <a:noFill/>
+                  </a:tcPr>
+                </a:tc>
+                <a:tc>
+                  <a:txBody>
+                    <a:bodyPr/>
+                    <a:lstStyle/>
+                    <a:p>
+                      <a:r>
+                        <a:rPr lang="it-IT" sz="1200" dirty="0"/>
+                        <a:t>0.51</a:t>
+                      </a:r>
+                    </a:p>
+                  </a:txBody>
+                  <a:tcPr>
+                    <a:lnL w="12700" cap="flat" cmpd="sng" algn="ctr">
+                      <a:solidFill>
+                        <a:schemeClr val="tx1"/>
+                      </a:solidFill>
+                      <a:prstDash val="solid"/>
+                      <a:round/>
+                      <a:headEnd type="none" w="med" len="med"/>
+                      <a:tailEnd type="none" w="med" len="med"/>
+                    </a:lnL>
+                    <a:lnR w="12700" cap="flat" cmpd="sng" algn="ctr">
+                      <a:solidFill>
+                        <a:schemeClr val="tx1"/>
+                      </a:solidFill>
+                      <a:prstDash val="solid"/>
+                      <a:round/>
+                      <a:headEnd type="none" w="med" len="med"/>
+                      <a:tailEnd type="none" w="med" len="med"/>
+                    </a:lnR>
+                    <a:lnT w="12700" cap="flat" cmpd="sng" algn="ctr">
+                      <a:solidFill>
+                        <a:schemeClr val="tx1"/>
+                      </a:solidFill>
+                      <a:prstDash val="solid"/>
+                      <a:round/>
+                      <a:headEnd type="none" w="med" len="med"/>
+                      <a:tailEnd type="none" w="med" len="med"/>
+                    </a:lnT>
+                    <a:lnB w="12700" cap="flat" cmpd="sng" algn="ctr">
+                      <a:solidFill>
+                        <a:schemeClr val="tx1"/>
+                      </a:solidFill>
+                      <a:prstDash val="solid"/>
+                      <a:round/>
+                      <a:headEnd type="none" w="med" len="med"/>
+                      <a:tailEnd type="none" w="med" len="med"/>
+                    </a:lnB>
+                    <a:noFill/>
+                  </a:tcPr>
+                </a:tc>
+                <a:tc>
+                  <a:txBody>
+                    <a:bodyPr/>
+                    <a:lstStyle/>
+                    <a:p>
+                      <a:r>
+                        <a:rPr lang="it-IT" sz="1200" dirty="0"/>
+                        <a:t>0.25</a:t>
+                      </a:r>
+                    </a:p>
+                  </a:txBody>
+                  <a:tcPr>
+                    <a:lnL w="12700" cap="flat" cmpd="sng" algn="ctr">
+                      <a:solidFill>
+                        <a:schemeClr val="tx1"/>
+                      </a:solidFill>
+                      <a:prstDash val="solid"/>
+                      <a:round/>
+                      <a:headEnd type="none" w="med" len="med"/>
+                      <a:tailEnd type="none" w="med" len="med"/>
+                    </a:lnL>
+                    <a:lnR w="12700" cap="flat" cmpd="sng" algn="ctr">
+                      <a:solidFill>
+                        <a:schemeClr val="tx1"/>
+                      </a:solidFill>
+                      <a:prstDash val="solid"/>
+                      <a:round/>
+                      <a:headEnd type="none" w="med" len="med"/>
+                      <a:tailEnd type="none" w="med" len="med"/>
+                    </a:lnR>
+                    <a:lnT w="12700" cap="flat" cmpd="sng" algn="ctr">
+                      <a:solidFill>
+                        <a:schemeClr val="tx1"/>
+                      </a:solidFill>
+                      <a:prstDash val="solid"/>
+                      <a:round/>
+                      <a:headEnd type="none" w="med" len="med"/>
+                      <a:tailEnd type="none" w="med" len="med"/>
+                    </a:lnT>
+                    <a:lnB w="12700" cap="flat" cmpd="sng" algn="ctr">
+                      <a:solidFill>
+                        <a:schemeClr val="tx1"/>
+                      </a:solidFill>
+                      <a:prstDash val="solid"/>
+                      <a:round/>
+                      <a:headEnd type="none" w="med" len="med"/>
+                      <a:tailEnd type="none" w="med" len="med"/>
+                    </a:lnB>
+                    <a:noFill/>
+                  </a:tcPr>
+                </a:tc>
+                <a:tc>
+                  <a:txBody>
+                    <a:bodyPr/>
+                    <a:lstStyle/>
+                    <a:p>
+                      <a:r>
+                        <a:rPr lang="it-IT" sz="1200" dirty="0"/>
+                        <a:t>0.21</a:t>
+                      </a:r>
+                    </a:p>
+                  </a:txBody>
+                  <a:tcPr>
+                    <a:lnL w="12700" cap="flat" cmpd="sng" algn="ctr">
+                      <a:solidFill>
+                        <a:schemeClr val="tx1"/>
+                      </a:solidFill>
+                      <a:prstDash val="solid"/>
+                      <a:round/>
+                      <a:headEnd type="none" w="med" len="med"/>
+                      <a:tailEnd type="none" w="med" len="med"/>
+                    </a:lnL>
+                    <a:lnR w="12700" cap="flat" cmpd="sng" algn="ctr">
+                      <a:solidFill>
+                        <a:schemeClr val="tx1"/>
+                      </a:solidFill>
+                      <a:prstDash val="solid"/>
+                      <a:round/>
+                      <a:headEnd type="none" w="med" len="med"/>
+                      <a:tailEnd type="none" w="med" len="med"/>
+                    </a:lnR>
+                    <a:lnT w="12700" cap="flat" cmpd="sng" algn="ctr">
+                      <a:solidFill>
+                        <a:schemeClr val="tx1"/>
+                      </a:solidFill>
+                      <a:prstDash val="solid"/>
+                      <a:round/>
+                      <a:headEnd type="none" w="med" len="med"/>
+                      <a:tailEnd type="none" w="med" len="med"/>
+                    </a:lnT>
+                    <a:lnB w="12700" cap="flat" cmpd="sng" algn="ctr">
+                      <a:solidFill>
+                        <a:schemeClr val="tx1"/>
+                      </a:solidFill>
+                      <a:prstDash val="solid"/>
+                      <a:round/>
+                      <a:headEnd type="none" w="med" len="med"/>
+                      <a:tailEnd type="none" w="med" len="med"/>
+                    </a:lnB>
+                    <a:noFill/>
+                  </a:tcPr>
+                </a:tc>
+                <a:tc>
+                  <a:txBody>
+                    <a:bodyPr/>
+                    <a:lstStyle/>
+                    <a:p>
+                      <a:r>
+                        <a:rPr lang="it-IT" sz="1200" dirty="0"/>
+                        <a:t>0.028</a:t>
+                      </a:r>
+                    </a:p>
+                  </a:txBody>
+                  <a:tcPr>
+                    <a:lnL w="12700" cap="flat" cmpd="sng" algn="ctr">
+                      <a:solidFill>
+                        <a:schemeClr val="tx1"/>
+                      </a:solidFill>
+                      <a:prstDash val="solid"/>
+                      <a:round/>
+                      <a:headEnd type="none" w="med" len="med"/>
+                      <a:tailEnd type="none" w="med" len="med"/>
+                    </a:lnL>
+                    <a:lnR w="12700" cap="flat" cmpd="sng" algn="ctr">
+                      <a:solidFill>
+                        <a:schemeClr val="tx1"/>
+                      </a:solidFill>
+                      <a:prstDash val="solid"/>
+                      <a:round/>
+                      <a:headEnd type="none" w="med" len="med"/>
+                      <a:tailEnd type="none" w="med" len="med"/>
+                    </a:lnR>
+                    <a:lnT w="12700" cap="flat" cmpd="sng" algn="ctr">
+                      <a:solidFill>
+                        <a:schemeClr val="tx1"/>
+                      </a:solidFill>
+                      <a:prstDash val="solid"/>
+                      <a:round/>
+                      <a:headEnd type="none" w="med" len="med"/>
+                      <a:tailEnd type="none" w="med" len="med"/>
+                    </a:lnT>
+                    <a:lnB w="12700" cap="flat" cmpd="sng" algn="ctr">
+                      <a:solidFill>
+                        <a:schemeClr val="tx1"/>
+                      </a:solidFill>
+                      <a:prstDash val="solid"/>
+                      <a:round/>
+                      <a:headEnd type="none" w="med" len="med"/>
+                      <a:tailEnd type="none" w="med" len="med"/>
+                    </a:lnB>
+                    <a:noFill/>
+                  </a:tcPr>
+                </a:tc>
+                <a:tc>
+                  <a:txBody>
+                    <a:bodyPr/>
+                    <a:lstStyle/>
+                    <a:p>
+                      <a:r>
+                        <a:rPr lang="it-IT" sz="1200" dirty="0"/>
+                        <a:t>0.00</a:t>
+                      </a:r>
+                    </a:p>
+                  </a:txBody>
+                  <a:tcPr>
+                    <a:lnL w="12700" cap="flat" cmpd="sng" algn="ctr">
+                      <a:solidFill>
+                        <a:schemeClr val="tx1"/>
+                      </a:solidFill>
+                      <a:prstDash val="solid"/>
+                      <a:round/>
+                      <a:headEnd type="none" w="med" len="med"/>
+                      <a:tailEnd type="none" w="med" len="med"/>
+                    </a:lnL>
+                    <a:lnR w="12700" cap="flat" cmpd="sng" algn="ctr">
+                      <a:solidFill>
+                        <a:schemeClr val="tx1"/>
+                      </a:solidFill>
+                      <a:prstDash val="solid"/>
+                      <a:round/>
+                      <a:headEnd type="none" w="med" len="med"/>
+                      <a:tailEnd type="none" w="med" len="med"/>
+                    </a:lnR>
+                    <a:lnT w="12700" cap="flat" cmpd="sng" algn="ctr">
+                      <a:solidFill>
+                        <a:schemeClr val="tx1"/>
+                      </a:solidFill>
+                      <a:prstDash val="solid"/>
+                      <a:round/>
+                      <a:headEnd type="none" w="med" len="med"/>
+                      <a:tailEnd type="none" w="med" len="med"/>
+                    </a:lnT>
+                    <a:lnB w="12700" cap="flat" cmpd="sng" algn="ctr">
+                      <a:solidFill>
+                        <a:schemeClr val="tx1"/>
+                      </a:solidFill>
+                      <a:prstDash val="solid"/>
+                      <a:round/>
+                      <a:headEnd type="none" w="med" len="med"/>
+                      <a:tailEnd type="none" w="med" len="med"/>
+                    </a:lnB>
+                    <a:noFill/>
+                  </a:tcPr>
+                </a:tc>
+                <a:extLst>
+                  <a:ext uri="{0D108BD9-81ED-4DB2-BD59-A6C34878D82A}">
+                    <a16:rowId xmlns:a16="http://schemas.microsoft.com/office/drawing/2014/main" val="638192910"/>
+                  </a:ext>
+                </a:extLst>
+              </a:tr>
+            </a:tbl>
+          </a:graphicData>
+        </a:graphic>
+      </p:graphicFrame>
       <p:sp>
         <p:nvSpPr>
-          <p:cNvPr id="10" name="Text 7"/>
+          <p:cNvPr id="17" name="Text 7">
+            <a:extLst>
+              <a:ext uri="{FF2B5EF4-FFF2-40B4-BE49-F238E27FC236}">
+                <a16:creationId xmlns:a16="http://schemas.microsoft.com/office/drawing/2014/main" id="{FD04F33C-E278-23E9-0264-CAC95382EAA7}"/>
+              </a:ext>
+            </a:extLst>
+          </p:cNvPr>
           <p:cNvSpPr/>
           <p:nvPr/>
         </p:nvSpPr>
         <p:spPr>
           <a:xfrm>
-            <a:off x="320040" y="3785616"/>
+            <a:off x="320040" y="3547708"/>
             <a:ext cx="5212080" cy="228600"/>
           </a:xfrm>
           <a:prstGeom prst="rect">
@@ -15300,7 +18313,7 @@
               <a:buNone/>
             </a:pPr>
             <a:r>
-              <a:rPr lang="en-US" sz="900" dirty="0">
+              <a:rPr lang="en-US" sz="1200" dirty="0">
                 <a:solidFill>
                   <a:srgbClr val="5A5A5A"/>
                 </a:solidFill>
@@ -15308,44 +18321,27 @@
                 <a:ea typeface="Calibri" pitchFamily="34" charset="-122"/>
                 <a:cs typeface="Calibri" pitchFamily="34" charset="-120"/>
               </a:rPr>
-              <a:t>Episode reward — monotone convergence to ~13</a:t>
-            </a:r>
-            <a:endParaRPr lang="en-US" sz="900" dirty="0"/>
+              <a:t>Episode reward</a:t>
+            </a:r>
+            <a:endParaRPr lang="en-US" sz="1200" dirty="0"/>
           </a:p>
         </p:txBody>
       </p:sp>
-      <p:pic>
-        <p:nvPicPr>
-          <p:cNvPr id="11" name="Image 1" descr="/home/claude/assets/absolute_ag_notsorted_1e6_loss.png"/>
-          <p:cNvPicPr>
-            <a:picLocks noChangeAspect="1"/>
-          </p:cNvPicPr>
-          <p:nvPr/>
-        </p:nvPicPr>
-        <p:blipFill>
-          <a:blip r:embed="rId4"/>
-          <a:srcRect/>
-          <a:stretch/>
-        </p:blipFill>
-        <p:spPr>
-          <a:xfrm>
-            <a:off x="5623560" y="1463040"/>
-            <a:ext cx="3200400" cy="2322576"/>
-          </a:xfrm>
-          <a:prstGeom prst="rect">
-            <a:avLst/>
-          </a:prstGeom>
-        </p:spPr>
-      </p:pic>
       <p:sp>
         <p:nvSpPr>
-          <p:cNvPr id="12" name="Text 8"/>
+          <p:cNvPr id="18" name="Text 8">
+            <a:extLst>
+              <a:ext uri="{FF2B5EF4-FFF2-40B4-BE49-F238E27FC236}">
+                <a16:creationId xmlns:a16="http://schemas.microsoft.com/office/drawing/2014/main" id="{CD231252-5FF8-456E-16C7-45AA245BE1D0}"/>
+              </a:ext>
+            </a:extLst>
+          </p:cNvPr>
           <p:cNvSpPr/>
           <p:nvPr/>
         </p:nvSpPr>
         <p:spPr>
           <a:xfrm>
-            <a:off x="5623560" y="3785616"/>
+            <a:off x="5623560" y="3542890"/>
             <a:ext cx="3200400" cy="228600"/>
           </a:xfrm>
           <a:prstGeom prst="rect">
@@ -15362,7 +18358,7 @@
               <a:buNone/>
             </a:pPr>
             <a:r>
-              <a:rPr lang="en-US" sz="900" dirty="0">
+              <a:rPr lang="en-US" sz="1200" dirty="0">
                 <a:solidFill>
                   <a:srgbClr val="5A5A5A"/>
                 </a:solidFill>
@@ -15370,71 +18366,7 @@
                 <a:ea typeface="Calibri" pitchFamily="34" charset="-122"/>
                 <a:cs typeface="Calibri" pitchFamily="34" charset="-120"/>
               </a:rPr>
-              <a:t>TD loss — stable, no explosion</a:t>
-            </a:r>
-            <a:endParaRPr lang="en-US" sz="900" dirty="0"/>
-          </a:p>
-        </p:txBody>
-      </p:sp>
-      <p:sp>
-        <p:nvSpPr>
-          <p:cNvPr id="13" name="Shape 9"/>
-          <p:cNvSpPr/>
-          <p:nvPr/>
-        </p:nvSpPr>
-        <p:spPr>
-          <a:xfrm>
-            <a:off x="320040" y="4069080"/>
-            <a:ext cx="8503920" cy="713232"/>
-          </a:xfrm>
-          <a:prstGeom prst="rect">
-            <a:avLst/>
-          </a:prstGeom>
-          <a:solidFill>
-            <a:srgbClr val="F0F8F0"/>
-          </a:solidFill>
-          <a:ln w="12700">
-            <a:solidFill>
-              <a:srgbClr val="4CAF50"/>
-            </a:solidFill>
-            <a:prstDash val="solid"/>
-          </a:ln>
-        </p:spPr>
-      </p:sp>
-      <p:sp>
-        <p:nvSpPr>
-          <p:cNvPr id="14" name="Text 10"/>
-          <p:cNvSpPr/>
-          <p:nvPr/>
-        </p:nvSpPr>
-        <p:spPr>
-          <a:xfrm>
-            <a:off x="502920" y="4114800"/>
-            <a:ext cx="8229600" cy="621792"/>
-          </a:xfrm>
-          <a:prstGeom prst="rect">
-            <a:avLst/>
-          </a:prstGeom>
-          <a:noFill/>
-          <a:ln/>
-        </p:spPr>
-        <p:txBody>
-          <a:bodyPr wrap="square" rtlCol="0" anchor="ctr"/>
-          <a:lstStyle/>
-          <a:p>
-            <a:pPr marL="0" indent="0">
-              <a:buNone/>
-            </a:pPr>
-            <a:r>
-              <a:rPr lang="en-US" sz="1200" b="1" dirty="0">
-                <a:solidFill>
-                  <a:srgbClr val="2E7D32"/>
-                </a:solidFill>
-                <a:latin typeface="Calibri" pitchFamily="34" charset="0"/>
-                <a:ea typeface="Calibri" pitchFamily="34" charset="-122"/>
-                <a:cs typeface="Calibri" pitchFamily="34" charset="-120"/>
-              </a:rPr>
-              <a:t>✓  First non-degenerate policy. Reward converges steadily; loss remains bounded throughout training.</a:t>
+              <a:t>TD loss</a:t>
             </a:r>
             <a:endParaRPr lang="en-US" sz="1200" dirty="0"/>
           </a:p>
@@ -15471,96 +18403,6 @@
           <a:chExt cx="0" cy="0"/>
         </a:xfrm>
       </p:grpSpPr>
-      <p:sp>
-        <p:nvSpPr>
-          <p:cNvPr id="2" name="Text 0">
-            <a:extLst>
-              <a:ext uri="{FF2B5EF4-FFF2-40B4-BE49-F238E27FC236}">
-                <a16:creationId xmlns:a16="http://schemas.microsoft.com/office/drawing/2014/main" id="{F1C25D64-AA0A-F76A-77D5-902D4F820AA1}"/>
-              </a:ext>
-            </a:extLst>
-          </p:cNvPr>
-          <p:cNvSpPr/>
-          <p:nvPr/>
-        </p:nvSpPr>
-        <p:spPr>
-          <a:xfrm>
-            <a:off x="320040" y="4846320"/>
-            <a:ext cx="7772400" cy="201168"/>
-          </a:xfrm>
-          <a:prstGeom prst="rect">
-            <a:avLst/>
-          </a:prstGeom>
-          <a:noFill/>
-          <a:ln/>
-        </p:spPr>
-        <p:txBody>
-          <a:bodyPr wrap="square" rtlCol="0" anchor="ctr"/>
-          <a:lstStyle/>
-          <a:p>
-            <a:pPr marL="0" indent="0" algn="l">
-              <a:buNone/>
-            </a:pPr>
-            <a:r>
-              <a:rPr lang="en-US" sz="900" dirty="0">
-                <a:solidFill>
-                  <a:srgbClr val="BBBBBB"/>
-                </a:solidFill>
-                <a:latin typeface="Calibri" pitchFamily="34" charset="0"/>
-                <a:ea typeface="Calibri" pitchFamily="34" charset="-122"/>
-                <a:cs typeface="Calibri" pitchFamily="34" charset="-120"/>
-              </a:rPr>
-              <a:t>Paolo Spallanzani  ·  Deep RL in Frontier-Based Autonomous Exploration</a:t>
-            </a:r>
-            <a:endParaRPr lang="en-US" sz="900" dirty="0"/>
-          </a:p>
-        </p:txBody>
-      </p:sp>
-      <p:sp>
-        <p:nvSpPr>
-          <p:cNvPr id="3" name="Text 1">
-            <a:extLst>
-              <a:ext uri="{FF2B5EF4-FFF2-40B4-BE49-F238E27FC236}">
-                <a16:creationId xmlns:a16="http://schemas.microsoft.com/office/drawing/2014/main" id="{F7B3AAB9-0524-4947-5294-2AC1B1486F5A}"/>
-              </a:ext>
-            </a:extLst>
-          </p:cNvPr>
-          <p:cNvSpPr/>
-          <p:nvPr/>
-        </p:nvSpPr>
-        <p:spPr>
-          <a:xfrm>
-            <a:off x="8412480" y="4846320"/>
-            <a:ext cx="457200" cy="201168"/>
-          </a:xfrm>
-          <a:prstGeom prst="rect">
-            <a:avLst/>
-          </a:prstGeom>
-          <a:noFill/>
-          <a:ln/>
-        </p:spPr>
-        <p:txBody>
-          <a:bodyPr wrap="square" rtlCol="0" anchor="ctr"/>
-          <a:lstStyle/>
-          <a:p>
-            <a:pPr marL="0" indent="0" algn="r">
-              <a:buNone/>
-            </a:pPr>
-            <a:r>
-              <a:rPr lang="en-US" sz="900" dirty="0">
-                <a:solidFill>
-                  <a:srgbClr val="BBBBBB"/>
-                </a:solidFill>
-                <a:latin typeface="Calibri" pitchFamily="34" charset="0"/>
-                <a:ea typeface="Calibri" pitchFamily="34" charset="-122"/>
-                <a:cs typeface="Calibri" pitchFamily="34" charset="-120"/>
-              </a:rPr>
-              <a:t>13 / 17</a:t>
-            </a:r>
-            <a:endParaRPr lang="en-US" sz="900" dirty="0"/>
-          </a:p>
-        </p:txBody>
-      </p:sp>
       <p:sp>
         <p:nvSpPr>
           <p:cNvPr id="4" name="Shape 2">
@@ -15619,9 +18461,6 @@
           <a:bodyPr wrap="square" lIns="0" tIns="0" rIns="0" bIns="0" rtlCol="0" anchor="ctr"/>
           <a:lstStyle/>
           <a:p>
-            <a:pPr marL="0" indent="0" algn="l">
-              <a:buNone/>
-            </a:pPr>
             <a:r>
               <a:rPr lang="en-US" sz="2600" b="1" dirty="0">
                 <a:solidFill>
@@ -15631,7 +18470,7 @@
                 <a:ea typeface="Calibri" pitchFamily="34" charset="-122"/>
                 <a:cs typeface="Calibri" pitchFamily="34" charset="-120"/>
               </a:rPr>
-              <a:t>Results — Reward Hacking Analysis</a:t>
+              <a:t>Results — Model 2: Successful Policy</a:t>
             </a:r>
             <a:endParaRPr lang="en-US" sz="2600" dirty="0"/>
           </a:p>
@@ -15668,197 +18507,6 @@
       </p:sp>
       <p:sp>
         <p:nvSpPr>
-          <p:cNvPr id="7" name="Text 5">
-            <a:extLst>
-              <a:ext uri="{FF2B5EF4-FFF2-40B4-BE49-F238E27FC236}">
-                <a16:creationId xmlns:a16="http://schemas.microsoft.com/office/drawing/2014/main" id="{19520484-D357-71E8-EB37-D50B0C5D831F}"/>
-              </a:ext>
-            </a:extLst>
-          </p:cNvPr>
-          <p:cNvSpPr/>
-          <p:nvPr/>
-        </p:nvSpPr>
-        <p:spPr>
-          <a:xfrm>
-            <a:off x="457200" y="896112"/>
-            <a:ext cx="8229600" cy="320040"/>
-          </a:xfrm>
-          <a:prstGeom prst="rect">
-            <a:avLst/>
-          </a:prstGeom>
-          <a:noFill/>
-          <a:ln/>
-        </p:spPr>
-        <p:txBody>
-          <a:bodyPr wrap="square" rtlCol="0" anchor="ctr"/>
-          <a:lstStyle/>
-          <a:p>
-            <a:pPr marL="0" indent="0">
-              <a:buNone/>
-            </a:pPr>
-            <a:r>
-              <a:rPr lang="en-US" sz="1300" dirty="0">
-                <a:solidFill>
-                  <a:srgbClr val="5A5A5A"/>
-                </a:solidFill>
-                <a:latin typeface="Calibri" pitchFamily="34" charset="0"/>
-                <a:ea typeface="Calibri" pitchFamily="34" charset="-122"/>
-                <a:cs typeface="Calibri" pitchFamily="34" charset="-120"/>
-              </a:rPr>
-              <a:t>Two targeted modifications resolved the degenerate behavior:</a:t>
-            </a:r>
-            <a:endParaRPr lang="en-US" sz="1300" dirty="0"/>
-          </a:p>
-        </p:txBody>
-      </p:sp>
-      <p:sp>
-        <p:nvSpPr>
-          <p:cNvPr id="8" name="Shape 6">
-            <a:extLst>
-              <a:ext uri="{FF2B5EF4-FFF2-40B4-BE49-F238E27FC236}">
-                <a16:creationId xmlns:a16="http://schemas.microsoft.com/office/drawing/2014/main" id="{78930C08-0B3A-123C-723E-DBE522A396B0}"/>
-              </a:ext>
-            </a:extLst>
-          </p:cNvPr>
-          <p:cNvSpPr/>
-          <p:nvPr/>
-        </p:nvSpPr>
-        <p:spPr>
-          <a:xfrm>
-            <a:off x="320040" y="1298448"/>
-            <a:ext cx="8503920" cy="1444752"/>
-          </a:xfrm>
-          <a:prstGeom prst="rect">
-            <a:avLst/>
-          </a:prstGeom>
-          <a:solidFill>
-            <a:srgbClr val="FFF3F3"/>
-          </a:solidFill>
-          <a:ln w="12700">
-            <a:solidFill>
-              <a:srgbClr val="C8472C"/>
-            </a:solidFill>
-            <a:prstDash val="solid"/>
-          </a:ln>
-        </p:spPr>
-      </p:sp>
-      <p:sp>
-        <p:nvSpPr>
-          <p:cNvPr id="9" name="Text 7">
-            <a:extLst>
-              <a:ext uri="{FF2B5EF4-FFF2-40B4-BE49-F238E27FC236}">
-                <a16:creationId xmlns:a16="http://schemas.microsoft.com/office/drawing/2014/main" id="{D20C0113-5CE2-FAFD-8854-EDF087B75A69}"/>
-              </a:ext>
-            </a:extLst>
-          </p:cNvPr>
-          <p:cNvSpPr/>
-          <p:nvPr/>
-        </p:nvSpPr>
-        <p:spPr>
-          <a:xfrm>
-            <a:off x="502920" y="1371600"/>
-            <a:ext cx="8229600" cy="274320"/>
-          </a:xfrm>
-          <a:prstGeom prst="rect">
-            <a:avLst/>
-          </a:prstGeom>
-          <a:noFill/>
-          <a:ln/>
-        </p:spPr>
-        <p:txBody>
-          <a:bodyPr wrap="square" rtlCol="0" anchor="ctr"/>
-          <a:lstStyle/>
-          <a:p>
-            <a:pPr marL="0" indent="0">
-              <a:buNone/>
-            </a:pPr>
-            <a:r>
-              <a:rPr lang="en-US" sz="1300" b="1" dirty="0">
-                <a:solidFill>
-                  <a:srgbClr val="C8472C"/>
-                </a:solidFill>
-                <a:latin typeface="Calibri" pitchFamily="34" charset="0"/>
-                <a:ea typeface="Calibri" pitchFamily="34" charset="-122"/>
-                <a:cs typeface="Calibri" pitchFamily="34" charset="-120"/>
-              </a:rPr>
-              <a:t>Root Cause</a:t>
-            </a:r>
-            <a:endParaRPr lang="en-US" sz="1300" dirty="0"/>
-          </a:p>
-        </p:txBody>
-      </p:sp>
-      <p:sp>
-        <p:nvSpPr>
-          <p:cNvPr id="10" name="Text 8">
-            <a:extLst>
-              <a:ext uri="{FF2B5EF4-FFF2-40B4-BE49-F238E27FC236}">
-                <a16:creationId xmlns:a16="http://schemas.microsoft.com/office/drawing/2014/main" id="{B891189F-9C0E-074F-8E3E-3763B8044502}"/>
-              </a:ext>
-            </a:extLst>
-          </p:cNvPr>
-          <p:cNvSpPr/>
-          <p:nvPr/>
-        </p:nvSpPr>
-        <p:spPr>
-          <a:xfrm>
-            <a:off x="502920" y="1664208"/>
-            <a:ext cx="8138160" cy="1005840"/>
-          </a:xfrm>
-          <a:prstGeom prst="rect">
-            <a:avLst/>
-          </a:prstGeom>
-          <a:noFill/>
-          <a:ln/>
-        </p:spPr>
-        <p:txBody>
-          <a:bodyPr wrap="square" rtlCol="0" anchor="t"/>
-          <a:lstStyle/>
-          <a:p>
-            <a:pPr marL="190500" indent="-190500">
-              <a:spcAft>
-                <a:spcPts val="500"/>
-              </a:spcAft>
-              <a:buSzPct val="100000"/>
-              <a:buChar char="•"/>
-            </a:pPr>
-            <a:r>
-              <a:rPr lang="en-US" sz="1300" dirty="0">
-                <a:solidFill>
-                  <a:srgbClr val="1A1A1A"/>
-                </a:solidFill>
-                <a:latin typeface="Calibri" pitchFamily="34" charset="0"/>
-                <a:ea typeface="Calibri" pitchFamily="34" charset="-122"/>
-                <a:cs typeface="Calibri" pitchFamily="34" charset="-120"/>
-              </a:rPr>
-              <a:t>Sorted observations → padding always at end → action 0 always maps to the nearest cluster</a:t>
-            </a:r>
-            <a:endParaRPr lang="en-US" sz="1300" dirty="0"/>
-          </a:p>
-          <a:p>
-            <a:pPr marL="190500" indent="-190500">
-              <a:spcAft>
-                <a:spcPts val="500"/>
-              </a:spcAft>
-              <a:buSzPct val="100000"/>
-              <a:buChar char="•"/>
-            </a:pPr>
-            <a:r>
-              <a:rPr lang="en-US" sz="1300" dirty="0">
-                <a:solidFill>
-                  <a:srgbClr val="1A1A1A"/>
-                </a:solidFill>
-                <a:latin typeface="Calibri" pitchFamily="34" charset="0"/>
-                <a:ea typeface="Calibri" pitchFamily="34" charset="-122"/>
-                <a:cs typeface="Calibri" pitchFamily="34" charset="-120"/>
-              </a:rPr>
-              <a:t>Large truncation penalty → always-picking-action-0 is the locally optimal (degenerate) strategy</a:t>
-            </a:r>
-            <a:endParaRPr lang="en-US" sz="1300" dirty="0"/>
-          </a:p>
-        </p:txBody>
-      </p:sp>
-      <p:sp>
-        <p:nvSpPr>
           <p:cNvPr id="11" name="Shape 9">
             <a:extLst>
               <a:ext uri="{FF2B5EF4-FFF2-40B4-BE49-F238E27FC236}">
@@ -15871,7 +18519,7 @@
         </p:nvSpPr>
         <p:spPr>
           <a:xfrm>
-            <a:off x="320040" y="2834640"/>
+            <a:off x="320040" y="2295143"/>
             <a:ext cx="8503920" cy="1920240"/>
           </a:xfrm>
           <a:prstGeom prst="rect">
@@ -15890,10 +18538,10 @@
       </p:sp>
       <p:sp>
         <p:nvSpPr>
-          <p:cNvPr id="12" name="Text 10">
+          <p:cNvPr id="14" name="Text 8">
             <a:extLst>
               <a:ext uri="{FF2B5EF4-FFF2-40B4-BE49-F238E27FC236}">
-                <a16:creationId xmlns:a16="http://schemas.microsoft.com/office/drawing/2014/main" id="{37280185-EC1D-11BF-C42B-5CB34E3FAB5E}"/>
+                <a16:creationId xmlns:a16="http://schemas.microsoft.com/office/drawing/2014/main" id="{C66C2FBC-8DBB-B1B7-A2AD-9B94ED408D68}"/>
               </a:ext>
             </a:extLst>
           </p:cNvPr>
@@ -15902,53 +18550,8 @@
         </p:nvSpPr>
         <p:spPr>
           <a:xfrm>
-            <a:off x="502920" y="2907792"/>
-            <a:ext cx="8229600" cy="274320"/>
-          </a:xfrm>
-          <a:prstGeom prst="rect">
-            <a:avLst/>
-          </a:prstGeom>
-          <a:noFill/>
-          <a:ln/>
-        </p:spPr>
-        <p:txBody>
-          <a:bodyPr wrap="square" rtlCol="0" anchor="ctr"/>
-          <a:lstStyle/>
-          <a:p>
-            <a:pPr marL="0" indent="0">
-              <a:buNone/>
-            </a:pPr>
-            <a:r>
-              <a:rPr lang="en-US" sz="1300" b="1" dirty="0">
-                <a:solidFill>
-                  <a:srgbClr val="2E7D32"/>
-                </a:solidFill>
-                <a:latin typeface="Calibri" pitchFamily="34" charset="0"/>
-                <a:ea typeface="Calibri" pitchFamily="34" charset="-122"/>
-                <a:cs typeface="Calibri" pitchFamily="34" charset="-120"/>
-              </a:rPr>
-              <a:t>Fix Applied → Model 2</a:t>
-            </a:r>
-            <a:endParaRPr lang="en-US" sz="1300" dirty="0"/>
-          </a:p>
-        </p:txBody>
-      </p:sp>
-      <p:sp>
-        <p:nvSpPr>
-          <p:cNvPr id="13" name="Text 11">
-            <a:extLst>
-              <a:ext uri="{FF2B5EF4-FFF2-40B4-BE49-F238E27FC236}">
-                <a16:creationId xmlns:a16="http://schemas.microsoft.com/office/drawing/2014/main" id="{11ECC9E1-AAE7-FBF9-D794-D8AC2EEA2BAE}"/>
-              </a:ext>
-            </a:extLst>
-          </p:cNvPr>
-          <p:cNvSpPr/>
-          <p:nvPr/>
-        </p:nvSpPr>
-        <p:spPr>
-          <a:xfrm>
-            <a:off x="502920" y="3218688"/>
-            <a:ext cx="8138160" cy="1463040"/>
+            <a:off x="502920" y="2846066"/>
+            <a:ext cx="5280661" cy="1047754"/>
           </a:xfrm>
           <a:prstGeom prst="rect">
             <a:avLst/>
@@ -15965,10 +18568,11 @@
                 <a:spcPts val="500"/>
               </a:spcAft>
               <a:buSzPct val="100000"/>
+              <a:buFontTx/>
               <a:buChar char="•"/>
             </a:pPr>
             <a:r>
-              <a:rPr lang="en-US" sz="1300" dirty="0">
+              <a:rPr lang="en-US" sz="1600" dirty="0">
                 <a:solidFill>
                   <a:srgbClr val="1A1A1A"/>
                 </a:solidFill>
@@ -15976,9 +18580,8 @@
                 <a:ea typeface="Calibri" pitchFamily="34" charset="-122"/>
                 <a:cs typeface="Calibri" pitchFamily="34" charset="-120"/>
               </a:rPr>
-              <a:t>Remove distance sorting → all actions equally accessible at each step</a:t>
-            </a:r>
-            <a:endParaRPr lang="en-US" sz="1300" dirty="0"/>
+              <a:t>Good overall performance, comparable with heuristics</a:t>
+            </a:r>
           </a:p>
           <a:p>
             <a:pPr marL="190500" indent="-190500">
@@ -15986,10 +18589,11 @@
                 <a:spcPts val="500"/>
               </a:spcAft>
               <a:buSzPct val="100000"/>
+              <a:buFontTx/>
               <a:buChar char="•"/>
             </a:pPr>
             <a:r>
-              <a:rPr lang="en-US" sz="1300" dirty="0">
+              <a:rPr lang="en-US" sz="1600" dirty="0">
                 <a:solidFill>
                   <a:srgbClr val="1A1A1A"/>
                 </a:solidFill>
@@ -15997,9 +18601,8 @@
                 <a:ea typeface="Calibri" pitchFamily="34" charset="-122"/>
                 <a:cs typeface="Calibri" pitchFamily="34" charset="-120"/>
               </a:rPr>
-              <a:t>Soften padding penalty → agent no longer exploits padding as a reward shortcut</a:t>
-            </a:r>
-            <a:endParaRPr lang="en-US" sz="1300" dirty="0"/>
+              <a:t>Bounded small TD loss</a:t>
+            </a:r>
           </a:p>
           <a:p>
             <a:pPr marL="190500" indent="-190500">
@@ -16007,10 +18610,11 @@
                 <a:spcPts val="500"/>
               </a:spcAft>
               <a:buSzPct val="100000"/>
+              <a:buFontTx/>
               <a:buChar char="•"/>
             </a:pPr>
             <a:r>
-              <a:rPr lang="en-US" sz="1300" dirty="0">
+              <a:rPr lang="en-US" sz="1600" dirty="0">
                 <a:solidFill>
                   <a:srgbClr val="1A1A1A"/>
                 </a:solidFill>
@@ -16018,9 +18622,1836 @@
                 <a:ea typeface="Calibri" pitchFamily="34" charset="-122"/>
                 <a:cs typeface="Calibri" pitchFamily="34" charset="-120"/>
               </a:rPr>
-              <a:t>Switch to absolute reward → clearer and more stable exploration signal</a:t>
-            </a:r>
-            <a:endParaRPr lang="en-US" sz="1300" dirty="0"/>
+              <a:t>Varied action choice</a:t>
+            </a:r>
+          </a:p>
+        </p:txBody>
+      </p:sp>
+      <p:sp>
+        <p:nvSpPr>
+          <p:cNvPr id="15" name="Text 8">
+            <a:extLst>
+              <a:ext uri="{FF2B5EF4-FFF2-40B4-BE49-F238E27FC236}">
+                <a16:creationId xmlns:a16="http://schemas.microsoft.com/office/drawing/2014/main" id="{912B23C1-5D4F-C8C2-C317-5795A8B3CE33}"/>
+              </a:ext>
+            </a:extLst>
+          </p:cNvPr>
+          <p:cNvSpPr/>
+          <p:nvPr/>
+        </p:nvSpPr>
+        <p:spPr>
+          <a:xfrm>
+            <a:off x="5875019" y="3076948"/>
+            <a:ext cx="2766061" cy="341376"/>
+          </a:xfrm>
+          <a:prstGeom prst="rect">
+            <a:avLst/>
+          </a:prstGeom>
+          <a:noFill/>
+          <a:ln/>
+        </p:spPr>
+        <p:txBody>
+          <a:bodyPr wrap="square" rtlCol="0" anchor="t"/>
+          <a:lstStyle/>
+          <a:p>
+            <a:pPr algn="ctr">
+              <a:spcAft>
+                <a:spcPts val="500"/>
+              </a:spcAft>
+              <a:buSzPct val="100000"/>
+            </a:pPr>
+            <a:r>
+              <a:rPr lang="en-US" sz="1600" dirty="0">
+                <a:solidFill>
+                  <a:srgbClr val="1A1A1A"/>
+                </a:solidFill>
+                <a:latin typeface="Calibri" pitchFamily="34" charset="0"/>
+                <a:ea typeface="Calibri" pitchFamily="34" charset="-122"/>
+                <a:cs typeface="Calibri" pitchFamily="34" charset="-120"/>
+              </a:rPr>
+              <a:t>The model is genuinely learning</a:t>
+            </a:r>
+          </a:p>
+        </p:txBody>
+      </p:sp>
+      <p:cxnSp>
+        <p:nvCxnSpPr>
+          <p:cNvPr id="16" name="Connettore 2 15">
+            <a:extLst>
+              <a:ext uri="{FF2B5EF4-FFF2-40B4-BE49-F238E27FC236}">
+                <a16:creationId xmlns:a16="http://schemas.microsoft.com/office/drawing/2014/main" id="{794BADAC-E89C-B452-949C-0D76C130C014}"/>
+              </a:ext>
+            </a:extLst>
+          </p:cNvPr>
+          <p:cNvCxnSpPr/>
+          <p:nvPr/>
+        </p:nvCxnSpPr>
+        <p:spPr>
+          <a:xfrm>
+            <a:off x="5543550" y="3339842"/>
+            <a:ext cx="533400" cy="0"/>
+          </a:xfrm>
+          <a:prstGeom prst="straightConnector1">
+            <a:avLst/>
+          </a:prstGeom>
+          <a:ln w="28575">
+            <a:solidFill>
+              <a:srgbClr val="4CAF50"/>
+            </a:solidFill>
+            <a:tailEnd type="triangle"/>
+          </a:ln>
+        </p:spPr>
+        <p:style>
+          <a:lnRef idx="1">
+            <a:schemeClr val="accent1"/>
+          </a:lnRef>
+          <a:fillRef idx="0">
+            <a:schemeClr val="accent1"/>
+          </a:fillRef>
+          <a:effectRef idx="0">
+            <a:schemeClr val="accent1"/>
+          </a:effectRef>
+          <a:fontRef idx="minor">
+            <a:schemeClr val="tx1"/>
+          </a:fontRef>
+        </p:style>
+      </p:cxnSp>
+      <p:graphicFrame>
+        <p:nvGraphicFramePr>
+          <p:cNvPr id="18" name="Tabella 17">
+            <a:extLst>
+              <a:ext uri="{FF2B5EF4-FFF2-40B4-BE49-F238E27FC236}">
+                <a16:creationId xmlns:a16="http://schemas.microsoft.com/office/drawing/2014/main" id="{775E278A-6ECD-2CC0-04B6-232778E09DF2}"/>
+              </a:ext>
+            </a:extLst>
+          </p:cNvPr>
+          <p:cNvGraphicFramePr>
+            <a:graphicFrameLocks noGrp="1"/>
+          </p:cNvGraphicFramePr>
+          <p:nvPr>
+            <p:extLst>
+              <p:ext uri="{D42A27DB-BD31-4B8C-83A1-F6EECF244321}">
+                <p14:modId xmlns:p14="http://schemas.microsoft.com/office/powerpoint/2010/main" val="1850593258"/>
+              </p:ext>
+            </p:extLst>
+          </p:nvPr>
+        </p:nvGraphicFramePr>
+        <p:xfrm>
+          <a:off x="525782" y="1019557"/>
+          <a:ext cx="5120640" cy="822960"/>
+        </p:xfrm>
+        <a:graphic>
+          <a:graphicData uri="http://schemas.openxmlformats.org/drawingml/2006/table">
+            <a:tbl>
+              <a:tblPr firstRow="1" bandRow="1">
+                <a:tableStyleId>{5C22544A-7EE6-4342-B048-85BDC9FD1C3A}</a:tableStyleId>
+              </a:tblPr>
+              <a:tblGrid>
+                <a:gridCol w="1062630">
+                  <a:extLst>
+                    <a:ext uri="{9D8B030D-6E8A-4147-A177-3AD203B41FA5}">
+                      <a16:colId xmlns:a16="http://schemas.microsoft.com/office/drawing/2014/main" val="125969615"/>
+                    </a:ext>
+                  </a:extLst>
+                </a:gridCol>
+                <a:gridCol w="610706">
+                  <a:extLst>
+                    <a:ext uri="{9D8B030D-6E8A-4147-A177-3AD203B41FA5}">
+                      <a16:colId xmlns:a16="http://schemas.microsoft.com/office/drawing/2014/main" val="2018588786"/>
+                    </a:ext>
+                  </a:extLst>
+                </a:gridCol>
+                <a:gridCol w="610706">
+                  <a:extLst>
+                    <a:ext uri="{9D8B030D-6E8A-4147-A177-3AD203B41FA5}">
+                      <a16:colId xmlns:a16="http://schemas.microsoft.com/office/drawing/2014/main" val="1209705665"/>
+                    </a:ext>
+                  </a:extLst>
+                </a:gridCol>
+                <a:gridCol w="610706">
+                  <a:extLst>
+                    <a:ext uri="{9D8B030D-6E8A-4147-A177-3AD203B41FA5}">
+                      <a16:colId xmlns:a16="http://schemas.microsoft.com/office/drawing/2014/main" val="4073463488"/>
+                    </a:ext>
+                  </a:extLst>
+                </a:gridCol>
+                <a:gridCol w="556473">
+                  <a:extLst>
+                    <a:ext uri="{9D8B030D-6E8A-4147-A177-3AD203B41FA5}">
+                      <a16:colId xmlns:a16="http://schemas.microsoft.com/office/drawing/2014/main" val="782007197"/>
+                    </a:ext>
+                  </a:extLst>
+                </a:gridCol>
+                <a:gridCol w="556473">
+                  <a:extLst>
+                    <a:ext uri="{9D8B030D-6E8A-4147-A177-3AD203B41FA5}">
+                      <a16:colId xmlns:a16="http://schemas.microsoft.com/office/drawing/2014/main" val="1105224779"/>
+                    </a:ext>
+                  </a:extLst>
+                </a:gridCol>
+                <a:gridCol w="556473">
+                  <a:extLst>
+                    <a:ext uri="{9D8B030D-6E8A-4147-A177-3AD203B41FA5}">
+                      <a16:colId xmlns:a16="http://schemas.microsoft.com/office/drawing/2014/main" val="3568728515"/>
+                    </a:ext>
+                  </a:extLst>
+                </a:gridCol>
+                <a:gridCol w="556473">
+                  <a:extLst>
+                    <a:ext uri="{9D8B030D-6E8A-4147-A177-3AD203B41FA5}">
+                      <a16:colId xmlns:a16="http://schemas.microsoft.com/office/drawing/2014/main" val="1156081108"/>
+                    </a:ext>
+                  </a:extLst>
+                </a:gridCol>
+              </a:tblGrid>
+              <a:tr h="264555">
+                <a:tc gridSpan="5">
+                  <a:txBody>
+                    <a:bodyPr/>
+                    <a:lstStyle/>
+                    <a:p>
+                      <a:pPr marL="0" marR="0" lvl="0" indent="0" algn="l" defTabSz="914400" rtl="0" eaLnBrk="1" fontAlgn="auto" latinLnBrk="0" hangingPunct="1">
+                        <a:lnSpc>
+                          <a:spcPct val="100000"/>
+                        </a:lnSpc>
+                        <a:spcBef>
+                          <a:spcPts val="0"/>
+                        </a:spcBef>
+                        <a:spcAft>
+                          <a:spcPts val="0"/>
+                        </a:spcAft>
+                        <a:buClrTx/>
+                        <a:buSzTx/>
+                        <a:buFontTx/>
+                        <a:buNone/>
+                        <a:tabLst/>
+                        <a:defRPr/>
+                      </a:pPr>
+                      <a:r>
+                        <a:rPr lang="it-IT" sz="1200" dirty="0">
+                          <a:solidFill>
+                            <a:schemeClr val="tx1"/>
+                          </a:solidFill>
+                        </a:rPr>
+                        <a:t>Action </a:t>
+                      </a:r>
+                      <a:r>
+                        <a:rPr lang="it-IT" sz="1200" dirty="0" err="1">
+                          <a:solidFill>
+                            <a:schemeClr val="tx1"/>
+                          </a:solidFill>
+                        </a:rPr>
+                        <a:t>distributions</a:t>
+                      </a:r>
+                      <a:r>
+                        <a:rPr lang="it-IT" sz="1200" dirty="0">
+                          <a:solidFill>
+                            <a:schemeClr val="tx1"/>
+                          </a:solidFill>
+                        </a:rPr>
+                        <a:t> - </a:t>
+                      </a:r>
+                      <a:r>
+                        <a:rPr lang="it-IT" sz="1200" dirty="0" err="1">
+                          <a:solidFill>
+                            <a:schemeClr val="tx1"/>
+                          </a:solidFill>
+                        </a:rPr>
+                        <a:t>sorted</a:t>
+                      </a:r>
+                      <a:r>
+                        <a:rPr lang="it-IT" sz="1200" dirty="0">
+                          <a:solidFill>
+                            <a:schemeClr val="tx1"/>
+                          </a:solidFill>
+                        </a:rPr>
+                        <a:t> by </a:t>
+                      </a:r>
+                      <a:r>
+                        <a:rPr lang="it-IT" sz="1200" dirty="0" err="1">
+                          <a:solidFill>
+                            <a:schemeClr val="tx1"/>
+                          </a:solidFill>
+                        </a:rPr>
+                        <a:t>distance</a:t>
+                      </a:r>
+                      <a:r>
+                        <a:rPr lang="it-IT" sz="1200" dirty="0">
+                          <a:solidFill>
+                            <a:schemeClr val="tx1"/>
+                          </a:solidFill>
+                        </a:rPr>
+                        <a:t> </a:t>
+                      </a:r>
+                    </a:p>
+                  </a:txBody>
+                  <a:tcPr>
+                    <a:lnL w="12700" cap="flat" cmpd="sng" algn="ctr">
+                      <a:noFill/>
+                      <a:prstDash val="solid"/>
+                      <a:round/>
+                      <a:headEnd type="none" w="med" len="med"/>
+                      <a:tailEnd type="none" w="med" len="med"/>
+                    </a:lnL>
+                    <a:lnR w="12700" cap="flat" cmpd="sng" algn="ctr">
+                      <a:noFill/>
+                      <a:prstDash val="solid"/>
+                      <a:round/>
+                      <a:headEnd type="none" w="med" len="med"/>
+                      <a:tailEnd type="none" w="med" len="med"/>
+                    </a:lnR>
+                    <a:lnT w="12700" cap="flat" cmpd="sng" algn="ctr">
+                      <a:noFill/>
+                      <a:prstDash val="solid"/>
+                      <a:round/>
+                      <a:headEnd type="none" w="med" len="med"/>
+                      <a:tailEnd type="none" w="med" len="med"/>
+                    </a:lnT>
+                    <a:lnB w="12700" cap="flat" cmpd="sng" algn="ctr">
+                      <a:solidFill>
+                        <a:schemeClr val="tx1"/>
+                      </a:solidFill>
+                      <a:prstDash val="solid"/>
+                      <a:round/>
+                      <a:headEnd type="none" w="med" len="med"/>
+                      <a:tailEnd type="none" w="med" len="med"/>
+                    </a:lnB>
+                    <a:lnTlToBr w="12700" cmpd="sng">
+                      <a:noFill/>
+                      <a:prstDash val="solid"/>
+                    </a:lnTlToBr>
+                    <a:lnBlToTr w="12700" cmpd="sng">
+                      <a:noFill/>
+                      <a:prstDash val="solid"/>
+                    </a:lnBlToTr>
+                    <a:noFill/>
+                  </a:tcPr>
+                </a:tc>
+                <a:tc hMerge="1">
+                  <a:txBody>
+                    <a:bodyPr/>
+                    <a:lstStyle/>
+                    <a:p>
+                      <a:endParaRPr lang="it-IT" sz="1200" dirty="0">
+                        <a:solidFill>
+                          <a:schemeClr val="tx1"/>
+                        </a:solidFill>
+                      </a:endParaRPr>
+                    </a:p>
+                  </a:txBody>
+                  <a:tcPr>
+                    <a:lnL w="12700" cap="flat" cmpd="sng" algn="ctr">
+                      <a:noFill/>
+                      <a:prstDash val="solid"/>
+                      <a:round/>
+                      <a:headEnd type="none" w="med" len="med"/>
+                      <a:tailEnd type="none" w="med" len="med"/>
+                    </a:lnL>
+                    <a:lnR w="12700" cap="flat" cmpd="sng" algn="ctr">
+                      <a:noFill/>
+                      <a:prstDash val="solid"/>
+                      <a:round/>
+                      <a:headEnd type="none" w="med" len="med"/>
+                      <a:tailEnd type="none" w="med" len="med"/>
+                    </a:lnR>
+                    <a:lnT w="12700" cap="flat" cmpd="sng" algn="ctr">
+                      <a:noFill/>
+                      <a:prstDash val="solid"/>
+                      <a:round/>
+                      <a:headEnd type="none" w="med" len="med"/>
+                      <a:tailEnd type="none" w="med" len="med"/>
+                    </a:lnT>
+                    <a:lnB w="12700" cap="flat" cmpd="sng" algn="ctr">
+                      <a:solidFill>
+                        <a:schemeClr val="tx1"/>
+                      </a:solidFill>
+                      <a:prstDash val="solid"/>
+                      <a:round/>
+                      <a:headEnd type="none" w="med" len="med"/>
+                      <a:tailEnd type="none" w="med" len="med"/>
+                    </a:lnB>
+                    <a:lnTlToBr w="12700" cmpd="sng">
+                      <a:noFill/>
+                      <a:prstDash val="solid"/>
+                    </a:lnTlToBr>
+                    <a:lnBlToTr w="12700" cmpd="sng">
+                      <a:noFill/>
+                      <a:prstDash val="solid"/>
+                    </a:lnBlToTr>
+                    <a:noFill/>
+                  </a:tcPr>
+                </a:tc>
+                <a:tc hMerge="1">
+                  <a:txBody>
+                    <a:bodyPr/>
+                    <a:lstStyle/>
+                    <a:p>
+                      <a:pPr marL="0" marR="0" lvl="0" indent="0" algn="l" defTabSz="914400" rtl="0" eaLnBrk="1" fontAlgn="auto" latinLnBrk="0" hangingPunct="1">
+                        <a:lnSpc>
+                          <a:spcPct val="100000"/>
+                        </a:lnSpc>
+                        <a:spcBef>
+                          <a:spcPts val="0"/>
+                        </a:spcBef>
+                        <a:spcAft>
+                          <a:spcPts val="0"/>
+                        </a:spcAft>
+                        <a:buClrTx/>
+                        <a:buSzTx/>
+                        <a:buFontTx/>
+                        <a:buNone/>
+                        <a:tabLst/>
+                        <a:defRPr/>
+                      </a:pPr>
+                      <a:endParaRPr lang="it-IT" sz="1200" dirty="0">
+                        <a:solidFill>
+                          <a:schemeClr val="tx1"/>
+                        </a:solidFill>
+                      </a:endParaRPr>
+                    </a:p>
+                  </a:txBody>
+                  <a:tcPr>
+                    <a:lnL w="12700" cap="flat" cmpd="sng" algn="ctr">
+                      <a:noFill/>
+                      <a:prstDash val="solid"/>
+                      <a:round/>
+                      <a:headEnd type="none" w="med" len="med"/>
+                      <a:tailEnd type="none" w="med" len="med"/>
+                    </a:lnL>
+                    <a:lnR w="12700" cap="flat" cmpd="sng" algn="ctr">
+                      <a:noFill/>
+                      <a:prstDash val="solid"/>
+                      <a:round/>
+                      <a:headEnd type="none" w="med" len="med"/>
+                      <a:tailEnd type="none" w="med" len="med"/>
+                    </a:lnR>
+                    <a:lnT w="12700" cap="flat" cmpd="sng" algn="ctr">
+                      <a:noFill/>
+                      <a:prstDash val="solid"/>
+                      <a:round/>
+                      <a:headEnd type="none" w="med" len="med"/>
+                      <a:tailEnd type="none" w="med" len="med"/>
+                    </a:lnT>
+                    <a:lnB w="12700" cap="flat" cmpd="sng" algn="ctr">
+                      <a:solidFill>
+                        <a:schemeClr val="tx1"/>
+                      </a:solidFill>
+                      <a:prstDash val="solid"/>
+                      <a:round/>
+                      <a:headEnd type="none" w="med" len="med"/>
+                      <a:tailEnd type="none" w="med" len="med"/>
+                    </a:lnB>
+                    <a:lnTlToBr w="12700" cmpd="sng">
+                      <a:noFill/>
+                      <a:prstDash val="solid"/>
+                    </a:lnTlToBr>
+                    <a:lnBlToTr w="12700" cmpd="sng">
+                      <a:noFill/>
+                      <a:prstDash val="solid"/>
+                    </a:lnBlToTr>
+                    <a:noFill/>
+                  </a:tcPr>
+                </a:tc>
+                <a:tc hMerge="1">
+                  <a:txBody>
+                    <a:bodyPr/>
+                    <a:lstStyle/>
+                    <a:p>
+                      <a:pPr marL="0" marR="0" lvl="0" indent="0" algn="l" defTabSz="914400" rtl="0" eaLnBrk="1" fontAlgn="auto" latinLnBrk="0" hangingPunct="1">
+                        <a:lnSpc>
+                          <a:spcPct val="100000"/>
+                        </a:lnSpc>
+                        <a:spcBef>
+                          <a:spcPts val="0"/>
+                        </a:spcBef>
+                        <a:spcAft>
+                          <a:spcPts val="0"/>
+                        </a:spcAft>
+                        <a:buClrTx/>
+                        <a:buSzTx/>
+                        <a:buFontTx/>
+                        <a:buNone/>
+                        <a:tabLst/>
+                        <a:defRPr/>
+                      </a:pPr>
+                      <a:endParaRPr lang="it-IT" sz="1200" dirty="0">
+                        <a:solidFill>
+                          <a:schemeClr val="tx1"/>
+                        </a:solidFill>
+                      </a:endParaRPr>
+                    </a:p>
+                  </a:txBody>
+                  <a:tcPr>
+                    <a:lnL w="12700" cap="flat" cmpd="sng" algn="ctr">
+                      <a:noFill/>
+                      <a:prstDash val="solid"/>
+                      <a:round/>
+                      <a:headEnd type="none" w="med" len="med"/>
+                      <a:tailEnd type="none" w="med" len="med"/>
+                    </a:lnL>
+                    <a:lnR w="12700" cap="flat" cmpd="sng" algn="ctr">
+                      <a:noFill/>
+                      <a:prstDash val="solid"/>
+                      <a:round/>
+                      <a:headEnd type="none" w="med" len="med"/>
+                      <a:tailEnd type="none" w="med" len="med"/>
+                    </a:lnR>
+                    <a:lnT w="12700" cap="flat" cmpd="sng" algn="ctr">
+                      <a:noFill/>
+                      <a:prstDash val="solid"/>
+                      <a:round/>
+                      <a:headEnd type="none" w="med" len="med"/>
+                      <a:tailEnd type="none" w="med" len="med"/>
+                    </a:lnT>
+                    <a:lnB w="12700" cap="flat" cmpd="sng" algn="ctr">
+                      <a:solidFill>
+                        <a:schemeClr val="tx1"/>
+                      </a:solidFill>
+                      <a:prstDash val="solid"/>
+                      <a:round/>
+                      <a:headEnd type="none" w="med" len="med"/>
+                      <a:tailEnd type="none" w="med" len="med"/>
+                    </a:lnB>
+                    <a:lnTlToBr w="12700" cmpd="sng">
+                      <a:noFill/>
+                      <a:prstDash val="solid"/>
+                    </a:lnTlToBr>
+                    <a:lnBlToTr w="12700" cmpd="sng">
+                      <a:noFill/>
+                      <a:prstDash val="solid"/>
+                    </a:lnBlToTr>
+                    <a:noFill/>
+                  </a:tcPr>
+                </a:tc>
+                <a:tc hMerge="1">
+                  <a:txBody>
+                    <a:bodyPr/>
+                    <a:lstStyle/>
+                    <a:p>
+                      <a:pPr marL="0" marR="0" lvl="0" indent="0" algn="l" defTabSz="914400" rtl="0" eaLnBrk="1" fontAlgn="auto" latinLnBrk="0" hangingPunct="1">
+                        <a:lnSpc>
+                          <a:spcPct val="100000"/>
+                        </a:lnSpc>
+                        <a:spcBef>
+                          <a:spcPts val="0"/>
+                        </a:spcBef>
+                        <a:spcAft>
+                          <a:spcPts val="0"/>
+                        </a:spcAft>
+                        <a:buClrTx/>
+                        <a:buSzTx/>
+                        <a:buFontTx/>
+                        <a:buNone/>
+                        <a:tabLst/>
+                        <a:defRPr/>
+                      </a:pPr>
+                      <a:endParaRPr lang="it-IT" sz="1200" dirty="0">
+                        <a:solidFill>
+                          <a:schemeClr val="tx1"/>
+                        </a:solidFill>
+                      </a:endParaRPr>
+                    </a:p>
+                  </a:txBody>
+                  <a:tcPr>
+                    <a:lnL w="12700" cap="flat" cmpd="sng" algn="ctr">
+                      <a:noFill/>
+                      <a:prstDash val="solid"/>
+                      <a:round/>
+                      <a:headEnd type="none" w="med" len="med"/>
+                      <a:tailEnd type="none" w="med" len="med"/>
+                    </a:lnL>
+                    <a:lnR w="12700" cap="flat" cmpd="sng" algn="ctr">
+                      <a:noFill/>
+                      <a:prstDash val="solid"/>
+                      <a:round/>
+                      <a:headEnd type="none" w="med" len="med"/>
+                      <a:tailEnd type="none" w="med" len="med"/>
+                    </a:lnR>
+                    <a:lnT w="12700" cap="flat" cmpd="sng" algn="ctr">
+                      <a:noFill/>
+                      <a:prstDash val="solid"/>
+                      <a:round/>
+                      <a:headEnd type="none" w="med" len="med"/>
+                      <a:tailEnd type="none" w="med" len="med"/>
+                    </a:lnT>
+                    <a:lnB w="12700" cap="flat" cmpd="sng" algn="ctr">
+                      <a:solidFill>
+                        <a:schemeClr val="tx1"/>
+                      </a:solidFill>
+                      <a:prstDash val="solid"/>
+                      <a:round/>
+                      <a:headEnd type="none" w="med" len="med"/>
+                      <a:tailEnd type="none" w="med" len="med"/>
+                    </a:lnB>
+                    <a:lnTlToBr w="12700" cmpd="sng">
+                      <a:noFill/>
+                      <a:prstDash val="solid"/>
+                    </a:lnTlToBr>
+                    <a:lnBlToTr w="12700" cmpd="sng">
+                      <a:noFill/>
+                      <a:prstDash val="solid"/>
+                    </a:lnBlToTr>
+                    <a:noFill/>
+                  </a:tcPr>
+                </a:tc>
+                <a:tc>
+                  <a:txBody>
+                    <a:bodyPr/>
+                    <a:lstStyle/>
+                    <a:p>
+                      <a:pPr marL="0" marR="0" lvl="0" indent="0" algn="l" defTabSz="914400" rtl="0" eaLnBrk="1" fontAlgn="auto" latinLnBrk="0" hangingPunct="1">
+                        <a:lnSpc>
+                          <a:spcPct val="100000"/>
+                        </a:lnSpc>
+                        <a:spcBef>
+                          <a:spcPts val="0"/>
+                        </a:spcBef>
+                        <a:spcAft>
+                          <a:spcPts val="0"/>
+                        </a:spcAft>
+                        <a:buClrTx/>
+                        <a:buSzTx/>
+                        <a:buFontTx/>
+                        <a:buNone/>
+                        <a:tabLst/>
+                        <a:defRPr/>
+                      </a:pPr>
+                      <a:endParaRPr lang="it-IT" sz="1200" dirty="0">
+                        <a:solidFill>
+                          <a:schemeClr val="tx1"/>
+                        </a:solidFill>
+                      </a:endParaRPr>
+                    </a:p>
+                  </a:txBody>
+                  <a:tcPr>
+                    <a:lnL w="12700" cap="flat" cmpd="sng" algn="ctr">
+                      <a:noFill/>
+                      <a:prstDash val="solid"/>
+                      <a:round/>
+                      <a:headEnd type="none" w="med" len="med"/>
+                      <a:tailEnd type="none" w="med" len="med"/>
+                    </a:lnL>
+                    <a:lnR w="12700" cap="flat" cmpd="sng" algn="ctr">
+                      <a:noFill/>
+                      <a:prstDash val="solid"/>
+                      <a:round/>
+                      <a:headEnd type="none" w="med" len="med"/>
+                      <a:tailEnd type="none" w="med" len="med"/>
+                    </a:lnR>
+                    <a:lnT w="12700" cap="flat" cmpd="sng" algn="ctr">
+                      <a:noFill/>
+                      <a:prstDash val="solid"/>
+                      <a:round/>
+                      <a:headEnd type="none" w="med" len="med"/>
+                      <a:tailEnd type="none" w="med" len="med"/>
+                    </a:lnT>
+                    <a:lnB w="12700" cap="flat" cmpd="sng" algn="ctr">
+                      <a:solidFill>
+                        <a:schemeClr val="tx1"/>
+                      </a:solidFill>
+                      <a:prstDash val="solid"/>
+                      <a:round/>
+                      <a:headEnd type="none" w="med" len="med"/>
+                      <a:tailEnd type="none" w="med" len="med"/>
+                    </a:lnB>
+                    <a:lnTlToBr w="12700" cmpd="sng">
+                      <a:noFill/>
+                      <a:prstDash val="solid"/>
+                    </a:lnTlToBr>
+                    <a:lnBlToTr w="12700" cmpd="sng">
+                      <a:noFill/>
+                      <a:prstDash val="solid"/>
+                    </a:lnBlToTr>
+                    <a:noFill/>
+                  </a:tcPr>
+                </a:tc>
+                <a:tc>
+                  <a:txBody>
+                    <a:bodyPr/>
+                    <a:lstStyle/>
+                    <a:p>
+                      <a:pPr marL="0" marR="0" lvl="0" indent="0" algn="l" defTabSz="914400" rtl="0" eaLnBrk="1" fontAlgn="auto" latinLnBrk="0" hangingPunct="1">
+                        <a:lnSpc>
+                          <a:spcPct val="100000"/>
+                        </a:lnSpc>
+                        <a:spcBef>
+                          <a:spcPts val="0"/>
+                        </a:spcBef>
+                        <a:spcAft>
+                          <a:spcPts val="0"/>
+                        </a:spcAft>
+                        <a:buClrTx/>
+                        <a:buSzTx/>
+                        <a:buFontTx/>
+                        <a:buNone/>
+                        <a:tabLst/>
+                        <a:defRPr/>
+                      </a:pPr>
+                      <a:endParaRPr lang="it-IT" sz="1200" dirty="0">
+                        <a:solidFill>
+                          <a:schemeClr val="tx1"/>
+                        </a:solidFill>
+                      </a:endParaRPr>
+                    </a:p>
+                  </a:txBody>
+                  <a:tcPr>
+                    <a:lnL w="12700" cap="flat" cmpd="sng" algn="ctr">
+                      <a:noFill/>
+                      <a:prstDash val="solid"/>
+                      <a:round/>
+                      <a:headEnd type="none" w="med" len="med"/>
+                      <a:tailEnd type="none" w="med" len="med"/>
+                    </a:lnL>
+                    <a:lnR w="12700" cap="flat" cmpd="sng" algn="ctr">
+                      <a:noFill/>
+                      <a:prstDash val="solid"/>
+                      <a:round/>
+                      <a:headEnd type="none" w="med" len="med"/>
+                      <a:tailEnd type="none" w="med" len="med"/>
+                    </a:lnR>
+                    <a:lnT w="12700" cap="flat" cmpd="sng" algn="ctr">
+                      <a:noFill/>
+                      <a:prstDash val="solid"/>
+                      <a:round/>
+                      <a:headEnd type="none" w="med" len="med"/>
+                      <a:tailEnd type="none" w="med" len="med"/>
+                    </a:lnT>
+                    <a:lnB w="12700" cap="flat" cmpd="sng" algn="ctr">
+                      <a:solidFill>
+                        <a:schemeClr val="tx1"/>
+                      </a:solidFill>
+                      <a:prstDash val="solid"/>
+                      <a:round/>
+                      <a:headEnd type="none" w="med" len="med"/>
+                      <a:tailEnd type="none" w="med" len="med"/>
+                    </a:lnB>
+                    <a:lnTlToBr w="12700" cmpd="sng">
+                      <a:noFill/>
+                      <a:prstDash val="solid"/>
+                    </a:lnTlToBr>
+                    <a:lnBlToTr w="12700" cmpd="sng">
+                      <a:noFill/>
+                      <a:prstDash val="solid"/>
+                    </a:lnBlToTr>
+                    <a:noFill/>
+                  </a:tcPr>
+                </a:tc>
+                <a:tc>
+                  <a:txBody>
+                    <a:bodyPr/>
+                    <a:lstStyle/>
+                    <a:p>
+                      <a:pPr marL="0" marR="0" lvl="0" indent="0" algn="l" defTabSz="914400" rtl="0" eaLnBrk="1" fontAlgn="auto" latinLnBrk="0" hangingPunct="1">
+                        <a:lnSpc>
+                          <a:spcPct val="100000"/>
+                        </a:lnSpc>
+                        <a:spcBef>
+                          <a:spcPts val="0"/>
+                        </a:spcBef>
+                        <a:spcAft>
+                          <a:spcPts val="0"/>
+                        </a:spcAft>
+                        <a:buClrTx/>
+                        <a:buSzTx/>
+                        <a:buFontTx/>
+                        <a:buNone/>
+                        <a:tabLst/>
+                        <a:defRPr/>
+                      </a:pPr>
+                      <a:endParaRPr lang="it-IT" sz="1200" dirty="0">
+                        <a:solidFill>
+                          <a:schemeClr val="tx1"/>
+                        </a:solidFill>
+                      </a:endParaRPr>
+                    </a:p>
+                  </a:txBody>
+                  <a:tcPr>
+                    <a:lnL w="12700" cap="flat" cmpd="sng" algn="ctr">
+                      <a:noFill/>
+                      <a:prstDash val="solid"/>
+                      <a:round/>
+                      <a:headEnd type="none" w="med" len="med"/>
+                      <a:tailEnd type="none" w="med" len="med"/>
+                    </a:lnL>
+                    <a:lnR w="12700" cap="flat" cmpd="sng" algn="ctr">
+                      <a:noFill/>
+                      <a:prstDash val="solid"/>
+                      <a:round/>
+                      <a:headEnd type="none" w="med" len="med"/>
+                      <a:tailEnd type="none" w="med" len="med"/>
+                    </a:lnR>
+                    <a:lnT w="12700" cap="flat" cmpd="sng" algn="ctr">
+                      <a:noFill/>
+                      <a:prstDash val="solid"/>
+                      <a:round/>
+                      <a:headEnd type="none" w="med" len="med"/>
+                      <a:tailEnd type="none" w="med" len="med"/>
+                    </a:lnT>
+                    <a:lnB w="12700" cap="flat" cmpd="sng" algn="ctr">
+                      <a:solidFill>
+                        <a:schemeClr val="tx1"/>
+                      </a:solidFill>
+                      <a:prstDash val="solid"/>
+                      <a:round/>
+                      <a:headEnd type="none" w="med" len="med"/>
+                      <a:tailEnd type="none" w="med" len="med"/>
+                    </a:lnB>
+                    <a:lnTlToBr w="12700" cmpd="sng">
+                      <a:noFill/>
+                      <a:prstDash val="solid"/>
+                    </a:lnTlToBr>
+                    <a:lnBlToTr w="12700" cmpd="sng">
+                      <a:noFill/>
+                      <a:prstDash val="solid"/>
+                    </a:lnBlToTr>
+                    <a:noFill/>
+                  </a:tcPr>
+                </a:tc>
+                <a:extLst>
+                  <a:ext uri="{0D108BD9-81ED-4DB2-BD59-A6C34878D82A}">
+                    <a16:rowId xmlns:a16="http://schemas.microsoft.com/office/drawing/2014/main" val="4174898734"/>
+                  </a:ext>
+                </a:extLst>
+              </a:tr>
+              <a:tr h="194448">
+                <a:tc>
+                  <a:txBody>
+                    <a:bodyPr/>
+                    <a:lstStyle/>
+                    <a:p>
+                      <a:r>
+                        <a:rPr lang="it-IT" sz="1200" b="1" dirty="0">
+                          <a:solidFill>
+                            <a:schemeClr val="tx1"/>
+                          </a:solidFill>
+                        </a:rPr>
+                        <a:t>Action</a:t>
+                      </a:r>
+                    </a:p>
+                  </a:txBody>
+                  <a:tcPr>
+                    <a:lnL w="12700" cap="flat" cmpd="sng" algn="ctr">
+                      <a:solidFill>
+                        <a:schemeClr val="tx1"/>
+                      </a:solidFill>
+                      <a:prstDash val="solid"/>
+                      <a:round/>
+                      <a:headEnd type="none" w="med" len="med"/>
+                      <a:tailEnd type="none" w="med" len="med"/>
+                    </a:lnL>
+                    <a:lnR w="12700" cap="flat" cmpd="sng" algn="ctr">
+                      <a:solidFill>
+                        <a:schemeClr val="tx1"/>
+                      </a:solidFill>
+                      <a:prstDash val="solid"/>
+                      <a:round/>
+                      <a:headEnd type="none" w="med" len="med"/>
+                      <a:tailEnd type="none" w="med" len="med"/>
+                    </a:lnR>
+                    <a:lnT w="12700" cap="flat" cmpd="sng" algn="ctr">
+                      <a:solidFill>
+                        <a:schemeClr val="tx1"/>
+                      </a:solidFill>
+                      <a:prstDash val="solid"/>
+                      <a:round/>
+                      <a:headEnd type="none" w="med" len="med"/>
+                      <a:tailEnd type="none" w="med" len="med"/>
+                    </a:lnT>
+                    <a:lnB w="12700" cap="flat" cmpd="sng" algn="ctr">
+                      <a:solidFill>
+                        <a:schemeClr val="tx1"/>
+                      </a:solidFill>
+                      <a:prstDash val="solid"/>
+                      <a:round/>
+                      <a:headEnd type="none" w="med" len="med"/>
+                      <a:tailEnd type="none" w="med" len="med"/>
+                    </a:lnB>
+                    <a:solidFill>
+                      <a:srgbClr val="D6E4F0"/>
+                    </a:solidFill>
+                  </a:tcPr>
+                </a:tc>
+                <a:tc>
+                  <a:txBody>
+                    <a:bodyPr/>
+                    <a:lstStyle/>
+                    <a:p>
+                      <a:r>
+                        <a:rPr lang="it-IT" sz="1200" b="1" dirty="0">
+                          <a:solidFill>
+                            <a:schemeClr val="tx1"/>
+                          </a:solidFill>
+                        </a:rPr>
+                        <a:t>1</a:t>
+                      </a:r>
+                    </a:p>
+                  </a:txBody>
+                  <a:tcPr>
+                    <a:lnL w="12700" cap="flat" cmpd="sng" algn="ctr">
+                      <a:solidFill>
+                        <a:schemeClr val="tx1"/>
+                      </a:solidFill>
+                      <a:prstDash val="solid"/>
+                      <a:round/>
+                      <a:headEnd type="none" w="med" len="med"/>
+                      <a:tailEnd type="none" w="med" len="med"/>
+                    </a:lnL>
+                    <a:lnR w="12700" cap="flat" cmpd="sng" algn="ctr">
+                      <a:solidFill>
+                        <a:schemeClr val="tx1"/>
+                      </a:solidFill>
+                      <a:prstDash val="solid"/>
+                      <a:round/>
+                      <a:headEnd type="none" w="med" len="med"/>
+                      <a:tailEnd type="none" w="med" len="med"/>
+                    </a:lnR>
+                    <a:lnT w="12700" cap="flat" cmpd="sng" algn="ctr">
+                      <a:solidFill>
+                        <a:schemeClr val="tx1"/>
+                      </a:solidFill>
+                      <a:prstDash val="solid"/>
+                      <a:round/>
+                      <a:headEnd type="none" w="med" len="med"/>
+                      <a:tailEnd type="none" w="med" len="med"/>
+                    </a:lnT>
+                    <a:lnB w="12700" cap="flat" cmpd="sng" algn="ctr">
+                      <a:solidFill>
+                        <a:schemeClr val="tx1"/>
+                      </a:solidFill>
+                      <a:prstDash val="solid"/>
+                      <a:round/>
+                      <a:headEnd type="none" w="med" len="med"/>
+                      <a:tailEnd type="none" w="med" len="med"/>
+                    </a:lnB>
+                    <a:solidFill>
+                      <a:srgbClr val="D6E4F0"/>
+                    </a:solidFill>
+                  </a:tcPr>
+                </a:tc>
+                <a:tc>
+                  <a:txBody>
+                    <a:bodyPr/>
+                    <a:lstStyle/>
+                    <a:p>
+                      <a:r>
+                        <a:rPr lang="it-IT" sz="1200" b="1" dirty="0">
+                          <a:solidFill>
+                            <a:schemeClr val="tx1"/>
+                          </a:solidFill>
+                        </a:rPr>
+                        <a:t>2</a:t>
+                      </a:r>
+                    </a:p>
+                  </a:txBody>
+                  <a:tcPr>
+                    <a:lnL w="12700" cap="flat" cmpd="sng" algn="ctr">
+                      <a:solidFill>
+                        <a:schemeClr val="tx1"/>
+                      </a:solidFill>
+                      <a:prstDash val="solid"/>
+                      <a:round/>
+                      <a:headEnd type="none" w="med" len="med"/>
+                      <a:tailEnd type="none" w="med" len="med"/>
+                    </a:lnL>
+                    <a:lnR w="12700" cap="flat" cmpd="sng" algn="ctr">
+                      <a:solidFill>
+                        <a:schemeClr val="tx1"/>
+                      </a:solidFill>
+                      <a:prstDash val="solid"/>
+                      <a:round/>
+                      <a:headEnd type="none" w="med" len="med"/>
+                      <a:tailEnd type="none" w="med" len="med"/>
+                    </a:lnR>
+                    <a:lnT w="12700" cap="flat" cmpd="sng" algn="ctr">
+                      <a:solidFill>
+                        <a:schemeClr val="tx1"/>
+                      </a:solidFill>
+                      <a:prstDash val="solid"/>
+                      <a:round/>
+                      <a:headEnd type="none" w="med" len="med"/>
+                      <a:tailEnd type="none" w="med" len="med"/>
+                    </a:lnT>
+                    <a:lnB w="12700" cap="flat" cmpd="sng" algn="ctr">
+                      <a:solidFill>
+                        <a:schemeClr val="tx1"/>
+                      </a:solidFill>
+                      <a:prstDash val="solid"/>
+                      <a:round/>
+                      <a:headEnd type="none" w="med" len="med"/>
+                      <a:tailEnd type="none" w="med" len="med"/>
+                    </a:lnB>
+                    <a:solidFill>
+                      <a:srgbClr val="D6E4F0"/>
+                    </a:solidFill>
+                  </a:tcPr>
+                </a:tc>
+                <a:tc>
+                  <a:txBody>
+                    <a:bodyPr/>
+                    <a:lstStyle/>
+                    <a:p>
+                      <a:r>
+                        <a:rPr lang="it-IT" sz="1200" b="1" dirty="0">
+                          <a:solidFill>
+                            <a:schemeClr val="tx1"/>
+                          </a:solidFill>
+                        </a:rPr>
+                        <a:t>3</a:t>
+                      </a:r>
+                    </a:p>
+                  </a:txBody>
+                  <a:tcPr>
+                    <a:lnL w="12700" cap="flat" cmpd="sng" algn="ctr">
+                      <a:solidFill>
+                        <a:schemeClr val="tx1"/>
+                      </a:solidFill>
+                      <a:prstDash val="solid"/>
+                      <a:round/>
+                      <a:headEnd type="none" w="med" len="med"/>
+                      <a:tailEnd type="none" w="med" len="med"/>
+                    </a:lnL>
+                    <a:lnR w="12700" cap="flat" cmpd="sng" algn="ctr">
+                      <a:solidFill>
+                        <a:schemeClr val="tx1"/>
+                      </a:solidFill>
+                      <a:prstDash val="solid"/>
+                      <a:round/>
+                      <a:headEnd type="none" w="med" len="med"/>
+                      <a:tailEnd type="none" w="med" len="med"/>
+                    </a:lnR>
+                    <a:lnT w="12700" cap="flat" cmpd="sng" algn="ctr">
+                      <a:solidFill>
+                        <a:schemeClr val="tx1"/>
+                      </a:solidFill>
+                      <a:prstDash val="solid"/>
+                      <a:round/>
+                      <a:headEnd type="none" w="med" len="med"/>
+                      <a:tailEnd type="none" w="med" len="med"/>
+                    </a:lnT>
+                    <a:lnB w="12700" cap="flat" cmpd="sng" algn="ctr">
+                      <a:solidFill>
+                        <a:schemeClr val="tx1"/>
+                      </a:solidFill>
+                      <a:prstDash val="solid"/>
+                      <a:round/>
+                      <a:headEnd type="none" w="med" len="med"/>
+                      <a:tailEnd type="none" w="med" len="med"/>
+                    </a:lnB>
+                    <a:solidFill>
+                      <a:srgbClr val="D6E4F0"/>
+                    </a:solidFill>
+                  </a:tcPr>
+                </a:tc>
+                <a:tc>
+                  <a:txBody>
+                    <a:bodyPr/>
+                    <a:lstStyle/>
+                    <a:p>
+                      <a:r>
+                        <a:rPr lang="it-IT" sz="1200" b="1" dirty="0">
+                          <a:solidFill>
+                            <a:schemeClr val="tx1"/>
+                          </a:solidFill>
+                        </a:rPr>
+                        <a:t>4</a:t>
+                      </a:r>
+                    </a:p>
+                  </a:txBody>
+                  <a:tcPr>
+                    <a:lnL w="12700" cap="flat" cmpd="sng" algn="ctr">
+                      <a:solidFill>
+                        <a:schemeClr val="tx1"/>
+                      </a:solidFill>
+                      <a:prstDash val="solid"/>
+                      <a:round/>
+                      <a:headEnd type="none" w="med" len="med"/>
+                      <a:tailEnd type="none" w="med" len="med"/>
+                    </a:lnL>
+                    <a:lnR w="12700" cap="flat" cmpd="sng" algn="ctr">
+                      <a:solidFill>
+                        <a:schemeClr val="tx1"/>
+                      </a:solidFill>
+                      <a:prstDash val="solid"/>
+                      <a:round/>
+                      <a:headEnd type="none" w="med" len="med"/>
+                      <a:tailEnd type="none" w="med" len="med"/>
+                    </a:lnR>
+                    <a:lnT w="12700" cap="flat" cmpd="sng" algn="ctr">
+                      <a:solidFill>
+                        <a:schemeClr val="tx1"/>
+                      </a:solidFill>
+                      <a:prstDash val="solid"/>
+                      <a:round/>
+                      <a:headEnd type="none" w="med" len="med"/>
+                      <a:tailEnd type="none" w="med" len="med"/>
+                    </a:lnT>
+                    <a:lnB w="12700" cap="flat" cmpd="sng" algn="ctr">
+                      <a:solidFill>
+                        <a:schemeClr val="tx1"/>
+                      </a:solidFill>
+                      <a:prstDash val="solid"/>
+                      <a:round/>
+                      <a:headEnd type="none" w="med" len="med"/>
+                      <a:tailEnd type="none" w="med" len="med"/>
+                    </a:lnB>
+                    <a:solidFill>
+                      <a:srgbClr val="D6E4F0"/>
+                    </a:solidFill>
+                  </a:tcPr>
+                </a:tc>
+                <a:tc>
+                  <a:txBody>
+                    <a:bodyPr/>
+                    <a:lstStyle/>
+                    <a:p>
+                      <a:r>
+                        <a:rPr lang="it-IT" sz="1200" b="1" dirty="0">
+                          <a:solidFill>
+                            <a:schemeClr val="tx1"/>
+                          </a:solidFill>
+                        </a:rPr>
+                        <a:t>5</a:t>
+                      </a:r>
+                    </a:p>
+                  </a:txBody>
+                  <a:tcPr>
+                    <a:lnL w="12700" cap="flat" cmpd="sng" algn="ctr">
+                      <a:solidFill>
+                        <a:schemeClr val="tx1"/>
+                      </a:solidFill>
+                      <a:prstDash val="solid"/>
+                      <a:round/>
+                      <a:headEnd type="none" w="med" len="med"/>
+                      <a:tailEnd type="none" w="med" len="med"/>
+                    </a:lnL>
+                    <a:lnR w="12700" cap="flat" cmpd="sng" algn="ctr">
+                      <a:solidFill>
+                        <a:schemeClr val="tx1"/>
+                      </a:solidFill>
+                      <a:prstDash val="solid"/>
+                      <a:round/>
+                      <a:headEnd type="none" w="med" len="med"/>
+                      <a:tailEnd type="none" w="med" len="med"/>
+                    </a:lnR>
+                    <a:lnT w="12700" cap="flat" cmpd="sng" algn="ctr">
+                      <a:solidFill>
+                        <a:schemeClr val="tx1"/>
+                      </a:solidFill>
+                      <a:prstDash val="solid"/>
+                      <a:round/>
+                      <a:headEnd type="none" w="med" len="med"/>
+                      <a:tailEnd type="none" w="med" len="med"/>
+                    </a:lnT>
+                    <a:lnB w="12700" cap="flat" cmpd="sng" algn="ctr">
+                      <a:solidFill>
+                        <a:schemeClr val="tx1"/>
+                      </a:solidFill>
+                      <a:prstDash val="solid"/>
+                      <a:round/>
+                      <a:headEnd type="none" w="med" len="med"/>
+                      <a:tailEnd type="none" w="med" len="med"/>
+                    </a:lnB>
+                    <a:solidFill>
+                      <a:srgbClr val="D6E4F0"/>
+                    </a:solidFill>
+                  </a:tcPr>
+                </a:tc>
+                <a:tc>
+                  <a:txBody>
+                    <a:bodyPr/>
+                    <a:lstStyle/>
+                    <a:p>
+                      <a:r>
+                        <a:rPr lang="it-IT" sz="1200" b="1" dirty="0">
+                          <a:solidFill>
+                            <a:schemeClr val="tx1"/>
+                          </a:solidFill>
+                        </a:rPr>
+                        <a:t>6</a:t>
+                      </a:r>
+                    </a:p>
+                  </a:txBody>
+                  <a:tcPr>
+                    <a:lnL w="12700" cap="flat" cmpd="sng" algn="ctr">
+                      <a:solidFill>
+                        <a:schemeClr val="tx1"/>
+                      </a:solidFill>
+                      <a:prstDash val="solid"/>
+                      <a:round/>
+                      <a:headEnd type="none" w="med" len="med"/>
+                      <a:tailEnd type="none" w="med" len="med"/>
+                    </a:lnL>
+                    <a:lnR w="12700" cap="flat" cmpd="sng" algn="ctr">
+                      <a:solidFill>
+                        <a:schemeClr val="tx1"/>
+                      </a:solidFill>
+                      <a:prstDash val="solid"/>
+                      <a:round/>
+                      <a:headEnd type="none" w="med" len="med"/>
+                      <a:tailEnd type="none" w="med" len="med"/>
+                    </a:lnR>
+                    <a:lnT w="12700" cap="flat" cmpd="sng" algn="ctr">
+                      <a:solidFill>
+                        <a:schemeClr val="tx1"/>
+                      </a:solidFill>
+                      <a:prstDash val="solid"/>
+                      <a:round/>
+                      <a:headEnd type="none" w="med" len="med"/>
+                      <a:tailEnd type="none" w="med" len="med"/>
+                    </a:lnT>
+                    <a:lnB w="12700" cap="flat" cmpd="sng" algn="ctr">
+                      <a:solidFill>
+                        <a:schemeClr val="tx1"/>
+                      </a:solidFill>
+                      <a:prstDash val="solid"/>
+                      <a:round/>
+                      <a:headEnd type="none" w="med" len="med"/>
+                      <a:tailEnd type="none" w="med" len="med"/>
+                    </a:lnB>
+                    <a:solidFill>
+                      <a:srgbClr val="D6E4F0"/>
+                    </a:solidFill>
+                  </a:tcPr>
+                </a:tc>
+                <a:tc>
+                  <a:txBody>
+                    <a:bodyPr/>
+                    <a:lstStyle/>
+                    <a:p>
+                      <a:r>
+                        <a:rPr lang="it-IT" sz="1200" b="1" dirty="0">
+                          <a:solidFill>
+                            <a:schemeClr val="tx1"/>
+                          </a:solidFill>
+                        </a:rPr>
+                        <a:t>7</a:t>
+                      </a:r>
+                    </a:p>
+                  </a:txBody>
+                  <a:tcPr>
+                    <a:lnL w="12700" cap="flat" cmpd="sng" algn="ctr">
+                      <a:solidFill>
+                        <a:schemeClr val="tx1"/>
+                      </a:solidFill>
+                      <a:prstDash val="solid"/>
+                      <a:round/>
+                      <a:headEnd type="none" w="med" len="med"/>
+                      <a:tailEnd type="none" w="med" len="med"/>
+                    </a:lnL>
+                    <a:lnR w="12700" cap="flat" cmpd="sng" algn="ctr">
+                      <a:solidFill>
+                        <a:schemeClr val="tx1"/>
+                      </a:solidFill>
+                      <a:prstDash val="solid"/>
+                      <a:round/>
+                      <a:headEnd type="none" w="med" len="med"/>
+                      <a:tailEnd type="none" w="med" len="med"/>
+                    </a:lnR>
+                    <a:lnT w="12700" cap="flat" cmpd="sng" algn="ctr">
+                      <a:solidFill>
+                        <a:schemeClr val="tx1"/>
+                      </a:solidFill>
+                      <a:prstDash val="solid"/>
+                      <a:round/>
+                      <a:headEnd type="none" w="med" len="med"/>
+                      <a:tailEnd type="none" w="med" len="med"/>
+                    </a:lnT>
+                    <a:lnB w="12700" cap="flat" cmpd="sng" algn="ctr">
+                      <a:solidFill>
+                        <a:schemeClr val="tx1"/>
+                      </a:solidFill>
+                      <a:prstDash val="solid"/>
+                      <a:round/>
+                      <a:headEnd type="none" w="med" len="med"/>
+                      <a:tailEnd type="none" w="med" len="med"/>
+                    </a:lnB>
+                    <a:solidFill>
+                      <a:srgbClr val="D6E4F0"/>
+                    </a:solidFill>
+                  </a:tcPr>
+                </a:tc>
+                <a:extLst>
+                  <a:ext uri="{0D108BD9-81ED-4DB2-BD59-A6C34878D82A}">
+                    <a16:rowId xmlns:a16="http://schemas.microsoft.com/office/drawing/2014/main" val="2641656554"/>
+                  </a:ext>
+                </a:extLst>
+              </a:tr>
+              <a:tr h="194448">
+                <a:tc>
+                  <a:txBody>
+                    <a:bodyPr/>
+                    <a:lstStyle/>
+                    <a:p>
+                      <a:r>
+                        <a:rPr lang="it-IT" sz="1200" dirty="0" err="1"/>
+                        <a:t>Probability</a:t>
+                      </a:r>
+                      <a:endParaRPr lang="it-IT" sz="1200" dirty="0"/>
+                    </a:p>
+                  </a:txBody>
+                  <a:tcPr>
+                    <a:lnL w="12700" cap="flat" cmpd="sng" algn="ctr">
+                      <a:solidFill>
+                        <a:schemeClr val="tx1"/>
+                      </a:solidFill>
+                      <a:prstDash val="solid"/>
+                      <a:round/>
+                      <a:headEnd type="none" w="med" len="med"/>
+                      <a:tailEnd type="none" w="med" len="med"/>
+                    </a:lnL>
+                    <a:lnR w="12700" cap="flat" cmpd="sng" algn="ctr">
+                      <a:solidFill>
+                        <a:schemeClr val="tx1"/>
+                      </a:solidFill>
+                      <a:prstDash val="solid"/>
+                      <a:round/>
+                      <a:headEnd type="none" w="med" len="med"/>
+                      <a:tailEnd type="none" w="med" len="med"/>
+                    </a:lnR>
+                    <a:lnT w="12700" cap="flat" cmpd="sng" algn="ctr">
+                      <a:solidFill>
+                        <a:schemeClr val="tx1"/>
+                      </a:solidFill>
+                      <a:prstDash val="solid"/>
+                      <a:round/>
+                      <a:headEnd type="none" w="med" len="med"/>
+                      <a:tailEnd type="none" w="med" len="med"/>
+                    </a:lnT>
+                    <a:lnB w="12700" cap="flat" cmpd="sng" algn="ctr">
+                      <a:solidFill>
+                        <a:schemeClr val="tx1"/>
+                      </a:solidFill>
+                      <a:prstDash val="solid"/>
+                      <a:round/>
+                      <a:headEnd type="none" w="med" len="med"/>
+                      <a:tailEnd type="none" w="med" len="med"/>
+                    </a:lnB>
+                    <a:noFill/>
+                  </a:tcPr>
+                </a:tc>
+                <a:tc>
+                  <a:txBody>
+                    <a:bodyPr/>
+                    <a:lstStyle/>
+                    <a:p>
+                      <a:r>
+                        <a:rPr lang="it-IT" sz="1200" dirty="0"/>
+                        <a:t>0.62</a:t>
+                      </a:r>
+                    </a:p>
+                  </a:txBody>
+                  <a:tcPr>
+                    <a:lnL w="12700" cap="flat" cmpd="sng" algn="ctr">
+                      <a:solidFill>
+                        <a:schemeClr val="tx1"/>
+                      </a:solidFill>
+                      <a:prstDash val="solid"/>
+                      <a:round/>
+                      <a:headEnd type="none" w="med" len="med"/>
+                      <a:tailEnd type="none" w="med" len="med"/>
+                    </a:lnL>
+                    <a:lnR w="12700" cap="flat" cmpd="sng" algn="ctr">
+                      <a:solidFill>
+                        <a:schemeClr val="tx1"/>
+                      </a:solidFill>
+                      <a:prstDash val="solid"/>
+                      <a:round/>
+                      <a:headEnd type="none" w="med" len="med"/>
+                      <a:tailEnd type="none" w="med" len="med"/>
+                    </a:lnR>
+                    <a:lnT w="12700" cap="flat" cmpd="sng" algn="ctr">
+                      <a:solidFill>
+                        <a:schemeClr val="tx1"/>
+                      </a:solidFill>
+                      <a:prstDash val="solid"/>
+                      <a:round/>
+                      <a:headEnd type="none" w="med" len="med"/>
+                      <a:tailEnd type="none" w="med" len="med"/>
+                    </a:lnT>
+                    <a:lnB w="12700" cap="flat" cmpd="sng" algn="ctr">
+                      <a:solidFill>
+                        <a:schemeClr val="tx1"/>
+                      </a:solidFill>
+                      <a:prstDash val="solid"/>
+                      <a:round/>
+                      <a:headEnd type="none" w="med" len="med"/>
+                      <a:tailEnd type="none" w="med" len="med"/>
+                    </a:lnB>
+                    <a:noFill/>
+                  </a:tcPr>
+                </a:tc>
+                <a:tc>
+                  <a:txBody>
+                    <a:bodyPr/>
+                    <a:lstStyle/>
+                    <a:p>
+                      <a:r>
+                        <a:rPr lang="it-IT" sz="1200" dirty="0"/>
+                        <a:t>0.19</a:t>
+                      </a:r>
+                    </a:p>
+                  </a:txBody>
+                  <a:tcPr>
+                    <a:lnL w="12700" cap="flat" cmpd="sng" algn="ctr">
+                      <a:solidFill>
+                        <a:schemeClr val="tx1"/>
+                      </a:solidFill>
+                      <a:prstDash val="solid"/>
+                      <a:round/>
+                      <a:headEnd type="none" w="med" len="med"/>
+                      <a:tailEnd type="none" w="med" len="med"/>
+                    </a:lnL>
+                    <a:lnR w="12700" cap="flat" cmpd="sng" algn="ctr">
+                      <a:solidFill>
+                        <a:schemeClr val="tx1"/>
+                      </a:solidFill>
+                      <a:prstDash val="solid"/>
+                      <a:round/>
+                      <a:headEnd type="none" w="med" len="med"/>
+                      <a:tailEnd type="none" w="med" len="med"/>
+                    </a:lnR>
+                    <a:lnT w="12700" cap="flat" cmpd="sng" algn="ctr">
+                      <a:solidFill>
+                        <a:schemeClr val="tx1"/>
+                      </a:solidFill>
+                      <a:prstDash val="solid"/>
+                      <a:round/>
+                      <a:headEnd type="none" w="med" len="med"/>
+                      <a:tailEnd type="none" w="med" len="med"/>
+                    </a:lnT>
+                    <a:lnB w="12700" cap="flat" cmpd="sng" algn="ctr">
+                      <a:solidFill>
+                        <a:schemeClr val="tx1"/>
+                      </a:solidFill>
+                      <a:prstDash val="solid"/>
+                      <a:round/>
+                      <a:headEnd type="none" w="med" len="med"/>
+                      <a:tailEnd type="none" w="med" len="med"/>
+                    </a:lnB>
+                    <a:noFill/>
+                  </a:tcPr>
+                </a:tc>
+                <a:tc>
+                  <a:txBody>
+                    <a:bodyPr/>
+                    <a:lstStyle/>
+                    <a:p>
+                      <a:r>
+                        <a:rPr lang="it-IT" sz="1200" dirty="0"/>
+                        <a:t>0.085</a:t>
+                      </a:r>
+                    </a:p>
+                  </a:txBody>
+                  <a:tcPr>
+                    <a:lnL w="12700" cap="flat" cmpd="sng" algn="ctr">
+                      <a:solidFill>
+                        <a:schemeClr val="tx1"/>
+                      </a:solidFill>
+                      <a:prstDash val="solid"/>
+                      <a:round/>
+                      <a:headEnd type="none" w="med" len="med"/>
+                      <a:tailEnd type="none" w="med" len="med"/>
+                    </a:lnL>
+                    <a:lnR w="12700" cap="flat" cmpd="sng" algn="ctr">
+                      <a:solidFill>
+                        <a:schemeClr val="tx1"/>
+                      </a:solidFill>
+                      <a:prstDash val="solid"/>
+                      <a:round/>
+                      <a:headEnd type="none" w="med" len="med"/>
+                      <a:tailEnd type="none" w="med" len="med"/>
+                    </a:lnR>
+                    <a:lnT w="12700" cap="flat" cmpd="sng" algn="ctr">
+                      <a:solidFill>
+                        <a:schemeClr val="tx1"/>
+                      </a:solidFill>
+                      <a:prstDash val="solid"/>
+                      <a:round/>
+                      <a:headEnd type="none" w="med" len="med"/>
+                      <a:tailEnd type="none" w="med" len="med"/>
+                    </a:lnT>
+                    <a:lnB w="12700" cap="flat" cmpd="sng" algn="ctr">
+                      <a:solidFill>
+                        <a:schemeClr val="tx1"/>
+                      </a:solidFill>
+                      <a:prstDash val="solid"/>
+                      <a:round/>
+                      <a:headEnd type="none" w="med" len="med"/>
+                      <a:tailEnd type="none" w="med" len="med"/>
+                    </a:lnB>
+                    <a:noFill/>
+                  </a:tcPr>
+                </a:tc>
+                <a:tc>
+                  <a:txBody>
+                    <a:bodyPr/>
+                    <a:lstStyle/>
+                    <a:p>
+                      <a:r>
+                        <a:rPr lang="it-IT" sz="1200" dirty="0"/>
+                        <a:t>0.063</a:t>
+                      </a:r>
+                    </a:p>
+                  </a:txBody>
+                  <a:tcPr>
+                    <a:lnL w="12700" cap="flat" cmpd="sng" algn="ctr">
+                      <a:solidFill>
+                        <a:schemeClr val="tx1"/>
+                      </a:solidFill>
+                      <a:prstDash val="solid"/>
+                      <a:round/>
+                      <a:headEnd type="none" w="med" len="med"/>
+                      <a:tailEnd type="none" w="med" len="med"/>
+                    </a:lnL>
+                    <a:lnR w="12700" cap="flat" cmpd="sng" algn="ctr">
+                      <a:solidFill>
+                        <a:schemeClr val="tx1"/>
+                      </a:solidFill>
+                      <a:prstDash val="solid"/>
+                      <a:round/>
+                      <a:headEnd type="none" w="med" len="med"/>
+                      <a:tailEnd type="none" w="med" len="med"/>
+                    </a:lnR>
+                    <a:lnT w="12700" cap="flat" cmpd="sng" algn="ctr">
+                      <a:solidFill>
+                        <a:schemeClr val="tx1"/>
+                      </a:solidFill>
+                      <a:prstDash val="solid"/>
+                      <a:round/>
+                      <a:headEnd type="none" w="med" len="med"/>
+                      <a:tailEnd type="none" w="med" len="med"/>
+                    </a:lnT>
+                    <a:lnB w="12700" cap="flat" cmpd="sng" algn="ctr">
+                      <a:solidFill>
+                        <a:schemeClr val="tx1"/>
+                      </a:solidFill>
+                      <a:prstDash val="solid"/>
+                      <a:round/>
+                      <a:headEnd type="none" w="med" len="med"/>
+                      <a:tailEnd type="none" w="med" len="med"/>
+                    </a:lnB>
+                    <a:noFill/>
+                  </a:tcPr>
+                </a:tc>
+                <a:tc>
+                  <a:txBody>
+                    <a:bodyPr/>
+                    <a:lstStyle/>
+                    <a:p>
+                      <a:r>
+                        <a:rPr lang="it-IT" sz="1200" dirty="0"/>
+                        <a:t>0.016</a:t>
+                      </a:r>
+                    </a:p>
+                  </a:txBody>
+                  <a:tcPr>
+                    <a:lnL w="12700" cap="flat" cmpd="sng" algn="ctr">
+                      <a:solidFill>
+                        <a:schemeClr val="tx1"/>
+                      </a:solidFill>
+                      <a:prstDash val="solid"/>
+                      <a:round/>
+                      <a:headEnd type="none" w="med" len="med"/>
+                      <a:tailEnd type="none" w="med" len="med"/>
+                    </a:lnL>
+                    <a:lnR w="12700" cap="flat" cmpd="sng" algn="ctr">
+                      <a:solidFill>
+                        <a:schemeClr val="tx1"/>
+                      </a:solidFill>
+                      <a:prstDash val="solid"/>
+                      <a:round/>
+                      <a:headEnd type="none" w="med" len="med"/>
+                      <a:tailEnd type="none" w="med" len="med"/>
+                    </a:lnR>
+                    <a:lnT w="12700" cap="flat" cmpd="sng" algn="ctr">
+                      <a:solidFill>
+                        <a:schemeClr val="tx1"/>
+                      </a:solidFill>
+                      <a:prstDash val="solid"/>
+                      <a:round/>
+                      <a:headEnd type="none" w="med" len="med"/>
+                      <a:tailEnd type="none" w="med" len="med"/>
+                    </a:lnT>
+                    <a:lnB w="12700" cap="flat" cmpd="sng" algn="ctr">
+                      <a:solidFill>
+                        <a:schemeClr val="tx1"/>
+                      </a:solidFill>
+                      <a:prstDash val="solid"/>
+                      <a:round/>
+                      <a:headEnd type="none" w="med" len="med"/>
+                      <a:tailEnd type="none" w="med" len="med"/>
+                    </a:lnB>
+                    <a:noFill/>
+                  </a:tcPr>
+                </a:tc>
+                <a:tc>
+                  <a:txBody>
+                    <a:bodyPr/>
+                    <a:lstStyle/>
+                    <a:p>
+                      <a:r>
+                        <a:rPr lang="it-IT" sz="1200" dirty="0"/>
+                        <a:t>0.021</a:t>
+                      </a:r>
+                    </a:p>
+                  </a:txBody>
+                  <a:tcPr>
+                    <a:lnL w="12700" cap="flat" cmpd="sng" algn="ctr">
+                      <a:solidFill>
+                        <a:schemeClr val="tx1"/>
+                      </a:solidFill>
+                      <a:prstDash val="solid"/>
+                      <a:round/>
+                      <a:headEnd type="none" w="med" len="med"/>
+                      <a:tailEnd type="none" w="med" len="med"/>
+                    </a:lnL>
+                    <a:lnR w="12700" cap="flat" cmpd="sng" algn="ctr">
+                      <a:solidFill>
+                        <a:schemeClr val="tx1"/>
+                      </a:solidFill>
+                      <a:prstDash val="solid"/>
+                      <a:round/>
+                      <a:headEnd type="none" w="med" len="med"/>
+                      <a:tailEnd type="none" w="med" len="med"/>
+                    </a:lnR>
+                    <a:lnT w="12700" cap="flat" cmpd="sng" algn="ctr">
+                      <a:solidFill>
+                        <a:schemeClr val="tx1"/>
+                      </a:solidFill>
+                      <a:prstDash val="solid"/>
+                      <a:round/>
+                      <a:headEnd type="none" w="med" len="med"/>
+                      <a:tailEnd type="none" w="med" len="med"/>
+                    </a:lnT>
+                    <a:lnB w="12700" cap="flat" cmpd="sng" algn="ctr">
+                      <a:solidFill>
+                        <a:schemeClr val="tx1"/>
+                      </a:solidFill>
+                      <a:prstDash val="solid"/>
+                      <a:round/>
+                      <a:headEnd type="none" w="med" len="med"/>
+                      <a:tailEnd type="none" w="med" len="med"/>
+                    </a:lnB>
+                    <a:noFill/>
+                  </a:tcPr>
+                </a:tc>
+                <a:tc>
+                  <a:txBody>
+                    <a:bodyPr/>
+                    <a:lstStyle/>
+                    <a:p>
+                      <a:r>
+                        <a:rPr lang="it-IT" sz="1200" dirty="0"/>
+                        <a:t>0.003</a:t>
+                      </a:r>
+                    </a:p>
+                  </a:txBody>
+                  <a:tcPr>
+                    <a:lnL w="12700" cap="flat" cmpd="sng" algn="ctr">
+                      <a:solidFill>
+                        <a:schemeClr val="tx1"/>
+                      </a:solidFill>
+                      <a:prstDash val="solid"/>
+                      <a:round/>
+                      <a:headEnd type="none" w="med" len="med"/>
+                      <a:tailEnd type="none" w="med" len="med"/>
+                    </a:lnL>
+                    <a:lnR w="12700" cap="flat" cmpd="sng" algn="ctr">
+                      <a:solidFill>
+                        <a:schemeClr val="tx1"/>
+                      </a:solidFill>
+                      <a:prstDash val="solid"/>
+                      <a:round/>
+                      <a:headEnd type="none" w="med" len="med"/>
+                      <a:tailEnd type="none" w="med" len="med"/>
+                    </a:lnR>
+                    <a:lnT w="12700" cap="flat" cmpd="sng" algn="ctr">
+                      <a:solidFill>
+                        <a:schemeClr val="tx1"/>
+                      </a:solidFill>
+                      <a:prstDash val="solid"/>
+                      <a:round/>
+                      <a:headEnd type="none" w="med" len="med"/>
+                      <a:tailEnd type="none" w="med" len="med"/>
+                    </a:lnT>
+                    <a:lnB w="12700" cap="flat" cmpd="sng" algn="ctr">
+                      <a:solidFill>
+                        <a:schemeClr val="tx1"/>
+                      </a:solidFill>
+                      <a:prstDash val="solid"/>
+                      <a:round/>
+                      <a:headEnd type="none" w="med" len="med"/>
+                      <a:tailEnd type="none" w="med" len="med"/>
+                    </a:lnB>
+                    <a:noFill/>
+                  </a:tcPr>
+                </a:tc>
+                <a:extLst>
+                  <a:ext uri="{0D108BD9-81ED-4DB2-BD59-A6C34878D82A}">
+                    <a16:rowId xmlns:a16="http://schemas.microsoft.com/office/drawing/2014/main" val="638192910"/>
+                  </a:ext>
+                </a:extLst>
+              </a:tr>
+            </a:tbl>
+          </a:graphicData>
+        </a:graphic>
+      </p:graphicFrame>
+      <p:sp>
+        <p:nvSpPr>
+          <p:cNvPr id="19" name="Text 8">
+            <a:extLst>
+              <a:ext uri="{FF2B5EF4-FFF2-40B4-BE49-F238E27FC236}">
+                <a16:creationId xmlns:a16="http://schemas.microsoft.com/office/drawing/2014/main" id="{D4C2B804-F085-8FB8-F74C-F4A8DE171C55}"/>
+              </a:ext>
+            </a:extLst>
+          </p:cNvPr>
+          <p:cNvSpPr/>
+          <p:nvPr/>
+        </p:nvSpPr>
+        <p:spPr>
+          <a:xfrm>
+            <a:off x="6139814" y="1286256"/>
+            <a:ext cx="2766061" cy="341376"/>
+          </a:xfrm>
+          <a:prstGeom prst="rect">
+            <a:avLst/>
+          </a:prstGeom>
+          <a:noFill/>
+          <a:ln/>
+        </p:spPr>
+        <p:txBody>
+          <a:bodyPr wrap="square" rtlCol="0" anchor="t"/>
+          <a:lstStyle/>
+          <a:p>
+            <a:pPr algn="ctr">
+              <a:spcAft>
+                <a:spcPts val="500"/>
+              </a:spcAft>
+              <a:buSzPct val="100000"/>
+            </a:pPr>
+            <a:r>
+              <a:rPr lang="en-US" sz="1600" dirty="0">
+                <a:solidFill>
+                  <a:srgbClr val="1A1A1A"/>
+                </a:solidFill>
+                <a:latin typeface="Calibri" pitchFamily="34" charset="0"/>
+                <a:ea typeface="Calibri" pitchFamily="34" charset="-122"/>
+                <a:cs typeface="Calibri" pitchFamily="34" charset="-120"/>
+              </a:rPr>
+              <a:t>The policy learned is </a:t>
+            </a:r>
+          </a:p>
+          <a:p>
+            <a:pPr algn="ctr">
+              <a:spcAft>
+                <a:spcPts val="500"/>
+              </a:spcAft>
+              <a:buSzPct val="100000"/>
+            </a:pPr>
+            <a:r>
+              <a:rPr lang="en-US" sz="1600" dirty="0">
+                <a:solidFill>
+                  <a:srgbClr val="1A1A1A"/>
+                </a:solidFill>
+                <a:latin typeface="Calibri" pitchFamily="34" charset="0"/>
+                <a:ea typeface="Calibri" pitchFamily="34" charset="-122"/>
+                <a:cs typeface="Calibri" pitchFamily="34" charset="-120"/>
+              </a:rPr>
+              <a:t>different from the heuristic</a:t>
+            </a:r>
+          </a:p>
+        </p:txBody>
+      </p:sp>
+      <p:cxnSp>
+        <p:nvCxnSpPr>
+          <p:cNvPr id="20" name="Connettore 2 19">
+            <a:extLst>
+              <a:ext uri="{FF2B5EF4-FFF2-40B4-BE49-F238E27FC236}">
+                <a16:creationId xmlns:a16="http://schemas.microsoft.com/office/drawing/2014/main" id="{96C43A4C-15D6-5B2A-E554-84B6475071B3}"/>
+              </a:ext>
+            </a:extLst>
+          </p:cNvPr>
+          <p:cNvCxnSpPr>
+            <a:cxnSpLocks/>
+          </p:cNvCxnSpPr>
+          <p:nvPr/>
+        </p:nvCxnSpPr>
+        <p:spPr>
+          <a:xfrm>
+            <a:off x="5915023" y="1588016"/>
+            <a:ext cx="262891" cy="0"/>
+          </a:xfrm>
+          <a:prstGeom prst="straightConnector1">
+            <a:avLst/>
+          </a:prstGeom>
+          <a:ln w="28575">
+            <a:solidFill>
+              <a:srgbClr val="4CAF50"/>
+            </a:solidFill>
+            <a:tailEnd type="triangle"/>
+          </a:ln>
+        </p:spPr>
+        <p:style>
+          <a:lnRef idx="1">
+            <a:schemeClr val="accent1"/>
+          </a:lnRef>
+          <a:fillRef idx="0">
+            <a:schemeClr val="accent1"/>
+          </a:fillRef>
+          <a:effectRef idx="0">
+            <a:schemeClr val="accent1"/>
+          </a:effectRef>
+          <a:fontRef idx="minor">
+            <a:schemeClr val="tx1"/>
+          </a:fontRef>
+        </p:style>
+      </p:cxnSp>
+      <p:sp>
+        <p:nvSpPr>
+          <p:cNvPr id="21" name="Text 7">
+            <a:extLst>
+              <a:ext uri="{FF2B5EF4-FFF2-40B4-BE49-F238E27FC236}">
+                <a16:creationId xmlns:a16="http://schemas.microsoft.com/office/drawing/2014/main" id="{F2CB1858-9EB4-4CC7-7CE9-9191E65A2805}"/>
+              </a:ext>
+            </a:extLst>
+          </p:cNvPr>
+          <p:cNvSpPr/>
+          <p:nvPr/>
+        </p:nvSpPr>
+        <p:spPr>
+          <a:xfrm>
+            <a:off x="457200" y="2436878"/>
+            <a:ext cx="8229600" cy="274320"/>
+          </a:xfrm>
+          <a:prstGeom prst="rect">
+            <a:avLst/>
+          </a:prstGeom>
+          <a:noFill/>
+          <a:ln/>
+        </p:spPr>
+        <p:txBody>
+          <a:bodyPr wrap="square" rtlCol="0" anchor="ctr"/>
+          <a:lstStyle/>
+          <a:p>
+            <a:pPr marL="0" indent="0">
+              <a:buNone/>
+            </a:pPr>
+            <a:r>
+              <a:rPr lang="en-US" b="1" dirty="0">
+                <a:solidFill>
+                  <a:srgbClr val="4CAF50"/>
+                </a:solidFill>
+                <a:latin typeface="Calibri" pitchFamily="34" charset="0"/>
+                <a:ea typeface="Calibri" pitchFamily="34" charset="-122"/>
+                <a:cs typeface="Calibri" pitchFamily="34" charset="-120"/>
+              </a:rPr>
+              <a:t>Interpretation</a:t>
+            </a:r>
+            <a:endParaRPr lang="en-US" dirty="0">
+              <a:solidFill>
+                <a:srgbClr val="4CAF50"/>
+              </a:solidFill>
+            </a:endParaRPr>
           </a:p>
         </p:txBody>
       </p:sp>
@@ -17981,8 +22412,8 @@
         </p:blipFill>
         <p:spPr>
           <a:xfrm>
-            <a:off x="4747137" y="785808"/>
-            <a:ext cx="3833300" cy="1635919"/>
+            <a:off x="5250057" y="785809"/>
+            <a:ext cx="3109083" cy="1326848"/>
           </a:xfrm>
           <a:prstGeom prst="rect">
             <a:avLst/>
@@ -17991,63 +22422,165 @@
       </p:pic>
       <p:sp>
         <p:nvSpPr>
-          <p:cNvPr id="6" name="CasellaDiTesto 5">
+          <p:cNvPr id="5" name="Shape 5">
             <a:extLst>
               <a:ext uri="{FF2B5EF4-FFF2-40B4-BE49-F238E27FC236}">
-                <a16:creationId xmlns:a16="http://schemas.microsoft.com/office/drawing/2014/main" id="{7DB5838F-3F80-CDC3-ECA0-7532233B7FE2}"/>
+                <a16:creationId xmlns:a16="http://schemas.microsoft.com/office/drawing/2014/main" id="{573C8336-5AD8-C4B2-E340-D77267B6C525}"/>
               </a:ext>
             </a:extLst>
           </p:cNvPr>
-          <p:cNvSpPr txBox="1"/>
+          <p:cNvSpPr/>
           <p:nvPr/>
         </p:nvSpPr>
         <p:spPr>
           <a:xfrm>
-            <a:off x="368300" y="914400"/>
-            <a:ext cx="4089400" cy="3556000"/>
+            <a:off x="320040" y="914400"/>
+            <a:ext cx="4785360" cy="1645920"/>
+          </a:xfrm>
+          <a:prstGeom prst="rect">
+            <a:avLst/>
+          </a:prstGeom>
+          <a:solidFill>
+            <a:srgbClr val="F5F7FA"/>
+          </a:solidFill>
+          <a:ln w="12700">
+            <a:solidFill>
+              <a:srgbClr val="D6E4F0"/>
+            </a:solidFill>
+            <a:prstDash val="solid"/>
+          </a:ln>
+        </p:spPr>
+      </p:sp>
+      <p:sp>
+        <p:nvSpPr>
+          <p:cNvPr id="8" name="Text 7">
+            <a:extLst>
+              <a:ext uri="{FF2B5EF4-FFF2-40B4-BE49-F238E27FC236}">
+                <a16:creationId xmlns:a16="http://schemas.microsoft.com/office/drawing/2014/main" id="{F7F5C26E-B483-858E-04DF-EE05A7A1B5F3}"/>
+              </a:ext>
+            </a:extLst>
+          </p:cNvPr>
+          <p:cNvSpPr/>
+          <p:nvPr/>
+        </p:nvSpPr>
+        <p:spPr>
+          <a:xfrm>
+            <a:off x="457200" y="960120"/>
+            <a:ext cx="3840480" cy="274320"/>
           </a:xfrm>
           <a:prstGeom prst="rect">
             <a:avLst/>
           </a:prstGeom>
           <a:noFill/>
+          <a:ln/>
         </p:spPr>
         <p:txBody>
-          <a:bodyPr vertOverflow="overflow" vert="horz" wrap="square" rtlCol="0" anchor="t">
-            <a:noAutofit/>
-          </a:bodyPr>
+          <a:bodyPr wrap="square" rtlCol="0" anchor="ctr"/>
           <a:lstStyle/>
           <a:p>
-            <a:pPr algn="l"/>
-            <a:r>
-              <a:rPr lang="it-IT" sz="1600" dirty="0">
+            <a:pPr marL="0" indent="0">
+              <a:buNone/>
+            </a:pPr>
+            <a:r>
+              <a:rPr lang="en-US" sz="1300" b="1" dirty="0">
+                <a:latin typeface="Calibri" pitchFamily="34" charset="0"/>
+                <a:ea typeface="Calibri" pitchFamily="34" charset="-122"/>
+                <a:cs typeface="Calibri" pitchFamily="34" charset="-120"/>
+              </a:rPr>
+              <a:t>Reinforcement Learning</a:t>
+            </a:r>
+            <a:endParaRPr lang="en-US" sz="1300" dirty="0"/>
+          </a:p>
+        </p:txBody>
+      </p:sp>
+      <p:sp>
+        <p:nvSpPr>
+          <p:cNvPr id="9" name="Text 8">
+            <a:extLst>
+              <a:ext uri="{FF2B5EF4-FFF2-40B4-BE49-F238E27FC236}">
+                <a16:creationId xmlns:a16="http://schemas.microsoft.com/office/drawing/2014/main" id="{20F013AD-F929-BC0A-5743-A5947A99B8CF}"/>
+              </a:ext>
+            </a:extLst>
+          </p:cNvPr>
+          <p:cNvSpPr/>
+          <p:nvPr/>
+        </p:nvSpPr>
+        <p:spPr>
+          <a:xfrm>
+            <a:off x="457200" y="1280160"/>
+            <a:ext cx="4457700" cy="1188720"/>
+          </a:xfrm>
+          <a:prstGeom prst="rect">
+            <a:avLst/>
+          </a:prstGeom>
+          <a:noFill/>
+          <a:ln/>
+        </p:spPr>
+        <p:txBody>
+          <a:bodyPr wrap="square" rtlCol="0" anchor="t"/>
+          <a:lstStyle/>
+          <a:p>
+            <a:pPr marL="190500" indent="-190500">
+              <a:spcAft>
+                <a:spcPts val="500"/>
+              </a:spcAft>
+              <a:buSzPct val="100000"/>
+              <a:buChar char="•"/>
+            </a:pPr>
+            <a:r>
+              <a:rPr lang="en-US" sz="1300" dirty="0">
                 <a:solidFill>
-                  <a:srgbClr val="333333"/>
+                  <a:srgbClr val="1A1A1A"/>
                 </a:solidFill>
-                <a:latin typeface="Calibri"/>
-                <a:ea typeface="Calibri"/>
-                <a:cs typeface="Calibri"/>
+                <a:latin typeface="Calibri" pitchFamily="34" charset="0"/>
+                <a:ea typeface="Calibri" pitchFamily="34" charset="-122"/>
+                <a:cs typeface="Calibri" pitchFamily="34" charset="-120"/>
               </a:rPr>
-              <a:t>Left </a:t>
-            </a:r>
-            <a:r>
-              <a:rPr lang="it-IT" sz="1600" dirty="0" err="1">
+              <a:t>Agent observes state s, takes action a, receives reward r</a:t>
+            </a:r>
+            <a:endParaRPr lang="en-US" sz="1300" dirty="0"/>
+          </a:p>
+          <a:p>
+            <a:pPr marL="190500" indent="-190500">
+              <a:spcAft>
+                <a:spcPts val="500"/>
+              </a:spcAft>
+              <a:buSzPct val="100000"/>
+              <a:buChar char="•"/>
+            </a:pPr>
+            <a:r>
+              <a:rPr lang="en-US" sz="1300" dirty="0">
                 <a:solidFill>
-                  <a:srgbClr val="333333"/>
+                  <a:srgbClr val="1A1A1A"/>
                 </a:solidFill>
-                <a:latin typeface="Calibri"/>
-                <a:ea typeface="Calibri"/>
-                <a:cs typeface="Calibri"/>
+                <a:latin typeface="Calibri" pitchFamily="34" charset="0"/>
+                <a:ea typeface="Calibri" pitchFamily="34" charset="-122"/>
+                <a:cs typeface="Calibri" pitchFamily="34" charset="-120"/>
               </a:rPr>
-              <a:t>content</a:t>
-            </a:r>
-            <a:endParaRPr lang="it-IT" sz="1600" dirty="0">
-              <a:solidFill>
-                <a:srgbClr val="333333"/>
-              </a:solidFill>
-              <a:latin typeface="Calibri"/>
-              <a:ea typeface="Calibri"/>
-              <a:cs typeface="Calibri"/>
-            </a:endParaRPr>
+              <a:t>Goal: maximize cumulative discounted reward G = Σ γ^t r_t</a:t>
+            </a:r>
+            <a:endParaRPr lang="en-US" sz="1300" dirty="0"/>
+          </a:p>
+          <a:p>
+            <a:pPr marL="190500" indent="-190500">
+              <a:spcAft>
+                <a:spcPts val="500"/>
+              </a:spcAft>
+              <a:buSzPct val="100000"/>
+              <a:buChar char="•"/>
+            </a:pPr>
+            <a:r>
+              <a:rPr lang="en-US" sz="1300" dirty="0">
+                <a:solidFill>
+                  <a:srgbClr val="1A1A1A"/>
+                </a:solidFill>
+                <a:latin typeface="Calibri" pitchFamily="34" charset="0"/>
+                <a:ea typeface="Calibri" pitchFamily="34" charset="-122"/>
+                <a:cs typeface="Calibri" pitchFamily="34" charset="-120"/>
+              </a:rPr>
+              <a:t>Q-learning estimates Q(s,a) via Bellman updates</a:t>
+            </a:r>
+            <a:endParaRPr lang="en-US" sz="1300" dirty="0"/>
           </a:p>
         </p:txBody>
       </p:sp>

--- a/presentation_1.pptx
+++ b/presentation_1.pptx
@@ -6,7 +6,7 @@
     <p:sldMasterId id="2147483655" r:id="rId2"/>
   </p:sldMasterIdLst>
   <p:notesMasterIdLst>
-    <p:notesMasterId r:id="rId26"/>
+    <p:notesMasterId r:id="rId27"/>
   </p:notesMasterIdLst>
   <p:sldIdLst>
     <p:sldId id="266" r:id="rId3"/>
@@ -15,23 +15,24 @@
     <p:sldId id="259" r:id="rId6"/>
     <p:sldId id="271" r:id="rId7"/>
     <p:sldId id="261" r:id="rId8"/>
-    <p:sldId id="267" r:id="rId9"/>
-    <p:sldId id="272" r:id="rId10"/>
-    <p:sldId id="262" r:id="rId11"/>
-    <p:sldId id="274" r:id="rId12"/>
-    <p:sldId id="275" r:id="rId13"/>
-    <p:sldId id="276" r:id="rId14"/>
-    <p:sldId id="265" r:id="rId15"/>
-    <p:sldId id="285" r:id="rId16"/>
-    <p:sldId id="292" r:id="rId17"/>
-    <p:sldId id="279" r:id="rId18"/>
-    <p:sldId id="293" r:id="rId19"/>
-    <p:sldId id="297" r:id="rId20"/>
-    <p:sldId id="268" r:id="rId21"/>
-    <p:sldId id="295" r:id="rId22"/>
-    <p:sldId id="296" r:id="rId23"/>
-    <p:sldId id="264" r:id="rId24"/>
-    <p:sldId id="263" r:id="rId25"/>
+    <p:sldId id="298" r:id="rId9"/>
+    <p:sldId id="267" r:id="rId10"/>
+    <p:sldId id="272" r:id="rId11"/>
+    <p:sldId id="262" r:id="rId12"/>
+    <p:sldId id="274" r:id="rId13"/>
+    <p:sldId id="275" r:id="rId14"/>
+    <p:sldId id="276" r:id="rId15"/>
+    <p:sldId id="265" r:id="rId16"/>
+    <p:sldId id="285" r:id="rId17"/>
+    <p:sldId id="292" r:id="rId18"/>
+    <p:sldId id="279" r:id="rId19"/>
+    <p:sldId id="293" r:id="rId20"/>
+    <p:sldId id="297" r:id="rId21"/>
+    <p:sldId id="268" r:id="rId22"/>
+    <p:sldId id="295" r:id="rId23"/>
+    <p:sldId id="296" r:id="rId24"/>
+    <p:sldId id="264" r:id="rId25"/>
+    <p:sldId id="263" r:id="rId26"/>
   </p:sldIdLst>
   <p:sldSz cx="9144000" cy="5143500" type="screen16x9"/>
   <p:notesSz cx="5143500" cy="9144000"/>
@@ -412,7 +413,7 @@
           <a:p>
             <a:fld id="{F7021451-1387-4CA6-816F-3879F97B5CBC}" type="slidenum">
               <a:rPr lang="en-US"/>
-              <a:t>18</a:t>
+              <a:t>19</a:t>
             </a:fld>
             <a:endParaRPr lang="en-US"/>
           </a:p>
@@ -496,7 +497,7 @@
           <a:p>
             <a:fld id="{F7021451-1387-4CA6-816F-3879F97B5CBC}" type="slidenum">
               <a:rPr lang="en-US"/>
-              <a:t>19</a:t>
+              <a:t>20</a:t>
             </a:fld>
             <a:endParaRPr lang="en-US"/>
           </a:p>
@@ -580,7 +581,7 @@
           <a:p>
             <a:fld id="{F7021451-1387-4CA6-816F-3879F97B5CBC}" type="slidenum">
               <a:rPr lang="en-US"/>
-              <a:t>20</a:t>
+              <a:t>21</a:t>
             </a:fld>
             <a:endParaRPr lang="en-US"/>
           </a:p>
@@ -688,7 +689,7 @@
           <a:p>
             <a:fld id="{F7021451-1387-4CA6-816F-3879F97B5CBC}" type="slidenum">
               <a:rPr lang="en-US"/>
-              <a:t>21</a:t>
+              <a:t>22</a:t>
             </a:fld>
             <a:endParaRPr lang="en-US"/>
           </a:p>
@@ -1048,7 +1049,7 @@
           <a:p>
             <a:fld id="{F7021451-1387-4CA6-816F-3879F97B5CBC}" type="slidenum">
               <a:rPr lang="en-US"/>
-              <a:t>8</a:t>
+              <a:t>9</a:t>
             </a:fld>
             <a:endParaRPr lang="en-US"/>
           </a:p>
@@ -1132,7 +1133,7 @@
           <a:p>
             <a:fld id="{F7021451-1387-4CA6-816F-3879F97B5CBC}" type="slidenum">
               <a:rPr lang="en-US"/>
-              <a:t>11</a:t>
+              <a:t>12</a:t>
             </a:fld>
             <a:endParaRPr lang="en-US"/>
           </a:p>
@@ -1240,7 +1241,7 @@
           <a:p>
             <a:fld id="{F7021451-1387-4CA6-816F-3879F97B5CBC}" type="slidenum">
               <a:rPr lang="en-US"/>
-              <a:t>12</a:t>
+              <a:t>13</a:t>
             </a:fld>
             <a:endParaRPr lang="en-US"/>
           </a:p>
@@ -1324,7 +1325,7 @@
           <a:p>
             <a:fld id="{F7021451-1387-4CA6-816F-3879F97B5CBC}" type="slidenum">
               <a:rPr lang="en-US"/>
-              <a:t>13</a:t>
+              <a:t>14</a:t>
             </a:fld>
             <a:endParaRPr lang="en-US"/>
           </a:p>
@@ -1408,7 +1409,7 @@
           <a:p>
             <a:fld id="{F7021451-1387-4CA6-816F-3879F97B5CBC}" type="slidenum">
               <a:rPr lang="en-US"/>
-              <a:t>17</a:t>
+              <a:t>18</a:t>
             </a:fld>
             <a:endParaRPr lang="en-US"/>
           </a:p>
@@ -4023,6 +4024,342 @@
   <p:cSld>
     <p:spTree>
       <p:nvGrpSpPr>
+        <p:cNvPr id="1" name=""/>
+        <p:cNvGrpSpPr/>
+        <p:nvPr/>
+      </p:nvGrpSpPr>
+      <p:grpSpPr>
+        <a:xfrm>
+          <a:off x="0" y="0"/>
+          <a:ext cx="0" cy="0"/>
+          <a:chOff x="0" y="0"/>
+          <a:chExt cx="0" cy="0"/>
+        </a:xfrm>
+      </p:grpSpPr>
+      <p:sp>
+        <p:nvSpPr>
+          <p:cNvPr id="3" name="CasellaDiTesto 2">
+            <a:extLst>
+              <a:ext uri="{FF2B5EF4-FFF2-40B4-BE49-F238E27FC236}">
+                <a16:creationId xmlns:a16="http://schemas.microsoft.com/office/drawing/2014/main" id="{A2573F97-AE10-444A-9306-BFF3D7DCA88C}"/>
+              </a:ext>
+            </a:extLst>
+          </p:cNvPr>
+          <p:cNvSpPr txBox="1"/>
+          <p:nvPr/>
+        </p:nvSpPr>
+        <p:spPr>
+          <a:xfrm>
+            <a:off x="508000" y="254000"/>
+            <a:ext cx="8229600" cy="457200"/>
+          </a:xfrm>
+          <a:prstGeom prst="rect">
+            <a:avLst/>
+          </a:prstGeom>
+          <a:noFill/>
+        </p:spPr>
+        <p:txBody>
+          <a:bodyPr vertOverflow="overflow" vert="horz" wrap="square" rtlCol="0" anchor="ctr" anchorCtr="0">
+            <a:noAutofit/>
+          </a:bodyPr>
+          <a:lstStyle/>
+          <a:p>
+            <a:pPr algn="l"/>
+            <a:r>
+              <a:rPr lang="it-IT" sz="2600" b="1" dirty="0">
+                <a:solidFill>
+                  <a:srgbClr val="1A1A1A"/>
+                </a:solidFill>
+                <a:latin typeface="Calibri"/>
+                <a:ea typeface="Calibri"/>
+                <a:cs typeface="Calibri"/>
+              </a:rPr>
+              <a:t>The Simulator</a:t>
+            </a:r>
+          </a:p>
+        </p:txBody>
+      </p:sp>
+      <p:sp>
+        <p:nvSpPr>
+          <p:cNvPr id="4" name="Text 5">
+            <a:extLst>
+              <a:ext uri="{FF2B5EF4-FFF2-40B4-BE49-F238E27FC236}">
+                <a16:creationId xmlns:a16="http://schemas.microsoft.com/office/drawing/2014/main" id="{091A1769-B9E0-690D-90A7-0369076A82EE}"/>
+              </a:ext>
+            </a:extLst>
+          </p:cNvPr>
+          <p:cNvSpPr/>
+          <p:nvPr/>
+        </p:nvSpPr>
+        <p:spPr>
+          <a:xfrm>
+            <a:off x="370840" y="1364341"/>
+            <a:ext cx="4251960" cy="3474720"/>
+          </a:xfrm>
+          <a:prstGeom prst="rect">
+            <a:avLst/>
+          </a:prstGeom>
+          <a:noFill/>
+          <a:ln/>
+        </p:spPr>
+        <p:txBody>
+          <a:bodyPr wrap="square" rtlCol="0" anchor="t"/>
+          <a:lstStyle/>
+          <a:p>
+            <a:pPr marL="190500" indent="-190500">
+              <a:spcAft>
+                <a:spcPts val="500"/>
+              </a:spcAft>
+              <a:buSzPct val="100000"/>
+              <a:buChar char="•"/>
+            </a:pPr>
+            <a:r>
+              <a:rPr lang="en-US" sz="1400" dirty="0">
+                <a:solidFill>
+                  <a:srgbClr val="1A1A1A"/>
+                </a:solidFill>
+                <a:latin typeface="Calibri" pitchFamily="34" charset="0"/>
+                <a:ea typeface="Calibri" pitchFamily="34" charset="-122"/>
+                <a:cs typeface="Calibri" pitchFamily="34" charset="-120"/>
+              </a:rPr>
+              <a:t>Partially observable discrete map</a:t>
+            </a:r>
+            <a:endParaRPr lang="en-US" sz="1400" dirty="0"/>
+          </a:p>
+          <a:p>
+            <a:pPr marL="190500" indent="-190500">
+              <a:spcAft>
+                <a:spcPts val="500"/>
+              </a:spcAft>
+              <a:buSzPct val="100000"/>
+              <a:buChar char="•"/>
+            </a:pPr>
+            <a:r>
+              <a:rPr lang="en-US" sz="1400" dirty="0">
+                <a:solidFill>
+                  <a:srgbClr val="1A1A1A"/>
+                </a:solidFill>
+                <a:latin typeface="Calibri" pitchFamily="34" charset="0"/>
+                <a:ea typeface="Calibri" pitchFamily="34" charset="-122"/>
+                <a:cs typeface="Calibri" pitchFamily="34" charset="-120"/>
+              </a:rPr>
+              <a:t>Static maps with </a:t>
+            </a:r>
+            <a:r>
+              <a:rPr lang="en-US" sz="1400" b="1" dirty="0">
+                <a:solidFill>
+                  <a:srgbClr val="1A1A1A"/>
+                </a:solidFill>
+                <a:latin typeface="Calibri" pitchFamily="34" charset="0"/>
+                <a:ea typeface="Calibri" pitchFamily="34" charset="-122"/>
+                <a:cs typeface="Calibri" pitchFamily="34" charset="-120"/>
+              </a:rPr>
+              <a:t>random obstacle </a:t>
+            </a:r>
+            <a:r>
+              <a:rPr lang="en-US" sz="1400" dirty="0">
+                <a:solidFill>
+                  <a:srgbClr val="1A1A1A"/>
+                </a:solidFill>
+                <a:latin typeface="Calibri" pitchFamily="34" charset="0"/>
+                <a:ea typeface="Calibri" pitchFamily="34" charset="-122"/>
+                <a:cs typeface="Calibri" pitchFamily="34" charset="-120"/>
+              </a:rPr>
+              <a:t>placement</a:t>
+            </a:r>
+            <a:endParaRPr lang="en-US" sz="1400" dirty="0"/>
+          </a:p>
+          <a:p>
+            <a:pPr marL="190500" indent="-190500">
+              <a:spcAft>
+                <a:spcPts val="500"/>
+              </a:spcAft>
+              <a:buSzPct val="100000"/>
+              <a:buChar char="•"/>
+            </a:pPr>
+            <a:r>
+              <a:rPr lang="en-US" sz="1400" dirty="0">
+                <a:solidFill>
+                  <a:srgbClr val="1A1A1A"/>
+                </a:solidFill>
+                <a:latin typeface="Calibri" pitchFamily="34" charset="0"/>
+                <a:ea typeface="Calibri" pitchFamily="34" charset="-122"/>
+                <a:cs typeface="Calibri" pitchFamily="34" charset="-120"/>
+              </a:rPr>
+              <a:t>Agent observes a local window within his </a:t>
+            </a:r>
+            <a:r>
+              <a:rPr lang="en-US" sz="1400" b="1" dirty="0">
+                <a:solidFill>
+                  <a:srgbClr val="1A1A1A"/>
+                </a:solidFill>
+                <a:latin typeface="Calibri" pitchFamily="34" charset="0"/>
+                <a:ea typeface="Calibri" pitchFamily="34" charset="-122"/>
+                <a:cs typeface="Calibri" pitchFamily="34" charset="-120"/>
+              </a:rPr>
+              <a:t>perception range</a:t>
+            </a:r>
+            <a:endParaRPr lang="en-US" sz="1400" b="1" dirty="0"/>
+          </a:p>
+          <a:p>
+            <a:pPr marL="190500" indent="-190500">
+              <a:spcAft>
+                <a:spcPts val="500"/>
+              </a:spcAft>
+              <a:buSzPct val="100000"/>
+              <a:buChar char="•"/>
+            </a:pPr>
+            <a:r>
+              <a:rPr lang="en-US" sz="1400" dirty="0">
+                <a:solidFill>
+                  <a:srgbClr val="1A1A1A"/>
+                </a:solidFill>
+                <a:latin typeface="Calibri" pitchFamily="34" charset="0"/>
+                <a:ea typeface="Calibri" pitchFamily="34" charset="-122"/>
+                <a:cs typeface="Calibri" pitchFamily="34" charset="-120"/>
+              </a:rPr>
+              <a:t>Sequential observations are used to build a </a:t>
+            </a:r>
+            <a:r>
+              <a:rPr lang="en-US" sz="1400" b="1" dirty="0">
+                <a:solidFill>
+                  <a:srgbClr val="1A1A1A"/>
+                </a:solidFill>
+                <a:latin typeface="Calibri" pitchFamily="34" charset="0"/>
+                <a:ea typeface="Calibri" pitchFamily="34" charset="-122"/>
+                <a:cs typeface="Calibri" pitchFamily="34" charset="-120"/>
+              </a:rPr>
+              <a:t>believes map</a:t>
+            </a:r>
+            <a:endParaRPr lang="en-US" sz="1400" b="1" dirty="0"/>
+          </a:p>
+        </p:txBody>
+      </p:sp>
+      <p:pic>
+        <p:nvPicPr>
+          <p:cNvPr id="8" name="Immagine 7">
+            <a:extLst>
+              <a:ext uri="{FF2B5EF4-FFF2-40B4-BE49-F238E27FC236}">
+                <a16:creationId xmlns:a16="http://schemas.microsoft.com/office/drawing/2014/main" id="{340497A2-ABCE-D9C0-95B2-62483D5DA1FB}"/>
+              </a:ext>
+            </a:extLst>
+          </p:cNvPr>
+          <p:cNvPicPr>
+            <a:picLocks noChangeAspect="1"/>
+          </p:cNvPicPr>
+          <p:nvPr/>
+        </p:nvPicPr>
+        <p:blipFill>
+          <a:blip r:embed="rId2"/>
+          <a:stretch>
+            <a:fillRect/>
+          </a:stretch>
+        </p:blipFill>
+        <p:spPr>
+          <a:xfrm>
+            <a:off x="5285092" y="1085967"/>
+            <a:ext cx="3278333" cy="1565794"/>
+          </a:xfrm>
+          <a:prstGeom prst="rect">
+            <a:avLst/>
+          </a:prstGeom>
+        </p:spPr>
+      </p:pic>
+      <p:pic>
+        <p:nvPicPr>
+          <p:cNvPr id="10" name="Immagine 9">
+            <a:extLst>
+              <a:ext uri="{FF2B5EF4-FFF2-40B4-BE49-F238E27FC236}">
+                <a16:creationId xmlns:a16="http://schemas.microsoft.com/office/drawing/2014/main" id="{8F715845-B525-3552-E815-E5F6C2D4DCB8}"/>
+              </a:ext>
+            </a:extLst>
+          </p:cNvPr>
+          <p:cNvPicPr>
+            <a:picLocks noChangeAspect="1"/>
+          </p:cNvPicPr>
+          <p:nvPr/>
+        </p:nvPicPr>
+        <p:blipFill>
+          <a:blip r:embed="rId3"/>
+          <a:stretch>
+            <a:fillRect/>
+          </a:stretch>
+        </p:blipFill>
+        <p:spPr>
+          <a:xfrm>
+            <a:off x="3149600" y="3040282"/>
+            <a:ext cx="5465652" cy="1595007"/>
+          </a:xfrm>
+          <a:prstGeom prst="rect">
+            <a:avLst/>
+          </a:prstGeom>
+        </p:spPr>
+      </p:pic>
+      <p:sp>
+        <p:nvSpPr>
+          <p:cNvPr id="11" name="Text 5">
+            <a:extLst>
+              <a:ext uri="{FF2B5EF4-FFF2-40B4-BE49-F238E27FC236}">
+                <a16:creationId xmlns:a16="http://schemas.microsoft.com/office/drawing/2014/main" id="{5A32195A-73EF-D939-B137-3D52DB558EEB}"/>
+              </a:ext>
+            </a:extLst>
+          </p:cNvPr>
+          <p:cNvSpPr/>
+          <p:nvPr/>
+        </p:nvSpPr>
+        <p:spPr>
+          <a:xfrm>
+            <a:off x="370840" y="915257"/>
+            <a:ext cx="4251960" cy="457200"/>
+          </a:xfrm>
+          <a:prstGeom prst="rect">
+            <a:avLst/>
+          </a:prstGeom>
+          <a:noFill/>
+          <a:ln/>
+        </p:spPr>
+        <p:txBody>
+          <a:bodyPr wrap="square" rtlCol="0" anchor="t"/>
+          <a:lstStyle/>
+          <a:p>
+            <a:pPr>
+              <a:spcAft>
+                <a:spcPts val="500"/>
+              </a:spcAft>
+              <a:buSzPct val="100000"/>
+            </a:pPr>
+            <a:r>
+              <a:rPr lang="en-US" dirty="0">
+                <a:solidFill>
+                  <a:srgbClr val="1A1A1A"/>
+                </a:solidFill>
+                <a:latin typeface="Calibri" pitchFamily="34" charset="0"/>
+                <a:ea typeface="Calibri" pitchFamily="34" charset="-122"/>
+                <a:cs typeface="Calibri" pitchFamily="34" charset="-120"/>
+              </a:rPr>
+              <a:t>The environment – 2D occupancy grid</a:t>
+            </a:r>
+          </a:p>
+        </p:txBody>
+      </p:sp>
+    </p:spTree>
+    <p:extLst>
+      <p:ext uri="{BB962C8B-B14F-4D97-AF65-F5344CB8AC3E}">
+        <p14:creationId xmlns:p14="http://schemas.microsoft.com/office/powerpoint/2010/main" val="1959701455"/>
+      </p:ext>
+    </p:extLst>
+  </p:cSld>
+  <p:clrMapOvr>
+    <a:masterClrMapping/>
+  </p:clrMapOvr>
+</p:sld>
+</file>
+
+<file path=ppt/slides/slide11.xml><?xml version="1.0" encoding="utf-8"?>
+<p:sld xmlns:a="http://schemas.openxmlformats.org/drawingml/2006/main" xmlns:r="http://schemas.openxmlformats.org/officeDocument/2006/relationships" xmlns:p="http://schemas.openxmlformats.org/presentationml/2006/main">
+  <p:cSld>
+    <p:spTree>
+      <p:nvGrpSpPr>
         <p:cNvPr id="1" name="">
           <a:extLst>
             <a:ext uri="{FF2B5EF4-FFF2-40B4-BE49-F238E27FC236}">
@@ -4450,7 +4787,7 @@
 </p:sld>
 </file>
 
-<file path=ppt/slides/slide11.xml><?xml version="1.0" encoding="utf-8"?>
+<file path=ppt/slides/slide12.xml><?xml version="1.0" encoding="utf-8"?>
 <p:sld xmlns:a="http://schemas.openxmlformats.org/drawingml/2006/main" xmlns:r="http://schemas.openxmlformats.org/officeDocument/2006/relationships" xmlns:p="http://schemas.openxmlformats.org/presentationml/2006/main">
   <p:cSld>
     <p:spTree>
@@ -5318,7 +5655,7 @@
 </p:sld>
 </file>
 
-<file path=ppt/slides/slide12.xml><?xml version="1.0" encoding="utf-8"?>
+<file path=ppt/slides/slide13.xml><?xml version="1.0" encoding="utf-8"?>
 <p:sld xmlns:a="http://schemas.openxmlformats.org/drawingml/2006/main" xmlns:r="http://schemas.openxmlformats.org/officeDocument/2006/relationships" xmlns:p="http://schemas.openxmlformats.org/presentationml/2006/main">
   <p:cSld>
     <p:spTree>
@@ -6305,7 +6642,7 @@
 </p:sld>
 </file>
 
-<file path=ppt/slides/slide13.xml><?xml version="1.0" encoding="utf-8"?>
+<file path=ppt/slides/slide14.xml><?xml version="1.0" encoding="utf-8"?>
 <p:sld xmlns:a="http://schemas.openxmlformats.org/drawingml/2006/main" xmlns:r="http://schemas.openxmlformats.org/officeDocument/2006/relationships" xmlns:p="http://schemas.openxmlformats.org/presentationml/2006/main">
   <p:cSld>
     <p:spTree>
@@ -6924,7 +7261,7 @@
 </p:sld>
 </file>
 
-<file path=ppt/slides/slide14.xml><?xml version="1.0" encoding="utf-8"?>
+<file path=ppt/slides/slide15.xml><?xml version="1.0" encoding="utf-8"?>
 <p:sld xmlns:a="http://schemas.openxmlformats.org/drawingml/2006/main" xmlns:r="http://schemas.openxmlformats.org/officeDocument/2006/relationships" xmlns:p="http://schemas.openxmlformats.org/presentationml/2006/main">
   <p:cSld>
     <p:spTree>
@@ -10647,7 +10984,7 @@
 </p:sld>
 </file>
 
-<file path=ppt/slides/slide15.xml><?xml version="1.0" encoding="utf-8"?>
+<file path=ppt/slides/slide16.xml><?xml version="1.0" encoding="utf-8"?>
 <p:sld xmlns:a="http://schemas.openxmlformats.org/drawingml/2006/main" xmlns:r="http://schemas.openxmlformats.org/officeDocument/2006/relationships" xmlns:p="http://schemas.openxmlformats.org/presentationml/2006/main">
   <p:cSld>
     <p:spTree>
@@ -12245,7 +12582,7 @@
 </p:sld>
 </file>
 
-<file path=ppt/slides/slide16.xml><?xml version="1.0" encoding="utf-8"?>
+<file path=ppt/slides/slide17.xml><?xml version="1.0" encoding="utf-8"?>
 <p:sld xmlns:a="http://schemas.openxmlformats.org/drawingml/2006/main" xmlns:r="http://schemas.openxmlformats.org/officeDocument/2006/relationships" xmlns:p="http://schemas.openxmlformats.org/presentationml/2006/main">
   <p:cSld>
     <p:spTree>
@@ -13111,7 +13448,7 @@
 </p:sld>
 </file>
 
-<file path=ppt/slides/slide17.xml><?xml version="1.0" encoding="utf-8"?>
+<file path=ppt/slides/slide18.xml><?xml version="1.0" encoding="utf-8"?>
 <p:sld xmlns:a="http://schemas.openxmlformats.org/drawingml/2006/main" xmlns:r="http://schemas.openxmlformats.org/officeDocument/2006/relationships" xmlns:p="http://schemas.openxmlformats.org/presentationml/2006/main">
   <p:cSld>
     <p:spTree>
@@ -13485,7 +13822,7 @@
 </p:sld>
 </file>
 
-<file path=ppt/slides/slide18.xml><?xml version="1.0" encoding="utf-8"?>
+<file path=ppt/slides/slide19.xml><?xml version="1.0" encoding="utf-8"?>
 <p:sld xmlns:a="http://schemas.openxmlformats.org/drawingml/2006/main" xmlns:r="http://schemas.openxmlformats.org/officeDocument/2006/relationships" xmlns:p="http://schemas.openxmlformats.org/presentationml/2006/main">
   <p:cSld>
     <p:spTree>
@@ -15316,7 +15653,489 @@
 </p:sld>
 </file>
 
-<file path=ppt/slides/slide19.xml><?xml version="1.0" encoding="utf-8"?>
+<file path=ppt/slides/slide2.xml><?xml version="1.0" encoding="utf-8"?>
+<p:sld xmlns:a="http://schemas.openxmlformats.org/drawingml/2006/main" xmlns:r="http://schemas.openxmlformats.org/officeDocument/2006/relationships" xmlns:p="http://schemas.openxmlformats.org/presentationml/2006/main">
+  <p:cSld>
+    <p:spTree>
+      <p:nvGrpSpPr>
+        <p:cNvPr id="1" name=""/>
+        <p:cNvGrpSpPr/>
+        <p:nvPr/>
+      </p:nvGrpSpPr>
+      <p:grpSpPr>
+        <a:xfrm>
+          <a:off x="0" y="0"/>
+          <a:ext cx="0" cy="0"/>
+          <a:chOff x="0" y="0"/>
+          <a:chExt cx="0" cy="0"/>
+        </a:xfrm>
+      </p:grpSpPr>
+      <p:sp>
+        <p:nvSpPr>
+          <p:cNvPr id="3" name="Text 1"/>
+          <p:cNvSpPr/>
+          <p:nvPr/>
+        </p:nvSpPr>
+        <p:spPr>
+          <a:xfrm>
+            <a:off x="8412480" y="4846320"/>
+            <a:ext cx="457200" cy="201168"/>
+          </a:xfrm>
+          <a:prstGeom prst="rect">
+            <a:avLst/>
+          </a:prstGeom>
+          <a:noFill/>
+          <a:ln/>
+        </p:spPr>
+        <p:txBody>
+          <a:bodyPr wrap="square" rtlCol="0" anchor="ctr"/>
+          <a:lstStyle/>
+          <a:p>
+            <a:pPr marL="0" indent="0" algn="r">
+              <a:buNone/>
+            </a:pPr>
+            <a:r>
+              <a:rPr lang="en-US" sz="900" dirty="0">
+                <a:solidFill>
+                  <a:srgbClr val="BBBBBB"/>
+                </a:solidFill>
+                <a:latin typeface="Calibri" pitchFamily="34" charset="0"/>
+                <a:ea typeface="Calibri" pitchFamily="34" charset="-122"/>
+                <a:cs typeface="Calibri" pitchFamily="34" charset="-120"/>
+              </a:rPr>
+              <a:t>3 / 17</a:t>
+            </a:r>
+            <a:endParaRPr lang="en-US" sz="900" dirty="0"/>
+          </a:p>
+        </p:txBody>
+      </p:sp>
+      <p:sp>
+        <p:nvSpPr>
+          <p:cNvPr id="4" name="Shape 2"/>
+          <p:cNvSpPr/>
+          <p:nvPr/>
+        </p:nvSpPr>
+        <p:spPr>
+          <a:xfrm>
+            <a:off x="320040" y="237744"/>
+            <a:ext cx="64008" cy="457200"/>
+          </a:xfrm>
+          <a:prstGeom prst="rect">
+            <a:avLst/>
+          </a:prstGeom>
+          <a:solidFill>
+            <a:srgbClr val="C8472C"/>
+          </a:solidFill>
+          <a:ln w="12700">
+            <a:solidFill>
+              <a:srgbClr val="C8472C"/>
+            </a:solidFill>
+            <a:prstDash val="solid"/>
+          </a:ln>
+        </p:spPr>
+      </p:sp>
+      <p:sp>
+        <p:nvSpPr>
+          <p:cNvPr id="5" name="Text 3"/>
+          <p:cNvSpPr/>
+          <p:nvPr/>
+        </p:nvSpPr>
+        <p:spPr>
+          <a:xfrm>
+            <a:off x="502920" y="256032"/>
+            <a:ext cx="8229600" cy="457200"/>
+          </a:xfrm>
+          <a:prstGeom prst="rect">
+            <a:avLst/>
+          </a:prstGeom>
+          <a:noFill/>
+          <a:ln/>
+        </p:spPr>
+        <p:txBody>
+          <a:bodyPr wrap="square" lIns="0" tIns="0" rIns="0" bIns="0" rtlCol="0" anchor="ctr"/>
+          <a:lstStyle/>
+          <a:p>
+            <a:pPr marL="0" indent="0" algn="l">
+              <a:buNone/>
+            </a:pPr>
+            <a:r>
+              <a:rPr lang="en-US" sz="2600" b="1" dirty="0">
+                <a:solidFill>
+                  <a:srgbClr val="1A1A1A"/>
+                </a:solidFill>
+                <a:latin typeface="Calibri" pitchFamily="34" charset="0"/>
+                <a:ea typeface="Calibri" pitchFamily="34" charset="-122"/>
+                <a:cs typeface="Calibri" pitchFamily="34" charset="-120"/>
+              </a:rPr>
+              <a:t>Motivation &amp; Scope</a:t>
+            </a:r>
+            <a:endParaRPr lang="en-US" sz="2600" dirty="0"/>
+          </a:p>
+        </p:txBody>
+      </p:sp>
+      <p:sp>
+        <p:nvSpPr>
+          <p:cNvPr id="6" name="Shape 4"/>
+          <p:cNvSpPr/>
+          <p:nvPr/>
+        </p:nvSpPr>
+        <p:spPr>
+          <a:xfrm>
+            <a:off x="320040" y="777240"/>
+            <a:ext cx="8503920" cy="0"/>
+          </a:xfrm>
+          <a:prstGeom prst="line">
+            <a:avLst/>
+          </a:prstGeom>
+          <a:noFill/>
+          <a:ln w="19050">
+            <a:solidFill>
+              <a:srgbClr val="D6E4F0"/>
+            </a:solidFill>
+            <a:prstDash val="solid"/>
+          </a:ln>
+        </p:spPr>
+      </p:sp>
+      <p:sp>
+        <p:nvSpPr>
+          <p:cNvPr id="7" name="Shape 5"/>
+          <p:cNvSpPr/>
+          <p:nvPr/>
+        </p:nvSpPr>
+        <p:spPr>
+          <a:xfrm>
+            <a:off x="365760" y="942976"/>
+            <a:ext cx="8412480" cy="960120"/>
+          </a:xfrm>
+          <a:prstGeom prst="rect">
+            <a:avLst/>
+          </a:prstGeom>
+          <a:solidFill>
+            <a:srgbClr val="F5F7FA"/>
+          </a:solidFill>
+          <a:ln w="12700">
+            <a:solidFill>
+              <a:srgbClr val="D6E4F0"/>
+            </a:solidFill>
+            <a:prstDash val="solid"/>
+          </a:ln>
+        </p:spPr>
+      </p:sp>
+      <p:sp>
+        <p:nvSpPr>
+          <p:cNvPr id="8" name="Text 6"/>
+          <p:cNvSpPr/>
+          <p:nvPr/>
+        </p:nvSpPr>
+        <p:spPr>
+          <a:xfrm>
+            <a:off x="457200" y="988696"/>
+            <a:ext cx="8229600" cy="868680"/>
+          </a:xfrm>
+          <a:prstGeom prst="rect">
+            <a:avLst/>
+          </a:prstGeom>
+          <a:noFill/>
+          <a:ln/>
+        </p:spPr>
+        <p:txBody>
+          <a:bodyPr wrap="square" rtlCol="0" anchor="ctr"/>
+          <a:lstStyle/>
+          <a:p>
+            <a:pPr marL="0" indent="0" algn="ctr">
+              <a:buNone/>
+            </a:pPr>
+            <a:r>
+              <a:rPr lang="en-US" b="1" i="1" dirty="0">
+                <a:latin typeface="Calibri" pitchFamily="34" charset="0"/>
+                <a:ea typeface="Calibri" pitchFamily="34" charset="-122"/>
+                <a:cs typeface="Calibri" pitchFamily="34" charset="-120"/>
+              </a:rPr>
+              <a:t>Can Deep Reinforcement Learning (DRL) be effectively</a:t>
+            </a:r>
+          </a:p>
+          <a:p>
+            <a:pPr marL="0" indent="0" algn="ctr">
+              <a:buNone/>
+            </a:pPr>
+            <a:r>
+              <a:rPr lang="en-US" b="1" i="1" dirty="0">
+                <a:latin typeface="Calibri" pitchFamily="34" charset="0"/>
+                <a:ea typeface="Calibri" pitchFamily="34" charset="-122"/>
+                <a:cs typeface="Calibri" pitchFamily="34" charset="-120"/>
+              </a:rPr>
+              <a:t>leveraged into autonomous exploration?</a:t>
+            </a:r>
+            <a:endParaRPr lang="en-US" dirty="0"/>
+          </a:p>
+        </p:txBody>
+      </p:sp>
+      <p:sp>
+        <p:nvSpPr>
+          <p:cNvPr id="9" name="Text 7"/>
+          <p:cNvSpPr/>
+          <p:nvPr/>
+        </p:nvSpPr>
+        <p:spPr>
+          <a:xfrm>
+            <a:off x="457200" y="2140273"/>
+            <a:ext cx="8229600" cy="1078041"/>
+          </a:xfrm>
+          <a:prstGeom prst="rect">
+            <a:avLst/>
+          </a:prstGeom>
+          <a:noFill/>
+          <a:ln/>
+        </p:spPr>
+        <p:txBody>
+          <a:bodyPr wrap="square" rtlCol="0" anchor="t"/>
+          <a:lstStyle/>
+          <a:p>
+            <a:pPr marL="190500" indent="-190500">
+              <a:spcAft>
+                <a:spcPts val="500"/>
+              </a:spcAft>
+              <a:buSzPct val="100000"/>
+              <a:buChar char="•"/>
+            </a:pPr>
+            <a:r>
+              <a:rPr lang="en-US" b="1" dirty="0">
+                <a:solidFill>
+                  <a:srgbClr val="1A1A1A"/>
+                </a:solidFill>
+                <a:latin typeface="Calibri" pitchFamily="34" charset="0"/>
+                <a:ea typeface="Calibri" pitchFamily="34" charset="-122"/>
+                <a:cs typeface="Calibri" pitchFamily="34" charset="-120"/>
+              </a:rPr>
+              <a:t>Autonomous exploration </a:t>
+            </a:r>
+            <a:r>
+              <a:rPr lang="en-US" dirty="0">
+                <a:solidFill>
+                  <a:srgbClr val="1A1A1A"/>
+                </a:solidFill>
+                <a:latin typeface="Calibri" pitchFamily="34" charset="0"/>
+                <a:ea typeface="Calibri" pitchFamily="34" charset="-122"/>
+                <a:cs typeface="Calibri" pitchFamily="34" charset="-120"/>
+              </a:rPr>
+              <a:t>is complex task</a:t>
+            </a:r>
+            <a:endParaRPr lang="en-US" dirty="0"/>
+          </a:p>
+          <a:p>
+            <a:pPr marL="190500" indent="-190500">
+              <a:spcAft>
+                <a:spcPts val="500"/>
+              </a:spcAft>
+              <a:buSzPct val="100000"/>
+              <a:buChar char="•"/>
+            </a:pPr>
+            <a:r>
+              <a:rPr lang="en-US" b="1" dirty="0">
+                <a:solidFill>
+                  <a:srgbClr val="1A1A1A"/>
+                </a:solidFill>
+                <a:latin typeface="Calibri" pitchFamily="34" charset="0"/>
+                <a:ea typeface="Calibri" pitchFamily="34" charset="-122"/>
+                <a:cs typeface="Calibri" pitchFamily="34" charset="-120"/>
+              </a:rPr>
+              <a:t>Classical analytical </a:t>
+            </a:r>
+            <a:r>
+              <a:rPr lang="en-US" dirty="0">
+                <a:solidFill>
+                  <a:srgbClr val="1A1A1A"/>
+                </a:solidFill>
+                <a:latin typeface="Calibri" pitchFamily="34" charset="0"/>
+                <a:ea typeface="Calibri" pitchFamily="34" charset="-122"/>
+                <a:cs typeface="Calibri" pitchFamily="34" charset="-120"/>
+              </a:rPr>
+              <a:t>methods exist but present some limitations</a:t>
+            </a:r>
+            <a:endParaRPr lang="en-US" dirty="0"/>
+          </a:p>
+          <a:p>
+            <a:pPr marL="190500" indent="-190500">
+              <a:spcAft>
+                <a:spcPts val="500"/>
+              </a:spcAft>
+              <a:buSzPct val="100000"/>
+              <a:buChar char="•"/>
+            </a:pPr>
+            <a:r>
+              <a:rPr lang="en-US" b="1" dirty="0">
+                <a:solidFill>
+                  <a:srgbClr val="1A1A1A"/>
+                </a:solidFill>
+                <a:latin typeface="Calibri" pitchFamily="34" charset="0"/>
+                <a:ea typeface="Calibri" pitchFamily="34" charset="-122"/>
+                <a:cs typeface="Calibri" pitchFamily="34" charset="-120"/>
+              </a:rPr>
+              <a:t>Learning-based</a:t>
+            </a:r>
+            <a:r>
+              <a:rPr lang="en-US" dirty="0">
+                <a:solidFill>
+                  <a:srgbClr val="1A1A1A"/>
+                </a:solidFill>
+                <a:latin typeface="Calibri" pitchFamily="34" charset="0"/>
+                <a:ea typeface="Calibri" pitchFamily="34" charset="-122"/>
+                <a:cs typeface="Calibri" pitchFamily="34" charset="-120"/>
+              </a:rPr>
+              <a:t> methods can provide more adaptive models</a:t>
+            </a:r>
+            <a:endParaRPr lang="en-US" dirty="0"/>
+          </a:p>
+        </p:txBody>
+      </p:sp>
+      <p:sp>
+        <p:nvSpPr>
+          <p:cNvPr id="11" name="Shape 5">
+            <a:extLst>
+              <a:ext uri="{FF2B5EF4-FFF2-40B4-BE49-F238E27FC236}">
+                <a16:creationId xmlns:a16="http://schemas.microsoft.com/office/drawing/2014/main" id="{000FCEB4-5A5B-AECB-8434-1AA1350D5054}"/>
+              </a:ext>
+            </a:extLst>
+          </p:cNvPr>
+          <p:cNvSpPr/>
+          <p:nvPr/>
+        </p:nvSpPr>
+        <p:spPr>
+          <a:xfrm>
+            <a:off x="365760" y="3367363"/>
+            <a:ext cx="8458200" cy="1140342"/>
+          </a:xfrm>
+          <a:prstGeom prst="rect">
+            <a:avLst/>
+          </a:prstGeom>
+          <a:solidFill>
+            <a:srgbClr val="F5F7FA"/>
+          </a:solidFill>
+          <a:ln w="12700">
+            <a:solidFill>
+              <a:srgbClr val="D6E4F0"/>
+            </a:solidFill>
+            <a:prstDash val="solid"/>
+          </a:ln>
+        </p:spPr>
+      </p:sp>
+      <p:sp>
+        <p:nvSpPr>
+          <p:cNvPr id="12" name="Text 6">
+            <a:extLst>
+              <a:ext uri="{FF2B5EF4-FFF2-40B4-BE49-F238E27FC236}">
+                <a16:creationId xmlns:a16="http://schemas.microsoft.com/office/drawing/2014/main" id="{0015EE5A-DA97-6AC7-337B-2E3B82A10631}"/>
+              </a:ext>
+            </a:extLst>
+          </p:cNvPr>
+          <p:cNvSpPr/>
+          <p:nvPr/>
+        </p:nvSpPr>
+        <p:spPr>
+          <a:xfrm>
+            <a:off x="756525" y="3879832"/>
+            <a:ext cx="7722390" cy="472461"/>
+          </a:xfrm>
+          <a:prstGeom prst="rect">
+            <a:avLst/>
+          </a:prstGeom>
+          <a:noFill/>
+          <a:ln/>
+        </p:spPr>
+        <p:txBody>
+          <a:bodyPr wrap="square" rtlCol="0" anchor="ctr"/>
+          <a:lstStyle/>
+          <a:p>
+            <a:pPr marL="0" indent="0">
+              <a:buNone/>
+            </a:pPr>
+            <a:r>
+              <a:rPr lang="en-US" dirty="0">
+                <a:latin typeface="Calibri" pitchFamily="34" charset="0"/>
+                <a:ea typeface="Calibri" pitchFamily="34" charset="-122"/>
+                <a:cs typeface="Calibri" pitchFamily="34" charset="-120"/>
+              </a:rPr>
+              <a:t>Develop a framework to </a:t>
+            </a:r>
+            <a:r>
+              <a:rPr lang="en-US" b="1" dirty="0">
+                <a:latin typeface="Calibri" pitchFamily="34" charset="0"/>
+                <a:ea typeface="Calibri" pitchFamily="34" charset="-122"/>
+                <a:cs typeface="Calibri" pitchFamily="34" charset="-120"/>
+              </a:rPr>
+              <a:t>investigate</a:t>
+            </a:r>
+            <a:r>
+              <a:rPr lang="en-US" dirty="0">
+                <a:latin typeface="Calibri" pitchFamily="34" charset="0"/>
+                <a:ea typeface="Calibri" pitchFamily="34" charset="-122"/>
+                <a:cs typeface="Calibri" pitchFamily="34" charset="-120"/>
+              </a:rPr>
+              <a:t> the possibility of</a:t>
+            </a:r>
+            <a:r>
+              <a:rPr lang="en-US" b="1" dirty="0">
+                <a:latin typeface="Calibri" pitchFamily="34" charset="0"/>
+                <a:ea typeface="Calibri" pitchFamily="34" charset="-122"/>
+                <a:cs typeface="Calibri" pitchFamily="34" charset="-120"/>
+              </a:rPr>
+              <a:t> integrating learning-based methods with classical ones</a:t>
+            </a:r>
+            <a:endParaRPr lang="en-US" b="1" dirty="0"/>
+          </a:p>
+        </p:txBody>
+      </p:sp>
+      <p:sp>
+        <p:nvSpPr>
+          <p:cNvPr id="14" name="Text 6">
+            <a:extLst>
+              <a:ext uri="{FF2B5EF4-FFF2-40B4-BE49-F238E27FC236}">
+                <a16:creationId xmlns:a16="http://schemas.microsoft.com/office/drawing/2014/main" id="{9E002ABA-51D8-44C0-5622-613A998D91FA}"/>
+              </a:ext>
+            </a:extLst>
+          </p:cNvPr>
+          <p:cNvSpPr/>
+          <p:nvPr/>
+        </p:nvSpPr>
+        <p:spPr>
+          <a:xfrm>
+            <a:off x="686512" y="3371651"/>
+            <a:ext cx="1324451" cy="472461"/>
+          </a:xfrm>
+          <a:prstGeom prst="rect">
+            <a:avLst/>
+          </a:prstGeom>
+          <a:noFill/>
+          <a:ln/>
+        </p:spPr>
+        <p:txBody>
+          <a:bodyPr wrap="square" rtlCol="0" anchor="ctr"/>
+          <a:lstStyle/>
+          <a:p>
+            <a:pPr marL="0" indent="0" algn="ctr">
+              <a:buNone/>
+            </a:pPr>
+            <a:r>
+              <a:rPr lang="en-US" sz="2000" b="1" dirty="0">
+                <a:latin typeface="Calibri" pitchFamily="34" charset="0"/>
+                <a:ea typeface="Calibri" pitchFamily="34" charset="-122"/>
+                <a:cs typeface="Calibri" pitchFamily="34" charset="-120"/>
+              </a:rPr>
+              <a:t>Objective:</a:t>
+            </a:r>
+            <a:endParaRPr lang="en-US" sz="2000" dirty="0"/>
+          </a:p>
+        </p:txBody>
+      </p:sp>
+    </p:spTree>
+  </p:cSld>
+  <p:clrMapOvr>
+    <a:masterClrMapping/>
+  </p:clrMapOvr>
+</p:sld>
+</file>
+
+<file path=ppt/slides/slide20.xml><?xml version="1.0" encoding="utf-8"?>
 <p:sld xmlns:a="http://schemas.openxmlformats.org/drawingml/2006/main" xmlns:r="http://schemas.openxmlformats.org/officeDocument/2006/relationships" xmlns:p="http://schemas.openxmlformats.org/presentationml/2006/main">
   <p:cSld>
     <p:spTree>
@@ -15969,489 +16788,7 @@
 </p:sld>
 </file>
 
-<file path=ppt/slides/slide2.xml><?xml version="1.0" encoding="utf-8"?>
-<p:sld xmlns:a="http://schemas.openxmlformats.org/drawingml/2006/main" xmlns:r="http://schemas.openxmlformats.org/officeDocument/2006/relationships" xmlns:p="http://schemas.openxmlformats.org/presentationml/2006/main">
-  <p:cSld>
-    <p:spTree>
-      <p:nvGrpSpPr>
-        <p:cNvPr id="1" name=""/>
-        <p:cNvGrpSpPr/>
-        <p:nvPr/>
-      </p:nvGrpSpPr>
-      <p:grpSpPr>
-        <a:xfrm>
-          <a:off x="0" y="0"/>
-          <a:ext cx="0" cy="0"/>
-          <a:chOff x="0" y="0"/>
-          <a:chExt cx="0" cy="0"/>
-        </a:xfrm>
-      </p:grpSpPr>
-      <p:sp>
-        <p:nvSpPr>
-          <p:cNvPr id="3" name="Text 1"/>
-          <p:cNvSpPr/>
-          <p:nvPr/>
-        </p:nvSpPr>
-        <p:spPr>
-          <a:xfrm>
-            <a:off x="8412480" y="4846320"/>
-            <a:ext cx="457200" cy="201168"/>
-          </a:xfrm>
-          <a:prstGeom prst="rect">
-            <a:avLst/>
-          </a:prstGeom>
-          <a:noFill/>
-          <a:ln/>
-        </p:spPr>
-        <p:txBody>
-          <a:bodyPr wrap="square" rtlCol="0" anchor="ctr"/>
-          <a:lstStyle/>
-          <a:p>
-            <a:pPr marL="0" indent="0" algn="r">
-              <a:buNone/>
-            </a:pPr>
-            <a:r>
-              <a:rPr lang="en-US" sz="900" dirty="0">
-                <a:solidFill>
-                  <a:srgbClr val="BBBBBB"/>
-                </a:solidFill>
-                <a:latin typeface="Calibri" pitchFamily="34" charset="0"/>
-                <a:ea typeface="Calibri" pitchFamily="34" charset="-122"/>
-                <a:cs typeface="Calibri" pitchFamily="34" charset="-120"/>
-              </a:rPr>
-              <a:t>3 / 17</a:t>
-            </a:r>
-            <a:endParaRPr lang="en-US" sz="900" dirty="0"/>
-          </a:p>
-        </p:txBody>
-      </p:sp>
-      <p:sp>
-        <p:nvSpPr>
-          <p:cNvPr id="4" name="Shape 2"/>
-          <p:cNvSpPr/>
-          <p:nvPr/>
-        </p:nvSpPr>
-        <p:spPr>
-          <a:xfrm>
-            <a:off x="320040" y="237744"/>
-            <a:ext cx="64008" cy="457200"/>
-          </a:xfrm>
-          <a:prstGeom prst="rect">
-            <a:avLst/>
-          </a:prstGeom>
-          <a:solidFill>
-            <a:srgbClr val="C8472C"/>
-          </a:solidFill>
-          <a:ln w="12700">
-            <a:solidFill>
-              <a:srgbClr val="C8472C"/>
-            </a:solidFill>
-            <a:prstDash val="solid"/>
-          </a:ln>
-        </p:spPr>
-      </p:sp>
-      <p:sp>
-        <p:nvSpPr>
-          <p:cNvPr id="5" name="Text 3"/>
-          <p:cNvSpPr/>
-          <p:nvPr/>
-        </p:nvSpPr>
-        <p:spPr>
-          <a:xfrm>
-            <a:off x="502920" y="256032"/>
-            <a:ext cx="8229600" cy="457200"/>
-          </a:xfrm>
-          <a:prstGeom prst="rect">
-            <a:avLst/>
-          </a:prstGeom>
-          <a:noFill/>
-          <a:ln/>
-        </p:spPr>
-        <p:txBody>
-          <a:bodyPr wrap="square" lIns="0" tIns="0" rIns="0" bIns="0" rtlCol="0" anchor="ctr"/>
-          <a:lstStyle/>
-          <a:p>
-            <a:pPr marL="0" indent="0" algn="l">
-              <a:buNone/>
-            </a:pPr>
-            <a:r>
-              <a:rPr lang="en-US" sz="2600" b="1" dirty="0">
-                <a:solidFill>
-                  <a:srgbClr val="1A1A1A"/>
-                </a:solidFill>
-                <a:latin typeface="Calibri" pitchFamily="34" charset="0"/>
-                <a:ea typeface="Calibri" pitchFamily="34" charset="-122"/>
-                <a:cs typeface="Calibri" pitchFamily="34" charset="-120"/>
-              </a:rPr>
-              <a:t>Motivation &amp; Scope</a:t>
-            </a:r>
-            <a:endParaRPr lang="en-US" sz="2600" dirty="0"/>
-          </a:p>
-        </p:txBody>
-      </p:sp>
-      <p:sp>
-        <p:nvSpPr>
-          <p:cNvPr id="6" name="Shape 4"/>
-          <p:cNvSpPr/>
-          <p:nvPr/>
-        </p:nvSpPr>
-        <p:spPr>
-          <a:xfrm>
-            <a:off x="320040" y="777240"/>
-            <a:ext cx="8503920" cy="0"/>
-          </a:xfrm>
-          <a:prstGeom prst="line">
-            <a:avLst/>
-          </a:prstGeom>
-          <a:noFill/>
-          <a:ln w="19050">
-            <a:solidFill>
-              <a:srgbClr val="D6E4F0"/>
-            </a:solidFill>
-            <a:prstDash val="solid"/>
-          </a:ln>
-        </p:spPr>
-      </p:sp>
-      <p:sp>
-        <p:nvSpPr>
-          <p:cNvPr id="7" name="Shape 5"/>
-          <p:cNvSpPr/>
-          <p:nvPr/>
-        </p:nvSpPr>
-        <p:spPr>
-          <a:xfrm>
-            <a:off x="365760" y="942976"/>
-            <a:ext cx="8412480" cy="960120"/>
-          </a:xfrm>
-          <a:prstGeom prst="rect">
-            <a:avLst/>
-          </a:prstGeom>
-          <a:solidFill>
-            <a:srgbClr val="F5F7FA"/>
-          </a:solidFill>
-          <a:ln w="12700">
-            <a:solidFill>
-              <a:srgbClr val="D6E4F0"/>
-            </a:solidFill>
-            <a:prstDash val="solid"/>
-          </a:ln>
-        </p:spPr>
-      </p:sp>
-      <p:sp>
-        <p:nvSpPr>
-          <p:cNvPr id="8" name="Text 6"/>
-          <p:cNvSpPr/>
-          <p:nvPr/>
-        </p:nvSpPr>
-        <p:spPr>
-          <a:xfrm>
-            <a:off x="457200" y="988696"/>
-            <a:ext cx="8229600" cy="868680"/>
-          </a:xfrm>
-          <a:prstGeom prst="rect">
-            <a:avLst/>
-          </a:prstGeom>
-          <a:noFill/>
-          <a:ln/>
-        </p:spPr>
-        <p:txBody>
-          <a:bodyPr wrap="square" rtlCol="0" anchor="ctr"/>
-          <a:lstStyle/>
-          <a:p>
-            <a:pPr marL="0" indent="0" algn="ctr">
-              <a:buNone/>
-            </a:pPr>
-            <a:r>
-              <a:rPr lang="en-US" b="1" i="1" dirty="0">
-                <a:latin typeface="Calibri" pitchFamily="34" charset="0"/>
-                <a:ea typeface="Calibri" pitchFamily="34" charset="-122"/>
-                <a:cs typeface="Calibri" pitchFamily="34" charset="-120"/>
-              </a:rPr>
-              <a:t>Can Deep Reinforcement Learning (DRL) be effectively</a:t>
-            </a:r>
-          </a:p>
-          <a:p>
-            <a:pPr marL="0" indent="0" algn="ctr">
-              <a:buNone/>
-            </a:pPr>
-            <a:r>
-              <a:rPr lang="en-US" b="1" i="1" dirty="0">
-                <a:latin typeface="Calibri" pitchFamily="34" charset="0"/>
-                <a:ea typeface="Calibri" pitchFamily="34" charset="-122"/>
-                <a:cs typeface="Calibri" pitchFamily="34" charset="-120"/>
-              </a:rPr>
-              <a:t>leveraged into autonomous exploration?</a:t>
-            </a:r>
-            <a:endParaRPr lang="en-US" dirty="0"/>
-          </a:p>
-        </p:txBody>
-      </p:sp>
-      <p:sp>
-        <p:nvSpPr>
-          <p:cNvPr id="9" name="Text 7"/>
-          <p:cNvSpPr/>
-          <p:nvPr/>
-        </p:nvSpPr>
-        <p:spPr>
-          <a:xfrm>
-            <a:off x="457200" y="2140273"/>
-            <a:ext cx="8229600" cy="1078041"/>
-          </a:xfrm>
-          <a:prstGeom prst="rect">
-            <a:avLst/>
-          </a:prstGeom>
-          <a:noFill/>
-          <a:ln/>
-        </p:spPr>
-        <p:txBody>
-          <a:bodyPr wrap="square" rtlCol="0" anchor="t"/>
-          <a:lstStyle/>
-          <a:p>
-            <a:pPr marL="190500" indent="-190500">
-              <a:spcAft>
-                <a:spcPts val="500"/>
-              </a:spcAft>
-              <a:buSzPct val="100000"/>
-              <a:buChar char="•"/>
-            </a:pPr>
-            <a:r>
-              <a:rPr lang="en-US" b="1" dirty="0">
-                <a:solidFill>
-                  <a:srgbClr val="1A1A1A"/>
-                </a:solidFill>
-                <a:latin typeface="Calibri" pitchFamily="34" charset="0"/>
-                <a:ea typeface="Calibri" pitchFamily="34" charset="-122"/>
-                <a:cs typeface="Calibri" pitchFamily="34" charset="-120"/>
-              </a:rPr>
-              <a:t>Autonomous exploration </a:t>
-            </a:r>
-            <a:r>
-              <a:rPr lang="en-US" dirty="0">
-                <a:solidFill>
-                  <a:srgbClr val="1A1A1A"/>
-                </a:solidFill>
-                <a:latin typeface="Calibri" pitchFamily="34" charset="0"/>
-                <a:ea typeface="Calibri" pitchFamily="34" charset="-122"/>
-                <a:cs typeface="Calibri" pitchFamily="34" charset="-120"/>
-              </a:rPr>
-              <a:t>is complex task</a:t>
-            </a:r>
-            <a:endParaRPr lang="en-US" dirty="0"/>
-          </a:p>
-          <a:p>
-            <a:pPr marL="190500" indent="-190500">
-              <a:spcAft>
-                <a:spcPts val="500"/>
-              </a:spcAft>
-              <a:buSzPct val="100000"/>
-              <a:buChar char="•"/>
-            </a:pPr>
-            <a:r>
-              <a:rPr lang="en-US" b="1" dirty="0">
-                <a:solidFill>
-                  <a:srgbClr val="1A1A1A"/>
-                </a:solidFill>
-                <a:latin typeface="Calibri" pitchFamily="34" charset="0"/>
-                <a:ea typeface="Calibri" pitchFamily="34" charset="-122"/>
-                <a:cs typeface="Calibri" pitchFamily="34" charset="-120"/>
-              </a:rPr>
-              <a:t>Classical analytical </a:t>
-            </a:r>
-            <a:r>
-              <a:rPr lang="en-US" dirty="0">
-                <a:solidFill>
-                  <a:srgbClr val="1A1A1A"/>
-                </a:solidFill>
-                <a:latin typeface="Calibri" pitchFamily="34" charset="0"/>
-                <a:ea typeface="Calibri" pitchFamily="34" charset="-122"/>
-                <a:cs typeface="Calibri" pitchFamily="34" charset="-120"/>
-              </a:rPr>
-              <a:t>methods exist but present some limitations</a:t>
-            </a:r>
-            <a:endParaRPr lang="en-US" dirty="0"/>
-          </a:p>
-          <a:p>
-            <a:pPr marL="190500" indent="-190500">
-              <a:spcAft>
-                <a:spcPts val="500"/>
-              </a:spcAft>
-              <a:buSzPct val="100000"/>
-              <a:buChar char="•"/>
-            </a:pPr>
-            <a:r>
-              <a:rPr lang="en-US" b="1" dirty="0">
-                <a:solidFill>
-                  <a:srgbClr val="1A1A1A"/>
-                </a:solidFill>
-                <a:latin typeface="Calibri" pitchFamily="34" charset="0"/>
-                <a:ea typeface="Calibri" pitchFamily="34" charset="-122"/>
-                <a:cs typeface="Calibri" pitchFamily="34" charset="-120"/>
-              </a:rPr>
-              <a:t>Learning-based</a:t>
-            </a:r>
-            <a:r>
-              <a:rPr lang="en-US" dirty="0">
-                <a:solidFill>
-                  <a:srgbClr val="1A1A1A"/>
-                </a:solidFill>
-                <a:latin typeface="Calibri" pitchFamily="34" charset="0"/>
-                <a:ea typeface="Calibri" pitchFamily="34" charset="-122"/>
-                <a:cs typeface="Calibri" pitchFamily="34" charset="-120"/>
-              </a:rPr>
-              <a:t> methods can provide more adaptive models</a:t>
-            </a:r>
-            <a:endParaRPr lang="en-US" dirty="0"/>
-          </a:p>
-        </p:txBody>
-      </p:sp>
-      <p:sp>
-        <p:nvSpPr>
-          <p:cNvPr id="11" name="Shape 5">
-            <a:extLst>
-              <a:ext uri="{FF2B5EF4-FFF2-40B4-BE49-F238E27FC236}">
-                <a16:creationId xmlns:a16="http://schemas.microsoft.com/office/drawing/2014/main" id="{000FCEB4-5A5B-AECB-8434-1AA1350D5054}"/>
-              </a:ext>
-            </a:extLst>
-          </p:cNvPr>
-          <p:cNvSpPr/>
-          <p:nvPr/>
-        </p:nvSpPr>
-        <p:spPr>
-          <a:xfrm>
-            <a:off x="365760" y="3367363"/>
-            <a:ext cx="8458200" cy="1140342"/>
-          </a:xfrm>
-          <a:prstGeom prst="rect">
-            <a:avLst/>
-          </a:prstGeom>
-          <a:solidFill>
-            <a:srgbClr val="F5F7FA"/>
-          </a:solidFill>
-          <a:ln w="12700">
-            <a:solidFill>
-              <a:srgbClr val="D6E4F0"/>
-            </a:solidFill>
-            <a:prstDash val="solid"/>
-          </a:ln>
-        </p:spPr>
-      </p:sp>
-      <p:sp>
-        <p:nvSpPr>
-          <p:cNvPr id="12" name="Text 6">
-            <a:extLst>
-              <a:ext uri="{FF2B5EF4-FFF2-40B4-BE49-F238E27FC236}">
-                <a16:creationId xmlns:a16="http://schemas.microsoft.com/office/drawing/2014/main" id="{0015EE5A-DA97-6AC7-337B-2E3B82A10631}"/>
-              </a:ext>
-            </a:extLst>
-          </p:cNvPr>
-          <p:cNvSpPr/>
-          <p:nvPr/>
-        </p:nvSpPr>
-        <p:spPr>
-          <a:xfrm>
-            <a:off x="756525" y="3879832"/>
-            <a:ext cx="7722390" cy="472461"/>
-          </a:xfrm>
-          <a:prstGeom prst="rect">
-            <a:avLst/>
-          </a:prstGeom>
-          <a:noFill/>
-          <a:ln/>
-        </p:spPr>
-        <p:txBody>
-          <a:bodyPr wrap="square" rtlCol="0" anchor="ctr"/>
-          <a:lstStyle/>
-          <a:p>
-            <a:pPr marL="0" indent="0">
-              <a:buNone/>
-            </a:pPr>
-            <a:r>
-              <a:rPr lang="en-US" dirty="0">
-                <a:latin typeface="Calibri" pitchFamily="34" charset="0"/>
-                <a:ea typeface="Calibri" pitchFamily="34" charset="-122"/>
-                <a:cs typeface="Calibri" pitchFamily="34" charset="-120"/>
-              </a:rPr>
-              <a:t>Develop a framework to </a:t>
-            </a:r>
-            <a:r>
-              <a:rPr lang="en-US" b="1" dirty="0">
-                <a:latin typeface="Calibri" pitchFamily="34" charset="0"/>
-                <a:ea typeface="Calibri" pitchFamily="34" charset="-122"/>
-                <a:cs typeface="Calibri" pitchFamily="34" charset="-120"/>
-              </a:rPr>
-              <a:t>investigate</a:t>
-            </a:r>
-            <a:r>
-              <a:rPr lang="en-US" dirty="0">
-                <a:latin typeface="Calibri" pitchFamily="34" charset="0"/>
-                <a:ea typeface="Calibri" pitchFamily="34" charset="-122"/>
-                <a:cs typeface="Calibri" pitchFamily="34" charset="-120"/>
-              </a:rPr>
-              <a:t> the possibility of</a:t>
-            </a:r>
-            <a:r>
-              <a:rPr lang="en-US" b="1" dirty="0">
-                <a:latin typeface="Calibri" pitchFamily="34" charset="0"/>
-                <a:ea typeface="Calibri" pitchFamily="34" charset="-122"/>
-                <a:cs typeface="Calibri" pitchFamily="34" charset="-120"/>
-              </a:rPr>
-              <a:t> integrating learning-based methods with classical ones</a:t>
-            </a:r>
-            <a:endParaRPr lang="en-US" b="1" dirty="0"/>
-          </a:p>
-        </p:txBody>
-      </p:sp>
-      <p:sp>
-        <p:nvSpPr>
-          <p:cNvPr id="14" name="Text 6">
-            <a:extLst>
-              <a:ext uri="{FF2B5EF4-FFF2-40B4-BE49-F238E27FC236}">
-                <a16:creationId xmlns:a16="http://schemas.microsoft.com/office/drawing/2014/main" id="{9E002ABA-51D8-44C0-5622-613A998D91FA}"/>
-              </a:ext>
-            </a:extLst>
-          </p:cNvPr>
-          <p:cNvSpPr/>
-          <p:nvPr/>
-        </p:nvSpPr>
-        <p:spPr>
-          <a:xfrm>
-            <a:off x="686512" y="3371651"/>
-            <a:ext cx="1324451" cy="472461"/>
-          </a:xfrm>
-          <a:prstGeom prst="rect">
-            <a:avLst/>
-          </a:prstGeom>
-          <a:noFill/>
-          <a:ln/>
-        </p:spPr>
-        <p:txBody>
-          <a:bodyPr wrap="square" rtlCol="0" anchor="ctr"/>
-          <a:lstStyle/>
-          <a:p>
-            <a:pPr marL="0" indent="0" algn="ctr">
-              <a:buNone/>
-            </a:pPr>
-            <a:r>
-              <a:rPr lang="en-US" sz="2000" b="1" dirty="0">
-                <a:latin typeface="Calibri" pitchFamily="34" charset="0"/>
-                <a:ea typeface="Calibri" pitchFamily="34" charset="-122"/>
-                <a:cs typeface="Calibri" pitchFamily="34" charset="-120"/>
-              </a:rPr>
-              <a:t>Objective:</a:t>
-            </a:r>
-            <a:endParaRPr lang="en-US" sz="2000" dirty="0"/>
-          </a:p>
-        </p:txBody>
-      </p:sp>
-    </p:spTree>
-  </p:cSld>
-  <p:clrMapOvr>
-    <a:masterClrMapping/>
-  </p:clrMapOvr>
-</p:sld>
-</file>
-
-<file path=ppt/slides/slide20.xml><?xml version="1.0" encoding="utf-8"?>
+<file path=ppt/slides/slide21.xml><?xml version="1.0" encoding="utf-8"?>
 <p:sld xmlns:a="http://schemas.openxmlformats.org/drawingml/2006/main" xmlns:r="http://schemas.openxmlformats.org/officeDocument/2006/relationships" xmlns:p="http://schemas.openxmlformats.org/presentationml/2006/main">
   <p:cSld>
     <p:spTree>
@@ -18380,7 +18717,7 @@
 </p:sld>
 </file>
 
-<file path=ppt/slides/slide21.xml><?xml version="1.0" encoding="utf-8"?>
+<file path=ppt/slides/slide22.xml><?xml version="1.0" encoding="utf-8"?>
 <p:sld xmlns:a="http://schemas.openxmlformats.org/drawingml/2006/main" xmlns:r="http://schemas.openxmlformats.org/officeDocument/2006/relationships" xmlns:p="http://schemas.openxmlformats.org/presentationml/2006/main">
   <p:cSld>
     <p:spTree>
@@ -20468,7 +20805,7 @@
 </p:sld>
 </file>
 
-<file path=ppt/slides/slide22.xml><?xml version="1.0" encoding="utf-8"?>
+<file path=ppt/slides/slide23.xml><?xml version="1.0" encoding="utf-8"?>
 <p:sld xmlns:a="http://schemas.openxmlformats.org/drawingml/2006/main" xmlns:r="http://schemas.openxmlformats.org/officeDocument/2006/relationships" xmlns:p="http://schemas.openxmlformats.org/presentationml/2006/main">
   <p:cSld>
     <p:spTree>
@@ -20584,7 +20921,7 @@
 </p:sld>
 </file>
 
-<file path=ppt/slides/slide23.xml><?xml version="1.0" encoding="utf-8"?>
+<file path=ppt/slides/slide24.xml><?xml version="1.0" encoding="utf-8"?>
 <p:sld xmlns:a="http://schemas.openxmlformats.org/drawingml/2006/main" xmlns:r="http://schemas.openxmlformats.org/officeDocument/2006/relationships" xmlns:p="http://schemas.openxmlformats.org/presentationml/2006/main">
   <p:cSld>
     <p:spTree>
@@ -22412,7 +22749,7 @@
         </p:blipFill>
         <p:spPr>
           <a:xfrm>
-            <a:off x="5250057" y="785809"/>
+            <a:off x="5577717" y="-180824"/>
             <a:ext cx="3109083" cy="1326848"/>
           </a:xfrm>
           <a:prstGeom prst="rect">
@@ -22420,37 +22757,6 @@
           </a:prstGeom>
         </p:spPr>
       </p:pic>
-      <p:sp>
-        <p:nvSpPr>
-          <p:cNvPr id="5" name="Shape 5">
-            <a:extLst>
-              <a:ext uri="{FF2B5EF4-FFF2-40B4-BE49-F238E27FC236}">
-                <a16:creationId xmlns:a16="http://schemas.microsoft.com/office/drawing/2014/main" id="{573C8336-5AD8-C4B2-E340-D77267B6C525}"/>
-              </a:ext>
-            </a:extLst>
-          </p:cNvPr>
-          <p:cNvSpPr/>
-          <p:nvPr/>
-        </p:nvSpPr>
-        <p:spPr>
-          <a:xfrm>
-            <a:off x="320040" y="914400"/>
-            <a:ext cx="4785360" cy="1645920"/>
-          </a:xfrm>
-          <a:prstGeom prst="rect">
-            <a:avLst/>
-          </a:prstGeom>
-          <a:solidFill>
-            <a:srgbClr val="F5F7FA"/>
-          </a:solidFill>
-          <a:ln w="12700">
-            <a:solidFill>
-              <a:srgbClr val="D6E4F0"/>
-            </a:solidFill>
-            <a:prstDash val="solid"/>
-          </a:ln>
-        </p:spPr>
-      </p:sp>
       <p:sp>
         <p:nvSpPr>
           <p:cNvPr id="8" name="Text 7">
@@ -22482,14 +22788,1086 @@
               <a:buNone/>
             </a:pPr>
             <a:r>
-              <a:rPr lang="en-US" sz="1300" b="1" dirty="0">
+              <a:rPr lang="en-US" b="1" dirty="0">
                 <a:latin typeface="Calibri" pitchFamily="34" charset="0"/>
                 <a:ea typeface="Calibri" pitchFamily="34" charset="-122"/>
                 <a:cs typeface="Calibri" pitchFamily="34" charset="-120"/>
               </a:rPr>
               <a:t>Reinforcement Learning</a:t>
             </a:r>
-            <a:endParaRPr lang="en-US" sz="1300" dirty="0"/>
+            <a:endParaRPr lang="en-US" dirty="0"/>
+          </a:p>
+        </p:txBody>
+      </p:sp>
+      <mc:AlternateContent xmlns:mc="http://schemas.openxmlformats.org/markup-compatibility/2006">
+        <mc:Choice xmlns:a14="http://schemas.microsoft.com/office/drawing/2010/main" Requires="a14">
+          <p:sp>
+            <p:nvSpPr>
+              <p:cNvPr id="9" name="Text 8">
+                <a:extLst>
+                  <a:ext uri="{FF2B5EF4-FFF2-40B4-BE49-F238E27FC236}">
+                    <a16:creationId xmlns:a16="http://schemas.microsoft.com/office/drawing/2014/main" id="{20F013AD-F929-BC0A-5743-A5947A99B8CF}"/>
+                  </a:ext>
+                </a:extLst>
+              </p:cNvPr>
+              <p:cNvSpPr/>
+              <p:nvPr/>
+            </p:nvSpPr>
+            <p:spPr>
+              <a:xfrm>
+                <a:off x="457199" y="1280160"/>
+                <a:ext cx="6215063" cy="1188720"/>
+              </a:xfrm>
+              <a:prstGeom prst="rect">
+                <a:avLst/>
+              </a:prstGeom>
+              <a:noFill/>
+              <a:ln/>
+            </p:spPr>
+            <p:txBody>
+              <a:bodyPr wrap="square" rtlCol="0" anchor="t"/>
+              <a:lstStyle/>
+              <a:p>
+                <a:pPr marL="190500" indent="-190500">
+                  <a:spcAft>
+                    <a:spcPts val="500"/>
+                  </a:spcAft>
+                  <a:buSzPct val="100000"/>
+                  <a:buChar char="•"/>
+                </a:pPr>
+                <a:r>
+                  <a:rPr lang="en-US" sz="1300" dirty="0">
+                    <a:solidFill>
+                      <a:srgbClr val="1A1A1A"/>
+                    </a:solidFill>
+                    <a:latin typeface="Calibri" pitchFamily="34" charset="0"/>
+                    <a:ea typeface="Calibri" pitchFamily="34" charset="-122"/>
+                    <a:cs typeface="Calibri" pitchFamily="34" charset="-120"/>
+                  </a:rPr>
+                  <a:t>An agent sequentially observe interact with an environment modifying it and receives a scalar reward</a:t>
+                </a:r>
+              </a:p>
+              <a:p>
+                <a:pPr marL="190500" indent="-190500">
+                  <a:spcAft>
+                    <a:spcPts val="500"/>
+                  </a:spcAft>
+                  <a:buSzPct val="100000"/>
+                  <a:buChar char="•"/>
+                </a:pPr>
+                <a:r>
+                  <a:rPr lang="en-US" sz="1300" dirty="0">
+                    <a:solidFill>
+                      <a:srgbClr val="1A1A1A"/>
+                    </a:solidFill>
+                    <a:latin typeface="Calibri" pitchFamily="34" charset="0"/>
+                    <a:ea typeface="Calibri" pitchFamily="34" charset="-122"/>
+                    <a:cs typeface="Calibri" pitchFamily="34" charset="-120"/>
+                  </a:rPr>
+                  <a:t>Observe state </a:t>
+                </a:r>
+                <a14:m>
+                  <m:oMath xmlns:m="http://schemas.openxmlformats.org/officeDocument/2006/math">
+                    <m:sSub>
+                      <m:sSubPr>
+                        <m:ctrlPr>
+                          <a:rPr lang="pt-BR" sz="1300" i="1" smtClean="0">
+                            <a:solidFill>
+                              <a:srgbClr val="1A1A1A"/>
+                            </a:solidFill>
+                            <a:latin typeface="Cambria Math" panose="02040503050406030204" pitchFamily="18" charset="0"/>
+                            <a:ea typeface="Calibri" pitchFamily="34" charset="-122"/>
+                            <a:cs typeface="Calibri" pitchFamily="34" charset="-120"/>
+                          </a:rPr>
+                        </m:ctrlPr>
+                      </m:sSubPr>
+                      <m:e>
+                        <m:r>
+                          <a:rPr lang="it-IT" sz="1300" b="0" i="1" smtClean="0">
+                            <a:solidFill>
+                              <a:srgbClr val="1A1A1A"/>
+                            </a:solidFill>
+                            <a:latin typeface="Cambria Math" panose="02040503050406030204" pitchFamily="18" charset="0"/>
+                            <a:ea typeface="Calibri" pitchFamily="34" charset="-122"/>
+                            <a:cs typeface="Calibri" pitchFamily="34" charset="-120"/>
+                          </a:rPr>
+                          <m:t>𝑆</m:t>
+                        </m:r>
+                      </m:e>
+                      <m:sub>
+                        <m:r>
+                          <a:rPr lang="it-IT" sz="1300" b="0" i="1" smtClean="0">
+                            <a:solidFill>
+                              <a:srgbClr val="1A1A1A"/>
+                            </a:solidFill>
+                            <a:latin typeface="Cambria Math" panose="02040503050406030204" pitchFamily="18" charset="0"/>
+                            <a:ea typeface="Calibri" pitchFamily="34" charset="-122"/>
+                            <a:cs typeface="Calibri" pitchFamily="34" charset="-120"/>
+                          </a:rPr>
+                          <m:t>𝑡</m:t>
+                        </m:r>
+                      </m:sub>
+                    </m:sSub>
+                  </m:oMath>
+                </a14:m>
+                <a:r>
+                  <a:rPr lang="en-US" sz="1300" dirty="0"/>
+                  <a:t>, perform action </a:t>
+                </a:r>
+                <a14:m>
+                  <m:oMath xmlns:m="http://schemas.openxmlformats.org/officeDocument/2006/math">
+                    <m:sSub>
+                      <m:sSubPr>
+                        <m:ctrlPr>
+                          <a:rPr lang="pt-BR" sz="1300" i="1">
+                            <a:solidFill>
+                              <a:srgbClr val="1A1A1A"/>
+                            </a:solidFill>
+                            <a:latin typeface="Cambria Math" panose="02040503050406030204" pitchFamily="18" charset="0"/>
+                            <a:ea typeface="Calibri" pitchFamily="34" charset="-122"/>
+                            <a:cs typeface="Calibri" pitchFamily="34" charset="-120"/>
+                          </a:rPr>
+                        </m:ctrlPr>
+                      </m:sSubPr>
+                      <m:e>
+                        <m:r>
+                          <a:rPr lang="it-IT" sz="1300" i="1">
+                            <a:solidFill>
+                              <a:srgbClr val="1A1A1A"/>
+                            </a:solidFill>
+                            <a:latin typeface="Cambria Math" panose="02040503050406030204" pitchFamily="18" charset="0"/>
+                            <a:ea typeface="Calibri" pitchFamily="34" charset="-122"/>
+                            <a:cs typeface="Calibri" pitchFamily="34" charset="-120"/>
+                          </a:rPr>
+                          <m:t>𝑎</m:t>
+                        </m:r>
+                      </m:e>
+                      <m:sub>
+                        <m:r>
+                          <a:rPr lang="it-IT" sz="1300" i="1">
+                            <a:solidFill>
+                              <a:srgbClr val="1A1A1A"/>
+                            </a:solidFill>
+                            <a:latin typeface="Cambria Math" panose="02040503050406030204" pitchFamily="18" charset="0"/>
+                            <a:ea typeface="Calibri" pitchFamily="34" charset="-122"/>
+                            <a:cs typeface="Calibri" pitchFamily="34" charset="-120"/>
+                          </a:rPr>
+                          <m:t>𝑡</m:t>
+                        </m:r>
+                      </m:sub>
+                    </m:sSub>
+                  </m:oMath>
+                </a14:m>
+                <a:r>
+                  <a:rPr lang="en-US" sz="1300" dirty="0"/>
+                  <a:t> leading to </a:t>
+                </a:r>
+                <a14:m>
+                  <m:oMath xmlns:m="http://schemas.openxmlformats.org/officeDocument/2006/math">
+                    <m:sSub>
+                      <m:sSubPr>
+                        <m:ctrlPr>
+                          <a:rPr lang="pt-BR" sz="1300" i="1">
+                            <a:solidFill>
+                              <a:srgbClr val="1A1A1A"/>
+                            </a:solidFill>
+                            <a:latin typeface="Cambria Math" panose="02040503050406030204" pitchFamily="18" charset="0"/>
+                            <a:ea typeface="Calibri" pitchFamily="34" charset="-122"/>
+                            <a:cs typeface="Calibri" pitchFamily="34" charset="-120"/>
+                          </a:rPr>
+                        </m:ctrlPr>
+                      </m:sSubPr>
+                      <m:e>
+                        <m:r>
+                          <a:rPr lang="it-IT" sz="1300" i="1">
+                            <a:solidFill>
+                              <a:srgbClr val="1A1A1A"/>
+                            </a:solidFill>
+                            <a:latin typeface="Cambria Math" panose="02040503050406030204" pitchFamily="18" charset="0"/>
+                            <a:ea typeface="Calibri" pitchFamily="34" charset="-122"/>
+                            <a:cs typeface="Calibri" pitchFamily="34" charset="-120"/>
+                          </a:rPr>
+                          <m:t>𝑆</m:t>
+                        </m:r>
+                      </m:e>
+                      <m:sub>
+                        <m:r>
+                          <a:rPr lang="it-IT" sz="1300" i="1">
+                            <a:solidFill>
+                              <a:srgbClr val="1A1A1A"/>
+                            </a:solidFill>
+                            <a:latin typeface="Cambria Math" panose="02040503050406030204" pitchFamily="18" charset="0"/>
+                            <a:ea typeface="Calibri" pitchFamily="34" charset="-122"/>
+                            <a:cs typeface="Calibri" pitchFamily="34" charset="-120"/>
+                          </a:rPr>
+                          <m:t>𝑡</m:t>
+                        </m:r>
+                        <m:r>
+                          <a:rPr lang="it-IT" sz="1300" i="1">
+                            <a:solidFill>
+                              <a:srgbClr val="1A1A1A"/>
+                            </a:solidFill>
+                            <a:latin typeface="Cambria Math" panose="02040503050406030204" pitchFamily="18" charset="0"/>
+                            <a:ea typeface="Calibri" pitchFamily="34" charset="-122"/>
+                            <a:cs typeface="Calibri" pitchFamily="34" charset="-120"/>
+                          </a:rPr>
+                          <m:t>+1</m:t>
+                        </m:r>
+                      </m:sub>
+                    </m:sSub>
+                  </m:oMath>
+                </a14:m>
+                <a:r>
+                  <a:rPr lang="en-US" sz="1300" dirty="0"/>
+                  <a:t>, receives reward </a:t>
+                </a:r>
+                <a14:m>
+                  <m:oMath xmlns:m="http://schemas.openxmlformats.org/officeDocument/2006/math">
+                    <m:sSub>
+                      <m:sSubPr>
+                        <m:ctrlPr>
+                          <a:rPr lang="pt-BR" sz="1300" i="1">
+                            <a:solidFill>
+                              <a:srgbClr val="1A1A1A"/>
+                            </a:solidFill>
+                            <a:latin typeface="Cambria Math" panose="02040503050406030204" pitchFamily="18" charset="0"/>
+                            <a:ea typeface="Calibri" pitchFamily="34" charset="-122"/>
+                            <a:cs typeface="Calibri" pitchFamily="34" charset="-120"/>
+                          </a:rPr>
+                        </m:ctrlPr>
+                      </m:sSubPr>
+                      <m:e>
+                        <m:r>
+                          <a:rPr lang="it-IT" sz="1300" i="1">
+                            <a:solidFill>
+                              <a:srgbClr val="1A1A1A"/>
+                            </a:solidFill>
+                            <a:latin typeface="Cambria Math" panose="02040503050406030204" pitchFamily="18" charset="0"/>
+                            <a:ea typeface="Calibri" pitchFamily="34" charset="-122"/>
+                            <a:cs typeface="Calibri" pitchFamily="34" charset="-120"/>
+                          </a:rPr>
+                          <m:t>𝑟</m:t>
+                        </m:r>
+                      </m:e>
+                      <m:sub>
+                        <m:r>
+                          <a:rPr lang="it-IT" sz="1300" i="1">
+                            <a:solidFill>
+                              <a:srgbClr val="1A1A1A"/>
+                            </a:solidFill>
+                            <a:latin typeface="Cambria Math" panose="02040503050406030204" pitchFamily="18" charset="0"/>
+                            <a:ea typeface="Calibri" pitchFamily="34" charset="-122"/>
+                            <a:cs typeface="Calibri" pitchFamily="34" charset="-120"/>
+                          </a:rPr>
+                          <m:t>𝑡</m:t>
+                        </m:r>
+                        <m:r>
+                          <a:rPr lang="it-IT" sz="1300" i="1">
+                            <a:solidFill>
+                              <a:srgbClr val="1A1A1A"/>
+                            </a:solidFill>
+                            <a:latin typeface="Cambria Math" panose="02040503050406030204" pitchFamily="18" charset="0"/>
+                            <a:ea typeface="Calibri" pitchFamily="34" charset="-122"/>
+                            <a:cs typeface="Calibri" pitchFamily="34" charset="-120"/>
+                          </a:rPr>
+                          <m:t>+1</m:t>
+                        </m:r>
+                      </m:sub>
+                    </m:sSub>
+                  </m:oMath>
+                </a14:m>
+                <a:endParaRPr lang="en-US" sz="1300" dirty="0"/>
+              </a:p>
+              <a:p>
+                <a:pPr marL="190500" indent="-190500">
+                  <a:spcAft>
+                    <a:spcPts val="500"/>
+                  </a:spcAft>
+                  <a:buSzPct val="100000"/>
+                  <a:buChar char="•"/>
+                </a:pPr>
+                <a:r>
+                  <a:rPr lang="en-US" sz="1300" dirty="0">
+                    <a:solidFill>
+                      <a:srgbClr val="1A1A1A"/>
+                    </a:solidFill>
+                    <a:latin typeface="Calibri" pitchFamily="34" charset="0"/>
+                    <a:ea typeface="Calibri" pitchFamily="34" charset="-122"/>
+                    <a:cs typeface="Calibri" pitchFamily="34" charset="-120"/>
+                  </a:rPr>
+                  <a:t>Goal: learn to take the best action </a:t>
+                </a:r>
+                <a:r>
+                  <a:rPr lang="en-US" sz="1200" b="1" dirty="0">
+                    <a:latin typeface="Calibri" pitchFamily="34" charset="0"/>
+                    <a:ea typeface="Calibri" pitchFamily="34" charset="-122"/>
+                    <a:cs typeface="Calibri" pitchFamily="34" charset="-120"/>
+                  </a:rPr>
+                  <a:t>→</a:t>
+                </a:r>
+                <a:r>
+                  <a:rPr lang="en-US" sz="1300" dirty="0">
+                    <a:solidFill>
+                      <a:srgbClr val="1A1A1A"/>
+                    </a:solidFill>
+                    <a:latin typeface="Calibri" pitchFamily="34" charset="0"/>
+                    <a:ea typeface="Calibri" pitchFamily="34" charset="-122"/>
+                    <a:cs typeface="Calibri" pitchFamily="34" charset="-120"/>
+                  </a:rPr>
+                  <a:t> maximize cumulative reward </a:t>
+                </a:r>
+              </a:p>
+              <a:p>
+                <a:pPr>
+                  <a:spcAft>
+                    <a:spcPts val="500"/>
+                  </a:spcAft>
+                  <a:buSzPct val="100000"/>
+                </a:pPr>
+                <a:endParaRPr lang="en-US" sz="1300" dirty="0">
+                  <a:solidFill>
+                    <a:srgbClr val="1A1A1A"/>
+                  </a:solidFill>
+                  <a:latin typeface="Calibri" pitchFamily="34" charset="0"/>
+                  <a:ea typeface="Calibri" pitchFamily="34" charset="-122"/>
+                  <a:cs typeface="Calibri" pitchFamily="34" charset="-120"/>
+                </a:endParaRPr>
+              </a:p>
+              <a:p>
+                <a:pPr marL="190500" indent="-190500">
+                  <a:spcAft>
+                    <a:spcPts val="500"/>
+                  </a:spcAft>
+                  <a:buSzPct val="100000"/>
+                  <a:buChar char="•"/>
+                </a:pPr>
+                <a:endParaRPr lang="en-US" sz="1300" dirty="0">
+                  <a:solidFill>
+                    <a:srgbClr val="1A1A1A"/>
+                  </a:solidFill>
+                  <a:latin typeface="Calibri" pitchFamily="34" charset="0"/>
+                  <a:ea typeface="Calibri" pitchFamily="34" charset="-122"/>
+                  <a:cs typeface="Calibri" pitchFamily="34" charset="-120"/>
+                </a:endParaRPr>
+              </a:p>
+              <a:p>
+                <a:pPr marL="190500" indent="-190500">
+                  <a:spcAft>
+                    <a:spcPts val="500"/>
+                  </a:spcAft>
+                  <a:buSzPct val="100000"/>
+                  <a:buChar char="•"/>
+                </a:pPr>
+                <a:r>
+                  <a:rPr lang="en-US" sz="1300" dirty="0">
+                    <a:solidFill>
+                      <a:srgbClr val="1A1A1A"/>
+                    </a:solidFill>
+                    <a:latin typeface="Calibri" pitchFamily="34" charset="0"/>
+                    <a:ea typeface="Calibri" pitchFamily="34" charset="-122"/>
+                    <a:cs typeface="Calibri" pitchFamily="34" charset="-120"/>
+                  </a:rPr>
+                  <a:t>A behavioral Policy </a:t>
+                </a:r>
+                <a14:m>
+                  <m:oMath xmlns:m="http://schemas.openxmlformats.org/officeDocument/2006/math">
+                    <m:r>
+                      <m:rPr>
+                        <m:sty m:val="p"/>
+                      </m:rPr>
+                      <a:rPr lang="el-GR" sz="1300" b="0" i="1" smtClean="0">
+                        <a:solidFill>
+                          <a:srgbClr val="1A1A1A"/>
+                        </a:solidFill>
+                        <a:latin typeface="Cambria Math" panose="02040503050406030204" pitchFamily="18" charset="0"/>
+                        <a:ea typeface="Calibri" pitchFamily="34" charset="-122"/>
+                        <a:cs typeface="Calibri" pitchFamily="34" charset="-120"/>
+                      </a:rPr>
+                      <m:t>Π</m:t>
+                    </m:r>
+                    <m:r>
+                      <a:rPr lang="it-IT" sz="1300" b="0" i="1" smtClean="0">
+                        <a:solidFill>
+                          <a:srgbClr val="1A1A1A"/>
+                        </a:solidFill>
+                        <a:latin typeface="Cambria Math" panose="02040503050406030204" pitchFamily="18" charset="0"/>
+                        <a:ea typeface="Calibri" pitchFamily="34" charset="-122"/>
+                        <a:cs typeface="Calibri" pitchFamily="34" charset="-120"/>
+                      </a:rPr>
+                      <m:t>(</m:t>
+                    </m:r>
+                    <m:r>
+                      <a:rPr lang="it-IT" sz="1300" b="0" i="1" smtClean="0">
+                        <a:solidFill>
+                          <a:srgbClr val="1A1A1A"/>
+                        </a:solidFill>
+                        <a:latin typeface="Cambria Math" panose="02040503050406030204" pitchFamily="18" charset="0"/>
+                        <a:ea typeface="Calibri" pitchFamily="34" charset="-122"/>
+                        <a:cs typeface="Calibri" pitchFamily="34" charset="-120"/>
+                      </a:rPr>
+                      <m:t>𝑎</m:t>
+                    </m:r>
+                    <m:r>
+                      <a:rPr lang="it-IT" sz="1300" b="0" i="1" smtClean="0">
+                        <a:solidFill>
+                          <a:srgbClr val="1A1A1A"/>
+                        </a:solidFill>
+                        <a:latin typeface="Cambria Math" panose="02040503050406030204" pitchFamily="18" charset="0"/>
+                        <a:ea typeface="Calibri" pitchFamily="34" charset="-122"/>
+                        <a:cs typeface="Calibri" pitchFamily="34" charset="-120"/>
+                      </a:rPr>
+                      <m:t>|</m:t>
+                    </m:r>
+                    <m:r>
+                      <a:rPr lang="it-IT" sz="1300" b="0" i="1" smtClean="0">
+                        <a:solidFill>
+                          <a:srgbClr val="1A1A1A"/>
+                        </a:solidFill>
+                        <a:latin typeface="Cambria Math" panose="02040503050406030204" pitchFamily="18" charset="0"/>
+                        <a:ea typeface="Calibri" pitchFamily="34" charset="-122"/>
+                        <a:cs typeface="Calibri" pitchFamily="34" charset="-120"/>
+                      </a:rPr>
+                      <m:t>𝑆</m:t>
+                    </m:r>
+                    <m:r>
+                      <a:rPr lang="it-IT" sz="1300" b="0" i="1" smtClean="0">
+                        <a:solidFill>
+                          <a:srgbClr val="1A1A1A"/>
+                        </a:solidFill>
+                        <a:latin typeface="Cambria Math" panose="02040503050406030204" pitchFamily="18" charset="0"/>
+                        <a:ea typeface="Calibri" pitchFamily="34" charset="-122"/>
+                        <a:cs typeface="Calibri" pitchFamily="34" charset="-120"/>
+                      </a:rPr>
+                      <m:t>)</m:t>
+                    </m:r>
+                  </m:oMath>
+                </a14:m>
+                <a:r>
+                  <a:rPr lang="en-US" sz="1300" dirty="0">
+                    <a:solidFill>
+                      <a:srgbClr val="1A1A1A"/>
+                    </a:solidFill>
+                    <a:latin typeface="Calibri" pitchFamily="34" charset="0"/>
+                    <a:ea typeface="Calibri" pitchFamily="34" charset="-122"/>
+                    <a:cs typeface="Calibri" pitchFamily="34" charset="-120"/>
+                  </a:rPr>
+                  <a:t> output an action given a state </a:t>
+                </a:r>
+              </a:p>
+              <a:p>
+                <a:pPr marL="190500" indent="-190500">
+                  <a:spcAft>
+                    <a:spcPts val="500"/>
+                  </a:spcAft>
+                  <a:buSzPct val="100000"/>
+                  <a:buChar char="•"/>
+                </a:pPr>
+                <a:r>
+                  <a:rPr lang="en-US" sz="1300" dirty="0">
+                    <a:solidFill>
+                      <a:srgbClr val="1A1A1A"/>
+                    </a:solidFill>
+                    <a:latin typeface="Calibri" pitchFamily="34" charset="0"/>
+                    <a:ea typeface="Calibri" pitchFamily="34" charset="-122"/>
+                    <a:cs typeface="Calibri" pitchFamily="34" charset="-120"/>
+                  </a:rPr>
+                  <a:t>An Action-Value function </a:t>
+                </a:r>
+                <a14:m>
+                  <m:oMath xmlns:m="http://schemas.openxmlformats.org/officeDocument/2006/math">
+                    <m:r>
+                      <a:rPr lang="it-IT" sz="1300" b="0" i="1" smtClean="0">
+                        <a:solidFill>
+                          <a:srgbClr val="1A1A1A"/>
+                        </a:solidFill>
+                        <a:latin typeface="Cambria Math" panose="02040503050406030204" pitchFamily="18" charset="0"/>
+                        <a:ea typeface="Calibri" pitchFamily="34" charset="-122"/>
+                        <a:cs typeface="Calibri" pitchFamily="34" charset="-120"/>
+                      </a:rPr>
+                      <m:t>𝑄</m:t>
+                    </m:r>
+                    <m:r>
+                      <a:rPr lang="it-IT" sz="1300" i="1">
+                        <a:solidFill>
+                          <a:srgbClr val="1A1A1A"/>
+                        </a:solidFill>
+                        <a:latin typeface="Cambria Math" panose="02040503050406030204" pitchFamily="18" charset="0"/>
+                        <a:ea typeface="Calibri" pitchFamily="34" charset="-122"/>
+                        <a:cs typeface="Calibri" pitchFamily="34" charset="-120"/>
+                      </a:rPr>
+                      <m:t>(</m:t>
+                    </m:r>
+                    <m:r>
+                      <a:rPr lang="it-IT" sz="1300" i="1">
+                        <a:solidFill>
+                          <a:srgbClr val="1A1A1A"/>
+                        </a:solidFill>
+                        <a:latin typeface="Cambria Math" panose="02040503050406030204" pitchFamily="18" charset="0"/>
+                        <a:ea typeface="Calibri" pitchFamily="34" charset="-122"/>
+                        <a:cs typeface="Calibri" pitchFamily="34" charset="-120"/>
+                      </a:rPr>
+                      <m:t>𝑆</m:t>
+                    </m:r>
+                    <m:r>
+                      <a:rPr lang="it-IT" sz="1300" b="0" i="1" smtClean="0">
+                        <a:solidFill>
+                          <a:srgbClr val="1A1A1A"/>
+                        </a:solidFill>
+                        <a:latin typeface="Cambria Math" panose="02040503050406030204" pitchFamily="18" charset="0"/>
+                        <a:ea typeface="Calibri" pitchFamily="34" charset="-122"/>
+                        <a:cs typeface="Calibri" pitchFamily="34" charset="-120"/>
+                      </a:rPr>
+                      <m:t>,</m:t>
+                    </m:r>
+                    <m:r>
+                      <a:rPr lang="it-IT" sz="1300" i="1">
+                        <a:solidFill>
+                          <a:srgbClr val="1A1A1A"/>
+                        </a:solidFill>
+                        <a:latin typeface="Cambria Math" panose="02040503050406030204" pitchFamily="18" charset="0"/>
+                        <a:ea typeface="Calibri" pitchFamily="34" charset="-122"/>
+                        <a:cs typeface="Calibri" pitchFamily="34" charset="-120"/>
+                      </a:rPr>
+                      <m:t>𝑎</m:t>
+                    </m:r>
+                    <m:r>
+                      <a:rPr lang="it-IT" sz="1300" i="1">
+                        <a:solidFill>
+                          <a:srgbClr val="1A1A1A"/>
+                        </a:solidFill>
+                        <a:latin typeface="Cambria Math" panose="02040503050406030204" pitchFamily="18" charset="0"/>
+                        <a:ea typeface="Calibri" pitchFamily="34" charset="-122"/>
+                        <a:cs typeface="Calibri" pitchFamily="34" charset="-120"/>
+                      </a:rPr>
+                      <m:t>)</m:t>
+                    </m:r>
+                  </m:oMath>
+                </a14:m>
+                <a:r>
+                  <a:rPr lang="en-US" sz="1300" dirty="0">
+                    <a:solidFill>
+                      <a:srgbClr val="1A1A1A"/>
+                    </a:solidFill>
+                    <a:latin typeface="Calibri" pitchFamily="34" charset="0"/>
+                    <a:ea typeface="Calibri" pitchFamily="34" charset="-122"/>
+                    <a:cs typeface="Calibri" pitchFamily="34" charset="-120"/>
+                  </a:rPr>
+                  <a:t> allow to assign a value to each action-state pair</a:t>
+                </a:r>
+              </a:p>
+              <a:p>
+                <a:pPr marL="190500" indent="-190500">
+                  <a:spcAft>
+                    <a:spcPts val="500"/>
+                  </a:spcAft>
+                  <a:buSzPct val="100000"/>
+                  <a:buChar char="•"/>
+                </a:pPr>
+                <a:endParaRPr lang="en-US" sz="1300" dirty="0">
+                  <a:solidFill>
+                    <a:srgbClr val="1A1A1A"/>
+                  </a:solidFill>
+                  <a:latin typeface="Calibri" pitchFamily="34" charset="0"/>
+                  <a:ea typeface="Calibri" pitchFamily="34" charset="-122"/>
+                  <a:cs typeface="Calibri" pitchFamily="34" charset="-120"/>
+                </a:endParaRPr>
+              </a:p>
+              <a:p>
+                <a:pPr marL="190500" indent="-190500">
+                  <a:spcAft>
+                    <a:spcPts val="500"/>
+                  </a:spcAft>
+                  <a:buSzPct val="100000"/>
+                  <a:buChar char="•"/>
+                </a:pPr>
+                <a:r>
+                  <a:rPr lang="en-US" sz="1300" dirty="0">
+                    <a:solidFill>
+                      <a:srgbClr val="1A1A1A"/>
+                    </a:solidFill>
+                    <a:latin typeface="Calibri" pitchFamily="34" charset="0"/>
+                    <a:ea typeface="Calibri" pitchFamily="34" charset="-122"/>
+                    <a:cs typeface="Calibri" pitchFamily="34" charset="-120"/>
+                  </a:rPr>
+                  <a:t>Q-learning estimates Q(s,a) via Bellman updates</a:t>
+                </a:r>
+              </a:p>
+              <a:p>
+                <a:pPr marL="190500" indent="-190500">
+                  <a:spcAft>
+                    <a:spcPts val="500"/>
+                  </a:spcAft>
+                  <a:buSzPct val="100000"/>
+                  <a:buChar char="•"/>
+                </a:pPr>
+                <a:endParaRPr lang="en-US" sz="1300" dirty="0">
+                  <a:solidFill>
+                    <a:srgbClr val="1A1A1A"/>
+                  </a:solidFill>
+                  <a:latin typeface="Calibri" pitchFamily="34" charset="0"/>
+                  <a:ea typeface="Calibri" pitchFamily="34" charset="-122"/>
+                  <a:cs typeface="Calibri" pitchFamily="34" charset="-120"/>
+                </a:endParaRPr>
+              </a:p>
+              <a:p>
+                <a:pPr marL="190500" indent="-190500">
+                  <a:spcAft>
+                    <a:spcPts val="500"/>
+                  </a:spcAft>
+                  <a:buSzPct val="100000"/>
+                  <a:buChar char="•"/>
+                </a:pPr>
+                <a14:m>
+                  <m:oMath xmlns:m="http://schemas.openxmlformats.org/officeDocument/2006/math">
+                    <m:sSub>
+                      <m:sSubPr>
+                        <m:ctrlPr>
+                          <a:rPr lang="pt-BR" sz="1300" i="1">
+                            <a:solidFill>
+                              <a:srgbClr val="1A1A1A"/>
+                            </a:solidFill>
+                            <a:latin typeface="Cambria Math" panose="02040503050406030204" pitchFamily="18" charset="0"/>
+                            <a:ea typeface="Calibri" pitchFamily="34" charset="-122"/>
+                            <a:cs typeface="Calibri" pitchFamily="34" charset="-120"/>
+                          </a:rPr>
+                        </m:ctrlPr>
+                      </m:sSubPr>
+                      <m:e>
+                        <m:r>
+                          <a:rPr lang="it-IT" sz="1300" i="1">
+                            <a:solidFill>
+                              <a:srgbClr val="1A1A1A"/>
+                            </a:solidFill>
+                            <a:latin typeface="Cambria Math" panose="02040503050406030204" pitchFamily="18" charset="0"/>
+                            <a:ea typeface="Calibri" pitchFamily="34" charset="-122"/>
+                            <a:cs typeface="Calibri" pitchFamily="34" charset="-120"/>
+                          </a:rPr>
+                          <m:t>𝑆</m:t>
+                        </m:r>
+                      </m:e>
+                      <m:sub>
+                        <m:r>
+                          <a:rPr lang="it-IT" sz="1300" b="0" i="1" smtClean="0">
+                            <a:solidFill>
+                              <a:srgbClr val="1A1A1A"/>
+                            </a:solidFill>
+                            <a:latin typeface="Cambria Math" panose="02040503050406030204" pitchFamily="18" charset="0"/>
+                            <a:ea typeface="Calibri" pitchFamily="34" charset="-122"/>
+                            <a:cs typeface="Calibri" pitchFamily="34" charset="-120"/>
+                          </a:rPr>
+                          <m:t>𝑡</m:t>
+                        </m:r>
+                        <m:r>
+                          <a:rPr lang="it-IT" sz="1300" b="0" i="1" smtClean="0">
+                            <a:solidFill>
+                              <a:srgbClr val="1A1A1A"/>
+                            </a:solidFill>
+                            <a:latin typeface="Cambria Math" panose="02040503050406030204" pitchFamily="18" charset="0"/>
+                            <a:ea typeface="Calibri" pitchFamily="34" charset="-122"/>
+                            <a:cs typeface="Calibri" pitchFamily="34" charset="-120"/>
+                          </a:rPr>
+                          <m:t>+1</m:t>
+                        </m:r>
+                      </m:sub>
+                    </m:sSub>
+                  </m:oMath>
+                </a14:m>
+                <a:r>
+                  <a:rPr lang="en-US" sz="1300" dirty="0"/>
+                  <a:t> , </a:t>
+                </a:r>
+                <a14:m>
+                  <m:oMath xmlns:m="http://schemas.openxmlformats.org/officeDocument/2006/math">
+                    <m:sSub>
+                      <m:sSubPr>
+                        <m:ctrlPr>
+                          <a:rPr lang="pt-BR" sz="1300" i="1">
+                            <a:solidFill>
+                              <a:srgbClr val="1A1A1A"/>
+                            </a:solidFill>
+                            <a:latin typeface="Cambria Math" panose="02040503050406030204" pitchFamily="18" charset="0"/>
+                            <a:ea typeface="Calibri" pitchFamily="34" charset="-122"/>
+                            <a:cs typeface="Calibri" pitchFamily="34" charset="-120"/>
+                          </a:rPr>
+                        </m:ctrlPr>
+                      </m:sSubPr>
+                      <m:e>
+                        <m:r>
+                          <a:rPr lang="it-IT" sz="1300" b="0" i="1" smtClean="0">
+                            <a:solidFill>
+                              <a:srgbClr val="1A1A1A"/>
+                            </a:solidFill>
+                            <a:latin typeface="Cambria Math" panose="02040503050406030204" pitchFamily="18" charset="0"/>
+                            <a:ea typeface="Calibri" pitchFamily="34" charset="-122"/>
+                            <a:cs typeface="Calibri" pitchFamily="34" charset="-120"/>
+                          </a:rPr>
+                          <m:t>𝑎</m:t>
+                        </m:r>
+                      </m:e>
+                      <m:sub>
+                        <m:r>
+                          <a:rPr lang="it-IT" sz="1300" b="0" i="1" smtClean="0">
+                            <a:solidFill>
+                              <a:srgbClr val="1A1A1A"/>
+                            </a:solidFill>
+                            <a:latin typeface="Cambria Math" panose="02040503050406030204" pitchFamily="18" charset="0"/>
+                            <a:ea typeface="Calibri" pitchFamily="34" charset="-122"/>
+                            <a:cs typeface="Calibri" pitchFamily="34" charset="-120"/>
+                          </a:rPr>
+                          <m:t>𝑡</m:t>
+                        </m:r>
+                      </m:sub>
+                    </m:sSub>
+                  </m:oMath>
+                </a14:m>
+                <a:r>
+                  <a:rPr lang="en-US" sz="1300" dirty="0"/>
+                  <a:t>  , </a:t>
+                </a:r>
+                <a14:m>
+                  <m:oMath xmlns:m="http://schemas.openxmlformats.org/officeDocument/2006/math">
+                    <m:sSub>
+                      <m:sSubPr>
+                        <m:ctrlPr>
+                          <a:rPr lang="pt-BR" sz="1300" i="1">
+                            <a:solidFill>
+                              <a:srgbClr val="1A1A1A"/>
+                            </a:solidFill>
+                            <a:latin typeface="Cambria Math" panose="02040503050406030204" pitchFamily="18" charset="0"/>
+                            <a:ea typeface="Calibri" pitchFamily="34" charset="-122"/>
+                            <a:cs typeface="Calibri" pitchFamily="34" charset="-120"/>
+                          </a:rPr>
+                        </m:ctrlPr>
+                      </m:sSubPr>
+                      <m:e>
+                        <m:r>
+                          <a:rPr lang="it-IT" sz="1300" b="0" i="1" smtClean="0">
+                            <a:solidFill>
+                              <a:srgbClr val="1A1A1A"/>
+                            </a:solidFill>
+                            <a:latin typeface="Cambria Math" panose="02040503050406030204" pitchFamily="18" charset="0"/>
+                            <a:ea typeface="Calibri" pitchFamily="34" charset="-122"/>
+                            <a:cs typeface="Calibri" pitchFamily="34" charset="-120"/>
+                          </a:rPr>
+                          <m:t>𝑟</m:t>
+                        </m:r>
+                      </m:e>
+                      <m:sub>
+                        <m:r>
+                          <a:rPr lang="it-IT" sz="1300" b="0" i="1" smtClean="0">
+                            <a:solidFill>
+                              <a:srgbClr val="1A1A1A"/>
+                            </a:solidFill>
+                            <a:latin typeface="Cambria Math" panose="02040503050406030204" pitchFamily="18" charset="0"/>
+                            <a:ea typeface="Calibri" pitchFamily="34" charset="-122"/>
+                            <a:cs typeface="Calibri" pitchFamily="34" charset="-120"/>
+                          </a:rPr>
+                          <m:t>𝑡</m:t>
+                        </m:r>
+                        <m:r>
+                          <a:rPr lang="it-IT" sz="1300" b="0" i="1" smtClean="0">
+                            <a:solidFill>
+                              <a:srgbClr val="1A1A1A"/>
+                            </a:solidFill>
+                            <a:latin typeface="Cambria Math" panose="02040503050406030204" pitchFamily="18" charset="0"/>
+                            <a:ea typeface="Calibri" pitchFamily="34" charset="-122"/>
+                            <a:cs typeface="Calibri" pitchFamily="34" charset="-120"/>
+                          </a:rPr>
+                          <m:t>+1</m:t>
+                        </m:r>
+                      </m:sub>
+                    </m:sSub>
+                  </m:oMath>
+                </a14:m>
+                <a:endParaRPr lang="en-US" sz="1300" dirty="0"/>
+              </a:p>
+            </p:txBody>
+          </p:sp>
+        </mc:Choice>
+        <mc:Fallback>
+          <p:sp>
+            <p:nvSpPr>
+              <p:cNvPr id="9" name="Text 8">
+                <a:extLst>
+                  <a:ext uri="{FF2B5EF4-FFF2-40B4-BE49-F238E27FC236}">
+                    <a16:creationId xmlns:a16="http://schemas.microsoft.com/office/drawing/2014/main" id="{20F013AD-F929-BC0A-5743-A5947A99B8CF}"/>
+                  </a:ext>
+                </a:extLst>
+              </p:cNvPr>
+              <p:cNvSpPr>
+                <a:spLocks noRot="1" noChangeAspect="1" noMove="1" noResize="1" noEditPoints="1" noAdjustHandles="1" noChangeArrowheads="1" noChangeShapeType="1" noTextEdit="1"/>
+              </p:cNvSpPr>
+              <p:nvPr/>
+            </p:nvSpPr>
+            <p:spPr>
+              <a:xfrm>
+                <a:off x="457199" y="1280160"/>
+                <a:ext cx="6215063" cy="1188720"/>
+              </a:xfrm>
+              <a:prstGeom prst="rect">
+                <a:avLst/>
+              </a:prstGeom>
+              <a:blipFill>
+                <a:blip r:embed="rId3"/>
+                <a:stretch>
+                  <a:fillRect l="-196" t="-1026" b="-165641"/>
+                </a:stretch>
+              </a:blipFill>
+              <a:ln/>
+            </p:spPr>
+            <p:txBody>
+              <a:bodyPr/>
+              <a:lstStyle/>
+              <a:p>
+                <a:r>
+                  <a:rPr lang="it-IT">
+                    <a:noFill/>
+                  </a:rPr>
+                  <a:t> </a:t>
+                </a:r>
+              </a:p>
+            </p:txBody>
+          </p:sp>
+        </mc:Fallback>
+      </mc:AlternateContent>
+      <p:pic>
+        <p:nvPicPr>
+          <p:cNvPr id="6" name="Immagine 5">
+            <a:extLst>
+              <a:ext uri="{FF2B5EF4-FFF2-40B4-BE49-F238E27FC236}">
+                <a16:creationId xmlns:a16="http://schemas.microsoft.com/office/drawing/2014/main" id="{4E32731E-DDDE-5531-F7C6-C0DF9565C96B}"/>
+              </a:ext>
+            </a:extLst>
+          </p:cNvPr>
+          <p:cNvPicPr>
+            <a:picLocks noChangeAspect="1"/>
+          </p:cNvPicPr>
+          <p:nvPr/>
+        </p:nvPicPr>
+        <p:blipFill>
+          <a:blip r:embed="rId4"/>
+          <a:stretch>
+            <a:fillRect/>
+          </a:stretch>
+        </p:blipFill>
+        <p:spPr>
+          <a:xfrm>
+            <a:off x="6102091" y="3460957"/>
+            <a:ext cx="2584709" cy="332233"/>
+          </a:xfrm>
+          <a:prstGeom prst="rect">
+            <a:avLst/>
+          </a:prstGeom>
+        </p:spPr>
+      </p:pic>
+      <p:pic>
+        <p:nvPicPr>
+          <p:cNvPr id="10" name="Immagine 9">
+            <a:extLst>
+              <a:ext uri="{FF2B5EF4-FFF2-40B4-BE49-F238E27FC236}">
+                <a16:creationId xmlns:a16="http://schemas.microsoft.com/office/drawing/2014/main" id="{0DC10423-BDC3-CDC1-6579-474E3A5724A0}"/>
+              </a:ext>
+            </a:extLst>
+          </p:cNvPr>
+          <p:cNvPicPr>
+            <a:picLocks noChangeAspect="1"/>
+          </p:cNvPicPr>
+          <p:nvPr/>
+        </p:nvPicPr>
+        <p:blipFill>
+          <a:blip r:embed="rId5"/>
+          <a:stretch>
+            <a:fillRect/>
+          </a:stretch>
+        </p:blipFill>
+        <p:spPr>
+          <a:xfrm>
+            <a:off x="1922719" y="3296364"/>
+            <a:ext cx="2121412" cy="329185"/>
+          </a:xfrm>
+          <a:prstGeom prst="rect">
+            <a:avLst/>
+          </a:prstGeom>
+        </p:spPr>
+      </p:pic>
+      <p:pic>
+        <p:nvPicPr>
+          <p:cNvPr id="12" name="Immagine 11">
+            <a:extLst>
+              <a:ext uri="{FF2B5EF4-FFF2-40B4-BE49-F238E27FC236}">
+                <a16:creationId xmlns:a16="http://schemas.microsoft.com/office/drawing/2014/main" id="{72798926-5939-D7FC-D9E9-5198BF433C4B}"/>
+              </a:ext>
+            </a:extLst>
+          </p:cNvPr>
+          <p:cNvPicPr>
+            <a:picLocks noChangeAspect="1"/>
+          </p:cNvPicPr>
+          <p:nvPr/>
+        </p:nvPicPr>
+        <p:blipFill>
+          <a:blip r:embed="rId6"/>
+          <a:stretch>
+            <a:fillRect/>
+          </a:stretch>
+        </p:blipFill>
+        <p:spPr>
+          <a:xfrm>
+            <a:off x="5477475" y="2514600"/>
+            <a:ext cx="3742952" cy="332233"/>
+          </a:xfrm>
+          <a:prstGeom prst="rect">
+            <a:avLst/>
+          </a:prstGeom>
+        </p:spPr>
+      </p:pic>
+      <p:pic>
+        <p:nvPicPr>
+          <p:cNvPr id="14" name="Immagine 13">
+            <a:extLst>
+              <a:ext uri="{FF2B5EF4-FFF2-40B4-BE49-F238E27FC236}">
+                <a16:creationId xmlns:a16="http://schemas.microsoft.com/office/drawing/2014/main" id="{C448EB91-789F-B3B5-736B-406379695B33}"/>
+              </a:ext>
+            </a:extLst>
+          </p:cNvPr>
+          <p:cNvPicPr>
+            <a:picLocks noChangeAspect="1"/>
+          </p:cNvPicPr>
+          <p:nvPr/>
+        </p:nvPicPr>
+        <p:blipFill>
+          <a:blip r:embed="rId7"/>
+          <a:stretch>
+            <a:fillRect/>
+          </a:stretch>
+        </p:blipFill>
+        <p:spPr>
+          <a:xfrm>
+            <a:off x="1795049" y="2304105"/>
+            <a:ext cx="2141158" cy="535290"/>
+          </a:xfrm>
+          <a:prstGeom prst="rect">
+            <a:avLst/>
+          </a:prstGeom>
+        </p:spPr>
+      </p:pic>
+    </p:spTree>
+    <p:extLst>
+      <p:ext uri="{BB962C8B-B14F-4D97-AF65-F5344CB8AC3E}">
+        <p14:creationId xmlns:p14="http://schemas.microsoft.com/office/powerpoint/2010/main" val="3678948679"/>
+      </p:ext>
+    </p:extLst>
+  </p:cSld>
+  <p:clrMapOvr>
+    <a:masterClrMapping/>
+  </p:clrMapOvr>
+</p:sld>
+</file>
+
+<file path=ppt/slides/slide7.xml><?xml version="1.0" encoding="utf-8"?>
+<p:sld xmlns:a="http://schemas.openxmlformats.org/drawingml/2006/main" xmlns:r="http://schemas.openxmlformats.org/officeDocument/2006/relationships" xmlns:p="http://schemas.openxmlformats.org/presentationml/2006/main">
+  <p:cSld>
+    <p:spTree>
+      <p:nvGrpSpPr>
+        <p:cNvPr id="1" name="">
+          <a:extLst>
+            <a:ext uri="{FF2B5EF4-FFF2-40B4-BE49-F238E27FC236}">
+              <a16:creationId xmlns:a16="http://schemas.microsoft.com/office/drawing/2014/main" id="{560AAB9E-CDD0-0F57-8B7B-78926446745F}"/>
+            </a:ext>
+          </a:extLst>
+        </p:cNvPr>
+        <p:cNvGrpSpPr/>
+        <p:nvPr/>
+      </p:nvGrpSpPr>
+      <p:grpSpPr>
+        <a:xfrm>
+          <a:off x="0" y="0"/>
+          <a:ext cx="0" cy="0"/>
+          <a:chOff x="0" y="0"/>
+          <a:chExt cx="0" cy="0"/>
+        </a:xfrm>
+      </p:grpSpPr>
+      <p:sp>
+        <p:nvSpPr>
+          <p:cNvPr id="3" name="CasellaDiTesto 2">
+            <a:extLst>
+              <a:ext uri="{FF2B5EF4-FFF2-40B4-BE49-F238E27FC236}">
+                <a16:creationId xmlns:a16="http://schemas.microsoft.com/office/drawing/2014/main" id="{658FAD49-D0CC-A805-9A3D-AA6717AD0B6F}"/>
+              </a:ext>
+            </a:extLst>
+          </p:cNvPr>
+          <p:cNvSpPr txBox="1"/>
+          <p:nvPr/>
+        </p:nvSpPr>
+        <p:spPr>
+          <a:xfrm>
+            <a:off x="508000" y="254000"/>
+            <a:ext cx="8229600" cy="457200"/>
+          </a:xfrm>
+          <a:prstGeom prst="rect">
+            <a:avLst/>
+          </a:prstGeom>
+          <a:noFill/>
+        </p:spPr>
+        <p:txBody>
+          <a:bodyPr vertOverflow="overflow" vert="horz" wrap="square" rtlCol="0" anchor="ctr" anchorCtr="0">
+            <a:noAutofit/>
+          </a:bodyPr>
+          <a:lstStyle/>
+          <a:p>
+            <a:r>
+              <a:rPr lang="en-US" sz="2600" b="1" dirty="0">
+                <a:solidFill>
+                  <a:srgbClr val="1A1A1A"/>
+                </a:solidFill>
+                <a:latin typeface="Calibri" pitchFamily="34" charset="0"/>
+                <a:ea typeface="Calibri" pitchFamily="34" charset="-122"/>
+                <a:cs typeface="Calibri" pitchFamily="34" charset="-120"/>
+              </a:rPr>
+              <a:t>Deep Reinforcement Learning</a:t>
+            </a:r>
+            <a:endParaRPr lang="en-US" sz="2600" dirty="0"/>
+          </a:p>
+        </p:txBody>
+      </p:sp>
+      <p:sp>
+        <p:nvSpPr>
+          <p:cNvPr id="8" name="Text 7">
+            <a:extLst>
+              <a:ext uri="{FF2B5EF4-FFF2-40B4-BE49-F238E27FC236}">
+                <a16:creationId xmlns:a16="http://schemas.microsoft.com/office/drawing/2014/main" id="{718DCC72-96ED-6DEC-7CB8-825054805F74}"/>
+              </a:ext>
+            </a:extLst>
+          </p:cNvPr>
+          <p:cNvSpPr/>
+          <p:nvPr/>
+        </p:nvSpPr>
+        <p:spPr>
+          <a:xfrm>
+            <a:off x="457200" y="960120"/>
+            <a:ext cx="3840480" cy="274320"/>
+          </a:xfrm>
+          <a:prstGeom prst="rect">
+            <a:avLst/>
+          </a:prstGeom>
+          <a:noFill/>
+          <a:ln/>
+        </p:spPr>
+        <p:txBody>
+          <a:bodyPr wrap="square" rtlCol="0" anchor="ctr"/>
+          <a:lstStyle/>
+          <a:p>
+            <a:pPr marL="0" indent="0">
+              <a:buNone/>
+            </a:pPr>
+            <a:r>
+              <a:rPr lang="en-US" b="1" dirty="0">
+                <a:latin typeface="Calibri" pitchFamily="34" charset="0"/>
+                <a:ea typeface="Calibri" pitchFamily="34" charset="-122"/>
+                <a:cs typeface="Calibri" pitchFamily="34" charset="-120"/>
+              </a:rPr>
+              <a:t>Q Learning</a:t>
+            </a:r>
+            <a:endParaRPr lang="en-US" dirty="0"/>
           </a:p>
         </p:txBody>
       </p:sp>
@@ -22498,7 +23876,7 @@
           <p:cNvPr id="9" name="Text 8">
             <a:extLst>
               <a:ext uri="{FF2B5EF4-FFF2-40B4-BE49-F238E27FC236}">
-                <a16:creationId xmlns:a16="http://schemas.microsoft.com/office/drawing/2014/main" id="{20F013AD-F929-BC0A-5743-A5947A99B8CF}"/>
+                <a16:creationId xmlns:a16="http://schemas.microsoft.com/office/drawing/2014/main" id="{2CA31438-CC1F-2DBE-C75E-7DE4E7E15FE9}"/>
               </a:ext>
             </a:extLst>
           </p:cNvPr>
@@ -22507,8 +23885,8 @@
         </p:nvSpPr>
         <p:spPr>
           <a:xfrm>
-            <a:off x="457200" y="1280160"/>
-            <a:ext cx="4457700" cy="1188720"/>
+            <a:off x="457199" y="1280160"/>
+            <a:ext cx="6193631" cy="1188720"/>
           </a:xfrm>
           <a:prstGeom prst="rect">
             <a:avLst/>
@@ -22536,7 +23914,18 @@
                 <a:ea typeface="Calibri" pitchFamily="34" charset="-122"/>
                 <a:cs typeface="Calibri" pitchFamily="34" charset="-120"/>
               </a:rPr>
-              <a:t>Agent observes state s, takes action a, receives reward r</a:t>
+              <a:t>Q-Algorithm allow to iteratively estimate the Q-function </a:t>
+            </a:r>
+            <a:r>
+              <a:rPr lang="en-US" sz="1300">
+                <a:solidFill>
+                  <a:srgbClr val="1A1A1A"/>
+                </a:solidFill>
+                <a:latin typeface="Calibri" pitchFamily="34" charset="0"/>
+                <a:ea typeface="Calibri" pitchFamily="34" charset="-122"/>
+                <a:cs typeface="Calibri" pitchFamily="34" charset="-120"/>
+              </a:rPr>
+              <a:t>from experience </a:t>
             </a:r>
             <a:endParaRPr lang="en-US" sz="1300" dirty="0"/>
           </a:p>
@@ -22584,10 +23973,190 @@
           </a:p>
         </p:txBody>
       </p:sp>
+      <p:pic>
+        <p:nvPicPr>
+          <p:cNvPr id="6" name="Immagine 5">
+            <a:extLst>
+              <a:ext uri="{FF2B5EF4-FFF2-40B4-BE49-F238E27FC236}">
+                <a16:creationId xmlns:a16="http://schemas.microsoft.com/office/drawing/2014/main" id="{13BD7A84-C31E-D5A7-8D30-AA9BC8AF463D}"/>
+              </a:ext>
+            </a:extLst>
+          </p:cNvPr>
+          <p:cNvPicPr>
+            <a:picLocks noChangeAspect="1"/>
+          </p:cNvPicPr>
+          <p:nvPr/>
+        </p:nvPicPr>
+        <p:blipFill>
+          <a:blip r:embed="rId2"/>
+          <a:stretch>
+            <a:fillRect/>
+          </a:stretch>
+        </p:blipFill>
+        <p:spPr>
+          <a:xfrm>
+            <a:off x="5250057" y="3303067"/>
+            <a:ext cx="2584709" cy="332233"/>
+          </a:xfrm>
+          <a:prstGeom prst="rect">
+            <a:avLst/>
+          </a:prstGeom>
+        </p:spPr>
+      </p:pic>
+      <p:pic>
+        <p:nvPicPr>
+          <p:cNvPr id="10" name="Immagine 9">
+            <a:extLst>
+              <a:ext uri="{FF2B5EF4-FFF2-40B4-BE49-F238E27FC236}">
+                <a16:creationId xmlns:a16="http://schemas.microsoft.com/office/drawing/2014/main" id="{D7202D62-A49C-8A36-818B-AC70B2D24983}"/>
+              </a:ext>
+            </a:extLst>
+          </p:cNvPr>
+          <p:cNvPicPr>
+            <a:picLocks noChangeAspect="1"/>
+          </p:cNvPicPr>
+          <p:nvPr/>
+        </p:nvPicPr>
+        <p:blipFill>
+          <a:blip r:embed="rId3"/>
+          <a:stretch>
+            <a:fillRect/>
+          </a:stretch>
+        </p:blipFill>
+        <p:spPr>
+          <a:xfrm>
+            <a:off x="5105400" y="3957783"/>
+            <a:ext cx="2121412" cy="329185"/>
+          </a:xfrm>
+          <a:prstGeom prst="rect">
+            <a:avLst/>
+          </a:prstGeom>
+        </p:spPr>
+      </p:pic>
+      <p:pic>
+        <p:nvPicPr>
+          <p:cNvPr id="12" name="Immagine 11">
+            <a:extLst>
+              <a:ext uri="{FF2B5EF4-FFF2-40B4-BE49-F238E27FC236}">
+                <a16:creationId xmlns:a16="http://schemas.microsoft.com/office/drawing/2014/main" id="{2D8C3D5B-7436-BAE8-AE31-166E0D4867D7}"/>
+              </a:ext>
+            </a:extLst>
+          </p:cNvPr>
+          <p:cNvPicPr>
+            <a:picLocks noChangeAspect="1"/>
+          </p:cNvPicPr>
+          <p:nvPr/>
+        </p:nvPicPr>
+        <p:blipFill>
+          <a:blip r:embed="rId4"/>
+          <a:stretch>
+            <a:fillRect/>
+          </a:stretch>
+        </p:blipFill>
+        <p:spPr>
+          <a:xfrm>
+            <a:off x="4431770" y="2763520"/>
+            <a:ext cx="3742952" cy="332233"/>
+          </a:xfrm>
+          <a:prstGeom prst="rect">
+            <a:avLst/>
+          </a:prstGeom>
+        </p:spPr>
+      </p:pic>
+      <p:pic>
+        <p:nvPicPr>
+          <p:cNvPr id="14" name="Immagine 13">
+            <a:extLst>
+              <a:ext uri="{FF2B5EF4-FFF2-40B4-BE49-F238E27FC236}">
+                <a16:creationId xmlns:a16="http://schemas.microsoft.com/office/drawing/2014/main" id="{3B342072-8897-4293-CDCE-A4256A01EEB3}"/>
+              </a:ext>
+            </a:extLst>
+          </p:cNvPr>
+          <p:cNvPicPr>
+            <a:picLocks noChangeAspect="1"/>
+          </p:cNvPicPr>
+          <p:nvPr/>
+        </p:nvPicPr>
+        <p:blipFill>
+          <a:blip r:embed="rId5"/>
+          <a:stretch>
+            <a:fillRect/>
+          </a:stretch>
+        </p:blipFill>
+        <p:spPr>
+          <a:xfrm>
+            <a:off x="5602205" y="2320893"/>
+            <a:ext cx="1402083" cy="350521"/>
+          </a:xfrm>
+          <a:prstGeom prst="rect">
+            <a:avLst/>
+          </a:prstGeom>
+        </p:spPr>
+      </p:pic>
+      <p:pic>
+        <p:nvPicPr>
+          <p:cNvPr id="16" name="Immagine 15">
+            <a:extLst>
+              <a:ext uri="{FF2B5EF4-FFF2-40B4-BE49-F238E27FC236}">
+                <a16:creationId xmlns:a16="http://schemas.microsoft.com/office/drawing/2014/main" id="{38437B19-2201-552E-3177-C28E8154419F}"/>
+              </a:ext>
+            </a:extLst>
+          </p:cNvPr>
+          <p:cNvPicPr>
+            <a:picLocks noChangeAspect="1"/>
+          </p:cNvPicPr>
+          <p:nvPr/>
+        </p:nvPicPr>
+        <p:blipFill>
+          <a:blip r:embed="rId6"/>
+          <a:stretch>
+            <a:fillRect/>
+          </a:stretch>
+        </p:blipFill>
+        <p:spPr>
+          <a:xfrm>
+            <a:off x="2609396" y="2541225"/>
+            <a:ext cx="6334125" cy="1581150"/>
+          </a:xfrm>
+          <a:prstGeom prst="rect">
+            <a:avLst/>
+          </a:prstGeom>
+        </p:spPr>
+      </p:pic>
+      <p:pic>
+        <p:nvPicPr>
+          <p:cNvPr id="18" name="Immagine 17">
+            <a:extLst>
+              <a:ext uri="{FF2B5EF4-FFF2-40B4-BE49-F238E27FC236}">
+                <a16:creationId xmlns:a16="http://schemas.microsoft.com/office/drawing/2014/main" id="{3D30F77C-FF6D-4D81-8AA7-EAF0025AB446}"/>
+              </a:ext>
+            </a:extLst>
+          </p:cNvPr>
+          <p:cNvPicPr>
+            <a:picLocks noChangeAspect="1"/>
+          </p:cNvPicPr>
+          <p:nvPr/>
+        </p:nvPicPr>
+        <p:blipFill>
+          <a:blip r:embed="rId7"/>
+          <a:stretch>
+            <a:fillRect/>
+          </a:stretch>
+        </p:blipFill>
+        <p:spPr>
+          <a:xfrm>
+            <a:off x="2435142" y="3075715"/>
+            <a:ext cx="6334125" cy="1581150"/>
+          </a:xfrm>
+          <a:prstGeom prst="rect">
+            <a:avLst/>
+          </a:prstGeom>
+        </p:spPr>
+      </p:pic>
     </p:spTree>
     <p:extLst>
       <p:ext uri="{BB962C8B-B14F-4D97-AF65-F5344CB8AC3E}">
-        <p14:creationId xmlns:p14="http://schemas.microsoft.com/office/powerpoint/2010/main" val="3678948679"/>
+        <p14:creationId xmlns:p14="http://schemas.microsoft.com/office/powerpoint/2010/main" val="753975016"/>
       </p:ext>
     </p:extLst>
   </p:cSld>
@@ -22597,7 +24166,7 @@
 </p:sld>
 </file>
 
-<file path=ppt/slides/slide7.xml><?xml version="1.0" encoding="utf-8"?>
+<file path=ppt/slides/slide8.xml><?xml version="1.0" encoding="utf-8"?>
 <p:sld xmlns:a="http://schemas.openxmlformats.org/drawingml/2006/main" xmlns:r="http://schemas.openxmlformats.org/officeDocument/2006/relationships" xmlns:p="http://schemas.openxmlformats.org/presentationml/2006/main">
   <p:cSld>
     <p:spTree>
@@ -22796,7 +24365,7 @@
 </p:sld>
 </file>
 
-<file path=ppt/slides/slide8.xml><?xml version="1.0" encoding="utf-8"?>
+<file path=ppt/slides/slide9.xml><?xml version="1.0" encoding="utf-8"?>
 <p:sld xmlns:a="http://schemas.openxmlformats.org/drawingml/2006/main" xmlns:r="http://schemas.openxmlformats.org/officeDocument/2006/relationships" xmlns:p="http://schemas.openxmlformats.org/presentationml/2006/main">
   <p:cSld>
     <p:spTree>
@@ -23355,342 +24924,6 @@
         </p:style>
       </p:cxnSp>
     </p:spTree>
-  </p:cSld>
-  <p:clrMapOvr>
-    <a:masterClrMapping/>
-  </p:clrMapOvr>
-</p:sld>
-</file>
-
-<file path=ppt/slides/slide9.xml><?xml version="1.0" encoding="utf-8"?>
-<p:sld xmlns:a="http://schemas.openxmlformats.org/drawingml/2006/main" xmlns:r="http://schemas.openxmlformats.org/officeDocument/2006/relationships" xmlns:p="http://schemas.openxmlformats.org/presentationml/2006/main">
-  <p:cSld>
-    <p:spTree>
-      <p:nvGrpSpPr>
-        <p:cNvPr id="1" name=""/>
-        <p:cNvGrpSpPr/>
-        <p:nvPr/>
-      </p:nvGrpSpPr>
-      <p:grpSpPr>
-        <a:xfrm>
-          <a:off x="0" y="0"/>
-          <a:ext cx="0" cy="0"/>
-          <a:chOff x="0" y="0"/>
-          <a:chExt cx="0" cy="0"/>
-        </a:xfrm>
-      </p:grpSpPr>
-      <p:sp>
-        <p:nvSpPr>
-          <p:cNvPr id="3" name="CasellaDiTesto 2">
-            <a:extLst>
-              <a:ext uri="{FF2B5EF4-FFF2-40B4-BE49-F238E27FC236}">
-                <a16:creationId xmlns:a16="http://schemas.microsoft.com/office/drawing/2014/main" id="{A2573F97-AE10-444A-9306-BFF3D7DCA88C}"/>
-              </a:ext>
-            </a:extLst>
-          </p:cNvPr>
-          <p:cNvSpPr txBox="1"/>
-          <p:nvPr/>
-        </p:nvSpPr>
-        <p:spPr>
-          <a:xfrm>
-            <a:off x="508000" y="254000"/>
-            <a:ext cx="8229600" cy="457200"/>
-          </a:xfrm>
-          <a:prstGeom prst="rect">
-            <a:avLst/>
-          </a:prstGeom>
-          <a:noFill/>
-        </p:spPr>
-        <p:txBody>
-          <a:bodyPr vertOverflow="overflow" vert="horz" wrap="square" rtlCol="0" anchor="ctr" anchorCtr="0">
-            <a:noAutofit/>
-          </a:bodyPr>
-          <a:lstStyle/>
-          <a:p>
-            <a:pPr algn="l"/>
-            <a:r>
-              <a:rPr lang="it-IT" sz="2600" b="1" dirty="0">
-                <a:solidFill>
-                  <a:srgbClr val="1A1A1A"/>
-                </a:solidFill>
-                <a:latin typeface="Calibri"/>
-                <a:ea typeface="Calibri"/>
-                <a:cs typeface="Calibri"/>
-              </a:rPr>
-              <a:t>The Simulator</a:t>
-            </a:r>
-          </a:p>
-        </p:txBody>
-      </p:sp>
-      <p:sp>
-        <p:nvSpPr>
-          <p:cNvPr id="4" name="Text 5">
-            <a:extLst>
-              <a:ext uri="{FF2B5EF4-FFF2-40B4-BE49-F238E27FC236}">
-                <a16:creationId xmlns:a16="http://schemas.microsoft.com/office/drawing/2014/main" id="{091A1769-B9E0-690D-90A7-0369076A82EE}"/>
-              </a:ext>
-            </a:extLst>
-          </p:cNvPr>
-          <p:cNvSpPr/>
-          <p:nvPr/>
-        </p:nvSpPr>
-        <p:spPr>
-          <a:xfrm>
-            <a:off x="370840" y="1364341"/>
-            <a:ext cx="4251960" cy="3474720"/>
-          </a:xfrm>
-          <a:prstGeom prst="rect">
-            <a:avLst/>
-          </a:prstGeom>
-          <a:noFill/>
-          <a:ln/>
-        </p:spPr>
-        <p:txBody>
-          <a:bodyPr wrap="square" rtlCol="0" anchor="t"/>
-          <a:lstStyle/>
-          <a:p>
-            <a:pPr marL="190500" indent="-190500">
-              <a:spcAft>
-                <a:spcPts val="500"/>
-              </a:spcAft>
-              <a:buSzPct val="100000"/>
-              <a:buChar char="•"/>
-            </a:pPr>
-            <a:r>
-              <a:rPr lang="en-US" sz="1400" dirty="0">
-                <a:solidFill>
-                  <a:srgbClr val="1A1A1A"/>
-                </a:solidFill>
-                <a:latin typeface="Calibri" pitchFamily="34" charset="0"/>
-                <a:ea typeface="Calibri" pitchFamily="34" charset="-122"/>
-                <a:cs typeface="Calibri" pitchFamily="34" charset="-120"/>
-              </a:rPr>
-              <a:t>Partially observable discrete map</a:t>
-            </a:r>
-            <a:endParaRPr lang="en-US" sz="1400" dirty="0"/>
-          </a:p>
-          <a:p>
-            <a:pPr marL="190500" indent="-190500">
-              <a:spcAft>
-                <a:spcPts val="500"/>
-              </a:spcAft>
-              <a:buSzPct val="100000"/>
-              <a:buChar char="•"/>
-            </a:pPr>
-            <a:r>
-              <a:rPr lang="en-US" sz="1400" dirty="0">
-                <a:solidFill>
-                  <a:srgbClr val="1A1A1A"/>
-                </a:solidFill>
-                <a:latin typeface="Calibri" pitchFamily="34" charset="0"/>
-                <a:ea typeface="Calibri" pitchFamily="34" charset="-122"/>
-                <a:cs typeface="Calibri" pitchFamily="34" charset="-120"/>
-              </a:rPr>
-              <a:t>Static maps with </a:t>
-            </a:r>
-            <a:r>
-              <a:rPr lang="en-US" sz="1400" b="1" dirty="0">
-                <a:solidFill>
-                  <a:srgbClr val="1A1A1A"/>
-                </a:solidFill>
-                <a:latin typeface="Calibri" pitchFamily="34" charset="0"/>
-                <a:ea typeface="Calibri" pitchFamily="34" charset="-122"/>
-                <a:cs typeface="Calibri" pitchFamily="34" charset="-120"/>
-              </a:rPr>
-              <a:t>random obstacle </a:t>
-            </a:r>
-            <a:r>
-              <a:rPr lang="en-US" sz="1400" dirty="0">
-                <a:solidFill>
-                  <a:srgbClr val="1A1A1A"/>
-                </a:solidFill>
-                <a:latin typeface="Calibri" pitchFamily="34" charset="0"/>
-                <a:ea typeface="Calibri" pitchFamily="34" charset="-122"/>
-                <a:cs typeface="Calibri" pitchFamily="34" charset="-120"/>
-              </a:rPr>
-              <a:t>placement</a:t>
-            </a:r>
-            <a:endParaRPr lang="en-US" sz="1400" dirty="0"/>
-          </a:p>
-          <a:p>
-            <a:pPr marL="190500" indent="-190500">
-              <a:spcAft>
-                <a:spcPts val="500"/>
-              </a:spcAft>
-              <a:buSzPct val="100000"/>
-              <a:buChar char="•"/>
-            </a:pPr>
-            <a:r>
-              <a:rPr lang="en-US" sz="1400" dirty="0">
-                <a:solidFill>
-                  <a:srgbClr val="1A1A1A"/>
-                </a:solidFill>
-                <a:latin typeface="Calibri" pitchFamily="34" charset="0"/>
-                <a:ea typeface="Calibri" pitchFamily="34" charset="-122"/>
-                <a:cs typeface="Calibri" pitchFamily="34" charset="-120"/>
-              </a:rPr>
-              <a:t>Agent observes a local window within his </a:t>
-            </a:r>
-            <a:r>
-              <a:rPr lang="en-US" sz="1400" b="1" dirty="0">
-                <a:solidFill>
-                  <a:srgbClr val="1A1A1A"/>
-                </a:solidFill>
-                <a:latin typeface="Calibri" pitchFamily="34" charset="0"/>
-                <a:ea typeface="Calibri" pitchFamily="34" charset="-122"/>
-                <a:cs typeface="Calibri" pitchFamily="34" charset="-120"/>
-              </a:rPr>
-              <a:t>perception range</a:t>
-            </a:r>
-            <a:endParaRPr lang="en-US" sz="1400" b="1" dirty="0"/>
-          </a:p>
-          <a:p>
-            <a:pPr marL="190500" indent="-190500">
-              <a:spcAft>
-                <a:spcPts val="500"/>
-              </a:spcAft>
-              <a:buSzPct val="100000"/>
-              <a:buChar char="•"/>
-            </a:pPr>
-            <a:r>
-              <a:rPr lang="en-US" sz="1400" dirty="0">
-                <a:solidFill>
-                  <a:srgbClr val="1A1A1A"/>
-                </a:solidFill>
-                <a:latin typeface="Calibri" pitchFamily="34" charset="0"/>
-                <a:ea typeface="Calibri" pitchFamily="34" charset="-122"/>
-                <a:cs typeface="Calibri" pitchFamily="34" charset="-120"/>
-              </a:rPr>
-              <a:t>Sequential observations are used to build a </a:t>
-            </a:r>
-            <a:r>
-              <a:rPr lang="en-US" sz="1400" b="1" dirty="0">
-                <a:solidFill>
-                  <a:srgbClr val="1A1A1A"/>
-                </a:solidFill>
-                <a:latin typeface="Calibri" pitchFamily="34" charset="0"/>
-                <a:ea typeface="Calibri" pitchFamily="34" charset="-122"/>
-                <a:cs typeface="Calibri" pitchFamily="34" charset="-120"/>
-              </a:rPr>
-              <a:t>believes map</a:t>
-            </a:r>
-            <a:endParaRPr lang="en-US" sz="1400" b="1" dirty="0"/>
-          </a:p>
-        </p:txBody>
-      </p:sp>
-      <p:pic>
-        <p:nvPicPr>
-          <p:cNvPr id="8" name="Immagine 7">
-            <a:extLst>
-              <a:ext uri="{FF2B5EF4-FFF2-40B4-BE49-F238E27FC236}">
-                <a16:creationId xmlns:a16="http://schemas.microsoft.com/office/drawing/2014/main" id="{340497A2-ABCE-D9C0-95B2-62483D5DA1FB}"/>
-              </a:ext>
-            </a:extLst>
-          </p:cNvPr>
-          <p:cNvPicPr>
-            <a:picLocks noChangeAspect="1"/>
-          </p:cNvPicPr>
-          <p:nvPr/>
-        </p:nvPicPr>
-        <p:blipFill>
-          <a:blip r:embed="rId2"/>
-          <a:stretch>
-            <a:fillRect/>
-          </a:stretch>
-        </p:blipFill>
-        <p:spPr>
-          <a:xfrm>
-            <a:off x="5285092" y="1085967"/>
-            <a:ext cx="3278333" cy="1565794"/>
-          </a:xfrm>
-          <a:prstGeom prst="rect">
-            <a:avLst/>
-          </a:prstGeom>
-        </p:spPr>
-      </p:pic>
-      <p:pic>
-        <p:nvPicPr>
-          <p:cNvPr id="10" name="Immagine 9">
-            <a:extLst>
-              <a:ext uri="{FF2B5EF4-FFF2-40B4-BE49-F238E27FC236}">
-                <a16:creationId xmlns:a16="http://schemas.microsoft.com/office/drawing/2014/main" id="{8F715845-B525-3552-E815-E5F6C2D4DCB8}"/>
-              </a:ext>
-            </a:extLst>
-          </p:cNvPr>
-          <p:cNvPicPr>
-            <a:picLocks noChangeAspect="1"/>
-          </p:cNvPicPr>
-          <p:nvPr/>
-        </p:nvPicPr>
-        <p:blipFill>
-          <a:blip r:embed="rId3"/>
-          <a:stretch>
-            <a:fillRect/>
-          </a:stretch>
-        </p:blipFill>
-        <p:spPr>
-          <a:xfrm>
-            <a:off x="3149600" y="3040282"/>
-            <a:ext cx="5465652" cy="1595007"/>
-          </a:xfrm>
-          <a:prstGeom prst="rect">
-            <a:avLst/>
-          </a:prstGeom>
-        </p:spPr>
-      </p:pic>
-      <p:sp>
-        <p:nvSpPr>
-          <p:cNvPr id="11" name="Text 5">
-            <a:extLst>
-              <a:ext uri="{FF2B5EF4-FFF2-40B4-BE49-F238E27FC236}">
-                <a16:creationId xmlns:a16="http://schemas.microsoft.com/office/drawing/2014/main" id="{5A32195A-73EF-D939-B137-3D52DB558EEB}"/>
-              </a:ext>
-            </a:extLst>
-          </p:cNvPr>
-          <p:cNvSpPr/>
-          <p:nvPr/>
-        </p:nvSpPr>
-        <p:spPr>
-          <a:xfrm>
-            <a:off x="370840" y="915257"/>
-            <a:ext cx="4251960" cy="457200"/>
-          </a:xfrm>
-          <a:prstGeom prst="rect">
-            <a:avLst/>
-          </a:prstGeom>
-          <a:noFill/>
-          <a:ln/>
-        </p:spPr>
-        <p:txBody>
-          <a:bodyPr wrap="square" rtlCol="0" anchor="t"/>
-          <a:lstStyle/>
-          <a:p>
-            <a:pPr>
-              <a:spcAft>
-                <a:spcPts val="500"/>
-              </a:spcAft>
-              <a:buSzPct val="100000"/>
-            </a:pPr>
-            <a:r>
-              <a:rPr lang="en-US" dirty="0">
-                <a:solidFill>
-                  <a:srgbClr val="1A1A1A"/>
-                </a:solidFill>
-                <a:latin typeface="Calibri" pitchFamily="34" charset="0"/>
-                <a:ea typeface="Calibri" pitchFamily="34" charset="-122"/>
-                <a:cs typeface="Calibri" pitchFamily="34" charset="-120"/>
-              </a:rPr>
-              <a:t>The environment – 2D occupancy grid</a:t>
-            </a:r>
-          </a:p>
-        </p:txBody>
-      </p:sp>
-    </p:spTree>
-    <p:extLst>
-      <p:ext uri="{BB962C8B-B14F-4D97-AF65-F5344CB8AC3E}">
-        <p14:creationId xmlns:p14="http://schemas.microsoft.com/office/powerpoint/2010/main" val="1959701455"/>
-      </p:ext>
-    </p:extLst>
   </p:cSld>
   <p:clrMapOvr>
     <a:masterClrMapping/>
